--- a/docs/assets/infographic-seed-gallery.pptx
+++ b/docs/assets/infographic-seed-gallery.pptx
@@ -129,7 +129,7 @@
           <p:cNvPr id="2" name="제목 1">
             <a:extLst>
               <a:ext uri="{FF2B5EF4-FFF2-40B4-BE49-F238E27FC236}">
-                <a16:creationId xmlns:a16="http://schemas.microsoft.com/office/drawing/2014/main" id="{7A1E40C8-95D5-E37A-AAE4-A5DC461E48CD}"/>
+                <a16:creationId xmlns:a16="http://schemas.microsoft.com/office/drawing/2014/main" id="{AFC9275B-E053-C8AE-5CD4-405DFEECBB15}"/>
               </a:ext>
             </a:extLst>
           </p:cNvPr>
@@ -166,7 +166,7 @@
           <p:cNvPr id="3" name="부제목 2">
             <a:extLst>
               <a:ext uri="{FF2B5EF4-FFF2-40B4-BE49-F238E27FC236}">
-                <a16:creationId xmlns:a16="http://schemas.microsoft.com/office/drawing/2014/main" id="{F8608E62-6699-5D1E-543B-E2E9B07C2FA6}"/>
+                <a16:creationId xmlns:a16="http://schemas.microsoft.com/office/drawing/2014/main" id="{87E3C6B0-B908-B4E9-C337-1990D41CD154}"/>
               </a:ext>
             </a:extLst>
           </p:cNvPr>
@@ -236,7 +236,7 @@
           <p:cNvPr id="4" name="날짜 개체 틀 3">
             <a:extLst>
               <a:ext uri="{FF2B5EF4-FFF2-40B4-BE49-F238E27FC236}">
-                <a16:creationId xmlns:a16="http://schemas.microsoft.com/office/drawing/2014/main" id="{8160D882-BF0B-31AC-5944-E69FA304E459}"/>
+                <a16:creationId xmlns:a16="http://schemas.microsoft.com/office/drawing/2014/main" id="{1BD14F70-4CA9-CA47-19DF-895FB64669A2}"/>
               </a:ext>
             </a:extLst>
           </p:cNvPr>
@@ -252,7 +252,7 @@
           <a:bodyPr/>
           <a:lstStyle/>
           <a:p>
-            <a:fld id="{889E8D29-9AC6-4AA8-860A-C9485B2EE338}" type="datetimeFigureOut">
+            <a:fld id="{37A6BA30-5587-4442-AF77-A7B435B4C7C8}" type="datetimeFigureOut">
               <a:rPr lang="ko-KR" altLang="en-US" smtClean="0"/>
               <a:t>2026-06-19</a:t>
             </a:fld>
@@ -265,7 +265,7 @@
           <p:cNvPr id="5" name="바닥글 개체 틀 4">
             <a:extLst>
               <a:ext uri="{FF2B5EF4-FFF2-40B4-BE49-F238E27FC236}">
-                <a16:creationId xmlns:a16="http://schemas.microsoft.com/office/drawing/2014/main" id="{A5EB3755-3104-DE56-B3E0-B7D76079DB23}"/>
+                <a16:creationId xmlns:a16="http://schemas.microsoft.com/office/drawing/2014/main" id="{47680386-C879-CDE1-BE2F-B3626D4E23FD}"/>
               </a:ext>
             </a:extLst>
           </p:cNvPr>
@@ -290,7 +290,7 @@
           <p:cNvPr id="6" name="슬라이드 번호 개체 틀 5">
             <a:extLst>
               <a:ext uri="{FF2B5EF4-FFF2-40B4-BE49-F238E27FC236}">
-                <a16:creationId xmlns:a16="http://schemas.microsoft.com/office/drawing/2014/main" id="{5DBD65A4-B56A-0C79-F3D8-5B7211EF0D91}"/>
+                <a16:creationId xmlns:a16="http://schemas.microsoft.com/office/drawing/2014/main" id="{46D18647-E3FE-01AA-F35C-9D6AAC75C6B2}"/>
               </a:ext>
             </a:extLst>
           </p:cNvPr>
@@ -306,7 +306,7 @@
           <a:bodyPr/>
           <a:lstStyle/>
           <a:p>
-            <a:fld id="{E2A9101B-4DE9-41B7-92B7-E017EA92F55E}" type="slidenum">
+            <a:fld id="{D1DEAAE1-9523-4F91-9AA1-FE659F1DC52B}" type="slidenum">
               <a:rPr lang="ko-KR" altLang="en-US" smtClean="0"/>
               <a:t>‹#›</a:t>
             </a:fld>
@@ -317,7 +317,7 @@
     </p:spTree>
     <p:extLst>
       <p:ext uri="{BB962C8B-B14F-4D97-AF65-F5344CB8AC3E}">
-        <p14:creationId xmlns:p14="http://schemas.microsoft.com/office/powerpoint/2010/main" val="1741740731"/>
+        <p14:creationId xmlns:p14="http://schemas.microsoft.com/office/powerpoint/2010/main" val="2658028390"/>
       </p:ext>
     </p:extLst>
   </p:cSld>
@@ -349,7 +349,7 @@
           <p:cNvPr id="2" name="제목 1">
             <a:extLst>
               <a:ext uri="{FF2B5EF4-FFF2-40B4-BE49-F238E27FC236}">
-                <a16:creationId xmlns:a16="http://schemas.microsoft.com/office/drawing/2014/main" id="{DE007B13-531F-2DA0-0E99-22FAEBBB1C67}"/>
+                <a16:creationId xmlns:a16="http://schemas.microsoft.com/office/drawing/2014/main" id="{53CCBA7B-E095-E088-663A-E54EF243BF39}"/>
               </a:ext>
             </a:extLst>
           </p:cNvPr>
@@ -377,7 +377,7 @@
           <p:cNvPr id="3" name="세로 텍스트 개체 틀 2">
             <a:extLst>
               <a:ext uri="{FF2B5EF4-FFF2-40B4-BE49-F238E27FC236}">
-                <a16:creationId xmlns:a16="http://schemas.microsoft.com/office/drawing/2014/main" id="{607A88CE-CBFF-2207-FBBE-6B3F1DA861EE}"/>
+                <a16:creationId xmlns:a16="http://schemas.microsoft.com/office/drawing/2014/main" id="{266B73D9-2A24-494E-7CB9-A1FBEC6BAE49}"/>
               </a:ext>
             </a:extLst>
           </p:cNvPr>
@@ -434,7 +434,7 @@
           <p:cNvPr id="4" name="날짜 개체 틀 3">
             <a:extLst>
               <a:ext uri="{FF2B5EF4-FFF2-40B4-BE49-F238E27FC236}">
-                <a16:creationId xmlns:a16="http://schemas.microsoft.com/office/drawing/2014/main" id="{B4A78223-8AE0-95DF-8BAF-7F493090DE45}"/>
+                <a16:creationId xmlns:a16="http://schemas.microsoft.com/office/drawing/2014/main" id="{8ED0663D-E578-43D3-E2AD-5D4C4C1E01AD}"/>
               </a:ext>
             </a:extLst>
           </p:cNvPr>
@@ -450,7 +450,7 @@
           <a:bodyPr/>
           <a:lstStyle/>
           <a:p>
-            <a:fld id="{889E8D29-9AC6-4AA8-860A-C9485B2EE338}" type="datetimeFigureOut">
+            <a:fld id="{37A6BA30-5587-4442-AF77-A7B435B4C7C8}" type="datetimeFigureOut">
               <a:rPr lang="ko-KR" altLang="en-US" smtClean="0"/>
               <a:t>2026-06-19</a:t>
             </a:fld>
@@ -463,7 +463,7 @@
           <p:cNvPr id="5" name="바닥글 개체 틀 4">
             <a:extLst>
               <a:ext uri="{FF2B5EF4-FFF2-40B4-BE49-F238E27FC236}">
-                <a16:creationId xmlns:a16="http://schemas.microsoft.com/office/drawing/2014/main" id="{C75391FA-E273-D5D6-7AC1-A9A19E89A936}"/>
+                <a16:creationId xmlns:a16="http://schemas.microsoft.com/office/drawing/2014/main" id="{CB9CEC0A-652D-3B0C-BAF0-4297569131D0}"/>
               </a:ext>
             </a:extLst>
           </p:cNvPr>
@@ -488,7 +488,7 @@
           <p:cNvPr id="6" name="슬라이드 번호 개체 틀 5">
             <a:extLst>
               <a:ext uri="{FF2B5EF4-FFF2-40B4-BE49-F238E27FC236}">
-                <a16:creationId xmlns:a16="http://schemas.microsoft.com/office/drawing/2014/main" id="{7103CAE8-C4E9-4C25-97DA-65A8389FA489}"/>
+                <a16:creationId xmlns:a16="http://schemas.microsoft.com/office/drawing/2014/main" id="{AB7F0FB3-6A06-F1FF-197E-BC9BC08C42D9}"/>
               </a:ext>
             </a:extLst>
           </p:cNvPr>
@@ -504,7 +504,7 @@
           <a:bodyPr/>
           <a:lstStyle/>
           <a:p>
-            <a:fld id="{E2A9101B-4DE9-41B7-92B7-E017EA92F55E}" type="slidenum">
+            <a:fld id="{D1DEAAE1-9523-4F91-9AA1-FE659F1DC52B}" type="slidenum">
               <a:rPr lang="ko-KR" altLang="en-US" smtClean="0"/>
               <a:t>‹#›</a:t>
             </a:fld>
@@ -515,7 +515,7 @@
     </p:spTree>
     <p:extLst>
       <p:ext uri="{BB962C8B-B14F-4D97-AF65-F5344CB8AC3E}">
-        <p14:creationId xmlns:p14="http://schemas.microsoft.com/office/powerpoint/2010/main" val="2271292195"/>
+        <p14:creationId xmlns:p14="http://schemas.microsoft.com/office/powerpoint/2010/main" val="2360600143"/>
       </p:ext>
     </p:extLst>
   </p:cSld>
@@ -547,7 +547,7 @@
           <p:cNvPr id="2" name="세로 제목 1">
             <a:extLst>
               <a:ext uri="{FF2B5EF4-FFF2-40B4-BE49-F238E27FC236}">
-                <a16:creationId xmlns:a16="http://schemas.microsoft.com/office/drawing/2014/main" id="{3FC74CD6-E576-701A-E3FA-D7369BC2D9E1}"/>
+                <a16:creationId xmlns:a16="http://schemas.microsoft.com/office/drawing/2014/main" id="{BD948238-7B16-F32A-32D1-90033B4F3477}"/>
               </a:ext>
             </a:extLst>
           </p:cNvPr>
@@ -580,7 +580,7 @@
           <p:cNvPr id="3" name="세로 텍스트 개체 틀 2">
             <a:extLst>
               <a:ext uri="{FF2B5EF4-FFF2-40B4-BE49-F238E27FC236}">
-                <a16:creationId xmlns:a16="http://schemas.microsoft.com/office/drawing/2014/main" id="{919CAA6A-C198-254A-51A0-7080A0F174D9}"/>
+                <a16:creationId xmlns:a16="http://schemas.microsoft.com/office/drawing/2014/main" id="{72E3D09B-9C5C-A842-0B39-5060D9BB9D2C}"/>
               </a:ext>
             </a:extLst>
           </p:cNvPr>
@@ -642,7 +642,7 @@
           <p:cNvPr id="4" name="날짜 개체 틀 3">
             <a:extLst>
               <a:ext uri="{FF2B5EF4-FFF2-40B4-BE49-F238E27FC236}">
-                <a16:creationId xmlns:a16="http://schemas.microsoft.com/office/drawing/2014/main" id="{6C38D827-C5AD-98BB-FA0E-ED060A32E649}"/>
+                <a16:creationId xmlns:a16="http://schemas.microsoft.com/office/drawing/2014/main" id="{6709CBEC-CBB1-3ABB-847D-545D5398C28D}"/>
               </a:ext>
             </a:extLst>
           </p:cNvPr>
@@ -658,7 +658,7 @@
           <a:bodyPr/>
           <a:lstStyle/>
           <a:p>
-            <a:fld id="{889E8D29-9AC6-4AA8-860A-C9485B2EE338}" type="datetimeFigureOut">
+            <a:fld id="{37A6BA30-5587-4442-AF77-A7B435B4C7C8}" type="datetimeFigureOut">
               <a:rPr lang="ko-KR" altLang="en-US" smtClean="0"/>
               <a:t>2026-06-19</a:t>
             </a:fld>
@@ -671,7 +671,7 @@
           <p:cNvPr id="5" name="바닥글 개체 틀 4">
             <a:extLst>
               <a:ext uri="{FF2B5EF4-FFF2-40B4-BE49-F238E27FC236}">
-                <a16:creationId xmlns:a16="http://schemas.microsoft.com/office/drawing/2014/main" id="{0847B3D0-6142-CC0F-C8AE-86CE9F508D57}"/>
+                <a16:creationId xmlns:a16="http://schemas.microsoft.com/office/drawing/2014/main" id="{20D4665C-0207-75A2-0883-3B395B15F32C}"/>
               </a:ext>
             </a:extLst>
           </p:cNvPr>
@@ -696,7 +696,7 @@
           <p:cNvPr id="6" name="슬라이드 번호 개체 틀 5">
             <a:extLst>
               <a:ext uri="{FF2B5EF4-FFF2-40B4-BE49-F238E27FC236}">
-                <a16:creationId xmlns:a16="http://schemas.microsoft.com/office/drawing/2014/main" id="{F38CBB86-BD67-9BFA-698F-214E450604D1}"/>
+                <a16:creationId xmlns:a16="http://schemas.microsoft.com/office/drawing/2014/main" id="{6B5FFA6C-E561-F45E-8EF4-445AA3ABD9E6}"/>
               </a:ext>
             </a:extLst>
           </p:cNvPr>
@@ -712,7 +712,7 @@
           <a:bodyPr/>
           <a:lstStyle/>
           <a:p>
-            <a:fld id="{E2A9101B-4DE9-41B7-92B7-E017EA92F55E}" type="slidenum">
+            <a:fld id="{D1DEAAE1-9523-4F91-9AA1-FE659F1DC52B}" type="slidenum">
               <a:rPr lang="ko-KR" altLang="en-US" smtClean="0"/>
               <a:t>‹#›</a:t>
             </a:fld>
@@ -723,7 +723,7 @@
     </p:spTree>
     <p:extLst>
       <p:ext uri="{BB962C8B-B14F-4D97-AF65-F5344CB8AC3E}">
-        <p14:creationId xmlns:p14="http://schemas.microsoft.com/office/powerpoint/2010/main" val="3993447618"/>
+        <p14:creationId xmlns:p14="http://schemas.microsoft.com/office/powerpoint/2010/main" val="3997767716"/>
       </p:ext>
     </p:extLst>
   </p:cSld>
@@ -755,7 +755,7 @@
           <p:cNvPr id="2" name="제목 1">
             <a:extLst>
               <a:ext uri="{FF2B5EF4-FFF2-40B4-BE49-F238E27FC236}">
-                <a16:creationId xmlns:a16="http://schemas.microsoft.com/office/drawing/2014/main" id="{D1207B58-1A7E-FAD4-E894-11A19911D80A}"/>
+                <a16:creationId xmlns:a16="http://schemas.microsoft.com/office/drawing/2014/main" id="{5A734291-DC03-9D00-C1B5-5FFBF18013E4}"/>
               </a:ext>
             </a:extLst>
           </p:cNvPr>
@@ -783,7 +783,7 @@
           <p:cNvPr id="3" name="내용 개체 틀 2">
             <a:extLst>
               <a:ext uri="{FF2B5EF4-FFF2-40B4-BE49-F238E27FC236}">
-                <a16:creationId xmlns:a16="http://schemas.microsoft.com/office/drawing/2014/main" id="{BA18FCD5-C86E-FC70-637F-D8C263682BBD}"/>
+                <a16:creationId xmlns:a16="http://schemas.microsoft.com/office/drawing/2014/main" id="{F10DF0FD-CDCA-F54B-B44B-619EEFE52DDD}"/>
               </a:ext>
             </a:extLst>
           </p:cNvPr>
@@ -840,7 +840,7 @@
           <p:cNvPr id="4" name="날짜 개체 틀 3">
             <a:extLst>
               <a:ext uri="{FF2B5EF4-FFF2-40B4-BE49-F238E27FC236}">
-                <a16:creationId xmlns:a16="http://schemas.microsoft.com/office/drawing/2014/main" id="{6C601109-5C7E-BD87-2021-F38E30EE9B1B}"/>
+                <a16:creationId xmlns:a16="http://schemas.microsoft.com/office/drawing/2014/main" id="{535893D4-0035-31F0-E84C-7C34A93DCB19}"/>
               </a:ext>
             </a:extLst>
           </p:cNvPr>
@@ -856,7 +856,7 @@
           <a:bodyPr/>
           <a:lstStyle/>
           <a:p>
-            <a:fld id="{889E8D29-9AC6-4AA8-860A-C9485B2EE338}" type="datetimeFigureOut">
+            <a:fld id="{37A6BA30-5587-4442-AF77-A7B435B4C7C8}" type="datetimeFigureOut">
               <a:rPr lang="ko-KR" altLang="en-US" smtClean="0"/>
               <a:t>2026-06-19</a:t>
             </a:fld>
@@ -869,7 +869,7 @@
           <p:cNvPr id="5" name="바닥글 개체 틀 4">
             <a:extLst>
               <a:ext uri="{FF2B5EF4-FFF2-40B4-BE49-F238E27FC236}">
-                <a16:creationId xmlns:a16="http://schemas.microsoft.com/office/drawing/2014/main" id="{5ACB84AB-C9D9-9D6F-28B6-1E6AE4FA5F50}"/>
+                <a16:creationId xmlns:a16="http://schemas.microsoft.com/office/drawing/2014/main" id="{709223AE-DFC9-E5A5-4DB2-2C9951DC3380}"/>
               </a:ext>
             </a:extLst>
           </p:cNvPr>
@@ -894,7 +894,7 @@
           <p:cNvPr id="6" name="슬라이드 번호 개체 틀 5">
             <a:extLst>
               <a:ext uri="{FF2B5EF4-FFF2-40B4-BE49-F238E27FC236}">
-                <a16:creationId xmlns:a16="http://schemas.microsoft.com/office/drawing/2014/main" id="{6F8757E8-4D54-411E-D7C1-95250F81FE4F}"/>
+                <a16:creationId xmlns:a16="http://schemas.microsoft.com/office/drawing/2014/main" id="{78A75397-7286-7095-BC2F-B38B311E3695}"/>
               </a:ext>
             </a:extLst>
           </p:cNvPr>
@@ -910,7 +910,7 @@
           <a:bodyPr/>
           <a:lstStyle/>
           <a:p>
-            <a:fld id="{E2A9101B-4DE9-41B7-92B7-E017EA92F55E}" type="slidenum">
+            <a:fld id="{D1DEAAE1-9523-4F91-9AA1-FE659F1DC52B}" type="slidenum">
               <a:rPr lang="ko-KR" altLang="en-US" smtClean="0"/>
               <a:t>‹#›</a:t>
             </a:fld>
@@ -921,7 +921,7 @@
     </p:spTree>
     <p:extLst>
       <p:ext uri="{BB962C8B-B14F-4D97-AF65-F5344CB8AC3E}">
-        <p14:creationId xmlns:p14="http://schemas.microsoft.com/office/powerpoint/2010/main" val="834922319"/>
+        <p14:creationId xmlns:p14="http://schemas.microsoft.com/office/powerpoint/2010/main" val="1064622322"/>
       </p:ext>
     </p:extLst>
   </p:cSld>
@@ -953,7 +953,7 @@
           <p:cNvPr id="2" name="제목 1">
             <a:extLst>
               <a:ext uri="{FF2B5EF4-FFF2-40B4-BE49-F238E27FC236}">
-                <a16:creationId xmlns:a16="http://schemas.microsoft.com/office/drawing/2014/main" id="{9F5738C5-6B16-620D-80F6-A9990AB4AB3E}"/>
+                <a16:creationId xmlns:a16="http://schemas.microsoft.com/office/drawing/2014/main" id="{0C6CE29E-D438-D296-5C70-B57AD8D51893}"/>
               </a:ext>
             </a:extLst>
           </p:cNvPr>
@@ -990,7 +990,7 @@
           <p:cNvPr id="3" name="텍스트 개체 틀 2">
             <a:extLst>
               <a:ext uri="{FF2B5EF4-FFF2-40B4-BE49-F238E27FC236}">
-                <a16:creationId xmlns:a16="http://schemas.microsoft.com/office/drawing/2014/main" id="{DD4B4D8E-AB32-D306-936E-7D20D073755A}"/>
+                <a16:creationId xmlns:a16="http://schemas.microsoft.com/office/drawing/2014/main" id="{6E602F27-1075-14B5-0737-A85AD0CCC0AF}"/>
               </a:ext>
             </a:extLst>
           </p:cNvPr>
@@ -1115,7 +1115,7 @@
           <p:cNvPr id="4" name="날짜 개체 틀 3">
             <a:extLst>
               <a:ext uri="{FF2B5EF4-FFF2-40B4-BE49-F238E27FC236}">
-                <a16:creationId xmlns:a16="http://schemas.microsoft.com/office/drawing/2014/main" id="{671026A3-9471-086F-D544-DB81AABB87B3}"/>
+                <a16:creationId xmlns:a16="http://schemas.microsoft.com/office/drawing/2014/main" id="{63163966-36C6-5DF1-DD9D-20E4D7168004}"/>
               </a:ext>
             </a:extLst>
           </p:cNvPr>
@@ -1131,7 +1131,7 @@
           <a:bodyPr/>
           <a:lstStyle/>
           <a:p>
-            <a:fld id="{889E8D29-9AC6-4AA8-860A-C9485B2EE338}" type="datetimeFigureOut">
+            <a:fld id="{37A6BA30-5587-4442-AF77-A7B435B4C7C8}" type="datetimeFigureOut">
               <a:rPr lang="ko-KR" altLang="en-US" smtClean="0"/>
               <a:t>2026-06-19</a:t>
             </a:fld>
@@ -1144,7 +1144,7 @@
           <p:cNvPr id="5" name="바닥글 개체 틀 4">
             <a:extLst>
               <a:ext uri="{FF2B5EF4-FFF2-40B4-BE49-F238E27FC236}">
-                <a16:creationId xmlns:a16="http://schemas.microsoft.com/office/drawing/2014/main" id="{E88C07B6-97B8-3C54-9B4E-52000DBC85F4}"/>
+                <a16:creationId xmlns:a16="http://schemas.microsoft.com/office/drawing/2014/main" id="{32BF48D4-F04D-CE7D-6868-55AB1670FB1B}"/>
               </a:ext>
             </a:extLst>
           </p:cNvPr>
@@ -1169,7 +1169,7 @@
           <p:cNvPr id="6" name="슬라이드 번호 개체 틀 5">
             <a:extLst>
               <a:ext uri="{FF2B5EF4-FFF2-40B4-BE49-F238E27FC236}">
-                <a16:creationId xmlns:a16="http://schemas.microsoft.com/office/drawing/2014/main" id="{2C238A04-6C1D-F2D8-F82A-86439B9D9B88}"/>
+                <a16:creationId xmlns:a16="http://schemas.microsoft.com/office/drawing/2014/main" id="{EB96B1E6-6892-0A28-59C3-499383CCE5F1}"/>
               </a:ext>
             </a:extLst>
           </p:cNvPr>
@@ -1185,7 +1185,7 @@
           <a:bodyPr/>
           <a:lstStyle/>
           <a:p>
-            <a:fld id="{E2A9101B-4DE9-41B7-92B7-E017EA92F55E}" type="slidenum">
+            <a:fld id="{D1DEAAE1-9523-4F91-9AA1-FE659F1DC52B}" type="slidenum">
               <a:rPr lang="ko-KR" altLang="en-US" smtClean="0"/>
               <a:t>‹#›</a:t>
             </a:fld>
@@ -1196,7 +1196,7 @@
     </p:spTree>
     <p:extLst>
       <p:ext uri="{BB962C8B-B14F-4D97-AF65-F5344CB8AC3E}">
-        <p14:creationId xmlns:p14="http://schemas.microsoft.com/office/powerpoint/2010/main" val="1170063655"/>
+        <p14:creationId xmlns:p14="http://schemas.microsoft.com/office/powerpoint/2010/main" val="149861998"/>
       </p:ext>
     </p:extLst>
   </p:cSld>
@@ -1228,7 +1228,7 @@
           <p:cNvPr id="2" name="제목 1">
             <a:extLst>
               <a:ext uri="{FF2B5EF4-FFF2-40B4-BE49-F238E27FC236}">
-                <a16:creationId xmlns:a16="http://schemas.microsoft.com/office/drawing/2014/main" id="{0C1F397A-3BA0-EC94-0F89-F7723BE9EAA4}"/>
+                <a16:creationId xmlns:a16="http://schemas.microsoft.com/office/drawing/2014/main" id="{C19C8B7D-2272-E424-0F69-E49599D6FCAB}"/>
               </a:ext>
             </a:extLst>
           </p:cNvPr>
@@ -1256,7 +1256,7 @@
           <p:cNvPr id="3" name="내용 개체 틀 2">
             <a:extLst>
               <a:ext uri="{FF2B5EF4-FFF2-40B4-BE49-F238E27FC236}">
-                <a16:creationId xmlns:a16="http://schemas.microsoft.com/office/drawing/2014/main" id="{2A43433D-D887-D6C2-4098-0DD5F22904BD}"/>
+                <a16:creationId xmlns:a16="http://schemas.microsoft.com/office/drawing/2014/main" id="{97AC6775-0B77-95DA-5035-D12B89CDB2B4}"/>
               </a:ext>
             </a:extLst>
           </p:cNvPr>
@@ -1318,7 +1318,7 @@
           <p:cNvPr id="4" name="내용 개체 틀 3">
             <a:extLst>
               <a:ext uri="{FF2B5EF4-FFF2-40B4-BE49-F238E27FC236}">
-                <a16:creationId xmlns:a16="http://schemas.microsoft.com/office/drawing/2014/main" id="{995C7B1E-F83E-7A2E-75C9-E6674CC88372}"/>
+                <a16:creationId xmlns:a16="http://schemas.microsoft.com/office/drawing/2014/main" id="{E2F50498-65B2-A555-2D7E-B1FE90C16D46}"/>
               </a:ext>
             </a:extLst>
           </p:cNvPr>
@@ -1380,7 +1380,7 @@
           <p:cNvPr id="5" name="날짜 개체 틀 4">
             <a:extLst>
               <a:ext uri="{FF2B5EF4-FFF2-40B4-BE49-F238E27FC236}">
-                <a16:creationId xmlns:a16="http://schemas.microsoft.com/office/drawing/2014/main" id="{5AF02DE9-45B3-1727-D6EB-88C4ADC101DB}"/>
+                <a16:creationId xmlns:a16="http://schemas.microsoft.com/office/drawing/2014/main" id="{F4F61115-0871-C7BA-570F-3ED89E98D7D0}"/>
               </a:ext>
             </a:extLst>
           </p:cNvPr>
@@ -1396,7 +1396,7 @@
           <a:bodyPr/>
           <a:lstStyle/>
           <a:p>
-            <a:fld id="{889E8D29-9AC6-4AA8-860A-C9485B2EE338}" type="datetimeFigureOut">
+            <a:fld id="{37A6BA30-5587-4442-AF77-A7B435B4C7C8}" type="datetimeFigureOut">
               <a:rPr lang="ko-KR" altLang="en-US" smtClean="0"/>
               <a:t>2026-06-19</a:t>
             </a:fld>
@@ -1409,7 +1409,7 @@
           <p:cNvPr id="6" name="바닥글 개체 틀 5">
             <a:extLst>
               <a:ext uri="{FF2B5EF4-FFF2-40B4-BE49-F238E27FC236}">
-                <a16:creationId xmlns:a16="http://schemas.microsoft.com/office/drawing/2014/main" id="{B32B0567-7E8A-B04A-072E-4B275F4FB314}"/>
+                <a16:creationId xmlns:a16="http://schemas.microsoft.com/office/drawing/2014/main" id="{78147BA8-6E50-1009-A7E7-E1C2A044E747}"/>
               </a:ext>
             </a:extLst>
           </p:cNvPr>
@@ -1434,7 +1434,7 @@
           <p:cNvPr id="7" name="슬라이드 번호 개체 틀 6">
             <a:extLst>
               <a:ext uri="{FF2B5EF4-FFF2-40B4-BE49-F238E27FC236}">
-                <a16:creationId xmlns:a16="http://schemas.microsoft.com/office/drawing/2014/main" id="{F964C7F5-3BD9-BA63-47C1-606EB226122E}"/>
+                <a16:creationId xmlns:a16="http://schemas.microsoft.com/office/drawing/2014/main" id="{A8213329-9F92-E681-5F18-447D8334581F}"/>
               </a:ext>
             </a:extLst>
           </p:cNvPr>
@@ -1450,7 +1450,7 @@
           <a:bodyPr/>
           <a:lstStyle/>
           <a:p>
-            <a:fld id="{E2A9101B-4DE9-41B7-92B7-E017EA92F55E}" type="slidenum">
+            <a:fld id="{D1DEAAE1-9523-4F91-9AA1-FE659F1DC52B}" type="slidenum">
               <a:rPr lang="ko-KR" altLang="en-US" smtClean="0"/>
               <a:t>‹#›</a:t>
             </a:fld>
@@ -1461,7 +1461,7 @@
     </p:spTree>
     <p:extLst>
       <p:ext uri="{BB962C8B-B14F-4D97-AF65-F5344CB8AC3E}">
-        <p14:creationId xmlns:p14="http://schemas.microsoft.com/office/powerpoint/2010/main" val="106494898"/>
+        <p14:creationId xmlns:p14="http://schemas.microsoft.com/office/powerpoint/2010/main" val="3107413877"/>
       </p:ext>
     </p:extLst>
   </p:cSld>
@@ -1493,7 +1493,7 @@
           <p:cNvPr id="2" name="제목 1">
             <a:extLst>
               <a:ext uri="{FF2B5EF4-FFF2-40B4-BE49-F238E27FC236}">
-                <a16:creationId xmlns:a16="http://schemas.microsoft.com/office/drawing/2014/main" id="{76BFA894-7619-2E40-06CB-3B937CD116F1}"/>
+                <a16:creationId xmlns:a16="http://schemas.microsoft.com/office/drawing/2014/main" id="{2CE4859B-8E88-90FE-8836-F6164E407D39}"/>
               </a:ext>
             </a:extLst>
           </p:cNvPr>
@@ -1526,7 +1526,7 @@
           <p:cNvPr id="3" name="텍스트 개체 틀 2">
             <a:extLst>
               <a:ext uri="{FF2B5EF4-FFF2-40B4-BE49-F238E27FC236}">
-                <a16:creationId xmlns:a16="http://schemas.microsoft.com/office/drawing/2014/main" id="{3C13C6BF-31ED-8F1D-38AD-8F41831A8E28}"/>
+                <a16:creationId xmlns:a16="http://schemas.microsoft.com/office/drawing/2014/main" id="{EC368597-746F-F472-57B5-7C264905F6E6}"/>
               </a:ext>
             </a:extLst>
           </p:cNvPr>
@@ -1597,7 +1597,7 @@
           <p:cNvPr id="4" name="내용 개체 틀 3">
             <a:extLst>
               <a:ext uri="{FF2B5EF4-FFF2-40B4-BE49-F238E27FC236}">
-                <a16:creationId xmlns:a16="http://schemas.microsoft.com/office/drawing/2014/main" id="{5D07304C-25B5-B876-2AC4-E74813492DE7}"/>
+                <a16:creationId xmlns:a16="http://schemas.microsoft.com/office/drawing/2014/main" id="{79ADA2B1-20D9-89E4-DC00-62766F52E6F6}"/>
               </a:ext>
             </a:extLst>
           </p:cNvPr>
@@ -1659,7 +1659,7 @@
           <p:cNvPr id="5" name="텍스트 개체 틀 4">
             <a:extLst>
               <a:ext uri="{FF2B5EF4-FFF2-40B4-BE49-F238E27FC236}">
-                <a16:creationId xmlns:a16="http://schemas.microsoft.com/office/drawing/2014/main" id="{1421AF45-8CE0-2057-07AD-59F38ABBD595}"/>
+                <a16:creationId xmlns:a16="http://schemas.microsoft.com/office/drawing/2014/main" id="{005CB960-A95D-4216-8005-B3F0DE469012}"/>
               </a:ext>
             </a:extLst>
           </p:cNvPr>
@@ -1730,7 +1730,7 @@
           <p:cNvPr id="6" name="내용 개체 틀 5">
             <a:extLst>
               <a:ext uri="{FF2B5EF4-FFF2-40B4-BE49-F238E27FC236}">
-                <a16:creationId xmlns:a16="http://schemas.microsoft.com/office/drawing/2014/main" id="{075FF091-16E8-8326-1D3E-78C84A68F05A}"/>
+                <a16:creationId xmlns:a16="http://schemas.microsoft.com/office/drawing/2014/main" id="{930391A2-2901-883E-192D-4920CE3986BB}"/>
               </a:ext>
             </a:extLst>
           </p:cNvPr>
@@ -1792,7 +1792,7 @@
           <p:cNvPr id="7" name="날짜 개체 틀 6">
             <a:extLst>
               <a:ext uri="{FF2B5EF4-FFF2-40B4-BE49-F238E27FC236}">
-                <a16:creationId xmlns:a16="http://schemas.microsoft.com/office/drawing/2014/main" id="{F6FE4DA5-D1C9-E99F-7CAC-D1E665D0BCA1}"/>
+                <a16:creationId xmlns:a16="http://schemas.microsoft.com/office/drawing/2014/main" id="{F497CE13-D2D2-E71B-7C12-5D3E37CC026C}"/>
               </a:ext>
             </a:extLst>
           </p:cNvPr>
@@ -1808,7 +1808,7 @@
           <a:bodyPr/>
           <a:lstStyle/>
           <a:p>
-            <a:fld id="{889E8D29-9AC6-4AA8-860A-C9485B2EE338}" type="datetimeFigureOut">
+            <a:fld id="{37A6BA30-5587-4442-AF77-A7B435B4C7C8}" type="datetimeFigureOut">
               <a:rPr lang="ko-KR" altLang="en-US" smtClean="0"/>
               <a:t>2026-06-19</a:t>
             </a:fld>
@@ -1821,7 +1821,7 @@
           <p:cNvPr id="8" name="바닥글 개체 틀 7">
             <a:extLst>
               <a:ext uri="{FF2B5EF4-FFF2-40B4-BE49-F238E27FC236}">
-                <a16:creationId xmlns:a16="http://schemas.microsoft.com/office/drawing/2014/main" id="{CC10BA09-33B5-6698-D2C2-E2A30E5346CC}"/>
+                <a16:creationId xmlns:a16="http://schemas.microsoft.com/office/drawing/2014/main" id="{FDA3A9C4-C3DC-C350-6D36-B98EE964B37C}"/>
               </a:ext>
             </a:extLst>
           </p:cNvPr>
@@ -1846,7 +1846,7 @@
           <p:cNvPr id="9" name="슬라이드 번호 개체 틀 8">
             <a:extLst>
               <a:ext uri="{FF2B5EF4-FFF2-40B4-BE49-F238E27FC236}">
-                <a16:creationId xmlns:a16="http://schemas.microsoft.com/office/drawing/2014/main" id="{C8D6E82B-C711-879C-7A28-D43F2FBB7363}"/>
+                <a16:creationId xmlns:a16="http://schemas.microsoft.com/office/drawing/2014/main" id="{C2559D87-3B90-D9D5-0D0E-514FCD824A4B}"/>
               </a:ext>
             </a:extLst>
           </p:cNvPr>
@@ -1862,7 +1862,7 @@
           <a:bodyPr/>
           <a:lstStyle/>
           <a:p>
-            <a:fld id="{E2A9101B-4DE9-41B7-92B7-E017EA92F55E}" type="slidenum">
+            <a:fld id="{D1DEAAE1-9523-4F91-9AA1-FE659F1DC52B}" type="slidenum">
               <a:rPr lang="ko-KR" altLang="en-US" smtClean="0"/>
               <a:t>‹#›</a:t>
             </a:fld>
@@ -1873,7 +1873,7 @@
     </p:spTree>
     <p:extLst>
       <p:ext uri="{BB962C8B-B14F-4D97-AF65-F5344CB8AC3E}">
-        <p14:creationId xmlns:p14="http://schemas.microsoft.com/office/powerpoint/2010/main" val="3558325495"/>
+        <p14:creationId xmlns:p14="http://schemas.microsoft.com/office/powerpoint/2010/main" val="2129526242"/>
       </p:ext>
     </p:extLst>
   </p:cSld>
@@ -1905,7 +1905,7 @@
           <p:cNvPr id="2" name="제목 1">
             <a:extLst>
               <a:ext uri="{FF2B5EF4-FFF2-40B4-BE49-F238E27FC236}">
-                <a16:creationId xmlns:a16="http://schemas.microsoft.com/office/drawing/2014/main" id="{45BFE56C-B51E-AA53-77DE-E1819B5466DE}"/>
+                <a16:creationId xmlns:a16="http://schemas.microsoft.com/office/drawing/2014/main" id="{980C8D56-8746-A960-692A-FE92470A9E3E}"/>
               </a:ext>
             </a:extLst>
           </p:cNvPr>
@@ -1933,7 +1933,7 @@
           <p:cNvPr id="3" name="날짜 개체 틀 2">
             <a:extLst>
               <a:ext uri="{FF2B5EF4-FFF2-40B4-BE49-F238E27FC236}">
-                <a16:creationId xmlns:a16="http://schemas.microsoft.com/office/drawing/2014/main" id="{3CB2C402-31E4-34F3-B047-CA161B3C6278}"/>
+                <a16:creationId xmlns:a16="http://schemas.microsoft.com/office/drawing/2014/main" id="{46AA68BF-442C-825C-2033-E79DAB8670DC}"/>
               </a:ext>
             </a:extLst>
           </p:cNvPr>
@@ -1949,7 +1949,7 @@
           <a:bodyPr/>
           <a:lstStyle/>
           <a:p>
-            <a:fld id="{889E8D29-9AC6-4AA8-860A-C9485B2EE338}" type="datetimeFigureOut">
+            <a:fld id="{37A6BA30-5587-4442-AF77-A7B435B4C7C8}" type="datetimeFigureOut">
               <a:rPr lang="ko-KR" altLang="en-US" smtClean="0"/>
               <a:t>2026-06-19</a:t>
             </a:fld>
@@ -1962,7 +1962,7 @@
           <p:cNvPr id="4" name="바닥글 개체 틀 3">
             <a:extLst>
               <a:ext uri="{FF2B5EF4-FFF2-40B4-BE49-F238E27FC236}">
-                <a16:creationId xmlns:a16="http://schemas.microsoft.com/office/drawing/2014/main" id="{5E275C39-65D5-9A2B-4C47-BD6330D44536}"/>
+                <a16:creationId xmlns:a16="http://schemas.microsoft.com/office/drawing/2014/main" id="{A81A38BE-80A9-A3F7-DE7A-26621E560779}"/>
               </a:ext>
             </a:extLst>
           </p:cNvPr>
@@ -1987,7 +1987,7 @@
           <p:cNvPr id="5" name="슬라이드 번호 개체 틀 4">
             <a:extLst>
               <a:ext uri="{FF2B5EF4-FFF2-40B4-BE49-F238E27FC236}">
-                <a16:creationId xmlns:a16="http://schemas.microsoft.com/office/drawing/2014/main" id="{576FDDF5-DE0A-7F80-483C-1121FB8F64FE}"/>
+                <a16:creationId xmlns:a16="http://schemas.microsoft.com/office/drawing/2014/main" id="{A3A7352E-C9EC-0905-778B-E271C5E083F8}"/>
               </a:ext>
             </a:extLst>
           </p:cNvPr>
@@ -2003,7 +2003,7 @@
           <a:bodyPr/>
           <a:lstStyle/>
           <a:p>
-            <a:fld id="{E2A9101B-4DE9-41B7-92B7-E017EA92F55E}" type="slidenum">
+            <a:fld id="{D1DEAAE1-9523-4F91-9AA1-FE659F1DC52B}" type="slidenum">
               <a:rPr lang="ko-KR" altLang="en-US" smtClean="0"/>
               <a:t>‹#›</a:t>
             </a:fld>
@@ -2014,7 +2014,7 @@
     </p:spTree>
     <p:extLst>
       <p:ext uri="{BB962C8B-B14F-4D97-AF65-F5344CB8AC3E}">
-        <p14:creationId xmlns:p14="http://schemas.microsoft.com/office/powerpoint/2010/main" val="2407216594"/>
+        <p14:creationId xmlns:p14="http://schemas.microsoft.com/office/powerpoint/2010/main" val="186640407"/>
       </p:ext>
     </p:extLst>
   </p:cSld>
@@ -2046,7 +2046,7 @@
           <p:cNvPr id="2" name="날짜 개체 틀 1">
             <a:extLst>
               <a:ext uri="{FF2B5EF4-FFF2-40B4-BE49-F238E27FC236}">
-                <a16:creationId xmlns:a16="http://schemas.microsoft.com/office/drawing/2014/main" id="{9D9067E8-912F-E684-6DCF-1F8FD9D185C4}"/>
+                <a16:creationId xmlns:a16="http://schemas.microsoft.com/office/drawing/2014/main" id="{9635F1FA-2075-FB6D-268D-A8A5097B12D8}"/>
               </a:ext>
             </a:extLst>
           </p:cNvPr>
@@ -2062,7 +2062,7 @@
           <a:bodyPr/>
           <a:lstStyle/>
           <a:p>
-            <a:fld id="{889E8D29-9AC6-4AA8-860A-C9485B2EE338}" type="datetimeFigureOut">
+            <a:fld id="{37A6BA30-5587-4442-AF77-A7B435B4C7C8}" type="datetimeFigureOut">
               <a:rPr lang="ko-KR" altLang="en-US" smtClean="0"/>
               <a:t>2026-06-19</a:t>
             </a:fld>
@@ -2075,7 +2075,7 @@
           <p:cNvPr id="3" name="바닥글 개체 틀 2">
             <a:extLst>
               <a:ext uri="{FF2B5EF4-FFF2-40B4-BE49-F238E27FC236}">
-                <a16:creationId xmlns:a16="http://schemas.microsoft.com/office/drawing/2014/main" id="{E22C0EAA-BFBA-B5A3-0F51-DD9ED1A40347}"/>
+                <a16:creationId xmlns:a16="http://schemas.microsoft.com/office/drawing/2014/main" id="{A67EC4A0-BD51-3BDC-2959-1AF7B585B110}"/>
               </a:ext>
             </a:extLst>
           </p:cNvPr>
@@ -2100,7 +2100,7 @@
           <p:cNvPr id="4" name="슬라이드 번호 개체 틀 3">
             <a:extLst>
               <a:ext uri="{FF2B5EF4-FFF2-40B4-BE49-F238E27FC236}">
-                <a16:creationId xmlns:a16="http://schemas.microsoft.com/office/drawing/2014/main" id="{828F2D4B-E536-DE24-E506-9F06A667613B}"/>
+                <a16:creationId xmlns:a16="http://schemas.microsoft.com/office/drawing/2014/main" id="{91EAA5F1-8B02-D1FB-5FDC-196755027E84}"/>
               </a:ext>
             </a:extLst>
           </p:cNvPr>
@@ -2116,7 +2116,7 @@
           <a:bodyPr/>
           <a:lstStyle/>
           <a:p>
-            <a:fld id="{E2A9101B-4DE9-41B7-92B7-E017EA92F55E}" type="slidenum">
+            <a:fld id="{D1DEAAE1-9523-4F91-9AA1-FE659F1DC52B}" type="slidenum">
               <a:rPr lang="ko-KR" altLang="en-US" smtClean="0"/>
               <a:t>‹#›</a:t>
             </a:fld>
@@ -2127,7 +2127,7 @@
     </p:spTree>
     <p:extLst>
       <p:ext uri="{BB962C8B-B14F-4D97-AF65-F5344CB8AC3E}">
-        <p14:creationId xmlns:p14="http://schemas.microsoft.com/office/powerpoint/2010/main" val="2704538431"/>
+        <p14:creationId xmlns:p14="http://schemas.microsoft.com/office/powerpoint/2010/main" val="1651307502"/>
       </p:ext>
     </p:extLst>
   </p:cSld>
@@ -2159,7 +2159,7 @@
           <p:cNvPr id="2" name="제목 1">
             <a:extLst>
               <a:ext uri="{FF2B5EF4-FFF2-40B4-BE49-F238E27FC236}">
-                <a16:creationId xmlns:a16="http://schemas.microsoft.com/office/drawing/2014/main" id="{8C314C34-B73A-142F-A3DE-A9A3C0BD2FA1}"/>
+                <a16:creationId xmlns:a16="http://schemas.microsoft.com/office/drawing/2014/main" id="{81DF3020-173B-7C4A-F1D0-4901C3F15F12}"/>
               </a:ext>
             </a:extLst>
           </p:cNvPr>
@@ -2196,7 +2196,7 @@
           <p:cNvPr id="3" name="내용 개체 틀 2">
             <a:extLst>
               <a:ext uri="{FF2B5EF4-FFF2-40B4-BE49-F238E27FC236}">
-                <a16:creationId xmlns:a16="http://schemas.microsoft.com/office/drawing/2014/main" id="{BDA02796-AFCE-7026-14AA-81B7B4B01BF1}"/>
+                <a16:creationId xmlns:a16="http://schemas.microsoft.com/office/drawing/2014/main" id="{D057BEB0-56DB-B531-D251-02FA9264EC81}"/>
               </a:ext>
             </a:extLst>
           </p:cNvPr>
@@ -2286,7 +2286,7 @@
           <p:cNvPr id="4" name="텍스트 개체 틀 3">
             <a:extLst>
               <a:ext uri="{FF2B5EF4-FFF2-40B4-BE49-F238E27FC236}">
-                <a16:creationId xmlns:a16="http://schemas.microsoft.com/office/drawing/2014/main" id="{BDC08B72-A404-40C9-D7C7-27C3704D5AB9}"/>
+                <a16:creationId xmlns:a16="http://schemas.microsoft.com/office/drawing/2014/main" id="{7D66F40D-7176-67A5-1F5A-21FC5C54F5F2}"/>
               </a:ext>
             </a:extLst>
           </p:cNvPr>
@@ -2357,7 +2357,7 @@
           <p:cNvPr id="5" name="날짜 개체 틀 4">
             <a:extLst>
               <a:ext uri="{FF2B5EF4-FFF2-40B4-BE49-F238E27FC236}">
-                <a16:creationId xmlns:a16="http://schemas.microsoft.com/office/drawing/2014/main" id="{EE0A4BDC-4C4C-A688-7381-9F3326DBB642}"/>
+                <a16:creationId xmlns:a16="http://schemas.microsoft.com/office/drawing/2014/main" id="{858EB0C4-DA5B-9CD7-804C-B92ABEE768A2}"/>
               </a:ext>
             </a:extLst>
           </p:cNvPr>
@@ -2373,7 +2373,7 @@
           <a:bodyPr/>
           <a:lstStyle/>
           <a:p>
-            <a:fld id="{889E8D29-9AC6-4AA8-860A-C9485B2EE338}" type="datetimeFigureOut">
+            <a:fld id="{37A6BA30-5587-4442-AF77-A7B435B4C7C8}" type="datetimeFigureOut">
               <a:rPr lang="ko-KR" altLang="en-US" smtClean="0"/>
               <a:t>2026-06-19</a:t>
             </a:fld>
@@ -2386,7 +2386,7 @@
           <p:cNvPr id="6" name="바닥글 개체 틀 5">
             <a:extLst>
               <a:ext uri="{FF2B5EF4-FFF2-40B4-BE49-F238E27FC236}">
-                <a16:creationId xmlns:a16="http://schemas.microsoft.com/office/drawing/2014/main" id="{2C4A4AD1-AADB-4C71-DD57-9F8019618BC8}"/>
+                <a16:creationId xmlns:a16="http://schemas.microsoft.com/office/drawing/2014/main" id="{28978C9C-D6C9-4E0A-D421-86276812EF00}"/>
               </a:ext>
             </a:extLst>
           </p:cNvPr>
@@ -2411,7 +2411,7 @@
           <p:cNvPr id="7" name="슬라이드 번호 개체 틀 6">
             <a:extLst>
               <a:ext uri="{FF2B5EF4-FFF2-40B4-BE49-F238E27FC236}">
-                <a16:creationId xmlns:a16="http://schemas.microsoft.com/office/drawing/2014/main" id="{45F665C6-F5BC-8362-09E3-8ECFFCD37AA8}"/>
+                <a16:creationId xmlns:a16="http://schemas.microsoft.com/office/drawing/2014/main" id="{D4435DF5-B289-33FE-8848-C659AB4C2C8C}"/>
               </a:ext>
             </a:extLst>
           </p:cNvPr>
@@ -2427,7 +2427,7 @@
           <a:bodyPr/>
           <a:lstStyle/>
           <a:p>
-            <a:fld id="{E2A9101B-4DE9-41B7-92B7-E017EA92F55E}" type="slidenum">
+            <a:fld id="{D1DEAAE1-9523-4F91-9AA1-FE659F1DC52B}" type="slidenum">
               <a:rPr lang="ko-KR" altLang="en-US" smtClean="0"/>
               <a:t>‹#›</a:t>
             </a:fld>
@@ -2438,7 +2438,7 @@
     </p:spTree>
     <p:extLst>
       <p:ext uri="{BB962C8B-B14F-4D97-AF65-F5344CB8AC3E}">
-        <p14:creationId xmlns:p14="http://schemas.microsoft.com/office/powerpoint/2010/main" val="3256625135"/>
+        <p14:creationId xmlns:p14="http://schemas.microsoft.com/office/powerpoint/2010/main" val="330747519"/>
       </p:ext>
     </p:extLst>
   </p:cSld>
@@ -2470,7 +2470,7 @@
           <p:cNvPr id="2" name="제목 1">
             <a:extLst>
               <a:ext uri="{FF2B5EF4-FFF2-40B4-BE49-F238E27FC236}">
-                <a16:creationId xmlns:a16="http://schemas.microsoft.com/office/drawing/2014/main" id="{DF902267-EFC2-D466-C1A1-51BAE5F46F8B}"/>
+                <a16:creationId xmlns:a16="http://schemas.microsoft.com/office/drawing/2014/main" id="{AF4FDF3C-D5AB-D978-E17A-28CD2C41B009}"/>
               </a:ext>
             </a:extLst>
           </p:cNvPr>
@@ -2507,7 +2507,7 @@
           <p:cNvPr id="3" name="그림 개체 틀 2">
             <a:extLst>
               <a:ext uri="{FF2B5EF4-FFF2-40B4-BE49-F238E27FC236}">
-                <a16:creationId xmlns:a16="http://schemas.microsoft.com/office/drawing/2014/main" id="{77E0638C-67AC-9DEC-C33D-25B181AC6E0D}"/>
+                <a16:creationId xmlns:a16="http://schemas.microsoft.com/office/drawing/2014/main" id="{368C3EB7-F7FE-D849-BF43-172FDC04310A}"/>
               </a:ext>
             </a:extLst>
           </p:cNvPr>
@@ -2574,7 +2574,7 @@
           <p:cNvPr id="4" name="텍스트 개체 틀 3">
             <a:extLst>
               <a:ext uri="{FF2B5EF4-FFF2-40B4-BE49-F238E27FC236}">
-                <a16:creationId xmlns:a16="http://schemas.microsoft.com/office/drawing/2014/main" id="{63B43AB5-7E68-C1C0-5F02-BCFDD289FFEC}"/>
+                <a16:creationId xmlns:a16="http://schemas.microsoft.com/office/drawing/2014/main" id="{B1FAE160-2765-7AB6-B51F-8EFBBDEED85A}"/>
               </a:ext>
             </a:extLst>
           </p:cNvPr>
@@ -2645,7 +2645,7 @@
           <p:cNvPr id="5" name="날짜 개체 틀 4">
             <a:extLst>
               <a:ext uri="{FF2B5EF4-FFF2-40B4-BE49-F238E27FC236}">
-                <a16:creationId xmlns:a16="http://schemas.microsoft.com/office/drawing/2014/main" id="{9E82C8A1-3E98-8AA8-6785-B29B1F1BE23B}"/>
+                <a16:creationId xmlns:a16="http://schemas.microsoft.com/office/drawing/2014/main" id="{217D1A3C-351C-A1DC-4AE4-C08F2103A3A5}"/>
               </a:ext>
             </a:extLst>
           </p:cNvPr>
@@ -2661,7 +2661,7 @@
           <a:bodyPr/>
           <a:lstStyle/>
           <a:p>
-            <a:fld id="{889E8D29-9AC6-4AA8-860A-C9485B2EE338}" type="datetimeFigureOut">
+            <a:fld id="{37A6BA30-5587-4442-AF77-A7B435B4C7C8}" type="datetimeFigureOut">
               <a:rPr lang="ko-KR" altLang="en-US" smtClean="0"/>
               <a:t>2026-06-19</a:t>
             </a:fld>
@@ -2674,7 +2674,7 @@
           <p:cNvPr id="6" name="바닥글 개체 틀 5">
             <a:extLst>
               <a:ext uri="{FF2B5EF4-FFF2-40B4-BE49-F238E27FC236}">
-                <a16:creationId xmlns:a16="http://schemas.microsoft.com/office/drawing/2014/main" id="{B47DA439-98F1-6926-AAD9-DFFCB66A5EDE}"/>
+                <a16:creationId xmlns:a16="http://schemas.microsoft.com/office/drawing/2014/main" id="{BC97E207-5D4A-1A2E-9364-6D0D82CC8DA4}"/>
               </a:ext>
             </a:extLst>
           </p:cNvPr>
@@ -2699,7 +2699,7 @@
           <p:cNvPr id="7" name="슬라이드 번호 개체 틀 6">
             <a:extLst>
               <a:ext uri="{FF2B5EF4-FFF2-40B4-BE49-F238E27FC236}">
-                <a16:creationId xmlns:a16="http://schemas.microsoft.com/office/drawing/2014/main" id="{E3A25CDE-31F3-5452-6CE6-3AFE2BC693AF}"/>
+                <a16:creationId xmlns:a16="http://schemas.microsoft.com/office/drawing/2014/main" id="{100A9759-5D75-1EBF-01DC-9EC54FA6E530}"/>
               </a:ext>
             </a:extLst>
           </p:cNvPr>
@@ -2715,7 +2715,7 @@
           <a:bodyPr/>
           <a:lstStyle/>
           <a:p>
-            <a:fld id="{E2A9101B-4DE9-41B7-92B7-E017EA92F55E}" type="slidenum">
+            <a:fld id="{D1DEAAE1-9523-4F91-9AA1-FE659F1DC52B}" type="slidenum">
               <a:rPr lang="ko-KR" altLang="en-US" smtClean="0"/>
               <a:t>‹#›</a:t>
             </a:fld>
@@ -2726,7 +2726,7 @@
     </p:spTree>
     <p:extLst>
       <p:ext uri="{BB962C8B-B14F-4D97-AF65-F5344CB8AC3E}">
-        <p14:creationId xmlns:p14="http://schemas.microsoft.com/office/powerpoint/2010/main" val="2637755957"/>
+        <p14:creationId xmlns:p14="http://schemas.microsoft.com/office/powerpoint/2010/main" val="1120943280"/>
       </p:ext>
     </p:extLst>
   </p:cSld>
@@ -2763,7 +2763,7 @@
           <p:cNvPr id="2" name="제목 개체 틀 1">
             <a:extLst>
               <a:ext uri="{FF2B5EF4-FFF2-40B4-BE49-F238E27FC236}">
-                <a16:creationId xmlns:a16="http://schemas.microsoft.com/office/drawing/2014/main" id="{A6D4E7E3-1E25-5EB2-38E2-15DE73148EA4}"/>
+                <a16:creationId xmlns:a16="http://schemas.microsoft.com/office/drawing/2014/main" id="{9EB43992-E9C2-672A-B227-8696D5234AD2}"/>
               </a:ext>
             </a:extLst>
           </p:cNvPr>
@@ -2801,7 +2801,7 @@
           <p:cNvPr id="3" name="텍스트 개체 틀 2">
             <a:extLst>
               <a:ext uri="{FF2B5EF4-FFF2-40B4-BE49-F238E27FC236}">
-                <a16:creationId xmlns:a16="http://schemas.microsoft.com/office/drawing/2014/main" id="{F1263AAA-8D2D-C1F0-5274-CFFD41BF292C}"/>
+                <a16:creationId xmlns:a16="http://schemas.microsoft.com/office/drawing/2014/main" id="{B0B24729-3D38-D9B8-8501-5A807B999D0A}"/>
               </a:ext>
             </a:extLst>
           </p:cNvPr>
@@ -2868,7 +2868,7 @@
           <p:cNvPr id="4" name="날짜 개체 틀 3">
             <a:extLst>
               <a:ext uri="{FF2B5EF4-FFF2-40B4-BE49-F238E27FC236}">
-                <a16:creationId xmlns:a16="http://schemas.microsoft.com/office/drawing/2014/main" id="{DB756A2E-5BDC-425E-4F30-BECA5DA91935}"/>
+                <a16:creationId xmlns:a16="http://schemas.microsoft.com/office/drawing/2014/main" id="{0A6BD229-831E-3ECA-6158-F95BCE3514CC}"/>
               </a:ext>
             </a:extLst>
           </p:cNvPr>
@@ -2902,7 +2902,7 @@
             </a:lvl1pPr>
           </a:lstStyle>
           <a:p>
-            <a:fld id="{889E8D29-9AC6-4AA8-860A-C9485B2EE338}" type="datetimeFigureOut">
+            <a:fld id="{37A6BA30-5587-4442-AF77-A7B435B4C7C8}" type="datetimeFigureOut">
               <a:rPr lang="ko-KR" altLang="en-US" smtClean="0"/>
               <a:t>2026-06-19</a:t>
             </a:fld>
@@ -2915,7 +2915,7 @@
           <p:cNvPr id="5" name="바닥글 개체 틀 4">
             <a:extLst>
               <a:ext uri="{FF2B5EF4-FFF2-40B4-BE49-F238E27FC236}">
-                <a16:creationId xmlns:a16="http://schemas.microsoft.com/office/drawing/2014/main" id="{2A2121A7-BF1F-7706-FEBF-9F5CA038AED8}"/>
+                <a16:creationId xmlns:a16="http://schemas.microsoft.com/office/drawing/2014/main" id="{3FE6A4C6-536B-CF6C-AE80-3B8825B16AA3}"/>
               </a:ext>
             </a:extLst>
           </p:cNvPr>
@@ -2958,7 +2958,7 @@
           <p:cNvPr id="6" name="슬라이드 번호 개체 틀 5">
             <a:extLst>
               <a:ext uri="{FF2B5EF4-FFF2-40B4-BE49-F238E27FC236}">
-                <a16:creationId xmlns:a16="http://schemas.microsoft.com/office/drawing/2014/main" id="{44505381-E41E-D6F4-2333-62D341CA60C7}"/>
+                <a16:creationId xmlns:a16="http://schemas.microsoft.com/office/drawing/2014/main" id="{3A36A527-F2C3-C4F7-9152-3353B5BB14F2}"/>
               </a:ext>
             </a:extLst>
           </p:cNvPr>
@@ -2992,7 +2992,7 @@
             </a:lvl1pPr>
           </a:lstStyle>
           <a:p>
-            <a:fld id="{E2A9101B-4DE9-41B7-92B7-E017EA92F55E}" type="slidenum">
+            <a:fld id="{D1DEAAE1-9523-4F91-9AA1-FE659F1DC52B}" type="slidenum">
               <a:rPr lang="ko-KR" altLang="en-US" smtClean="0"/>
               <a:t>‹#›</a:t>
             </a:fld>
@@ -3003,7 +3003,7 @@
     </p:spTree>
     <p:extLst>
       <p:ext uri="{BB962C8B-B14F-4D97-AF65-F5344CB8AC3E}">
-        <p14:creationId xmlns:p14="http://schemas.microsoft.com/office/powerpoint/2010/main" val="1680678535"/>
+        <p14:creationId xmlns:p14="http://schemas.microsoft.com/office/powerpoint/2010/main" val="4178311776"/>
       </p:ext>
     </p:extLst>
   </p:cSld>
@@ -3326,7 +3326,7 @@
           <p:cNvPr id="3" name="그래픽 2">
             <a:extLst>
               <a:ext uri="{FF2B5EF4-FFF2-40B4-BE49-F238E27FC236}">
-                <a16:creationId xmlns:a16="http://schemas.microsoft.com/office/drawing/2014/main" id="{E76A1812-19F2-B746-6F18-C2CB0499C852}"/>
+                <a16:creationId xmlns:a16="http://schemas.microsoft.com/office/drawing/2014/main" id="{8666F243-5E7E-E063-7690-285F5A1CFB72}"/>
               </a:ext>
             </a:extLst>
           </p:cNvPr>
@@ -3360,7 +3360,7 @@
     </p:spTree>
     <p:extLst>
       <p:ext uri="{BB962C8B-B14F-4D97-AF65-F5344CB8AC3E}">
-        <p14:creationId xmlns:p14="http://schemas.microsoft.com/office/powerpoint/2010/main" val="2050486254"/>
+        <p14:creationId xmlns:p14="http://schemas.microsoft.com/office/powerpoint/2010/main" val="604552231"/>
       </p:ext>
     </p:extLst>
   </p:cSld>

--- a/docs/assets/infographic-seed-gallery.pptx
+++ b/docs/assets/infographic-seed-gallery.pptx
@@ -129,7 +129,7 @@
           <p:cNvPr id="2" name="제목 1">
             <a:extLst>
               <a:ext uri="{FF2B5EF4-FFF2-40B4-BE49-F238E27FC236}">
-                <a16:creationId xmlns:a16="http://schemas.microsoft.com/office/drawing/2014/main" id="{AFC9275B-E053-C8AE-5CD4-405DFEECBB15}"/>
+                <a16:creationId xmlns:a16="http://schemas.microsoft.com/office/drawing/2014/main" id="{BF808252-9F41-AA7F-BC7E-F1CFD733A803}"/>
               </a:ext>
             </a:extLst>
           </p:cNvPr>
@@ -166,7 +166,7 @@
           <p:cNvPr id="3" name="부제목 2">
             <a:extLst>
               <a:ext uri="{FF2B5EF4-FFF2-40B4-BE49-F238E27FC236}">
-                <a16:creationId xmlns:a16="http://schemas.microsoft.com/office/drawing/2014/main" id="{87E3C6B0-B908-B4E9-C337-1990D41CD154}"/>
+                <a16:creationId xmlns:a16="http://schemas.microsoft.com/office/drawing/2014/main" id="{14AF7F92-B0C7-452E-F225-9827294CF50D}"/>
               </a:ext>
             </a:extLst>
           </p:cNvPr>
@@ -236,7 +236,7 @@
           <p:cNvPr id="4" name="날짜 개체 틀 3">
             <a:extLst>
               <a:ext uri="{FF2B5EF4-FFF2-40B4-BE49-F238E27FC236}">
-                <a16:creationId xmlns:a16="http://schemas.microsoft.com/office/drawing/2014/main" id="{1BD14F70-4CA9-CA47-19DF-895FB64669A2}"/>
+                <a16:creationId xmlns:a16="http://schemas.microsoft.com/office/drawing/2014/main" id="{98492FD4-9DB7-E864-2730-B2D9A6CB3265}"/>
               </a:ext>
             </a:extLst>
           </p:cNvPr>
@@ -252,9 +252,9 @@
           <a:bodyPr/>
           <a:lstStyle/>
           <a:p>
-            <a:fld id="{37A6BA30-5587-4442-AF77-A7B435B4C7C8}" type="datetimeFigureOut">
+            <a:fld id="{43E4A4A8-B4B0-45DC-B516-12D2C29E74C6}" type="datetimeFigureOut">
               <a:rPr lang="ko-KR" altLang="en-US" smtClean="0"/>
-              <a:t>2026-06-19</a:t>
+              <a:t>2026-06-20</a:t>
             </a:fld>
             <a:endParaRPr lang="ko-KR" altLang="en-US"/>
           </a:p>
@@ -265,7 +265,7 @@
           <p:cNvPr id="5" name="바닥글 개체 틀 4">
             <a:extLst>
               <a:ext uri="{FF2B5EF4-FFF2-40B4-BE49-F238E27FC236}">
-                <a16:creationId xmlns:a16="http://schemas.microsoft.com/office/drawing/2014/main" id="{47680386-C879-CDE1-BE2F-B3626D4E23FD}"/>
+                <a16:creationId xmlns:a16="http://schemas.microsoft.com/office/drawing/2014/main" id="{CB6179B8-3C8B-AB43-37CB-7489EF50B60D}"/>
               </a:ext>
             </a:extLst>
           </p:cNvPr>
@@ -290,7 +290,7 @@
           <p:cNvPr id="6" name="슬라이드 번호 개체 틀 5">
             <a:extLst>
               <a:ext uri="{FF2B5EF4-FFF2-40B4-BE49-F238E27FC236}">
-                <a16:creationId xmlns:a16="http://schemas.microsoft.com/office/drawing/2014/main" id="{46D18647-E3FE-01AA-F35C-9D6AAC75C6B2}"/>
+                <a16:creationId xmlns:a16="http://schemas.microsoft.com/office/drawing/2014/main" id="{98256017-3783-5F68-CEFE-E0BC6E63FB61}"/>
               </a:ext>
             </a:extLst>
           </p:cNvPr>
@@ -306,7 +306,7 @@
           <a:bodyPr/>
           <a:lstStyle/>
           <a:p>
-            <a:fld id="{D1DEAAE1-9523-4F91-9AA1-FE659F1DC52B}" type="slidenum">
+            <a:fld id="{DA293E9B-4C70-475B-B5B5-C6D1CDF11403}" type="slidenum">
               <a:rPr lang="ko-KR" altLang="en-US" smtClean="0"/>
               <a:t>‹#›</a:t>
             </a:fld>
@@ -317,7 +317,7 @@
     </p:spTree>
     <p:extLst>
       <p:ext uri="{BB962C8B-B14F-4D97-AF65-F5344CB8AC3E}">
-        <p14:creationId xmlns:p14="http://schemas.microsoft.com/office/powerpoint/2010/main" val="2658028390"/>
+        <p14:creationId xmlns:p14="http://schemas.microsoft.com/office/powerpoint/2010/main" val="1251835415"/>
       </p:ext>
     </p:extLst>
   </p:cSld>
@@ -349,7 +349,7 @@
           <p:cNvPr id="2" name="제목 1">
             <a:extLst>
               <a:ext uri="{FF2B5EF4-FFF2-40B4-BE49-F238E27FC236}">
-                <a16:creationId xmlns:a16="http://schemas.microsoft.com/office/drawing/2014/main" id="{53CCBA7B-E095-E088-663A-E54EF243BF39}"/>
+                <a16:creationId xmlns:a16="http://schemas.microsoft.com/office/drawing/2014/main" id="{7A03111E-808B-3FEF-5601-BD6C49630FEC}"/>
               </a:ext>
             </a:extLst>
           </p:cNvPr>
@@ -377,7 +377,7 @@
           <p:cNvPr id="3" name="세로 텍스트 개체 틀 2">
             <a:extLst>
               <a:ext uri="{FF2B5EF4-FFF2-40B4-BE49-F238E27FC236}">
-                <a16:creationId xmlns:a16="http://schemas.microsoft.com/office/drawing/2014/main" id="{266B73D9-2A24-494E-7CB9-A1FBEC6BAE49}"/>
+                <a16:creationId xmlns:a16="http://schemas.microsoft.com/office/drawing/2014/main" id="{05F6DCD3-54B4-0B60-9E06-F8FCAF07760A}"/>
               </a:ext>
             </a:extLst>
           </p:cNvPr>
@@ -434,7 +434,7 @@
           <p:cNvPr id="4" name="날짜 개체 틀 3">
             <a:extLst>
               <a:ext uri="{FF2B5EF4-FFF2-40B4-BE49-F238E27FC236}">
-                <a16:creationId xmlns:a16="http://schemas.microsoft.com/office/drawing/2014/main" id="{8ED0663D-E578-43D3-E2AD-5D4C4C1E01AD}"/>
+                <a16:creationId xmlns:a16="http://schemas.microsoft.com/office/drawing/2014/main" id="{F80A89B7-9A61-63F1-081E-A491944C2B64}"/>
               </a:ext>
             </a:extLst>
           </p:cNvPr>
@@ -450,9 +450,9 @@
           <a:bodyPr/>
           <a:lstStyle/>
           <a:p>
-            <a:fld id="{37A6BA30-5587-4442-AF77-A7B435B4C7C8}" type="datetimeFigureOut">
+            <a:fld id="{43E4A4A8-B4B0-45DC-B516-12D2C29E74C6}" type="datetimeFigureOut">
               <a:rPr lang="ko-KR" altLang="en-US" smtClean="0"/>
-              <a:t>2026-06-19</a:t>
+              <a:t>2026-06-20</a:t>
             </a:fld>
             <a:endParaRPr lang="ko-KR" altLang="en-US"/>
           </a:p>
@@ -463,7 +463,7 @@
           <p:cNvPr id="5" name="바닥글 개체 틀 4">
             <a:extLst>
               <a:ext uri="{FF2B5EF4-FFF2-40B4-BE49-F238E27FC236}">
-                <a16:creationId xmlns:a16="http://schemas.microsoft.com/office/drawing/2014/main" id="{CB9CEC0A-652D-3B0C-BAF0-4297569131D0}"/>
+                <a16:creationId xmlns:a16="http://schemas.microsoft.com/office/drawing/2014/main" id="{51C99ECC-A5C8-DC6D-E806-C8D82F5BF93C}"/>
               </a:ext>
             </a:extLst>
           </p:cNvPr>
@@ -488,7 +488,7 @@
           <p:cNvPr id="6" name="슬라이드 번호 개체 틀 5">
             <a:extLst>
               <a:ext uri="{FF2B5EF4-FFF2-40B4-BE49-F238E27FC236}">
-                <a16:creationId xmlns:a16="http://schemas.microsoft.com/office/drawing/2014/main" id="{AB7F0FB3-6A06-F1FF-197E-BC9BC08C42D9}"/>
+                <a16:creationId xmlns:a16="http://schemas.microsoft.com/office/drawing/2014/main" id="{11A169AB-B5C5-44A3-B759-753907C57F4F}"/>
               </a:ext>
             </a:extLst>
           </p:cNvPr>
@@ -504,7 +504,7 @@
           <a:bodyPr/>
           <a:lstStyle/>
           <a:p>
-            <a:fld id="{D1DEAAE1-9523-4F91-9AA1-FE659F1DC52B}" type="slidenum">
+            <a:fld id="{DA293E9B-4C70-475B-B5B5-C6D1CDF11403}" type="slidenum">
               <a:rPr lang="ko-KR" altLang="en-US" smtClean="0"/>
               <a:t>‹#›</a:t>
             </a:fld>
@@ -515,7 +515,7 @@
     </p:spTree>
     <p:extLst>
       <p:ext uri="{BB962C8B-B14F-4D97-AF65-F5344CB8AC3E}">
-        <p14:creationId xmlns:p14="http://schemas.microsoft.com/office/powerpoint/2010/main" val="2360600143"/>
+        <p14:creationId xmlns:p14="http://schemas.microsoft.com/office/powerpoint/2010/main" val="4056151214"/>
       </p:ext>
     </p:extLst>
   </p:cSld>
@@ -547,7 +547,7 @@
           <p:cNvPr id="2" name="세로 제목 1">
             <a:extLst>
               <a:ext uri="{FF2B5EF4-FFF2-40B4-BE49-F238E27FC236}">
-                <a16:creationId xmlns:a16="http://schemas.microsoft.com/office/drawing/2014/main" id="{BD948238-7B16-F32A-32D1-90033B4F3477}"/>
+                <a16:creationId xmlns:a16="http://schemas.microsoft.com/office/drawing/2014/main" id="{9E83CA69-FF01-AF99-6793-8D0B1F570397}"/>
               </a:ext>
             </a:extLst>
           </p:cNvPr>
@@ -580,7 +580,7 @@
           <p:cNvPr id="3" name="세로 텍스트 개체 틀 2">
             <a:extLst>
               <a:ext uri="{FF2B5EF4-FFF2-40B4-BE49-F238E27FC236}">
-                <a16:creationId xmlns:a16="http://schemas.microsoft.com/office/drawing/2014/main" id="{72E3D09B-9C5C-A842-0B39-5060D9BB9D2C}"/>
+                <a16:creationId xmlns:a16="http://schemas.microsoft.com/office/drawing/2014/main" id="{5295330D-711F-AEB1-33CA-24B2A0015F0C}"/>
               </a:ext>
             </a:extLst>
           </p:cNvPr>
@@ -642,7 +642,7 @@
           <p:cNvPr id="4" name="날짜 개체 틀 3">
             <a:extLst>
               <a:ext uri="{FF2B5EF4-FFF2-40B4-BE49-F238E27FC236}">
-                <a16:creationId xmlns:a16="http://schemas.microsoft.com/office/drawing/2014/main" id="{6709CBEC-CBB1-3ABB-847D-545D5398C28D}"/>
+                <a16:creationId xmlns:a16="http://schemas.microsoft.com/office/drawing/2014/main" id="{AFE2432A-8E60-EC80-73E7-C4A1D7A7BA37}"/>
               </a:ext>
             </a:extLst>
           </p:cNvPr>
@@ -658,9 +658,9 @@
           <a:bodyPr/>
           <a:lstStyle/>
           <a:p>
-            <a:fld id="{37A6BA30-5587-4442-AF77-A7B435B4C7C8}" type="datetimeFigureOut">
+            <a:fld id="{43E4A4A8-B4B0-45DC-B516-12D2C29E74C6}" type="datetimeFigureOut">
               <a:rPr lang="ko-KR" altLang="en-US" smtClean="0"/>
-              <a:t>2026-06-19</a:t>
+              <a:t>2026-06-20</a:t>
             </a:fld>
             <a:endParaRPr lang="ko-KR" altLang="en-US"/>
           </a:p>
@@ -671,7 +671,7 @@
           <p:cNvPr id="5" name="바닥글 개체 틀 4">
             <a:extLst>
               <a:ext uri="{FF2B5EF4-FFF2-40B4-BE49-F238E27FC236}">
-                <a16:creationId xmlns:a16="http://schemas.microsoft.com/office/drawing/2014/main" id="{20D4665C-0207-75A2-0883-3B395B15F32C}"/>
+                <a16:creationId xmlns:a16="http://schemas.microsoft.com/office/drawing/2014/main" id="{4FFB9448-D113-38A1-60EF-69BB685500B8}"/>
               </a:ext>
             </a:extLst>
           </p:cNvPr>
@@ -696,7 +696,7 @@
           <p:cNvPr id="6" name="슬라이드 번호 개체 틀 5">
             <a:extLst>
               <a:ext uri="{FF2B5EF4-FFF2-40B4-BE49-F238E27FC236}">
-                <a16:creationId xmlns:a16="http://schemas.microsoft.com/office/drawing/2014/main" id="{6B5FFA6C-E561-F45E-8EF4-445AA3ABD9E6}"/>
+                <a16:creationId xmlns:a16="http://schemas.microsoft.com/office/drawing/2014/main" id="{6B2D2B8C-4257-6446-4A02-3CF0047B3574}"/>
               </a:ext>
             </a:extLst>
           </p:cNvPr>
@@ -712,7 +712,7 @@
           <a:bodyPr/>
           <a:lstStyle/>
           <a:p>
-            <a:fld id="{D1DEAAE1-9523-4F91-9AA1-FE659F1DC52B}" type="slidenum">
+            <a:fld id="{DA293E9B-4C70-475B-B5B5-C6D1CDF11403}" type="slidenum">
               <a:rPr lang="ko-KR" altLang="en-US" smtClean="0"/>
               <a:t>‹#›</a:t>
             </a:fld>
@@ -723,7 +723,7 @@
     </p:spTree>
     <p:extLst>
       <p:ext uri="{BB962C8B-B14F-4D97-AF65-F5344CB8AC3E}">
-        <p14:creationId xmlns:p14="http://schemas.microsoft.com/office/powerpoint/2010/main" val="3997767716"/>
+        <p14:creationId xmlns:p14="http://schemas.microsoft.com/office/powerpoint/2010/main" val="944839595"/>
       </p:ext>
     </p:extLst>
   </p:cSld>
@@ -755,7 +755,7 @@
           <p:cNvPr id="2" name="제목 1">
             <a:extLst>
               <a:ext uri="{FF2B5EF4-FFF2-40B4-BE49-F238E27FC236}">
-                <a16:creationId xmlns:a16="http://schemas.microsoft.com/office/drawing/2014/main" id="{5A734291-DC03-9D00-C1B5-5FFBF18013E4}"/>
+                <a16:creationId xmlns:a16="http://schemas.microsoft.com/office/drawing/2014/main" id="{75E2402C-D230-B612-B365-535E96EBDE31}"/>
               </a:ext>
             </a:extLst>
           </p:cNvPr>
@@ -783,7 +783,7 @@
           <p:cNvPr id="3" name="내용 개체 틀 2">
             <a:extLst>
               <a:ext uri="{FF2B5EF4-FFF2-40B4-BE49-F238E27FC236}">
-                <a16:creationId xmlns:a16="http://schemas.microsoft.com/office/drawing/2014/main" id="{F10DF0FD-CDCA-F54B-B44B-619EEFE52DDD}"/>
+                <a16:creationId xmlns:a16="http://schemas.microsoft.com/office/drawing/2014/main" id="{84DB5EEB-9713-5D74-2A1B-A5BAFC214F16}"/>
               </a:ext>
             </a:extLst>
           </p:cNvPr>
@@ -840,7 +840,7 @@
           <p:cNvPr id="4" name="날짜 개체 틀 3">
             <a:extLst>
               <a:ext uri="{FF2B5EF4-FFF2-40B4-BE49-F238E27FC236}">
-                <a16:creationId xmlns:a16="http://schemas.microsoft.com/office/drawing/2014/main" id="{535893D4-0035-31F0-E84C-7C34A93DCB19}"/>
+                <a16:creationId xmlns:a16="http://schemas.microsoft.com/office/drawing/2014/main" id="{8C15A69A-1B82-FE1E-F7A1-840856F450DE}"/>
               </a:ext>
             </a:extLst>
           </p:cNvPr>
@@ -856,9 +856,9 @@
           <a:bodyPr/>
           <a:lstStyle/>
           <a:p>
-            <a:fld id="{37A6BA30-5587-4442-AF77-A7B435B4C7C8}" type="datetimeFigureOut">
+            <a:fld id="{43E4A4A8-B4B0-45DC-B516-12D2C29E74C6}" type="datetimeFigureOut">
               <a:rPr lang="ko-KR" altLang="en-US" smtClean="0"/>
-              <a:t>2026-06-19</a:t>
+              <a:t>2026-06-20</a:t>
             </a:fld>
             <a:endParaRPr lang="ko-KR" altLang="en-US"/>
           </a:p>
@@ -869,7 +869,7 @@
           <p:cNvPr id="5" name="바닥글 개체 틀 4">
             <a:extLst>
               <a:ext uri="{FF2B5EF4-FFF2-40B4-BE49-F238E27FC236}">
-                <a16:creationId xmlns:a16="http://schemas.microsoft.com/office/drawing/2014/main" id="{709223AE-DFC9-E5A5-4DB2-2C9951DC3380}"/>
+                <a16:creationId xmlns:a16="http://schemas.microsoft.com/office/drawing/2014/main" id="{4D2FD388-EB9B-F899-9678-37C72931B445}"/>
               </a:ext>
             </a:extLst>
           </p:cNvPr>
@@ -894,7 +894,7 @@
           <p:cNvPr id="6" name="슬라이드 번호 개체 틀 5">
             <a:extLst>
               <a:ext uri="{FF2B5EF4-FFF2-40B4-BE49-F238E27FC236}">
-                <a16:creationId xmlns:a16="http://schemas.microsoft.com/office/drawing/2014/main" id="{78A75397-7286-7095-BC2F-B38B311E3695}"/>
+                <a16:creationId xmlns:a16="http://schemas.microsoft.com/office/drawing/2014/main" id="{9D073713-D0FE-1682-9798-92D5BB14EFE8}"/>
               </a:ext>
             </a:extLst>
           </p:cNvPr>
@@ -910,7 +910,7 @@
           <a:bodyPr/>
           <a:lstStyle/>
           <a:p>
-            <a:fld id="{D1DEAAE1-9523-4F91-9AA1-FE659F1DC52B}" type="slidenum">
+            <a:fld id="{DA293E9B-4C70-475B-B5B5-C6D1CDF11403}" type="slidenum">
               <a:rPr lang="ko-KR" altLang="en-US" smtClean="0"/>
               <a:t>‹#›</a:t>
             </a:fld>
@@ -921,7 +921,7 @@
     </p:spTree>
     <p:extLst>
       <p:ext uri="{BB962C8B-B14F-4D97-AF65-F5344CB8AC3E}">
-        <p14:creationId xmlns:p14="http://schemas.microsoft.com/office/powerpoint/2010/main" val="1064622322"/>
+        <p14:creationId xmlns:p14="http://schemas.microsoft.com/office/powerpoint/2010/main" val="3522726834"/>
       </p:ext>
     </p:extLst>
   </p:cSld>
@@ -953,7 +953,7 @@
           <p:cNvPr id="2" name="제목 1">
             <a:extLst>
               <a:ext uri="{FF2B5EF4-FFF2-40B4-BE49-F238E27FC236}">
-                <a16:creationId xmlns:a16="http://schemas.microsoft.com/office/drawing/2014/main" id="{0C6CE29E-D438-D296-5C70-B57AD8D51893}"/>
+                <a16:creationId xmlns:a16="http://schemas.microsoft.com/office/drawing/2014/main" id="{16FDC8F6-7D20-68B0-2AA6-A097F50A1997}"/>
               </a:ext>
             </a:extLst>
           </p:cNvPr>
@@ -990,7 +990,7 @@
           <p:cNvPr id="3" name="텍스트 개체 틀 2">
             <a:extLst>
               <a:ext uri="{FF2B5EF4-FFF2-40B4-BE49-F238E27FC236}">
-                <a16:creationId xmlns:a16="http://schemas.microsoft.com/office/drawing/2014/main" id="{6E602F27-1075-14B5-0737-A85AD0CCC0AF}"/>
+                <a16:creationId xmlns:a16="http://schemas.microsoft.com/office/drawing/2014/main" id="{052206F3-26C3-1A91-4A45-CD1F16F7ACE5}"/>
               </a:ext>
             </a:extLst>
           </p:cNvPr>
@@ -1115,7 +1115,7 @@
           <p:cNvPr id="4" name="날짜 개체 틀 3">
             <a:extLst>
               <a:ext uri="{FF2B5EF4-FFF2-40B4-BE49-F238E27FC236}">
-                <a16:creationId xmlns:a16="http://schemas.microsoft.com/office/drawing/2014/main" id="{63163966-36C6-5DF1-DD9D-20E4D7168004}"/>
+                <a16:creationId xmlns:a16="http://schemas.microsoft.com/office/drawing/2014/main" id="{709FC770-B056-1AFC-AF64-0A1ACC7B0F9D}"/>
               </a:ext>
             </a:extLst>
           </p:cNvPr>
@@ -1131,9 +1131,9 @@
           <a:bodyPr/>
           <a:lstStyle/>
           <a:p>
-            <a:fld id="{37A6BA30-5587-4442-AF77-A7B435B4C7C8}" type="datetimeFigureOut">
+            <a:fld id="{43E4A4A8-B4B0-45DC-B516-12D2C29E74C6}" type="datetimeFigureOut">
               <a:rPr lang="ko-KR" altLang="en-US" smtClean="0"/>
-              <a:t>2026-06-19</a:t>
+              <a:t>2026-06-20</a:t>
             </a:fld>
             <a:endParaRPr lang="ko-KR" altLang="en-US"/>
           </a:p>
@@ -1144,7 +1144,7 @@
           <p:cNvPr id="5" name="바닥글 개체 틀 4">
             <a:extLst>
               <a:ext uri="{FF2B5EF4-FFF2-40B4-BE49-F238E27FC236}">
-                <a16:creationId xmlns:a16="http://schemas.microsoft.com/office/drawing/2014/main" id="{32BF48D4-F04D-CE7D-6868-55AB1670FB1B}"/>
+                <a16:creationId xmlns:a16="http://schemas.microsoft.com/office/drawing/2014/main" id="{5C43959F-93EA-F634-ADE7-EB33A9DC8A35}"/>
               </a:ext>
             </a:extLst>
           </p:cNvPr>
@@ -1169,7 +1169,7 @@
           <p:cNvPr id="6" name="슬라이드 번호 개체 틀 5">
             <a:extLst>
               <a:ext uri="{FF2B5EF4-FFF2-40B4-BE49-F238E27FC236}">
-                <a16:creationId xmlns:a16="http://schemas.microsoft.com/office/drawing/2014/main" id="{EB96B1E6-6892-0A28-59C3-499383CCE5F1}"/>
+                <a16:creationId xmlns:a16="http://schemas.microsoft.com/office/drawing/2014/main" id="{39164BDD-352A-DD73-7ABE-680EFE764DC7}"/>
               </a:ext>
             </a:extLst>
           </p:cNvPr>
@@ -1185,7 +1185,7 @@
           <a:bodyPr/>
           <a:lstStyle/>
           <a:p>
-            <a:fld id="{D1DEAAE1-9523-4F91-9AA1-FE659F1DC52B}" type="slidenum">
+            <a:fld id="{DA293E9B-4C70-475B-B5B5-C6D1CDF11403}" type="slidenum">
               <a:rPr lang="ko-KR" altLang="en-US" smtClean="0"/>
               <a:t>‹#›</a:t>
             </a:fld>
@@ -1196,7 +1196,7 @@
     </p:spTree>
     <p:extLst>
       <p:ext uri="{BB962C8B-B14F-4D97-AF65-F5344CB8AC3E}">
-        <p14:creationId xmlns:p14="http://schemas.microsoft.com/office/powerpoint/2010/main" val="149861998"/>
+        <p14:creationId xmlns:p14="http://schemas.microsoft.com/office/powerpoint/2010/main" val="1495531082"/>
       </p:ext>
     </p:extLst>
   </p:cSld>
@@ -1228,7 +1228,7 @@
           <p:cNvPr id="2" name="제목 1">
             <a:extLst>
               <a:ext uri="{FF2B5EF4-FFF2-40B4-BE49-F238E27FC236}">
-                <a16:creationId xmlns:a16="http://schemas.microsoft.com/office/drawing/2014/main" id="{C19C8B7D-2272-E424-0F69-E49599D6FCAB}"/>
+                <a16:creationId xmlns:a16="http://schemas.microsoft.com/office/drawing/2014/main" id="{240BDDD3-D2F5-1171-836F-0B23BFBE39BB}"/>
               </a:ext>
             </a:extLst>
           </p:cNvPr>
@@ -1256,7 +1256,7 @@
           <p:cNvPr id="3" name="내용 개체 틀 2">
             <a:extLst>
               <a:ext uri="{FF2B5EF4-FFF2-40B4-BE49-F238E27FC236}">
-                <a16:creationId xmlns:a16="http://schemas.microsoft.com/office/drawing/2014/main" id="{97AC6775-0B77-95DA-5035-D12B89CDB2B4}"/>
+                <a16:creationId xmlns:a16="http://schemas.microsoft.com/office/drawing/2014/main" id="{9DB1A758-1346-B628-D163-92625B34A2D2}"/>
               </a:ext>
             </a:extLst>
           </p:cNvPr>
@@ -1318,7 +1318,7 @@
           <p:cNvPr id="4" name="내용 개체 틀 3">
             <a:extLst>
               <a:ext uri="{FF2B5EF4-FFF2-40B4-BE49-F238E27FC236}">
-                <a16:creationId xmlns:a16="http://schemas.microsoft.com/office/drawing/2014/main" id="{E2F50498-65B2-A555-2D7E-B1FE90C16D46}"/>
+                <a16:creationId xmlns:a16="http://schemas.microsoft.com/office/drawing/2014/main" id="{6BA0F76D-4958-1BCE-3978-B95D3B8C3AED}"/>
               </a:ext>
             </a:extLst>
           </p:cNvPr>
@@ -1380,7 +1380,7 @@
           <p:cNvPr id="5" name="날짜 개체 틀 4">
             <a:extLst>
               <a:ext uri="{FF2B5EF4-FFF2-40B4-BE49-F238E27FC236}">
-                <a16:creationId xmlns:a16="http://schemas.microsoft.com/office/drawing/2014/main" id="{F4F61115-0871-C7BA-570F-3ED89E98D7D0}"/>
+                <a16:creationId xmlns:a16="http://schemas.microsoft.com/office/drawing/2014/main" id="{84847E04-8C9D-5ECD-7151-F7EAD4953CA8}"/>
               </a:ext>
             </a:extLst>
           </p:cNvPr>
@@ -1396,9 +1396,9 @@
           <a:bodyPr/>
           <a:lstStyle/>
           <a:p>
-            <a:fld id="{37A6BA30-5587-4442-AF77-A7B435B4C7C8}" type="datetimeFigureOut">
+            <a:fld id="{43E4A4A8-B4B0-45DC-B516-12D2C29E74C6}" type="datetimeFigureOut">
               <a:rPr lang="ko-KR" altLang="en-US" smtClean="0"/>
-              <a:t>2026-06-19</a:t>
+              <a:t>2026-06-20</a:t>
             </a:fld>
             <a:endParaRPr lang="ko-KR" altLang="en-US"/>
           </a:p>
@@ -1409,7 +1409,7 @@
           <p:cNvPr id="6" name="바닥글 개체 틀 5">
             <a:extLst>
               <a:ext uri="{FF2B5EF4-FFF2-40B4-BE49-F238E27FC236}">
-                <a16:creationId xmlns:a16="http://schemas.microsoft.com/office/drawing/2014/main" id="{78147BA8-6E50-1009-A7E7-E1C2A044E747}"/>
+                <a16:creationId xmlns:a16="http://schemas.microsoft.com/office/drawing/2014/main" id="{63236F74-E92D-545D-F540-27E77F0E48D0}"/>
               </a:ext>
             </a:extLst>
           </p:cNvPr>
@@ -1434,7 +1434,7 @@
           <p:cNvPr id="7" name="슬라이드 번호 개체 틀 6">
             <a:extLst>
               <a:ext uri="{FF2B5EF4-FFF2-40B4-BE49-F238E27FC236}">
-                <a16:creationId xmlns:a16="http://schemas.microsoft.com/office/drawing/2014/main" id="{A8213329-9F92-E681-5F18-447D8334581F}"/>
+                <a16:creationId xmlns:a16="http://schemas.microsoft.com/office/drawing/2014/main" id="{2DA2F67F-65AD-387E-95E0-3F37FCCA486B}"/>
               </a:ext>
             </a:extLst>
           </p:cNvPr>
@@ -1450,7 +1450,7 @@
           <a:bodyPr/>
           <a:lstStyle/>
           <a:p>
-            <a:fld id="{D1DEAAE1-9523-4F91-9AA1-FE659F1DC52B}" type="slidenum">
+            <a:fld id="{DA293E9B-4C70-475B-B5B5-C6D1CDF11403}" type="slidenum">
               <a:rPr lang="ko-KR" altLang="en-US" smtClean="0"/>
               <a:t>‹#›</a:t>
             </a:fld>
@@ -1461,7 +1461,7 @@
     </p:spTree>
     <p:extLst>
       <p:ext uri="{BB962C8B-B14F-4D97-AF65-F5344CB8AC3E}">
-        <p14:creationId xmlns:p14="http://schemas.microsoft.com/office/powerpoint/2010/main" val="3107413877"/>
+        <p14:creationId xmlns:p14="http://schemas.microsoft.com/office/powerpoint/2010/main" val="976260584"/>
       </p:ext>
     </p:extLst>
   </p:cSld>
@@ -1493,7 +1493,7 @@
           <p:cNvPr id="2" name="제목 1">
             <a:extLst>
               <a:ext uri="{FF2B5EF4-FFF2-40B4-BE49-F238E27FC236}">
-                <a16:creationId xmlns:a16="http://schemas.microsoft.com/office/drawing/2014/main" id="{2CE4859B-8E88-90FE-8836-F6164E407D39}"/>
+                <a16:creationId xmlns:a16="http://schemas.microsoft.com/office/drawing/2014/main" id="{299F57F4-1AB0-A07F-38A7-C9A6ACB1063B}"/>
               </a:ext>
             </a:extLst>
           </p:cNvPr>
@@ -1526,7 +1526,7 @@
           <p:cNvPr id="3" name="텍스트 개체 틀 2">
             <a:extLst>
               <a:ext uri="{FF2B5EF4-FFF2-40B4-BE49-F238E27FC236}">
-                <a16:creationId xmlns:a16="http://schemas.microsoft.com/office/drawing/2014/main" id="{EC368597-746F-F472-57B5-7C264905F6E6}"/>
+                <a16:creationId xmlns:a16="http://schemas.microsoft.com/office/drawing/2014/main" id="{391009DD-4E31-FEA6-042A-8B7E98438348}"/>
               </a:ext>
             </a:extLst>
           </p:cNvPr>
@@ -1597,7 +1597,7 @@
           <p:cNvPr id="4" name="내용 개체 틀 3">
             <a:extLst>
               <a:ext uri="{FF2B5EF4-FFF2-40B4-BE49-F238E27FC236}">
-                <a16:creationId xmlns:a16="http://schemas.microsoft.com/office/drawing/2014/main" id="{79ADA2B1-20D9-89E4-DC00-62766F52E6F6}"/>
+                <a16:creationId xmlns:a16="http://schemas.microsoft.com/office/drawing/2014/main" id="{340C2438-C21C-C90E-F10D-F1B471F651A1}"/>
               </a:ext>
             </a:extLst>
           </p:cNvPr>
@@ -1659,7 +1659,7 @@
           <p:cNvPr id="5" name="텍스트 개체 틀 4">
             <a:extLst>
               <a:ext uri="{FF2B5EF4-FFF2-40B4-BE49-F238E27FC236}">
-                <a16:creationId xmlns:a16="http://schemas.microsoft.com/office/drawing/2014/main" id="{005CB960-A95D-4216-8005-B3F0DE469012}"/>
+                <a16:creationId xmlns:a16="http://schemas.microsoft.com/office/drawing/2014/main" id="{AC90015F-9112-38A7-AC04-59D73A320726}"/>
               </a:ext>
             </a:extLst>
           </p:cNvPr>
@@ -1730,7 +1730,7 @@
           <p:cNvPr id="6" name="내용 개체 틀 5">
             <a:extLst>
               <a:ext uri="{FF2B5EF4-FFF2-40B4-BE49-F238E27FC236}">
-                <a16:creationId xmlns:a16="http://schemas.microsoft.com/office/drawing/2014/main" id="{930391A2-2901-883E-192D-4920CE3986BB}"/>
+                <a16:creationId xmlns:a16="http://schemas.microsoft.com/office/drawing/2014/main" id="{0987EC59-FF83-ECC8-B4A0-08C0D3077268}"/>
               </a:ext>
             </a:extLst>
           </p:cNvPr>
@@ -1792,7 +1792,7 @@
           <p:cNvPr id="7" name="날짜 개체 틀 6">
             <a:extLst>
               <a:ext uri="{FF2B5EF4-FFF2-40B4-BE49-F238E27FC236}">
-                <a16:creationId xmlns:a16="http://schemas.microsoft.com/office/drawing/2014/main" id="{F497CE13-D2D2-E71B-7C12-5D3E37CC026C}"/>
+                <a16:creationId xmlns:a16="http://schemas.microsoft.com/office/drawing/2014/main" id="{281578B1-7FBD-A367-7D4C-5424326D6C5A}"/>
               </a:ext>
             </a:extLst>
           </p:cNvPr>
@@ -1808,9 +1808,9 @@
           <a:bodyPr/>
           <a:lstStyle/>
           <a:p>
-            <a:fld id="{37A6BA30-5587-4442-AF77-A7B435B4C7C8}" type="datetimeFigureOut">
+            <a:fld id="{43E4A4A8-B4B0-45DC-B516-12D2C29E74C6}" type="datetimeFigureOut">
               <a:rPr lang="ko-KR" altLang="en-US" smtClean="0"/>
-              <a:t>2026-06-19</a:t>
+              <a:t>2026-06-20</a:t>
             </a:fld>
             <a:endParaRPr lang="ko-KR" altLang="en-US"/>
           </a:p>
@@ -1821,7 +1821,7 @@
           <p:cNvPr id="8" name="바닥글 개체 틀 7">
             <a:extLst>
               <a:ext uri="{FF2B5EF4-FFF2-40B4-BE49-F238E27FC236}">
-                <a16:creationId xmlns:a16="http://schemas.microsoft.com/office/drawing/2014/main" id="{FDA3A9C4-C3DC-C350-6D36-B98EE964B37C}"/>
+                <a16:creationId xmlns:a16="http://schemas.microsoft.com/office/drawing/2014/main" id="{8B03B8AB-DC1F-E8A0-CBDF-EAD9398E521B}"/>
               </a:ext>
             </a:extLst>
           </p:cNvPr>
@@ -1846,7 +1846,7 @@
           <p:cNvPr id="9" name="슬라이드 번호 개체 틀 8">
             <a:extLst>
               <a:ext uri="{FF2B5EF4-FFF2-40B4-BE49-F238E27FC236}">
-                <a16:creationId xmlns:a16="http://schemas.microsoft.com/office/drawing/2014/main" id="{C2559D87-3B90-D9D5-0D0E-514FCD824A4B}"/>
+                <a16:creationId xmlns:a16="http://schemas.microsoft.com/office/drawing/2014/main" id="{925CB8AB-9877-38CE-6C72-71D4D9E29540}"/>
               </a:ext>
             </a:extLst>
           </p:cNvPr>
@@ -1862,7 +1862,7 @@
           <a:bodyPr/>
           <a:lstStyle/>
           <a:p>
-            <a:fld id="{D1DEAAE1-9523-4F91-9AA1-FE659F1DC52B}" type="slidenum">
+            <a:fld id="{DA293E9B-4C70-475B-B5B5-C6D1CDF11403}" type="slidenum">
               <a:rPr lang="ko-KR" altLang="en-US" smtClean="0"/>
               <a:t>‹#›</a:t>
             </a:fld>
@@ -1873,7 +1873,7 @@
     </p:spTree>
     <p:extLst>
       <p:ext uri="{BB962C8B-B14F-4D97-AF65-F5344CB8AC3E}">
-        <p14:creationId xmlns:p14="http://schemas.microsoft.com/office/powerpoint/2010/main" val="2129526242"/>
+        <p14:creationId xmlns:p14="http://schemas.microsoft.com/office/powerpoint/2010/main" val="2484358139"/>
       </p:ext>
     </p:extLst>
   </p:cSld>
@@ -1905,7 +1905,7 @@
           <p:cNvPr id="2" name="제목 1">
             <a:extLst>
               <a:ext uri="{FF2B5EF4-FFF2-40B4-BE49-F238E27FC236}">
-                <a16:creationId xmlns:a16="http://schemas.microsoft.com/office/drawing/2014/main" id="{980C8D56-8746-A960-692A-FE92470A9E3E}"/>
+                <a16:creationId xmlns:a16="http://schemas.microsoft.com/office/drawing/2014/main" id="{07B0180F-AC70-973F-A8A1-0166A3897E08}"/>
               </a:ext>
             </a:extLst>
           </p:cNvPr>
@@ -1933,7 +1933,7 @@
           <p:cNvPr id="3" name="날짜 개체 틀 2">
             <a:extLst>
               <a:ext uri="{FF2B5EF4-FFF2-40B4-BE49-F238E27FC236}">
-                <a16:creationId xmlns:a16="http://schemas.microsoft.com/office/drawing/2014/main" id="{46AA68BF-442C-825C-2033-E79DAB8670DC}"/>
+                <a16:creationId xmlns:a16="http://schemas.microsoft.com/office/drawing/2014/main" id="{14E16062-BCA5-C798-80C7-26C92DC5A257}"/>
               </a:ext>
             </a:extLst>
           </p:cNvPr>
@@ -1949,9 +1949,9 @@
           <a:bodyPr/>
           <a:lstStyle/>
           <a:p>
-            <a:fld id="{37A6BA30-5587-4442-AF77-A7B435B4C7C8}" type="datetimeFigureOut">
+            <a:fld id="{43E4A4A8-B4B0-45DC-B516-12D2C29E74C6}" type="datetimeFigureOut">
               <a:rPr lang="ko-KR" altLang="en-US" smtClean="0"/>
-              <a:t>2026-06-19</a:t>
+              <a:t>2026-06-20</a:t>
             </a:fld>
             <a:endParaRPr lang="ko-KR" altLang="en-US"/>
           </a:p>
@@ -1962,7 +1962,7 @@
           <p:cNvPr id="4" name="바닥글 개체 틀 3">
             <a:extLst>
               <a:ext uri="{FF2B5EF4-FFF2-40B4-BE49-F238E27FC236}">
-                <a16:creationId xmlns:a16="http://schemas.microsoft.com/office/drawing/2014/main" id="{A81A38BE-80A9-A3F7-DE7A-26621E560779}"/>
+                <a16:creationId xmlns:a16="http://schemas.microsoft.com/office/drawing/2014/main" id="{5FBAC69D-0863-7E03-1C1E-111B1344AAEE}"/>
               </a:ext>
             </a:extLst>
           </p:cNvPr>
@@ -1987,7 +1987,7 @@
           <p:cNvPr id="5" name="슬라이드 번호 개체 틀 4">
             <a:extLst>
               <a:ext uri="{FF2B5EF4-FFF2-40B4-BE49-F238E27FC236}">
-                <a16:creationId xmlns:a16="http://schemas.microsoft.com/office/drawing/2014/main" id="{A3A7352E-C9EC-0905-778B-E271C5E083F8}"/>
+                <a16:creationId xmlns:a16="http://schemas.microsoft.com/office/drawing/2014/main" id="{A53F28BB-A5B9-3D76-9E89-AD362F81FAAC}"/>
               </a:ext>
             </a:extLst>
           </p:cNvPr>
@@ -2003,7 +2003,7 @@
           <a:bodyPr/>
           <a:lstStyle/>
           <a:p>
-            <a:fld id="{D1DEAAE1-9523-4F91-9AA1-FE659F1DC52B}" type="slidenum">
+            <a:fld id="{DA293E9B-4C70-475B-B5B5-C6D1CDF11403}" type="slidenum">
               <a:rPr lang="ko-KR" altLang="en-US" smtClean="0"/>
               <a:t>‹#›</a:t>
             </a:fld>
@@ -2014,7 +2014,7 @@
     </p:spTree>
     <p:extLst>
       <p:ext uri="{BB962C8B-B14F-4D97-AF65-F5344CB8AC3E}">
-        <p14:creationId xmlns:p14="http://schemas.microsoft.com/office/powerpoint/2010/main" val="186640407"/>
+        <p14:creationId xmlns:p14="http://schemas.microsoft.com/office/powerpoint/2010/main" val="46434286"/>
       </p:ext>
     </p:extLst>
   </p:cSld>
@@ -2046,7 +2046,7 @@
           <p:cNvPr id="2" name="날짜 개체 틀 1">
             <a:extLst>
               <a:ext uri="{FF2B5EF4-FFF2-40B4-BE49-F238E27FC236}">
-                <a16:creationId xmlns:a16="http://schemas.microsoft.com/office/drawing/2014/main" id="{9635F1FA-2075-FB6D-268D-A8A5097B12D8}"/>
+                <a16:creationId xmlns:a16="http://schemas.microsoft.com/office/drawing/2014/main" id="{B09BE9A0-6DB3-7516-D6EE-F7EC6A250891}"/>
               </a:ext>
             </a:extLst>
           </p:cNvPr>
@@ -2062,9 +2062,9 @@
           <a:bodyPr/>
           <a:lstStyle/>
           <a:p>
-            <a:fld id="{37A6BA30-5587-4442-AF77-A7B435B4C7C8}" type="datetimeFigureOut">
+            <a:fld id="{43E4A4A8-B4B0-45DC-B516-12D2C29E74C6}" type="datetimeFigureOut">
               <a:rPr lang="ko-KR" altLang="en-US" smtClean="0"/>
-              <a:t>2026-06-19</a:t>
+              <a:t>2026-06-20</a:t>
             </a:fld>
             <a:endParaRPr lang="ko-KR" altLang="en-US"/>
           </a:p>
@@ -2075,7 +2075,7 @@
           <p:cNvPr id="3" name="바닥글 개체 틀 2">
             <a:extLst>
               <a:ext uri="{FF2B5EF4-FFF2-40B4-BE49-F238E27FC236}">
-                <a16:creationId xmlns:a16="http://schemas.microsoft.com/office/drawing/2014/main" id="{A67EC4A0-BD51-3BDC-2959-1AF7B585B110}"/>
+                <a16:creationId xmlns:a16="http://schemas.microsoft.com/office/drawing/2014/main" id="{6171E29A-7072-AAD9-775D-EC95523BE33B}"/>
               </a:ext>
             </a:extLst>
           </p:cNvPr>
@@ -2100,7 +2100,7 @@
           <p:cNvPr id="4" name="슬라이드 번호 개체 틀 3">
             <a:extLst>
               <a:ext uri="{FF2B5EF4-FFF2-40B4-BE49-F238E27FC236}">
-                <a16:creationId xmlns:a16="http://schemas.microsoft.com/office/drawing/2014/main" id="{91EAA5F1-8B02-D1FB-5FDC-196755027E84}"/>
+                <a16:creationId xmlns:a16="http://schemas.microsoft.com/office/drawing/2014/main" id="{6A646E0B-65D0-B014-95B5-5C5FC35FE260}"/>
               </a:ext>
             </a:extLst>
           </p:cNvPr>
@@ -2116,7 +2116,7 @@
           <a:bodyPr/>
           <a:lstStyle/>
           <a:p>
-            <a:fld id="{D1DEAAE1-9523-4F91-9AA1-FE659F1DC52B}" type="slidenum">
+            <a:fld id="{DA293E9B-4C70-475B-B5B5-C6D1CDF11403}" type="slidenum">
               <a:rPr lang="ko-KR" altLang="en-US" smtClean="0"/>
               <a:t>‹#›</a:t>
             </a:fld>
@@ -2127,7 +2127,7 @@
     </p:spTree>
     <p:extLst>
       <p:ext uri="{BB962C8B-B14F-4D97-AF65-F5344CB8AC3E}">
-        <p14:creationId xmlns:p14="http://schemas.microsoft.com/office/powerpoint/2010/main" val="1651307502"/>
+        <p14:creationId xmlns:p14="http://schemas.microsoft.com/office/powerpoint/2010/main" val="4216673167"/>
       </p:ext>
     </p:extLst>
   </p:cSld>
@@ -2159,7 +2159,7 @@
           <p:cNvPr id="2" name="제목 1">
             <a:extLst>
               <a:ext uri="{FF2B5EF4-FFF2-40B4-BE49-F238E27FC236}">
-                <a16:creationId xmlns:a16="http://schemas.microsoft.com/office/drawing/2014/main" id="{81DF3020-173B-7C4A-F1D0-4901C3F15F12}"/>
+                <a16:creationId xmlns:a16="http://schemas.microsoft.com/office/drawing/2014/main" id="{BF085981-1BD0-E410-3971-4EF1386A3336}"/>
               </a:ext>
             </a:extLst>
           </p:cNvPr>
@@ -2196,7 +2196,7 @@
           <p:cNvPr id="3" name="내용 개체 틀 2">
             <a:extLst>
               <a:ext uri="{FF2B5EF4-FFF2-40B4-BE49-F238E27FC236}">
-                <a16:creationId xmlns:a16="http://schemas.microsoft.com/office/drawing/2014/main" id="{D057BEB0-56DB-B531-D251-02FA9264EC81}"/>
+                <a16:creationId xmlns:a16="http://schemas.microsoft.com/office/drawing/2014/main" id="{14A2564F-D3B5-959F-9E26-D869B800E574}"/>
               </a:ext>
             </a:extLst>
           </p:cNvPr>
@@ -2286,7 +2286,7 @@
           <p:cNvPr id="4" name="텍스트 개체 틀 3">
             <a:extLst>
               <a:ext uri="{FF2B5EF4-FFF2-40B4-BE49-F238E27FC236}">
-                <a16:creationId xmlns:a16="http://schemas.microsoft.com/office/drawing/2014/main" id="{7D66F40D-7176-67A5-1F5A-21FC5C54F5F2}"/>
+                <a16:creationId xmlns:a16="http://schemas.microsoft.com/office/drawing/2014/main" id="{1C614818-D98B-84D2-6F93-3B83E2F5E9CE}"/>
               </a:ext>
             </a:extLst>
           </p:cNvPr>
@@ -2357,7 +2357,7 @@
           <p:cNvPr id="5" name="날짜 개체 틀 4">
             <a:extLst>
               <a:ext uri="{FF2B5EF4-FFF2-40B4-BE49-F238E27FC236}">
-                <a16:creationId xmlns:a16="http://schemas.microsoft.com/office/drawing/2014/main" id="{858EB0C4-DA5B-9CD7-804C-B92ABEE768A2}"/>
+                <a16:creationId xmlns:a16="http://schemas.microsoft.com/office/drawing/2014/main" id="{C1A698E3-0A70-A7E1-DEA3-8192DB4B481B}"/>
               </a:ext>
             </a:extLst>
           </p:cNvPr>
@@ -2373,9 +2373,9 @@
           <a:bodyPr/>
           <a:lstStyle/>
           <a:p>
-            <a:fld id="{37A6BA30-5587-4442-AF77-A7B435B4C7C8}" type="datetimeFigureOut">
+            <a:fld id="{43E4A4A8-B4B0-45DC-B516-12D2C29E74C6}" type="datetimeFigureOut">
               <a:rPr lang="ko-KR" altLang="en-US" smtClean="0"/>
-              <a:t>2026-06-19</a:t>
+              <a:t>2026-06-20</a:t>
             </a:fld>
             <a:endParaRPr lang="ko-KR" altLang="en-US"/>
           </a:p>
@@ -2386,7 +2386,7 @@
           <p:cNvPr id="6" name="바닥글 개체 틀 5">
             <a:extLst>
               <a:ext uri="{FF2B5EF4-FFF2-40B4-BE49-F238E27FC236}">
-                <a16:creationId xmlns:a16="http://schemas.microsoft.com/office/drawing/2014/main" id="{28978C9C-D6C9-4E0A-D421-86276812EF00}"/>
+                <a16:creationId xmlns:a16="http://schemas.microsoft.com/office/drawing/2014/main" id="{C77C85AF-E453-688A-ED8D-BA9A1DC65BAC}"/>
               </a:ext>
             </a:extLst>
           </p:cNvPr>
@@ -2411,7 +2411,7 @@
           <p:cNvPr id="7" name="슬라이드 번호 개체 틀 6">
             <a:extLst>
               <a:ext uri="{FF2B5EF4-FFF2-40B4-BE49-F238E27FC236}">
-                <a16:creationId xmlns:a16="http://schemas.microsoft.com/office/drawing/2014/main" id="{D4435DF5-B289-33FE-8848-C659AB4C2C8C}"/>
+                <a16:creationId xmlns:a16="http://schemas.microsoft.com/office/drawing/2014/main" id="{52720364-52AD-E5F8-FBC7-10870CBA2964}"/>
               </a:ext>
             </a:extLst>
           </p:cNvPr>
@@ -2427,7 +2427,7 @@
           <a:bodyPr/>
           <a:lstStyle/>
           <a:p>
-            <a:fld id="{D1DEAAE1-9523-4F91-9AA1-FE659F1DC52B}" type="slidenum">
+            <a:fld id="{DA293E9B-4C70-475B-B5B5-C6D1CDF11403}" type="slidenum">
               <a:rPr lang="ko-KR" altLang="en-US" smtClean="0"/>
               <a:t>‹#›</a:t>
             </a:fld>
@@ -2438,7 +2438,7 @@
     </p:spTree>
     <p:extLst>
       <p:ext uri="{BB962C8B-B14F-4D97-AF65-F5344CB8AC3E}">
-        <p14:creationId xmlns:p14="http://schemas.microsoft.com/office/powerpoint/2010/main" val="330747519"/>
+        <p14:creationId xmlns:p14="http://schemas.microsoft.com/office/powerpoint/2010/main" val="2657476335"/>
       </p:ext>
     </p:extLst>
   </p:cSld>
@@ -2470,7 +2470,7 @@
           <p:cNvPr id="2" name="제목 1">
             <a:extLst>
               <a:ext uri="{FF2B5EF4-FFF2-40B4-BE49-F238E27FC236}">
-                <a16:creationId xmlns:a16="http://schemas.microsoft.com/office/drawing/2014/main" id="{AF4FDF3C-D5AB-D978-E17A-28CD2C41B009}"/>
+                <a16:creationId xmlns:a16="http://schemas.microsoft.com/office/drawing/2014/main" id="{9FAC76D3-38EF-62E4-9AE3-F484B7E262C5}"/>
               </a:ext>
             </a:extLst>
           </p:cNvPr>
@@ -2507,7 +2507,7 @@
           <p:cNvPr id="3" name="그림 개체 틀 2">
             <a:extLst>
               <a:ext uri="{FF2B5EF4-FFF2-40B4-BE49-F238E27FC236}">
-                <a16:creationId xmlns:a16="http://schemas.microsoft.com/office/drawing/2014/main" id="{368C3EB7-F7FE-D849-BF43-172FDC04310A}"/>
+                <a16:creationId xmlns:a16="http://schemas.microsoft.com/office/drawing/2014/main" id="{74F5EE8B-2126-F985-644C-8409DDEEE9FD}"/>
               </a:ext>
             </a:extLst>
           </p:cNvPr>
@@ -2574,7 +2574,7 @@
           <p:cNvPr id="4" name="텍스트 개체 틀 3">
             <a:extLst>
               <a:ext uri="{FF2B5EF4-FFF2-40B4-BE49-F238E27FC236}">
-                <a16:creationId xmlns:a16="http://schemas.microsoft.com/office/drawing/2014/main" id="{B1FAE160-2765-7AB6-B51F-8EFBBDEED85A}"/>
+                <a16:creationId xmlns:a16="http://schemas.microsoft.com/office/drawing/2014/main" id="{3483E5D8-5C30-CFEB-3638-0459D0EC18CE}"/>
               </a:ext>
             </a:extLst>
           </p:cNvPr>
@@ -2645,7 +2645,7 @@
           <p:cNvPr id="5" name="날짜 개체 틀 4">
             <a:extLst>
               <a:ext uri="{FF2B5EF4-FFF2-40B4-BE49-F238E27FC236}">
-                <a16:creationId xmlns:a16="http://schemas.microsoft.com/office/drawing/2014/main" id="{217D1A3C-351C-A1DC-4AE4-C08F2103A3A5}"/>
+                <a16:creationId xmlns:a16="http://schemas.microsoft.com/office/drawing/2014/main" id="{1B3E7CDD-F1BB-85FC-95EB-AF84238C52E8}"/>
               </a:ext>
             </a:extLst>
           </p:cNvPr>
@@ -2661,9 +2661,9 @@
           <a:bodyPr/>
           <a:lstStyle/>
           <a:p>
-            <a:fld id="{37A6BA30-5587-4442-AF77-A7B435B4C7C8}" type="datetimeFigureOut">
+            <a:fld id="{43E4A4A8-B4B0-45DC-B516-12D2C29E74C6}" type="datetimeFigureOut">
               <a:rPr lang="ko-KR" altLang="en-US" smtClean="0"/>
-              <a:t>2026-06-19</a:t>
+              <a:t>2026-06-20</a:t>
             </a:fld>
             <a:endParaRPr lang="ko-KR" altLang="en-US"/>
           </a:p>
@@ -2674,7 +2674,7 @@
           <p:cNvPr id="6" name="바닥글 개체 틀 5">
             <a:extLst>
               <a:ext uri="{FF2B5EF4-FFF2-40B4-BE49-F238E27FC236}">
-                <a16:creationId xmlns:a16="http://schemas.microsoft.com/office/drawing/2014/main" id="{BC97E207-5D4A-1A2E-9364-6D0D82CC8DA4}"/>
+                <a16:creationId xmlns:a16="http://schemas.microsoft.com/office/drawing/2014/main" id="{DA98E4C2-9766-1139-42A0-B4A0B084E8F9}"/>
               </a:ext>
             </a:extLst>
           </p:cNvPr>
@@ -2699,7 +2699,7 @@
           <p:cNvPr id="7" name="슬라이드 번호 개체 틀 6">
             <a:extLst>
               <a:ext uri="{FF2B5EF4-FFF2-40B4-BE49-F238E27FC236}">
-                <a16:creationId xmlns:a16="http://schemas.microsoft.com/office/drawing/2014/main" id="{100A9759-5D75-1EBF-01DC-9EC54FA6E530}"/>
+                <a16:creationId xmlns:a16="http://schemas.microsoft.com/office/drawing/2014/main" id="{EF4B6C76-A677-CAB7-9293-189FCBC25A42}"/>
               </a:ext>
             </a:extLst>
           </p:cNvPr>
@@ -2715,7 +2715,7 @@
           <a:bodyPr/>
           <a:lstStyle/>
           <a:p>
-            <a:fld id="{D1DEAAE1-9523-4F91-9AA1-FE659F1DC52B}" type="slidenum">
+            <a:fld id="{DA293E9B-4C70-475B-B5B5-C6D1CDF11403}" type="slidenum">
               <a:rPr lang="ko-KR" altLang="en-US" smtClean="0"/>
               <a:t>‹#›</a:t>
             </a:fld>
@@ -2726,7 +2726,7 @@
     </p:spTree>
     <p:extLst>
       <p:ext uri="{BB962C8B-B14F-4D97-AF65-F5344CB8AC3E}">
-        <p14:creationId xmlns:p14="http://schemas.microsoft.com/office/powerpoint/2010/main" val="1120943280"/>
+        <p14:creationId xmlns:p14="http://schemas.microsoft.com/office/powerpoint/2010/main" val="2590053105"/>
       </p:ext>
     </p:extLst>
   </p:cSld>
@@ -2763,7 +2763,7 @@
           <p:cNvPr id="2" name="제목 개체 틀 1">
             <a:extLst>
               <a:ext uri="{FF2B5EF4-FFF2-40B4-BE49-F238E27FC236}">
-                <a16:creationId xmlns:a16="http://schemas.microsoft.com/office/drawing/2014/main" id="{9EB43992-E9C2-672A-B227-8696D5234AD2}"/>
+                <a16:creationId xmlns:a16="http://schemas.microsoft.com/office/drawing/2014/main" id="{51851B9C-98EB-9D24-317F-8E358421F825}"/>
               </a:ext>
             </a:extLst>
           </p:cNvPr>
@@ -2801,7 +2801,7 @@
           <p:cNvPr id="3" name="텍스트 개체 틀 2">
             <a:extLst>
               <a:ext uri="{FF2B5EF4-FFF2-40B4-BE49-F238E27FC236}">
-                <a16:creationId xmlns:a16="http://schemas.microsoft.com/office/drawing/2014/main" id="{B0B24729-3D38-D9B8-8501-5A807B999D0A}"/>
+                <a16:creationId xmlns:a16="http://schemas.microsoft.com/office/drawing/2014/main" id="{7BF5CA45-7E29-8D92-6E3B-E2162D48E7CC}"/>
               </a:ext>
             </a:extLst>
           </p:cNvPr>
@@ -2868,7 +2868,7 @@
           <p:cNvPr id="4" name="날짜 개체 틀 3">
             <a:extLst>
               <a:ext uri="{FF2B5EF4-FFF2-40B4-BE49-F238E27FC236}">
-                <a16:creationId xmlns:a16="http://schemas.microsoft.com/office/drawing/2014/main" id="{0A6BD229-831E-3ECA-6158-F95BCE3514CC}"/>
+                <a16:creationId xmlns:a16="http://schemas.microsoft.com/office/drawing/2014/main" id="{5FEF5DD0-4158-538B-DC6C-B2FB974DA1A8}"/>
               </a:ext>
             </a:extLst>
           </p:cNvPr>
@@ -2902,9 +2902,9 @@
             </a:lvl1pPr>
           </a:lstStyle>
           <a:p>
-            <a:fld id="{37A6BA30-5587-4442-AF77-A7B435B4C7C8}" type="datetimeFigureOut">
+            <a:fld id="{43E4A4A8-B4B0-45DC-B516-12D2C29E74C6}" type="datetimeFigureOut">
               <a:rPr lang="ko-KR" altLang="en-US" smtClean="0"/>
-              <a:t>2026-06-19</a:t>
+              <a:t>2026-06-20</a:t>
             </a:fld>
             <a:endParaRPr lang="ko-KR" altLang="en-US"/>
           </a:p>
@@ -2915,7 +2915,7 @@
           <p:cNvPr id="5" name="바닥글 개체 틀 4">
             <a:extLst>
               <a:ext uri="{FF2B5EF4-FFF2-40B4-BE49-F238E27FC236}">
-                <a16:creationId xmlns:a16="http://schemas.microsoft.com/office/drawing/2014/main" id="{3FE6A4C6-536B-CF6C-AE80-3B8825B16AA3}"/>
+                <a16:creationId xmlns:a16="http://schemas.microsoft.com/office/drawing/2014/main" id="{4DDB46DC-968B-9460-6C38-CCF468D44A26}"/>
               </a:ext>
             </a:extLst>
           </p:cNvPr>
@@ -2958,7 +2958,7 @@
           <p:cNvPr id="6" name="슬라이드 번호 개체 틀 5">
             <a:extLst>
               <a:ext uri="{FF2B5EF4-FFF2-40B4-BE49-F238E27FC236}">
-                <a16:creationId xmlns:a16="http://schemas.microsoft.com/office/drawing/2014/main" id="{3A36A527-F2C3-C4F7-9152-3353B5BB14F2}"/>
+                <a16:creationId xmlns:a16="http://schemas.microsoft.com/office/drawing/2014/main" id="{1ABC2998-23BA-44F9-0E3D-0C0836EA0D08}"/>
               </a:ext>
             </a:extLst>
           </p:cNvPr>
@@ -2992,7 +2992,7 @@
             </a:lvl1pPr>
           </a:lstStyle>
           <a:p>
-            <a:fld id="{D1DEAAE1-9523-4F91-9AA1-FE659F1DC52B}" type="slidenum">
+            <a:fld id="{DA293E9B-4C70-475B-B5B5-C6D1CDF11403}" type="slidenum">
               <a:rPr lang="ko-KR" altLang="en-US" smtClean="0"/>
               <a:t>‹#›</a:t>
             </a:fld>
@@ -3003,7 +3003,7 @@
     </p:spTree>
     <p:extLst>
       <p:ext uri="{BB962C8B-B14F-4D97-AF65-F5344CB8AC3E}">
-        <p14:creationId xmlns:p14="http://schemas.microsoft.com/office/powerpoint/2010/main" val="4178311776"/>
+        <p14:creationId xmlns:p14="http://schemas.microsoft.com/office/powerpoint/2010/main" val="2502164091"/>
       </p:ext>
     </p:extLst>
   </p:cSld>
@@ -3326,7 +3326,7 @@
           <p:cNvPr id="3" name="그래픽 2">
             <a:extLst>
               <a:ext uri="{FF2B5EF4-FFF2-40B4-BE49-F238E27FC236}">
-                <a16:creationId xmlns:a16="http://schemas.microsoft.com/office/drawing/2014/main" id="{8666F243-5E7E-E063-7690-285F5A1CFB72}"/>
+                <a16:creationId xmlns:a16="http://schemas.microsoft.com/office/drawing/2014/main" id="{56050E4B-E0AF-AE95-0D65-C4592E7CC234}"/>
               </a:ext>
             </a:extLst>
           </p:cNvPr>
@@ -3360,7 +3360,7 @@
     </p:spTree>
     <p:extLst>
       <p:ext uri="{BB962C8B-B14F-4D97-AF65-F5344CB8AC3E}">
-        <p14:creationId xmlns:p14="http://schemas.microsoft.com/office/powerpoint/2010/main" val="604552231"/>
+        <p14:creationId xmlns:p14="http://schemas.microsoft.com/office/powerpoint/2010/main" val="809978724"/>
       </p:ext>
     </p:extLst>
   </p:cSld>

--- a/docs/assets/infographic-seed-gallery.pptx
+++ b/docs/assets/infographic-seed-gallery.pptx
@@ -129,7 +129,7 @@
           <p:cNvPr id="2" name="제목 1">
             <a:extLst>
               <a:ext uri="{FF2B5EF4-FFF2-40B4-BE49-F238E27FC236}">
-                <a16:creationId xmlns:a16="http://schemas.microsoft.com/office/drawing/2014/main" id="{BF808252-9F41-AA7F-BC7E-F1CFD733A803}"/>
+                <a16:creationId xmlns:a16="http://schemas.microsoft.com/office/drawing/2014/main" id="{2C89D752-6384-3F4D-C8A1-EE7D6511D6C7}"/>
               </a:ext>
             </a:extLst>
           </p:cNvPr>
@@ -166,7 +166,7 @@
           <p:cNvPr id="3" name="부제목 2">
             <a:extLst>
               <a:ext uri="{FF2B5EF4-FFF2-40B4-BE49-F238E27FC236}">
-                <a16:creationId xmlns:a16="http://schemas.microsoft.com/office/drawing/2014/main" id="{14AF7F92-B0C7-452E-F225-9827294CF50D}"/>
+                <a16:creationId xmlns:a16="http://schemas.microsoft.com/office/drawing/2014/main" id="{A2BD57D7-3C72-1C5C-9460-5E4362A58461}"/>
               </a:ext>
             </a:extLst>
           </p:cNvPr>
@@ -236,7 +236,7 @@
           <p:cNvPr id="4" name="날짜 개체 틀 3">
             <a:extLst>
               <a:ext uri="{FF2B5EF4-FFF2-40B4-BE49-F238E27FC236}">
-                <a16:creationId xmlns:a16="http://schemas.microsoft.com/office/drawing/2014/main" id="{98492FD4-9DB7-E864-2730-B2D9A6CB3265}"/>
+                <a16:creationId xmlns:a16="http://schemas.microsoft.com/office/drawing/2014/main" id="{AB487B54-32E7-C0E2-AE16-282024D95E21}"/>
               </a:ext>
             </a:extLst>
           </p:cNvPr>
@@ -252,7 +252,7 @@
           <a:bodyPr/>
           <a:lstStyle/>
           <a:p>
-            <a:fld id="{43E4A4A8-B4B0-45DC-B516-12D2C29E74C6}" type="datetimeFigureOut">
+            <a:fld id="{C0AFCF05-31C4-4A77-B5CF-C620AE1F5E65}" type="datetimeFigureOut">
               <a:rPr lang="ko-KR" altLang="en-US" smtClean="0"/>
               <a:t>2026-06-20</a:t>
             </a:fld>
@@ -265,7 +265,7 @@
           <p:cNvPr id="5" name="바닥글 개체 틀 4">
             <a:extLst>
               <a:ext uri="{FF2B5EF4-FFF2-40B4-BE49-F238E27FC236}">
-                <a16:creationId xmlns:a16="http://schemas.microsoft.com/office/drawing/2014/main" id="{CB6179B8-3C8B-AB43-37CB-7489EF50B60D}"/>
+                <a16:creationId xmlns:a16="http://schemas.microsoft.com/office/drawing/2014/main" id="{C6E3206D-1F71-F1D6-B6FA-BAF5F00ABEFF}"/>
               </a:ext>
             </a:extLst>
           </p:cNvPr>
@@ -290,7 +290,7 @@
           <p:cNvPr id="6" name="슬라이드 번호 개체 틀 5">
             <a:extLst>
               <a:ext uri="{FF2B5EF4-FFF2-40B4-BE49-F238E27FC236}">
-                <a16:creationId xmlns:a16="http://schemas.microsoft.com/office/drawing/2014/main" id="{98256017-3783-5F68-CEFE-E0BC6E63FB61}"/>
+                <a16:creationId xmlns:a16="http://schemas.microsoft.com/office/drawing/2014/main" id="{FF3D5F91-7A17-9A91-74A6-60A59D32043F}"/>
               </a:ext>
             </a:extLst>
           </p:cNvPr>
@@ -306,7 +306,7 @@
           <a:bodyPr/>
           <a:lstStyle/>
           <a:p>
-            <a:fld id="{DA293E9B-4C70-475B-B5B5-C6D1CDF11403}" type="slidenum">
+            <a:fld id="{4C64BAE8-BEAA-4D97-9F5A-C91A5099CCCB}" type="slidenum">
               <a:rPr lang="ko-KR" altLang="en-US" smtClean="0"/>
               <a:t>‹#›</a:t>
             </a:fld>
@@ -317,7 +317,7 @@
     </p:spTree>
     <p:extLst>
       <p:ext uri="{BB962C8B-B14F-4D97-AF65-F5344CB8AC3E}">
-        <p14:creationId xmlns:p14="http://schemas.microsoft.com/office/powerpoint/2010/main" val="1251835415"/>
+        <p14:creationId xmlns:p14="http://schemas.microsoft.com/office/powerpoint/2010/main" val="3555931395"/>
       </p:ext>
     </p:extLst>
   </p:cSld>
@@ -349,7 +349,7 @@
           <p:cNvPr id="2" name="제목 1">
             <a:extLst>
               <a:ext uri="{FF2B5EF4-FFF2-40B4-BE49-F238E27FC236}">
-                <a16:creationId xmlns:a16="http://schemas.microsoft.com/office/drawing/2014/main" id="{7A03111E-808B-3FEF-5601-BD6C49630FEC}"/>
+                <a16:creationId xmlns:a16="http://schemas.microsoft.com/office/drawing/2014/main" id="{293C265F-BACB-1782-7EC2-8AE268E5CDA1}"/>
               </a:ext>
             </a:extLst>
           </p:cNvPr>
@@ -377,7 +377,7 @@
           <p:cNvPr id="3" name="세로 텍스트 개체 틀 2">
             <a:extLst>
               <a:ext uri="{FF2B5EF4-FFF2-40B4-BE49-F238E27FC236}">
-                <a16:creationId xmlns:a16="http://schemas.microsoft.com/office/drawing/2014/main" id="{05F6DCD3-54B4-0B60-9E06-F8FCAF07760A}"/>
+                <a16:creationId xmlns:a16="http://schemas.microsoft.com/office/drawing/2014/main" id="{064BF296-BB62-4B8D-7D4D-C31B366B56BE}"/>
               </a:ext>
             </a:extLst>
           </p:cNvPr>
@@ -434,7 +434,7 @@
           <p:cNvPr id="4" name="날짜 개체 틀 3">
             <a:extLst>
               <a:ext uri="{FF2B5EF4-FFF2-40B4-BE49-F238E27FC236}">
-                <a16:creationId xmlns:a16="http://schemas.microsoft.com/office/drawing/2014/main" id="{F80A89B7-9A61-63F1-081E-A491944C2B64}"/>
+                <a16:creationId xmlns:a16="http://schemas.microsoft.com/office/drawing/2014/main" id="{EA67663B-5231-32FF-B423-29C586B4C94C}"/>
               </a:ext>
             </a:extLst>
           </p:cNvPr>
@@ -450,7 +450,7 @@
           <a:bodyPr/>
           <a:lstStyle/>
           <a:p>
-            <a:fld id="{43E4A4A8-B4B0-45DC-B516-12D2C29E74C6}" type="datetimeFigureOut">
+            <a:fld id="{C0AFCF05-31C4-4A77-B5CF-C620AE1F5E65}" type="datetimeFigureOut">
               <a:rPr lang="ko-KR" altLang="en-US" smtClean="0"/>
               <a:t>2026-06-20</a:t>
             </a:fld>
@@ -463,7 +463,7 @@
           <p:cNvPr id="5" name="바닥글 개체 틀 4">
             <a:extLst>
               <a:ext uri="{FF2B5EF4-FFF2-40B4-BE49-F238E27FC236}">
-                <a16:creationId xmlns:a16="http://schemas.microsoft.com/office/drawing/2014/main" id="{51C99ECC-A5C8-DC6D-E806-C8D82F5BF93C}"/>
+                <a16:creationId xmlns:a16="http://schemas.microsoft.com/office/drawing/2014/main" id="{8262D8C0-C358-2111-20CD-F08CBFA2EE82}"/>
               </a:ext>
             </a:extLst>
           </p:cNvPr>
@@ -488,7 +488,7 @@
           <p:cNvPr id="6" name="슬라이드 번호 개체 틀 5">
             <a:extLst>
               <a:ext uri="{FF2B5EF4-FFF2-40B4-BE49-F238E27FC236}">
-                <a16:creationId xmlns:a16="http://schemas.microsoft.com/office/drawing/2014/main" id="{11A169AB-B5C5-44A3-B759-753907C57F4F}"/>
+                <a16:creationId xmlns:a16="http://schemas.microsoft.com/office/drawing/2014/main" id="{0A5AFDFB-6443-4DCF-8D25-5D031287DBB8}"/>
               </a:ext>
             </a:extLst>
           </p:cNvPr>
@@ -504,7 +504,7 @@
           <a:bodyPr/>
           <a:lstStyle/>
           <a:p>
-            <a:fld id="{DA293E9B-4C70-475B-B5B5-C6D1CDF11403}" type="slidenum">
+            <a:fld id="{4C64BAE8-BEAA-4D97-9F5A-C91A5099CCCB}" type="slidenum">
               <a:rPr lang="ko-KR" altLang="en-US" smtClean="0"/>
               <a:t>‹#›</a:t>
             </a:fld>
@@ -515,7 +515,7 @@
     </p:spTree>
     <p:extLst>
       <p:ext uri="{BB962C8B-B14F-4D97-AF65-F5344CB8AC3E}">
-        <p14:creationId xmlns:p14="http://schemas.microsoft.com/office/powerpoint/2010/main" val="4056151214"/>
+        <p14:creationId xmlns:p14="http://schemas.microsoft.com/office/powerpoint/2010/main" val="571346022"/>
       </p:ext>
     </p:extLst>
   </p:cSld>
@@ -547,7 +547,7 @@
           <p:cNvPr id="2" name="세로 제목 1">
             <a:extLst>
               <a:ext uri="{FF2B5EF4-FFF2-40B4-BE49-F238E27FC236}">
-                <a16:creationId xmlns:a16="http://schemas.microsoft.com/office/drawing/2014/main" id="{9E83CA69-FF01-AF99-6793-8D0B1F570397}"/>
+                <a16:creationId xmlns:a16="http://schemas.microsoft.com/office/drawing/2014/main" id="{5DFEF330-4888-ED4A-325B-68E890DFE740}"/>
               </a:ext>
             </a:extLst>
           </p:cNvPr>
@@ -580,7 +580,7 @@
           <p:cNvPr id="3" name="세로 텍스트 개체 틀 2">
             <a:extLst>
               <a:ext uri="{FF2B5EF4-FFF2-40B4-BE49-F238E27FC236}">
-                <a16:creationId xmlns:a16="http://schemas.microsoft.com/office/drawing/2014/main" id="{5295330D-711F-AEB1-33CA-24B2A0015F0C}"/>
+                <a16:creationId xmlns:a16="http://schemas.microsoft.com/office/drawing/2014/main" id="{7B713A5A-BB38-69EB-09D9-63E0C9F56155}"/>
               </a:ext>
             </a:extLst>
           </p:cNvPr>
@@ -642,7 +642,7 @@
           <p:cNvPr id="4" name="날짜 개체 틀 3">
             <a:extLst>
               <a:ext uri="{FF2B5EF4-FFF2-40B4-BE49-F238E27FC236}">
-                <a16:creationId xmlns:a16="http://schemas.microsoft.com/office/drawing/2014/main" id="{AFE2432A-8E60-EC80-73E7-C4A1D7A7BA37}"/>
+                <a16:creationId xmlns:a16="http://schemas.microsoft.com/office/drawing/2014/main" id="{8817FD9C-FCC6-6297-38CE-3C7057AD0A3A}"/>
               </a:ext>
             </a:extLst>
           </p:cNvPr>
@@ -658,7 +658,7 @@
           <a:bodyPr/>
           <a:lstStyle/>
           <a:p>
-            <a:fld id="{43E4A4A8-B4B0-45DC-B516-12D2C29E74C6}" type="datetimeFigureOut">
+            <a:fld id="{C0AFCF05-31C4-4A77-B5CF-C620AE1F5E65}" type="datetimeFigureOut">
               <a:rPr lang="ko-KR" altLang="en-US" smtClean="0"/>
               <a:t>2026-06-20</a:t>
             </a:fld>
@@ -671,7 +671,7 @@
           <p:cNvPr id="5" name="바닥글 개체 틀 4">
             <a:extLst>
               <a:ext uri="{FF2B5EF4-FFF2-40B4-BE49-F238E27FC236}">
-                <a16:creationId xmlns:a16="http://schemas.microsoft.com/office/drawing/2014/main" id="{4FFB9448-D113-38A1-60EF-69BB685500B8}"/>
+                <a16:creationId xmlns:a16="http://schemas.microsoft.com/office/drawing/2014/main" id="{B000D345-0459-8CD6-6B56-884E006683B0}"/>
               </a:ext>
             </a:extLst>
           </p:cNvPr>
@@ -696,7 +696,7 @@
           <p:cNvPr id="6" name="슬라이드 번호 개체 틀 5">
             <a:extLst>
               <a:ext uri="{FF2B5EF4-FFF2-40B4-BE49-F238E27FC236}">
-                <a16:creationId xmlns:a16="http://schemas.microsoft.com/office/drawing/2014/main" id="{6B2D2B8C-4257-6446-4A02-3CF0047B3574}"/>
+                <a16:creationId xmlns:a16="http://schemas.microsoft.com/office/drawing/2014/main" id="{206F6F66-D412-218B-D91F-A93683953B37}"/>
               </a:ext>
             </a:extLst>
           </p:cNvPr>
@@ -712,7 +712,7 @@
           <a:bodyPr/>
           <a:lstStyle/>
           <a:p>
-            <a:fld id="{DA293E9B-4C70-475B-B5B5-C6D1CDF11403}" type="slidenum">
+            <a:fld id="{4C64BAE8-BEAA-4D97-9F5A-C91A5099CCCB}" type="slidenum">
               <a:rPr lang="ko-KR" altLang="en-US" smtClean="0"/>
               <a:t>‹#›</a:t>
             </a:fld>
@@ -723,7 +723,7 @@
     </p:spTree>
     <p:extLst>
       <p:ext uri="{BB962C8B-B14F-4D97-AF65-F5344CB8AC3E}">
-        <p14:creationId xmlns:p14="http://schemas.microsoft.com/office/powerpoint/2010/main" val="944839595"/>
+        <p14:creationId xmlns:p14="http://schemas.microsoft.com/office/powerpoint/2010/main" val="1005575664"/>
       </p:ext>
     </p:extLst>
   </p:cSld>
@@ -755,7 +755,7 @@
           <p:cNvPr id="2" name="제목 1">
             <a:extLst>
               <a:ext uri="{FF2B5EF4-FFF2-40B4-BE49-F238E27FC236}">
-                <a16:creationId xmlns:a16="http://schemas.microsoft.com/office/drawing/2014/main" id="{75E2402C-D230-B612-B365-535E96EBDE31}"/>
+                <a16:creationId xmlns:a16="http://schemas.microsoft.com/office/drawing/2014/main" id="{2D859E28-1852-C621-BC4D-9A42530F9323}"/>
               </a:ext>
             </a:extLst>
           </p:cNvPr>
@@ -783,7 +783,7 @@
           <p:cNvPr id="3" name="내용 개체 틀 2">
             <a:extLst>
               <a:ext uri="{FF2B5EF4-FFF2-40B4-BE49-F238E27FC236}">
-                <a16:creationId xmlns:a16="http://schemas.microsoft.com/office/drawing/2014/main" id="{84DB5EEB-9713-5D74-2A1B-A5BAFC214F16}"/>
+                <a16:creationId xmlns:a16="http://schemas.microsoft.com/office/drawing/2014/main" id="{64DC0B1D-D631-25B8-CA5C-8FA45F0A038A}"/>
               </a:ext>
             </a:extLst>
           </p:cNvPr>
@@ -840,7 +840,7 @@
           <p:cNvPr id="4" name="날짜 개체 틀 3">
             <a:extLst>
               <a:ext uri="{FF2B5EF4-FFF2-40B4-BE49-F238E27FC236}">
-                <a16:creationId xmlns:a16="http://schemas.microsoft.com/office/drawing/2014/main" id="{8C15A69A-1B82-FE1E-F7A1-840856F450DE}"/>
+                <a16:creationId xmlns:a16="http://schemas.microsoft.com/office/drawing/2014/main" id="{82017E12-F0B0-19DB-98A7-D57B56475FF5}"/>
               </a:ext>
             </a:extLst>
           </p:cNvPr>
@@ -856,7 +856,7 @@
           <a:bodyPr/>
           <a:lstStyle/>
           <a:p>
-            <a:fld id="{43E4A4A8-B4B0-45DC-B516-12D2C29E74C6}" type="datetimeFigureOut">
+            <a:fld id="{C0AFCF05-31C4-4A77-B5CF-C620AE1F5E65}" type="datetimeFigureOut">
               <a:rPr lang="ko-KR" altLang="en-US" smtClean="0"/>
               <a:t>2026-06-20</a:t>
             </a:fld>
@@ -869,7 +869,7 @@
           <p:cNvPr id="5" name="바닥글 개체 틀 4">
             <a:extLst>
               <a:ext uri="{FF2B5EF4-FFF2-40B4-BE49-F238E27FC236}">
-                <a16:creationId xmlns:a16="http://schemas.microsoft.com/office/drawing/2014/main" id="{4D2FD388-EB9B-F899-9678-37C72931B445}"/>
+                <a16:creationId xmlns:a16="http://schemas.microsoft.com/office/drawing/2014/main" id="{D87757CC-40AB-7542-0311-C61A516B6784}"/>
               </a:ext>
             </a:extLst>
           </p:cNvPr>
@@ -894,7 +894,7 @@
           <p:cNvPr id="6" name="슬라이드 번호 개체 틀 5">
             <a:extLst>
               <a:ext uri="{FF2B5EF4-FFF2-40B4-BE49-F238E27FC236}">
-                <a16:creationId xmlns:a16="http://schemas.microsoft.com/office/drawing/2014/main" id="{9D073713-D0FE-1682-9798-92D5BB14EFE8}"/>
+                <a16:creationId xmlns:a16="http://schemas.microsoft.com/office/drawing/2014/main" id="{81C71C97-0964-5539-90C2-DBDA658832FF}"/>
               </a:ext>
             </a:extLst>
           </p:cNvPr>
@@ -910,7 +910,7 @@
           <a:bodyPr/>
           <a:lstStyle/>
           <a:p>
-            <a:fld id="{DA293E9B-4C70-475B-B5B5-C6D1CDF11403}" type="slidenum">
+            <a:fld id="{4C64BAE8-BEAA-4D97-9F5A-C91A5099CCCB}" type="slidenum">
               <a:rPr lang="ko-KR" altLang="en-US" smtClean="0"/>
               <a:t>‹#›</a:t>
             </a:fld>
@@ -921,7 +921,7 @@
     </p:spTree>
     <p:extLst>
       <p:ext uri="{BB962C8B-B14F-4D97-AF65-F5344CB8AC3E}">
-        <p14:creationId xmlns:p14="http://schemas.microsoft.com/office/powerpoint/2010/main" val="3522726834"/>
+        <p14:creationId xmlns:p14="http://schemas.microsoft.com/office/powerpoint/2010/main" val="1783565131"/>
       </p:ext>
     </p:extLst>
   </p:cSld>
@@ -953,7 +953,7 @@
           <p:cNvPr id="2" name="제목 1">
             <a:extLst>
               <a:ext uri="{FF2B5EF4-FFF2-40B4-BE49-F238E27FC236}">
-                <a16:creationId xmlns:a16="http://schemas.microsoft.com/office/drawing/2014/main" id="{16FDC8F6-7D20-68B0-2AA6-A097F50A1997}"/>
+                <a16:creationId xmlns:a16="http://schemas.microsoft.com/office/drawing/2014/main" id="{680094BF-0305-F37D-3C26-80B58A0730A2}"/>
               </a:ext>
             </a:extLst>
           </p:cNvPr>
@@ -990,7 +990,7 @@
           <p:cNvPr id="3" name="텍스트 개체 틀 2">
             <a:extLst>
               <a:ext uri="{FF2B5EF4-FFF2-40B4-BE49-F238E27FC236}">
-                <a16:creationId xmlns:a16="http://schemas.microsoft.com/office/drawing/2014/main" id="{052206F3-26C3-1A91-4A45-CD1F16F7ACE5}"/>
+                <a16:creationId xmlns:a16="http://schemas.microsoft.com/office/drawing/2014/main" id="{804C3A10-1047-3782-ADDB-685EDC31802B}"/>
               </a:ext>
             </a:extLst>
           </p:cNvPr>
@@ -1115,7 +1115,7 @@
           <p:cNvPr id="4" name="날짜 개체 틀 3">
             <a:extLst>
               <a:ext uri="{FF2B5EF4-FFF2-40B4-BE49-F238E27FC236}">
-                <a16:creationId xmlns:a16="http://schemas.microsoft.com/office/drawing/2014/main" id="{709FC770-B056-1AFC-AF64-0A1ACC7B0F9D}"/>
+                <a16:creationId xmlns:a16="http://schemas.microsoft.com/office/drawing/2014/main" id="{BFB3DB03-ACE2-ED67-5CC6-F103220C8D8C}"/>
               </a:ext>
             </a:extLst>
           </p:cNvPr>
@@ -1131,7 +1131,7 @@
           <a:bodyPr/>
           <a:lstStyle/>
           <a:p>
-            <a:fld id="{43E4A4A8-B4B0-45DC-B516-12D2C29E74C6}" type="datetimeFigureOut">
+            <a:fld id="{C0AFCF05-31C4-4A77-B5CF-C620AE1F5E65}" type="datetimeFigureOut">
               <a:rPr lang="ko-KR" altLang="en-US" smtClean="0"/>
               <a:t>2026-06-20</a:t>
             </a:fld>
@@ -1144,7 +1144,7 @@
           <p:cNvPr id="5" name="바닥글 개체 틀 4">
             <a:extLst>
               <a:ext uri="{FF2B5EF4-FFF2-40B4-BE49-F238E27FC236}">
-                <a16:creationId xmlns:a16="http://schemas.microsoft.com/office/drawing/2014/main" id="{5C43959F-93EA-F634-ADE7-EB33A9DC8A35}"/>
+                <a16:creationId xmlns:a16="http://schemas.microsoft.com/office/drawing/2014/main" id="{29727E1C-0721-BB26-2A8F-2CB850D4DA44}"/>
               </a:ext>
             </a:extLst>
           </p:cNvPr>
@@ -1169,7 +1169,7 @@
           <p:cNvPr id="6" name="슬라이드 번호 개체 틀 5">
             <a:extLst>
               <a:ext uri="{FF2B5EF4-FFF2-40B4-BE49-F238E27FC236}">
-                <a16:creationId xmlns:a16="http://schemas.microsoft.com/office/drawing/2014/main" id="{39164BDD-352A-DD73-7ABE-680EFE764DC7}"/>
+                <a16:creationId xmlns:a16="http://schemas.microsoft.com/office/drawing/2014/main" id="{0D992C44-0E8A-3DEE-ECA7-751D94D0940E}"/>
               </a:ext>
             </a:extLst>
           </p:cNvPr>
@@ -1185,7 +1185,7 @@
           <a:bodyPr/>
           <a:lstStyle/>
           <a:p>
-            <a:fld id="{DA293E9B-4C70-475B-B5B5-C6D1CDF11403}" type="slidenum">
+            <a:fld id="{4C64BAE8-BEAA-4D97-9F5A-C91A5099CCCB}" type="slidenum">
               <a:rPr lang="ko-KR" altLang="en-US" smtClean="0"/>
               <a:t>‹#›</a:t>
             </a:fld>
@@ -1196,7 +1196,7 @@
     </p:spTree>
     <p:extLst>
       <p:ext uri="{BB962C8B-B14F-4D97-AF65-F5344CB8AC3E}">
-        <p14:creationId xmlns:p14="http://schemas.microsoft.com/office/powerpoint/2010/main" val="1495531082"/>
+        <p14:creationId xmlns:p14="http://schemas.microsoft.com/office/powerpoint/2010/main" val="3514075148"/>
       </p:ext>
     </p:extLst>
   </p:cSld>
@@ -1228,7 +1228,7 @@
           <p:cNvPr id="2" name="제목 1">
             <a:extLst>
               <a:ext uri="{FF2B5EF4-FFF2-40B4-BE49-F238E27FC236}">
-                <a16:creationId xmlns:a16="http://schemas.microsoft.com/office/drawing/2014/main" id="{240BDDD3-D2F5-1171-836F-0B23BFBE39BB}"/>
+                <a16:creationId xmlns:a16="http://schemas.microsoft.com/office/drawing/2014/main" id="{97DEBD3B-5966-C01F-3FB8-A8B8CD60930C}"/>
               </a:ext>
             </a:extLst>
           </p:cNvPr>
@@ -1256,7 +1256,7 @@
           <p:cNvPr id="3" name="내용 개체 틀 2">
             <a:extLst>
               <a:ext uri="{FF2B5EF4-FFF2-40B4-BE49-F238E27FC236}">
-                <a16:creationId xmlns:a16="http://schemas.microsoft.com/office/drawing/2014/main" id="{9DB1A758-1346-B628-D163-92625B34A2D2}"/>
+                <a16:creationId xmlns:a16="http://schemas.microsoft.com/office/drawing/2014/main" id="{56BC037B-D96F-1EE4-201D-E4AB352FEDCA}"/>
               </a:ext>
             </a:extLst>
           </p:cNvPr>
@@ -1318,7 +1318,7 @@
           <p:cNvPr id="4" name="내용 개체 틀 3">
             <a:extLst>
               <a:ext uri="{FF2B5EF4-FFF2-40B4-BE49-F238E27FC236}">
-                <a16:creationId xmlns:a16="http://schemas.microsoft.com/office/drawing/2014/main" id="{6BA0F76D-4958-1BCE-3978-B95D3B8C3AED}"/>
+                <a16:creationId xmlns:a16="http://schemas.microsoft.com/office/drawing/2014/main" id="{3097C531-04A6-4E58-DDEB-A22DDE2826D5}"/>
               </a:ext>
             </a:extLst>
           </p:cNvPr>
@@ -1380,7 +1380,7 @@
           <p:cNvPr id="5" name="날짜 개체 틀 4">
             <a:extLst>
               <a:ext uri="{FF2B5EF4-FFF2-40B4-BE49-F238E27FC236}">
-                <a16:creationId xmlns:a16="http://schemas.microsoft.com/office/drawing/2014/main" id="{84847E04-8C9D-5ECD-7151-F7EAD4953CA8}"/>
+                <a16:creationId xmlns:a16="http://schemas.microsoft.com/office/drawing/2014/main" id="{55AA0D1D-BCF1-187C-9439-F777690AD9D7}"/>
               </a:ext>
             </a:extLst>
           </p:cNvPr>
@@ -1396,7 +1396,7 @@
           <a:bodyPr/>
           <a:lstStyle/>
           <a:p>
-            <a:fld id="{43E4A4A8-B4B0-45DC-B516-12D2C29E74C6}" type="datetimeFigureOut">
+            <a:fld id="{C0AFCF05-31C4-4A77-B5CF-C620AE1F5E65}" type="datetimeFigureOut">
               <a:rPr lang="ko-KR" altLang="en-US" smtClean="0"/>
               <a:t>2026-06-20</a:t>
             </a:fld>
@@ -1409,7 +1409,7 @@
           <p:cNvPr id="6" name="바닥글 개체 틀 5">
             <a:extLst>
               <a:ext uri="{FF2B5EF4-FFF2-40B4-BE49-F238E27FC236}">
-                <a16:creationId xmlns:a16="http://schemas.microsoft.com/office/drawing/2014/main" id="{63236F74-E92D-545D-F540-27E77F0E48D0}"/>
+                <a16:creationId xmlns:a16="http://schemas.microsoft.com/office/drawing/2014/main" id="{759AF928-179C-8171-BBA6-3B5B7E6D3A13}"/>
               </a:ext>
             </a:extLst>
           </p:cNvPr>
@@ -1434,7 +1434,7 @@
           <p:cNvPr id="7" name="슬라이드 번호 개체 틀 6">
             <a:extLst>
               <a:ext uri="{FF2B5EF4-FFF2-40B4-BE49-F238E27FC236}">
-                <a16:creationId xmlns:a16="http://schemas.microsoft.com/office/drawing/2014/main" id="{2DA2F67F-65AD-387E-95E0-3F37FCCA486B}"/>
+                <a16:creationId xmlns:a16="http://schemas.microsoft.com/office/drawing/2014/main" id="{767E2663-10E9-B217-3B11-D6A82DB0ABD0}"/>
               </a:ext>
             </a:extLst>
           </p:cNvPr>
@@ -1450,7 +1450,7 @@
           <a:bodyPr/>
           <a:lstStyle/>
           <a:p>
-            <a:fld id="{DA293E9B-4C70-475B-B5B5-C6D1CDF11403}" type="slidenum">
+            <a:fld id="{4C64BAE8-BEAA-4D97-9F5A-C91A5099CCCB}" type="slidenum">
               <a:rPr lang="ko-KR" altLang="en-US" smtClean="0"/>
               <a:t>‹#›</a:t>
             </a:fld>
@@ -1461,7 +1461,7 @@
     </p:spTree>
     <p:extLst>
       <p:ext uri="{BB962C8B-B14F-4D97-AF65-F5344CB8AC3E}">
-        <p14:creationId xmlns:p14="http://schemas.microsoft.com/office/powerpoint/2010/main" val="976260584"/>
+        <p14:creationId xmlns:p14="http://schemas.microsoft.com/office/powerpoint/2010/main" val="394432464"/>
       </p:ext>
     </p:extLst>
   </p:cSld>
@@ -1493,7 +1493,7 @@
           <p:cNvPr id="2" name="제목 1">
             <a:extLst>
               <a:ext uri="{FF2B5EF4-FFF2-40B4-BE49-F238E27FC236}">
-                <a16:creationId xmlns:a16="http://schemas.microsoft.com/office/drawing/2014/main" id="{299F57F4-1AB0-A07F-38A7-C9A6ACB1063B}"/>
+                <a16:creationId xmlns:a16="http://schemas.microsoft.com/office/drawing/2014/main" id="{07016786-D44D-704D-9EF9-BC94F6F9ACA4}"/>
               </a:ext>
             </a:extLst>
           </p:cNvPr>
@@ -1526,7 +1526,7 @@
           <p:cNvPr id="3" name="텍스트 개체 틀 2">
             <a:extLst>
               <a:ext uri="{FF2B5EF4-FFF2-40B4-BE49-F238E27FC236}">
-                <a16:creationId xmlns:a16="http://schemas.microsoft.com/office/drawing/2014/main" id="{391009DD-4E31-FEA6-042A-8B7E98438348}"/>
+                <a16:creationId xmlns:a16="http://schemas.microsoft.com/office/drawing/2014/main" id="{D7828D19-6FDA-4216-8138-38EBAB63A2F6}"/>
               </a:ext>
             </a:extLst>
           </p:cNvPr>
@@ -1597,7 +1597,7 @@
           <p:cNvPr id="4" name="내용 개체 틀 3">
             <a:extLst>
               <a:ext uri="{FF2B5EF4-FFF2-40B4-BE49-F238E27FC236}">
-                <a16:creationId xmlns:a16="http://schemas.microsoft.com/office/drawing/2014/main" id="{340C2438-C21C-C90E-F10D-F1B471F651A1}"/>
+                <a16:creationId xmlns:a16="http://schemas.microsoft.com/office/drawing/2014/main" id="{94CEABA8-7DCC-FBB4-3A85-A41BA095ABCF}"/>
               </a:ext>
             </a:extLst>
           </p:cNvPr>
@@ -1659,7 +1659,7 @@
           <p:cNvPr id="5" name="텍스트 개체 틀 4">
             <a:extLst>
               <a:ext uri="{FF2B5EF4-FFF2-40B4-BE49-F238E27FC236}">
-                <a16:creationId xmlns:a16="http://schemas.microsoft.com/office/drawing/2014/main" id="{AC90015F-9112-38A7-AC04-59D73A320726}"/>
+                <a16:creationId xmlns:a16="http://schemas.microsoft.com/office/drawing/2014/main" id="{681C8894-5094-37DF-EA76-49D533C388FD}"/>
               </a:ext>
             </a:extLst>
           </p:cNvPr>
@@ -1730,7 +1730,7 @@
           <p:cNvPr id="6" name="내용 개체 틀 5">
             <a:extLst>
               <a:ext uri="{FF2B5EF4-FFF2-40B4-BE49-F238E27FC236}">
-                <a16:creationId xmlns:a16="http://schemas.microsoft.com/office/drawing/2014/main" id="{0987EC59-FF83-ECC8-B4A0-08C0D3077268}"/>
+                <a16:creationId xmlns:a16="http://schemas.microsoft.com/office/drawing/2014/main" id="{B2DE768B-9C2B-E3D7-3DA5-3BA2A7619A06}"/>
               </a:ext>
             </a:extLst>
           </p:cNvPr>
@@ -1792,7 +1792,7 @@
           <p:cNvPr id="7" name="날짜 개체 틀 6">
             <a:extLst>
               <a:ext uri="{FF2B5EF4-FFF2-40B4-BE49-F238E27FC236}">
-                <a16:creationId xmlns:a16="http://schemas.microsoft.com/office/drawing/2014/main" id="{281578B1-7FBD-A367-7D4C-5424326D6C5A}"/>
+                <a16:creationId xmlns:a16="http://schemas.microsoft.com/office/drawing/2014/main" id="{3424EC45-B79C-4E11-E8E2-BDFA30D90B2B}"/>
               </a:ext>
             </a:extLst>
           </p:cNvPr>
@@ -1808,7 +1808,7 @@
           <a:bodyPr/>
           <a:lstStyle/>
           <a:p>
-            <a:fld id="{43E4A4A8-B4B0-45DC-B516-12D2C29E74C6}" type="datetimeFigureOut">
+            <a:fld id="{C0AFCF05-31C4-4A77-B5CF-C620AE1F5E65}" type="datetimeFigureOut">
               <a:rPr lang="ko-KR" altLang="en-US" smtClean="0"/>
               <a:t>2026-06-20</a:t>
             </a:fld>
@@ -1821,7 +1821,7 @@
           <p:cNvPr id="8" name="바닥글 개체 틀 7">
             <a:extLst>
               <a:ext uri="{FF2B5EF4-FFF2-40B4-BE49-F238E27FC236}">
-                <a16:creationId xmlns:a16="http://schemas.microsoft.com/office/drawing/2014/main" id="{8B03B8AB-DC1F-E8A0-CBDF-EAD9398E521B}"/>
+                <a16:creationId xmlns:a16="http://schemas.microsoft.com/office/drawing/2014/main" id="{31C6DB45-B2D2-E080-9272-A03433964AAB}"/>
               </a:ext>
             </a:extLst>
           </p:cNvPr>
@@ -1846,7 +1846,7 @@
           <p:cNvPr id="9" name="슬라이드 번호 개체 틀 8">
             <a:extLst>
               <a:ext uri="{FF2B5EF4-FFF2-40B4-BE49-F238E27FC236}">
-                <a16:creationId xmlns:a16="http://schemas.microsoft.com/office/drawing/2014/main" id="{925CB8AB-9877-38CE-6C72-71D4D9E29540}"/>
+                <a16:creationId xmlns:a16="http://schemas.microsoft.com/office/drawing/2014/main" id="{6A9B09C3-FD72-9130-97E0-E6F9F6B64D62}"/>
               </a:ext>
             </a:extLst>
           </p:cNvPr>
@@ -1862,7 +1862,7 @@
           <a:bodyPr/>
           <a:lstStyle/>
           <a:p>
-            <a:fld id="{DA293E9B-4C70-475B-B5B5-C6D1CDF11403}" type="slidenum">
+            <a:fld id="{4C64BAE8-BEAA-4D97-9F5A-C91A5099CCCB}" type="slidenum">
               <a:rPr lang="ko-KR" altLang="en-US" smtClean="0"/>
               <a:t>‹#›</a:t>
             </a:fld>
@@ -1873,7 +1873,7 @@
     </p:spTree>
     <p:extLst>
       <p:ext uri="{BB962C8B-B14F-4D97-AF65-F5344CB8AC3E}">
-        <p14:creationId xmlns:p14="http://schemas.microsoft.com/office/powerpoint/2010/main" val="2484358139"/>
+        <p14:creationId xmlns:p14="http://schemas.microsoft.com/office/powerpoint/2010/main" val="3055896414"/>
       </p:ext>
     </p:extLst>
   </p:cSld>
@@ -1905,7 +1905,7 @@
           <p:cNvPr id="2" name="제목 1">
             <a:extLst>
               <a:ext uri="{FF2B5EF4-FFF2-40B4-BE49-F238E27FC236}">
-                <a16:creationId xmlns:a16="http://schemas.microsoft.com/office/drawing/2014/main" id="{07B0180F-AC70-973F-A8A1-0166A3897E08}"/>
+                <a16:creationId xmlns:a16="http://schemas.microsoft.com/office/drawing/2014/main" id="{329BA7CC-B376-B465-1004-7A20E5AB280D}"/>
               </a:ext>
             </a:extLst>
           </p:cNvPr>
@@ -1933,7 +1933,7 @@
           <p:cNvPr id="3" name="날짜 개체 틀 2">
             <a:extLst>
               <a:ext uri="{FF2B5EF4-FFF2-40B4-BE49-F238E27FC236}">
-                <a16:creationId xmlns:a16="http://schemas.microsoft.com/office/drawing/2014/main" id="{14E16062-BCA5-C798-80C7-26C92DC5A257}"/>
+                <a16:creationId xmlns:a16="http://schemas.microsoft.com/office/drawing/2014/main" id="{8FF70401-4B85-B8C3-B883-4C8AF5C9F837}"/>
               </a:ext>
             </a:extLst>
           </p:cNvPr>
@@ -1949,7 +1949,7 @@
           <a:bodyPr/>
           <a:lstStyle/>
           <a:p>
-            <a:fld id="{43E4A4A8-B4B0-45DC-B516-12D2C29E74C6}" type="datetimeFigureOut">
+            <a:fld id="{C0AFCF05-31C4-4A77-B5CF-C620AE1F5E65}" type="datetimeFigureOut">
               <a:rPr lang="ko-KR" altLang="en-US" smtClean="0"/>
               <a:t>2026-06-20</a:t>
             </a:fld>
@@ -1962,7 +1962,7 @@
           <p:cNvPr id="4" name="바닥글 개체 틀 3">
             <a:extLst>
               <a:ext uri="{FF2B5EF4-FFF2-40B4-BE49-F238E27FC236}">
-                <a16:creationId xmlns:a16="http://schemas.microsoft.com/office/drawing/2014/main" id="{5FBAC69D-0863-7E03-1C1E-111B1344AAEE}"/>
+                <a16:creationId xmlns:a16="http://schemas.microsoft.com/office/drawing/2014/main" id="{1C23EA94-E56F-4446-3347-B34B23534FF0}"/>
               </a:ext>
             </a:extLst>
           </p:cNvPr>
@@ -1987,7 +1987,7 @@
           <p:cNvPr id="5" name="슬라이드 번호 개체 틀 4">
             <a:extLst>
               <a:ext uri="{FF2B5EF4-FFF2-40B4-BE49-F238E27FC236}">
-                <a16:creationId xmlns:a16="http://schemas.microsoft.com/office/drawing/2014/main" id="{A53F28BB-A5B9-3D76-9E89-AD362F81FAAC}"/>
+                <a16:creationId xmlns:a16="http://schemas.microsoft.com/office/drawing/2014/main" id="{03010BAB-08C9-3DFA-A2D9-97321AD1A1FC}"/>
               </a:ext>
             </a:extLst>
           </p:cNvPr>
@@ -2003,7 +2003,7 @@
           <a:bodyPr/>
           <a:lstStyle/>
           <a:p>
-            <a:fld id="{DA293E9B-4C70-475B-B5B5-C6D1CDF11403}" type="slidenum">
+            <a:fld id="{4C64BAE8-BEAA-4D97-9F5A-C91A5099CCCB}" type="slidenum">
               <a:rPr lang="ko-KR" altLang="en-US" smtClean="0"/>
               <a:t>‹#›</a:t>
             </a:fld>
@@ -2014,7 +2014,7 @@
     </p:spTree>
     <p:extLst>
       <p:ext uri="{BB962C8B-B14F-4D97-AF65-F5344CB8AC3E}">
-        <p14:creationId xmlns:p14="http://schemas.microsoft.com/office/powerpoint/2010/main" val="46434286"/>
+        <p14:creationId xmlns:p14="http://schemas.microsoft.com/office/powerpoint/2010/main" val="899777587"/>
       </p:ext>
     </p:extLst>
   </p:cSld>
@@ -2046,7 +2046,7 @@
           <p:cNvPr id="2" name="날짜 개체 틀 1">
             <a:extLst>
               <a:ext uri="{FF2B5EF4-FFF2-40B4-BE49-F238E27FC236}">
-                <a16:creationId xmlns:a16="http://schemas.microsoft.com/office/drawing/2014/main" id="{B09BE9A0-6DB3-7516-D6EE-F7EC6A250891}"/>
+                <a16:creationId xmlns:a16="http://schemas.microsoft.com/office/drawing/2014/main" id="{4FD369BF-C17B-D168-9010-B3C2387BEEEC}"/>
               </a:ext>
             </a:extLst>
           </p:cNvPr>
@@ -2062,7 +2062,7 @@
           <a:bodyPr/>
           <a:lstStyle/>
           <a:p>
-            <a:fld id="{43E4A4A8-B4B0-45DC-B516-12D2C29E74C6}" type="datetimeFigureOut">
+            <a:fld id="{C0AFCF05-31C4-4A77-B5CF-C620AE1F5E65}" type="datetimeFigureOut">
               <a:rPr lang="ko-KR" altLang="en-US" smtClean="0"/>
               <a:t>2026-06-20</a:t>
             </a:fld>
@@ -2075,7 +2075,7 @@
           <p:cNvPr id="3" name="바닥글 개체 틀 2">
             <a:extLst>
               <a:ext uri="{FF2B5EF4-FFF2-40B4-BE49-F238E27FC236}">
-                <a16:creationId xmlns:a16="http://schemas.microsoft.com/office/drawing/2014/main" id="{6171E29A-7072-AAD9-775D-EC95523BE33B}"/>
+                <a16:creationId xmlns:a16="http://schemas.microsoft.com/office/drawing/2014/main" id="{B5A29A6C-7896-80BA-4F2B-221671A8D248}"/>
               </a:ext>
             </a:extLst>
           </p:cNvPr>
@@ -2100,7 +2100,7 @@
           <p:cNvPr id="4" name="슬라이드 번호 개체 틀 3">
             <a:extLst>
               <a:ext uri="{FF2B5EF4-FFF2-40B4-BE49-F238E27FC236}">
-                <a16:creationId xmlns:a16="http://schemas.microsoft.com/office/drawing/2014/main" id="{6A646E0B-65D0-B014-95B5-5C5FC35FE260}"/>
+                <a16:creationId xmlns:a16="http://schemas.microsoft.com/office/drawing/2014/main" id="{20B83DC0-1936-EFCB-6B49-7A3E549AD3AB}"/>
               </a:ext>
             </a:extLst>
           </p:cNvPr>
@@ -2116,7 +2116,7 @@
           <a:bodyPr/>
           <a:lstStyle/>
           <a:p>
-            <a:fld id="{DA293E9B-4C70-475B-B5B5-C6D1CDF11403}" type="slidenum">
+            <a:fld id="{4C64BAE8-BEAA-4D97-9F5A-C91A5099CCCB}" type="slidenum">
               <a:rPr lang="ko-KR" altLang="en-US" smtClean="0"/>
               <a:t>‹#›</a:t>
             </a:fld>
@@ -2127,7 +2127,7 @@
     </p:spTree>
     <p:extLst>
       <p:ext uri="{BB962C8B-B14F-4D97-AF65-F5344CB8AC3E}">
-        <p14:creationId xmlns:p14="http://schemas.microsoft.com/office/powerpoint/2010/main" val="4216673167"/>
+        <p14:creationId xmlns:p14="http://schemas.microsoft.com/office/powerpoint/2010/main" val="2519365841"/>
       </p:ext>
     </p:extLst>
   </p:cSld>
@@ -2159,7 +2159,7 @@
           <p:cNvPr id="2" name="제목 1">
             <a:extLst>
               <a:ext uri="{FF2B5EF4-FFF2-40B4-BE49-F238E27FC236}">
-                <a16:creationId xmlns:a16="http://schemas.microsoft.com/office/drawing/2014/main" id="{BF085981-1BD0-E410-3971-4EF1386A3336}"/>
+                <a16:creationId xmlns:a16="http://schemas.microsoft.com/office/drawing/2014/main" id="{C85B816A-AB2F-FCE7-0A29-75EE3C444FF5}"/>
               </a:ext>
             </a:extLst>
           </p:cNvPr>
@@ -2196,7 +2196,7 @@
           <p:cNvPr id="3" name="내용 개체 틀 2">
             <a:extLst>
               <a:ext uri="{FF2B5EF4-FFF2-40B4-BE49-F238E27FC236}">
-                <a16:creationId xmlns:a16="http://schemas.microsoft.com/office/drawing/2014/main" id="{14A2564F-D3B5-959F-9E26-D869B800E574}"/>
+                <a16:creationId xmlns:a16="http://schemas.microsoft.com/office/drawing/2014/main" id="{59BBCF99-A5C6-57B9-5097-E7361398AD4B}"/>
               </a:ext>
             </a:extLst>
           </p:cNvPr>
@@ -2286,7 +2286,7 @@
           <p:cNvPr id="4" name="텍스트 개체 틀 3">
             <a:extLst>
               <a:ext uri="{FF2B5EF4-FFF2-40B4-BE49-F238E27FC236}">
-                <a16:creationId xmlns:a16="http://schemas.microsoft.com/office/drawing/2014/main" id="{1C614818-D98B-84D2-6F93-3B83E2F5E9CE}"/>
+                <a16:creationId xmlns:a16="http://schemas.microsoft.com/office/drawing/2014/main" id="{216F490A-98AD-A876-8896-1F33B476BB4E}"/>
               </a:ext>
             </a:extLst>
           </p:cNvPr>
@@ -2357,7 +2357,7 @@
           <p:cNvPr id="5" name="날짜 개체 틀 4">
             <a:extLst>
               <a:ext uri="{FF2B5EF4-FFF2-40B4-BE49-F238E27FC236}">
-                <a16:creationId xmlns:a16="http://schemas.microsoft.com/office/drawing/2014/main" id="{C1A698E3-0A70-A7E1-DEA3-8192DB4B481B}"/>
+                <a16:creationId xmlns:a16="http://schemas.microsoft.com/office/drawing/2014/main" id="{1F3AE5CF-7E94-EE3D-D52D-53A804D4FC1A}"/>
               </a:ext>
             </a:extLst>
           </p:cNvPr>
@@ -2373,7 +2373,7 @@
           <a:bodyPr/>
           <a:lstStyle/>
           <a:p>
-            <a:fld id="{43E4A4A8-B4B0-45DC-B516-12D2C29E74C6}" type="datetimeFigureOut">
+            <a:fld id="{C0AFCF05-31C4-4A77-B5CF-C620AE1F5E65}" type="datetimeFigureOut">
               <a:rPr lang="ko-KR" altLang="en-US" smtClean="0"/>
               <a:t>2026-06-20</a:t>
             </a:fld>
@@ -2386,7 +2386,7 @@
           <p:cNvPr id="6" name="바닥글 개체 틀 5">
             <a:extLst>
               <a:ext uri="{FF2B5EF4-FFF2-40B4-BE49-F238E27FC236}">
-                <a16:creationId xmlns:a16="http://schemas.microsoft.com/office/drawing/2014/main" id="{C77C85AF-E453-688A-ED8D-BA9A1DC65BAC}"/>
+                <a16:creationId xmlns:a16="http://schemas.microsoft.com/office/drawing/2014/main" id="{B8ACA5C8-438F-5C33-0830-7F07C270889D}"/>
               </a:ext>
             </a:extLst>
           </p:cNvPr>
@@ -2411,7 +2411,7 @@
           <p:cNvPr id="7" name="슬라이드 번호 개체 틀 6">
             <a:extLst>
               <a:ext uri="{FF2B5EF4-FFF2-40B4-BE49-F238E27FC236}">
-                <a16:creationId xmlns:a16="http://schemas.microsoft.com/office/drawing/2014/main" id="{52720364-52AD-E5F8-FBC7-10870CBA2964}"/>
+                <a16:creationId xmlns:a16="http://schemas.microsoft.com/office/drawing/2014/main" id="{3FE25000-3B2C-4E56-E081-FE7E56829235}"/>
               </a:ext>
             </a:extLst>
           </p:cNvPr>
@@ -2427,7 +2427,7 @@
           <a:bodyPr/>
           <a:lstStyle/>
           <a:p>
-            <a:fld id="{DA293E9B-4C70-475B-B5B5-C6D1CDF11403}" type="slidenum">
+            <a:fld id="{4C64BAE8-BEAA-4D97-9F5A-C91A5099CCCB}" type="slidenum">
               <a:rPr lang="ko-KR" altLang="en-US" smtClean="0"/>
               <a:t>‹#›</a:t>
             </a:fld>
@@ -2438,7 +2438,7 @@
     </p:spTree>
     <p:extLst>
       <p:ext uri="{BB962C8B-B14F-4D97-AF65-F5344CB8AC3E}">
-        <p14:creationId xmlns:p14="http://schemas.microsoft.com/office/powerpoint/2010/main" val="2657476335"/>
+        <p14:creationId xmlns:p14="http://schemas.microsoft.com/office/powerpoint/2010/main" val="1559847738"/>
       </p:ext>
     </p:extLst>
   </p:cSld>
@@ -2470,7 +2470,7 @@
           <p:cNvPr id="2" name="제목 1">
             <a:extLst>
               <a:ext uri="{FF2B5EF4-FFF2-40B4-BE49-F238E27FC236}">
-                <a16:creationId xmlns:a16="http://schemas.microsoft.com/office/drawing/2014/main" id="{9FAC76D3-38EF-62E4-9AE3-F484B7E262C5}"/>
+                <a16:creationId xmlns:a16="http://schemas.microsoft.com/office/drawing/2014/main" id="{5988CC88-7AAB-1608-772C-50F2D9C31B11}"/>
               </a:ext>
             </a:extLst>
           </p:cNvPr>
@@ -2507,7 +2507,7 @@
           <p:cNvPr id="3" name="그림 개체 틀 2">
             <a:extLst>
               <a:ext uri="{FF2B5EF4-FFF2-40B4-BE49-F238E27FC236}">
-                <a16:creationId xmlns:a16="http://schemas.microsoft.com/office/drawing/2014/main" id="{74F5EE8B-2126-F985-644C-8409DDEEE9FD}"/>
+                <a16:creationId xmlns:a16="http://schemas.microsoft.com/office/drawing/2014/main" id="{D42E737C-AACA-2FF9-0BBE-7A56244CEBC9}"/>
               </a:ext>
             </a:extLst>
           </p:cNvPr>
@@ -2574,7 +2574,7 @@
           <p:cNvPr id="4" name="텍스트 개체 틀 3">
             <a:extLst>
               <a:ext uri="{FF2B5EF4-FFF2-40B4-BE49-F238E27FC236}">
-                <a16:creationId xmlns:a16="http://schemas.microsoft.com/office/drawing/2014/main" id="{3483E5D8-5C30-CFEB-3638-0459D0EC18CE}"/>
+                <a16:creationId xmlns:a16="http://schemas.microsoft.com/office/drawing/2014/main" id="{6FACD587-F5D0-C8D3-5500-85832F34B6F3}"/>
               </a:ext>
             </a:extLst>
           </p:cNvPr>
@@ -2645,7 +2645,7 @@
           <p:cNvPr id="5" name="날짜 개체 틀 4">
             <a:extLst>
               <a:ext uri="{FF2B5EF4-FFF2-40B4-BE49-F238E27FC236}">
-                <a16:creationId xmlns:a16="http://schemas.microsoft.com/office/drawing/2014/main" id="{1B3E7CDD-F1BB-85FC-95EB-AF84238C52E8}"/>
+                <a16:creationId xmlns:a16="http://schemas.microsoft.com/office/drawing/2014/main" id="{5107DF62-5B6E-5364-B0DE-F572F7135D13}"/>
               </a:ext>
             </a:extLst>
           </p:cNvPr>
@@ -2661,7 +2661,7 @@
           <a:bodyPr/>
           <a:lstStyle/>
           <a:p>
-            <a:fld id="{43E4A4A8-B4B0-45DC-B516-12D2C29E74C6}" type="datetimeFigureOut">
+            <a:fld id="{C0AFCF05-31C4-4A77-B5CF-C620AE1F5E65}" type="datetimeFigureOut">
               <a:rPr lang="ko-KR" altLang="en-US" smtClean="0"/>
               <a:t>2026-06-20</a:t>
             </a:fld>
@@ -2674,7 +2674,7 @@
           <p:cNvPr id="6" name="바닥글 개체 틀 5">
             <a:extLst>
               <a:ext uri="{FF2B5EF4-FFF2-40B4-BE49-F238E27FC236}">
-                <a16:creationId xmlns:a16="http://schemas.microsoft.com/office/drawing/2014/main" id="{DA98E4C2-9766-1139-42A0-B4A0B084E8F9}"/>
+                <a16:creationId xmlns:a16="http://schemas.microsoft.com/office/drawing/2014/main" id="{054B2A15-9122-893F-F907-CE2CC9E1336C}"/>
               </a:ext>
             </a:extLst>
           </p:cNvPr>
@@ -2699,7 +2699,7 @@
           <p:cNvPr id="7" name="슬라이드 번호 개체 틀 6">
             <a:extLst>
               <a:ext uri="{FF2B5EF4-FFF2-40B4-BE49-F238E27FC236}">
-                <a16:creationId xmlns:a16="http://schemas.microsoft.com/office/drawing/2014/main" id="{EF4B6C76-A677-CAB7-9293-189FCBC25A42}"/>
+                <a16:creationId xmlns:a16="http://schemas.microsoft.com/office/drawing/2014/main" id="{101DFC75-324B-7613-7B58-8902AD646375}"/>
               </a:ext>
             </a:extLst>
           </p:cNvPr>
@@ -2715,7 +2715,7 @@
           <a:bodyPr/>
           <a:lstStyle/>
           <a:p>
-            <a:fld id="{DA293E9B-4C70-475B-B5B5-C6D1CDF11403}" type="slidenum">
+            <a:fld id="{4C64BAE8-BEAA-4D97-9F5A-C91A5099CCCB}" type="slidenum">
               <a:rPr lang="ko-KR" altLang="en-US" smtClean="0"/>
               <a:t>‹#›</a:t>
             </a:fld>
@@ -2726,7 +2726,7 @@
     </p:spTree>
     <p:extLst>
       <p:ext uri="{BB962C8B-B14F-4D97-AF65-F5344CB8AC3E}">
-        <p14:creationId xmlns:p14="http://schemas.microsoft.com/office/powerpoint/2010/main" val="2590053105"/>
+        <p14:creationId xmlns:p14="http://schemas.microsoft.com/office/powerpoint/2010/main" val="4210089443"/>
       </p:ext>
     </p:extLst>
   </p:cSld>
@@ -2763,7 +2763,7 @@
           <p:cNvPr id="2" name="제목 개체 틀 1">
             <a:extLst>
               <a:ext uri="{FF2B5EF4-FFF2-40B4-BE49-F238E27FC236}">
-                <a16:creationId xmlns:a16="http://schemas.microsoft.com/office/drawing/2014/main" id="{51851B9C-98EB-9D24-317F-8E358421F825}"/>
+                <a16:creationId xmlns:a16="http://schemas.microsoft.com/office/drawing/2014/main" id="{2FDFC841-BC69-C0B5-F5F3-56C7278377AC}"/>
               </a:ext>
             </a:extLst>
           </p:cNvPr>
@@ -2801,7 +2801,7 @@
           <p:cNvPr id="3" name="텍스트 개체 틀 2">
             <a:extLst>
               <a:ext uri="{FF2B5EF4-FFF2-40B4-BE49-F238E27FC236}">
-                <a16:creationId xmlns:a16="http://schemas.microsoft.com/office/drawing/2014/main" id="{7BF5CA45-7E29-8D92-6E3B-E2162D48E7CC}"/>
+                <a16:creationId xmlns:a16="http://schemas.microsoft.com/office/drawing/2014/main" id="{39D10F9F-2B1D-A29F-70C4-FB71AD893CC5}"/>
               </a:ext>
             </a:extLst>
           </p:cNvPr>
@@ -2868,7 +2868,7 @@
           <p:cNvPr id="4" name="날짜 개체 틀 3">
             <a:extLst>
               <a:ext uri="{FF2B5EF4-FFF2-40B4-BE49-F238E27FC236}">
-                <a16:creationId xmlns:a16="http://schemas.microsoft.com/office/drawing/2014/main" id="{5FEF5DD0-4158-538B-DC6C-B2FB974DA1A8}"/>
+                <a16:creationId xmlns:a16="http://schemas.microsoft.com/office/drawing/2014/main" id="{3E7B6E44-683A-660C-442A-F1903EBED294}"/>
               </a:ext>
             </a:extLst>
           </p:cNvPr>
@@ -2902,7 +2902,7 @@
             </a:lvl1pPr>
           </a:lstStyle>
           <a:p>
-            <a:fld id="{43E4A4A8-B4B0-45DC-B516-12D2C29E74C6}" type="datetimeFigureOut">
+            <a:fld id="{C0AFCF05-31C4-4A77-B5CF-C620AE1F5E65}" type="datetimeFigureOut">
               <a:rPr lang="ko-KR" altLang="en-US" smtClean="0"/>
               <a:t>2026-06-20</a:t>
             </a:fld>
@@ -2915,7 +2915,7 @@
           <p:cNvPr id="5" name="바닥글 개체 틀 4">
             <a:extLst>
               <a:ext uri="{FF2B5EF4-FFF2-40B4-BE49-F238E27FC236}">
-                <a16:creationId xmlns:a16="http://schemas.microsoft.com/office/drawing/2014/main" id="{4DDB46DC-968B-9460-6C38-CCF468D44A26}"/>
+                <a16:creationId xmlns:a16="http://schemas.microsoft.com/office/drawing/2014/main" id="{EAFABE25-F088-83B9-E317-4D69F1C4C484}"/>
               </a:ext>
             </a:extLst>
           </p:cNvPr>
@@ -2958,7 +2958,7 @@
           <p:cNvPr id="6" name="슬라이드 번호 개체 틀 5">
             <a:extLst>
               <a:ext uri="{FF2B5EF4-FFF2-40B4-BE49-F238E27FC236}">
-                <a16:creationId xmlns:a16="http://schemas.microsoft.com/office/drawing/2014/main" id="{1ABC2998-23BA-44F9-0E3D-0C0836EA0D08}"/>
+                <a16:creationId xmlns:a16="http://schemas.microsoft.com/office/drawing/2014/main" id="{17807872-D7F9-9C75-7910-BFB889102C3B}"/>
               </a:ext>
             </a:extLst>
           </p:cNvPr>
@@ -2992,7 +2992,7 @@
             </a:lvl1pPr>
           </a:lstStyle>
           <a:p>
-            <a:fld id="{DA293E9B-4C70-475B-B5B5-C6D1CDF11403}" type="slidenum">
+            <a:fld id="{4C64BAE8-BEAA-4D97-9F5A-C91A5099CCCB}" type="slidenum">
               <a:rPr lang="ko-KR" altLang="en-US" smtClean="0"/>
               <a:t>‹#›</a:t>
             </a:fld>
@@ -3003,7 +3003,7 @@
     </p:spTree>
     <p:extLst>
       <p:ext uri="{BB962C8B-B14F-4D97-AF65-F5344CB8AC3E}">
-        <p14:creationId xmlns:p14="http://schemas.microsoft.com/office/powerpoint/2010/main" val="2502164091"/>
+        <p14:creationId xmlns:p14="http://schemas.microsoft.com/office/powerpoint/2010/main" val="3423955028"/>
       </p:ext>
     </p:extLst>
   </p:cSld>
@@ -3326,7 +3326,7 @@
           <p:cNvPr id="3" name="그래픽 2">
             <a:extLst>
               <a:ext uri="{FF2B5EF4-FFF2-40B4-BE49-F238E27FC236}">
-                <a16:creationId xmlns:a16="http://schemas.microsoft.com/office/drawing/2014/main" id="{56050E4B-E0AF-AE95-0D65-C4592E7CC234}"/>
+                <a16:creationId xmlns:a16="http://schemas.microsoft.com/office/drawing/2014/main" id="{42DA2220-CF33-B7CC-FCB5-E1FC13C29D03}"/>
               </a:ext>
             </a:extLst>
           </p:cNvPr>
@@ -3360,7 +3360,7 @@
     </p:spTree>
     <p:extLst>
       <p:ext uri="{BB962C8B-B14F-4D97-AF65-F5344CB8AC3E}">
-        <p14:creationId xmlns:p14="http://schemas.microsoft.com/office/powerpoint/2010/main" val="809978724"/>
+        <p14:creationId xmlns:p14="http://schemas.microsoft.com/office/powerpoint/2010/main" val="1202659497"/>
       </p:ext>
     </p:extLst>
   </p:cSld>

--- a/docs/assets/infographic-seed-gallery.pptx
+++ b/docs/assets/infographic-seed-gallery.pptx
@@ -129,7 +129,7 @@
           <p:cNvPr id="2" name="제목 1">
             <a:extLst>
               <a:ext uri="{FF2B5EF4-FFF2-40B4-BE49-F238E27FC236}">
-                <a16:creationId xmlns:a16="http://schemas.microsoft.com/office/drawing/2014/main" id="{2C89D752-6384-3F4D-C8A1-EE7D6511D6C7}"/>
+                <a16:creationId xmlns:a16="http://schemas.microsoft.com/office/drawing/2014/main" id="{F69C17A5-79BA-4D00-0563-5A2EA14763F3}"/>
               </a:ext>
             </a:extLst>
           </p:cNvPr>
@@ -166,7 +166,7 @@
           <p:cNvPr id="3" name="부제목 2">
             <a:extLst>
               <a:ext uri="{FF2B5EF4-FFF2-40B4-BE49-F238E27FC236}">
-                <a16:creationId xmlns:a16="http://schemas.microsoft.com/office/drawing/2014/main" id="{A2BD57D7-3C72-1C5C-9460-5E4362A58461}"/>
+                <a16:creationId xmlns:a16="http://schemas.microsoft.com/office/drawing/2014/main" id="{205F2C38-9E32-15F1-8E2A-D72311492F80}"/>
               </a:ext>
             </a:extLst>
           </p:cNvPr>
@@ -236,7 +236,7 @@
           <p:cNvPr id="4" name="날짜 개체 틀 3">
             <a:extLst>
               <a:ext uri="{FF2B5EF4-FFF2-40B4-BE49-F238E27FC236}">
-                <a16:creationId xmlns:a16="http://schemas.microsoft.com/office/drawing/2014/main" id="{AB487B54-32E7-C0E2-AE16-282024D95E21}"/>
+                <a16:creationId xmlns:a16="http://schemas.microsoft.com/office/drawing/2014/main" id="{6E123F01-42F4-114C-67A8-1D7EB3D64954}"/>
               </a:ext>
             </a:extLst>
           </p:cNvPr>
@@ -252,7 +252,7 @@
           <a:bodyPr/>
           <a:lstStyle/>
           <a:p>
-            <a:fld id="{C0AFCF05-31C4-4A77-B5CF-C620AE1F5E65}" type="datetimeFigureOut">
+            <a:fld id="{01CDDAF0-A6BC-4204-9BC5-12E401C479B9}" type="datetimeFigureOut">
               <a:rPr lang="ko-KR" altLang="en-US" smtClean="0"/>
               <a:t>2026-06-20</a:t>
             </a:fld>
@@ -265,7 +265,7 @@
           <p:cNvPr id="5" name="바닥글 개체 틀 4">
             <a:extLst>
               <a:ext uri="{FF2B5EF4-FFF2-40B4-BE49-F238E27FC236}">
-                <a16:creationId xmlns:a16="http://schemas.microsoft.com/office/drawing/2014/main" id="{C6E3206D-1F71-F1D6-B6FA-BAF5F00ABEFF}"/>
+                <a16:creationId xmlns:a16="http://schemas.microsoft.com/office/drawing/2014/main" id="{78D87768-4CD2-B279-776A-FCE25FB1E092}"/>
               </a:ext>
             </a:extLst>
           </p:cNvPr>
@@ -290,7 +290,7 @@
           <p:cNvPr id="6" name="슬라이드 번호 개체 틀 5">
             <a:extLst>
               <a:ext uri="{FF2B5EF4-FFF2-40B4-BE49-F238E27FC236}">
-                <a16:creationId xmlns:a16="http://schemas.microsoft.com/office/drawing/2014/main" id="{FF3D5F91-7A17-9A91-74A6-60A59D32043F}"/>
+                <a16:creationId xmlns:a16="http://schemas.microsoft.com/office/drawing/2014/main" id="{BFD954C1-6619-C702-0C6B-2408BCAC3C63}"/>
               </a:ext>
             </a:extLst>
           </p:cNvPr>
@@ -306,7 +306,7 @@
           <a:bodyPr/>
           <a:lstStyle/>
           <a:p>
-            <a:fld id="{4C64BAE8-BEAA-4D97-9F5A-C91A5099CCCB}" type="slidenum">
+            <a:fld id="{91CE851D-84D8-42F9-999F-849BB55211A8}" type="slidenum">
               <a:rPr lang="ko-KR" altLang="en-US" smtClean="0"/>
               <a:t>‹#›</a:t>
             </a:fld>
@@ -317,7 +317,7 @@
     </p:spTree>
     <p:extLst>
       <p:ext uri="{BB962C8B-B14F-4D97-AF65-F5344CB8AC3E}">
-        <p14:creationId xmlns:p14="http://schemas.microsoft.com/office/powerpoint/2010/main" val="3555931395"/>
+        <p14:creationId xmlns:p14="http://schemas.microsoft.com/office/powerpoint/2010/main" val="1687521583"/>
       </p:ext>
     </p:extLst>
   </p:cSld>
@@ -349,7 +349,7 @@
           <p:cNvPr id="2" name="제목 1">
             <a:extLst>
               <a:ext uri="{FF2B5EF4-FFF2-40B4-BE49-F238E27FC236}">
-                <a16:creationId xmlns:a16="http://schemas.microsoft.com/office/drawing/2014/main" id="{293C265F-BACB-1782-7EC2-8AE268E5CDA1}"/>
+                <a16:creationId xmlns:a16="http://schemas.microsoft.com/office/drawing/2014/main" id="{8FE6802E-A9D4-F7DB-6076-FDA859B7AD36}"/>
               </a:ext>
             </a:extLst>
           </p:cNvPr>
@@ -377,7 +377,7 @@
           <p:cNvPr id="3" name="세로 텍스트 개체 틀 2">
             <a:extLst>
               <a:ext uri="{FF2B5EF4-FFF2-40B4-BE49-F238E27FC236}">
-                <a16:creationId xmlns:a16="http://schemas.microsoft.com/office/drawing/2014/main" id="{064BF296-BB62-4B8D-7D4D-C31B366B56BE}"/>
+                <a16:creationId xmlns:a16="http://schemas.microsoft.com/office/drawing/2014/main" id="{0E7C45CC-8C71-A1E8-8E34-8C4DA8F501AA}"/>
               </a:ext>
             </a:extLst>
           </p:cNvPr>
@@ -434,7 +434,7 @@
           <p:cNvPr id="4" name="날짜 개체 틀 3">
             <a:extLst>
               <a:ext uri="{FF2B5EF4-FFF2-40B4-BE49-F238E27FC236}">
-                <a16:creationId xmlns:a16="http://schemas.microsoft.com/office/drawing/2014/main" id="{EA67663B-5231-32FF-B423-29C586B4C94C}"/>
+                <a16:creationId xmlns:a16="http://schemas.microsoft.com/office/drawing/2014/main" id="{90502C00-4E97-12E8-EAEB-AA420D923CA8}"/>
               </a:ext>
             </a:extLst>
           </p:cNvPr>
@@ -450,7 +450,7 @@
           <a:bodyPr/>
           <a:lstStyle/>
           <a:p>
-            <a:fld id="{C0AFCF05-31C4-4A77-B5CF-C620AE1F5E65}" type="datetimeFigureOut">
+            <a:fld id="{01CDDAF0-A6BC-4204-9BC5-12E401C479B9}" type="datetimeFigureOut">
               <a:rPr lang="ko-KR" altLang="en-US" smtClean="0"/>
               <a:t>2026-06-20</a:t>
             </a:fld>
@@ -463,7 +463,7 @@
           <p:cNvPr id="5" name="바닥글 개체 틀 4">
             <a:extLst>
               <a:ext uri="{FF2B5EF4-FFF2-40B4-BE49-F238E27FC236}">
-                <a16:creationId xmlns:a16="http://schemas.microsoft.com/office/drawing/2014/main" id="{8262D8C0-C358-2111-20CD-F08CBFA2EE82}"/>
+                <a16:creationId xmlns:a16="http://schemas.microsoft.com/office/drawing/2014/main" id="{33821B11-AD10-3183-89FF-6DE6DACDBD52}"/>
               </a:ext>
             </a:extLst>
           </p:cNvPr>
@@ -488,7 +488,7 @@
           <p:cNvPr id="6" name="슬라이드 번호 개체 틀 5">
             <a:extLst>
               <a:ext uri="{FF2B5EF4-FFF2-40B4-BE49-F238E27FC236}">
-                <a16:creationId xmlns:a16="http://schemas.microsoft.com/office/drawing/2014/main" id="{0A5AFDFB-6443-4DCF-8D25-5D031287DBB8}"/>
+                <a16:creationId xmlns:a16="http://schemas.microsoft.com/office/drawing/2014/main" id="{82C87243-8F58-7BE5-FC3C-BEBD0BF6EB44}"/>
               </a:ext>
             </a:extLst>
           </p:cNvPr>
@@ -504,7 +504,7 @@
           <a:bodyPr/>
           <a:lstStyle/>
           <a:p>
-            <a:fld id="{4C64BAE8-BEAA-4D97-9F5A-C91A5099CCCB}" type="slidenum">
+            <a:fld id="{91CE851D-84D8-42F9-999F-849BB55211A8}" type="slidenum">
               <a:rPr lang="ko-KR" altLang="en-US" smtClean="0"/>
               <a:t>‹#›</a:t>
             </a:fld>
@@ -515,7 +515,7 @@
     </p:spTree>
     <p:extLst>
       <p:ext uri="{BB962C8B-B14F-4D97-AF65-F5344CB8AC3E}">
-        <p14:creationId xmlns:p14="http://schemas.microsoft.com/office/powerpoint/2010/main" val="571346022"/>
+        <p14:creationId xmlns:p14="http://schemas.microsoft.com/office/powerpoint/2010/main" val="3866387567"/>
       </p:ext>
     </p:extLst>
   </p:cSld>
@@ -547,7 +547,7 @@
           <p:cNvPr id="2" name="세로 제목 1">
             <a:extLst>
               <a:ext uri="{FF2B5EF4-FFF2-40B4-BE49-F238E27FC236}">
-                <a16:creationId xmlns:a16="http://schemas.microsoft.com/office/drawing/2014/main" id="{5DFEF330-4888-ED4A-325B-68E890DFE740}"/>
+                <a16:creationId xmlns:a16="http://schemas.microsoft.com/office/drawing/2014/main" id="{37AD33B0-F8A0-2551-015D-C26A6AD7E117}"/>
               </a:ext>
             </a:extLst>
           </p:cNvPr>
@@ -580,7 +580,7 @@
           <p:cNvPr id="3" name="세로 텍스트 개체 틀 2">
             <a:extLst>
               <a:ext uri="{FF2B5EF4-FFF2-40B4-BE49-F238E27FC236}">
-                <a16:creationId xmlns:a16="http://schemas.microsoft.com/office/drawing/2014/main" id="{7B713A5A-BB38-69EB-09D9-63E0C9F56155}"/>
+                <a16:creationId xmlns:a16="http://schemas.microsoft.com/office/drawing/2014/main" id="{052D304F-D52D-6FCC-C3DE-ABA6D0270F23}"/>
               </a:ext>
             </a:extLst>
           </p:cNvPr>
@@ -642,7 +642,7 @@
           <p:cNvPr id="4" name="날짜 개체 틀 3">
             <a:extLst>
               <a:ext uri="{FF2B5EF4-FFF2-40B4-BE49-F238E27FC236}">
-                <a16:creationId xmlns:a16="http://schemas.microsoft.com/office/drawing/2014/main" id="{8817FD9C-FCC6-6297-38CE-3C7057AD0A3A}"/>
+                <a16:creationId xmlns:a16="http://schemas.microsoft.com/office/drawing/2014/main" id="{8A3E4F57-1AC0-698A-AD0D-EF36D55B5657}"/>
               </a:ext>
             </a:extLst>
           </p:cNvPr>
@@ -658,7 +658,7 @@
           <a:bodyPr/>
           <a:lstStyle/>
           <a:p>
-            <a:fld id="{C0AFCF05-31C4-4A77-B5CF-C620AE1F5E65}" type="datetimeFigureOut">
+            <a:fld id="{01CDDAF0-A6BC-4204-9BC5-12E401C479B9}" type="datetimeFigureOut">
               <a:rPr lang="ko-KR" altLang="en-US" smtClean="0"/>
               <a:t>2026-06-20</a:t>
             </a:fld>
@@ -671,7 +671,7 @@
           <p:cNvPr id="5" name="바닥글 개체 틀 4">
             <a:extLst>
               <a:ext uri="{FF2B5EF4-FFF2-40B4-BE49-F238E27FC236}">
-                <a16:creationId xmlns:a16="http://schemas.microsoft.com/office/drawing/2014/main" id="{B000D345-0459-8CD6-6B56-884E006683B0}"/>
+                <a16:creationId xmlns:a16="http://schemas.microsoft.com/office/drawing/2014/main" id="{44AEC6C1-564E-DA1A-2FC7-E052D0C90312}"/>
               </a:ext>
             </a:extLst>
           </p:cNvPr>
@@ -696,7 +696,7 @@
           <p:cNvPr id="6" name="슬라이드 번호 개체 틀 5">
             <a:extLst>
               <a:ext uri="{FF2B5EF4-FFF2-40B4-BE49-F238E27FC236}">
-                <a16:creationId xmlns:a16="http://schemas.microsoft.com/office/drawing/2014/main" id="{206F6F66-D412-218B-D91F-A93683953B37}"/>
+                <a16:creationId xmlns:a16="http://schemas.microsoft.com/office/drawing/2014/main" id="{7362E877-046C-A7E9-4844-00EBCDA4CB54}"/>
               </a:ext>
             </a:extLst>
           </p:cNvPr>
@@ -712,7 +712,7 @@
           <a:bodyPr/>
           <a:lstStyle/>
           <a:p>
-            <a:fld id="{4C64BAE8-BEAA-4D97-9F5A-C91A5099CCCB}" type="slidenum">
+            <a:fld id="{91CE851D-84D8-42F9-999F-849BB55211A8}" type="slidenum">
               <a:rPr lang="ko-KR" altLang="en-US" smtClean="0"/>
               <a:t>‹#›</a:t>
             </a:fld>
@@ -723,7 +723,7 @@
     </p:spTree>
     <p:extLst>
       <p:ext uri="{BB962C8B-B14F-4D97-AF65-F5344CB8AC3E}">
-        <p14:creationId xmlns:p14="http://schemas.microsoft.com/office/powerpoint/2010/main" val="1005575664"/>
+        <p14:creationId xmlns:p14="http://schemas.microsoft.com/office/powerpoint/2010/main" val="1476387909"/>
       </p:ext>
     </p:extLst>
   </p:cSld>
@@ -755,7 +755,7 @@
           <p:cNvPr id="2" name="제목 1">
             <a:extLst>
               <a:ext uri="{FF2B5EF4-FFF2-40B4-BE49-F238E27FC236}">
-                <a16:creationId xmlns:a16="http://schemas.microsoft.com/office/drawing/2014/main" id="{2D859E28-1852-C621-BC4D-9A42530F9323}"/>
+                <a16:creationId xmlns:a16="http://schemas.microsoft.com/office/drawing/2014/main" id="{7DB53200-854D-9A73-BEB6-E5FBA4462FCE}"/>
               </a:ext>
             </a:extLst>
           </p:cNvPr>
@@ -783,7 +783,7 @@
           <p:cNvPr id="3" name="내용 개체 틀 2">
             <a:extLst>
               <a:ext uri="{FF2B5EF4-FFF2-40B4-BE49-F238E27FC236}">
-                <a16:creationId xmlns:a16="http://schemas.microsoft.com/office/drawing/2014/main" id="{64DC0B1D-D631-25B8-CA5C-8FA45F0A038A}"/>
+                <a16:creationId xmlns:a16="http://schemas.microsoft.com/office/drawing/2014/main" id="{F0738FF4-1946-22D9-4C71-BF5A021D1AAB}"/>
               </a:ext>
             </a:extLst>
           </p:cNvPr>
@@ -840,7 +840,7 @@
           <p:cNvPr id="4" name="날짜 개체 틀 3">
             <a:extLst>
               <a:ext uri="{FF2B5EF4-FFF2-40B4-BE49-F238E27FC236}">
-                <a16:creationId xmlns:a16="http://schemas.microsoft.com/office/drawing/2014/main" id="{82017E12-F0B0-19DB-98A7-D57B56475FF5}"/>
+                <a16:creationId xmlns:a16="http://schemas.microsoft.com/office/drawing/2014/main" id="{38897995-56C0-9399-7272-B9D012D4BD5A}"/>
               </a:ext>
             </a:extLst>
           </p:cNvPr>
@@ -856,7 +856,7 @@
           <a:bodyPr/>
           <a:lstStyle/>
           <a:p>
-            <a:fld id="{C0AFCF05-31C4-4A77-B5CF-C620AE1F5E65}" type="datetimeFigureOut">
+            <a:fld id="{01CDDAF0-A6BC-4204-9BC5-12E401C479B9}" type="datetimeFigureOut">
               <a:rPr lang="ko-KR" altLang="en-US" smtClean="0"/>
               <a:t>2026-06-20</a:t>
             </a:fld>
@@ -869,7 +869,7 @@
           <p:cNvPr id="5" name="바닥글 개체 틀 4">
             <a:extLst>
               <a:ext uri="{FF2B5EF4-FFF2-40B4-BE49-F238E27FC236}">
-                <a16:creationId xmlns:a16="http://schemas.microsoft.com/office/drawing/2014/main" id="{D87757CC-40AB-7542-0311-C61A516B6784}"/>
+                <a16:creationId xmlns:a16="http://schemas.microsoft.com/office/drawing/2014/main" id="{27FE74A8-A918-08E7-4F0A-35E54C6860D1}"/>
               </a:ext>
             </a:extLst>
           </p:cNvPr>
@@ -894,7 +894,7 @@
           <p:cNvPr id="6" name="슬라이드 번호 개체 틀 5">
             <a:extLst>
               <a:ext uri="{FF2B5EF4-FFF2-40B4-BE49-F238E27FC236}">
-                <a16:creationId xmlns:a16="http://schemas.microsoft.com/office/drawing/2014/main" id="{81C71C97-0964-5539-90C2-DBDA658832FF}"/>
+                <a16:creationId xmlns:a16="http://schemas.microsoft.com/office/drawing/2014/main" id="{5D950E8A-61B4-27DD-A592-463C6111303C}"/>
               </a:ext>
             </a:extLst>
           </p:cNvPr>
@@ -910,7 +910,7 @@
           <a:bodyPr/>
           <a:lstStyle/>
           <a:p>
-            <a:fld id="{4C64BAE8-BEAA-4D97-9F5A-C91A5099CCCB}" type="slidenum">
+            <a:fld id="{91CE851D-84D8-42F9-999F-849BB55211A8}" type="slidenum">
               <a:rPr lang="ko-KR" altLang="en-US" smtClean="0"/>
               <a:t>‹#›</a:t>
             </a:fld>
@@ -921,7 +921,7 @@
     </p:spTree>
     <p:extLst>
       <p:ext uri="{BB962C8B-B14F-4D97-AF65-F5344CB8AC3E}">
-        <p14:creationId xmlns:p14="http://schemas.microsoft.com/office/powerpoint/2010/main" val="1783565131"/>
+        <p14:creationId xmlns:p14="http://schemas.microsoft.com/office/powerpoint/2010/main" val="2220713978"/>
       </p:ext>
     </p:extLst>
   </p:cSld>
@@ -953,7 +953,7 @@
           <p:cNvPr id="2" name="제목 1">
             <a:extLst>
               <a:ext uri="{FF2B5EF4-FFF2-40B4-BE49-F238E27FC236}">
-                <a16:creationId xmlns:a16="http://schemas.microsoft.com/office/drawing/2014/main" id="{680094BF-0305-F37D-3C26-80B58A0730A2}"/>
+                <a16:creationId xmlns:a16="http://schemas.microsoft.com/office/drawing/2014/main" id="{A35BBE72-3E7B-C4D7-AB9D-00CD3C3DF4D7}"/>
               </a:ext>
             </a:extLst>
           </p:cNvPr>
@@ -990,7 +990,7 @@
           <p:cNvPr id="3" name="텍스트 개체 틀 2">
             <a:extLst>
               <a:ext uri="{FF2B5EF4-FFF2-40B4-BE49-F238E27FC236}">
-                <a16:creationId xmlns:a16="http://schemas.microsoft.com/office/drawing/2014/main" id="{804C3A10-1047-3782-ADDB-685EDC31802B}"/>
+                <a16:creationId xmlns:a16="http://schemas.microsoft.com/office/drawing/2014/main" id="{18319C78-09AD-4FEC-05A9-7A954F91951F}"/>
               </a:ext>
             </a:extLst>
           </p:cNvPr>
@@ -1115,7 +1115,7 @@
           <p:cNvPr id="4" name="날짜 개체 틀 3">
             <a:extLst>
               <a:ext uri="{FF2B5EF4-FFF2-40B4-BE49-F238E27FC236}">
-                <a16:creationId xmlns:a16="http://schemas.microsoft.com/office/drawing/2014/main" id="{BFB3DB03-ACE2-ED67-5CC6-F103220C8D8C}"/>
+                <a16:creationId xmlns:a16="http://schemas.microsoft.com/office/drawing/2014/main" id="{572F127A-6BD2-90A2-7ED5-1FA8C07F0A36}"/>
               </a:ext>
             </a:extLst>
           </p:cNvPr>
@@ -1131,7 +1131,7 @@
           <a:bodyPr/>
           <a:lstStyle/>
           <a:p>
-            <a:fld id="{C0AFCF05-31C4-4A77-B5CF-C620AE1F5E65}" type="datetimeFigureOut">
+            <a:fld id="{01CDDAF0-A6BC-4204-9BC5-12E401C479B9}" type="datetimeFigureOut">
               <a:rPr lang="ko-KR" altLang="en-US" smtClean="0"/>
               <a:t>2026-06-20</a:t>
             </a:fld>
@@ -1144,7 +1144,7 @@
           <p:cNvPr id="5" name="바닥글 개체 틀 4">
             <a:extLst>
               <a:ext uri="{FF2B5EF4-FFF2-40B4-BE49-F238E27FC236}">
-                <a16:creationId xmlns:a16="http://schemas.microsoft.com/office/drawing/2014/main" id="{29727E1C-0721-BB26-2A8F-2CB850D4DA44}"/>
+                <a16:creationId xmlns:a16="http://schemas.microsoft.com/office/drawing/2014/main" id="{F969958C-A744-7C3A-DB88-BC9EC5A5777C}"/>
               </a:ext>
             </a:extLst>
           </p:cNvPr>
@@ -1169,7 +1169,7 @@
           <p:cNvPr id="6" name="슬라이드 번호 개체 틀 5">
             <a:extLst>
               <a:ext uri="{FF2B5EF4-FFF2-40B4-BE49-F238E27FC236}">
-                <a16:creationId xmlns:a16="http://schemas.microsoft.com/office/drawing/2014/main" id="{0D992C44-0E8A-3DEE-ECA7-751D94D0940E}"/>
+                <a16:creationId xmlns:a16="http://schemas.microsoft.com/office/drawing/2014/main" id="{DE0AB02C-4067-2257-3876-154DFB7095FD}"/>
               </a:ext>
             </a:extLst>
           </p:cNvPr>
@@ -1185,7 +1185,7 @@
           <a:bodyPr/>
           <a:lstStyle/>
           <a:p>
-            <a:fld id="{4C64BAE8-BEAA-4D97-9F5A-C91A5099CCCB}" type="slidenum">
+            <a:fld id="{91CE851D-84D8-42F9-999F-849BB55211A8}" type="slidenum">
               <a:rPr lang="ko-KR" altLang="en-US" smtClean="0"/>
               <a:t>‹#›</a:t>
             </a:fld>
@@ -1196,7 +1196,7 @@
     </p:spTree>
     <p:extLst>
       <p:ext uri="{BB962C8B-B14F-4D97-AF65-F5344CB8AC3E}">
-        <p14:creationId xmlns:p14="http://schemas.microsoft.com/office/powerpoint/2010/main" val="3514075148"/>
+        <p14:creationId xmlns:p14="http://schemas.microsoft.com/office/powerpoint/2010/main" val="3565046820"/>
       </p:ext>
     </p:extLst>
   </p:cSld>
@@ -1228,7 +1228,7 @@
           <p:cNvPr id="2" name="제목 1">
             <a:extLst>
               <a:ext uri="{FF2B5EF4-FFF2-40B4-BE49-F238E27FC236}">
-                <a16:creationId xmlns:a16="http://schemas.microsoft.com/office/drawing/2014/main" id="{97DEBD3B-5966-C01F-3FB8-A8B8CD60930C}"/>
+                <a16:creationId xmlns:a16="http://schemas.microsoft.com/office/drawing/2014/main" id="{B982D8D5-A0FF-5224-9A36-5586F2CBF1D0}"/>
               </a:ext>
             </a:extLst>
           </p:cNvPr>
@@ -1256,7 +1256,7 @@
           <p:cNvPr id="3" name="내용 개체 틀 2">
             <a:extLst>
               <a:ext uri="{FF2B5EF4-FFF2-40B4-BE49-F238E27FC236}">
-                <a16:creationId xmlns:a16="http://schemas.microsoft.com/office/drawing/2014/main" id="{56BC037B-D96F-1EE4-201D-E4AB352FEDCA}"/>
+                <a16:creationId xmlns:a16="http://schemas.microsoft.com/office/drawing/2014/main" id="{346CC624-8A8C-D666-0A3F-1738ACB0EE30}"/>
               </a:ext>
             </a:extLst>
           </p:cNvPr>
@@ -1318,7 +1318,7 @@
           <p:cNvPr id="4" name="내용 개체 틀 3">
             <a:extLst>
               <a:ext uri="{FF2B5EF4-FFF2-40B4-BE49-F238E27FC236}">
-                <a16:creationId xmlns:a16="http://schemas.microsoft.com/office/drawing/2014/main" id="{3097C531-04A6-4E58-DDEB-A22DDE2826D5}"/>
+                <a16:creationId xmlns:a16="http://schemas.microsoft.com/office/drawing/2014/main" id="{0E45423F-7DB2-F487-8A1D-97B456102759}"/>
               </a:ext>
             </a:extLst>
           </p:cNvPr>
@@ -1380,7 +1380,7 @@
           <p:cNvPr id="5" name="날짜 개체 틀 4">
             <a:extLst>
               <a:ext uri="{FF2B5EF4-FFF2-40B4-BE49-F238E27FC236}">
-                <a16:creationId xmlns:a16="http://schemas.microsoft.com/office/drawing/2014/main" id="{55AA0D1D-BCF1-187C-9439-F777690AD9D7}"/>
+                <a16:creationId xmlns:a16="http://schemas.microsoft.com/office/drawing/2014/main" id="{1BCEA12E-BE9D-2916-6F43-9188441444AB}"/>
               </a:ext>
             </a:extLst>
           </p:cNvPr>
@@ -1396,7 +1396,7 @@
           <a:bodyPr/>
           <a:lstStyle/>
           <a:p>
-            <a:fld id="{C0AFCF05-31C4-4A77-B5CF-C620AE1F5E65}" type="datetimeFigureOut">
+            <a:fld id="{01CDDAF0-A6BC-4204-9BC5-12E401C479B9}" type="datetimeFigureOut">
               <a:rPr lang="ko-KR" altLang="en-US" smtClean="0"/>
               <a:t>2026-06-20</a:t>
             </a:fld>
@@ -1409,7 +1409,7 @@
           <p:cNvPr id="6" name="바닥글 개체 틀 5">
             <a:extLst>
               <a:ext uri="{FF2B5EF4-FFF2-40B4-BE49-F238E27FC236}">
-                <a16:creationId xmlns:a16="http://schemas.microsoft.com/office/drawing/2014/main" id="{759AF928-179C-8171-BBA6-3B5B7E6D3A13}"/>
+                <a16:creationId xmlns:a16="http://schemas.microsoft.com/office/drawing/2014/main" id="{43432EAA-55C4-94E1-A1F6-EA199D085BCF}"/>
               </a:ext>
             </a:extLst>
           </p:cNvPr>
@@ -1434,7 +1434,7 @@
           <p:cNvPr id="7" name="슬라이드 번호 개체 틀 6">
             <a:extLst>
               <a:ext uri="{FF2B5EF4-FFF2-40B4-BE49-F238E27FC236}">
-                <a16:creationId xmlns:a16="http://schemas.microsoft.com/office/drawing/2014/main" id="{767E2663-10E9-B217-3B11-D6A82DB0ABD0}"/>
+                <a16:creationId xmlns:a16="http://schemas.microsoft.com/office/drawing/2014/main" id="{D05708E9-4466-7D30-A157-A05AA5C8AE7A}"/>
               </a:ext>
             </a:extLst>
           </p:cNvPr>
@@ -1450,7 +1450,7 @@
           <a:bodyPr/>
           <a:lstStyle/>
           <a:p>
-            <a:fld id="{4C64BAE8-BEAA-4D97-9F5A-C91A5099CCCB}" type="slidenum">
+            <a:fld id="{91CE851D-84D8-42F9-999F-849BB55211A8}" type="slidenum">
               <a:rPr lang="ko-KR" altLang="en-US" smtClean="0"/>
               <a:t>‹#›</a:t>
             </a:fld>
@@ -1461,7 +1461,7 @@
     </p:spTree>
     <p:extLst>
       <p:ext uri="{BB962C8B-B14F-4D97-AF65-F5344CB8AC3E}">
-        <p14:creationId xmlns:p14="http://schemas.microsoft.com/office/powerpoint/2010/main" val="394432464"/>
+        <p14:creationId xmlns:p14="http://schemas.microsoft.com/office/powerpoint/2010/main" val="303503081"/>
       </p:ext>
     </p:extLst>
   </p:cSld>
@@ -1493,7 +1493,7 @@
           <p:cNvPr id="2" name="제목 1">
             <a:extLst>
               <a:ext uri="{FF2B5EF4-FFF2-40B4-BE49-F238E27FC236}">
-                <a16:creationId xmlns:a16="http://schemas.microsoft.com/office/drawing/2014/main" id="{07016786-D44D-704D-9EF9-BC94F6F9ACA4}"/>
+                <a16:creationId xmlns:a16="http://schemas.microsoft.com/office/drawing/2014/main" id="{18DCD5B4-D97B-B1C5-1FAC-7B367C829FE4}"/>
               </a:ext>
             </a:extLst>
           </p:cNvPr>
@@ -1526,7 +1526,7 @@
           <p:cNvPr id="3" name="텍스트 개체 틀 2">
             <a:extLst>
               <a:ext uri="{FF2B5EF4-FFF2-40B4-BE49-F238E27FC236}">
-                <a16:creationId xmlns:a16="http://schemas.microsoft.com/office/drawing/2014/main" id="{D7828D19-6FDA-4216-8138-38EBAB63A2F6}"/>
+                <a16:creationId xmlns:a16="http://schemas.microsoft.com/office/drawing/2014/main" id="{ED137A85-86AD-A38C-00BD-194244DF3F59}"/>
               </a:ext>
             </a:extLst>
           </p:cNvPr>
@@ -1597,7 +1597,7 @@
           <p:cNvPr id="4" name="내용 개체 틀 3">
             <a:extLst>
               <a:ext uri="{FF2B5EF4-FFF2-40B4-BE49-F238E27FC236}">
-                <a16:creationId xmlns:a16="http://schemas.microsoft.com/office/drawing/2014/main" id="{94CEABA8-7DCC-FBB4-3A85-A41BA095ABCF}"/>
+                <a16:creationId xmlns:a16="http://schemas.microsoft.com/office/drawing/2014/main" id="{B8E0DF02-B030-3562-A2B0-68FC21B6D9F7}"/>
               </a:ext>
             </a:extLst>
           </p:cNvPr>
@@ -1659,7 +1659,7 @@
           <p:cNvPr id="5" name="텍스트 개체 틀 4">
             <a:extLst>
               <a:ext uri="{FF2B5EF4-FFF2-40B4-BE49-F238E27FC236}">
-                <a16:creationId xmlns:a16="http://schemas.microsoft.com/office/drawing/2014/main" id="{681C8894-5094-37DF-EA76-49D533C388FD}"/>
+                <a16:creationId xmlns:a16="http://schemas.microsoft.com/office/drawing/2014/main" id="{F683D3EE-8EC1-22EF-38B2-178EF5753E4B}"/>
               </a:ext>
             </a:extLst>
           </p:cNvPr>
@@ -1730,7 +1730,7 @@
           <p:cNvPr id="6" name="내용 개체 틀 5">
             <a:extLst>
               <a:ext uri="{FF2B5EF4-FFF2-40B4-BE49-F238E27FC236}">
-                <a16:creationId xmlns:a16="http://schemas.microsoft.com/office/drawing/2014/main" id="{B2DE768B-9C2B-E3D7-3DA5-3BA2A7619A06}"/>
+                <a16:creationId xmlns:a16="http://schemas.microsoft.com/office/drawing/2014/main" id="{46E90D41-137C-6398-320D-DFDF7DD445C1}"/>
               </a:ext>
             </a:extLst>
           </p:cNvPr>
@@ -1792,7 +1792,7 @@
           <p:cNvPr id="7" name="날짜 개체 틀 6">
             <a:extLst>
               <a:ext uri="{FF2B5EF4-FFF2-40B4-BE49-F238E27FC236}">
-                <a16:creationId xmlns:a16="http://schemas.microsoft.com/office/drawing/2014/main" id="{3424EC45-B79C-4E11-E8E2-BDFA30D90B2B}"/>
+                <a16:creationId xmlns:a16="http://schemas.microsoft.com/office/drawing/2014/main" id="{0AA23BA9-9A06-C506-26D5-323220AF39E8}"/>
               </a:ext>
             </a:extLst>
           </p:cNvPr>
@@ -1808,7 +1808,7 @@
           <a:bodyPr/>
           <a:lstStyle/>
           <a:p>
-            <a:fld id="{C0AFCF05-31C4-4A77-B5CF-C620AE1F5E65}" type="datetimeFigureOut">
+            <a:fld id="{01CDDAF0-A6BC-4204-9BC5-12E401C479B9}" type="datetimeFigureOut">
               <a:rPr lang="ko-KR" altLang="en-US" smtClean="0"/>
               <a:t>2026-06-20</a:t>
             </a:fld>
@@ -1821,7 +1821,7 @@
           <p:cNvPr id="8" name="바닥글 개체 틀 7">
             <a:extLst>
               <a:ext uri="{FF2B5EF4-FFF2-40B4-BE49-F238E27FC236}">
-                <a16:creationId xmlns:a16="http://schemas.microsoft.com/office/drawing/2014/main" id="{31C6DB45-B2D2-E080-9272-A03433964AAB}"/>
+                <a16:creationId xmlns:a16="http://schemas.microsoft.com/office/drawing/2014/main" id="{36F76E4A-A9D0-7E6F-1CF3-2599488CA6D7}"/>
               </a:ext>
             </a:extLst>
           </p:cNvPr>
@@ -1846,7 +1846,7 @@
           <p:cNvPr id="9" name="슬라이드 번호 개체 틀 8">
             <a:extLst>
               <a:ext uri="{FF2B5EF4-FFF2-40B4-BE49-F238E27FC236}">
-                <a16:creationId xmlns:a16="http://schemas.microsoft.com/office/drawing/2014/main" id="{6A9B09C3-FD72-9130-97E0-E6F9F6B64D62}"/>
+                <a16:creationId xmlns:a16="http://schemas.microsoft.com/office/drawing/2014/main" id="{F1B54E55-856E-CDC5-0A9E-BEF780D3B355}"/>
               </a:ext>
             </a:extLst>
           </p:cNvPr>
@@ -1862,7 +1862,7 @@
           <a:bodyPr/>
           <a:lstStyle/>
           <a:p>
-            <a:fld id="{4C64BAE8-BEAA-4D97-9F5A-C91A5099CCCB}" type="slidenum">
+            <a:fld id="{91CE851D-84D8-42F9-999F-849BB55211A8}" type="slidenum">
               <a:rPr lang="ko-KR" altLang="en-US" smtClean="0"/>
               <a:t>‹#›</a:t>
             </a:fld>
@@ -1873,7 +1873,7 @@
     </p:spTree>
     <p:extLst>
       <p:ext uri="{BB962C8B-B14F-4D97-AF65-F5344CB8AC3E}">
-        <p14:creationId xmlns:p14="http://schemas.microsoft.com/office/powerpoint/2010/main" val="3055896414"/>
+        <p14:creationId xmlns:p14="http://schemas.microsoft.com/office/powerpoint/2010/main" val="3706986855"/>
       </p:ext>
     </p:extLst>
   </p:cSld>
@@ -1905,7 +1905,7 @@
           <p:cNvPr id="2" name="제목 1">
             <a:extLst>
               <a:ext uri="{FF2B5EF4-FFF2-40B4-BE49-F238E27FC236}">
-                <a16:creationId xmlns:a16="http://schemas.microsoft.com/office/drawing/2014/main" id="{329BA7CC-B376-B465-1004-7A20E5AB280D}"/>
+                <a16:creationId xmlns:a16="http://schemas.microsoft.com/office/drawing/2014/main" id="{12D00BA4-5EB5-6C1B-6611-487F1F912818}"/>
               </a:ext>
             </a:extLst>
           </p:cNvPr>
@@ -1933,7 +1933,7 @@
           <p:cNvPr id="3" name="날짜 개체 틀 2">
             <a:extLst>
               <a:ext uri="{FF2B5EF4-FFF2-40B4-BE49-F238E27FC236}">
-                <a16:creationId xmlns:a16="http://schemas.microsoft.com/office/drawing/2014/main" id="{8FF70401-4B85-B8C3-B883-4C8AF5C9F837}"/>
+                <a16:creationId xmlns:a16="http://schemas.microsoft.com/office/drawing/2014/main" id="{5D76FEB5-CFEA-272A-F925-82A5E61E33B4}"/>
               </a:ext>
             </a:extLst>
           </p:cNvPr>
@@ -1949,7 +1949,7 @@
           <a:bodyPr/>
           <a:lstStyle/>
           <a:p>
-            <a:fld id="{C0AFCF05-31C4-4A77-B5CF-C620AE1F5E65}" type="datetimeFigureOut">
+            <a:fld id="{01CDDAF0-A6BC-4204-9BC5-12E401C479B9}" type="datetimeFigureOut">
               <a:rPr lang="ko-KR" altLang="en-US" smtClean="0"/>
               <a:t>2026-06-20</a:t>
             </a:fld>
@@ -1962,7 +1962,7 @@
           <p:cNvPr id="4" name="바닥글 개체 틀 3">
             <a:extLst>
               <a:ext uri="{FF2B5EF4-FFF2-40B4-BE49-F238E27FC236}">
-                <a16:creationId xmlns:a16="http://schemas.microsoft.com/office/drawing/2014/main" id="{1C23EA94-E56F-4446-3347-B34B23534FF0}"/>
+                <a16:creationId xmlns:a16="http://schemas.microsoft.com/office/drawing/2014/main" id="{4B4E9688-1E0C-053F-BD31-3F81C5DF7B34}"/>
               </a:ext>
             </a:extLst>
           </p:cNvPr>
@@ -1987,7 +1987,7 @@
           <p:cNvPr id="5" name="슬라이드 번호 개체 틀 4">
             <a:extLst>
               <a:ext uri="{FF2B5EF4-FFF2-40B4-BE49-F238E27FC236}">
-                <a16:creationId xmlns:a16="http://schemas.microsoft.com/office/drawing/2014/main" id="{03010BAB-08C9-3DFA-A2D9-97321AD1A1FC}"/>
+                <a16:creationId xmlns:a16="http://schemas.microsoft.com/office/drawing/2014/main" id="{7A320298-F357-0BE7-6717-2CA2CC407F6F}"/>
               </a:ext>
             </a:extLst>
           </p:cNvPr>
@@ -2003,7 +2003,7 @@
           <a:bodyPr/>
           <a:lstStyle/>
           <a:p>
-            <a:fld id="{4C64BAE8-BEAA-4D97-9F5A-C91A5099CCCB}" type="slidenum">
+            <a:fld id="{91CE851D-84D8-42F9-999F-849BB55211A8}" type="slidenum">
               <a:rPr lang="ko-KR" altLang="en-US" smtClean="0"/>
               <a:t>‹#›</a:t>
             </a:fld>
@@ -2014,7 +2014,7 @@
     </p:spTree>
     <p:extLst>
       <p:ext uri="{BB962C8B-B14F-4D97-AF65-F5344CB8AC3E}">
-        <p14:creationId xmlns:p14="http://schemas.microsoft.com/office/powerpoint/2010/main" val="899777587"/>
+        <p14:creationId xmlns:p14="http://schemas.microsoft.com/office/powerpoint/2010/main" val="2294393337"/>
       </p:ext>
     </p:extLst>
   </p:cSld>
@@ -2046,7 +2046,7 @@
           <p:cNvPr id="2" name="날짜 개체 틀 1">
             <a:extLst>
               <a:ext uri="{FF2B5EF4-FFF2-40B4-BE49-F238E27FC236}">
-                <a16:creationId xmlns:a16="http://schemas.microsoft.com/office/drawing/2014/main" id="{4FD369BF-C17B-D168-9010-B3C2387BEEEC}"/>
+                <a16:creationId xmlns:a16="http://schemas.microsoft.com/office/drawing/2014/main" id="{51F3557C-0A41-87B2-4D0F-63531E533BE3}"/>
               </a:ext>
             </a:extLst>
           </p:cNvPr>
@@ -2062,7 +2062,7 @@
           <a:bodyPr/>
           <a:lstStyle/>
           <a:p>
-            <a:fld id="{C0AFCF05-31C4-4A77-B5CF-C620AE1F5E65}" type="datetimeFigureOut">
+            <a:fld id="{01CDDAF0-A6BC-4204-9BC5-12E401C479B9}" type="datetimeFigureOut">
               <a:rPr lang="ko-KR" altLang="en-US" smtClean="0"/>
               <a:t>2026-06-20</a:t>
             </a:fld>
@@ -2075,7 +2075,7 @@
           <p:cNvPr id="3" name="바닥글 개체 틀 2">
             <a:extLst>
               <a:ext uri="{FF2B5EF4-FFF2-40B4-BE49-F238E27FC236}">
-                <a16:creationId xmlns:a16="http://schemas.microsoft.com/office/drawing/2014/main" id="{B5A29A6C-7896-80BA-4F2B-221671A8D248}"/>
+                <a16:creationId xmlns:a16="http://schemas.microsoft.com/office/drawing/2014/main" id="{46967001-933D-2A23-ED31-0D32B987297C}"/>
               </a:ext>
             </a:extLst>
           </p:cNvPr>
@@ -2100,7 +2100,7 @@
           <p:cNvPr id="4" name="슬라이드 번호 개체 틀 3">
             <a:extLst>
               <a:ext uri="{FF2B5EF4-FFF2-40B4-BE49-F238E27FC236}">
-                <a16:creationId xmlns:a16="http://schemas.microsoft.com/office/drawing/2014/main" id="{20B83DC0-1936-EFCB-6B49-7A3E549AD3AB}"/>
+                <a16:creationId xmlns:a16="http://schemas.microsoft.com/office/drawing/2014/main" id="{FB4EEAFA-2F2E-03DB-19DE-C0D040919BEE}"/>
               </a:ext>
             </a:extLst>
           </p:cNvPr>
@@ -2116,7 +2116,7 @@
           <a:bodyPr/>
           <a:lstStyle/>
           <a:p>
-            <a:fld id="{4C64BAE8-BEAA-4D97-9F5A-C91A5099CCCB}" type="slidenum">
+            <a:fld id="{91CE851D-84D8-42F9-999F-849BB55211A8}" type="slidenum">
               <a:rPr lang="ko-KR" altLang="en-US" smtClean="0"/>
               <a:t>‹#›</a:t>
             </a:fld>
@@ -2127,7 +2127,7 @@
     </p:spTree>
     <p:extLst>
       <p:ext uri="{BB962C8B-B14F-4D97-AF65-F5344CB8AC3E}">
-        <p14:creationId xmlns:p14="http://schemas.microsoft.com/office/powerpoint/2010/main" val="2519365841"/>
+        <p14:creationId xmlns:p14="http://schemas.microsoft.com/office/powerpoint/2010/main" val="1661986539"/>
       </p:ext>
     </p:extLst>
   </p:cSld>
@@ -2159,7 +2159,7 @@
           <p:cNvPr id="2" name="제목 1">
             <a:extLst>
               <a:ext uri="{FF2B5EF4-FFF2-40B4-BE49-F238E27FC236}">
-                <a16:creationId xmlns:a16="http://schemas.microsoft.com/office/drawing/2014/main" id="{C85B816A-AB2F-FCE7-0A29-75EE3C444FF5}"/>
+                <a16:creationId xmlns:a16="http://schemas.microsoft.com/office/drawing/2014/main" id="{E7F8EDD3-7799-09A3-CDDD-FDA8894C193B}"/>
               </a:ext>
             </a:extLst>
           </p:cNvPr>
@@ -2196,7 +2196,7 @@
           <p:cNvPr id="3" name="내용 개체 틀 2">
             <a:extLst>
               <a:ext uri="{FF2B5EF4-FFF2-40B4-BE49-F238E27FC236}">
-                <a16:creationId xmlns:a16="http://schemas.microsoft.com/office/drawing/2014/main" id="{59BBCF99-A5C6-57B9-5097-E7361398AD4B}"/>
+                <a16:creationId xmlns:a16="http://schemas.microsoft.com/office/drawing/2014/main" id="{23219958-90C8-E93F-D2C1-27091593DD2F}"/>
               </a:ext>
             </a:extLst>
           </p:cNvPr>
@@ -2286,7 +2286,7 @@
           <p:cNvPr id="4" name="텍스트 개체 틀 3">
             <a:extLst>
               <a:ext uri="{FF2B5EF4-FFF2-40B4-BE49-F238E27FC236}">
-                <a16:creationId xmlns:a16="http://schemas.microsoft.com/office/drawing/2014/main" id="{216F490A-98AD-A876-8896-1F33B476BB4E}"/>
+                <a16:creationId xmlns:a16="http://schemas.microsoft.com/office/drawing/2014/main" id="{AEF0B7E8-CC68-0E96-E297-3582368C4D49}"/>
               </a:ext>
             </a:extLst>
           </p:cNvPr>
@@ -2357,7 +2357,7 @@
           <p:cNvPr id="5" name="날짜 개체 틀 4">
             <a:extLst>
               <a:ext uri="{FF2B5EF4-FFF2-40B4-BE49-F238E27FC236}">
-                <a16:creationId xmlns:a16="http://schemas.microsoft.com/office/drawing/2014/main" id="{1F3AE5CF-7E94-EE3D-D52D-53A804D4FC1A}"/>
+                <a16:creationId xmlns:a16="http://schemas.microsoft.com/office/drawing/2014/main" id="{2776A0C1-384C-811A-3C79-56D6BA93C764}"/>
               </a:ext>
             </a:extLst>
           </p:cNvPr>
@@ -2373,7 +2373,7 @@
           <a:bodyPr/>
           <a:lstStyle/>
           <a:p>
-            <a:fld id="{C0AFCF05-31C4-4A77-B5CF-C620AE1F5E65}" type="datetimeFigureOut">
+            <a:fld id="{01CDDAF0-A6BC-4204-9BC5-12E401C479B9}" type="datetimeFigureOut">
               <a:rPr lang="ko-KR" altLang="en-US" smtClean="0"/>
               <a:t>2026-06-20</a:t>
             </a:fld>
@@ -2386,7 +2386,7 @@
           <p:cNvPr id="6" name="바닥글 개체 틀 5">
             <a:extLst>
               <a:ext uri="{FF2B5EF4-FFF2-40B4-BE49-F238E27FC236}">
-                <a16:creationId xmlns:a16="http://schemas.microsoft.com/office/drawing/2014/main" id="{B8ACA5C8-438F-5C33-0830-7F07C270889D}"/>
+                <a16:creationId xmlns:a16="http://schemas.microsoft.com/office/drawing/2014/main" id="{CC1007FB-A7D2-46B4-9849-6B4F34182090}"/>
               </a:ext>
             </a:extLst>
           </p:cNvPr>
@@ -2411,7 +2411,7 @@
           <p:cNvPr id="7" name="슬라이드 번호 개체 틀 6">
             <a:extLst>
               <a:ext uri="{FF2B5EF4-FFF2-40B4-BE49-F238E27FC236}">
-                <a16:creationId xmlns:a16="http://schemas.microsoft.com/office/drawing/2014/main" id="{3FE25000-3B2C-4E56-E081-FE7E56829235}"/>
+                <a16:creationId xmlns:a16="http://schemas.microsoft.com/office/drawing/2014/main" id="{A023B059-0D5E-8E31-08D2-714E1BCC7D22}"/>
               </a:ext>
             </a:extLst>
           </p:cNvPr>
@@ -2427,7 +2427,7 @@
           <a:bodyPr/>
           <a:lstStyle/>
           <a:p>
-            <a:fld id="{4C64BAE8-BEAA-4D97-9F5A-C91A5099CCCB}" type="slidenum">
+            <a:fld id="{91CE851D-84D8-42F9-999F-849BB55211A8}" type="slidenum">
               <a:rPr lang="ko-KR" altLang="en-US" smtClean="0"/>
               <a:t>‹#›</a:t>
             </a:fld>
@@ -2438,7 +2438,7 @@
     </p:spTree>
     <p:extLst>
       <p:ext uri="{BB962C8B-B14F-4D97-AF65-F5344CB8AC3E}">
-        <p14:creationId xmlns:p14="http://schemas.microsoft.com/office/powerpoint/2010/main" val="1559847738"/>
+        <p14:creationId xmlns:p14="http://schemas.microsoft.com/office/powerpoint/2010/main" val="1869570593"/>
       </p:ext>
     </p:extLst>
   </p:cSld>
@@ -2470,7 +2470,7 @@
           <p:cNvPr id="2" name="제목 1">
             <a:extLst>
               <a:ext uri="{FF2B5EF4-FFF2-40B4-BE49-F238E27FC236}">
-                <a16:creationId xmlns:a16="http://schemas.microsoft.com/office/drawing/2014/main" id="{5988CC88-7AAB-1608-772C-50F2D9C31B11}"/>
+                <a16:creationId xmlns:a16="http://schemas.microsoft.com/office/drawing/2014/main" id="{0DA67B86-BC07-6ABA-0327-B908FBA40B05}"/>
               </a:ext>
             </a:extLst>
           </p:cNvPr>
@@ -2507,7 +2507,7 @@
           <p:cNvPr id="3" name="그림 개체 틀 2">
             <a:extLst>
               <a:ext uri="{FF2B5EF4-FFF2-40B4-BE49-F238E27FC236}">
-                <a16:creationId xmlns:a16="http://schemas.microsoft.com/office/drawing/2014/main" id="{D42E737C-AACA-2FF9-0BBE-7A56244CEBC9}"/>
+                <a16:creationId xmlns:a16="http://schemas.microsoft.com/office/drawing/2014/main" id="{E50DDBC8-DE50-153C-9DCA-5A2EB8674E42}"/>
               </a:ext>
             </a:extLst>
           </p:cNvPr>
@@ -2574,7 +2574,7 @@
           <p:cNvPr id="4" name="텍스트 개체 틀 3">
             <a:extLst>
               <a:ext uri="{FF2B5EF4-FFF2-40B4-BE49-F238E27FC236}">
-                <a16:creationId xmlns:a16="http://schemas.microsoft.com/office/drawing/2014/main" id="{6FACD587-F5D0-C8D3-5500-85832F34B6F3}"/>
+                <a16:creationId xmlns:a16="http://schemas.microsoft.com/office/drawing/2014/main" id="{4CD59280-B782-E04E-EC77-69CC5263542F}"/>
               </a:ext>
             </a:extLst>
           </p:cNvPr>
@@ -2645,7 +2645,7 @@
           <p:cNvPr id="5" name="날짜 개체 틀 4">
             <a:extLst>
               <a:ext uri="{FF2B5EF4-FFF2-40B4-BE49-F238E27FC236}">
-                <a16:creationId xmlns:a16="http://schemas.microsoft.com/office/drawing/2014/main" id="{5107DF62-5B6E-5364-B0DE-F572F7135D13}"/>
+                <a16:creationId xmlns:a16="http://schemas.microsoft.com/office/drawing/2014/main" id="{C99C6FD6-674A-2A0E-F313-71146F14ABCF}"/>
               </a:ext>
             </a:extLst>
           </p:cNvPr>
@@ -2661,7 +2661,7 @@
           <a:bodyPr/>
           <a:lstStyle/>
           <a:p>
-            <a:fld id="{C0AFCF05-31C4-4A77-B5CF-C620AE1F5E65}" type="datetimeFigureOut">
+            <a:fld id="{01CDDAF0-A6BC-4204-9BC5-12E401C479B9}" type="datetimeFigureOut">
               <a:rPr lang="ko-KR" altLang="en-US" smtClean="0"/>
               <a:t>2026-06-20</a:t>
             </a:fld>
@@ -2674,7 +2674,7 @@
           <p:cNvPr id="6" name="바닥글 개체 틀 5">
             <a:extLst>
               <a:ext uri="{FF2B5EF4-FFF2-40B4-BE49-F238E27FC236}">
-                <a16:creationId xmlns:a16="http://schemas.microsoft.com/office/drawing/2014/main" id="{054B2A15-9122-893F-F907-CE2CC9E1336C}"/>
+                <a16:creationId xmlns:a16="http://schemas.microsoft.com/office/drawing/2014/main" id="{D935E0BB-9EA4-DE14-2EA4-FAC344B2061B}"/>
               </a:ext>
             </a:extLst>
           </p:cNvPr>
@@ -2699,7 +2699,7 @@
           <p:cNvPr id="7" name="슬라이드 번호 개체 틀 6">
             <a:extLst>
               <a:ext uri="{FF2B5EF4-FFF2-40B4-BE49-F238E27FC236}">
-                <a16:creationId xmlns:a16="http://schemas.microsoft.com/office/drawing/2014/main" id="{101DFC75-324B-7613-7B58-8902AD646375}"/>
+                <a16:creationId xmlns:a16="http://schemas.microsoft.com/office/drawing/2014/main" id="{7A28C638-A55B-AC11-5D6C-BD93345AFE59}"/>
               </a:ext>
             </a:extLst>
           </p:cNvPr>
@@ -2715,7 +2715,7 @@
           <a:bodyPr/>
           <a:lstStyle/>
           <a:p>
-            <a:fld id="{4C64BAE8-BEAA-4D97-9F5A-C91A5099CCCB}" type="slidenum">
+            <a:fld id="{91CE851D-84D8-42F9-999F-849BB55211A8}" type="slidenum">
               <a:rPr lang="ko-KR" altLang="en-US" smtClean="0"/>
               <a:t>‹#›</a:t>
             </a:fld>
@@ -2726,7 +2726,7 @@
     </p:spTree>
     <p:extLst>
       <p:ext uri="{BB962C8B-B14F-4D97-AF65-F5344CB8AC3E}">
-        <p14:creationId xmlns:p14="http://schemas.microsoft.com/office/powerpoint/2010/main" val="4210089443"/>
+        <p14:creationId xmlns:p14="http://schemas.microsoft.com/office/powerpoint/2010/main" val="477572886"/>
       </p:ext>
     </p:extLst>
   </p:cSld>
@@ -2763,7 +2763,7 @@
           <p:cNvPr id="2" name="제목 개체 틀 1">
             <a:extLst>
               <a:ext uri="{FF2B5EF4-FFF2-40B4-BE49-F238E27FC236}">
-                <a16:creationId xmlns:a16="http://schemas.microsoft.com/office/drawing/2014/main" id="{2FDFC841-BC69-C0B5-F5F3-56C7278377AC}"/>
+                <a16:creationId xmlns:a16="http://schemas.microsoft.com/office/drawing/2014/main" id="{3ADF70FB-D6C8-E457-B46E-C1FF61498B96}"/>
               </a:ext>
             </a:extLst>
           </p:cNvPr>
@@ -2801,7 +2801,7 @@
           <p:cNvPr id="3" name="텍스트 개체 틀 2">
             <a:extLst>
               <a:ext uri="{FF2B5EF4-FFF2-40B4-BE49-F238E27FC236}">
-                <a16:creationId xmlns:a16="http://schemas.microsoft.com/office/drawing/2014/main" id="{39D10F9F-2B1D-A29F-70C4-FB71AD893CC5}"/>
+                <a16:creationId xmlns:a16="http://schemas.microsoft.com/office/drawing/2014/main" id="{C536B1DB-4A1D-D338-F6A2-9135DF9BA271}"/>
               </a:ext>
             </a:extLst>
           </p:cNvPr>
@@ -2868,7 +2868,7 @@
           <p:cNvPr id="4" name="날짜 개체 틀 3">
             <a:extLst>
               <a:ext uri="{FF2B5EF4-FFF2-40B4-BE49-F238E27FC236}">
-                <a16:creationId xmlns:a16="http://schemas.microsoft.com/office/drawing/2014/main" id="{3E7B6E44-683A-660C-442A-F1903EBED294}"/>
+                <a16:creationId xmlns:a16="http://schemas.microsoft.com/office/drawing/2014/main" id="{A190ECCD-EED7-62EB-AC88-1111AB9734C0}"/>
               </a:ext>
             </a:extLst>
           </p:cNvPr>
@@ -2902,7 +2902,7 @@
             </a:lvl1pPr>
           </a:lstStyle>
           <a:p>
-            <a:fld id="{C0AFCF05-31C4-4A77-B5CF-C620AE1F5E65}" type="datetimeFigureOut">
+            <a:fld id="{01CDDAF0-A6BC-4204-9BC5-12E401C479B9}" type="datetimeFigureOut">
               <a:rPr lang="ko-KR" altLang="en-US" smtClean="0"/>
               <a:t>2026-06-20</a:t>
             </a:fld>
@@ -2915,7 +2915,7 @@
           <p:cNvPr id="5" name="바닥글 개체 틀 4">
             <a:extLst>
               <a:ext uri="{FF2B5EF4-FFF2-40B4-BE49-F238E27FC236}">
-                <a16:creationId xmlns:a16="http://schemas.microsoft.com/office/drawing/2014/main" id="{EAFABE25-F088-83B9-E317-4D69F1C4C484}"/>
+                <a16:creationId xmlns:a16="http://schemas.microsoft.com/office/drawing/2014/main" id="{CEA6F8CC-E3EC-BFA6-C454-44C333F79861}"/>
               </a:ext>
             </a:extLst>
           </p:cNvPr>
@@ -2958,7 +2958,7 @@
           <p:cNvPr id="6" name="슬라이드 번호 개체 틀 5">
             <a:extLst>
               <a:ext uri="{FF2B5EF4-FFF2-40B4-BE49-F238E27FC236}">
-                <a16:creationId xmlns:a16="http://schemas.microsoft.com/office/drawing/2014/main" id="{17807872-D7F9-9C75-7910-BFB889102C3B}"/>
+                <a16:creationId xmlns:a16="http://schemas.microsoft.com/office/drawing/2014/main" id="{376780F2-20C6-EA97-0518-918D4E359A7A}"/>
               </a:ext>
             </a:extLst>
           </p:cNvPr>
@@ -2992,7 +2992,7 @@
             </a:lvl1pPr>
           </a:lstStyle>
           <a:p>
-            <a:fld id="{4C64BAE8-BEAA-4D97-9F5A-C91A5099CCCB}" type="slidenum">
+            <a:fld id="{91CE851D-84D8-42F9-999F-849BB55211A8}" type="slidenum">
               <a:rPr lang="ko-KR" altLang="en-US" smtClean="0"/>
               <a:t>‹#›</a:t>
             </a:fld>
@@ -3003,7 +3003,7 @@
     </p:spTree>
     <p:extLst>
       <p:ext uri="{BB962C8B-B14F-4D97-AF65-F5344CB8AC3E}">
-        <p14:creationId xmlns:p14="http://schemas.microsoft.com/office/powerpoint/2010/main" val="3423955028"/>
+        <p14:creationId xmlns:p14="http://schemas.microsoft.com/office/powerpoint/2010/main" val="1728481584"/>
       </p:ext>
     </p:extLst>
   </p:cSld>
@@ -3326,7 +3326,7 @@
           <p:cNvPr id="3" name="그래픽 2">
             <a:extLst>
               <a:ext uri="{FF2B5EF4-FFF2-40B4-BE49-F238E27FC236}">
-                <a16:creationId xmlns:a16="http://schemas.microsoft.com/office/drawing/2014/main" id="{42DA2220-CF33-B7CC-FCB5-E1FC13C29D03}"/>
+                <a16:creationId xmlns:a16="http://schemas.microsoft.com/office/drawing/2014/main" id="{2F872A8D-0640-ACDC-6E28-3992FFA4A86D}"/>
               </a:ext>
             </a:extLst>
           </p:cNvPr>
@@ -3360,7 +3360,7 @@
     </p:spTree>
     <p:extLst>
       <p:ext uri="{BB962C8B-B14F-4D97-AF65-F5344CB8AC3E}">
-        <p14:creationId xmlns:p14="http://schemas.microsoft.com/office/powerpoint/2010/main" val="1202659497"/>
+        <p14:creationId xmlns:p14="http://schemas.microsoft.com/office/powerpoint/2010/main" val="2329143450"/>
       </p:ext>
     </p:extLst>
   </p:cSld>

--- a/docs/assets/infographic-seed-gallery.pptx
+++ b/docs/assets/infographic-seed-gallery.pptx
@@ -129,7 +129,7 @@
           <p:cNvPr id="2" name="제목 1">
             <a:extLst>
               <a:ext uri="{FF2B5EF4-FFF2-40B4-BE49-F238E27FC236}">
-                <a16:creationId xmlns:a16="http://schemas.microsoft.com/office/drawing/2014/main" id="{F69C17A5-79BA-4D00-0563-5A2EA14763F3}"/>
+                <a16:creationId xmlns:a16="http://schemas.microsoft.com/office/drawing/2014/main" id="{6D44936C-591D-D304-2045-E10D069AC569}"/>
               </a:ext>
             </a:extLst>
           </p:cNvPr>
@@ -166,7 +166,7 @@
           <p:cNvPr id="3" name="부제목 2">
             <a:extLst>
               <a:ext uri="{FF2B5EF4-FFF2-40B4-BE49-F238E27FC236}">
-                <a16:creationId xmlns:a16="http://schemas.microsoft.com/office/drawing/2014/main" id="{205F2C38-9E32-15F1-8E2A-D72311492F80}"/>
+                <a16:creationId xmlns:a16="http://schemas.microsoft.com/office/drawing/2014/main" id="{569A62AD-A4E9-0F17-A654-90765E83A409}"/>
               </a:ext>
             </a:extLst>
           </p:cNvPr>
@@ -236,7 +236,7 @@
           <p:cNvPr id="4" name="날짜 개체 틀 3">
             <a:extLst>
               <a:ext uri="{FF2B5EF4-FFF2-40B4-BE49-F238E27FC236}">
-                <a16:creationId xmlns:a16="http://schemas.microsoft.com/office/drawing/2014/main" id="{6E123F01-42F4-114C-67A8-1D7EB3D64954}"/>
+                <a16:creationId xmlns:a16="http://schemas.microsoft.com/office/drawing/2014/main" id="{A90BF118-4E01-2901-9360-19D46E4F63CD}"/>
               </a:ext>
             </a:extLst>
           </p:cNvPr>
@@ -252,7 +252,7 @@
           <a:bodyPr/>
           <a:lstStyle/>
           <a:p>
-            <a:fld id="{01CDDAF0-A6BC-4204-9BC5-12E401C479B9}" type="datetimeFigureOut">
+            <a:fld id="{1F6E3260-69AA-4E96-8ED1-46CA3679E129}" type="datetimeFigureOut">
               <a:rPr lang="ko-KR" altLang="en-US" smtClean="0"/>
               <a:t>2026-06-20</a:t>
             </a:fld>
@@ -265,7 +265,7 @@
           <p:cNvPr id="5" name="바닥글 개체 틀 4">
             <a:extLst>
               <a:ext uri="{FF2B5EF4-FFF2-40B4-BE49-F238E27FC236}">
-                <a16:creationId xmlns:a16="http://schemas.microsoft.com/office/drawing/2014/main" id="{78D87768-4CD2-B279-776A-FCE25FB1E092}"/>
+                <a16:creationId xmlns:a16="http://schemas.microsoft.com/office/drawing/2014/main" id="{91964F80-A238-C633-9C16-DD3271E69D41}"/>
               </a:ext>
             </a:extLst>
           </p:cNvPr>
@@ -290,7 +290,7 @@
           <p:cNvPr id="6" name="슬라이드 번호 개체 틀 5">
             <a:extLst>
               <a:ext uri="{FF2B5EF4-FFF2-40B4-BE49-F238E27FC236}">
-                <a16:creationId xmlns:a16="http://schemas.microsoft.com/office/drawing/2014/main" id="{BFD954C1-6619-C702-0C6B-2408BCAC3C63}"/>
+                <a16:creationId xmlns:a16="http://schemas.microsoft.com/office/drawing/2014/main" id="{994195B7-F0DA-1D63-0798-51C2F2D3B73E}"/>
               </a:ext>
             </a:extLst>
           </p:cNvPr>
@@ -306,7 +306,7 @@
           <a:bodyPr/>
           <a:lstStyle/>
           <a:p>
-            <a:fld id="{91CE851D-84D8-42F9-999F-849BB55211A8}" type="slidenum">
+            <a:fld id="{94ED95DB-09FC-46E5-9512-D71FD83AE3E0}" type="slidenum">
               <a:rPr lang="ko-KR" altLang="en-US" smtClean="0"/>
               <a:t>‹#›</a:t>
             </a:fld>
@@ -317,7 +317,7 @@
     </p:spTree>
     <p:extLst>
       <p:ext uri="{BB962C8B-B14F-4D97-AF65-F5344CB8AC3E}">
-        <p14:creationId xmlns:p14="http://schemas.microsoft.com/office/powerpoint/2010/main" val="1687521583"/>
+        <p14:creationId xmlns:p14="http://schemas.microsoft.com/office/powerpoint/2010/main" val="2675301953"/>
       </p:ext>
     </p:extLst>
   </p:cSld>
@@ -349,7 +349,7 @@
           <p:cNvPr id="2" name="제목 1">
             <a:extLst>
               <a:ext uri="{FF2B5EF4-FFF2-40B4-BE49-F238E27FC236}">
-                <a16:creationId xmlns:a16="http://schemas.microsoft.com/office/drawing/2014/main" id="{8FE6802E-A9D4-F7DB-6076-FDA859B7AD36}"/>
+                <a16:creationId xmlns:a16="http://schemas.microsoft.com/office/drawing/2014/main" id="{0873ACDB-D8E5-5E82-3393-80C18A662964}"/>
               </a:ext>
             </a:extLst>
           </p:cNvPr>
@@ -377,7 +377,7 @@
           <p:cNvPr id="3" name="세로 텍스트 개체 틀 2">
             <a:extLst>
               <a:ext uri="{FF2B5EF4-FFF2-40B4-BE49-F238E27FC236}">
-                <a16:creationId xmlns:a16="http://schemas.microsoft.com/office/drawing/2014/main" id="{0E7C45CC-8C71-A1E8-8E34-8C4DA8F501AA}"/>
+                <a16:creationId xmlns:a16="http://schemas.microsoft.com/office/drawing/2014/main" id="{436CD133-5BA7-D6BF-A238-0EB96030845E}"/>
               </a:ext>
             </a:extLst>
           </p:cNvPr>
@@ -434,7 +434,7 @@
           <p:cNvPr id="4" name="날짜 개체 틀 3">
             <a:extLst>
               <a:ext uri="{FF2B5EF4-FFF2-40B4-BE49-F238E27FC236}">
-                <a16:creationId xmlns:a16="http://schemas.microsoft.com/office/drawing/2014/main" id="{90502C00-4E97-12E8-EAEB-AA420D923CA8}"/>
+                <a16:creationId xmlns:a16="http://schemas.microsoft.com/office/drawing/2014/main" id="{334E090D-4B71-8B44-A746-A710785952CB}"/>
               </a:ext>
             </a:extLst>
           </p:cNvPr>
@@ -450,7 +450,7 @@
           <a:bodyPr/>
           <a:lstStyle/>
           <a:p>
-            <a:fld id="{01CDDAF0-A6BC-4204-9BC5-12E401C479B9}" type="datetimeFigureOut">
+            <a:fld id="{1F6E3260-69AA-4E96-8ED1-46CA3679E129}" type="datetimeFigureOut">
               <a:rPr lang="ko-KR" altLang="en-US" smtClean="0"/>
               <a:t>2026-06-20</a:t>
             </a:fld>
@@ -463,7 +463,7 @@
           <p:cNvPr id="5" name="바닥글 개체 틀 4">
             <a:extLst>
               <a:ext uri="{FF2B5EF4-FFF2-40B4-BE49-F238E27FC236}">
-                <a16:creationId xmlns:a16="http://schemas.microsoft.com/office/drawing/2014/main" id="{33821B11-AD10-3183-89FF-6DE6DACDBD52}"/>
+                <a16:creationId xmlns:a16="http://schemas.microsoft.com/office/drawing/2014/main" id="{BAFC1AF7-EEF9-7A64-5FB9-18425C8A91F9}"/>
               </a:ext>
             </a:extLst>
           </p:cNvPr>
@@ -488,7 +488,7 @@
           <p:cNvPr id="6" name="슬라이드 번호 개체 틀 5">
             <a:extLst>
               <a:ext uri="{FF2B5EF4-FFF2-40B4-BE49-F238E27FC236}">
-                <a16:creationId xmlns:a16="http://schemas.microsoft.com/office/drawing/2014/main" id="{82C87243-8F58-7BE5-FC3C-BEBD0BF6EB44}"/>
+                <a16:creationId xmlns:a16="http://schemas.microsoft.com/office/drawing/2014/main" id="{4D103EA1-4831-29D8-3277-5AF18AC02A4F}"/>
               </a:ext>
             </a:extLst>
           </p:cNvPr>
@@ -504,7 +504,7 @@
           <a:bodyPr/>
           <a:lstStyle/>
           <a:p>
-            <a:fld id="{91CE851D-84D8-42F9-999F-849BB55211A8}" type="slidenum">
+            <a:fld id="{94ED95DB-09FC-46E5-9512-D71FD83AE3E0}" type="slidenum">
               <a:rPr lang="ko-KR" altLang="en-US" smtClean="0"/>
               <a:t>‹#›</a:t>
             </a:fld>
@@ -515,7 +515,7 @@
     </p:spTree>
     <p:extLst>
       <p:ext uri="{BB962C8B-B14F-4D97-AF65-F5344CB8AC3E}">
-        <p14:creationId xmlns:p14="http://schemas.microsoft.com/office/powerpoint/2010/main" val="3866387567"/>
+        <p14:creationId xmlns:p14="http://schemas.microsoft.com/office/powerpoint/2010/main" val="1626371849"/>
       </p:ext>
     </p:extLst>
   </p:cSld>
@@ -547,7 +547,7 @@
           <p:cNvPr id="2" name="세로 제목 1">
             <a:extLst>
               <a:ext uri="{FF2B5EF4-FFF2-40B4-BE49-F238E27FC236}">
-                <a16:creationId xmlns:a16="http://schemas.microsoft.com/office/drawing/2014/main" id="{37AD33B0-F8A0-2551-015D-C26A6AD7E117}"/>
+                <a16:creationId xmlns:a16="http://schemas.microsoft.com/office/drawing/2014/main" id="{CF3ADBAF-C1F3-1E46-B451-25C260658FDF}"/>
               </a:ext>
             </a:extLst>
           </p:cNvPr>
@@ -580,7 +580,7 @@
           <p:cNvPr id="3" name="세로 텍스트 개체 틀 2">
             <a:extLst>
               <a:ext uri="{FF2B5EF4-FFF2-40B4-BE49-F238E27FC236}">
-                <a16:creationId xmlns:a16="http://schemas.microsoft.com/office/drawing/2014/main" id="{052D304F-D52D-6FCC-C3DE-ABA6D0270F23}"/>
+                <a16:creationId xmlns:a16="http://schemas.microsoft.com/office/drawing/2014/main" id="{B09B6149-D480-F7C3-24E9-DD62373130A6}"/>
               </a:ext>
             </a:extLst>
           </p:cNvPr>
@@ -642,7 +642,7 @@
           <p:cNvPr id="4" name="날짜 개체 틀 3">
             <a:extLst>
               <a:ext uri="{FF2B5EF4-FFF2-40B4-BE49-F238E27FC236}">
-                <a16:creationId xmlns:a16="http://schemas.microsoft.com/office/drawing/2014/main" id="{8A3E4F57-1AC0-698A-AD0D-EF36D55B5657}"/>
+                <a16:creationId xmlns:a16="http://schemas.microsoft.com/office/drawing/2014/main" id="{09F96622-D867-9372-F19A-00733AF7740E}"/>
               </a:ext>
             </a:extLst>
           </p:cNvPr>
@@ -658,7 +658,7 @@
           <a:bodyPr/>
           <a:lstStyle/>
           <a:p>
-            <a:fld id="{01CDDAF0-A6BC-4204-9BC5-12E401C479B9}" type="datetimeFigureOut">
+            <a:fld id="{1F6E3260-69AA-4E96-8ED1-46CA3679E129}" type="datetimeFigureOut">
               <a:rPr lang="ko-KR" altLang="en-US" smtClean="0"/>
               <a:t>2026-06-20</a:t>
             </a:fld>
@@ -671,7 +671,7 @@
           <p:cNvPr id="5" name="바닥글 개체 틀 4">
             <a:extLst>
               <a:ext uri="{FF2B5EF4-FFF2-40B4-BE49-F238E27FC236}">
-                <a16:creationId xmlns:a16="http://schemas.microsoft.com/office/drawing/2014/main" id="{44AEC6C1-564E-DA1A-2FC7-E052D0C90312}"/>
+                <a16:creationId xmlns:a16="http://schemas.microsoft.com/office/drawing/2014/main" id="{73C786B4-6706-28C5-7999-EE87F3040240}"/>
               </a:ext>
             </a:extLst>
           </p:cNvPr>
@@ -696,7 +696,7 @@
           <p:cNvPr id="6" name="슬라이드 번호 개체 틀 5">
             <a:extLst>
               <a:ext uri="{FF2B5EF4-FFF2-40B4-BE49-F238E27FC236}">
-                <a16:creationId xmlns:a16="http://schemas.microsoft.com/office/drawing/2014/main" id="{7362E877-046C-A7E9-4844-00EBCDA4CB54}"/>
+                <a16:creationId xmlns:a16="http://schemas.microsoft.com/office/drawing/2014/main" id="{3ADF89FE-C959-0DFA-8FE5-99F7BFAA53F3}"/>
               </a:ext>
             </a:extLst>
           </p:cNvPr>
@@ -712,7 +712,7 @@
           <a:bodyPr/>
           <a:lstStyle/>
           <a:p>
-            <a:fld id="{91CE851D-84D8-42F9-999F-849BB55211A8}" type="slidenum">
+            <a:fld id="{94ED95DB-09FC-46E5-9512-D71FD83AE3E0}" type="slidenum">
               <a:rPr lang="ko-KR" altLang="en-US" smtClean="0"/>
               <a:t>‹#›</a:t>
             </a:fld>
@@ -723,7 +723,7 @@
     </p:spTree>
     <p:extLst>
       <p:ext uri="{BB962C8B-B14F-4D97-AF65-F5344CB8AC3E}">
-        <p14:creationId xmlns:p14="http://schemas.microsoft.com/office/powerpoint/2010/main" val="1476387909"/>
+        <p14:creationId xmlns:p14="http://schemas.microsoft.com/office/powerpoint/2010/main" val="3529005459"/>
       </p:ext>
     </p:extLst>
   </p:cSld>
@@ -755,7 +755,7 @@
           <p:cNvPr id="2" name="제목 1">
             <a:extLst>
               <a:ext uri="{FF2B5EF4-FFF2-40B4-BE49-F238E27FC236}">
-                <a16:creationId xmlns:a16="http://schemas.microsoft.com/office/drawing/2014/main" id="{7DB53200-854D-9A73-BEB6-E5FBA4462FCE}"/>
+                <a16:creationId xmlns:a16="http://schemas.microsoft.com/office/drawing/2014/main" id="{231DEFE3-6EAD-3231-6375-C1503F2A6DB7}"/>
               </a:ext>
             </a:extLst>
           </p:cNvPr>
@@ -783,7 +783,7 @@
           <p:cNvPr id="3" name="내용 개체 틀 2">
             <a:extLst>
               <a:ext uri="{FF2B5EF4-FFF2-40B4-BE49-F238E27FC236}">
-                <a16:creationId xmlns:a16="http://schemas.microsoft.com/office/drawing/2014/main" id="{F0738FF4-1946-22D9-4C71-BF5A021D1AAB}"/>
+                <a16:creationId xmlns:a16="http://schemas.microsoft.com/office/drawing/2014/main" id="{03B68015-80DD-502C-E041-1C4427ACE4EB}"/>
               </a:ext>
             </a:extLst>
           </p:cNvPr>
@@ -840,7 +840,7 @@
           <p:cNvPr id="4" name="날짜 개체 틀 3">
             <a:extLst>
               <a:ext uri="{FF2B5EF4-FFF2-40B4-BE49-F238E27FC236}">
-                <a16:creationId xmlns:a16="http://schemas.microsoft.com/office/drawing/2014/main" id="{38897995-56C0-9399-7272-B9D012D4BD5A}"/>
+                <a16:creationId xmlns:a16="http://schemas.microsoft.com/office/drawing/2014/main" id="{720A6B00-160B-1606-6AC3-068595279BC7}"/>
               </a:ext>
             </a:extLst>
           </p:cNvPr>
@@ -856,7 +856,7 @@
           <a:bodyPr/>
           <a:lstStyle/>
           <a:p>
-            <a:fld id="{01CDDAF0-A6BC-4204-9BC5-12E401C479B9}" type="datetimeFigureOut">
+            <a:fld id="{1F6E3260-69AA-4E96-8ED1-46CA3679E129}" type="datetimeFigureOut">
               <a:rPr lang="ko-KR" altLang="en-US" smtClean="0"/>
               <a:t>2026-06-20</a:t>
             </a:fld>
@@ -869,7 +869,7 @@
           <p:cNvPr id="5" name="바닥글 개체 틀 4">
             <a:extLst>
               <a:ext uri="{FF2B5EF4-FFF2-40B4-BE49-F238E27FC236}">
-                <a16:creationId xmlns:a16="http://schemas.microsoft.com/office/drawing/2014/main" id="{27FE74A8-A918-08E7-4F0A-35E54C6860D1}"/>
+                <a16:creationId xmlns:a16="http://schemas.microsoft.com/office/drawing/2014/main" id="{4EC8A86A-1ADF-AC1A-6F0B-230A42962998}"/>
               </a:ext>
             </a:extLst>
           </p:cNvPr>
@@ -894,7 +894,7 @@
           <p:cNvPr id="6" name="슬라이드 번호 개체 틀 5">
             <a:extLst>
               <a:ext uri="{FF2B5EF4-FFF2-40B4-BE49-F238E27FC236}">
-                <a16:creationId xmlns:a16="http://schemas.microsoft.com/office/drawing/2014/main" id="{5D950E8A-61B4-27DD-A592-463C6111303C}"/>
+                <a16:creationId xmlns:a16="http://schemas.microsoft.com/office/drawing/2014/main" id="{668516F9-4AD0-B74F-B54E-3F821A57A792}"/>
               </a:ext>
             </a:extLst>
           </p:cNvPr>
@@ -910,7 +910,7 @@
           <a:bodyPr/>
           <a:lstStyle/>
           <a:p>
-            <a:fld id="{91CE851D-84D8-42F9-999F-849BB55211A8}" type="slidenum">
+            <a:fld id="{94ED95DB-09FC-46E5-9512-D71FD83AE3E0}" type="slidenum">
               <a:rPr lang="ko-KR" altLang="en-US" smtClean="0"/>
               <a:t>‹#›</a:t>
             </a:fld>
@@ -921,7 +921,7 @@
     </p:spTree>
     <p:extLst>
       <p:ext uri="{BB962C8B-B14F-4D97-AF65-F5344CB8AC3E}">
-        <p14:creationId xmlns:p14="http://schemas.microsoft.com/office/powerpoint/2010/main" val="2220713978"/>
+        <p14:creationId xmlns:p14="http://schemas.microsoft.com/office/powerpoint/2010/main" val="3736843641"/>
       </p:ext>
     </p:extLst>
   </p:cSld>
@@ -953,7 +953,7 @@
           <p:cNvPr id="2" name="제목 1">
             <a:extLst>
               <a:ext uri="{FF2B5EF4-FFF2-40B4-BE49-F238E27FC236}">
-                <a16:creationId xmlns:a16="http://schemas.microsoft.com/office/drawing/2014/main" id="{A35BBE72-3E7B-C4D7-AB9D-00CD3C3DF4D7}"/>
+                <a16:creationId xmlns:a16="http://schemas.microsoft.com/office/drawing/2014/main" id="{FDE56CA2-8FA6-7910-9590-0B3AD28312B6}"/>
               </a:ext>
             </a:extLst>
           </p:cNvPr>
@@ -990,7 +990,7 @@
           <p:cNvPr id="3" name="텍스트 개체 틀 2">
             <a:extLst>
               <a:ext uri="{FF2B5EF4-FFF2-40B4-BE49-F238E27FC236}">
-                <a16:creationId xmlns:a16="http://schemas.microsoft.com/office/drawing/2014/main" id="{18319C78-09AD-4FEC-05A9-7A954F91951F}"/>
+                <a16:creationId xmlns:a16="http://schemas.microsoft.com/office/drawing/2014/main" id="{7E874C5B-72C3-6CEC-E621-579BC3F8126D}"/>
               </a:ext>
             </a:extLst>
           </p:cNvPr>
@@ -1115,7 +1115,7 @@
           <p:cNvPr id="4" name="날짜 개체 틀 3">
             <a:extLst>
               <a:ext uri="{FF2B5EF4-FFF2-40B4-BE49-F238E27FC236}">
-                <a16:creationId xmlns:a16="http://schemas.microsoft.com/office/drawing/2014/main" id="{572F127A-6BD2-90A2-7ED5-1FA8C07F0A36}"/>
+                <a16:creationId xmlns:a16="http://schemas.microsoft.com/office/drawing/2014/main" id="{F2CF96ED-25E6-D6E8-93CA-26DD509E31D5}"/>
               </a:ext>
             </a:extLst>
           </p:cNvPr>
@@ -1131,7 +1131,7 @@
           <a:bodyPr/>
           <a:lstStyle/>
           <a:p>
-            <a:fld id="{01CDDAF0-A6BC-4204-9BC5-12E401C479B9}" type="datetimeFigureOut">
+            <a:fld id="{1F6E3260-69AA-4E96-8ED1-46CA3679E129}" type="datetimeFigureOut">
               <a:rPr lang="ko-KR" altLang="en-US" smtClean="0"/>
               <a:t>2026-06-20</a:t>
             </a:fld>
@@ -1144,7 +1144,7 @@
           <p:cNvPr id="5" name="바닥글 개체 틀 4">
             <a:extLst>
               <a:ext uri="{FF2B5EF4-FFF2-40B4-BE49-F238E27FC236}">
-                <a16:creationId xmlns:a16="http://schemas.microsoft.com/office/drawing/2014/main" id="{F969958C-A744-7C3A-DB88-BC9EC5A5777C}"/>
+                <a16:creationId xmlns:a16="http://schemas.microsoft.com/office/drawing/2014/main" id="{FBA663F7-7037-E03D-86D1-3F2B3B918480}"/>
               </a:ext>
             </a:extLst>
           </p:cNvPr>
@@ -1169,7 +1169,7 @@
           <p:cNvPr id="6" name="슬라이드 번호 개체 틀 5">
             <a:extLst>
               <a:ext uri="{FF2B5EF4-FFF2-40B4-BE49-F238E27FC236}">
-                <a16:creationId xmlns:a16="http://schemas.microsoft.com/office/drawing/2014/main" id="{DE0AB02C-4067-2257-3876-154DFB7095FD}"/>
+                <a16:creationId xmlns:a16="http://schemas.microsoft.com/office/drawing/2014/main" id="{1937937C-7742-CB08-553D-32684C94EFB1}"/>
               </a:ext>
             </a:extLst>
           </p:cNvPr>
@@ -1185,7 +1185,7 @@
           <a:bodyPr/>
           <a:lstStyle/>
           <a:p>
-            <a:fld id="{91CE851D-84D8-42F9-999F-849BB55211A8}" type="slidenum">
+            <a:fld id="{94ED95DB-09FC-46E5-9512-D71FD83AE3E0}" type="slidenum">
               <a:rPr lang="ko-KR" altLang="en-US" smtClean="0"/>
               <a:t>‹#›</a:t>
             </a:fld>
@@ -1196,7 +1196,7 @@
     </p:spTree>
     <p:extLst>
       <p:ext uri="{BB962C8B-B14F-4D97-AF65-F5344CB8AC3E}">
-        <p14:creationId xmlns:p14="http://schemas.microsoft.com/office/powerpoint/2010/main" val="3565046820"/>
+        <p14:creationId xmlns:p14="http://schemas.microsoft.com/office/powerpoint/2010/main" val="4164942693"/>
       </p:ext>
     </p:extLst>
   </p:cSld>
@@ -1228,7 +1228,7 @@
           <p:cNvPr id="2" name="제목 1">
             <a:extLst>
               <a:ext uri="{FF2B5EF4-FFF2-40B4-BE49-F238E27FC236}">
-                <a16:creationId xmlns:a16="http://schemas.microsoft.com/office/drawing/2014/main" id="{B982D8D5-A0FF-5224-9A36-5586F2CBF1D0}"/>
+                <a16:creationId xmlns:a16="http://schemas.microsoft.com/office/drawing/2014/main" id="{45886354-65AE-321A-2495-3671D8AE31FB}"/>
               </a:ext>
             </a:extLst>
           </p:cNvPr>
@@ -1256,7 +1256,7 @@
           <p:cNvPr id="3" name="내용 개체 틀 2">
             <a:extLst>
               <a:ext uri="{FF2B5EF4-FFF2-40B4-BE49-F238E27FC236}">
-                <a16:creationId xmlns:a16="http://schemas.microsoft.com/office/drawing/2014/main" id="{346CC624-8A8C-D666-0A3F-1738ACB0EE30}"/>
+                <a16:creationId xmlns:a16="http://schemas.microsoft.com/office/drawing/2014/main" id="{7C5F2573-9973-30DD-26C7-ABDD051EED5E}"/>
               </a:ext>
             </a:extLst>
           </p:cNvPr>
@@ -1318,7 +1318,7 @@
           <p:cNvPr id="4" name="내용 개체 틀 3">
             <a:extLst>
               <a:ext uri="{FF2B5EF4-FFF2-40B4-BE49-F238E27FC236}">
-                <a16:creationId xmlns:a16="http://schemas.microsoft.com/office/drawing/2014/main" id="{0E45423F-7DB2-F487-8A1D-97B456102759}"/>
+                <a16:creationId xmlns:a16="http://schemas.microsoft.com/office/drawing/2014/main" id="{E0C82776-9447-1F4A-090B-8432210AE7F6}"/>
               </a:ext>
             </a:extLst>
           </p:cNvPr>
@@ -1380,7 +1380,7 @@
           <p:cNvPr id="5" name="날짜 개체 틀 4">
             <a:extLst>
               <a:ext uri="{FF2B5EF4-FFF2-40B4-BE49-F238E27FC236}">
-                <a16:creationId xmlns:a16="http://schemas.microsoft.com/office/drawing/2014/main" id="{1BCEA12E-BE9D-2916-6F43-9188441444AB}"/>
+                <a16:creationId xmlns:a16="http://schemas.microsoft.com/office/drawing/2014/main" id="{01D4264B-5E67-9533-83D1-212EEE935B9F}"/>
               </a:ext>
             </a:extLst>
           </p:cNvPr>
@@ -1396,7 +1396,7 @@
           <a:bodyPr/>
           <a:lstStyle/>
           <a:p>
-            <a:fld id="{01CDDAF0-A6BC-4204-9BC5-12E401C479B9}" type="datetimeFigureOut">
+            <a:fld id="{1F6E3260-69AA-4E96-8ED1-46CA3679E129}" type="datetimeFigureOut">
               <a:rPr lang="ko-KR" altLang="en-US" smtClean="0"/>
               <a:t>2026-06-20</a:t>
             </a:fld>
@@ -1409,7 +1409,7 @@
           <p:cNvPr id="6" name="바닥글 개체 틀 5">
             <a:extLst>
               <a:ext uri="{FF2B5EF4-FFF2-40B4-BE49-F238E27FC236}">
-                <a16:creationId xmlns:a16="http://schemas.microsoft.com/office/drawing/2014/main" id="{43432EAA-55C4-94E1-A1F6-EA199D085BCF}"/>
+                <a16:creationId xmlns:a16="http://schemas.microsoft.com/office/drawing/2014/main" id="{0BB42B7C-738E-D631-7D63-7355D804CC7D}"/>
               </a:ext>
             </a:extLst>
           </p:cNvPr>
@@ -1434,7 +1434,7 @@
           <p:cNvPr id="7" name="슬라이드 번호 개체 틀 6">
             <a:extLst>
               <a:ext uri="{FF2B5EF4-FFF2-40B4-BE49-F238E27FC236}">
-                <a16:creationId xmlns:a16="http://schemas.microsoft.com/office/drawing/2014/main" id="{D05708E9-4466-7D30-A157-A05AA5C8AE7A}"/>
+                <a16:creationId xmlns:a16="http://schemas.microsoft.com/office/drawing/2014/main" id="{C67BAB58-677A-E21C-1AAF-B9C57731C6FB}"/>
               </a:ext>
             </a:extLst>
           </p:cNvPr>
@@ -1450,7 +1450,7 @@
           <a:bodyPr/>
           <a:lstStyle/>
           <a:p>
-            <a:fld id="{91CE851D-84D8-42F9-999F-849BB55211A8}" type="slidenum">
+            <a:fld id="{94ED95DB-09FC-46E5-9512-D71FD83AE3E0}" type="slidenum">
               <a:rPr lang="ko-KR" altLang="en-US" smtClean="0"/>
               <a:t>‹#›</a:t>
             </a:fld>
@@ -1461,7 +1461,7 @@
     </p:spTree>
     <p:extLst>
       <p:ext uri="{BB962C8B-B14F-4D97-AF65-F5344CB8AC3E}">
-        <p14:creationId xmlns:p14="http://schemas.microsoft.com/office/powerpoint/2010/main" val="303503081"/>
+        <p14:creationId xmlns:p14="http://schemas.microsoft.com/office/powerpoint/2010/main" val="3393592845"/>
       </p:ext>
     </p:extLst>
   </p:cSld>
@@ -1493,7 +1493,7 @@
           <p:cNvPr id="2" name="제목 1">
             <a:extLst>
               <a:ext uri="{FF2B5EF4-FFF2-40B4-BE49-F238E27FC236}">
-                <a16:creationId xmlns:a16="http://schemas.microsoft.com/office/drawing/2014/main" id="{18DCD5B4-D97B-B1C5-1FAC-7B367C829FE4}"/>
+                <a16:creationId xmlns:a16="http://schemas.microsoft.com/office/drawing/2014/main" id="{5EF13C5A-F5C7-B952-A044-BFF91DAB998B}"/>
               </a:ext>
             </a:extLst>
           </p:cNvPr>
@@ -1526,7 +1526,7 @@
           <p:cNvPr id="3" name="텍스트 개체 틀 2">
             <a:extLst>
               <a:ext uri="{FF2B5EF4-FFF2-40B4-BE49-F238E27FC236}">
-                <a16:creationId xmlns:a16="http://schemas.microsoft.com/office/drawing/2014/main" id="{ED137A85-86AD-A38C-00BD-194244DF3F59}"/>
+                <a16:creationId xmlns:a16="http://schemas.microsoft.com/office/drawing/2014/main" id="{5F7A2306-1A80-5707-A27F-439EC3654237}"/>
               </a:ext>
             </a:extLst>
           </p:cNvPr>
@@ -1597,7 +1597,7 @@
           <p:cNvPr id="4" name="내용 개체 틀 3">
             <a:extLst>
               <a:ext uri="{FF2B5EF4-FFF2-40B4-BE49-F238E27FC236}">
-                <a16:creationId xmlns:a16="http://schemas.microsoft.com/office/drawing/2014/main" id="{B8E0DF02-B030-3562-A2B0-68FC21B6D9F7}"/>
+                <a16:creationId xmlns:a16="http://schemas.microsoft.com/office/drawing/2014/main" id="{F12A5588-C784-7043-F642-8175B066DAD8}"/>
               </a:ext>
             </a:extLst>
           </p:cNvPr>
@@ -1659,7 +1659,7 @@
           <p:cNvPr id="5" name="텍스트 개체 틀 4">
             <a:extLst>
               <a:ext uri="{FF2B5EF4-FFF2-40B4-BE49-F238E27FC236}">
-                <a16:creationId xmlns:a16="http://schemas.microsoft.com/office/drawing/2014/main" id="{F683D3EE-8EC1-22EF-38B2-178EF5753E4B}"/>
+                <a16:creationId xmlns:a16="http://schemas.microsoft.com/office/drawing/2014/main" id="{68D2666E-B420-8DAA-2150-BC2A6B024E4C}"/>
               </a:ext>
             </a:extLst>
           </p:cNvPr>
@@ -1730,7 +1730,7 @@
           <p:cNvPr id="6" name="내용 개체 틀 5">
             <a:extLst>
               <a:ext uri="{FF2B5EF4-FFF2-40B4-BE49-F238E27FC236}">
-                <a16:creationId xmlns:a16="http://schemas.microsoft.com/office/drawing/2014/main" id="{46E90D41-137C-6398-320D-DFDF7DD445C1}"/>
+                <a16:creationId xmlns:a16="http://schemas.microsoft.com/office/drawing/2014/main" id="{60561C29-1807-E1A3-A952-155F20EFB272}"/>
               </a:ext>
             </a:extLst>
           </p:cNvPr>
@@ -1792,7 +1792,7 @@
           <p:cNvPr id="7" name="날짜 개체 틀 6">
             <a:extLst>
               <a:ext uri="{FF2B5EF4-FFF2-40B4-BE49-F238E27FC236}">
-                <a16:creationId xmlns:a16="http://schemas.microsoft.com/office/drawing/2014/main" id="{0AA23BA9-9A06-C506-26D5-323220AF39E8}"/>
+                <a16:creationId xmlns:a16="http://schemas.microsoft.com/office/drawing/2014/main" id="{39F2FC67-A2DB-893D-FAC2-A09C749B8C72}"/>
               </a:ext>
             </a:extLst>
           </p:cNvPr>
@@ -1808,7 +1808,7 @@
           <a:bodyPr/>
           <a:lstStyle/>
           <a:p>
-            <a:fld id="{01CDDAF0-A6BC-4204-9BC5-12E401C479B9}" type="datetimeFigureOut">
+            <a:fld id="{1F6E3260-69AA-4E96-8ED1-46CA3679E129}" type="datetimeFigureOut">
               <a:rPr lang="ko-KR" altLang="en-US" smtClean="0"/>
               <a:t>2026-06-20</a:t>
             </a:fld>
@@ -1821,7 +1821,7 @@
           <p:cNvPr id="8" name="바닥글 개체 틀 7">
             <a:extLst>
               <a:ext uri="{FF2B5EF4-FFF2-40B4-BE49-F238E27FC236}">
-                <a16:creationId xmlns:a16="http://schemas.microsoft.com/office/drawing/2014/main" id="{36F76E4A-A9D0-7E6F-1CF3-2599488CA6D7}"/>
+                <a16:creationId xmlns:a16="http://schemas.microsoft.com/office/drawing/2014/main" id="{2B00C7B2-942B-934F-7A0C-CC1408F81138}"/>
               </a:ext>
             </a:extLst>
           </p:cNvPr>
@@ -1846,7 +1846,7 @@
           <p:cNvPr id="9" name="슬라이드 번호 개체 틀 8">
             <a:extLst>
               <a:ext uri="{FF2B5EF4-FFF2-40B4-BE49-F238E27FC236}">
-                <a16:creationId xmlns:a16="http://schemas.microsoft.com/office/drawing/2014/main" id="{F1B54E55-856E-CDC5-0A9E-BEF780D3B355}"/>
+                <a16:creationId xmlns:a16="http://schemas.microsoft.com/office/drawing/2014/main" id="{5E062111-F33C-6473-40CA-B5E6B023ED63}"/>
               </a:ext>
             </a:extLst>
           </p:cNvPr>
@@ -1862,7 +1862,7 @@
           <a:bodyPr/>
           <a:lstStyle/>
           <a:p>
-            <a:fld id="{91CE851D-84D8-42F9-999F-849BB55211A8}" type="slidenum">
+            <a:fld id="{94ED95DB-09FC-46E5-9512-D71FD83AE3E0}" type="slidenum">
               <a:rPr lang="ko-KR" altLang="en-US" smtClean="0"/>
               <a:t>‹#›</a:t>
             </a:fld>
@@ -1873,7 +1873,7 @@
     </p:spTree>
     <p:extLst>
       <p:ext uri="{BB962C8B-B14F-4D97-AF65-F5344CB8AC3E}">
-        <p14:creationId xmlns:p14="http://schemas.microsoft.com/office/powerpoint/2010/main" val="3706986855"/>
+        <p14:creationId xmlns:p14="http://schemas.microsoft.com/office/powerpoint/2010/main" val="886961866"/>
       </p:ext>
     </p:extLst>
   </p:cSld>
@@ -1905,7 +1905,7 @@
           <p:cNvPr id="2" name="제목 1">
             <a:extLst>
               <a:ext uri="{FF2B5EF4-FFF2-40B4-BE49-F238E27FC236}">
-                <a16:creationId xmlns:a16="http://schemas.microsoft.com/office/drawing/2014/main" id="{12D00BA4-5EB5-6C1B-6611-487F1F912818}"/>
+                <a16:creationId xmlns:a16="http://schemas.microsoft.com/office/drawing/2014/main" id="{D67FAA60-B405-C607-F494-565B8ABD2E41}"/>
               </a:ext>
             </a:extLst>
           </p:cNvPr>
@@ -1933,7 +1933,7 @@
           <p:cNvPr id="3" name="날짜 개체 틀 2">
             <a:extLst>
               <a:ext uri="{FF2B5EF4-FFF2-40B4-BE49-F238E27FC236}">
-                <a16:creationId xmlns:a16="http://schemas.microsoft.com/office/drawing/2014/main" id="{5D76FEB5-CFEA-272A-F925-82A5E61E33B4}"/>
+                <a16:creationId xmlns:a16="http://schemas.microsoft.com/office/drawing/2014/main" id="{43DADA5A-0A43-A48A-2071-98C443D955AC}"/>
               </a:ext>
             </a:extLst>
           </p:cNvPr>
@@ -1949,7 +1949,7 @@
           <a:bodyPr/>
           <a:lstStyle/>
           <a:p>
-            <a:fld id="{01CDDAF0-A6BC-4204-9BC5-12E401C479B9}" type="datetimeFigureOut">
+            <a:fld id="{1F6E3260-69AA-4E96-8ED1-46CA3679E129}" type="datetimeFigureOut">
               <a:rPr lang="ko-KR" altLang="en-US" smtClean="0"/>
               <a:t>2026-06-20</a:t>
             </a:fld>
@@ -1962,7 +1962,7 @@
           <p:cNvPr id="4" name="바닥글 개체 틀 3">
             <a:extLst>
               <a:ext uri="{FF2B5EF4-FFF2-40B4-BE49-F238E27FC236}">
-                <a16:creationId xmlns:a16="http://schemas.microsoft.com/office/drawing/2014/main" id="{4B4E9688-1E0C-053F-BD31-3F81C5DF7B34}"/>
+                <a16:creationId xmlns:a16="http://schemas.microsoft.com/office/drawing/2014/main" id="{85A00795-C2B0-9DFB-AD9B-1E3C4B1F6A1C}"/>
               </a:ext>
             </a:extLst>
           </p:cNvPr>
@@ -1987,7 +1987,7 @@
           <p:cNvPr id="5" name="슬라이드 번호 개체 틀 4">
             <a:extLst>
               <a:ext uri="{FF2B5EF4-FFF2-40B4-BE49-F238E27FC236}">
-                <a16:creationId xmlns:a16="http://schemas.microsoft.com/office/drawing/2014/main" id="{7A320298-F357-0BE7-6717-2CA2CC407F6F}"/>
+                <a16:creationId xmlns:a16="http://schemas.microsoft.com/office/drawing/2014/main" id="{411472AB-785C-A807-B188-85DC5AADD9EF}"/>
               </a:ext>
             </a:extLst>
           </p:cNvPr>
@@ -2003,7 +2003,7 @@
           <a:bodyPr/>
           <a:lstStyle/>
           <a:p>
-            <a:fld id="{91CE851D-84D8-42F9-999F-849BB55211A8}" type="slidenum">
+            <a:fld id="{94ED95DB-09FC-46E5-9512-D71FD83AE3E0}" type="slidenum">
               <a:rPr lang="ko-KR" altLang="en-US" smtClean="0"/>
               <a:t>‹#›</a:t>
             </a:fld>
@@ -2014,7 +2014,7 @@
     </p:spTree>
     <p:extLst>
       <p:ext uri="{BB962C8B-B14F-4D97-AF65-F5344CB8AC3E}">
-        <p14:creationId xmlns:p14="http://schemas.microsoft.com/office/powerpoint/2010/main" val="2294393337"/>
+        <p14:creationId xmlns:p14="http://schemas.microsoft.com/office/powerpoint/2010/main" val="1724790303"/>
       </p:ext>
     </p:extLst>
   </p:cSld>
@@ -2046,7 +2046,7 @@
           <p:cNvPr id="2" name="날짜 개체 틀 1">
             <a:extLst>
               <a:ext uri="{FF2B5EF4-FFF2-40B4-BE49-F238E27FC236}">
-                <a16:creationId xmlns:a16="http://schemas.microsoft.com/office/drawing/2014/main" id="{51F3557C-0A41-87B2-4D0F-63531E533BE3}"/>
+                <a16:creationId xmlns:a16="http://schemas.microsoft.com/office/drawing/2014/main" id="{790FDDEF-924C-692B-F92F-F0EBB9ED5E2B}"/>
               </a:ext>
             </a:extLst>
           </p:cNvPr>
@@ -2062,7 +2062,7 @@
           <a:bodyPr/>
           <a:lstStyle/>
           <a:p>
-            <a:fld id="{01CDDAF0-A6BC-4204-9BC5-12E401C479B9}" type="datetimeFigureOut">
+            <a:fld id="{1F6E3260-69AA-4E96-8ED1-46CA3679E129}" type="datetimeFigureOut">
               <a:rPr lang="ko-KR" altLang="en-US" smtClean="0"/>
               <a:t>2026-06-20</a:t>
             </a:fld>
@@ -2075,7 +2075,7 @@
           <p:cNvPr id="3" name="바닥글 개체 틀 2">
             <a:extLst>
               <a:ext uri="{FF2B5EF4-FFF2-40B4-BE49-F238E27FC236}">
-                <a16:creationId xmlns:a16="http://schemas.microsoft.com/office/drawing/2014/main" id="{46967001-933D-2A23-ED31-0D32B987297C}"/>
+                <a16:creationId xmlns:a16="http://schemas.microsoft.com/office/drawing/2014/main" id="{67BA3B45-0844-9517-27B2-ABF04638F062}"/>
               </a:ext>
             </a:extLst>
           </p:cNvPr>
@@ -2100,7 +2100,7 @@
           <p:cNvPr id="4" name="슬라이드 번호 개체 틀 3">
             <a:extLst>
               <a:ext uri="{FF2B5EF4-FFF2-40B4-BE49-F238E27FC236}">
-                <a16:creationId xmlns:a16="http://schemas.microsoft.com/office/drawing/2014/main" id="{FB4EEAFA-2F2E-03DB-19DE-C0D040919BEE}"/>
+                <a16:creationId xmlns:a16="http://schemas.microsoft.com/office/drawing/2014/main" id="{FC6DB084-20AF-20BD-BA8F-E856ECC82EBA}"/>
               </a:ext>
             </a:extLst>
           </p:cNvPr>
@@ -2116,7 +2116,7 @@
           <a:bodyPr/>
           <a:lstStyle/>
           <a:p>
-            <a:fld id="{91CE851D-84D8-42F9-999F-849BB55211A8}" type="slidenum">
+            <a:fld id="{94ED95DB-09FC-46E5-9512-D71FD83AE3E0}" type="slidenum">
               <a:rPr lang="ko-KR" altLang="en-US" smtClean="0"/>
               <a:t>‹#›</a:t>
             </a:fld>
@@ -2127,7 +2127,7 @@
     </p:spTree>
     <p:extLst>
       <p:ext uri="{BB962C8B-B14F-4D97-AF65-F5344CB8AC3E}">
-        <p14:creationId xmlns:p14="http://schemas.microsoft.com/office/powerpoint/2010/main" val="1661986539"/>
+        <p14:creationId xmlns:p14="http://schemas.microsoft.com/office/powerpoint/2010/main" val="1272156369"/>
       </p:ext>
     </p:extLst>
   </p:cSld>
@@ -2159,7 +2159,7 @@
           <p:cNvPr id="2" name="제목 1">
             <a:extLst>
               <a:ext uri="{FF2B5EF4-FFF2-40B4-BE49-F238E27FC236}">
-                <a16:creationId xmlns:a16="http://schemas.microsoft.com/office/drawing/2014/main" id="{E7F8EDD3-7799-09A3-CDDD-FDA8894C193B}"/>
+                <a16:creationId xmlns:a16="http://schemas.microsoft.com/office/drawing/2014/main" id="{6E01F4F9-2644-1B02-AF2A-E552B14A9E16}"/>
               </a:ext>
             </a:extLst>
           </p:cNvPr>
@@ -2196,7 +2196,7 @@
           <p:cNvPr id="3" name="내용 개체 틀 2">
             <a:extLst>
               <a:ext uri="{FF2B5EF4-FFF2-40B4-BE49-F238E27FC236}">
-                <a16:creationId xmlns:a16="http://schemas.microsoft.com/office/drawing/2014/main" id="{23219958-90C8-E93F-D2C1-27091593DD2F}"/>
+                <a16:creationId xmlns:a16="http://schemas.microsoft.com/office/drawing/2014/main" id="{98E5CDF0-EEF9-14E8-4102-47ABB0B129E4}"/>
               </a:ext>
             </a:extLst>
           </p:cNvPr>
@@ -2286,7 +2286,7 @@
           <p:cNvPr id="4" name="텍스트 개체 틀 3">
             <a:extLst>
               <a:ext uri="{FF2B5EF4-FFF2-40B4-BE49-F238E27FC236}">
-                <a16:creationId xmlns:a16="http://schemas.microsoft.com/office/drawing/2014/main" id="{AEF0B7E8-CC68-0E96-E297-3582368C4D49}"/>
+                <a16:creationId xmlns:a16="http://schemas.microsoft.com/office/drawing/2014/main" id="{2AFF9C15-B2F1-A4E6-49E9-2C4E0017890A}"/>
               </a:ext>
             </a:extLst>
           </p:cNvPr>
@@ -2357,7 +2357,7 @@
           <p:cNvPr id="5" name="날짜 개체 틀 4">
             <a:extLst>
               <a:ext uri="{FF2B5EF4-FFF2-40B4-BE49-F238E27FC236}">
-                <a16:creationId xmlns:a16="http://schemas.microsoft.com/office/drawing/2014/main" id="{2776A0C1-384C-811A-3C79-56D6BA93C764}"/>
+                <a16:creationId xmlns:a16="http://schemas.microsoft.com/office/drawing/2014/main" id="{57900D74-A0F1-7B8C-F962-36DD9D12AE1F}"/>
               </a:ext>
             </a:extLst>
           </p:cNvPr>
@@ -2373,7 +2373,7 @@
           <a:bodyPr/>
           <a:lstStyle/>
           <a:p>
-            <a:fld id="{01CDDAF0-A6BC-4204-9BC5-12E401C479B9}" type="datetimeFigureOut">
+            <a:fld id="{1F6E3260-69AA-4E96-8ED1-46CA3679E129}" type="datetimeFigureOut">
               <a:rPr lang="ko-KR" altLang="en-US" smtClean="0"/>
               <a:t>2026-06-20</a:t>
             </a:fld>
@@ -2386,7 +2386,7 @@
           <p:cNvPr id="6" name="바닥글 개체 틀 5">
             <a:extLst>
               <a:ext uri="{FF2B5EF4-FFF2-40B4-BE49-F238E27FC236}">
-                <a16:creationId xmlns:a16="http://schemas.microsoft.com/office/drawing/2014/main" id="{CC1007FB-A7D2-46B4-9849-6B4F34182090}"/>
+                <a16:creationId xmlns:a16="http://schemas.microsoft.com/office/drawing/2014/main" id="{792C0F18-8C37-A8B7-9C15-D072D8088B75}"/>
               </a:ext>
             </a:extLst>
           </p:cNvPr>
@@ -2411,7 +2411,7 @@
           <p:cNvPr id="7" name="슬라이드 번호 개체 틀 6">
             <a:extLst>
               <a:ext uri="{FF2B5EF4-FFF2-40B4-BE49-F238E27FC236}">
-                <a16:creationId xmlns:a16="http://schemas.microsoft.com/office/drawing/2014/main" id="{A023B059-0D5E-8E31-08D2-714E1BCC7D22}"/>
+                <a16:creationId xmlns:a16="http://schemas.microsoft.com/office/drawing/2014/main" id="{12EE9218-414F-3A31-86E9-28E8F0902322}"/>
               </a:ext>
             </a:extLst>
           </p:cNvPr>
@@ -2427,7 +2427,7 @@
           <a:bodyPr/>
           <a:lstStyle/>
           <a:p>
-            <a:fld id="{91CE851D-84D8-42F9-999F-849BB55211A8}" type="slidenum">
+            <a:fld id="{94ED95DB-09FC-46E5-9512-D71FD83AE3E0}" type="slidenum">
               <a:rPr lang="ko-KR" altLang="en-US" smtClean="0"/>
               <a:t>‹#›</a:t>
             </a:fld>
@@ -2438,7 +2438,7 @@
     </p:spTree>
     <p:extLst>
       <p:ext uri="{BB962C8B-B14F-4D97-AF65-F5344CB8AC3E}">
-        <p14:creationId xmlns:p14="http://schemas.microsoft.com/office/powerpoint/2010/main" val="1869570593"/>
+        <p14:creationId xmlns:p14="http://schemas.microsoft.com/office/powerpoint/2010/main" val="2700530900"/>
       </p:ext>
     </p:extLst>
   </p:cSld>
@@ -2470,7 +2470,7 @@
           <p:cNvPr id="2" name="제목 1">
             <a:extLst>
               <a:ext uri="{FF2B5EF4-FFF2-40B4-BE49-F238E27FC236}">
-                <a16:creationId xmlns:a16="http://schemas.microsoft.com/office/drawing/2014/main" id="{0DA67B86-BC07-6ABA-0327-B908FBA40B05}"/>
+                <a16:creationId xmlns:a16="http://schemas.microsoft.com/office/drawing/2014/main" id="{ED2CFC88-FF49-2D52-34AC-F5C100EF3347}"/>
               </a:ext>
             </a:extLst>
           </p:cNvPr>
@@ -2507,7 +2507,7 @@
           <p:cNvPr id="3" name="그림 개체 틀 2">
             <a:extLst>
               <a:ext uri="{FF2B5EF4-FFF2-40B4-BE49-F238E27FC236}">
-                <a16:creationId xmlns:a16="http://schemas.microsoft.com/office/drawing/2014/main" id="{E50DDBC8-DE50-153C-9DCA-5A2EB8674E42}"/>
+                <a16:creationId xmlns:a16="http://schemas.microsoft.com/office/drawing/2014/main" id="{921F4626-6CCF-3780-EF69-1E0EF6D5B142}"/>
               </a:ext>
             </a:extLst>
           </p:cNvPr>
@@ -2574,7 +2574,7 @@
           <p:cNvPr id="4" name="텍스트 개체 틀 3">
             <a:extLst>
               <a:ext uri="{FF2B5EF4-FFF2-40B4-BE49-F238E27FC236}">
-                <a16:creationId xmlns:a16="http://schemas.microsoft.com/office/drawing/2014/main" id="{4CD59280-B782-E04E-EC77-69CC5263542F}"/>
+                <a16:creationId xmlns:a16="http://schemas.microsoft.com/office/drawing/2014/main" id="{84E278B5-EA95-952C-942A-9D9AD2B8BD53}"/>
               </a:ext>
             </a:extLst>
           </p:cNvPr>
@@ -2645,7 +2645,7 @@
           <p:cNvPr id="5" name="날짜 개체 틀 4">
             <a:extLst>
               <a:ext uri="{FF2B5EF4-FFF2-40B4-BE49-F238E27FC236}">
-                <a16:creationId xmlns:a16="http://schemas.microsoft.com/office/drawing/2014/main" id="{C99C6FD6-674A-2A0E-F313-71146F14ABCF}"/>
+                <a16:creationId xmlns:a16="http://schemas.microsoft.com/office/drawing/2014/main" id="{678444B6-BE78-9F8E-4202-443CB7D4183E}"/>
               </a:ext>
             </a:extLst>
           </p:cNvPr>
@@ -2661,7 +2661,7 @@
           <a:bodyPr/>
           <a:lstStyle/>
           <a:p>
-            <a:fld id="{01CDDAF0-A6BC-4204-9BC5-12E401C479B9}" type="datetimeFigureOut">
+            <a:fld id="{1F6E3260-69AA-4E96-8ED1-46CA3679E129}" type="datetimeFigureOut">
               <a:rPr lang="ko-KR" altLang="en-US" smtClean="0"/>
               <a:t>2026-06-20</a:t>
             </a:fld>
@@ -2674,7 +2674,7 @@
           <p:cNvPr id="6" name="바닥글 개체 틀 5">
             <a:extLst>
               <a:ext uri="{FF2B5EF4-FFF2-40B4-BE49-F238E27FC236}">
-                <a16:creationId xmlns:a16="http://schemas.microsoft.com/office/drawing/2014/main" id="{D935E0BB-9EA4-DE14-2EA4-FAC344B2061B}"/>
+                <a16:creationId xmlns:a16="http://schemas.microsoft.com/office/drawing/2014/main" id="{84CF0B4F-7624-3EB1-529B-B9EB574EAA07}"/>
               </a:ext>
             </a:extLst>
           </p:cNvPr>
@@ -2699,7 +2699,7 @@
           <p:cNvPr id="7" name="슬라이드 번호 개체 틀 6">
             <a:extLst>
               <a:ext uri="{FF2B5EF4-FFF2-40B4-BE49-F238E27FC236}">
-                <a16:creationId xmlns:a16="http://schemas.microsoft.com/office/drawing/2014/main" id="{7A28C638-A55B-AC11-5D6C-BD93345AFE59}"/>
+                <a16:creationId xmlns:a16="http://schemas.microsoft.com/office/drawing/2014/main" id="{EF04AA8C-7F6C-5961-4403-09ECDDDC0F67}"/>
               </a:ext>
             </a:extLst>
           </p:cNvPr>
@@ -2715,7 +2715,7 @@
           <a:bodyPr/>
           <a:lstStyle/>
           <a:p>
-            <a:fld id="{91CE851D-84D8-42F9-999F-849BB55211A8}" type="slidenum">
+            <a:fld id="{94ED95DB-09FC-46E5-9512-D71FD83AE3E0}" type="slidenum">
               <a:rPr lang="ko-KR" altLang="en-US" smtClean="0"/>
               <a:t>‹#›</a:t>
             </a:fld>
@@ -2726,7 +2726,7 @@
     </p:spTree>
     <p:extLst>
       <p:ext uri="{BB962C8B-B14F-4D97-AF65-F5344CB8AC3E}">
-        <p14:creationId xmlns:p14="http://schemas.microsoft.com/office/powerpoint/2010/main" val="477572886"/>
+        <p14:creationId xmlns:p14="http://schemas.microsoft.com/office/powerpoint/2010/main" val="3715489728"/>
       </p:ext>
     </p:extLst>
   </p:cSld>
@@ -2763,7 +2763,7 @@
           <p:cNvPr id="2" name="제목 개체 틀 1">
             <a:extLst>
               <a:ext uri="{FF2B5EF4-FFF2-40B4-BE49-F238E27FC236}">
-                <a16:creationId xmlns:a16="http://schemas.microsoft.com/office/drawing/2014/main" id="{3ADF70FB-D6C8-E457-B46E-C1FF61498B96}"/>
+                <a16:creationId xmlns:a16="http://schemas.microsoft.com/office/drawing/2014/main" id="{013C0688-D3C9-1163-F11B-962252E9752F}"/>
               </a:ext>
             </a:extLst>
           </p:cNvPr>
@@ -2801,7 +2801,7 @@
           <p:cNvPr id="3" name="텍스트 개체 틀 2">
             <a:extLst>
               <a:ext uri="{FF2B5EF4-FFF2-40B4-BE49-F238E27FC236}">
-                <a16:creationId xmlns:a16="http://schemas.microsoft.com/office/drawing/2014/main" id="{C536B1DB-4A1D-D338-F6A2-9135DF9BA271}"/>
+                <a16:creationId xmlns:a16="http://schemas.microsoft.com/office/drawing/2014/main" id="{B3A6C15B-CCD0-3433-8502-B7B1913E1AE6}"/>
               </a:ext>
             </a:extLst>
           </p:cNvPr>
@@ -2868,7 +2868,7 @@
           <p:cNvPr id="4" name="날짜 개체 틀 3">
             <a:extLst>
               <a:ext uri="{FF2B5EF4-FFF2-40B4-BE49-F238E27FC236}">
-                <a16:creationId xmlns:a16="http://schemas.microsoft.com/office/drawing/2014/main" id="{A190ECCD-EED7-62EB-AC88-1111AB9734C0}"/>
+                <a16:creationId xmlns:a16="http://schemas.microsoft.com/office/drawing/2014/main" id="{ED596D2F-5B98-45B4-8520-477A6B50DECB}"/>
               </a:ext>
             </a:extLst>
           </p:cNvPr>
@@ -2902,7 +2902,7 @@
             </a:lvl1pPr>
           </a:lstStyle>
           <a:p>
-            <a:fld id="{01CDDAF0-A6BC-4204-9BC5-12E401C479B9}" type="datetimeFigureOut">
+            <a:fld id="{1F6E3260-69AA-4E96-8ED1-46CA3679E129}" type="datetimeFigureOut">
               <a:rPr lang="ko-KR" altLang="en-US" smtClean="0"/>
               <a:t>2026-06-20</a:t>
             </a:fld>
@@ -2915,7 +2915,7 @@
           <p:cNvPr id="5" name="바닥글 개체 틀 4">
             <a:extLst>
               <a:ext uri="{FF2B5EF4-FFF2-40B4-BE49-F238E27FC236}">
-                <a16:creationId xmlns:a16="http://schemas.microsoft.com/office/drawing/2014/main" id="{CEA6F8CC-E3EC-BFA6-C454-44C333F79861}"/>
+                <a16:creationId xmlns:a16="http://schemas.microsoft.com/office/drawing/2014/main" id="{5278B1D5-878D-F165-4C63-70FA27F662BB}"/>
               </a:ext>
             </a:extLst>
           </p:cNvPr>
@@ -2958,7 +2958,7 @@
           <p:cNvPr id="6" name="슬라이드 번호 개체 틀 5">
             <a:extLst>
               <a:ext uri="{FF2B5EF4-FFF2-40B4-BE49-F238E27FC236}">
-                <a16:creationId xmlns:a16="http://schemas.microsoft.com/office/drawing/2014/main" id="{376780F2-20C6-EA97-0518-918D4E359A7A}"/>
+                <a16:creationId xmlns:a16="http://schemas.microsoft.com/office/drawing/2014/main" id="{88840E0D-BB99-4E96-260E-2ED68507A059}"/>
               </a:ext>
             </a:extLst>
           </p:cNvPr>
@@ -2992,7 +2992,7 @@
             </a:lvl1pPr>
           </a:lstStyle>
           <a:p>
-            <a:fld id="{91CE851D-84D8-42F9-999F-849BB55211A8}" type="slidenum">
+            <a:fld id="{94ED95DB-09FC-46E5-9512-D71FD83AE3E0}" type="slidenum">
               <a:rPr lang="ko-KR" altLang="en-US" smtClean="0"/>
               <a:t>‹#›</a:t>
             </a:fld>
@@ -3003,7 +3003,7 @@
     </p:spTree>
     <p:extLst>
       <p:ext uri="{BB962C8B-B14F-4D97-AF65-F5344CB8AC3E}">
-        <p14:creationId xmlns:p14="http://schemas.microsoft.com/office/powerpoint/2010/main" val="1728481584"/>
+        <p14:creationId xmlns:p14="http://schemas.microsoft.com/office/powerpoint/2010/main" val="1131349957"/>
       </p:ext>
     </p:extLst>
   </p:cSld>
@@ -3326,7 +3326,7 @@
           <p:cNvPr id="3" name="그래픽 2">
             <a:extLst>
               <a:ext uri="{FF2B5EF4-FFF2-40B4-BE49-F238E27FC236}">
-                <a16:creationId xmlns:a16="http://schemas.microsoft.com/office/drawing/2014/main" id="{2F872A8D-0640-ACDC-6E28-3992FFA4A86D}"/>
+                <a16:creationId xmlns:a16="http://schemas.microsoft.com/office/drawing/2014/main" id="{4E9E93B6-353D-C492-07DD-40510FA82C07}"/>
               </a:ext>
             </a:extLst>
           </p:cNvPr>
@@ -3360,7 +3360,7 @@
     </p:spTree>
     <p:extLst>
       <p:ext uri="{BB962C8B-B14F-4D97-AF65-F5344CB8AC3E}">
-        <p14:creationId xmlns:p14="http://schemas.microsoft.com/office/powerpoint/2010/main" val="2329143450"/>
+        <p14:creationId xmlns:p14="http://schemas.microsoft.com/office/powerpoint/2010/main" val="1949798488"/>
       </p:ext>
     </p:extLst>
   </p:cSld>

--- a/docs/assets/infographic-seed-gallery.pptx
+++ b/docs/assets/infographic-seed-gallery.pptx
@@ -129,7 +129,7 @@
           <p:cNvPr id="2" name="제목 1">
             <a:extLst>
               <a:ext uri="{FF2B5EF4-FFF2-40B4-BE49-F238E27FC236}">
-                <a16:creationId xmlns:a16="http://schemas.microsoft.com/office/drawing/2014/main" id="{6D44936C-591D-D304-2045-E10D069AC569}"/>
+                <a16:creationId xmlns:a16="http://schemas.microsoft.com/office/drawing/2014/main" id="{88700854-2BA1-3E7C-D26C-F5B57C5FCE50}"/>
               </a:ext>
             </a:extLst>
           </p:cNvPr>
@@ -166,7 +166,7 @@
           <p:cNvPr id="3" name="부제목 2">
             <a:extLst>
               <a:ext uri="{FF2B5EF4-FFF2-40B4-BE49-F238E27FC236}">
-                <a16:creationId xmlns:a16="http://schemas.microsoft.com/office/drawing/2014/main" id="{569A62AD-A4E9-0F17-A654-90765E83A409}"/>
+                <a16:creationId xmlns:a16="http://schemas.microsoft.com/office/drawing/2014/main" id="{61FDC1C6-AA12-5BAE-E1F2-6ED913B53649}"/>
               </a:ext>
             </a:extLst>
           </p:cNvPr>
@@ -236,7 +236,7 @@
           <p:cNvPr id="4" name="날짜 개체 틀 3">
             <a:extLst>
               <a:ext uri="{FF2B5EF4-FFF2-40B4-BE49-F238E27FC236}">
-                <a16:creationId xmlns:a16="http://schemas.microsoft.com/office/drawing/2014/main" id="{A90BF118-4E01-2901-9360-19D46E4F63CD}"/>
+                <a16:creationId xmlns:a16="http://schemas.microsoft.com/office/drawing/2014/main" id="{FD2D23CA-DEE5-6ABF-80CF-BA7957DC0389}"/>
               </a:ext>
             </a:extLst>
           </p:cNvPr>
@@ -252,7 +252,7 @@
           <a:bodyPr/>
           <a:lstStyle/>
           <a:p>
-            <a:fld id="{1F6E3260-69AA-4E96-8ED1-46CA3679E129}" type="datetimeFigureOut">
+            <a:fld id="{71EE3968-8CAE-49A6-A295-1DC5695562B1}" type="datetimeFigureOut">
               <a:rPr lang="ko-KR" altLang="en-US" smtClean="0"/>
               <a:t>2026-06-20</a:t>
             </a:fld>
@@ -265,7 +265,7 @@
           <p:cNvPr id="5" name="바닥글 개체 틀 4">
             <a:extLst>
               <a:ext uri="{FF2B5EF4-FFF2-40B4-BE49-F238E27FC236}">
-                <a16:creationId xmlns:a16="http://schemas.microsoft.com/office/drawing/2014/main" id="{91964F80-A238-C633-9C16-DD3271E69D41}"/>
+                <a16:creationId xmlns:a16="http://schemas.microsoft.com/office/drawing/2014/main" id="{D85C2B87-47AB-78F5-6CEF-F2E59152C691}"/>
               </a:ext>
             </a:extLst>
           </p:cNvPr>
@@ -290,7 +290,7 @@
           <p:cNvPr id="6" name="슬라이드 번호 개체 틀 5">
             <a:extLst>
               <a:ext uri="{FF2B5EF4-FFF2-40B4-BE49-F238E27FC236}">
-                <a16:creationId xmlns:a16="http://schemas.microsoft.com/office/drawing/2014/main" id="{994195B7-F0DA-1D63-0798-51C2F2D3B73E}"/>
+                <a16:creationId xmlns:a16="http://schemas.microsoft.com/office/drawing/2014/main" id="{796D0782-A85F-260A-EF52-0AE3518CF53F}"/>
               </a:ext>
             </a:extLst>
           </p:cNvPr>
@@ -306,7 +306,7 @@
           <a:bodyPr/>
           <a:lstStyle/>
           <a:p>
-            <a:fld id="{94ED95DB-09FC-46E5-9512-D71FD83AE3E0}" type="slidenum">
+            <a:fld id="{BC2A9051-646C-4BF0-8281-5B8C4E353592}" type="slidenum">
               <a:rPr lang="ko-KR" altLang="en-US" smtClean="0"/>
               <a:t>‹#›</a:t>
             </a:fld>
@@ -317,7 +317,7 @@
     </p:spTree>
     <p:extLst>
       <p:ext uri="{BB962C8B-B14F-4D97-AF65-F5344CB8AC3E}">
-        <p14:creationId xmlns:p14="http://schemas.microsoft.com/office/powerpoint/2010/main" val="2675301953"/>
+        <p14:creationId xmlns:p14="http://schemas.microsoft.com/office/powerpoint/2010/main" val="989850234"/>
       </p:ext>
     </p:extLst>
   </p:cSld>
@@ -349,7 +349,7 @@
           <p:cNvPr id="2" name="제목 1">
             <a:extLst>
               <a:ext uri="{FF2B5EF4-FFF2-40B4-BE49-F238E27FC236}">
-                <a16:creationId xmlns:a16="http://schemas.microsoft.com/office/drawing/2014/main" id="{0873ACDB-D8E5-5E82-3393-80C18A662964}"/>
+                <a16:creationId xmlns:a16="http://schemas.microsoft.com/office/drawing/2014/main" id="{C29C5EA4-0F9C-59AC-C246-6C574997D46C}"/>
               </a:ext>
             </a:extLst>
           </p:cNvPr>
@@ -377,7 +377,7 @@
           <p:cNvPr id="3" name="세로 텍스트 개체 틀 2">
             <a:extLst>
               <a:ext uri="{FF2B5EF4-FFF2-40B4-BE49-F238E27FC236}">
-                <a16:creationId xmlns:a16="http://schemas.microsoft.com/office/drawing/2014/main" id="{436CD133-5BA7-D6BF-A238-0EB96030845E}"/>
+                <a16:creationId xmlns:a16="http://schemas.microsoft.com/office/drawing/2014/main" id="{344E388B-63FC-54E0-F02E-64B2A360AC52}"/>
               </a:ext>
             </a:extLst>
           </p:cNvPr>
@@ -434,7 +434,7 @@
           <p:cNvPr id="4" name="날짜 개체 틀 3">
             <a:extLst>
               <a:ext uri="{FF2B5EF4-FFF2-40B4-BE49-F238E27FC236}">
-                <a16:creationId xmlns:a16="http://schemas.microsoft.com/office/drawing/2014/main" id="{334E090D-4B71-8B44-A746-A710785952CB}"/>
+                <a16:creationId xmlns:a16="http://schemas.microsoft.com/office/drawing/2014/main" id="{3F9C1465-5C4A-78F9-4521-EE85DAD71FDD}"/>
               </a:ext>
             </a:extLst>
           </p:cNvPr>
@@ -450,7 +450,7 @@
           <a:bodyPr/>
           <a:lstStyle/>
           <a:p>
-            <a:fld id="{1F6E3260-69AA-4E96-8ED1-46CA3679E129}" type="datetimeFigureOut">
+            <a:fld id="{71EE3968-8CAE-49A6-A295-1DC5695562B1}" type="datetimeFigureOut">
               <a:rPr lang="ko-KR" altLang="en-US" smtClean="0"/>
               <a:t>2026-06-20</a:t>
             </a:fld>
@@ -463,7 +463,7 @@
           <p:cNvPr id="5" name="바닥글 개체 틀 4">
             <a:extLst>
               <a:ext uri="{FF2B5EF4-FFF2-40B4-BE49-F238E27FC236}">
-                <a16:creationId xmlns:a16="http://schemas.microsoft.com/office/drawing/2014/main" id="{BAFC1AF7-EEF9-7A64-5FB9-18425C8A91F9}"/>
+                <a16:creationId xmlns:a16="http://schemas.microsoft.com/office/drawing/2014/main" id="{B8A65E72-583F-46A6-ED33-ECB863FAF20C}"/>
               </a:ext>
             </a:extLst>
           </p:cNvPr>
@@ -488,7 +488,7 @@
           <p:cNvPr id="6" name="슬라이드 번호 개체 틀 5">
             <a:extLst>
               <a:ext uri="{FF2B5EF4-FFF2-40B4-BE49-F238E27FC236}">
-                <a16:creationId xmlns:a16="http://schemas.microsoft.com/office/drawing/2014/main" id="{4D103EA1-4831-29D8-3277-5AF18AC02A4F}"/>
+                <a16:creationId xmlns:a16="http://schemas.microsoft.com/office/drawing/2014/main" id="{CF95903F-3A47-1A12-5C98-1863CBAC8360}"/>
               </a:ext>
             </a:extLst>
           </p:cNvPr>
@@ -504,7 +504,7 @@
           <a:bodyPr/>
           <a:lstStyle/>
           <a:p>
-            <a:fld id="{94ED95DB-09FC-46E5-9512-D71FD83AE3E0}" type="slidenum">
+            <a:fld id="{BC2A9051-646C-4BF0-8281-5B8C4E353592}" type="slidenum">
               <a:rPr lang="ko-KR" altLang="en-US" smtClean="0"/>
               <a:t>‹#›</a:t>
             </a:fld>
@@ -515,7 +515,7 @@
     </p:spTree>
     <p:extLst>
       <p:ext uri="{BB962C8B-B14F-4D97-AF65-F5344CB8AC3E}">
-        <p14:creationId xmlns:p14="http://schemas.microsoft.com/office/powerpoint/2010/main" val="1626371849"/>
+        <p14:creationId xmlns:p14="http://schemas.microsoft.com/office/powerpoint/2010/main" val="3171643797"/>
       </p:ext>
     </p:extLst>
   </p:cSld>
@@ -547,7 +547,7 @@
           <p:cNvPr id="2" name="세로 제목 1">
             <a:extLst>
               <a:ext uri="{FF2B5EF4-FFF2-40B4-BE49-F238E27FC236}">
-                <a16:creationId xmlns:a16="http://schemas.microsoft.com/office/drawing/2014/main" id="{CF3ADBAF-C1F3-1E46-B451-25C260658FDF}"/>
+                <a16:creationId xmlns:a16="http://schemas.microsoft.com/office/drawing/2014/main" id="{5A9046BD-53E7-67EE-DBD4-D78FD58CEC3B}"/>
               </a:ext>
             </a:extLst>
           </p:cNvPr>
@@ -580,7 +580,7 @@
           <p:cNvPr id="3" name="세로 텍스트 개체 틀 2">
             <a:extLst>
               <a:ext uri="{FF2B5EF4-FFF2-40B4-BE49-F238E27FC236}">
-                <a16:creationId xmlns:a16="http://schemas.microsoft.com/office/drawing/2014/main" id="{B09B6149-D480-F7C3-24E9-DD62373130A6}"/>
+                <a16:creationId xmlns:a16="http://schemas.microsoft.com/office/drawing/2014/main" id="{0D65E19F-0A17-A9EE-7DE8-18BE672FF018}"/>
               </a:ext>
             </a:extLst>
           </p:cNvPr>
@@ -642,7 +642,7 @@
           <p:cNvPr id="4" name="날짜 개체 틀 3">
             <a:extLst>
               <a:ext uri="{FF2B5EF4-FFF2-40B4-BE49-F238E27FC236}">
-                <a16:creationId xmlns:a16="http://schemas.microsoft.com/office/drawing/2014/main" id="{09F96622-D867-9372-F19A-00733AF7740E}"/>
+                <a16:creationId xmlns:a16="http://schemas.microsoft.com/office/drawing/2014/main" id="{18B04A6D-20D6-E021-74C4-498799FEB0F0}"/>
               </a:ext>
             </a:extLst>
           </p:cNvPr>
@@ -658,7 +658,7 @@
           <a:bodyPr/>
           <a:lstStyle/>
           <a:p>
-            <a:fld id="{1F6E3260-69AA-4E96-8ED1-46CA3679E129}" type="datetimeFigureOut">
+            <a:fld id="{71EE3968-8CAE-49A6-A295-1DC5695562B1}" type="datetimeFigureOut">
               <a:rPr lang="ko-KR" altLang="en-US" smtClean="0"/>
               <a:t>2026-06-20</a:t>
             </a:fld>
@@ -671,7 +671,7 @@
           <p:cNvPr id="5" name="바닥글 개체 틀 4">
             <a:extLst>
               <a:ext uri="{FF2B5EF4-FFF2-40B4-BE49-F238E27FC236}">
-                <a16:creationId xmlns:a16="http://schemas.microsoft.com/office/drawing/2014/main" id="{73C786B4-6706-28C5-7999-EE87F3040240}"/>
+                <a16:creationId xmlns:a16="http://schemas.microsoft.com/office/drawing/2014/main" id="{9F0CB359-36A7-09A4-4AF0-3882E60374C6}"/>
               </a:ext>
             </a:extLst>
           </p:cNvPr>
@@ -696,7 +696,7 @@
           <p:cNvPr id="6" name="슬라이드 번호 개체 틀 5">
             <a:extLst>
               <a:ext uri="{FF2B5EF4-FFF2-40B4-BE49-F238E27FC236}">
-                <a16:creationId xmlns:a16="http://schemas.microsoft.com/office/drawing/2014/main" id="{3ADF89FE-C959-0DFA-8FE5-99F7BFAA53F3}"/>
+                <a16:creationId xmlns:a16="http://schemas.microsoft.com/office/drawing/2014/main" id="{4A5E7B58-61A8-D58C-F656-44517D86B3A6}"/>
               </a:ext>
             </a:extLst>
           </p:cNvPr>
@@ -712,7 +712,7 @@
           <a:bodyPr/>
           <a:lstStyle/>
           <a:p>
-            <a:fld id="{94ED95DB-09FC-46E5-9512-D71FD83AE3E0}" type="slidenum">
+            <a:fld id="{BC2A9051-646C-4BF0-8281-5B8C4E353592}" type="slidenum">
               <a:rPr lang="ko-KR" altLang="en-US" smtClean="0"/>
               <a:t>‹#›</a:t>
             </a:fld>
@@ -723,7 +723,7 @@
     </p:spTree>
     <p:extLst>
       <p:ext uri="{BB962C8B-B14F-4D97-AF65-F5344CB8AC3E}">
-        <p14:creationId xmlns:p14="http://schemas.microsoft.com/office/powerpoint/2010/main" val="3529005459"/>
+        <p14:creationId xmlns:p14="http://schemas.microsoft.com/office/powerpoint/2010/main" val="3796289025"/>
       </p:ext>
     </p:extLst>
   </p:cSld>
@@ -755,7 +755,7 @@
           <p:cNvPr id="2" name="제목 1">
             <a:extLst>
               <a:ext uri="{FF2B5EF4-FFF2-40B4-BE49-F238E27FC236}">
-                <a16:creationId xmlns:a16="http://schemas.microsoft.com/office/drawing/2014/main" id="{231DEFE3-6EAD-3231-6375-C1503F2A6DB7}"/>
+                <a16:creationId xmlns:a16="http://schemas.microsoft.com/office/drawing/2014/main" id="{85A64571-241E-3F3A-C411-ABC21D71981A}"/>
               </a:ext>
             </a:extLst>
           </p:cNvPr>
@@ -783,7 +783,7 @@
           <p:cNvPr id="3" name="내용 개체 틀 2">
             <a:extLst>
               <a:ext uri="{FF2B5EF4-FFF2-40B4-BE49-F238E27FC236}">
-                <a16:creationId xmlns:a16="http://schemas.microsoft.com/office/drawing/2014/main" id="{03B68015-80DD-502C-E041-1C4427ACE4EB}"/>
+                <a16:creationId xmlns:a16="http://schemas.microsoft.com/office/drawing/2014/main" id="{E6F534A1-79A6-089E-34E5-E27F73143D50}"/>
               </a:ext>
             </a:extLst>
           </p:cNvPr>
@@ -840,7 +840,7 @@
           <p:cNvPr id="4" name="날짜 개체 틀 3">
             <a:extLst>
               <a:ext uri="{FF2B5EF4-FFF2-40B4-BE49-F238E27FC236}">
-                <a16:creationId xmlns:a16="http://schemas.microsoft.com/office/drawing/2014/main" id="{720A6B00-160B-1606-6AC3-068595279BC7}"/>
+                <a16:creationId xmlns:a16="http://schemas.microsoft.com/office/drawing/2014/main" id="{9D150F5B-6EDC-909C-345E-577EF7A587C6}"/>
               </a:ext>
             </a:extLst>
           </p:cNvPr>
@@ -856,7 +856,7 @@
           <a:bodyPr/>
           <a:lstStyle/>
           <a:p>
-            <a:fld id="{1F6E3260-69AA-4E96-8ED1-46CA3679E129}" type="datetimeFigureOut">
+            <a:fld id="{71EE3968-8CAE-49A6-A295-1DC5695562B1}" type="datetimeFigureOut">
               <a:rPr lang="ko-KR" altLang="en-US" smtClean="0"/>
               <a:t>2026-06-20</a:t>
             </a:fld>
@@ -869,7 +869,7 @@
           <p:cNvPr id="5" name="바닥글 개체 틀 4">
             <a:extLst>
               <a:ext uri="{FF2B5EF4-FFF2-40B4-BE49-F238E27FC236}">
-                <a16:creationId xmlns:a16="http://schemas.microsoft.com/office/drawing/2014/main" id="{4EC8A86A-1ADF-AC1A-6F0B-230A42962998}"/>
+                <a16:creationId xmlns:a16="http://schemas.microsoft.com/office/drawing/2014/main" id="{D4FD8A20-1E26-341E-50B6-E4EC8A9F6716}"/>
               </a:ext>
             </a:extLst>
           </p:cNvPr>
@@ -894,7 +894,7 @@
           <p:cNvPr id="6" name="슬라이드 번호 개체 틀 5">
             <a:extLst>
               <a:ext uri="{FF2B5EF4-FFF2-40B4-BE49-F238E27FC236}">
-                <a16:creationId xmlns:a16="http://schemas.microsoft.com/office/drawing/2014/main" id="{668516F9-4AD0-B74F-B54E-3F821A57A792}"/>
+                <a16:creationId xmlns:a16="http://schemas.microsoft.com/office/drawing/2014/main" id="{819C87F3-CF84-67E1-1F51-121806016E0D}"/>
               </a:ext>
             </a:extLst>
           </p:cNvPr>
@@ -910,7 +910,7 @@
           <a:bodyPr/>
           <a:lstStyle/>
           <a:p>
-            <a:fld id="{94ED95DB-09FC-46E5-9512-D71FD83AE3E0}" type="slidenum">
+            <a:fld id="{BC2A9051-646C-4BF0-8281-5B8C4E353592}" type="slidenum">
               <a:rPr lang="ko-KR" altLang="en-US" smtClean="0"/>
               <a:t>‹#›</a:t>
             </a:fld>
@@ -921,7 +921,7 @@
     </p:spTree>
     <p:extLst>
       <p:ext uri="{BB962C8B-B14F-4D97-AF65-F5344CB8AC3E}">
-        <p14:creationId xmlns:p14="http://schemas.microsoft.com/office/powerpoint/2010/main" val="3736843641"/>
+        <p14:creationId xmlns:p14="http://schemas.microsoft.com/office/powerpoint/2010/main" val="1664920063"/>
       </p:ext>
     </p:extLst>
   </p:cSld>
@@ -953,7 +953,7 @@
           <p:cNvPr id="2" name="제목 1">
             <a:extLst>
               <a:ext uri="{FF2B5EF4-FFF2-40B4-BE49-F238E27FC236}">
-                <a16:creationId xmlns:a16="http://schemas.microsoft.com/office/drawing/2014/main" id="{FDE56CA2-8FA6-7910-9590-0B3AD28312B6}"/>
+                <a16:creationId xmlns:a16="http://schemas.microsoft.com/office/drawing/2014/main" id="{AA609FE3-4841-972A-672B-6571A3157B78}"/>
               </a:ext>
             </a:extLst>
           </p:cNvPr>
@@ -990,7 +990,7 @@
           <p:cNvPr id="3" name="텍스트 개체 틀 2">
             <a:extLst>
               <a:ext uri="{FF2B5EF4-FFF2-40B4-BE49-F238E27FC236}">
-                <a16:creationId xmlns:a16="http://schemas.microsoft.com/office/drawing/2014/main" id="{7E874C5B-72C3-6CEC-E621-579BC3F8126D}"/>
+                <a16:creationId xmlns:a16="http://schemas.microsoft.com/office/drawing/2014/main" id="{759DA05C-4A24-7C20-7003-1D64C562A590}"/>
               </a:ext>
             </a:extLst>
           </p:cNvPr>
@@ -1115,7 +1115,7 @@
           <p:cNvPr id="4" name="날짜 개체 틀 3">
             <a:extLst>
               <a:ext uri="{FF2B5EF4-FFF2-40B4-BE49-F238E27FC236}">
-                <a16:creationId xmlns:a16="http://schemas.microsoft.com/office/drawing/2014/main" id="{F2CF96ED-25E6-D6E8-93CA-26DD509E31D5}"/>
+                <a16:creationId xmlns:a16="http://schemas.microsoft.com/office/drawing/2014/main" id="{93DFFD59-92DA-33B1-027F-5BFC8EAA91BF}"/>
               </a:ext>
             </a:extLst>
           </p:cNvPr>
@@ -1131,7 +1131,7 @@
           <a:bodyPr/>
           <a:lstStyle/>
           <a:p>
-            <a:fld id="{1F6E3260-69AA-4E96-8ED1-46CA3679E129}" type="datetimeFigureOut">
+            <a:fld id="{71EE3968-8CAE-49A6-A295-1DC5695562B1}" type="datetimeFigureOut">
               <a:rPr lang="ko-KR" altLang="en-US" smtClean="0"/>
               <a:t>2026-06-20</a:t>
             </a:fld>
@@ -1144,7 +1144,7 @@
           <p:cNvPr id="5" name="바닥글 개체 틀 4">
             <a:extLst>
               <a:ext uri="{FF2B5EF4-FFF2-40B4-BE49-F238E27FC236}">
-                <a16:creationId xmlns:a16="http://schemas.microsoft.com/office/drawing/2014/main" id="{FBA663F7-7037-E03D-86D1-3F2B3B918480}"/>
+                <a16:creationId xmlns:a16="http://schemas.microsoft.com/office/drawing/2014/main" id="{145EAF61-C452-5384-9397-5BB0D013EC51}"/>
               </a:ext>
             </a:extLst>
           </p:cNvPr>
@@ -1169,7 +1169,7 @@
           <p:cNvPr id="6" name="슬라이드 번호 개체 틀 5">
             <a:extLst>
               <a:ext uri="{FF2B5EF4-FFF2-40B4-BE49-F238E27FC236}">
-                <a16:creationId xmlns:a16="http://schemas.microsoft.com/office/drawing/2014/main" id="{1937937C-7742-CB08-553D-32684C94EFB1}"/>
+                <a16:creationId xmlns:a16="http://schemas.microsoft.com/office/drawing/2014/main" id="{B15C5F32-9D42-98F4-60B9-74D8193F8226}"/>
               </a:ext>
             </a:extLst>
           </p:cNvPr>
@@ -1185,7 +1185,7 @@
           <a:bodyPr/>
           <a:lstStyle/>
           <a:p>
-            <a:fld id="{94ED95DB-09FC-46E5-9512-D71FD83AE3E0}" type="slidenum">
+            <a:fld id="{BC2A9051-646C-4BF0-8281-5B8C4E353592}" type="slidenum">
               <a:rPr lang="ko-KR" altLang="en-US" smtClean="0"/>
               <a:t>‹#›</a:t>
             </a:fld>
@@ -1196,7 +1196,7 @@
     </p:spTree>
     <p:extLst>
       <p:ext uri="{BB962C8B-B14F-4D97-AF65-F5344CB8AC3E}">
-        <p14:creationId xmlns:p14="http://schemas.microsoft.com/office/powerpoint/2010/main" val="4164942693"/>
+        <p14:creationId xmlns:p14="http://schemas.microsoft.com/office/powerpoint/2010/main" val="1826611555"/>
       </p:ext>
     </p:extLst>
   </p:cSld>
@@ -1228,7 +1228,7 @@
           <p:cNvPr id="2" name="제목 1">
             <a:extLst>
               <a:ext uri="{FF2B5EF4-FFF2-40B4-BE49-F238E27FC236}">
-                <a16:creationId xmlns:a16="http://schemas.microsoft.com/office/drawing/2014/main" id="{45886354-65AE-321A-2495-3671D8AE31FB}"/>
+                <a16:creationId xmlns:a16="http://schemas.microsoft.com/office/drawing/2014/main" id="{CC5C1319-E17D-C500-4DF4-6C4A7400AE6A}"/>
               </a:ext>
             </a:extLst>
           </p:cNvPr>
@@ -1256,7 +1256,7 @@
           <p:cNvPr id="3" name="내용 개체 틀 2">
             <a:extLst>
               <a:ext uri="{FF2B5EF4-FFF2-40B4-BE49-F238E27FC236}">
-                <a16:creationId xmlns:a16="http://schemas.microsoft.com/office/drawing/2014/main" id="{7C5F2573-9973-30DD-26C7-ABDD051EED5E}"/>
+                <a16:creationId xmlns:a16="http://schemas.microsoft.com/office/drawing/2014/main" id="{EE976A81-EC1D-D4C5-4B79-C73EFA746F7C}"/>
               </a:ext>
             </a:extLst>
           </p:cNvPr>
@@ -1318,7 +1318,7 @@
           <p:cNvPr id="4" name="내용 개체 틀 3">
             <a:extLst>
               <a:ext uri="{FF2B5EF4-FFF2-40B4-BE49-F238E27FC236}">
-                <a16:creationId xmlns:a16="http://schemas.microsoft.com/office/drawing/2014/main" id="{E0C82776-9447-1F4A-090B-8432210AE7F6}"/>
+                <a16:creationId xmlns:a16="http://schemas.microsoft.com/office/drawing/2014/main" id="{642B6879-1607-C0A4-58EB-8C1B3C893341}"/>
               </a:ext>
             </a:extLst>
           </p:cNvPr>
@@ -1380,7 +1380,7 @@
           <p:cNvPr id="5" name="날짜 개체 틀 4">
             <a:extLst>
               <a:ext uri="{FF2B5EF4-FFF2-40B4-BE49-F238E27FC236}">
-                <a16:creationId xmlns:a16="http://schemas.microsoft.com/office/drawing/2014/main" id="{01D4264B-5E67-9533-83D1-212EEE935B9F}"/>
+                <a16:creationId xmlns:a16="http://schemas.microsoft.com/office/drawing/2014/main" id="{7FBD5CAC-0D5B-53FB-5A07-FD904C5438FA}"/>
               </a:ext>
             </a:extLst>
           </p:cNvPr>
@@ -1396,7 +1396,7 @@
           <a:bodyPr/>
           <a:lstStyle/>
           <a:p>
-            <a:fld id="{1F6E3260-69AA-4E96-8ED1-46CA3679E129}" type="datetimeFigureOut">
+            <a:fld id="{71EE3968-8CAE-49A6-A295-1DC5695562B1}" type="datetimeFigureOut">
               <a:rPr lang="ko-KR" altLang="en-US" smtClean="0"/>
               <a:t>2026-06-20</a:t>
             </a:fld>
@@ -1409,7 +1409,7 @@
           <p:cNvPr id="6" name="바닥글 개체 틀 5">
             <a:extLst>
               <a:ext uri="{FF2B5EF4-FFF2-40B4-BE49-F238E27FC236}">
-                <a16:creationId xmlns:a16="http://schemas.microsoft.com/office/drawing/2014/main" id="{0BB42B7C-738E-D631-7D63-7355D804CC7D}"/>
+                <a16:creationId xmlns:a16="http://schemas.microsoft.com/office/drawing/2014/main" id="{228B17CD-C0DB-8F8C-323A-DE0056FE6058}"/>
               </a:ext>
             </a:extLst>
           </p:cNvPr>
@@ -1434,7 +1434,7 @@
           <p:cNvPr id="7" name="슬라이드 번호 개체 틀 6">
             <a:extLst>
               <a:ext uri="{FF2B5EF4-FFF2-40B4-BE49-F238E27FC236}">
-                <a16:creationId xmlns:a16="http://schemas.microsoft.com/office/drawing/2014/main" id="{C67BAB58-677A-E21C-1AAF-B9C57731C6FB}"/>
+                <a16:creationId xmlns:a16="http://schemas.microsoft.com/office/drawing/2014/main" id="{BEF026AC-9D73-E157-6E15-32C5A7C4C262}"/>
               </a:ext>
             </a:extLst>
           </p:cNvPr>
@@ -1450,7 +1450,7 @@
           <a:bodyPr/>
           <a:lstStyle/>
           <a:p>
-            <a:fld id="{94ED95DB-09FC-46E5-9512-D71FD83AE3E0}" type="slidenum">
+            <a:fld id="{BC2A9051-646C-4BF0-8281-5B8C4E353592}" type="slidenum">
               <a:rPr lang="ko-KR" altLang="en-US" smtClean="0"/>
               <a:t>‹#›</a:t>
             </a:fld>
@@ -1461,7 +1461,7 @@
     </p:spTree>
     <p:extLst>
       <p:ext uri="{BB962C8B-B14F-4D97-AF65-F5344CB8AC3E}">
-        <p14:creationId xmlns:p14="http://schemas.microsoft.com/office/powerpoint/2010/main" val="3393592845"/>
+        <p14:creationId xmlns:p14="http://schemas.microsoft.com/office/powerpoint/2010/main" val="1018173594"/>
       </p:ext>
     </p:extLst>
   </p:cSld>
@@ -1493,7 +1493,7 @@
           <p:cNvPr id="2" name="제목 1">
             <a:extLst>
               <a:ext uri="{FF2B5EF4-FFF2-40B4-BE49-F238E27FC236}">
-                <a16:creationId xmlns:a16="http://schemas.microsoft.com/office/drawing/2014/main" id="{5EF13C5A-F5C7-B952-A044-BFF91DAB998B}"/>
+                <a16:creationId xmlns:a16="http://schemas.microsoft.com/office/drawing/2014/main" id="{A976C9D1-C69E-3C83-B01D-66260D34AE64}"/>
               </a:ext>
             </a:extLst>
           </p:cNvPr>
@@ -1526,7 +1526,7 @@
           <p:cNvPr id="3" name="텍스트 개체 틀 2">
             <a:extLst>
               <a:ext uri="{FF2B5EF4-FFF2-40B4-BE49-F238E27FC236}">
-                <a16:creationId xmlns:a16="http://schemas.microsoft.com/office/drawing/2014/main" id="{5F7A2306-1A80-5707-A27F-439EC3654237}"/>
+                <a16:creationId xmlns:a16="http://schemas.microsoft.com/office/drawing/2014/main" id="{7EA82400-4024-3256-186E-AB57CFEED019}"/>
               </a:ext>
             </a:extLst>
           </p:cNvPr>
@@ -1597,7 +1597,7 @@
           <p:cNvPr id="4" name="내용 개체 틀 3">
             <a:extLst>
               <a:ext uri="{FF2B5EF4-FFF2-40B4-BE49-F238E27FC236}">
-                <a16:creationId xmlns:a16="http://schemas.microsoft.com/office/drawing/2014/main" id="{F12A5588-C784-7043-F642-8175B066DAD8}"/>
+                <a16:creationId xmlns:a16="http://schemas.microsoft.com/office/drawing/2014/main" id="{6612C0BF-8778-5E2C-E72C-BAD04ADFBF0F}"/>
               </a:ext>
             </a:extLst>
           </p:cNvPr>
@@ -1659,7 +1659,7 @@
           <p:cNvPr id="5" name="텍스트 개체 틀 4">
             <a:extLst>
               <a:ext uri="{FF2B5EF4-FFF2-40B4-BE49-F238E27FC236}">
-                <a16:creationId xmlns:a16="http://schemas.microsoft.com/office/drawing/2014/main" id="{68D2666E-B420-8DAA-2150-BC2A6B024E4C}"/>
+                <a16:creationId xmlns:a16="http://schemas.microsoft.com/office/drawing/2014/main" id="{7BF85B3F-6F20-D23B-278B-5C7E1A730435}"/>
               </a:ext>
             </a:extLst>
           </p:cNvPr>
@@ -1730,7 +1730,7 @@
           <p:cNvPr id="6" name="내용 개체 틀 5">
             <a:extLst>
               <a:ext uri="{FF2B5EF4-FFF2-40B4-BE49-F238E27FC236}">
-                <a16:creationId xmlns:a16="http://schemas.microsoft.com/office/drawing/2014/main" id="{60561C29-1807-E1A3-A952-155F20EFB272}"/>
+                <a16:creationId xmlns:a16="http://schemas.microsoft.com/office/drawing/2014/main" id="{C6391630-2E47-3F42-B2A1-431782DFBD56}"/>
               </a:ext>
             </a:extLst>
           </p:cNvPr>
@@ -1792,7 +1792,7 @@
           <p:cNvPr id="7" name="날짜 개체 틀 6">
             <a:extLst>
               <a:ext uri="{FF2B5EF4-FFF2-40B4-BE49-F238E27FC236}">
-                <a16:creationId xmlns:a16="http://schemas.microsoft.com/office/drawing/2014/main" id="{39F2FC67-A2DB-893D-FAC2-A09C749B8C72}"/>
+                <a16:creationId xmlns:a16="http://schemas.microsoft.com/office/drawing/2014/main" id="{39C19FC6-3423-7F94-D9D9-427BCF26C9BC}"/>
               </a:ext>
             </a:extLst>
           </p:cNvPr>
@@ -1808,7 +1808,7 @@
           <a:bodyPr/>
           <a:lstStyle/>
           <a:p>
-            <a:fld id="{1F6E3260-69AA-4E96-8ED1-46CA3679E129}" type="datetimeFigureOut">
+            <a:fld id="{71EE3968-8CAE-49A6-A295-1DC5695562B1}" type="datetimeFigureOut">
               <a:rPr lang="ko-KR" altLang="en-US" smtClean="0"/>
               <a:t>2026-06-20</a:t>
             </a:fld>
@@ -1821,7 +1821,7 @@
           <p:cNvPr id="8" name="바닥글 개체 틀 7">
             <a:extLst>
               <a:ext uri="{FF2B5EF4-FFF2-40B4-BE49-F238E27FC236}">
-                <a16:creationId xmlns:a16="http://schemas.microsoft.com/office/drawing/2014/main" id="{2B00C7B2-942B-934F-7A0C-CC1408F81138}"/>
+                <a16:creationId xmlns:a16="http://schemas.microsoft.com/office/drawing/2014/main" id="{6717B556-46A6-B7DF-FFE0-8F33605C1B2C}"/>
               </a:ext>
             </a:extLst>
           </p:cNvPr>
@@ -1846,7 +1846,7 @@
           <p:cNvPr id="9" name="슬라이드 번호 개체 틀 8">
             <a:extLst>
               <a:ext uri="{FF2B5EF4-FFF2-40B4-BE49-F238E27FC236}">
-                <a16:creationId xmlns:a16="http://schemas.microsoft.com/office/drawing/2014/main" id="{5E062111-F33C-6473-40CA-B5E6B023ED63}"/>
+                <a16:creationId xmlns:a16="http://schemas.microsoft.com/office/drawing/2014/main" id="{FDC96CD1-96C5-34AF-8B8B-7677B139C737}"/>
               </a:ext>
             </a:extLst>
           </p:cNvPr>
@@ -1862,7 +1862,7 @@
           <a:bodyPr/>
           <a:lstStyle/>
           <a:p>
-            <a:fld id="{94ED95DB-09FC-46E5-9512-D71FD83AE3E0}" type="slidenum">
+            <a:fld id="{BC2A9051-646C-4BF0-8281-5B8C4E353592}" type="slidenum">
               <a:rPr lang="ko-KR" altLang="en-US" smtClean="0"/>
               <a:t>‹#›</a:t>
             </a:fld>
@@ -1873,7 +1873,7 @@
     </p:spTree>
     <p:extLst>
       <p:ext uri="{BB962C8B-B14F-4D97-AF65-F5344CB8AC3E}">
-        <p14:creationId xmlns:p14="http://schemas.microsoft.com/office/powerpoint/2010/main" val="886961866"/>
+        <p14:creationId xmlns:p14="http://schemas.microsoft.com/office/powerpoint/2010/main" val="2990292803"/>
       </p:ext>
     </p:extLst>
   </p:cSld>
@@ -1905,7 +1905,7 @@
           <p:cNvPr id="2" name="제목 1">
             <a:extLst>
               <a:ext uri="{FF2B5EF4-FFF2-40B4-BE49-F238E27FC236}">
-                <a16:creationId xmlns:a16="http://schemas.microsoft.com/office/drawing/2014/main" id="{D67FAA60-B405-C607-F494-565B8ABD2E41}"/>
+                <a16:creationId xmlns:a16="http://schemas.microsoft.com/office/drawing/2014/main" id="{B2BC93EA-137D-97F2-66AC-8B21ECD42F5E}"/>
               </a:ext>
             </a:extLst>
           </p:cNvPr>
@@ -1933,7 +1933,7 @@
           <p:cNvPr id="3" name="날짜 개체 틀 2">
             <a:extLst>
               <a:ext uri="{FF2B5EF4-FFF2-40B4-BE49-F238E27FC236}">
-                <a16:creationId xmlns:a16="http://schemas.microsoft.com/office/drawing/2014/main" id="{43DADA5A-0A43-A48A-2071-98C443D955AC}"/>
+                <a16:creationId xmlns:a16="http://schemas.microsoft.com/office/drawing/2014/main" id="{186AE2BD-F7C9-25D9-C114-9EF724E760FC}"/>
               </a:ext>
             </a:extLst>
           </p:cNvPr>
@@ -1949,7 +1949,7 @@
           <a:bodyPr/>
           <a:lstStyle/>
           <a:p>
-            <a:fld id="{1F6E3260-69AA-4E96-8ED1-46CA3679E129}" type="datetimeFigureOut">
+            <a:fld id="{71EE3968-8CAE-49A6-A295-1DC5695562B1}" type="datetimeFigureOut">
               <a:rPr lang="ko-KR" altLang="en-US" smtClean="0"/>
               <a:t>2026-06-20</a:t>
             </a:fld>
@@ -1962,7 +1962,7 @@
           <p:cNvPr id="4" name="바닥글 개체 틀 3">
             <a:extLst>
               <a:ext uri="{FF2B5EF4-FFF2-40B4-BE49-F238E27FC236}">
-                <a16:creationId xmlns:a16="http://schemas.microsoft.com/office/drawing/2014/main" id="{85A00795-C2B0-9DFB-AD9B-1E3C4B1F6A1C}"/>
+                <a16:creationId xmlns:a16="http://schemas.microsoft.com/office/drawing/2014/main" id="{0188E0CE-D332-69B4-8D18-B3AD106682E2}"/>
               </a:ext>
             </a:extLst>
           </p:cNvPr>
@@ -1987,7 +1987,7 @@
           <p:cNvPr id="5" name="슬라이드 번호 개체 틀 4">
             <a:extLst>
               <a:ext uri="{FF2B5EF4-FFF2-40B4-BE49-F238E27FC236}">
-                <a16:creationId xmlns:a16="http://schemas.microsoft.com/office/drawing/2014/main" id="{411472AB-785C-A807-B188-85DC5AADD9EF}"/>
+                <a16:creationId xmlns:a16="http://schemas.microsoft.com/office/drawing/2014/main" id="{68884DCA-B192-C500-0800-C61407A05D44}"/>
               </a:ext>
             </a:extLst>
           </p:cNvPr>
@@ -2003,7 +2003,7 @@
           <a:bodyPr/>
           <a:lstStyle/>
           <a:p>
-            <a:fld id="{94ED95DB-09FC-46E5-9512-D71FD83AE3E0}" type="slidenum">
+            <a:fld id="{BC2A9051-646C-4BF0-8281-5B8C4E353592}" type="slidenum">
               <a:rPr lang="ko-KR" altLang="en-US" smtClean="0"/>
               <a:t>‹#›</a:t>
             </a:fld>
@@ -2014,7 +2014,7 @@
     </p:spTree>
     <p:extLst>
       <p:ext uri="{BB962C8B-B14F-4D97-AF65-F5344CB8AC3E}">
-        <p14:creationId xmlns:p14="http://schemas.microsoft.com/office/powerpoint/2010/main" val="1724790303"/>
+        <p14:creationId xmlns:p14="http://schemas.microsoft.com/office/powerpoint/2010/main" val="2039871504"/>
       </p:ext>
     </p:extLst>
   </p:cSld>
@@ -2046,7 +2046,7 @@
           <p:cNvPr id="2" name="날짜 개체 틀 1">
             <a:extLst>
               <a:ext uri="{FF2B5EF4-FFF2-40B4-BE49-F238E27FC236}">
-                <a16:creationId xmlns:a16="http://schemas.microsoft.com/office/drawing/2014/main" id="{790FDDEF-924C-692B-F92F-F0EBB9ED5E2B}"/>
+                <a16:creationId xmlns:a16="http://schemas.microsoft.com/office/drawing/2014/main" id="{AAF20206-331E-B682-F214-2F26C2682550}"/>
               </a:ext>
             </a:extLst>
           </p:cNvPr>
@@ -2062,7 +2062,7 @@
           <a:bodyPr/>
           <a:lstStyle/>
           <a:p>
-            <a:fld id="{1F6E3260-69AA-4E96-8ED1-46CA3679E129}" type="datetimeFigureOut">
+            <a:fld id="{71EE3968-8CAE-49A6-A295-1DC5695562B1}" type="datetimeFigureOut">
               <a:rPr lang="ko-KR" altLang="en-US" smtClean="0"/>
               <a:t>2026-06-20</a:t>
             </a:fld>
@@ -2075,7 +2075,7 @@
           <p:cNvPr id="3" name="바닥글 개체 틀 2">
             <a:extLst>
               <a:ext uri="{FF2B5EF4-FFF2-40B4-BE49-F238E27FC236}">
-                <a16:creationId xmlns:a16="http://schemas.microsoft.com/office/drawing/2014/main" id="{67BA3B45-0844-9517-27B2-ABF04638F062}"/>
+                <a16:creationId xmlns:a16="http://schemas.microsoft.com/office/drawing/2014/main" id="{51787386-3813-F055-BFA8-273F99BBA356}"/>
               </a:ext>
             </a:extLst>
           </p:cNvPr>
@@ -2100,7 +2100,7 @@
           <p:cNvPr id="4" name="슬라이드 번호 개체 틀 3">
             <a:extLst>
               <a:ext uri="{FF2B5EF4-FFF2-40B4-BE49-F238E27FC236}">
-                <a16:creationId xmlns:a16="http://schemas.microsoft.com/office/drawing/2014/main" id="{FC6DB084-20AF-20BD-BA8F-E856ECC82EBA}"/>
+                <a16:creationId xmlns:a16="http://schemas.microsoft.com/office/drawing/2014/main" id="{F4BCB5EA-2E6F-1663-8B64-5AE6CD4BE8E6}"/>
               </a:ext>
             </a:extLst>
           </p:cNvPr>
@@ -2116,7 +2116,7 @@
           <a:bodyPr/>
           <a:lstStyle/>
           <a:p>
-            <a:fld id="{94ED95DB-09FC-46E5-9512-D71FD83AE3E0}" type="slidenum">
+            <a:fld id="{BC2A9051-646C-4BF0-8281-5B8C4E353592}" type="slidenum">
               <a:rPr lang="ko-KR" altLang="en-US" smtClean="0"/>
               <a:t>‹#›</a:t>
             </a:fld>
@@ -2127,7 +2127,7 @@
     </p:spTree>
     <p:extLst>
       <p:ext uri="{BB962C8B-B14F-4D97-AF65-F5344CB8AC3E}">
-        <p14:creationId xmlns:p14="http://schemas.microsoft.com/office/powerpoint/2010/main" val="1272156369"/>
+        <p14:creationId xmlns:p14="http://schemas.microsoft.com/office/powerpoint/2010/main" val="3714447820"/>
       </p:ext>
     </p:extLst>
   </p:cSld>
@@ -2159,7 +2159,7 @@
           <p:cNvPr id="2" name="제목 1">
             <a:extLst>
               <a:ext uri="{FF2B5EF4-FFF2-40B4-BE49-F238E27FC236}">
-                <a16:creationId xmlns:a16="http://schemas.microsoft.com/office/drawing/2014/main" id="{6E01F4F9-2644-1B02-AF2A-E552B14A9E16}"/>
+                <a16:creationId xmlns:a16="http://schemas.microsoft.com/office/drawing/2014/main" id="{1156BE50-06AA-8B18-B04E-22842ABAA789}"/>
               </a:ext>
             </a:extLst>
           </p:cNvPr>
@@ -2196,7 +2196,7 @@
           <p:cNvPr id="3" name="내용 개체 틀 2">
             <a:extLst>
               <a:ext uri="{FF2B5EF4-FFF2-40B4-BE49-F238E27FC236}">
-                <a16:creationId xmlns:a16="http://schemas.microsoft.com/office/drawing/2014/main" id="{98E5CDF0-EEF9-14E8-4102-47ABB0B129E4}"/>
+                <a16:creationId xmlns:a16="http://schemas.microsoft.com/office/drawing/2014/main" id="{99DE7176-DB3B-4D72-1467-FDFF3791D4AD}"/>
               </a:ext>
             </a:extLst>
           </p:cNvPr>
@@ -2286,7 +2286,7 @@
           <p:cNvPr id="4" name="텍스트 개체 틀 3">
             <a:extLst>
               <a:ext uri="{FF2B5EF4-FFF2-40B4-BE49-F238E27FC236}">
-                <a16:creationId xmlns:a16="http://schemas.microsoft.com/office/drawing/2014/main" id="{2AFF9C15-B2F1-A4E6-49E9-2C4E0017890A}"/>
+                <a16:creationId xmlns:a16="http://schemas.microsoft.com/office/drawing/2014/main" id="{D3A81FA3-871F-F966-A646-12AEB43A1F8C}"/>
               </a:ext>
             </a:extLst>
           </p:cNvPr>
@@ -2357,7 +2357,7 @@
           <p:cNvPr id="5" name="날짜 개체 틀 4">
             <a:extLst>
               <a:ext uri="{FF2B5EF4-FFF2-40B4-BE49-F238E27FC236}">
-                <a16:creationId xmlns:a16="http://schemas.microsoft.com/office/drawing/2014/main" id="{57900D74-A0F1-7B8C-F962-36DD9D12AE1F}"/>
+                <a16:creationId xmlns:a16="http://schemas.microsoft.com/office/drawing/2014/main" id="{31F70C05-0069-7B55-7CC4-8B369DB0BC30}"/>
               </a:ext>
             </a:extLst>
           </p:cNvPr>
@@ -2373,7 +2373,7 @@
           <a:bodyPr/>
           <a:lstStyle/>
           <a:p>
-            <a:fld id="{1F6E3260-69AA-4E96-8ED1-46CA3679E129}" type="datetimeFigureOut">
+            <a:fld id="{71EE3968-8CAE-49A6-A295-1DC5695562B1}" type="datetimeFigureOut">
               <a:rPr lang="ko-KR" altLang="en-US" smtClean="0"/>
               <a:t>2026-06-20</a:t>
             </a:fld>
@@ -2386,7 +2386,7 @@
           <p:cNvPr id="6" name="바닥글 개체 틀 5">
             <a:extLst>
               <a:ext uri="{FF2B5EF4-FFF2-40B4-BE49-F238E27FC236}">
-                <a16:creationId xmlns:a16="http://schemas.microsoft.com/office/drawing/2014/main" id="{792C0F18-8C37-A8B7-9C15-D072D8088B75}"/>
+                <a16:creationId xmlns:a16="http://schemas.microsoft.com/office/drawing/2014/main" id="{8F9CCBC8-C196-73A0-B94C-0CB8931C8CC1}"/>
               </a:ext>
             </a:extLst>
           </p:cNvPr>
@@ -2411,7 +2411,7 @@
           <p:cNvPr id="7" name="슬라이드 번호 개체 틀 6">
             <a:extLst>
               <a:ext uri="{FF2B5EF4-FFF2-40B4-BE49-F238E27FC236}">
-                <a16:creationId xmlns:a16="http://schemas.microsoft.com/office/drawing/2014/main" id="{12EE9218-414F-3A31-86E9-28E8F0902322}"/>
+                <a16:creationId xmlns:a16="http://schemas.microsoft.com/office/drawing/2014/main" id="{F51DC7BE-866A-C303-0BEE-A54966A36741}"/>
               </a:ext>
             </a:extLst>
           </p:cNvPr>
@@ -2427,7 +2427,7 @@
           <a:bodyPr/>
           <a:lstStyle/>
           <a:p>
-            <a:fld id="{94ED95DB-09FC-46E5-9512-D71FD83AE3E0}" type="slidenum">
+            <a:fld id="{BC2A9051-646C-4BF0-8281-5B8C4E353592}" type="slidenum">
               <a:rPr lang="ko-KR" altLang="en-US" smtClean="0"/>
               <a:t>‹#›</a:t>
             </a:fld>
@@ -2438,7 +2438,7 @@
     </p:spTree>
     <p:extLst>
       <p:ext uri="{BB962C8B-B14F-4D97-AF65-F5344CB8AC3E}">
-        <p14:creationId xmlns:p14="http://schemas.microsoft.com/office/powerpoint/2010/main" val="2700530900"/>
+        <p14:creationId xmlns:p14="http://schemas.microsoft.com/office/powerpoint/2010/main" val="3076116040"/>
       </p:ext>
     </p:extLst>
   </p:cSld>
@@ -2470,7 +2470,7 @@
           <p:cNvPr id="2" name="제목 1">
             <a:extLst>
               <a:ext uri="{FF2B5EF4-FFF2-40B4-BE49-F238E27FC236}">
-                <a16:creationId xmlns:a16="http://schemas.microsoft.com/office/drawing/2014/main" id="{ED2CFC88-FF49-2D52-34AC-F5C100EF3347}"/>
+                <a16:creationId xmlns:a16="http://schemas.microsoft.com/office/drawing/2014/main" id="{E0380435-1E28-519C-AB9D-9975AB604981}"/>
               </a:ext>
             </a:extLst>
           </p:cNvPr>
@@ -2507,7 +2507,7 @@
           <p:cNvPr id="3" name="그림 개체 틀 2">
             <a:extLst>
               <a:ext uri="{FF2B5EF4-FFF2-40B4-BE49-F238E27FC236}">
-                <a16:creationId xmlns:a16="http://schemas.microsoft.com/office/drawing/2014/main" id="{921F4626-6CCF-3780-EF69-1E0EF6D5B142}"/>
+                <a16:creationId xmlns:a16="http://schemas.microsoft.com/office/drawing/2014/main" id="{7527ABA6-3571-34B4-0CBA-464C72B38DD1}"/>
               </a:ext>
             </a:extLst>
           </p:cNvPr>
@@ -2574,7 +2574,7 @@
           <p:cNvPr id="4" name="텍스트 개체 틀 3">
             <a:extLst>
               <a:ext uri="{FF2B5EF4-FFF2-40B4-BE49-F238E27FC236}">
-                <a16:creationId xmlns:a16="http://schemas.microsoft.com/office/drawing/2014/main" id="{84E278B5-EA95-952C-942A-9D9AD2B8BD53}"/>
+                <a16:creationId xmlns:a16="http://schemas.microsoft.com/office/drawing/2014/main" id="{5E0B1F69-1564-3C79-D97D-C38B8056BED9}"/>
               </a:ext>
             </a:extLst>
           </p:cNvPr>
@@ -2645,7 +2645,7 @@
           <p:cNvPr id="5" name="날짜 개체 틀 4">
             <a:extLst>
               <a:ext uri="{FF2B5EF4-FFF2-40B4-BE49-F238E27FC236}">
-                <a16:creationId xmlns:a16="http://schemas.microsoft.com/office/drawing/2014/main" id="{678444B6-BE78-9F8E-4202-443CB7D4183E}"/>
+                <a16:creationId xmlns:a16="http://schemas.microsoft.com/office/drawing/2014/main" id="{6C6FA529-0192-354B-BA68-ADD4721E6504}"/>
               </a:ext>
             </a:extLst>
           </p:cNvPr>
@@ -2661,7 +2661,7 @@
           <a:bodyPr/>
           <a:lstStyle/>
           <a:p>
-            <a:fld id="{1F6E3260-69AA-4E96-8ED1-46CA3679E129}" type="datetimeFigureOut">
+            <a:fld id="{71EE3968-8CAE-49A6-A295-1DC5695562B1}" type="datetimeFigureOut">
               <a:rPr lang="ko-KR" altLang="en-US" smtClean="0"/>
               <a:t>2026-06-20</a:t>
             </a:fld>
@@ -2674,7 +2674,7 @@
           <p:cNvPr id="6" name="바닥글 개체 틀 5">
             <a:extLst>
               <a:ext uri="{FF2B5EF4-FFF2-40B4-BE49-F238E27FC236}">
-                <a16:creationId xmlns:a16="http://schemas.microsoft.com/office/drawing/2014/main" id="{84CF0B4F-7624-3EB1-529B-B9EB574EAA07}"/>
+                <a16:creationId xmlns:a16="http://schemas.microsoft.com/office/drawing/2014/main" id="{84848B5D-2885-4FEB-9ED8-0858442C4955}"/>
               </a:ext>
             </a:extLst>
           </p:cNvPr>
@@ -2699,7 +2699,7 @@
           <p:cNvPr id="7" name="슬라이드 번호 개체 틀 6">
             <a:extLst>
               <a:ext uri="{FF2B5EF4-FFF2-40B4-BE49-F238E27FC236}">
-                <a16:creationId xmlns:a16="http://schemas.microsoft.com/office/drawing/2014/main" id="{EF04AA8C-7F6C-5961-4403-09ECDDDC0F67}"/>
+                <a16:creationId xmlns:a16="http://schemas.microsoft.com/office/drawing/2014/main" id="{4F3695D1-ADE4-5E22-0D7B-F7CB7A585B99}"/>
               </a:ext>
             </a:extLst>
           </p:cNvPr>
@@ -2715,7 +2715,7 @@
           <a:bodyPr/>
           <a:lstStyle/>
           <a:p>
-            <a:fld id="{94ED95DB-09FC-46E5-9512-D71FD83AE3E0}" type="slidenum">
+            <a:fld id="{BC2A9051-646C-4BF0-8281-5B8C4E353592}" type="slidenum">
               <a:rPr lang="ko-KR" altLang="en-US" smtClean="0"/>
               <a:t>‹#›</a:t>
             </a:fld>
@@ -2726,7 +2726,7 @@
     </p:spTree>
     <p:extLst>
       <p:ext uri="{BB962C8B-B14F-4D97-AF65-F5344CB8AC3E}">
-        <p14:creationId xmlns:p14="http://schemas.microsoft.com/office/powerpoint/2010/main" val="3715489728"/>
+        <p14:creationId xmlns:p14="http://schemas.microsoft.com/office/powerpoint/2010/main" val="3784807790"/>
       </p:ext>
     </p:extLst>
   </p:cSld>
@@ -2763,7 +2763,7 @@
           <p:cNvPr id="2" name="제목 개체 틀 1">
             <a:extLst>
               <a:ext uri="{FF2B5EF4-FFF2-40B4-BE49-F238E27FC236}">
-                <a16:creationId xmlns:a16="http://schemas.microsoft.com/office/drawing/2014/main" id="{013C0688-D3C9-1163-F11B-962252E9752F}"/>
+                <a16:creationId xmlns:a16="http://schemas.microsoft.com/office/drawing/2014/main" id="{513B5A0D-387B-1754-C2C3-7EBD9DE08A1E}"/>
               </a:ext>
             </a:extLst>
           </p:cNvPr>
@@ -2801,7 +2801,7 @@
           <p:cNvPr id="3" name="텍스트 개체 틀 2">
             <a:extLst>
               <a:ext uri="{FF2B5EF4-FFF2-40B4-BE49-F238E27FC236}">
-                <a16:creationId xmlns:a16="http://schemas.microsoft.com/office/drawing/2014/main" id="{B3A6C15B-CCD0-3433-8502-B7B1913E1AE6}"/>
+                <a16:creationId xmlns:a16="http://schemas.microsoft.com/office/drawing/2014/main" id="{7D008326-AEFC-86FB-0A1B-D0D39EAD283C}"/>
               </a:ext>
             </a:extLst>
           </p:cNvPr>
@@ -2868,7 +2868,7 @@
           <p:cNvPr id="4" name="날짜 개체 틀 3">
             <a:extLst>
               <a:ext uri="{FF2B5EF4-FFF2-40B4-BE49-F238E27FC236}">
-                <a16:creationId xmlns:a16="http://schemas.microsoft.com/office/drawing/2014/main" id="{ED596D2F-5B98-45B4-8520-477A6B50DECB}"/>
+                <a16:creationId xmlns:a16="http://schemas.microsoft.com/office/drawing/2014/main" id="{699BC6DE-0AB6-53B2-73EE-E610EF27FD2A}"/>
               </a:ext>
             </a:extLst>
           </p:cNvPr>
@@ -2902,7 +2902,7 @@
             </a:lvl1pPr>
           </a:lstStyle>
           <a:p>
-            <a:fld id="{1F6E3260-69AA-4E96-8ED1-46CA3679E129}" type="datetimeFigureOut">
+            <a:fld id="{71EE3968-8CAE-49A6-A295-1DC5695562B1}" type="datetimeFigureOut">
               <a:rPr lang="ko-KR" altLang="en-US" smtClean="0"/>
               <a:t>2026-06-20</a:t>
             </a:fld>
@@ -2915,7 +2915,7 @@
           <p:cNvPr id="5" name="바닥글 개체 틀 4">
             <a:extLst>
               <a:ext uri="{FF2B5EF4-FFF2-40B4-BE49-F238E27FC236}">
-                <a16:creationId xmlns:a16="http://schemas.microsoft.com/office/drawing/2014/main" id="{5278B1D5-878D-F165-4C63-70FA27F662BB}"/>
+                <a16:creationId xmlns:a16="http://schemas.microsoft.com/office/drawing/2014/main" id="{A8292996-3403-89CB-8B6B-68336E23B92C}"/>
               </a:ext>
             </a:extLst>
           </p:cNvPr>
@@ -2958,7 +2958,7 @@
           <p:cNvPr id="6" name="슬라이드 번호 개체 틀 5">
             <a:extLst>
               <a:ext uri="{FF2B5EF4-FFF2-40B4-BE49-F238E27FC236}">
-                <a16:creationId xmlns:a16="http://schemas.microsoft.com/office/drawing/2014/main" id="{88840E0D-BB99-4E96-260E-2ED68507A059}"/>
+                <a16:creationId xmlns:a16="http://schemas.microsoft.com/office/drawing/2014/main" id="{7D6F7EB5-5CCE-3BC2-39AC-1514BCCCD30C}"/>
               </a:ext>
             </a:extLst>
           </p:cNvPr>
@@ -2992,7 +2992,7 @@
             </a:lvl1pPr>
           </a:lstStyle>
           <a:p>
-            <a:fld id="{94ED95DB-09FC-46E5-9512-D71FD83AE3E0}" type="slidenum">
+            <a:fld id="{BC2A9051-646C-4BF0-8281-5B8C4E353592}" type="slidenum">
               <a:rPr lang="ko-KR" altLang="en-US" smtClean="0"/>
               <a:t>‹#›</a:t>
             </a:fld>
@@ -3003,7 +3003,7 @@
     </p:spTree>
     <p:extLst>
       <p:ext uri="{BB962C8B-B14F-4D97-AF65-F5344CB8AC3E}">
-        <p14:creationId xmlns:p14="http://schemas.microsoft.com/office/powerpoint/2010/main" val="1131349957"/>
+        <p14:creationId xmlns:p14="http://schemas.microsoft.com/office/powerpoint/2010/main" val="599158740"/>
       </p:ext>
     </p:extLst>
   </p:cSld>
@@ -3326,7 +3326,7 @@
           <p:cNvPr id="3" name="그래픽 2">
             <a:extLst>
               <a:ext uri="{FF2B5EF4-FFF2-40B4-BE49-F238E27FC236}">
-                <a16:creationId xmlns:a16="http://schemas.microsoft.com/office/drawing/2014/main" id="{4E9E93B6-353D-C492-07DD-40510FA82C07}"/>
+                <a16:creationId xmlns:a16="http://schemas.microsoft.com/office/drawing/2014/main" id="{C01A0353-7670-E892-5D65-1C00EF694B68}"/>
               </a:ext>
             </a:extLst>
           </p:cNvPr>
@@ -3360,7 +3360,7 @@
     </p:spTree>
     <p:extLst>
       <p:ext uri="{BB962C8B-B14F-4D97-AF65-F5344CB8AC3E}">
-        <p14:creationId xmlns:p14="http://schemas.microsoft.com/office/powerpoint/2010/main" val="1949798488"/>
+        <p14:creationId xmlns:p14="http://schemas.microsoft.com/office/powerpoint/2010/main" val="2177703962"/>
       </p:ext>
     </p:extLst>
   </p:cSld>

--- a/docs/assets/infographic-seed-gallery.pptx
+++ b/docs/assets/infographic-seed-gallery.pptx
@@ -129,7 +129,7 @@
           <p:cNvPr id="2" name="제목 1">
             <a:extLst>
               <a:ext uri="{FF2B5EF4-FFF2-40B4-BE49-F238E27FC236}">
-                <a16:creationId xmlns:a16="http://schemas.microsoft.com/office/drawing/2014/main" id="{88700854-2BA1-3E7C-D26C-F5B57C5FCE50}"/>
+                <a16:creationId xmlns:a16="http://schemas.microsoft.com/office/drawing/2014/main" id="{7A7E5972-F5CB-ABC3-4643-7E6DA5019301}"/>
               </a:ext>
             </a:extLst>
           </p:cNvPr>
@@ -166,7 +166,7 @@
           <p:cNvPr id="3" name="부제목 2">
             <a:extLst>
               <a:ext uri="{FF2B5EF4-FFF2-40B4-BE49-F238E27FC236}">
-                <a16:creationId xmlns:a16="http://schemas.microsoft.com/office/drawing/2014/main" id="{61FDC1C6-AA12-5BAE-E1F2-6ED913B53649}"/>
+                <a16:creationId xmlns:a16="http://schemas.microsoft.com/office/drawing/2014/main" id="{ACF169AC-6738-230A-6D61-E777EB2CC0BE}"/>
               </a:ext>
             </a:extLst>
           </p:cNvPr>
@@ -236,7 +236,7 @@
           <p:cNvPr id="4" name="날짜 개체 틀 3">
             <a:extLst>
               <a:ext uri="{FF2B5EF4-FFF2-40B4-BE49-F238E27FC236}">
-                <a16:creationId xmlns:a16="http://schemas.microsoft.com/office/drawing/2014/main" id="{FD2D23CA-DEE5-6ABF-80CF-BA7957DC0389}"/>
+                <a16:creationId xmlns:a16="http://schemas.microsoft.com/office/drawing/2014/main" id="{177565D0-680E-9DDF-F0FE-13CDFD55265B}"/>
               </a:ext>
             </a:extLst>
           </p:cNvPr>
@@ -252,7 +252,7 @@
           <a:bodyPr/>
           <a:lstStyle/>
           <a:p>
-            <a:fld id="{71EE3968-8CAE-49A6-A295-1DC5695562B1}" type="datetimeFigureOut">
+            <a:fld id="{EBFAA884-F683-4FDC-A78F-6371499EC8A3}" type="datetimeFigureOut">
               <a:rPr lang="ko-KR" altLang="en-US" smtClean="0"/>
               <a:t>2026-06-20</a:t>
             </a:fld>
@@ -265,7 +265,7 @@
           <p:cNvPr id="5" name="바닥글 개체 틀 4">
             <a:extLst>
               <a:ext uri="{FF2B5EF4-FFF2-40B4-BE49-F238E27FC236}">
-                <a16:creationId xmlns:a16="http://schemas.microsoft.com/office/drawing/2014/main" id="{D85C2B87-47AB-78F5-6CEF-F2E59152C691}"/>
+                <a16:creationId xmlns:a16="http://schemas.microsoft.com/office/drawing/2014/main" id="{0BA1FF37-5814-CA2E-0E06-7188F1F41C96}"/>
               </a:ext>
             </a:extLst>
           </p:cNvPr>
@@ -290,7 +290,7 @@
           <p:cNvPr id="6" name="슬라이드 번호 개체 틀 5">
             <a:extLst>
               <a:ext uri="{FF2B5EF4-FFF2-40B4-BE49-F238E27FC236}">
-                <a16:creationId xmlns:a16="http://schemas.microsoft.com/office/drawing/2014/main" id="{796D0782-A85F-260A-EF52-0AE3518CF53F}"/>
+                <a16:creationId xmlns:a16="http://schemas.microsoft.com/office/drawing/2014/main" id="{9D8BDEC4-19EE-61B8-4860-44376C453170}"/>
               </a:ext>
             </a:extLst>
           </p:cNvPr>
@@ -306,7 +306,7 @@
           <a:bodyPr/>
           <a:lstStyle/>
           <a:p>
-            <a:fld id="{BC2A9051-646C-4BF0-8281-5B8C4E353592}" type="slidenum">
+            <a:fld id="{00FE27F2-B0EF-4A9C-944A-F494E2E34A9E}" type="slidenum">
               <a:rPr lang="ko-KR" altLang="en-US" smtClean="0"/>
               <a:t>‹#›</a:t>
             </a:fld>
@@ -317,7 +317,7 @@
     </p:spTree>
     <p:extLst>
       <p:ext uri="{BB962C8B-B14F-4D97-AF65-F5344CB8AC3E}">
-        <p14:creationId xmlns:p14="http://schemas.microsoft.com/office/powerpoint/2010/main" val="989850234"/>
+        <p14:creationId xmlns:p14="http://schemas.microsoft.com/office/powerpoint/2010/main" val="4203087446"/>
       </p:ext>
     </p:extLst>
   </p:cSld>
@@ -349,7 +349,7 @@
           <p:cNvPr id="2" name="제목 1">
             <a:extLst>
               <a:ext uri="{FF2B5EF4-FFF2-40B4-BE49-F238E27FC236}">
-                <a16:creationId xmlns:a16="http://schemas.microsoft.com/office/drawing/2014/main" id="{C29C5EA4-0F9C-59AC-C246-6C574997D46C}"/>
+                <a16:creationId xmlns:a16="http://schemas.microsoft.com/office/drawing/2014/main" id="{135A6554-B588-D991-6134-7A6F5A9E7594}"/>
               </a:ext>
             </a:extLst>
           </p:cNvPr>
@@ -377,7 +377,7 @@
           <p:cNvPr id="3" name="세로 텍스트 개체 틀 2">
             <a:extLst>
               <a:ext uri="{FF2B5EF4-FFF2-40B4-BE49-F238E27FC236}">
-                <a16:creationId xmlns:a16="http://schemas.microsoft.com/office/drawing/2014/main" id="{344E388B-63FC-54E0-F02E-64B2A360AC52}"/>
+                <a16:creationId xmlns:a16="http://schemas.microsoft.com/office/drawing/2014/main" id="{2ED6D3E7-3400-8FC0-6B38-70447529FF05}"/>
               </a:ext>
             </a:extLst>
           </p:cNvPr>
@@ -434,7 +434,7 @@
           <p:cNvPr id="4" name="날짜 개체 틀 3">
             <a:extLst>
               <a:ext uri="{FF2B5EF4-FFF2-40B4-BE49-F238E27FC236}">
-                <a16:creationId xmlns:a16="http://schemas.microsoft.com/office/drawing/2014/main" id="{3F9C1465-5C4A-78F9-4521-EE85DAD71FDD}"/>
+                <a16:creationId xmlns:a16="http://schemas.microsoft.com/office/drawing/2014/main" id="{D7528E11-7F68-0BCA-8973-38C3B299839F}"/>
               </a:ext>
             </a:extLst>
           </p:cNvPr>
@@ -450,7 +450,7 @@
           <a:bodyPr/>
           <a:lstStyle/>
           <a:p>
-            <a:fld id="{71EE3968-8CAE-49A6-A295-1DC5695562B1}" type="datetimeFigureOut">
+            <a:fld id="{EBFAA884-F683-4FDC-A78F-6371499EC8A3}" type="datetimeFigureOut">
               <a:rPr lang="ko-KR" altLang="en-US" smtClean="0"/>
               <a:t>2026-06-20</a:t>
             </a:fld>
@@ -463,7 +463,7 @@
           <p:cNvPr id="5" name="바닥글 개체 틀 4">
             <a:extLst>
               <a:ext uri="{FF2B5EF4-FFF2-40B4-BE49-F238E27FC236}">
-                <a16:creationId xmlns:a16="http://schemas.microsoft.com/office/drawing/2014/main" id="{B8A65E72-583F-46A6-ED33-ECB863FAF20C}"/>
+                <a16:creationId xmlns:a16="http://schemas.microsoft.com/office/drawing/2014/main" id="{572BC3F9-80F8-2169-6454-5CBE385CEBEB}"/>
               </a:ext>
             </a:extLst>
           </p:cNvPr>
@@ -488,7 +488,7 @@
           <p:cNvPr id="6" name="슬라이드 번호 개체 틀 5">
             <a:extLst>
               <a:ext uri="{FF2B5EF4-FFF2-40B4-BE49-F238E27FC236}">
-                <a16:creationId xmlns:a16="http://schemas.microsoft.com/office/drawing/2014/main" id="{CF95903F-3A47-1A12-5C98-1863CBAC8360}"/>
+                <a16:creationId xmlns:a16="http://schemas.microsoft.com/office/drawing/2014/main" id="{D78A2186-E962-DE5D-144C-DE81D7F8B61E}"/>
               </a:ext>
             </a:extLst>
           </p:cNvPr>
@@ -504,7 +504,7 @@
           <a:bodyPr/>
           <a:lstStyle/>
           <a:p>
-            <a:fld id="{BC2A9051-646C-4BF0-8281-5B8C4E353592}" type="slidenum">
+            <a:fld id="{00FE27F2-B0EF-4A9C-944A-F494E2E34A9E}" type="slidenum">
               <a:rPr lang="ko-KR" altLang="en-US" smtClean="0"/>
               <a:t>‹#›</a:t>
             </a:fld>
@@ -515,7 +515,7 @@
     </p:spTree>
     <p:extLst>
       <p:ext uri="{BB962C8B-B14F-4D97-AF65-F5344CB8AC3E}">
-        <p14:creationId xmlns:p14="http://schemas.microsoft.com/office/powerpoint/2010/main" val="3171643797"/>
+        <p14:creationId xmlns:p14="http://schemas.microsoft.com/office/powerpoint/2010/main" val="2683670459"/>
       </p:ext>
     </p:extLst>
   </p:cSld>
@@ -547,7 +547,7 @@
           <p:cNvPr id="2" name="세로 제목 1">
             <a:extLst>
               <a:ext uri="{FF2B5EF4-FFF2-40B4-BE49-F238E27FC236}">
-                <a16:creationId xmlns:a16="http://schemas.microsoft.com/office/drawing/2014/main" id="{5A9046BD-53E7-67EE-DBD4-D78FD58CEC3B}"/>
+                <a16:creationId xmlns:a16="http://schemas.microsoft.com/office/drawing/2014/main" id="{7FBD50DD-518C-A387-757E-2AF73B69F249}"/>
               </a:ext>
             </a:extLst>
           </p:cNvPr>
@@ -580,7 +580,7 @@
           <p:cNvPr id="3" name="세로 텍스트 개체 틀 2">
             <a:extLst>
               <a:ext uri="{FF2B5EF4-FFF2-40B4-BE49-F238E27FC236}">
-                <a16:creationId xmlns:a16="http://schemas.microsoft.com/office/drawing/2014/main" id="{0D65E19F-0A17-A9EE-7DE8-18BE672FF018}"/>
+                <a16:creationId xmlns:a16="http://schemas.microsoft.com/office/drawing/2014/main" id="{C39A573A-A20E-11E3-43D6-1C13A5381CF2}"/>
               </a:ext>
             </a:extLst>
           </p:cNvPr>
@@ -642,7 +642,7 @@
           <p:cNvPr id="4" name="날짜 개체 틀 3">
             <a:extLst>
               <a:ext uri="{FF2B5EF4-FFF2-40B4-BE49-F238E27FC236}">
-                <a16:creationId xmlns:a16="http://schemas.microsoft.com/office/drawing/2014/main" id="{18B04A6D-20D6-E021-74C4-498799FEB0F0}"/>
+                <a16:creationId xmlns:a16="http://schemas.microsoft.com/office/drawing/2014/main" id="{8B3133BD-FA77-0373-C18D-B8C0913851B5}"/>
               </a:ext>
             </a:extLst>
           </p:cNvPr>
@@ -658,7 +658,7 @@
           <a:bodyPr/>
           <a:lstStyle/>
           <a:p>
-            <a:fld id="{71EE3968-8CAE-49A6-A295-1DC5695562B1}" type="datetimeFigureOut">
+            <a:fld id="{EBFAA884-F683-4FDC-A78F-6371499EC8A3}" type="datetimeFigureOut">
               <a:rPr lang="ko-KR" altLang="en-US" smtClean="0"/>
               <a:t>2026-06-20</a:t>
             </a:fld>
@@ -671,7 +671,7 @@
           <p:cNvPr id="5" name="바닥글 개체 틀 4">
             <a:extLst>
               <a:ext uri="{FF2B5EF4-FFF2-40B4-BE49-F238E27FC236}">
-                <a16:creationId xmlns:a16="http://schemas.microsoft.com/office/drawing/2014/main" id="{9F0CB359-36A7-09A4-4AF0-3882E60374C6}"/>
+                <a16:creationId xmlns:a16="http://schemas.microsoft.com/office/drawing/2014/main" id="{4797A2AB-DB93-7DA0-B66D-D029E0F68C4D}"/>
               </a:ext>
             </a:extLst>
           </p:cNvPr>
@@ -696,7 +696,7 @@
           <p:cNvPr id="6" name="슬라이드 번호 개체 틀 5">
             <a:extLst>
               <a:ext uri="{FF2B5EF4-FFF2-40B4-BE49-F238E27FC236}">
-                <a16:creationId xmlns:a16="http://schemas.microsoft.com/office/drawing/2014/main" id="{4A5E7B58-61A8-D58C-F656-44517D86B3A6}"/>
+                <a16:creationId xmlns:a16="http://schemas.microsoft.com/office/drawing/2014/main" id="{8054CCA8-101A-18D1-70F4-1FB1C291FAB1}"/>
               </a:ext>
             </a:extLst>
           </p:cNvPr>
@@ -712,7 +712,7 @@
           <a:bodyPr/>
           <a:lstStyle/>
           <a:p>
-            <a:fld id="{BC2A9051-646C-4BF0-8281-5B8C4E353592}" type="slidenum">
+            <a:fld id="{00FE27F2-B0EF-4A9C-944A-F494E2E34A9E}" type="slidenum">
               <a:rPr lang="ko-KR" altLang="en-US" smtClean="0"/>
               <a:t>‹#›</a:t>
             </a:fld>
@@ -723,7 +723,7 @@
     </p:spTree>
     <p:extLst>
       <p:ext uri="{BB962C8B-B14F-4D97-AF65-F5344CB8AC3E}">
-        <p14:creationId xmlns:p14="http://schemas.microsoft.com/office/powerpoint/2010/main" val="3796289025"/>
+        <p14:creationId xmlns:p14="http://schemas.microsoft.com/office/powerpoint/2010/main" val="3243605196"/>
       </p:ext>
     </p:extLst>
   </p:cSld>
@@ -755,7 +755,7 @@
           <p:cNvPr id="2" name="제목 1">
             <a:extLst>
               <a:ext uri="{FF2B5EF4-FFF2-40B4-BE49-F238E27FC236}">
-                <a16:creationId xmlns:a16="http://schemas.microsoft.com/office/drawing/2014/main" id="{85A64571-241E-3F3A-C411-ABC21D71981A}"/>
+                <a16:creationId xmlns:a16="http://schemas.microsoft.com/office/drawing/2014/main" id="{FE6DAFEC-E7D3-8593-4C11-39F2BFAB9ED1}"/>
               </a:ext>
             </a:extLst>
           </p:cNvPr>
@@ -783,7 +783,7 @@
           <p:cNvPr id="3" name="내용 개체 틀 2">
             <a:extLst>
               <a:ext uri="{FF2B5EF4-FFF2-40B4-BE49-F238E27FC236}">
-                <a16:creationId xmlns:a16="http://schemas.microsoft.com/office/drawing/2014/main" id="{E6F534A1-79A6-089E-34E5-E27F73143D50}"/>
+                <a16:creationId xmlns:a16="http://schemas.microsoft.com/office/drawing/2014/main" id="{0265939C-320E-CB78-D982-C1A76BF1E289}"/>
               </a:ext>
             </a:extLst>
           </p:cNvPr>
@@ -840,7 +840,7 @@
           <p:cNvPr id="4" name="날짜 개체 틀 3">
             <a:extLst>
               <a:ext uri="{FF2B5EF4-FFF2-40B4-BE49-F238E27FC236}">
-                <a16:creationId xmlns:a16="http://schemas.microsoft.com/office/drawing/2014/main" id="{9D150F5B-6EDC-909C-345E-577EF7A587C6}"/>
+                <a16:creationId xmlns:a16="http://schemas.microsoft.com/office/drawing/2014/main" id="{E60E14C6-5239-5043-8B1E-63B8B5444312}"/>
               </a:ext>
             </a:extLst>
           </p:cNvPr>
@@ -856,7 +856,7 @@
           <a:bodyPr/>
           <a:lstStyle/>
           <a:p>
-            <a:fld id="{71EE3968-8CAE-49A6-A295-1DC5695562B1}" type="datetimeFigureOut">
+            <a:fld id="{EBFAA884-F683-4FDC-A78F-6371499EC8A3}" type="datetimeFigureOut">
               <a:rPr lang="ko-KR" altLang="en-US" smtClean="0"/>
               <a:t>2026-06-20</a:t>
             </a:fld>
@@ -869,7 +869,7 @@
           <p:cNvPr id="5" name="바닥글 개체 틀 4">
             <a:extLst>
               <a:ext uri="{FF2B5EF4-FFF2-40B4-BE49-F238E27FC236}">
-                <a16:creationId xmlns:a16="http://schemas.microsoft.com/office/drawing/2014/main" id="{D4FD8A20-1E26-341E-50B6-E4EC8A9F6716}"/>
+                <a16:creationId xmlns:a16="http://schemas.microsoft.com/office/drawing/2014/main" id="{0C8849CA-D42B-3965-A481-53D470309BE2}"/>
               </a:ext>
             </a:extLst>
           </p:cNvPr>
@@ -894,7 +894,7 @@
           <p:cNvPr id="6" name="슬라이드 번호 개체 틀 5">
             <a:extLst>
               <a:ext uri="{FF2B5EF4-FFF2-40B4-BE49-F238E27FC236}">
-                <a16:creationId xmlns:a16="http://schemas.microsoft.com/office/drawing/2014/main" id="{819C87F3-CF84-67E1-1F51-121806016E0D}"/>
+                <a16:creationId xmlns:a16="http://schemas.microsoft.com/office/drawing/2014/main" id="{DBD1A5CE-E83A-1C32-AC96-CB263A86D0B8}"/>
               </a:ext>
             </a:extLst>
           </p:cNvPr>
@@ -910,7 +910,7 @@
           <a:bodyPr/>
           <a:lstStyle/>
           <a:p>
-            <a:fld id="{BC2A9051-646C-4BF0-8281-5B8C4E353592}" type="slidenum">
+            <a:fld id="{00FE27F2-B0EF-4A9C-944A-F494E2E34A9E}" type="slidenum">
               <a:rPr lang="ko-KR" altLang="en-US" smtClean="0"/>
               <a:t>‹#›</a:t>
             </a:fld>
@@ -921,7 +921,7 @@
     </p:spTree>
     <p:extLst>
       <p:ext uri="{BB962C8B-B14F-4D97-AF65-F5344CB8AC3E}">
-        <p14:creationId xmlns:p14="http://schemas.microsoft.com/office/powerpoint/2010/main" val="1664920063"/>
+        <p14:creationId xmlns:p14="http://schemas.microsoft.com/office/powerpoint/2010/main" val="2232637456"/>
       </p:ext>
     </p:extLst>
   </p:cSld>
@@ -953,7 +953,7 @@
           <p:cNvPr id="2" name="제목 1">
             <a:extLst>
               <a:ext uri="{FF2B5EF4-FFF2-40B4-BE49-F238E27FC236}">
-                <a16:creationId xmlns:a16="http://schemas.microsoft.com/office/drawing/2014/main" id="{AA609FE3-4841-972A-672B-6571A3157B78}"/>
+                <a16:creationId xmlns:a16="http://schemas.microsoft.com/office/drawing/2014/main" id="{5156B10F-1AEA-B101-9733-CC8A5A3C608B}"/>
               </a:ext>
             </a:extLst>
           </p:cNvPr>
@@ -990,7 +990,7 @@
           <p:cNvPr id="3" name="텍스트 개체 틀 2">
             <a:extLst>
               <a:ext uri="{FF2B5EF4-FFF2-40B4-BE49-F238E27FC236}">
-                <a16:creationId xmlns:a16="http://schemas.microsoft.com/office/drawing/2014/main" id="{759DA05C-4A24-7C20-7003-1D64C562A590}"/>
+                <a16:creationId xmlns:a16="http://schemas.microsoft.com/office/drawing/2014/main" id="{C4288E2E-012C-0C4E-111F-F5BDE377E7C5}"/>
               </a:ext>
             </a:extLst>
           </p:cNvPr>
@@ -1115,7 +1115,7 @@
           <p:cNvPr id="4" name="날짜 개체 틀 3">
             <a:extLst>
               <a:ext uri="{FF2B5EF4-FFF2-40B4-BE49-F238E27FC236}">
-                <a16:creationId xmlns:a16="http://schemas.microsoft.com/office/drawing/2014/main" id="{93DFFD59-92DA-33B1-027F-5BFC8EAA91BF}"/>
+                <a16:creationId xmlns:a16="http://schemas.microsoft.com/office/drawing/2014/main" id="{C9B52DA4-0288-1A4F-C66B-A86E0C2C66FB}"/>
               </a:ext>
             </a:extLst>
           </p:cNvPr>
@@ -1131,7 +1131,7 @@
           <a:bodyPr/>
           <a:lstStyle/>
           <a:p>
-            <a:fld id="{71EE3968-8CAE-49A6-A295-1DC5695562B1}" type="datetimeFigureOut">
+            <a:fld id="{EBFAA884-F683-4FDC-A78F-6371499EC8A3}" type="datetimeFigureOut">
               <a:rPr lang="ko-KR" altLang="en-US" smtClean="0"/>
               <a:t>2026-06-20</a:t>
             </a:fld>
@@ -1144,7 +1144,7 @@
           <p:cNvPr id="5" name="바닥글 개체 틀 4">
             <a:extLst>
               <a:ext uri="{FF2B5EF4-FFF2-40B4-BE49-F238E27FC236}">
-                <a16:creationId xmlns:a16="http://schemas.microsoft.com/office/drawing/2014/main" id="{145EAF61-C452-5384-9397-5BB0D013EC51}"/>
+                <a16:creationId xmlns:a16="http://schemas.microsoft.com/office/drawing/2014/main" id="{75950124-BC2D-0D95-E6AE-3B623A13DFD8}"/>
               </a:ext>
             </a:extLst>
           </p:cNvPr>
@@ -1169,7 +1169,7 @@
           <p:cNvPr id="6" name="슬라이드 번호 개체 틀 5">
             <a:extLst>
               <a:ext uri="{FF2B5EF4-FFF2-40B4-BE49-F238E27FC236}">
-                <a16:creationId xmlns:a16="http://schemas.microsoft.com/office/drawing/2014/main" id="{B15C5F32-9D42-98F4-60B9-74D8193F8226}"/>
+                <a16:creationId xmlns:a16="http://schemas.microsoft.com/office/drawing/2014/main" id="{1BE309DA-4DDD-4BB9-EA42-2D008C3F8DD9}"/>
               </a:ext>
             </a:extLst>
           </p:cNvPr>
@@ -1185,7 +1185,7 @@
           <a:bodyPr/>
           <a:lstStyle/>
           <a:p>
-            <a:fld id="{BC2A9051-646C-4BF0-8281-5B8C4E353592}" type="slidenum">
+            <a:fld id="{00FE27F2-B0EF-4A9C-944A-F494E2E34A9E}" type="slidenum">
               <a:rPr lang="ko-KR" altLang="en-US" smtClean="0"/>
               <a:t>‹#›</a:t>
             </a:fld>
@@ -1196,7 +1196,7 @@
     </p:spTree>
     <p:extLst>
       <p:ext uri="{BB962C8B-B14F-4D97-AF65-F5344CB8AC3E}">
-        <p14:creationId xmlns:p14="http://schemas.microsoft.com/office/powerpoint/2010/main" val="1826611555"/>
+        <p14:creationId xmlns:p14="http://schemas.microsoft.com/office/powerpoint/2010/main" val="2186688002"/>
       </p:ext>
     </p:extLst>
   </p:cSld>
@@ -1228,7 +1228,7 @@
           <p:cNvPr id="2" name="제목 1">
             <a:extLst>
               <a:ext uri="{FF2B5EF4-FFF2-40B4-BE49-F238E27FC236}">
-                <a16:creationId xmlns:a16="http://schemas.microsoft.com/office/drawing/2014/main" id="{CC5C1319-E17D-C500-4DF4-6C4A7400AE6A}"/>
+                <a16:creationId xmlns:a16="http://schemas.microsoft.com/office/drawing/2014/main" id="{CF0E5EB4-06AF-8AC9-54DA-3D95FBDA521E}"/>
               </a:ext>
             </a:extLst>
           </p:cNvPr>
@@ -1256,7 +1256,7 @@
           <p:cNvPr id="3" name="내용 개체 틀 2">
             <a:extLst>
               <a:ext uri="{FF2B5EF4-FFF2-40B4-BE49-F238E27FC236}">
-                <a16:creationId xmlns:a16="http://schemas.microsoft.com/office/drawing/2014/main" id="{EE976A81-EC1D-D4C5-4B79-C73EFA746F7C}"/>
+                <a16:creationId xmlns:a16="http://schemas.microsoft.com/office/drawing/2014/main" id="{85F0C1B4-502C-E00B-62F5-5125EF9BC791}"/>
               </a:ext>
             </a:extLst>
           </p:cNvPr>
@@ -1318,7 +1318,7 @@
           <p:cNvPr id="4" name="내용 개체 틀 3">
             <a:extLst>
               <a:ext uri="{FF2B5EF4-FFF2-40B4-BE49-F238E27FC236}">
-                <a16:creationId xmlns:a16="http://schemas.microsoft.com/office/drawing/2014/main" id="{642B6879-1607-C0A4-58EB-8C1B3C893341}"/>
+                <a16:creationId xmlns:a16="http://schemas.microsoft.com/office/drawing/2014/main" id="{29E2CA50-68B5-9581-4B74-EE05BB7D74EC}"/>
               </a:ext>
             </a:extLst>
           </p:cNvPr>
@@ -1380,7 +1380,7 @@
           <p:cNvPr id="5" name="날짜 개체 틀 4">
             <a:extLst>
               <a:ext uri="{FF2B5EF4-FFF2-40B4-BE49-F238E27FC236}">
-                <a16:creationId xmlns:a16="http://schemas.microsoft.com/office/drawing/2014/main" id="{7FBD5CAC-0D5B-53FB-5A07-FD904C5438FA}"/>
+                <a16:creationId xmlns:a16="http://schemas.microsoft.com/office/drawing/2014/main" id="{4C4226C5-FBAF-DA45-F0C0-F53B3D8D2716}"/>
               </a:ext>
             </a:extLst>
           </p:cNvPr>
@@ -1396,7 +1396,7 @@
           <a:bodyPr/>
           <a:lstStyle/>
           <a:p>
-            <a:fld id="{71EE3968-8CAE-49A6-A295-1DC5695562B1}" type="datetimeFigureOut">
+            <a:fld id="{EBFAA884-F683-4FDC-A78F-6371499EC8A3}" type="datetimeFigureOut">
               <a:rPr lang="ko-KR" altLang="en-US" smtClean="0"/>
               <a:t>2026-06-20</a:t>
             </a:fld>
@@ -1409,7 +1409,7 @@
           <p:cNvPr id="6" name="바닥글 개체 틀 5">
             <a:extLst>
               <a:ext uri="{FF2B5EF4-FFF2-40B4-BE49-F238E27FC236}">
-                <a16:creationId xmlns:a16="http://schemas.microsoft.com/office/drawing/2014/main" id="{228B17CD-C0DB-8F8C-323A-DE0056FE6058}"/>
+                <a16:creationId xmlns:a16="http://schemas.microsoft.com/office/drawing/2014/main" id="{04B2E0EA-07C7-E4D8-25FC-FA50C6DF06A3}"/>
               </a:ext>
             </a:extLst>
           </p:cNvPr>
@@ -1434,7 +1434,7 @@
           <p:cNvPr id="7" name="슬라이드 번호 개체 틀 6">
             <a:extLst>
               <a:ext uri="{FF2B5EF4-FFF2-40B4-BE49-F238E27FC236}">
-                <a16:creationId xmlns:a16="http://schemas.microsoft.com/office/drawing/2014/main" id="{BEF026AC-9D73-E157-6E15-32C5A7C4C262}"/>
+                <a16:creationId xmlns:a16="http://schemas.microsoft.com/office/drawing/2014/main" id="{D6D745FC-5087-DDC4-5F0E-AA680FAEE08E}"/>
               </a:ext>
             </a:extLst>
           </p:cNvPr>
@@ -1450,7 +1450,7 @@
           <a:bodyPr/>
           <a:lstStyle/>
           <a:p>
-            <a:fld id="{BC2A9051-646C-4BF0-8281-5B8C4E353592}" type="slidenum">
+            <a:fld id="{00FE27F2-B0EF-4A9C-944A-F494E2E34A9E}" type="slidenum">
               <a:rPr lang="ko-KR" altLang="en-US" smtClean="0"/>
               <a:t>‹#›</a:t>
             </a:fld>
@@ -1461,7 +1461,7 @@
     </p:spTree>
     <p:extLst>
       <p:ext uri="{BB962C8B-B14F-4D97-AF65-F5344CB8AC3E}">
-        <p14:creationId xmlns:p14="http://schemas.microsoft.com/office/powerpoint/2010/main" val="1018173594"/>
+        <p14:creationId xmlns:p14="http://schemas.microsoft.com/office/powerpoint/2010/main" val="3725962228"/>
       </p:ext>
     </p:extLst>
   </p:cSld>
@@ -1493,7 +1493,7 @@
           <p:cNvPr id="2" name="제목 1">
             <a:extLst>
               <a:ext uri="{FF2B5EF4-FFF2-40B4-BE49-F238E27FC236}">
-                <a16:creationId xmlns:a16="http://schemas.microsoft.com/office/drawing/2014/main" id="{A976C9D1-C69E-3C83-B01D-66260D34AE64}"/>
+                <a16:creationId xmlns:a16="http://schemas.microsoft.com/office/drawing/2014/main" id="{F4340D06-D935-F878-D101-205537A005E7}"/>
               </a:ext>
             </a:extLst>
           </p:cNvPr>
@@ -1526,7 +1526,7 @@
           <p:cNvPr id="3" name="텍스트 개체 틀 2">
             <a:extLst>
               <a:ext uri="{FF2B5EF4-FFF2-40B4-BE49-F238E27FC236}">
-                <a16:creationId xmlns:a16="http://schemas.microsoft.com/office/drawing/2014/main" id="{7EA82400-4024-3256-186E-AB57CFEED019}"/>
+                <a16:creationId xmlns:a16="http://schemas.microsoft.com/office/drawing/2014/main" id="{9CBC1762-DB4A-D3DE-1757-B4BDC72AE681}"/>
               </a:ext>
             </a:extLst>
           </p:cNvPr>
@@ -1597,7 +1597,7 @@
           <p:cNvPr id="4" name="내용 개체 틀 3">
             <a:extLst>
               <a:ext uri="{FF2B5EF4-FFF2-40B4-BE49-F238E27FC236}">
-                <a16:creationId xmlns:a16="http://schemas.microsoft.com/office/drawing/2014/main" id="{6612C0BF-8778-5E2C-E72C-BAD04ADFBF0F}"/>
+                <a16:creationId xmlns:a16="http://schemas.microsoft.com/office/drawing/2014/main" id="{3885B915-BDE9-F576-5ABE-F9DA394352E1}"/>
               </a:ext>
             </a:extLst>
           </p:cNvPr>
@@ -1659,7 +1659,7 @@
           <p:cNvPr id="5" name="텍스트 개체 틀 4">
             <a:extLst>
               <a:ext uri="{FF2B5EF4-FFF2-40B4-BE49-F238E27FC236}">
-                <a16:creationId xmlns:a16="http://schemas.microsoft.com/office/drawing/2014/main" id="{7BF85B3F-6F20-D23B-278B-5C7E1A730435}"/>
+                <a16:creationId xmlns:a16="http://schemas.microsoft.com/office/drawing/2014/main" id="{0316FDC3-AB8E-258F-B4F7-C10BF0785ABF}"/>
               </a:ext>
             </a:extLst>
           </p:cNvPr>
@@ -1730,7 +1730,7 @@
           <p:cNvPr id="6" name="내용 개체 틀 5">
             <a:extLst>
               <a:ext uri="{FF2B5EF4-FFF2-40B4-BE49-F238E27FC236}">
-                <a16:creationId xmlns:a16="http://schemas.microsoft.com/office/drawing/2014/main" id="{C6391630-2E47-3F42-B2A1-431782DFBD56}"/>
+                <a16:creationId xmlns:a16="http://schemas.microsoft.com/office/drawing/2014/main" id="{45E85757-700D-0532-A888-95177B4DB4C8}"/>
               </a:ext>
             </a:extLst>
           </p:cNvPr>
@@ -1792,7 +1792,7 @@
           <p:cNvPr id="7" name="날짜 개체 틀 6">
             <a:extLst>
               <a:ext uri="{FF2B5EF4-FFF2-40B4-BE49-F238E27FC236}">
-                <a16:creationId xmlns:a16="http://schemas.microsoft.com/office/drawing/2014/main" id="{39C19FC6-3423-7F94-D9D9-427BCF26C9BC}"/>
+                <a16:creationId xmlns:a16="http://schemas.microsoft.com/office/drawing/2014/main" id="{FE7ABA4D-5B61-F427-C8A3-51F28C74A3B4}"/>
               </a:ext>
             </a:extLst>
           </p:cNvPr>
@@ -1808,7 +1808,7 @@
           <a:bodyPr/>
           <a:lstStyle/>
           <a:p>
-            <a:fld id="{71EE3968-8CAE-49A6-A295-1DC5695562B1}" type="datetimeFigureOut">
+            <a:fld id="{EBFAA884-F683-4FDC-A78F-6371499EC8A3}" type="datetimeFigureOut">
               <a:rPr lang="ko-KR" altLang="en-US" smtClean="0"/>
               <a:t>2026-06-20</a:t>
             </a:fld>
@@ -1821,7 +1821,7 @@
           <p:cNvPr id="8" name="바닥글 개체 틀 7">
             <a:extLst>
               <a:ext uri="{FF2B5EF4-FFF2-40B4-BE49-F238E27FC236}">
-                <a16:creationId xmlns:a16="http://schemas.microsoft.com/office/drawing/2014/main" id="{6717B556-46A6-B7DF-FFE0-8F33605C1B2C}"/>
+                <a16:creationId xmlns:a16="http://schemas.microsoft.com/office/drawing/2014/main" id="{D0EBBC42-5C81-2178-51D2-366DFFABBB1F}"/>
               </a:ext>
             </a:extLst>
           </p:cNvPr>
@@ -1846,7 +1846,7 @@
           <p:cNvPr id="9" name="슬라이드 번호 개체 틀 8">
             <a:extLst>
               <a:ext uri="{FF2B5EF4-FFF2-40B4-BE49-F238E27FC236}">
-                <a16:creationId xmlns:a16="http://schemas.microsoft.com/office/drawing/2014/main" id="{FDC96CD1-96C5-34AF-8B8B-7677B139C737}"/>
+                <a16:creationId xmlns:a16="http://schemas.microsoft.com/office/drawing/2014/main" id="{799B7078-C0C8-61EB-C346-7498E1A711E7}"/>
               </a:ext>
             </a:extLst>
           </p:cNvPr>
@@ -1862,7 +1862,7 @@
           <a:bodyPr/>
           <a:lstStyle/>
           <a:p>
-            <a:fld id="{BC2A9051-646C-4BF0-8281-5B8C4E353592}" type="slidenum">
+            <a:fld id="{00FE27F2-B0EF-4A9C-944A-F494E2E34A9E}" type="slidenum">
               <a:rPr lang="ko-KR" altLang="en-US" smtClean="0"/>
               <a:t>‹#›</a:t>
             </a:fld>
@@ -1873,7 +1873,7 @@
     </p:spTree>
     <p:extLst>
       <p:ext uri="{BB962C8B-B14F-4D97-AF65-F5344CB8AC3E}">
-        <p14:creationId xmlns:p14="http://schemas.microsoft.com/office/powerpoint/2010/main" val="2990292803"/>
+        <p14:creationId xmlns:p14="http://schemas.microsoft.com/office/powerpoint/2010/main" val="103943084"/>
       </p:ext>
     </p:extLst>
   </p:cSld>
@@ -1905,7 +1905,7 @@
           <p:cNvPr id="2" name="제목 1">
             <a:extLst>
               <a:ext uri="{FF2B5EF4-FFF2-40B4-BE49-F238E27FC236}">
-                <a16:creationId xmlns:a16="http://schemas.microsoft.com/office/drawing/2014/main" id="{B2BC93EA-137D-97F2-66AC-8B21ECD42F5E}"/>
+                <a16:creationId xmlns:a16="http://schemas.microsoft.com/office/drawing/2014/main" id="{D956346C-2C19-AFE2-B285-D4A1890093A1}"/>
               </a:ext>
             </a:extLst>
           </p:cNvPr>
@@ -1933,7 +1933,7 @@
           <p:cNvPr id="3" name="날짜 개체 틀 2">
             <a:extLst>
               <a:ext uri="{FF2B5EF4-FFF2-40B4-BE49-F238E27FC236}">
-                <a16:creationId xmlns:a16="http://schemas.microsoft.com/office/drawing/2014/main" id="{186AE2BD-F7C9-25D9-C114-9EF724E760FC}"/>
+                <a16:creationId xmlns:a16="http://schemas.microsoft.com/office/drawing/2014/main" id="{71B80DFB-7974-BC39-1E41-EB902421E292}"/>
               </a:ext>
             </a:extLst>
           </p:cNvPr>
@@ -1949,7 +1949,7 @@
           <a:bodyPr/>
           <a:lstStyle/>
           <a:p>
-            <a:fld id="{71EE3968-8CAE-49A6-A295-1DC5695562B1}" type="datetimeFigureOut">
+            <a:fld id="{EBFAA884-F683-4FDC-A78F-6371499EC8A3}" type="datetimeFigureOut">
               <a:rPr lang="ko-KR" altLang="en-US" smtClean="0"/>
               <a:t>2026-06-20</a:t>
             </a:fld>
@@ -1962,7 +1962,7 @@
           <p:cNvPr id="4" name="바닥글 개체 틀 3">
             <a:extLst>
               <a:ext uri="{FF2B5EF4-FFF2-40B4-BE49-F238E27FC236}">
-                <a16:creationId xmlns:a16="http://schemas.microsoft.com/office/drawing/2014/main" id="{0188E0CE-D332-69B4-8D18-B3AD106682E2}"/>
+                <a16:creationId xmlns:a16="http://schemas.microsoft.com/office/drawing/2014/main" id="{026BCDF7-21A8-FABB-A59E-66C5C878D921}"/>
               </a:ext>
             </a:extLst>
           </p:cNvPr>
@@ -1987,7 +1987,7 @@
           <p:cNvPr id="5" name="슬라이드 번호 개체 틀 4">
             <a:extLst>
               <a:ext uri="{FF2B5EF4-FFF2-40B4-BE49-F238E27FC236}">
-                <a16:creationId xmlns:a16="http://schemas.microsoft.com/office/drawing/2014/main" id="{68884DCA-B192-C500-0800-C61407A05D44}"/>
+                <a16:creationId xmlns:a16="http://schemas.microsoft.com/office/drawing/2014/main" id="{95CC68A1-33D9-0E0B-9796-29EFF5DE53AD}"/>
               </a:ext>
             </a:extLst>
           </p:cNvPr>
@@ -2003,7 +2003,7 @@
           <a:bodyPr/>
           <a:lstStyle/>
           <a:p>
-            <a:fld id="{BC2A9051-646C-4BF0-8281-5B8C4E353592}" type="slidenum">
+            <a:fld id="{00FE27F2-B0EF-4A9C-944A-F494E2E34A9E}" type="slidenum">
               <a:rPr lang="ko-KR" altLang="en-US" smtClean="0"/>
               <a:t>‹#›</a:t>
             </a:fld>
@@ -2014,7 +2014,7 @@
     </p:spTree>
     <p:extLst>
       <p:ext uri="{BB962C8B-B14F-4D97-AF65-F5344CB8AC3E}">
-        <p14:creationId xmlns:p14="http://schemas.microsoft.com/office/powerpoint/2010/main" val="2039871504"/>
+        <p14:creationId xmlns:p14="http://schemas.microsoft.com/office/powerpoint/2010/main" val="858489572"/>
       </p:ext>
     </p:extLst>
   </p:cSld>
@@ -2046,7 +2046,7 @@
           <p:cNvPr id="2" name="날짜 개체 틀 1">
             <a:extLst>
               <a:ext uri="{FF2B5EF4-FFF2-40B4-BE49-F238E27FC236}">
-                <a16:creationId xmlns:a16="http://schemas.microsoft.com/office/drawing/2014/main" id="{AAF20206-331E-B682-F214-2F26C2682550}"/>
+                <a16:creationId xmlns:a16="http://schemas.microsoft.com/office/drawing/2014/main" id="{342DA1A6-FD3F-E01E-AB44-7B7F525A322D}"/>
               </a:ext>
             </a:extLst>
           </p:cNvPr>
@@ -2062,7 +2062,7 @@
           <a:bodyPr/>
           <a:lstStyle/>
           <a:p>
-            <a:fld id="{71EE3968-8CAE-49A6-A295-1DC5695562B1}" type="datetimeFigureOut">
+            <a:fld id="{EBFAA884-F683-4FDC-A78F-6371499EC8A3}" type="datetimeFigureOut">
               <a:rPr lang="ko-KR" altLang="en-US" smtClean="0"/>
               <a:t>2026-06-20</a:t>
             </a:fld>
@@ -2075,7 +2075,7 @@
           <p:cNvPr id="3" name="바닥글 개체 틀 2">
             <a:extLst>
               <a:ext uri="{FF2B5EF4-FFF2-40B4-BE49-F238E27FC236}">
-                <a16:creationId xmlns:a16="http://schemas.microsoft.com/office/drawing/2014/main" id="{51787386-3813-F055-BFA8-273F99BBA356}"/>
+                <a16:creationId xmlns:a16="http://schemas.microsoft.com/office/drawing/2014/main" id="{58293C28-E2E8-6DE1-054D-5FE01E191F28}"/>
               </a:ext>
             </a:extLst>
           </p:cNvPr>
@@ -2100,7 +2100,7 @@
           <p:cNvPr id="4" name="슬라이드 번호 개체 틀 3">
             <a:extLst>
               <a:ext uri="{FF2B5EF4-FFF2-40B4-BE49-F238E27FC236}">
-                <a16:creationId xmlns:a16="http://schemas.microsoft.com/office/drawing/2014/main" id="{F4BCB5EA-2E6F-1663-8B64-5AE6CD4BE8E6}"/>
+                <a16:creationId xmlns:a16="http://schemas.microsoft.com/office/drawing/2014/main" id="{5349D643-1441-9797-4400-74A69FB071C0}"/>
               </a:ext>
             </a:extLst>
           </p:cNvPr>
@@ -2116,7 +2116,7 @@
           <a:bodyPr/>
           <a:lstStyle/>
           <a:p>
-            <a:fld id="{BC2A9051-646C-4BF0-8281-5B8C4E353592}" type="slidenum">
+            <a:fld id="{00FE27F2-B0EF-4A9C-944A-F494E2E34A9E}" type="slidenum">
               <a:rPr lang="ko-KR" altLang="en-US" smtClean="0"/>
               <a:t>‹#›</a:t>
             </a:fld>
@@ -2127,7 +2127,7 @@
     </p:spTree>
     <p:extLst>
       <p:ext uri="{BB962C8B-B14F-4D97-AF65-F5344CB8AC3E}">
-        <p14:creationId xmlns:p14="http://schemas.microsoft.com/office/powerpoint/2010/main" val="3714447820"/>
+        <p14:creationId xmlns:p14="http://schemas.microsoft.com/office/powerpoint/2010/main" val="1354854151"/>
       </p:ext>
     </p:extLst>
   </p:cSld>
@@ -2159,7 +2159,7 @@
           <p:cNvPr id="2" name="제목 1">
             <a:extLst>
               <a:ext uri="{FF2B5EF4-FFF2-40B4-BE49-F238E27FC236}">
-                <a16:creationId xmlns:a16="http://schemas.microsoft.com/office/drawing/2014/main" id="{1156BE50-06AA-8B18-B04E-22842ABAA789}"/>
+                <a16:creationId xmlns:a16="http://schemas.microsoft.com/office/drawing/2014/main" id="{480D699B-6EC5-0617-4BEE-587961C778EE}"/>
               </a:ext>
             </a:extLst>
           </p:cNvPr>
@@ -2196,7 +2196,7 @@
           <p:cNvPr id="3" name="내용 개체 틀 2">
             <a:extLst>
               <a:ext uri="{FF2B5EF4-FFF2-40B4-BE49-F238E27FC236}">
-                <a16:creationId xmlns:a16="http://schemas.microsoft.com/office/drawing/2014/main" id="{99DE7176-DB3B-4D72-1467-FDFF3791D4AD}"/>
+                <a16:creationId xmlns:a16="http://schemas.microsoft.com/office/drawing/2014/main" id="{8B57AE28-732A-681B-D681-2AC653757896}"/>
               </a:ext>
             </a:extLst>
           </p:cNvPr>
@@ -2286,7 +2286,7 @@
           <p:cNvPr id="4" name="텍스트 개체 틀 3">
             <a:extLst>
               <a:ext uri="{FF2B5EF4-FFF2-40B4-BE49-F238E27FC236}">
-                <a16:creationId xmlns:a16="http://schemas.microsoft.com/office/drawing/2014/main" id="{D3A81FA3-871F-F966-A646-12AEB43A1F8C}"/>
+                <a16:creationId xmlns:a16="http://schemas.microsoft.com/office/drawing/2014/main" id="{87B2EDD2-83CF-04DB-394F-A4835DC6B571}"/>
               </a:ext>
             </a:extLst>
           </p:cNvPr>
@@ -2357,7 +2357,7 @@
           <p:cNvPr id="5" name="날짜 개체 틀 4">
             <a:extLst>
               <a:ext uri="{FF2B5EF4-FFF2-40B4-BE49-F238E27FC236}">
-                <a16:creationId xmlns:a16="http://schemas.microsoft.com/office/drawing/2014/main" id="{31F70C05-0069-7B55-7CC4-8B369DB0BC30}"/>
+                <a16:creationId xmlns:a16="http://schemas.microsoft.com/office/drawing/2014/main" id="{FE60E788-BB76-DD3E-17AC-3BF16B02C91C}"/>
               </a:ext>
             </a:extLst>
           </p:cNvPr>
@@ -2373,7 +2373,7 @@
           <a:bodyPr/>
           <a:lstStyle/>
           <a:p>
-            <a:fld id="{71EE3968-8CAE-49A6-A295-1DC5695562B1}" type="datetimeFigureOut">
+            <a:fld id="{EBFAA884-F683-4FDC-A78F-6371499EC8A3}" type="datetimeFigureOut">
               <a:rPr lang="ko-KR" altLang="en-US" smtClean="0"/>
               <a:t>2026-06-20</a:t>
             </a:fld>
@@ -2386,7 +2386,7 @@
           <p:cNvPr id="6" name="바닥글 개체 틀 5">
             <a:extLst>
               <a:ext uri="{FF2B5EF4-FFF2-40B4-BE49-F238E27FC236}">
-                <a16:creationId xmlns:a16="http://schemas.microsoft.com/office/drawing/2014/main" id="{8F9CCBC8-C196-73A0-B94C-0CB8931C8CC1}"/>
+                <a16:creationId xmlns:a16="http://schemas.microsoft.com/office/drawing/2014/main" id="{0BB809AF-4DB4-3322-4563-BB2F878A18B5}"/>
               </a:ext>
             </a:extLst>
           </p:cNvPr>
@@ -2411,7 +2411,7 @@
           <p:cNvPr id="7" name="슬라이드 번호 개체 틀 6">
             <a:extLst>
               <a:ext uri="{FF2B5EF4-FFF2-40B4-BE49-F238E27FC236}">
-                <a16:creationId xmlns:a16="http://schemas.microsoft.com/office/drawing/2014/main" id="{F51DC7BE-866A-C303-0BEE-A54966A36741}"/>
+                <a16:creationId xmlns:a16="http://schemas.microsoft.com/office/drawing/2014/main" id="{BD3D04F4-B741-8086-6597-07265868B5AA}"/>
               </a:ext>
             </a:extLst>
           </p:cNvPr>
@@ -2427,7 +2427,7 @@
           <a:bodyPr/>
           <a:lstStyle/>
           <a:p>
-            <a:fld id="{BC2A9051-646C-4BF0-8281-5B8C4E353592}" type="slidenum">
+            <a:fld id="{00FE27F2-B0EF-4A9C-944A-F494E2E34A9E}" type="slidenum">
               <a:rPr lang="ko-KR" altLang="en-US" smtClean="0"/>
               <a:t>‹#›</a:t>
             </a:fld>
@@ -2438,7 +2438,7 @@
     </p:spTree>
     <p:extLst>
       <p:ext uri="{BB962C8B-B14F-4D97-AF65-F5344CB8AC3E}">
-        <p14:creationId xmlns:p14="http://schemas.microsoft.com/office/powerpoint/2010/main" val="3076116040"/>
+        <p14:creationId xmlns:p14="http://schemas.microsoft.com/office/powerpoint/2010/main" val="2584546200"/>
       </p:ext>
     </p:extLst>
   </p:cSld>
@@ -2470,7 +2470,7 @@
           <p:cNvPr id="2" name="제목 1">
             <a:extLst>
               <a:ext uri="{FF2B5EF4-FFF2-40B4-BE49-F238E27FC236}">
-                <a16:creationId xmlns:a16="http://schemas.microsoft.com/office/drawing/2014/main" id="{E0380435-1E28-519C-AB9D-9975AB604981}"/>
+                <a16:creationId xmlns:a16="http://schemas.microsoft.com/office/drawing/2014/main" id="{1C01DEF4-9345-AE37-0170-56CFF146E87D}"/>
               </a:ext>
             </a:extLst>
           </p:cNvPr>
@@ -2507,7 +2507,7 @@
           <p:cNvPr id="3" name="그림 개체 틀 2">
             <a:extLst>
               <a:ext uri="{FF2B5EF4-FFF2-40B4-BE49-F238E27FC236}">
-                <a16:creationId xmlns:a16="http://schemas.microsoft.com/office/drawing/2014/main" id="{7527ABA6-3571-34B4-0CBA-464C72B38DD1}"/>
+                <a16:creationId xmlns:a16="http://schemas.microsoft.com/office/drawing/2014/main" id="{8DC2118B-5DB0-A0A5-CE19-5518799A3CA4}"/>
               </a:ext>
             </a:extLst>
           </p:cNvPr>
@@ -2574,7 +2574,7 @@
           <p:cNvPr id="4" name="텍스트 개체 틀 3">
             <a:extLst>
               <a:ext uri="{FF2B5EF4-FFF2-40B4-BE49-F238E27FC236}">
-                <a16:creationId xmlns:a16="http://schemas.microsoft.com/office/drawing/2014/main" id="{5E0B1F69-1564-3C79-D97D-C38B8056BED9}"/>
+                <a16:creationId xmlns:a16="http://schemas.microsoft.com/office/drawing/2014/main" id="{731027DB-3609-641F-42A9-6D17442D0261}"/>
               </a:ext>
             </a:extLst>
           </p:cNvPr>
@@ -2645,7 +2645,7 @@
           <p:cNvPr id="5" name="날짜 개체 틀 4">
             <a:extLst>
               <a:ext uri="{FF2B5EF4-FFF2-40B4-BE49-F238E27FC236}">
-                <a16:creationId xmlns:a16="http://schemas.microsoft.com/office/drawing/2014/main" id="{6C6FA529-0192-354B-BA68-ADD4721E6504}"/>
+                <a16:creationId xmlns:a16="http://schemas.microsoft.com/office/drawing/2014/main" id="{AA1EB617-066A-7473-7EEB-4BAE7744762E}"/>
               </a:ext>
             </a:extLst>
           </p:cNvPr>
@@ -2661,7 +2661,7 @@
           <a:bodyPr/>
           <a:lstStyle/>
           <a:p>
-            <a:fld id="{71EE3968-8CAE-49A6-A295-1DC5695562B1}" type="datetimeFigureOut">
+            <a:fld id="{EBFAA884-F683-4FDC-A78F-6371499EC8A3}" type="datetimeFigureOut">
               <a:rPr lang="ko-KR" altLang="en-US" smtClean="0"/>
               <a:t>2026-06-20</a:t>
             </a:fld>
@@ -2674,7 +2674,7 @@
           <p:cNvPr id="6" name="바닥글 개체 틀 5">
             <a:extLst>
               <a:ext uri="{FF2B5EF4-FFF2-40B4-BE49-F238E27FC236}">
-                <a16:creationId xmlns:a16="http://schemas.microsoft.com/office/drawing/2014/main" id="{84848B5D-2885-4FEB-9ED8-0858442C4955}"/>
+                <a16:creationId xmlns:a16="http://schemas.microsoft.com/office/drawing/2014/main" id="{5132F472-8C99-D222-11B0-0EF23E914EFD}"/>
               </a:ext>
             </a:extLst>
           </p:cNvPr>
@@ -2699,7 +2699,7 @@
           <p:cNvPr id="7" name="슬라이드 번호 개체 틀 6">
             <a:extLst>
               <a:ext uri="{FF2B5EF4-FFF2-40B4-BE49-F238E27FC236}">
-                <a16:creationId xmlns:a16="http://schemas.microsoft.com/office/drawing/2014/main" id="{4F3695D1-ADE4-5E22-0D7B-F7CB7A585B99}"/>
+                <a16:creationId xmlns:a16="http://schemas.microsoft.com/office/drawing/2014/main" id="{15B48BFA-BDED-F933-7929-156BFA13C02F}"/>
               </a:ext>
             </a:extLst>
           </p:cNvPr>
@@ -2715,7 +2715,7 @@
           <a:bodyPr/>
           <a:lstStyle/>
           <a:p>
-            <a:fld id="{BC2A9051-646C-4BF0-8281-5B8C4E353592}" type="slidenum">
+            <a:fld id="{00FE27F2-B0EF-4A9C-944A-F494E2E34A9E}" type="slidenum">
               <a:rPr lang="ko-KR" altLang="en-US" smtClean="0"/>
               <a:t>‹#›</a:t>
             </a:fld>
@@ -2726,7 +2726,7 @@
     </p:spTree>
     <p:extLst>
       <p:ext uri="{BB962C8B-B14F-4D97-AF65-F5344CB8AC3E}">
-        <p14:creationId xmlns:p14="http://schemas.microsoft.com/office/powerpoint/2010/main" val="3784807790"/>
+        <p14:creationId xmlns:p14="http://schemas.microsoft.com/office/powerpoint/2010/main" val="1431219515"/>
       </p:ext>
     </p:extLst>
   </p:cSld>
@@ -2763,7 +2763,7 @@
           <p:cNvPr id="2" name="제목 개체 틀 1">
             <a:extLst>
               <a:ext uri="{FF2B5EF4-FFF2-40B4-BE49-F238E27FC236}">
-                <a16:creationId xmlns:a16="http://schemas.microsoft.com/office/drawing/2014/main" id="{513B5A0D-387B-1754-C2C3-7EBD9DE08A1E}"/>
+                <a16:creationId xmlns:a16="http://schemas.microsoft.com/office/drawing/2014/main" id="{DF986A73-51EE-74B5-B6EE-85BD928DC40E}"/>
               </a:ext>
             </a:extLst>
           </p:cNvPr>
@@ -2801,7 +2801,7 @@
           <p:cNvPr id="3" name="텍스트 개체 틀 2">
             <a:extLst>
               <a:ext uri="{FF2B5EF4-FFF2-40B4-BE49-F238E27FC236}">
-                <a16:creationId xmlns:a16="http://schemas.microsoft.com/office/drawing/2014/main" id="{7D008326-AEFC-86FB-0A1B-D0D39EAD283C}"/>
+                <a16:creationId xmlns:a16="http://schemas.microsoft.com/office/drawing/2014/main" id="{FDF744A4-C9A8-864F-CD85-64CC43AB210D}"/>
               </a:ext>
             </a:extLst>
           </p:cNvPr>
@@ -2868,7 +2868,7 @@
           <p:cNvPr id="4" name="날짜 개체 틀 3">
             <a:extLst>
               <a:ext uri="{FF2B5EF4-FFF2-40B4-BE49-F238E27FC236}">
-                <a16:creationId xmlns:a16="http://schemas.microsoft.com/office/drawing/2014/main" id="{699BC6DE-0AB6-53B2-73EE-E610EF27FD2A}"/>
+                <a16:creationId xmlns:a16="http://schemas.microsoft.com/office/drawing/2014/main" id="{3D5821E0-5AB2-73ED-C160-C1512FD68136}"/>
               </a:ext>
             </a:extLst>
           </p:cNvPr>
@@ -2902,7 +2902,7 @@
             </a:lvl1pPr>
           </a:lstStyle>
           <a:p>
-            <a:fld id="{71EE3968-8CAE-49A6-A295-1DC5695562B1}" type="datetimeFigureOut">
+            <a:fld id="{EBFAA884-F683-4FDC-A78F-6371499EC8A3}" type="datetimeFigureOut">
               <a:rPr lang="ko-KR" altLang="en-US" smtClean="0"/>
               <a:t>2026-06-20</a:t>
             </a:fld>
@@ -2915,7 +2915,7 @@
           <p:cNvPr id="5" name="바닥글 개체 틀 4">
             <a:extLst>
               <a:ext uri="{FF2B5EF4-FFF2-40B4-BE49-F238E27FC236}">
-                <a16:creationId xmlns:a16="http://schemas.microsoft.com/office/drawing/2014/main" id="{A8292996-3403-89CB-8B6B-68336E23B92C}"/>
+                <a16:creationId xmlns:a16="http://schemas.microsoft.com/office/drawing/2014/main" id="{3061F1B2-70E4-EA5E-1FA5-FB0879FA35A1}"/>
               </a:ext>
             </a:extLst>
           </p:cNvPr>
@@ -2958,7 +2958,7 @@
           <p:cNvPr id="6" name="슬라이드 번호 개체 틀 5">
             <a:extLst>
               <a:ext uri="{FF2B5EF4-FFF2-40B4-BE49-F238E27FC236}">
-                <a16:creationId xmlns:a16="http://schemas.microsoft.com/office/drawing/2014/main" id="{7D6F7EB5-5CCE-3BC2-39AC-1514BCCCD30C}"/>
+                <a16:creationId xmlns:a16="http://schemas.microsoft.com/office/drawing/2014/main" id="{FB105A6B-1D65-CBD6-C3F5-4F8703CC755D}"/>
               </a:ext>
             </a:extLst>
           </p:cNvPr>
@@ -2992,7 +2992,7 @@
             </a:lvl1pPr>
           </a:lstStyle>
           <a:p>
-            <a:fld id="{BC2A9051-646C-4BF0-8281-5B8C4E353592}" type="slidenum">
+            <a:fld id="{00FE27F2-B0EF-4A9C-944A-F494E2E34A9E}" type="slidenum">
               <a:rPr lang="ko-KR" altLang="en-US" smtClean="0"/>
               <a:t>‹#›</a:t>
             </a:fld>
@@ -3003,7 +3003,7 @@
     </p:spTree>
     <p:extLst>
       <p:ext uri="{BB962C8B-B14F-4D97-AF65-F5344CB8AC3E}">
-        <p14:creationId xmlns:p14="http://schemas.microsoft.com/office/powerpoint/2010/main" val="599158740"/>
+        <p14:creationId xmlns:p14="http://schemas.microsoft.com/office/powerpoint/2010/main" val="431182570"/>
       </p:ext>
     </p:extLst>
   </p:cSld>
@@ -3326,7 +3326,7 @@
           <p:cNvPr id="3" name="그래픽 2">
             <a:extLst>
               <a:ext uri="{FF2B5EF4-FFF2-40B4-BE49-F238E27FC236}">
-                <a16:creationId xmlns:a16="http://schemas.microsoft.com/office/drawing/2014/main" id="{C01A0353-7670-E892-5D65-1C00EF694B68}"/>
+                <a16:creationId xmlns:a16="http://schemas.microsoft.com/office/drawing/2014/main" id="{ACD4F764-3CFE-0A36-9B07-A8D9644CA1B3}"/>
               </a:ext>
             </a:extLst>
           </p:cNvPr>
@@ -3360,7 +3360,7 @@
     </p:spTree>
     <p:extLst>
       <p:ext uri="{BB962C8B-B14F-4D97-AF65-F5344CB8AC3E}">
-        <p14:creationId xmlns:p14="http://schemas.microsoft.com/office/powerpoint/2010/main" val="2177703962"/>
+        <p14:creationId xmlns:p14="http://schemas.microsoft.com/office/powerpoint/2010/main" val="2289986395"/>
       </p:ext>
     </p:extLst>
   </p:cSld>

--- a/docs/assets/infographic-seed-gallery.pptx
+++ b/docs/assets/infographic-seed-gallery.pptx
@@ -129,7 +129,7 @@
           <p:cNvPr id="2" name="제목 1">
             <a:extLst>
               <a:ext uri="{FF2B5EF4-FFF2-40B4-BE49-F238E27FC236}">
-                <a16:creationId xmlns:a16="http://schemas.microsoft.com/office/drawing/2014/main" id="{7A7E5972-F5CB-ABC3-4643-7E6DA5019301}"/>
+                <a16:creationId xmlns:a16="http://schemas.microsoft.com/office/drawing/2014/main" id="{76D46781-20C7-035D-2910-1C3A061DF7B5}"/>
               </a:ext>
             </a:extLst>
           </p:cNvPr>
@@ -166,7 +166,7 @@
           <p:cNvPr id="3" name="부제목 2">
             <a:extLst>
               <a:ext uri="{FF2B5EF4-FFF2-40B4-BE49-F238E27FC236}">
-                <a16:creationId xmlns:a16="http://schemas.microsoft.com/office/drawing/2014/main" id="{ACF169AC-6738-230A-6D61-E777EB2CC0BE}"/>
+                <a16:creationId xmlns:a16="http://schemas.microsoft.com/office/drawing/2014/main" id="{EFDCAA7B-DCA3-0A29-B3A3-D933A933C5DF}"/>
               </a:ext>
             </a:extLst>
           </p:cNvPr>
@@ -236,7 +236,7 @@
           <p:cNvPr id="4" name="날짜 개체 틀 3">
             <a:extLst>
               <a:ext uri="{FF2B5EF4-FFF2-40B4-BE49-F238E27FC236}">
-                <a16:creationId xmlns:a16="http://schemas.microsoft.com/office/drawing/2014/main" id="{177565D0-680E-9DDF-F0FE-13CDFD55265B}"/>
+                <a16:creationId xmlns:a16="http://schemas.microsoft.com/office/drawing/2014/main" id="{1E785CBD-2DBE-AE7C-9BE7-0806CB1BE115}"/>
               </a:ext>
             </a:extLst>
           </p:cNvPr>
@@ -252,9 +252,9 @@
           <a:bodyPr/>
           <a:lstStyle/>
           <a:p>
-            <a:fld id="{EBFAA884-F683-4FDC-A78F-6371499EC8A3}" type="datetimeFigureOut">
+            <a:fld id="{3370C868-F4B3-48CD-90E2-B37D272DCE1D}" type="datetimeFigureOut">
               <a:rPr lang="ko-KR" altLang="en-US" smtClean="0"/>
-              <a:t>2026-06-20</a:t>
+              <a:t>2026-06-21</a:t>
             </a:fld>
             <a:endParaRPr lang="ko-KR" altLang="en-US"/>
           </a:p>
@@ -265,7 +265,7 @@
           <p:cNvPr id="5" name="바닥글 개체 틀 4">
             <a:extLst>
               <a:ext uri="{FF2B5EF4-FFF2-40B4-BE49-F238E27FC236}">
-                <a16:creationId xmlns:a16="http://schemas.microsoft.com/office/drawing/2014/main" id="{0BA1FF37-5814-CA2E-0E06-7188F1F41C96}"/>
+                <a16:creationId xmlns:a16="http://schemas.microsoft.com/office/drawing/2014/main" id="{7602323C-DE4F-7530-C434-C26BA668BD88}"/>
               </a:ext>
             </a:extLst>
           </p:cNvPr>
@@ -290,7 +290,7 @@
           <p:cNvPr id="6" name="슬라이드 번호 개체 틀 5">
             <a:extLst>
               <a:ext uri="{FF2B5EF4-FFF2-40B4-BE49-F238E27FC236}">
-                <a16:creationId xmlns:a16="http://schemas.microsoft.com/office/drawing/2014/main" id="{9D8BDEC4-19EE-61B8-4860-44376C453170}"/>
+                <a16:creationId xmlns:a16="http://schemas.microsoft.com/office/drawing/2014/main" id="{C52DACD3-6556-8A3A-85F7-8E66C691A08F}"/>
               </a:ext>
             </a:extLst>
           </p:cNvPr>
@@ -306,7 +306,7 @@
           <a:bodyPr/>
           <a:lstStyle/>
           <a:p>
-            <a:fld id="{00FE27F2-B0EF-4A9C-944A-F494E2E34A9E}" type="slidenum">
+            <a:fld id="{68E19554-FD31-4E43-B9E4-FE8925EEE262}" type="slidenum">
               <a:rPr lang="ko-KR" altLang="en-US" smtClean="0"/>
               <a:t>‹#›</a:t>
             </a:fld>
@@ -317,7 +317,7 @@
     </p:spTree>
     <p:extLst>
       <p:ext uri="{BB962C8B-B14F-4D97-AF65-F5344CB8AC3E}">
-        <p14:creationId xmlns:p14="http://schemas.microsoft.com/office/powerpoint/2010/main" val="4203087446"/>
+        <p14:creationId xmlns:p14="http://schemas.microsoft.com/office/powerpoint/2010/main" val="4271179612"/>
       </p:ext>
     </p:extLst>
   </p:cSld>
@@ -349,7 +349,7 @@
           <p:cNvPr id="2" name="제목 1">
             <a:extLst>
               <a:ext uri="{FF2B5EF4-FFF2-40B4-BE49-F238E27FC236}">
-                <a16:creationId xmlns:a16="http://schemas.microsoft.com/office/drawing/2014/main" id="{135A6554-B588-D991-6134-7A6F5A9E7594}"/>
+                <a16:creationId xmlns:a16="http://schemas.microsoft.com/office/drawing/2014/main" id="{E8F252EF-F2A9-8947-CB8C-F53B2E6EFA80}"/>
               </a:ext>
             </a:extLst>
           </p:cNvPr>
@@ -377,7 +377,7 @@
           <p:cNvPr id="3" name="세로 텍스트 개체 틀 2">
             <a:extLst>
               <a:ext uri="{FF2B5EF4-FFF2-40B4-BE49-F238E27FC236}">
-                <a16:creationId xmlns:a16="http://schemas.microsoft.com/office/drawing/2014/main" id="{2ED6D3E7-3400-8FC0-6B38-70447529FF05}"/>
+                <a16:creationId xmlns:a16="http://schemas.microsoft.com/office/drawing/2014/main" id="{AE9CB243-D69D-6A50-5117-E8C3F089FEA1}"/>
               </a:ext>
             </a:extLst>
           </p:cNvPr>
@@ -434,7 +434,7 @@
           <p:cNvPr id="4" name="날짜 개체 틀 3">
             <a:extLst>
               <a:ext uri="{FF2B5EF4-FFF2-40B4-BE49-F238E27FC236}">
-                <a16:creationId xmlns:a16="http://schemas.microsoft.com/office/drawing/2014/main" id="{D7528E11-7F68-0BCA-8973-38C3B299839F}"/>
+                <a16:creationId xmlns:a16="http://schemas.microsoft.com/office/drawing/2014/main" id="{FAD70EE7-3D3C-8D18-FCF3-F58E2D1A8B4B}"/>
               </a:ext>
             </a:extLst>
           </p:cNvPr>
@@ -450,9 +450,9 @@
           <a:bodyPr/>
           <a:lstStyle/>
           <a:p>
-            <a:fld id="{EBFAA884-F683-4FDC-A78F-6371499EC8A3}" type="datetimeFigureOut">
+            <a:fld id="{3370C868-F4B3-48CD-90E2-B37D272DCE1D}" type="datetimeFigureOut">
               <a:rPr lang="ko-KR" altLang="en-US" smtClean="0"/>
-              <a:t>2026-06-20</a:t>
+              <a:t>2026-06-21</a:t>
             </a:fld>
             <a:endParaRPr lang="ko-KR" altLang="en-US"/>
           </a:p>
@@ -463,7 +463,7 @@
           <p:cNvPr id="5" name="바닥글 개체 틀 4">
             <a:extLst>
               <a:ext uri="{FF2B5EF4-FFF2-40B4-BE49-F238E27FC236}">
-                <a16:creationId xmlns:a16="http://schemas.microsoft.com/office/drawing/2014/main" id="{572BC3F9-80F8-2169-6454-5CBE385CEBEB}"/>
+                <a16:creationId xmlns:a16="http://schemas.microsoft.com/office/drawing/2014/main" id="{B8976930-03A7-1CD1-8268-F74A42971B7E}"/>
               </a:ext>
             </a:extLst>
           </p:cNvPr>
@@ -488,7 +488,7 @@
           <p:cNvPr id="6" name="슬라이드 번호 개체 틀 5">
             <a:extLst>
               <a:ext uri="{FF2B5EF4-FFF2-40B4-BE49-F238E27FC236}">
-                <a16:creationId xmlns:a16="http://schemas.microsoft.com/office/drawing/2014/main" id="{D78A2186-E962-DE5D-144C-DE81D7F8B61E}"/>
+                <a16:creationId xmlns:a16="http://schemas.microsoft.com/office/drawing/2014/main" id="{8DCC9124-1AAE-B6EC-3332-D76B2452B584}"/>
               </a:ext>
             </a:extLst>
           </p:cNvPr>
@@ -504,7 +504,7 @@
           <a:bodyPr/>
           <a:lstStyle/>
           <a:p>
-            <a:fld id="{00FE27F2-B0EF-4A9C-944A-F494E2E34A9E}" type="slidenum">
+            <a:fld id="{68E19554-FD31-4E43-B9E4-FE8925EEE262}" type="slidenum">
               <a:rPr lang="ko-KR" altLang="en-US" smtClean="0"/>
               <a:t>‹#›</a:t>
             </a:fld>
@@ -515,7 +515,7 @@
     </p:spTree>
     <p:extLst>
       <p:ext uri="{BB962C8B-B14F-4D97-AF65-F5344CB8AC3E}">
-        <p14:creationId xmlns:p14="http://schemas.microsoft.com/office/powerpoint/2010/main" val="2683670459"/>
+        <p14:creationId xmlns:p14="http://schemas.microsoft.com/office/powerpoint/2010/main" val="422420331"/>
       </p:ext>
     </p:extLst>
   </p:cSld>
@@ -547,7 +547,7 @@
           <p:cNvPr id="2" name="세로 제목 1">
             <a:extLst>
               <a:ext uri="{FF2B5EF4-FFF2-40B4-BE49-F238E27FC236}">
-                <a16:creationId xmlns:a16="http://schemas.microsoft.com/office/drawing/2014/main" id="{7FBD50DD-518C-A387-757E-2AF73B69F249}"/>
+                <a16:creationId xmlns:a16="http://schemas.microsoft.com/office/drawing/2014/main" id="{4F6C3F05-36AA-D6BF-8B22-8DA83F969C6C}"/>
               </a:ext>
             </a:extLst>
           </p:cNvPr>
@@ -580,7 +580,7 @@
           <p:cNvPr id="3" name="세로 텍스트 개체 틀 2">
             <a:extLst>
               <a:ext uri="{FF2B5EF4-FFF2-40B4-BE49-F238E27FC236}">
-                <a16:creationId xmlns:a16="http://schemas.microsoft.com/office/drawing/2014/main" id="{C39A573A-A20E-11E3-43D6-1C13A5381CF2}"/>
+                <a16:creationId xmlns:a16="http://schemas.microsoft.com/office/drawing/2014/main" id="{98EEADEE-04F3-066B-A204-8AD85ABE846C}"/>
               </a:ext>
             </a:extLst>
           </p:cNvPr>
@@ -642,7 +642,7 @@
           <p:cNvPr id="4" name="날짜 개체 틀 3">
             <a:extLst>
               <a:ext uri="{FF2B5EF4-FFF2-40B4-BE49-F238E27FC236}">
-                <a16:creationId xmlns:a16="http://schemas.microsoft.com/office/drawing/2014/main" id="{8B3133BD-FA77-0373-C18D-B8C0913851B5}"/>
+                <a16:creationId xmlns:a16="http://schemas.microsoft.com/office/drawing/2014/main" id="{4275D14F-AAC0-19CD-46C8-B556E6736ADC}"/>
               </a:ext>
             </a:extLst>
           </p:cNvPr>
@@ -658,9 +658,9 @@
           <a:bodyPr/>
           <a:lstStyle/>
           <a:p>
-            <a:fld id="{EBFAA884-F683-4FDC-A78F-6371499EC8A3}" type="datetimeFigureOut">
+            <a:fld id="{3370C868-F4B3-48CD-90E2-B37D272DCE1D}" type="datetimeFigureOut">
               <a:rPr lang="ko-KR" altLang="en-US" smtClean="0"/>
-              <a:t>2026-06-20</a:t>
+              <a:t>2026-06-21</a:t>
             </a:fld>
             <a:endParaRPr lang="ko-KR" altLang="en-US"/>
           </a:p>
@@ -671,7 +671,7 @@
           <p:cNvPr id="5" name="바닥글 개체 틀 4">
             <a:extLst>
               <a:ext uri="{FF2B5EF4-FFF2-40B4-BE49-F238E27FC236}">
-                <a16:creationId xmlns:a16="http://schemas.microsoft.com/office/drawing/2014/main" id="{4797A2AB-DB93-7DA0-B66D-D029E0F68C4D}"/>
+                <a16:creationId xmlns:a16="http://schemas.microsoft.com/office/drawing/2014/main" id="{581539CF-B700-F5F1-0929-B59EC13DAD1F}"/>
               </a:ext>
             </a:extLst>
           </p:cNvPr>
@@ -696,7 +696,7 @@
           <p:cNvPr id="6" name="슬라이드 번호 개체 틀 5">
             <a:extLst>
               <a:ext uri="{FF2B5EF4-FFF2-40B4-BE49-F238E27FC236}">
-                <a16:creationId xmlns:a16="http://schemas.microsoft.com/office/drawing/2014/main" id="{8054CCA8-101A-18D1-70F4-1FB1C291FAB1}"/>
+                <a16:creationId xmlns:a16="http://schemas.microsoft.com/office/drawing/2014/main" id="{E038C566-4178-8F6B-BB6F-E30BD5E5EE08}"/>
               </a:ext>
             </a:extLst>
           </p:cNvPr>
@@ -712,7 +712,7 @@
           <a:bodyPr/>
           <a:lstStyle/>
           <a:p>
-            <a:fld id="{00FE27F2-B0EF-4A9C-944A-F494E2E34A9E}" type="slidenum">
+            <a:fld id="{68E19554-FD31-4E43-B9E4-FE8925EEE262}" type="slidenum">
               <a:rPr lang="ko-KR" altLang="en-US" smtClean="0"/>
               <a:t>‹#›</a:t>
             </a:fld>
@@ -723,7 +723,7 @@
     </p:spTree>
     <p:extLst>
       <p:ext uri="{BB962C8B-B14F-4D97-AF65-F5344CB8AC3E}">
-        <p14:creationId xmlns:p14="http://schemas.microsoft.com/office/powerpoint/2010/main" val="3243605196"/>
+        <p14:creationId xmlns:p14="http://schemas.microsoft.com/office/powerpoint/2010/main" val="485301787"/>
       </p:ext>
     </p:extLst>
   </p:cSld>
@@ -755,7 +755,7 @@
           <p:cNvPr id="2" name="제목 1">
             <a:extLst>
               <a:ext uri="{FF2B5EF4-FFF2-40B4-BE49-F238E27FC236}">
-                <a16:creationId xmlns:a16="http://schemas.microsoft.com/office/drawing/2014/main" id="{FE6DAFEC-E7D3-8593-4C11-39F2BFAB9ED1}"/>
+                <a16:creationId xmlns:a16="http://schemas.microsoft.com/office/drawing/2014/main" id="{8EF19C4D-BB4E-1FC0-25F5-15BBE4ADB3B7}"/>
               </a:ext>
             </a:extLst>
           </p:cNvPr>
@@ -783,7 +783,7 @@
           <p:cNvPr id="3" name="내용 개체 틀 2">
             <a:extLst>
               <a:ext uri="{FF2B5EF4-FFF2-40B4-BE49-F238E27FC236}">
-                <a16:creationId xmlns:a16="http://schemas.microsoft.com/office/drawing/2014/main" id="{0265939C-320E-CB78-D982-C1A76BF1E289}"/>
+                <a16:creationId xmlns:a16="http://schemas.microsoft.com/office/drawing/2014/main" id="{841610FC-49F8-D9F4-D0EB-F01785F7D557}"/>
               </a:ext>
             </a:extLst>
           </p:cNvPr>
@@ -840,7 +840,7 @@
           <p:cNvPr id="4" name="날짜 개체 틀 3">
             <a:extLst>
               <a:ext uri="{FF2B5EF4-FFF2-40B4-BE49-F238E27FC236}">
-                <a16:creationId xmlns:a16="http://schemas.microsoft.com/office/drawing/2014/main" id="{E60E14C6-5239-5043-8B1E-63B8B5444312}"/>
+                <a16:creationId xmlns:a16="http://schemas.microsoft.com/office/drawing/2014/main" id="{7DDB4B3F-2D7E-F8FE-1A3F-6198A329FE44}"/>
               </a:ext>
             </a:extLst>
           </p:cNvPr>
@@ -856,9 +856,9 @@
           <a:bodyPr/>
           <a:lstStyle/>
           <a:p>
-            <a:fld id="{EBFAA884-F683-4FDC-A78F-6371499EC8A3}" type="datetimeFigureOut">
+            <a:fld id="{3370C868-F4B3-48CD-90E2-B37D272DCE1D}" type="datetimeFigureOut">
               <a:rPr lang="ko-KR" altLang="en-US" smtClean="0"/>
-              <a:t>2026-06-20</a:t>
+              <a:t>2026-06-21</a:t>
             </a:fld>
             <a:endParaRPr lang="ko-KR" altLang="en-US"/>
           </a:p>
@@ -869,7 +869,7 @@
           <p:cNvPr id="5" name="바닥글 개체 틀 4">
             <a:extLst>
               <a:ext uri="{FF2B5EF4-FFF2-40B4-BE49-F238E27FC236}">
-                <a16:creationId xmlns:a16="http://schemas.microsoft.com/office/drawing/2014/main" id="{0C8849CA-D42B-3965-A481-53D470309BE2}"/>
+                <a16:creationId xmlns:a16="http://schemas.microsoft.com/office/drawing/2014/main" id="{3C59067B-3856-41E0-A1F1-F9FC314E86F1}"/>
               </a:ext>
             </a:extLst>
           </p:cNvPr>
@@ -894,7 +894,7 @@
           <p:cNvPr id="6" name="슬라이드 번호 개체 틀 5">
             <a:extLst>
               <a:ext uri="{FF2B5EF4-FFF2-40B4-BE49-F238E27FC236}">
-                <a16:creationId xmlns:a16="http://schemas.microsoft.com/office/drawing/2014/main" id="{DBD1A5CE-E83A-1C32-AC96-CB263A86D0B8}"/>
+                <a16:creationId xmlns:a16="http://schemas.microsoft.com/office/drawing/2014/main" id="{CE2BC39B-29C5-3875-1631-4DACF30C0BFB}"/>
               </a:ext>
             </a:extLst>
           </p:cNvPr>
@@ -910,7 +910,7 @@
           <a:bodyPr/>
           <a:lstStyle/>
           <a:p>
-            <a:fld id="{00FE27F2-B0EF-4A9C-944A-F494E2E34A9E}" type="slidenum">
+            <a:fld id="{68E19554-FD31-4E43-B9E4-FE8925EEE262}" type="slidenum">
               <a:rPr lang="ko-KR" altLang="en-US" smtClean="0"/>
               <a:t>‹#›</a:t>
             </a:fld>
@@ -921,7 +921,7 @@
     </p:spTree>
     <p:extLst>
       <p:ext uri="{BB962C8B-B14F-4D97-AF65-F5344CB8AC3E}">
-        <p14:creationId xmlns:p14="http://schemas.microsoft.com/office/powerpoint/2010/main" val="2232637456"/>
+        <p14:creationId xmlns:p14="http://schemas.microsoft.com/office/powerpoint/2010/main" val="157810278"/>
       </p:ext>
     </p:extLst>
   </p:cSld>
@@ -953,7 +953,7 @@
           <p:cNvPr id="2" name="제목 1">
             <a:extLst>
               <a:ext uri="{FF2B5EF4-FFF2-40B4-BE49-F238E27FC236}">
-                <a16:creationId xmlns:a16="http://schemas.microsoft.com/office/drawing/2014/main" id="{5156B10F-1AEA-B101-9733-CC8A5A3C608B}"/>
+                <a16:creationId xmlns:a16="http://schemas.microsoft.com/office/drawing/2014/main" id="{59F915E2-4E1E-F457-273B-AC57E8D37C6C}"/>
               </a:ext>
             </a:extLst>
           </p:cNvPr>
@@ -990,7 +990,7 @@
           <p:cNvPr id="3" name="텍스트 개체 틀 2">
             <a:extLst>
               <a:ext uri="{FF2B5EF4-FFF2-40B4-BE49-F238E27FC236}">
-                <a16:creationId xmlns:a16="http://schemas.microsoft.com/office/drawing/2014/main" id="{C4288E2E-012C-0C4E-111F-F5BDE377E7C5}"/>
+                <a16:creationId xmlns:a16="http://schemas.microsoft.com/office/drawing/2014/main" id="{C8A5008B-3DF1-04FB-2879-643BA9E37156}"/>
               </a:ext>
             </a:extLst>
           </p:cNvPr>
@@ -1115,7 +1115,7 @@
           <p:cNvPr id="4" name="날짜 개체 틀 3">
             <a:extLst>
               <a:ext uri="{FF2B5EF4-FFF2-40B4-BE49-F238E27FC236}">
-                <a16:creationId xmlns:a16="http://schemas.microsoft.com/office/drawing/2014/main" id="{C9B52DA4-0288-1A4F-C66B-A86E0C2C66FB}"/>
+                <a16:creationId xmlns:a16="http://schemas.microsoft.com/office/drawing/2014/main" id="{2B13040B-074E-4DA6-1CA6-8CEA964F5E89}"/>
               </a:ext>
             </a:extLst>
           </p:cNvPr>
@@ -1131,9 +1131,9 @@
           <a:bodyPr/>
           <a:lstStyle/>
           <a:p>
-            <a:fld id="{EBFAA884-F683-4FDC-A78F-6371499EC8A3}" type="datetimeFigureOut">
+            <a:fld id="{3370C868-F4B3-48CD-90E2-B37D272DCE1D}" type="datetimeFigureOut">
               <a:rPr lang="ko-KR" altLang="en-US" smtClean="0"/>
-              <a:t>2026-06-20</a:t>
+              <a:t>2026-06-21</a:t>
             </a:fld>
             <a:endParaRPr lang="ko-KR" altLang="en-US"/>
           </a:p>
@@ -1144,7 +1144,7 @@
           <p:cNvPr id="5" name="바닥글 개체 틀 4">
             <a:extLst>
               <a:ext uri="{FF2B5EF4-FFF2-40B4-BE49-F238E27FC236}">
-                <a16:creationId xmlns:a16="http://schemas.microsoft.com/office/drawing/2014/main" id="{75950124-BC2D-0D95-E6AE-3B623A13DFD8}"/>
+                <a16:creationId xmlns:a16="http://schemas.microsoft.com/office/drawing/2014/main" id="{DE3E62B1-1770-0A96-EA21-352530ABD3D7}"/>
               </a:ext>
             </a:extLst>
           </p:cNvPr>
@@ -1169,7 +1169,7 @@
           <p:cNvPr id="6" name="슬라이드 번호 개체 틀 5">
             <a:extLst>
               <a:ext uri="{FF2B5EF4-FFF2-40B4-BE49-F238E27FC236}">
-                <a16:creationId xmlns:a16="http://schemas.microsoft.com/office/drawing/2014/main" id="{1BE309DA-4DDD-4BB9-EA42-2D008C3F8DD9}"/>
+                <a16:creationId xmlns:a16="http://schemas.microsoft.com/office/drawing/2014/main" id="{3DC94541-D151-058C-EE0C-EE7BAB5DFA77}"/>
               </a:ext>
             </a:extLst>
           </p:cNvPr>
@@ -1185,7 +1185,7 @@
           <a:bodyPr/>
           <a:lstStyle/>
           <a:p>
-            <a:fld id="{00FE27F2-B0EF-4A9C-944A-F494E2E34A9E}" type="slidenum">
+            <a:fld id="{68E19554-FD31-4E43-B9E4-FE8925EEE262}" type="slidenum">
               <a:rPr lang="ko-KR" altLang="en-US" smtClean="0"/>
               <a:t>‹#›</a:t>
             </a:fld>
@@ -1196,7 +1196,7 @@
     </p:spTree>
     <p:extLst>
       <p:ext uri="{BB962C8B-B14F-4D97-AF65-F5344CB8AC3E}">
-        <p14:creationId xmlns:p14="http://schemas.microsoft.com/office/powerpoint/2010/main" val="2186688002"/>
+        <p14:creationId xmlns:p14="http://schemas.microsoft.com/office/powerpoint/2010/main" val="3276095909"/>
       </p:ext>
     </p:extLst>
   </p:cSld>
@@ -1228,7 +1228,7 @@
           <p:cNvPr id="2" name="제목 1">
             <a:extLst>
               <a:ext uri="{FF2B5EF4-FFF2-40B4-BE49-F238E27FC236}">
-                <a16:creationId xmlns:a16="http://schemas.microsoft.com/office/drawing/2014/main" id="{CF0E5EB4-06AF-8AC9-54DA-3D95FBDA521E}"/>
+                <a16:creationId xmlns:a16="http://schemas.microsoft.com/office/drawing/2014/main" id="{06999547-405E-852F-77F2-39EE1F3BD59B}"/>
               </a:ext>
             </a:extLst>
           </p:cNvPr>
@@ -1256,7 +1256,7 @@
           <p:cNvPr id="3" name="내용 개체 틀 2">
             <a:extLst>
               <a:ext uri="{FF2B5EF4-FFF2-40B4-BE49-F238E27FC236}">
-                <a16:creationId xmlns:a16="http://schemas.microsoft.com/office/drawing/2014/main" id="{85F0C1B4-502C-E00B-62F5-5125EF9BC791}"/>
+                <a16:creationId xmlns:a16="http://schemas.microsoft.com/office/drawing/2014/main" id="{A5812E6F-E5BD-DC7F-11AF-BD9763C7795A}"/>
               </a:ext>
             </a:extLst>
           </p:cNvPr>
@@ -1318,7 +1318,7 @@
           <p:cNvPr id="4" name="내용 개체 틀 3">
             <a:extLst>
               <a:ext uri="{FF2B5EF4-FFF2-40B4-BE49-F238E27FC236}">
-                <a16:creationId xmlns:a16="http://schemas.microsoft.com/office/drawing/2014/main" id="{29E2CA50-68B5-9581-4B74-EE05BB7D74EC}"/>
+                <a16:creationId xmlns:a16="http://schemas.microsoft.com/office/drawing/2014/main" id="{4FD8B923-9992-2760-6928-DEBEE192593F}"/>
               </a:ext>
             </a:extLst>
           </p:cNvPr>
@@ -1380,7 +1380,7 @@
           <p:cNvPr id="5" name="날짜 개체 틀 4">
             <a:extLst>
               <a:ext uri="{FF2B5EF4-FFF2-40B4-BE49-F238E27FC236}">
-                <a16:creationId xmlns:a16="http://schemas.microsoft.com/office/drawing/2014/main" id="{4C4226C5-FBAF-DA45-F0C0-F53B3D8D2716}"/>
+                <a16:creationId xmlns:a16="http://schemas.microsoft.com/office/drawing/2014/main" id="{D8C22BC4-D634-C33D-CA4E-CA5B0D0C4BA9}"/>
               </a:ext>
             </a:extLst>
           </p:cNvPr>
@@ -1396,9 +1396,9 @@
           <a:bodyPr/>
           <a:lstStyle/>
           <a:p>
-            <a:fld id="{EBFAA884-F683-4FDC-A78F-6371499EC8A3}" type="datetimeFigureOut">
+            <a:fld id="{3370C868-F4B3-48CD-90E2-B37D272DCE1D}" type="datetimeFigureOut">
               <a:rPr lang="ko-KR" altLang="en-US" smtClean="0"/>
-              <a:t>2026-06-20</a:t>
+              <a:t>2026-06-21</a:t>
             </a:fld>
             <a:endParaRPr lang="ko-KR" altLang="en-US"/>
           </a:p>
@@ -1409,7 +1409,7 @@
           <p:cNvPr id="6" name="바닥글 개체 틀 5">
             <a:extLst>
               <a:ext uri="{FF2B5EF4-FFF2-40B4-BE49-F238E27FC236}">
-                <a16:creationId xmlns:a16="http://schemas.microsoft.com/office/drawing/2014/main" id="{04B2E0EA-07C7-E4D8-25FC-FA50C6DF06A3}"/>
+                <a16:creationId xmlns:a16="http://schemas.microsoft.com/office/drawing/2014/main" id="{5BFB16E9-2AA1-B124-F32D-2F58D3AC3BF4}"/>
               </a:ext>
             </a:extLst>
           </p:cNvPr>
@@ -1434,7 +1434,7 @@
           <p:cNvPr id="7" name="슬라이드 번호 개체 틀 6">
             <a:extLst>
               <a:ext uri="{FF2B5EF4-FFF2-40B4-BE49-F238E27FC236}">
-                <a16:creationId xmlns:a16="http://schemas.microsoft.com/office/drawing/2014/main" id="{D6D745FC-5087-DDC4-5F0E-AA680FAEE08E}"/>
+                <a16:creationId xmlns:a16="http://schemas.microsoft.com/office/drawing/2014/main" id="{29F53F54-0BEA-06CA-FEAD-A180D83D3AD1}"/>
               </a:ext>
             </a:extLst>
           </p:cNvPr>
@@ -1450,7 +1450,7 @@
           <a:bodyPr/>
           <a:lstStyle/>
           <a:p>
-            <a:fld id="{00FE27F2-B0EF-4A9C-944A-F494E2E34A9E}" type="slidenum">
+            <a:fld id="{68E19554-FD31-4E43-B9E4-FE8925EEE262}" type="slidenum">
               <a:rPr lang="ko-KR" altLang="en-US" smtClean="0"/>
               <a:t>‹#›</a:t>
             </a:fld>
@@ -1461,7 +1461,7 @@
     </p:spTree>
     <p:extLst>
       <p:ext uri="{BB962C8B-B14F-4D97-AF65-F5344CB8AC3E}">
-        <p14:creationId xmlns:p14="http://schemas.microsoft.com/office/powerpoint/2010/main" val="3725962228"/>
+        <p14:creationId xmlns:p14="http://schemas.microsoft.com/office/powerpoint/2010/main" val="187220063"/>
       </p:ext>
     </p:extLst>
   </p:cSld>
@@ -1493,7 +1493,7 @@
           <p:cNvPr id="2" name="제목 1">
             <a:extLst>
               <a:ext uri="{FF2B5EF4-FFF2-40B4-BE49-F238E27FC236}">
-                <a16:creationId xmlns:a16="http://schemas.microsoft.com/office/drawing/2014/main" id="{F4340D06-D935-F878-D101-205537A005E7}"/>
+                <a16:creationId xmlns:a16="http://schemas.microsoft.com/office/drawing/2014/main" id="{A2B74480-8258-2D22-CCA2-E6D144662C04}"/>
               </a:ext>
             </a:extLst>
           </p:cNvPr>
@@ -1526,7 +1526,7 @@
           <p:cNvPr id="3" name="텍스트 개체 틀 2">
             <a:extLst>
               <a:ext uri="{FF2B5EF4-FFF2-40B4-BE49-F238E27FC236}">
-                <a16:creationId xmlns:a16="http://schemas.microsoft.com/office/drawing/2014/main" id="{9CBC1762-DB4A-D3DE-1757-B4BDC72AE681}"/>
+                <a16:creationId xmlns:a16="http://schemas.microsoft.com/office/drawing/2014/main" id="{A47C67E9-2D29-A347-5333-4EAD2EE41C81}"/>
               </a:ext>
             </a:extLst>
           </p:cNvPr>
@@ -1597,7 +1597,7 @@
           <p:cNvPr id="4" name="내용 개체 틀 3">
             <a:extLst>
               <a:ext uri="{FF2B5EF4-FFF2-40B4-BE49-F238E27FC236}">
-                <a16:creationId xmlns:a16="http://schemas.microsoft.com/office/drawing/2014/main" id="{3885B915-BDE9-F576-5ABE-F9DA394352E1}"/>
+                <a16:creationId xmlns:a16="http://schemas.microsoft.com/office/drawing/2014/main" id="{88411579-0D21-D9D6-EC57-DC15AE6BA682}"/>
               </a:ext>
             </a:extLst>
           </p:cNvPr>
@@ -1659,7 +1659,7 @@
           <p:cNvPr id="5" name="텍스트 개체 틀 4">
             <a:extLst>
               <a:ext uri="{FF2B5EF4-FFF2-40B4-BE49-F238E27FC236}">
-                <a16:creationId xmlns:a16="http://schemas.microsoft.com/office/drawing/2014/main" id="{0316FDC3-AB8E-258F-B4F7-C10BF0785ABF}"/>
+                <a16:creationId xmlns:a16="http://schemas.microsoft.com/office/drawing/2014/main" id="{57C015CB-B81F-FBC5-D492-13D5DF77C666}"/>
               </a:ext>
             </a:extLst>
           </p:cNvPr>
@@ -1730,7 +1730,7 @@
           <p:cNvPr id="6" name="내용 개체 틀 5">
             <a:extLst>
               <a:ext uri="{FF2B5EF4-FFF2-40B4-BE49-F238E27FC236}">
-                <a16:creationId xmlns:a16="http://schemas.microsoft.com/office/drawing/2014/main" id="{45E85757-700D-0532-A888-95177B4DB4C8}"/>
+                <a16:creationId xmlns:a16="http://schemas.microsoft.com/office/drawing/2014/main" id="{2794318F-3AE1-FD1C-B8DE-692A2819ACC6}"/>
               </a:ext>
             </a:extLst>
           </p:cNvPr>
@@ -1792,7 +1792,7 @@
           <p:cNvPr id="7" name="날짜 개체 틀 6">
             <a:extLst>
               <a:ext uri="{FF2B5EF4-FFF2-40B4-BE49-F238E27FC236}">
-                <a16:creationId xmlns:a16="http://schemas.microsoft.com/office/drawing/2014/main" id="{FE7ABA4D-5B61-F427-C8A3-51F28C74A3B4}"/>
+                <a16:creationId xmlns:a16="http://schemas.microsoft.com/office/drawing/2014/main" id="{D699F3FD-5878-E8B4-DEB9-1E88F40FBEE0}"/>
               </a:ext>
             </a:extLst>
           </p:cNvPr>
@@ -1808,9 +1808,9 @@
           <a:bodyPr/>
           <a:lstStyle/>
           <a:p>
-            <a:fld id="{EBFAA884-F683-4FDC-A78F-6371499EC8A3}" type="datetimeFigureOut">
+            <a:fld id="{3370C868-F4B3-48CD-90E2-B37D272DCE1D}" type="datetimeFigureOut">
               <a:rPr lang="ko-KR" altLang="en-US" smtClean="0"/>
-              <a:t>2026-06-20</a:t>
+              <a:t>2026-06-21</a:t>
             </a:fld>
             <a:endParaRPr lang="ko-KR" altLang="en-US"/>
           </a:p>
@@ -1821,7 +1821,7 @@
           <p:cNvPr id="8" name="바닥글 개체 틀 7">
             <a:extLst>
               <a:ext uri="{FF2B5EF4-FFF2-40B4-BE49-F238E27FC236}">
-                <a16:creationId xmlns:a16="http://schemas.microsoft.com/office/drawing/2014/main" id="{D0EBBC42-5C81-2178-51D2-366DFFABBB1F}"/>
+                <a16:creationId xmlns:a16="http://schemas.microsoft.com/office/drawing/2014/main" id="{DA202C3F-2815-4388-22E9-3F2B0BCAE90A}"/>
               </a:ext>
             </a:extLst>
           </p:cNvPr>
@@ -1846,7 +1846,7 @@
           <p:cNvPr id="9" name="슬라이드 번호 개체 틀 8">
             <a:extLst>
               <a:ext uri="{FF2B5EF4-FFF2-40B4-BE49-F238E27FC236}">
-                <a16:creationId xmlns:a16="http://schemas.microsoft.com/office/drawing/2014/main" id="{799B7078-C0C8-61EB-C346-7498E1A711E7}"/>
+                <a16:creationId xmlns:a16="http://schemas.microsoft.com/office/drawing/2014/main" id="{C87C3F4B-718C-8055-747A-45DAF9F716E0}"/>
               </a:ext>
             </a:extLst>
           </p:cNvPr>
@@ -1862,7 +1862,7 @@
           <a:bodyPr/>
           <a:lstStyle/>
           <a:p>
-            <a:fld id="{00FE27F2-B0EF-4A9C-944A-F494E2E34A9E}" type="slidenum">
+            <a:fld id="{68E19554-FD31-4E43-B9E4-FE8925EEE262}" type="slidenum">
               <a:rPr lang="ko-KR" altLang="en-US" smtClean="0"/>
               <a:t>‹#›</a:t>
             </a:fld>
@@ -1873,7 +1873,7 @@
     </p:spTree>
     <p:extLst>
       <p:ext uri="{BB962C8B-B14F-4D97-AF65-F5344CB8AC3E}">
-        <p14:creationId xmlns:p14="http://schemas.microsoft.com/office/powerpoint/2010/main" val="103943084"/>
+        <p14:creationId xmlns:p14="http://schemas.microsoft.com/office/powerpoint/2010/main" val="560225199"/>
       </p:ext>
     </p:extLst>
   </p:cSld>
@@ -1905,7 +1905,7 @@
           <p:cNvPr id="2" name="제목 1">
             <a:extLst>
               <a:ext uri="{FF2B5EF4-FFF2-40B4-BE49-F238E27FC236}">
-                <a16:creationId xmlns:a16="http://schemas.microsoft.com/office/drawing/2014/main" id="{D956346C-2C19-AFE2-B285-D4A1890093A1}"/>
+                <a16:creationId xmlns:a16="http://schemas.microsoft.com/office/drawing/2014/main" id="{FEC7921B-3D09-485D-487C-8ECBD2495346}"/>
               </a:ext>
             </a:extLst>
           </p:cNvPr>
@@ -1933,7 +1933,7 @@
           <p:cNvPr id="3" name="날짜 개체 틀 2">
             <a:extLst>
               <a:ext uri="{FF2B5EF4-FFF2-40B4-BE49-F238E27FC236}">
-                <a16:creationId xmlns:a16="http://schemas.microsoft.com/office/drawing/2014/main" id="{71B80DFB-7974-BC39-1E41-EB902421E292}"/>
+                <a16:creationId xmlns:a16="http://schemas.microsoft.com/office/drawing/2014/main" id="{102E0D6B-8619-ACF8-8284-64EC42B658DD}"/>
               </a:ext>
             </a:extLst>
           </p:cNvPr>
@@ -1949,9 +1949,9 @@
           <a:bodyPr/>
           <a:lstStyle/>
           <a:p>
-            <a:fld id="{EBFAA884-F683-4FDC-A78F-6371499EC8A3}" type="datetimeFigureOut">
+            <a:fld id="{3370C868-F4B3-48CD-90E2-B37D272DCE1D}" type="datetimeFigureOut">
               <a:rPr lang="ko-KR" altLang="en-US" smtClean="0"/>
-              <a:t>2026-06-20</a:t>
+              <a:t>2026-06-21</a:t>
             </a:fld>
             <a:endParaRPr lang="ko-KR" altLang="en-US"/>
           </a:p>
@@ -1962,7 +1962,7 @@
           <p:cNvPr id="4" name="바닥글 개체 틀 3">
             <a:extLst>
               <a:ext uri="{FF2B5EF4-FFF2-40B4-BE49-F238E27FC236}">
-                <a16:creationId xmlns:a16="http://schemas.microsoft.com/office/drawing/2014/main" id="{026BCDF7-21A8-FABB-A59E-66C5C878D921}"/>
+                <a16:creationId xmlns:a16="http://schemas.microsoft.com/office/drawing/2014/main" id="{968AD4DC-5667-5893-5581-77C6ED5D7F9C}"/>
               </a:ext>
             </a:extLst>
           </p:cNvPr>
@@ -1987,7 +1987,7 @@
           <p:cNvPr id="5" name="슬라이드 번호 개체 틀 4">
             <a:extLst>
               <a:ext uri="{FF2B5EF4-FFF2-40B4-BE49-F238E27FC236}">
-                <a16:creationId xmlns:a16="http://schemas.microsoft.com/office/drawing/2014/main" id="{95CC68A1-33D9-0E0B-9796-29EFF5DE53AD}"/>
+                <a16:creationId xmlns:a16="http://schemas.microsoft.com/office/drawing/2014/main" id="{3173DBA2-88E6-A693-4B94-763CD186109B}"/>
               </a:ext>
             </a:extLst>
           </p:cNvPr>
@@ -2003,7 +2003,7 @@
           <a:bodyPr/>
           <a:lstStyle/>
           <a:p>
-            <a:fld id="{00FE27F2-B0EF-4A9C-944A-F494E2E34A9E}" type="slidenum">
+            <a:fld id="{68E19554-FD31-4E43-B9E4-FE8925EEE262}" type="slidenum">
               <a:rPr lang="ko-KR" altLang="en-US" smtClean="0"/>
               <a:t>‹#›</a:t>
             </a:fld>
@@ -2014,7 +2014,7 @@
     </p:spTree>
     <p:extLst>
       <p:ext uri="{BB962C8B-B14F-4D97-AF65-F5344CB8AC3E}">
-        <p14:creationId xmlns:p14="http://schemas.microsoft.com/office/powerpoint/2010/main" val="858489572"/>
+        <p14:creationId xmlns:p14="http://schemas.microsoft.com/office/powerpoint/2010/main" val="2119295497"/>
       </p:ext>
     </p:extLst>
   </p:cSld>
@@ -2046,7 +2046,7 @@
           <p:cNvPr id="2" name="날짜 개체 틀 1">
             <a:extLst>
               <a:ext uri="{FF2B5EF4-FFF2-40B4-BE49-F238E27FC236}">
-                <a16:creationId xmlns:a16="http://schemas.microsoft.com/office/drawing/2014/main" id="{342DA1A6-FD3F-E01E-AB44-7B7F525A322D}"/>
+                <a16:creationId xmlns:a16="http://schemas.microsoft.com/office/drawing/2014/main" id="{E383E16A-8A9A-2B3F-D97C-D2933BE06275}"/>
               </a:ext>
             </a:extLst>
           </p:cNvPr>
@@ -2062,9 +2062,9 @@
           <a:bodyPr/>
           <a:lstStyle/>
           <a:p>
-            <a:fld id="{EBFAA884-F683-4FDC-A78F-6371499EC8A3}" type="datetimeFigureOut">
+            <a:fld id="{3370C868-F4B3-48CD-90E2-B37D272DCE1D}" type="datetimeFigureOut">
               <a:rPr lang="ko-KR" altLang="en-US" smtClean="0"/>
-              <a:t>2026-06-20</a:t>
+              <a:t>2026-06-21</a:t>
             </a:fld>
             <a:endParaRPr lang="ko-KR" altLang="en-US"/>
           </a:p>
@@ -2075,7 +2075,7 @@
           <p:cNvPr id="3" name="바닥글 개체 틀 2">
             <a:extLst>
               <a:ext uri="{FF2B5EF4-FFF2-40B4-BE49-F238E27FC236}">
-                <a16:creationId xmlns:a16="http://schemas.microsoft.com/office/drawing/2014/main" id="{58293C28-E2E8-6DE1-054D-5FE01E191F28}"/>
+                <a16:creationId xmlns:a16="http://schemas.microsoft.com/office/drawing/2014/main" id="{56BF4832-9ED0-BB3F-65D6-F17570CF1982}"/>
               </a:ext>
             </a:extLst>
           </p:cNvPr>
@@ -2100,7 +2100,7 @@
           <p:cNvPr id="4" name="슬라이드 번호 개체 틀 3">
             <a:extLst>
               <a:ext uri="{FF2B5EF4-FFF2-40B4-BE49-F238E27FC236}">
-                <a16:creationId xmlns:a16="http://schemas.microsoft.com/office/drawing/2014/main" id="{5349D643-1441-9797-4400-74A69FB071C0}"/>
+                <a16:creationId xmlns:a16="http://schemas.microsoft.com/office/drawing/2014/main" id="{E22A6F62-6ED1-1167-78C8-6014E5140CA2}"/>
               </a:ext>
             </a:extLst>
           </p:cNvPr>
@@ -2116,7 +2116,7 @@
           <a:bodyPr/>
           <a:lstStyle/>
           <a:p>
-            <a:fld id="{00FE27F2-B0EF-4A9C-944A-F494E2E34A9E}" type="slidenum">
+            <a:fld id="{68E19554-FD31-4E43-B9E4-FE8925EEE262}" type="slidenum">
               <a:rPr lang="ko-KR" altLang="en-US" smtClean="0"/>
               <a:t>‹#›</a:t>
             </a:fld>
@@ -2127,7 +2127,7 @@
     </p:spTree>
     <p:extLst>
       <p:ext uri="{BB962C8B-B14F-4D97-AF65-F5344CB8AC3E}">
-        <p14:creationId xmlns:p14="http://schemas.microsoft.com/office/powerpoint/2010/main" val="1354854151"/>
+        <p14:creationId xmlns:p14="http://schemas.microsoft.com/office/powerpoint/2010/main" val="2395461681"/>
       </p:ext>
     </p:extLst>
   </p:cSld>
@@ -2159,7 +2159,7 @@
           <p:cNvPr id="2" name="제목 1">
             <a:extLst>
               <a:ext uri="{FF2B5EF4-FFF2-40B4-BE49-F238E27FC236}">
-                <a16:creationId xmlns:a16="http://schemas.microsoft.com/office/drawing/2014/main" id="{480D699B-6EC5-0617-4BEE-587961C778EE}"/>
+                <a16:creationId xmlns:a16="http://schemas.microsoft.com/office/drawing/2014/main" id="{11797F6C-2F10-B580-BB75-FE243016D6A1}"/>
               </a:ext>
             </a:extLst>
           </p:cNvPr>
@@ -2196,7 +2196,7 @@
           <p:cNvPr id="3" name="내용 개체 틀 2">
             <a:extLst>
               <a:ext uri="{FF2B5EF4-FFF2-40B4-BE49-F238E27FC236}">
-                <a16:creationId xmlns:a16="http://schemas.microsoft.com/office/drawing/2014/main" id="{8B57AE28-732A-681B-D681-2AC653757896}"/>
+                <a16:creationId xmlns:a16="http://schemas.microsoft.com/office/drawing/2014/main" id="{949BB257-1E0E-18C4-E513-0259408B8333}"/>
               </a:ext>
             </a:extLst>
           </p:cNvPr>
@@ -2286,7 +2286,7 @@
           <p:cNvPr id="4" name="텍스트 개체 틀 3">
             <a:extLst>
               <a:ext uri="{FF2B5EF4-FFF2-40B4-BE49-F238E27FC236}">
-                <a16:creationId xmlns:a16="http://schemas.microsoft.com/office/drawing/2014/main" id="{87B2EDD2-83CF-04DB-394F-A4835DC6B571}"/>
+                <a16:creationId xmlns:a16="http://schemas.microsoft.com/office/drawing/2014/main" id="{A8C22E71-B684-7413-5898-E1A48EF657DF}"/>
               </a:ext>
             </a:extLst>
           </p:cNvPr>
@@ -2357,7 +2357,7 @@
           <p:cNvPr id="5" name="날짜 개체 틀 4">
             <a:extLst>
               <a:ext uri="{FF2B5EF4-FFF2-40B4-BE49-F238E27FC236}">
-                <a16:creationId xmlns:a16="http://schemas.microsoft.com/office/drawing/2014/main" id="{FE60E788-BB76-DD3E-17AC-3BF16B02C91C}"/>
+                <a16:creationId xmlns:a16="http://schemas.microsoft.com/office/drawing/2014/main" id="{F0FE7621-6009-30FC-B93F-1224A0DB3B4B}"/>
               </a:ext>
             </a:extLst>
           </p:cNvPr>
@@ -2373,9 +2373,9 @@
           <a:bodyPr/>
           <a:lstStyle/>
           <a:p>
-            <a:fld id="{EBFAA884-F683-4FDC-A78F-6371499EC8A3}" type="datetimeFigureOut">
+            <a:fld id="{3370C868-F4B3-48CD-90E2-B37D272DCE1D}" type="datetimeFigureOut">
               <a:rPr lang="ko-KR" altLang="en-US" smtClean="0"/>
-              <a:t>2026-06-20</a:t>
+              <a:t>2026-06-21</a:t>
             </a:fld>
             <a:endParaRPr lang="ko-KR" altLang="en-US"/>
           </a:p>
@@ -2386,7 +2386,7 @@
           <p:cNvPr id="6" name="바닥글 개체 틀 5">
             <a:extLst>
               <a:ext uri="{FF2B5EF4-FFF2-40B4-BE49-F238E27FC236}">
-                <a16:creationId xmlns:a16="http://schemas.microsoft.com/office/drawing/2014/main" id="{0BB809AF-4DB4-3322-4563-BB2F878A18B5}"/>
+                <a16:creationId xmlns:a16="http://schemas.microsoft.com/office/drawing/2014/main" id="{2ADDE8F3-5786-5AD8-2186-8212BD02D9CA}"/>
               </a:ext>
             </a:extLst>
           </p:cNvPr>
@@ -2411,7 +2411,7 @@
           <p:cNvPr id="7" name="슬라이드 번호 개체 틀 6">
             <a:extLst>
               <a:ext uri="{FF2B5EF4-FFF2-40B4-BE49-F238E27FC236}">
-                <a16:creationId xmlns:a16="http://schemas.microsoft.com/office/drawing/2014/main" id="{BD3D04F4-B741-8086-6597-07265868B5AA}"/>
+                <a16:creationId xmlns:a16="http://schemas.microsoft.com/office/drawing/2014/main" id="{8DE6D685-5514-4E1C-6E72-C24BC8B738B7}"/>
               </a:ext>
             </a:extLst>
           </p:cNvPr>
@@ -2427,7 +2427,7 @@
           <a:bodyPr/>
           <a:lstStyle/>
           <a:p>
-            <a:fld id="{00FE27F2-B0EF-4A9C-944A-F494E2E34A9E}" type="slidenum">
+            <a:fld id="{68E19554-FD31-4E43-B9E4-FE8925EEE262}" type="slidenum">
               <a:rPr lang="ko-KR" altLang="en-US" smtClean="0"/>
               <a:t>‹#›</a:t>
             </a:fld>
@@ -2438,7 +2438,7 @@
     </p:spTree>
     <p:extLst>
       <p:ext uri="{BB962C8B-B14F-4D97-AF65-F5344CB8AC3E}">
-        <p14:creationId xmlns:p14="http://schemas.microsoft.com/office/powerpoint/2010/main" val="2584546200"/>
+        <p14:creationId xmlns:p14="http://schemas.microsoft.com/office/powerpoint/2010/main" val="707643586"/>
       </p:ext>
     </p:extLst>
   </p:cSld>
@@ -2470,7 +2470,7 @@
           <p:cNvPr id="2" name="제목 1">
             <a:extLst>
               <a:ext uri="{FF2B5EF4-FFF2-40B4-BE49-F238E27FC236}">
-                <a16:creationId xmlns:a16="http://schemas.microsoft.com/office/drawing/2014/main" id="{1C01DEF4-9345-AE37-0170-56CFF146E87D}"/>
+                <a16:creationId xmlns:a16="http://schemas.microsoft.com/office/drawing/2014/main" id="{EA634ACC-B4A9-DA77-70C6-123C73731191}"/>
               </a:ext>
             </a:extLst>
           </p:cNvPr>
@@ -2507,7 +2507,7 @@
           <p:cNvPr id="3" name="그림 개체 틀 2">
             <a:extLst>
               <a:ext uri="{FF2B5EF4-FFF2-40B4-BE49-F238E27FC236}">
-                <a16:creationId xmlns:a16="http://schemas.microsoft.com/office/drawing/2014/main" id="{8DC2118B-5DB0-A0A5-CE19-5518799A3CA4}"/>
+                <a16:creationId xmlns:a16="http://schemas.microsoft.com/office/drawing/2014/main" id="{A64872B3-74F3-0ECC-35EA-900A64EB193F}"/>
               </a:ext>
             </a:extLst>
           </p:cNvPr>
@@ -2574,7 +2574,7 @@
           <p:cNvPr id="4" name="텍스트 개체 틀 3">
             <a:extLst>
               <a:ext uri="{FF2B5EF4-FFF2-40B4-BE49-F238E27FC236}">
-                <a16:creationId xmlns:a16="http://schemas.microsoft.com/office/drawing/2014/main" id="{731027DB-3609-641F-42A9-6D17442D0261}"/>
+                <a16:creationId xmlns:a16="http://schemas.microsoft.com/office/drawing/2014/main" id="{7526363E-F695-EAEC-1CEE-BF5CA48B8339}"/>
               </a:ext>
             </a:extLst>
           </p:cNvPr>
@@ -2645,7 +2645,7 @@
           <p:cNvPr id="5" name="날짜 개체 틀 4">
             <a:extLst>
               <a:ext uri="{FF2B5EF4-FFF2-40B4-BE49-F238E27FC236}">
-                <a16:creationId xmlns:a16="http://schemas.microsoft.com/office/drawing/2014/main" id="{AA1EB617-066A-7473-7EEB-4BAE7744762E}"/>
+                <a16:creationId xmlns:a16="http://schemas.microsoft.com/office/drawing/2014/main" id="{A9FE07A0-476B-46F5-E9E0-9BCDA48E2935}"/>
               </a:ext>
             </a:extLst>
           </p:cNvPr>
@@ -2661,9 +2661,9 @@
           <a:bodyPr/>
           <a:lstStyle/>
           <a:p>
-            <a:fld id="{EBFAA884-F683-4FDC-A78F-6371499EC8A3}" type="datetimeFigureOut">
+            <a:fld id="{3370C868-F4B3-48CD-90E2-B37D272DCE1D}" type="datetimeFigureOut">
               <a:rPr lang="ko-KR" altLang="en-US" smtClean="0"/>
-              <a:t>2026-06-20</a:t>
+              <a:t>2026-06-21</a:t>
             </a:fld>
             <a:endParaRPr lang="ko-KR" altLang="en-US"/>
           </a:p>
@@ -2674,7 +2674,7 @@
           <p:cNvPr id="6" name="바닥글 개체 틀 5">
             <a:extLst>
               <a:ext uri="{FF2B5EF4-FFF2-40B4-BE49-F238E27FC236}">
-                <a16:creationId xmlns:a16="http://schemas.microsoft.com/office/drawing/2014/main" id="{5132F472-8C99-D222-11B0-0EF23E914EFD}"/>
+                <a16:creationId xmlns:a16="http://schemas.microsoft.com/office/drawing/2014/main" id="{DD59FC95-CE8C-D369-BFD3-6B0A3577810A}"/>
               </a:ext>
             </a:extLst>
           </p:cNvPr>
@@ -2699,7 +2699,7 @@
           <p:cNvPr id="7" name="슬라이드 번호 개체 틀 6">
             <a:extLst>
               <a:ext uri="{FF2B5EF4-FFF2-40B4-BE49-F238E27FC236}">
-                <a16:creationId xmlns:a16="http://schemas.microsoft.com/office/drawing/2014/main" id="{15B48BFA-BDED-F933-7929-156BFA13C02F}"/>
+                <a16:creationId xmlns:a16="http://schemas.microsoft.com/office/drawing/2014/main" id="{E71E5E9D-DB06-E83B-16D5-86B22D0FAB48}"/>
               </a:ext>
             </a:extLst>
           </p:cNvPr>
@@ -2715,7 +2715,7 @@
           <a:bodyPr/>
           <a:lstStyle/>
           <a:p>
-            <a:fld id="{00FE27F2-B0EF-4A9C-944A-F494E2E34A9E}" type="slidenum">
+            <a:fld id="{68E19554-FD31-4E43-B9E4-FE8925EEE262}" type="slidenum">
               <a:rPr lang="ko-KR" altLang="en-US" smtClean="0"/>
               <a:t>‹#›</a:t>
             </a:fld>
@@ -2726,7 +2726,7 @@
     </p:spTree>
     <p:extLst>
       <p:ext uri="{BB962C8B-B14F-4D97-AF65-F5344CB8AC3E}">
-        <p14:creationId xmlns:p14="http://schemas.microsoft.com/office/powerpoint/2010/main" val="1431219515"/>
+        <p14:creationId xmlns:p14="http://schemas.microsoft.com/office/powerpoint/2010/main" val="3016347252"/>
       </p:ext>
     </p:extLst>
   </p:cSld>
@@ -2763,7 +2763,7 @@
           <p:cNvPr id="2" name="제목 개체 틀 1">
             <a:extLst>
               <a:ext uri="{FF2B5EF4-FFF2-40B4-BE49-F238E27FC236}">
-                <a16:creationId xmlns:a16="http://schemas.microsoft.com/office/drawing/2014/main" id="{DF986A73-51EE-74B5-B6EE-85BD928DC40E}"/>
+                <a16:creationId xmlns:a16="http://schemas.microsoft.com/office/drawing/2014/main" id="{EF028D27-80DF-F1AA-BB7A-5B2F4CD024E8}"/>
               </a:ext>
             </a:extLst>
           </p:cNvPr>
@@ -2801,7 +2801,7 @@
           <p:cNvPr id="3" name="텍스트 개체 틀 2">
             <a:extLst>
               <a:ext uri="{FF2B5EF4-FFF2-40B4-BE49-F238E27FC236}">
-                <a16:creationId xmlns:a16="http://schemas.microsoft.com/office/drawing/2014/main" id="{FDF744A4-C9A8-864F-CD85-64CC43AB210D}"/>
+                <a16:creationId xmlns:a16="http://schemas.microsoft.com/office/drawing/2014/main" id="{F312E66C-F776-750D-C400-B7ED482F6C5E}"/>
               </a:ext>
             </a:extLst>
           </p:cNvPr>
@@ -2868,7 +2868,7 @@
           <p:cNvPr id="4" name="날짜 개체 틀 3">
             <a:extLst>
               <a:ext uri="{FF2B5EF4-FFF2-40B4-BE49-F238E27FC236}">
-                <a16:creationId xmlns:a16="http://schemas.microsoft.com/office/drawing/2014/main" id="{3D5821E0-5AB2-73ED-C160-C1512FD68136}"/>
+                <a16:creationId xmlns:a16="http://schemas.microsoft.com/office/drawing/2014/main" id="{1C906D6F-8B1F-22AF-A777-F3B05229E5FB}"/>
               </a:ext>
             </a:extLst>
           </p:cNvPr>
@@ -2902,9 +2902,9 @@
             </a:lvl1pPr>
           </a:lstStyle>
           <a:p>
-            <a:fld id="{EBFAA884-F683-4FDC-A78F-6371499EC8A3}" type="datetimeFigureOut">
+            <a:fld id="{3370C868-F4B3-48CD-90E2-B37D272DCE1D}" type="datetimeFigureOut">
               <a:rPr lang="ko-KR" altLang="en-US" smtClean="0"/>
-              <a:t>2026-06-20</a:t>
+              <a:t>2026-06-21</a:t>
             </a:fld>
             <a:endParaRPr lang="ko-KR" altLang="en-US"/>
           </a:p>
@@ -2915,7 +2915,7 @@
           <p:cNvPr id="5" name="바닥글 개체 틀 4">
             <a:extLst>
               <a:ext uri="{FF2B5EF4-FFF2-40B4-BE49-F238E27FC236}">
-                <a16:creationId xmlns:a16="http://schemas.microsoft.com/office/drawing/2014/main" id="{3061F1B2-70E4-EA5E-1FA5-FB0879FA35A1}"/>
+                <a16:creationId xmlns:a16="http://schemas.microsoft.com/office/drawing/2014/main" id="{BE9F7CDE-84A8-0C5D-E32B-642C1C19DDC6}"/>
               </a:ext>
             </a:extLst>
           </p:cNvPr>
@@ -2958,7 +2958,7 @@
           <p:cNvPr id="6" name="슬라이드 번호 개체 틀 5">
             <a:extLst>
               <a:ext uri="{FF2B5EF4-FFF2-40B4-BE49-F238E27FC236}">
-                <a16:creationId xmlns:a16="http://schemas.microsoft.com/office/drawing/2014/main" id="{FB105A6B-1D65-CBD6-C3F5-4F8703CC755D}"/>
+                <a16:creationId xmlns:a16="http://schemas.microsoft.com/office/drawing/2014/main" id="{A3FE377F-A0EB-1613-FEF7-173188A085DD}"/>
               </a:ext>
             </a:extLst>
           </p:cNvPr>
@@ -2992,7 +2992,7 @@
             </a:lvl1pPr>
           </a:lstStyle>
           <a:p>
-            <a:fld id="{00FE27F2-B0EF-4A9C-944A-F494E2E34A9E}" type="slidenum">
+            <a:fld id="{68E19554-FD31-4E43-B9E4-FE8925EEE262}" type="slidenum">
               <a:rPr lang="ko-KR" altLang="en-US" smtClean="0"/>
               <a:t>‹#›</a:t>
             </a:fld>
@@ -3003,7 +3003,7 @@
     </p:spTree>
     <p:extLst>
       <p:ext uri="{BB962C8B-B14F-4D97-AF65-F5344CB8AC3E}">
-        <p14:creationId xmlns:p14="http://schemas.microsoft.com/office/powerpoint/2010/main" val="431182570"/>
+        <p14:creationId xmlns:p14="http://schemas.microsoft.com/office/powerpoint/2010/main" val="1904865545"/>
       </p:ext>
     </p:extLst>
   </p:cSld>
@@ -3326,7 +3326,7 @@
           <p:cNvPr id="3" name="그래픽 2">
             <a:extLst>
               <a:ext uri="{FF2B5EF4-FFF2-40B4-BE49-F238E27FC236}">
-                <a16:creationId xmlns:a16="http://schemas.microsoft.com/office/drawing/2014/main" id="{ACD4F764-3CFE-0A36-9B07-A8D9644CA1B3}"/>
+                <a16:creationId xmlns:a16="http://schemas.microsoft.com/office/drawing/2014/main" id="{2F9A19B0-CF1A-B691-51FF-7BA6C1BD9DB2}"/>
               </a:ext>
             </a:extLst>
           </p:cNvPr>
@@ -3360,7 +3360,7 @@
     </p:spTree>
     <p:extLst>
       <p:ext uri="{BB962C8B-B14F-4D97-AF65-F5344CB8AC3E}">
-        <p14:creationId xmlns:p14="http://schemas.microsoft.com/office/powerpoint/2010/main" val="2289986395"/>
+        <p14:creationId xmlns:p14="http://schemas.microsoft.com/office/powerpoint/2010/main" val="3399286896"/>
       </p:ext>
     </p:extLst>
   </p:cSld>

--- a/docs/assets/infographic-seed-gallery.pptx
+++ b/docs/assets/infographic-seed-gallery.pptx
@@ -129,7 +129,7 @@
           <p:cNvPr id="2" name="제목 1">
             <a:extLst>
               <a:ext uri="{FF2B5EF4-FFF2-40B4-BE49-F238E27FC236}">
-                <a16:creationId xmlns:a16="http://schemas.microsoft.com/office/drawing/2014/main" id="{76D46781-20C7-035D-2910-1C3A061DF7B5}"/>
+                <a16:creationId xmlns:a16="http://schemas.microsoft.com/office/drawing/2014/main" id="{618316DE-CF5A-0E4F-AC54-486F383EDA0F}"/>
               </a:ext>
             </a:extLst>
           </p:cNvPr>
@@ -166,7 +166,7 @@
           <p:cNvPr id="3" name="부제목 2">
             <a:extLst>
               <a:ext uri="{FF2B5EF4-FFF2-40B4-BE49-F238E27FC236}">
-                <a16:creationId xmlns:a16="http://schemas.microsoft.com/office/drawing/2014/main" id="{EFDCAA7B-DCA3-0A29-B3A3-D933A933C5DF}"/>
+                <a16:creationId xmlns:a16="http://schemas.microsoft.com/office/drawing/2014/main" id="{4FB1E2B3-71CF-159F-AAE5-A6513F82B36E}"/>
               </a:ext>
             </a:extLst>
           </p:cNvPr>
@@ -236,7 +236,7 @@
           <p:cNvPr id="4" name="날짜 개체 틀 3">
             <a:extLst>
               <a:ext uri="{FF2B5EF4-FFF2-40B4-BE49-F238E27FC236}">
-                <a16:creationId xmlns:a16="http://schemas.microsoft.com/office/drawing/2014/main" id="{1E785CBD-2DBE-AE7C-9BE7-0806CB1BE115}"/>
+                <a16:creationId xmlns:a16="http://schemas.microsoft.com/office/drawing/2014/main" id="{889A5B35-8F13-4BFE-6BAC-834E45D5DB73}"/>
               </a:ext>
             </a:extLst>
           </p:cNvPr>
@@ -252,7 +252,7 @@
           <a:bodyPr/>
           <a:lstStyle/>
           <a:p>
-            <a:fld id="{3370C868-F4B3-48CD-90E2-B37D272DCE1D}" type="datetimeFigureOut">
+            <a:fld id="{C3BB9B9E-20BD-41C5-837D-C991663DAB9A}" type="datetimeFigureOut">
               <a:rPr lang="ko-KR" altLang="en-US" smtClean="0"/>
               <a:t>2026-06-21</a:t>
             </a:fld>
@@ -265,7 +265,7 @@
           <p:cNvPr id="5" name="바닥글 개체 틀 4">
             <a:extLst>
               <a:ext uri="{FF2B5EF4-FFF2-40B4-BE49-F238E27FC236}">
-                <a16:creationId xmlns:a16="http://schemas.microsoft.com/office/drawing/2014/main" id="{7602323C-DE4F-7530-C434-C26BA668BD88}"/>
+                <a16:creationId xmlns:a16="http://schemas.microsoft.com/office/drawing/2014/main" id="{E0A2762B-B067-1E95-8409-AFC1B6408D70}"/>
               </a:ext>
             </a:extLst>
           </p:cNvPr>
@@ -290,7 +290,7 @@
           <p:cNvPr id="6" name="슬라이드 번호 개체 틀 5">
             <a:extLst>
               <a:ext uri="{FF2B5EF4-FFF2-40B4-BE49-F238E27FC236}">
-                <a16:creationId xmlns:a16="http://schemas.microsoft.com/office/drawing/2014/main" id="{C52DACD3-6556-8A3A-85F7-8E66C691A08F}"/>
+                <a16:creationId xmlns:a16="http://schemas.microsoft.com/office/drawing/2014/main" id="{73856D4B-C40D-E877-505D-0BD2EC8A0A4F}"/>
               </a:ext>
             </a:extLst>
           </p:cNvPr>
@@ -306,7 +306,7 @@
           <a:bodyPr/>
           <a:lstStyle/>
           <a:p>
-            <a:fld id="{68E19554-FD31-4E43-B9E4-FE8925EEE262}" type="slidenum">
+            <a:fld id="{C2F10704-BB78-4439-8903-72F1EA287DEC}" type="slidenum">
               <a:rPr lang="ko-KR" altLang="en-US" smtClean="0"/>
               <a:t>‹#›</a:t>
             </a:fld>
@@ -317,7 +317,7 @@
     </p:spTree>
     <p:extLst>
       <p:ext uri="{BB962C8B-B14F-4D97-AF65-F5344CB8AC3E}">
-        <p14:creationId xmlns:p14="http://schemas.microsoft.com/office/powerpoint/2010/main" val="4271179612"/>
+        <p14:creationId xmlns:p14="http://schemas.microsoft.com/office/powerpoint/2010/main" val="2562357112"/>
       </p:ext>
     </p:extLst>
   </p:cSld>
@@ -349,7 +349,7 @@
           <p:cNvPr id="2" name="제목 1">
             <a:extLst>
               <a:ext uri="{FF2B5EF4-FFF2-40B4-BE49-F238E27FC236}">
-                <a16:creationId xmlns:a16="http://schemas.microsoft.com/office/drawing/2014/main" id="{E8F252EF-F2A9-8947-CB8C-F53B2E6EFA80}"/>
+                <a16:creationId xmlns:a16="http://schemas.microsoft.com/office/drawing/2014/main" id="{4776791A-663D-9C03-0A62-9AA1291134F3}"/>
               </a:ext>
             </a:extLst>
           </p:cNvPr>
@@ -377,7 +377,7 @@
           <p:cNvPr id="3" name="세로 텍스트 개체 틀 2">
             <a:extLst>
               <a:ext uri="{FF2B5EF4-FFF2-40B4-BE49-F238E27FC236}">
-                <a16:creationId xmlns:a16="http://schemas.microsoft.com/office/drawing/2014/main" id="{AE9CB243-D69D-6A50-5117-E8C3F089FEA1}"/>
+                <a16:creationId xmlns:a16="http://schemas.microsoft.com/office/drawing/2014/main" id="{ABF09AF9-F7BB-4427-B652-89650BE88926}"/>
               </a:ext>
             </a:extLst>
           </p:cNvPr>
@@ -434,7 +434,7 @@
           <p:cNvPr id="4" name="날짜 개체 틀 3">
             <a:extLst>
               <a:ext uri="{FF2B5EF4-FFF2-40B4-BE49-F238E27FC236}">
-                <a16:creationId xmlns:a16="http://schemas.microsoft.com/office/drawing/2014/main" id="{FAD70EE7-3D3C-8D18-FCF3-F58E2D1A8B4B}"/>
+                <a16:creationId xmlns:a16="http://schemas.microsoft.com/office/drawing/2014/main" id="{4729288F-69C5-F80F-A676-0241EE06A198}"/>
               </a:ext>
             </a:extLst>
           </p:cNvPr>
@@ -450,7 +450,7 @@
           <a:bodyPr/>
           <a:lstStyle/>
           <a:p>
-            <a:fld id="{3370C868-F4B3-48CD-90E2-B37D272DCE1D}" type="datetimeFigureOut">
+            <a:fld id="{C3BB9B9E-20BD-41C5-837D-C991663DAB9A}" type="datetimeFigureOut">
               <a:rPr lang="ko-KR" altLang="en-US" smtClean="0"/>
               <a:t>2026-06-21</a:t>
             </a:fld>
@@ -463,7 +463,7 @@
           <p:cNvPr id="5" name="바닥글 개체 틀 4">
             <a:extLst>
               <a:ext uri="{FF2B5EF4-FFF2-40B4-BE49-F238E27FC236}">
-                <a16:creationId xmlns:a16="http://schemas.microsoft.com/office/drawing/2014/main" id="{B8976930-03A7-1CD1-8268-F74A42971B7E}"/>
+                <a16:creationId xmlns:a16="http://schemas.microsoft.com/office/drawing/2014/main" id="{F55396D0-4D21-19DC-1EF1-07E35D51CF00}"/>
               </a:ext>
             </a:extLst>
           </p:cNvPr>
@@ -488,7 +488,7 @@
           <p:cNvPr id="6" name="슬라이드 번호 개체 틀 5">
             <a:extLst>
               <a:ext uri="{FF2B5EF4-FFF2-40B4-BE49-F238E27FC236}">
-                <a16:creationId xmlns:a16="http://schemas.microsoft.com/office/drawing/2014/main" id="{8DCC9124-1AAE-B6EC-3332-D76B2452B584}"/>
+                <a16:creationId xmlns:a16="http://schemas.microsoft.com/office/drawing/2014/main" id="{953CE329-6BF8-A36E-B792-BF9E585AF004}"/>
               </a:ext>
             </a:extLst>
           </p:cNvPr>
@@ -504,7 +504,7 @@
           <a:bodyPr/>
           <a:lstStyle/>
           <a:p>
-            <a:fld id="{68E19554-FD31-4E43-B9E4-FE8925EEE262}" type="slidenum">
+            <a:fld id="{C2F10704-BB78-4439-8903-72F1EA287DEC}" type="slidenum">
               <a:rPr lang="ko-KR" altLang="en-US" smtClean="0"/>
               <a:t>‹#›</a:t>
             </a:fld>
@@ -515,7 +515,7 @@
     </p:spTree>
     <p:extLst>
       <p:ext uri="{BB962C8B-B14F-4D97-AF65-F5344CB8AC3E}">
-        <p14:creationId xmlns:p14="http://schemas.microsoft.com/office/powerpoint/2010/main" val="422420331"/>
+        <p14:creationId xmlns:p14="http://schemas.microsoft.com/office/powerpoint/2010/main" val="4272877961"/>
       </p:ext>
     </p:extLst>
   </p:cSld>
@@ -547,7 +547,7 @@
           <p:cNvPr id="2" name="세로 제목 1">
             <a:extLst>
               <a:ext uri="{FF2B5EF4-FFF2-40B4-BE49-F238E27FC236}">
-                <a16:creationId xmlns:a16="http://schemas.microsoft.com/office/drawing/2014/main" id="{4F6C3F05-36AA-D6BF-8B22-8DA83F969C6C}"/>
+                <a16:creationId xmlns:a16="http://schemas.microsoft.com/office/drawing/2014/main" id="{EA5F2948-65C9-86B6-7FEE-4134914836AB}"/>
               </a:ext>
             </a:extLst>
           </p:cNvPr>
@@ -580,7 +580,7 @@
           <p:cNvPr id="3" name="세로 텍스트 개체 틀 2">
             <a:extLst>
               <a:ext uri="{FF2B5EF4-FFF2-40B4-BE49-F238E27FC236}">
-                <a16:creationId xmlns:a16="http://schemas.microsoft.com/office/drawing/2014/main" id="{98EEADEE-04F3-066B-A204-8AD85ABE846C}"/>
+                <a16:creationId xmlns:a16="http://schemas.microsoft.com/office/drawing/2014/main" id="{287F97AB-163A-317B-1458-24A499AF6E5B}"/>
               </a:ext>
             </a:extLst>
           </p:cNvPr>
@@ -642,7 +642,7 @@
           <p:cNvPr id="4" name="날짜 개체 틀 3">
             <a:extLst>
               <a:ext uri="{FF2B5EF4-FFF2-40B4-BE49-F238E27FC236}">
-                <a16:creationId xmlns:a16="http://schemas.microsoft.com/office/drawing/2014/main" id="{4275D14F-AAC0-19CD-46C8-B556E6736ADC}"/>
+                <a16:creationId xmlns:a16="http://schemas.microsoft.com/office/drawing/2014/main" id="{30FA3CDC-BE68-DECD-751B-94F91C8A6A45}"/>
               </a:ext>
             </a:extLst>
           </p:cNvPr>
@@ -658,7 +658,7 @@
           <a:bodyPr/>
           <a:lstStyle/>
           <a:p>
-            <a:fld id="{3370C868-F4B3-48CD-90E2-B37D272DCE1D}" type="datetimeFigureOut">
+            <a:fld id="{C3BB9B9E-20BD-41C5-837D-C991663DAB9A}" type="datetimeFigureOut">
               <a:rPr lang="ko-KR" altLang="en-US" smtClean="0"/>
               <a:t>2026-06-21</a:t>
             </a:fld>
@@ -671,7 +671,7 @@
           <p:cNvPr id="5" name="바닥글 개체 틀 4">
             <a:extLst>
               <a:ext uri="{FF2B5EF4-FFF2-40B4-BE49-F238E27FC236}">
-                <a16:creationId xmlns:a16="http://schemas.microsoft.com/office/drawing/2014/main" id="{581539CF-B700-F5F1-0929-B59EC13DAD1F}"/>
+                <a16:creationId xmlns:a16="http://schemas.microsoft.com/office/drawing/2014/main" id="{668C986C-45A7-E0A0-6BF2-85DFE0083A49}"/>
               </a:ext>
             </a:extLst>
           </p:cNvPr>
@@ -696,7 +696,7 @@
           <p:cNvPr id="6" name="슬라이드 번호 개체 틀 5">
             <a:extLst>
               <a:ext uri="{FF2B5EF4-FFF2-40B4-BE49-F238E27FC236}">
-                <a16:creationId xmlns:a16="http://schemas.microsoft.com/office/drawing/2014/main" id="{E038C566-4178-8F6B-BB6F-E30BD5E5EE08}"/>
+                <a16:creationId xmlns:a16="http://schemas.microsoft.com/office/drawing/2014/main" id="{FC0B2D51-CDF8-122B-332C-7EEEDD86215B}"/>
               </a:ext>
             </a:extLst>
           </p:cNvPr>
@@ -712,7 +712,7 @@
           <a:bodyPr/>
           <a:lstStyle/>
           <a:p>
-            <a:fld id="{68E19554-FD31-4E43-B9E4-FE8925EEE262}" type="slidenum">
+            <a:fld id="{C2F10704-BB78-4439-8903-72F1EA287DEC}" type="slidenum">
               <a:rPr lang="ko-KR" altLang="en-US" smtClean="0"/>
               <a:t>‹#›</a:t>
             </a:fld>
@@ -723,7 +723,7 @@
     </p:spTree>
     <p:extLst>
       <p:ext uri="{BB962C8B-B14F-4D97-AF65-F5344CB8AC3E}">
-        <p14:creationId xmlns:p14="http://schemas.microsoft.com/office/powerpoint/2010/main" val="485301787"/>
+        <p14:creationId xmlns:p14="http://schemas.microsoft.com/office/powerpoint/2010/main" val="3000015542"/>
       </p:ext>
     </p:extLst>
   </p:cSld>
@@ -755,7 +755,7 @@
           <p:cNvPr id="2" name="제목 1">
             <a:extLst>
               <a:ext uri="{FF2B5EF4-FFF2-40B4-BE49-F238E27FC236}">
-                <a16:creationId xmlns:a16="http://schemas.microsoft.com/office/drawing/2014/main" id="{8EF19C4D-BB4E-1FC0-25F5-15BBE4ADB3B7}"/>
+                <a16:creationId xmlns:a16="http://schemas.microsoft.com/office/drawing/2014/main" id="{1D9AD601-D99B-D4DD-780B-6C6B9C2FD075}"/>
               </a:ext>
             </a:extLst>
           </p:cNvPr>
@@ -783,7 +783,7 @@
           <p:cNvPr id="3" name="내용 개체 틀 2">
             <a:extLst>
               <a:ext uri="{FF2B5EF4-FFF2-40B4-BE49-F238E27FC236}">
-                <a16:creationId xmlns:a16="http://schemas.microsoft.com/office/drawing/2014/main" id="{841610FC-49F8-D9F4-D0EB-F01785F7D557}"/>
+                <a16:creationId xmlns:a16="http://schemas.microsoft.com/office/drawing/2014/main" id="{8832D405-4D43-E918-8DC6-4A28D68ED544}"/>
               </a:ext>
             </a:extLst>
           </p:cNvPr>
@@ -840,7 +840,7 @@
           <p:cNvPr id="4" name="날짜 개체 틀 3">
             <a:extLst>
               <a:ext uri="{FF2B5EF4-FFF2-40B4-BE49-F238E27FC236}">
-                <a16:creationId xmlns:a16="http://schemas.microsoft.com/office/drawing/2014/main" id="{7DDB4B3F-2D7E-F8FE-1A3F-6198A329FE44}"/>
+                <a16:creationId xmlns:a16="http://schemas.microsoft.com/office/drawing/2014/main" id="{1A969854-D385-28A0-7620-164A18031839}"/>
               </a:ext>
             </a:extLst>
           </p:cNvPr>
@@ -856,7 +856,7 @@
           <a:bodyPr/>
           <a:lstStyle/>
           <a:p>
-            <a:fld id="{3370C868-F4B3-48CD-90E2-B37D272DCE1D}" type="datetimeFigureOut">
+            <a:fld id="{C3BB9B9E-20BD-41C5-837D-C991663DAB9A}" type="datetimeFigureOut">
               <a:rPr lang="ko-KR" altLang="en-US" smtClean="0"/>
               <a:t>2026-06-21</a:t>
             </a:fld>
@@ -869,7 +869,7 @@
           <p:cNvPr id="5" name="바닥글 개체 틀 4">
             <a:extLst>
               <a:ext uri="{FF2B5EF4-FFF2-40B4-BE49-F238E27FC236}">
-                <a16:creationId xmlns:a16="http://schemas.microsoft.com/office/drawing/2014/main" id="{3C59067B-3856-41E0-A1F1-F9FC314E86F1}"/>
+                <a16:creationId xmlns:a16="http://schemas.microsoft.com/office/drawing/2014/main" id="{297C673B-CDA9-FB1A-2102-6CCB20355F53}"/>
               </a:ext>
             </a:extLst>
           </p:cNvPr>
@@ -894,7 +894,7 @@
           <p:cNvPr id="6" name="슬라이드 번호 개체 틀 5">
             <a:extLst>
               <a:ext uri="{FF2B5EF4-FFF2-40B4-BE49-F238E27FC236}">
-                <a16:creationId xmlns:a16="http://schemas.microsoft.com/office/drawing/2014/main" id="{CE2BC39B-29C5-3875-1631-4DACF30C0BFB}"/>
+                <a16:creationId xmlns:a16="http://schemas.microsoft.com/office/drawing/2014/main" id="{BA4913F9-82D2-68D8-33CC-47841D0C1EEC}"/>
               </a:ext>
             </a:extLst>
           </p:cNvPr>
@@ -910,7 +910,7 @@
           <a:bodyPr/>
           <a:lstStyle/>
           <a:p>
-            <a:fld id="{68E19554-FD31-4E43-B9E4-FE8925EEE262}" type="slidenum">
+            <a:fld id="{C2F10704-BB78-4439-8903-72F1EA287DEC}" type="slidenum">
               <a:rPr lang="ko-KR" altLang="en-US" smtClean="0"/>
               <a:t>‹#›</a:t>
             </a:fld>
@@ -921,7 +921,7 @@
     </p:spTree>
     <p:extLst>
       <p:ext uri="{BB962C8B-B14F-4D97-AF65-F5344CB8AC3E}">
-        <p14:creationId xmlns:p14="http://schemas.microsoft.com/office/powerpoint/2010/main" val="157810278"/>
+        <p14:creationId xmlns:p14="http://schemas.microsoft.com/office/powerpoint/2010/main" val="3938135763"/>
       </p:ext>
     </p:extLst>
   </p:cSld>
@@ -953,7 +953,7 @@
           <p:cNvPr id="2" name="제목 1">
             <a:extLst>
               <a:ext uri="{FF2B5EF4-FFF2-40B4-BE49-F238E27FC236}">
-                <a16:creationId xmlns:a16="http://schemas.microsoft.com/office/drawing/2014/main" id="{59F915E2-4E1E-F457-273B-AC57E8D37C6C}"/>
+                <a16:creationId xmlns:a16="http://schemas.microsoft.com/office/drawing/2014/main" id="{8E315BD7-8728-6696-7F9F-6B5369E6793E}"/>
               </a:ext>
             </a:extLst>
           </p:cNvPr>
@@ -990,7 +990,7 @@
           <p:cNvPr id="3" name="텍스트 개체 틀 2">
             <a:extLst>
               <a:ext uri="{FF2B5EF4-FFF2-40B4-BE49-F238E27FC236}">
-                <a16:creationId xmlns:a16="http://schemas.microsoft.com/office/drawing/2014/main" id="{C8A5008B-3DF1-04FB-2879-643BA9E37156}"/>
+                <a16:creationId xmlns:a16="http://schemas.microsoft.com/office/drawing/2014/main" id="{4354F503-EB91-DDD1-AE58-E4BFBC78FB24}"/>
               </a:ext>
             </a:extLst>
           </p:cNvPr>
@@ -1115,7 +1115,7 @@
           <p:cNvPr id="4" name="날짜 개체 틀 3">
             <a:extLst>
               <a:ext uri="{FF2B5EF4-FFF2-40B4-BE49-F238E27FC236}">
-                <a16:creationId xmlns:a16="http://schemas.microsoft.com/office/drawing/2014/main" id="{2B13040B-074E-4DA6-1CA6-8CEA964F5E89}"/>
+                <a16:creationId xmlns:a16="http://schemas.microsoft.com/office/drawing/2014/main" id="{5B3601B6-3C50-966C-38F2-79175E41CD2A}"/>
               </a:ext>
             </a:extLst>
           </p:cNvPr>
@@ -1131,7 +1131,7 @@
           <a:bodyPr/>
           <a:lstStyle/>
           <a:p>
-            <a:fld id="{3370C868-F4B3-48CD-90E2-B37D272DCE1D}" type="datetimeFigureOut">
+            <a:fld id="{C3BB9B9E-20BD-41C5-837D-C991663DAB9A}" type="datetimeFigureOut">
               <a:rPr lang="ko-KR" altLang="en-US" smtClean="0"/>
               <a:t>2026-06-21</a:t>
             </a:fld>
@@ -1144,7 +1144,7 @@
           <p:cNvPr id="5" name="바닥글 개체 틀 4">
             <a:extLst>
               <a:ext uri="{FF2B5EF4-FFF2-40B4-BE49-F238E27FC236}">
-                <a16:creationId xmlns:a16="http://schemas.microsoft.com/office/drawing/2014/main" id="{DE3E62B1-1770-0A96-EA21-352530ABD3D7}"/>
+                <a16:creationId xmlns:a16="http://schemas.microsoft.com/office/drawing/2014/main" id="{C1C46542-0581-3265-9390-5FBF65136265}"/>
               </a:ext>
             </a:extLst>
           </p:cNvPr>
@@ -1169,7 +1169,7 @@
           <p:cNvPr id="6" name="슬라이드 번호 개체 틀 5">
             <a:extLst>
               <a:ext uri="{FF2B5EF4-FFF2-40B4-BE49-F238E27FC236}">
-                <a16:creationId xmlns:a16="http://schemas.microsoft.com/office/drawing/2014/main" id="{3DC94541-D151-058C-EE0C-EE7BAB5DFA77}"/>
+                <a16:creationId xmlns:a16="http://schemas.microsoft.com/office/drawing/2014/main" id="{F111F1AD-BF5A-9C98-62DB-3913E3F26E80}"/>
               </a:ext>
             </a:extLst>
           </p:cNvPr>
@@ -1185,7 +1185,7 @@
           <a:bodyPr/>
           <a:lstStyle/>
           <a:p>
-            <a:fld id="{68E19554-FD31-4E43-B9E4-FE8925EEE262}" type="slidenum">
+            <a:fld id="{C2F10704-BB78-4439-8903-72F1EA287DEC}" type="slidenum">
               <a:rPr lang="ko-KR" altLang="en-US" smtClean="0"/>
               <a:t>‹#›</a:t>
             </a:fld>
@@ -1196,7 +1196,7 @@
     </p:spTree>
     <p:extLst>
       <p:ext uri="{BB962C8B-B14F-4D97-AF65-F5344CB8AC3E}">
-        <p14:creationId xmlns:p14="http://schemas.microsoft.com/office/powerpoint/2010/main" val="3276095909"/>
+        <p14:creationId xmlns:p14="http://schemas.microsoft.com/office/powerpoint/2010/main" val="1183288725"/>
       </p:ext>
     </p:extLst>
   </p:cSld>
@@ -1228,7 +1228,7 @@
           <p:cNvPr id="2" name="제목 1">
             <a:extLst>
               <a:ext uri="{FF2B5EF4-FFF2-40B4-BE49-F238E27FC236}">
-                <a16:creationId xmlns:a16="http://schemas.microsoft.com/office/drawing/2014/main" id="{06999547-405E-852F-77F2-39EE1F3BD59B}"/>
+                <a16:creationId xmlns:a16="http://schemas.microsoft.com/office/drawing/2014/main" id="{15A6CB95-9D18-7880-BB59-17480CFC6A33}"/>
               </a:ext>
             </a:extLst>
           </p:cNvPr>
@@ -1256,7 +1256,7 @@
           <p:cNvPr id="3" name="내용 개체 틀 2">
             <a:extLst>
               <a:ext uri="{FF2B5EF4-FFF2-40B4-BE49-F238E27FC236}">
-                <a16:creationId xmlns:a16="http://schemas.microsoft.com/office/drawing/2014/main" id="{A5812E6F-E5BD-DC7F-11AF-BD9763C7795A}"/>
+                <a16:creationId xmlns:a16="http://schemas.microsoft.com/office/drawing/2014/main" id="{93F742EC-CCB9-AED4-181F-3F8AE99752ED}"/>
               </a:ext>
             </a:extLst>
           </p:cNvPr>
@@ -1318,7 +1318,7 @@
           <p:cNvPr id="4" name="내용 개체 틀 3">
             <a:extLst>
               <a:ext uri="{FF2B5EF4-FFF2-40B4-BE49-F238E27FC236}">
-                <a16:creationId xmlns:a16="http://schemas.microsoft.com/office/drawing/2014/main" id="{4FD8B923-9992-2760-6928-DEBEE192593F}"/>
+                <a16:creationId xmlns:a16="http://schemas.microsoft.com/office/drawing/2014/main" id="{D6167C3C-FE92-81C4-0792-870AA1040B8F}"/>
               </a:ext>
             </a:extLst>
           </p:cNvPr>
@@ -1380,7 +1380,7 @@
           <p:cNvPr id="5" name="날짜 개체 틀 4">
             <a:extLst>
               <a:ext uri="{FF2B5EF4-FFF2-40B4-BE49-F238E27FC236}">
-                <a16:creationId xmlns:a16="http://schemas.microsoft.com/office/drawing/2014/main" id="{D8C22BC4-D634-C33D-CA4E-CA5B0D0C4BA9}"/>
+                <a16:creationId xmlns:a16="http://schemas.microsoft.com/office/drawing/2014/main" id="{2EFFF703-B510-980D-9F71-48A59F16BD69}"/>
               </a:ext>
             </a:extLst>
           </p:cNvPr>
@@ -1396,7 +1396,7 @@
           <a:bodyPr/>
           <a:lstStyle/>
           <a:p>
-            <a:fld id="{3370C868-F4B3-48CD-90E2-B37D272DCE1D}" type="datetimeFigureOut">
+            <a:fld id="{C3BB9B9E-20BD-41C5-837D-C991663DAB9A}" type="datetimeFigureOut">
               <a:rPr lang="ko-KR" altLang="en-US" smtClean="0"/>
               <a:t>2026-06-21</a:t>
             </a:fld>
@@ -1409,7 +1409,7 @@
           <p:cNvPr id="6" name="바닥글 개체 틀 5">
             <a:extLst>
               <a:ext uri="{FF2B5EF4-FFF2-40B4-BE49-F238E27FC236}">
-                <a16:creationId xmlns:a16="http://schemas.microsoft.com/office/drawing/2014/main" id="{5BFB16E9-2AA1-B124-F32D-2F58D3AC3BF4}"/>
+                <a16:creationId xmlns:a16="http://schemas.microsoft.com/office/drawing/2014/main" id="{EF37FDF6-7A4A-3472-0BAA-098B12C376C7}"/>
               </a:ext>
             </a:extLst>
           </p:cNvPr>
@@ -1434,7 +1434,7 @@
           <p:cNvPr id="7" name="슬라이드 번호 개체 틀 6">
             <a:extLst>
               <a:ext uri="{FF2B5EF4-FFF2-40B4-BE49-F238E27FC236}">
-                <a16:creationId xmlns:a16="http://schemas.microsoft.com/office/drawing/2014/main" id="{29F53F54-0BEA-06CA-FEAD-A180D83D3AD1}"/>
+                <a16:creationId xmlns:a16="http://schemas.microsoft.com/office/drawing/2014/main" id="{43AEB3B0-B4C3-CB2A-0D6E-57781F722003}"/>
               </a:ext>
             </a:extLst>
           </p:cNvPr>
@@ -1450,7 +1450,7 @@
           <a:bodyPr/>
           <a:lstStyle/>
           <a:p>
-            <a:fld id="{68E19554-FD31-4E43-B9E4-FE8925EEE262}" type="slidenum">
+            <a:fld id="{C2F10704-BB78-4439-8903-72F1EA287DEC}" type="slidenum">
               <a:rPr lang="ko-KR" altLang="en-US" smtClean="0"/>
               <a:t>‹#›</a:t>
             </a:fld>
@@ -1461,7 +1461,7 @@
     </p:spTree>
     <p:extLst>
       <p:ext uri="{BB962C8B-B14F-4D97-AF65-F5344CB8AC3E}">
-        <p14:creationId xmlns:p14="http://schemas.microsoft.com/office/powerpoint/2010/main" val="187220063"/>
+        <p14:creationId xmlns:p14="http://schemas.microsoft.com/office/powerpoint/2010/main" val="3384516755"/>
       </p:ext>
     </p:extLst>
   </p:cSld>
@@ -1493,7 +1493,7 @@
           <p:cNvPr id="2" name="제목 1">
             <a:extLst>
               <a:ext uri="{FF2B5EF4-FFF2-40B4-BE49-F238E27FC236}">
-                <a16:creationId xmlns:a16="http://schemas.microsoft.com/office/drawing/2014/main" id="{A2B74480-8258-2D22-CCA2-E6D144662C04}"/>
+                <a16:creationId xmlns:a16="http://schemas.microsoft.com/office/drawing/2014/main" id="{28972963-587D-4B65-A8D7-724449F50F46}"/>
               </a:ext>
             </a:extLst>
           </p:cNvPr>
@@ -1526,7 +1526,7 @@
           <p:cNvPr id="3" name="텍스트 개체 틀 2">
             <a:extLst>
               <a:ext uri="{FF2B5EF4-FFF2-40B4-BE49-F238E27FC236}">
-                <a16:creationId xmlns:a16="http://schemas.microsoft.com/office/drawing/2014/main" id="{A47C67E9-2D29-A347-5333-4EAD2EE41C81}"/>
+                <a16:creationId xmlns:a16="http://schemas.microsoft.com/office/drawing/2014/main" id="{C792FABA-B703-5AD3-DF02-EDFED8AFD672}"/>
               </a:ext>
             </a:extLst>
           </p:cNvPr>
@@ -1597,7 +1597,7 @@
           <p:cNvPr id="4" name="내용 개체 틀 3">
             <a:extLst>
               <a:ext uri="{FF2B5EF4-FFF2-40B4-BE49-F238E27FC236}">
-                <a16:creationId xmlns:a16="http://schemas.microsoft.com/office/drawing/2014/main" id="{88411579-0D21-D9D6-EC57-DC15AE6BA682}"/>
+                <a16:creationId xmlns:a16="http://schemas.microsoft.com/office/drawing/2014/main" id="{89A695E7-5AFA-F3AE-5BF7-052540D25BA6}"/>
               </a:ext>
             </a:extLst>
           </p:cNvPr>
@@ -1659,7 +1659,7 @@
           <p:cNvPr id="5" name="텍스트 개체 틀 4">
             <a:extLst>
               <a:ext uri="{FF2B5EF4-FFF2-40B4-BE49-F238E27FC236}">
-                <a16:creationId xmlns:a16="http://schemas.microsoft.com/office/drawing/2014/main" id="{57C015CB-B81F-FBC5-D492-13D5DF77C666}"/>
+                <a16:creationId xmlns:a16="http://schemas.microsoft.com/office/drawing/2014/main" id="{F6198D8E-36A3-53D8-1540-B3234D878B7E}"/>
               </a:ext>
             </a:extLst>
           </p:cNvPr>
@@ -1730,7 +1730,7 @@
           <p:cNvPr id="6" name="내용 개체 틀 5">
             <a:extLst>
               <a:ext uri="{FF2B5EF4-FFF2-40B4-BE49-F238E27FC236}">
-                <a16:creationId xmlns:a16="http://schemas.microsoft.com/office/drawing/2014/main" id="{2794318F-3AE1-FD1C-B8DE-692A2819ACC6}"/>
+                <a16:creationId xmlns:a16="http://schemas.microsoft.com/office/drawing/2014/main" id="{160EBAAB-8430-E63A-ACD0-E713591CFB73}"/>
               </a:ext>
             </a:extLst>
           </p:cNvPr>
@@ -1792,7 +1792,7 @@
           <p:cNvPr id="7" name="날짜 개체 틀 6">
             <a:extLst>
               <a:ext uri="{FF2B5EF4-FFF2-40B4-BE49-F238E27FC236}">
-                <a16:creationId xmlns:a16="http://schemas.microsoft.com/office/drawing/2014/main" id="{D699F3FD-5878-E8B4-DEB9-1E88F40FBEE0}"/>
+                <a16:creationId xmlns:a16="http://schemas.microsoft.com/office/drawing/2014/main" id="{A86D37DA-5983-949E-8CE4-2CBFBB3E24E7}"/>
               </a:ext>
             </a:extLst>
           </p:cNvPr>
@@ -1808,7 +1808,7 @@
           <a:bodyPr/>
           <a:lstStyle/>
           <a:p>
-            <a:fld id="{3370C868-F4B3-48CD-90E2-B37D272DCE1D}" type="datetimeFigureOut">
+            <a:fld id="{C3BB9B9E-20BD-41C5-837D-C991663DAB9A}" type="datetimeFigureOut">
               <a:rPr lang="ko-KR" altLang="en-US" smtClean="0"/>
               <a:t>2026-06-21</a:t>
             </a:fld>
@@ -1821,7 +1821,7 @@
           <p:cNvPr id="8" name="바닥글 개체 틀 7">
             <a:extLst>
               <a:ext uri="{FF2B5EF4-FFF2-40B4-BE49-F238E27FC236}">
-                <a16:creationId xmlns:a16="http://schemas.microsoft.com/office/drawing/2014/main" id="{DA202C3F-2815-4388-22E9-3F2B0BCAE90A}"/>
+                <a16:creationId xmlns:a16="http://schemas.microsoft.com/office/drawing/2014/main" id="{AA60B9B7-D330-7FC1-460A-727565D8F6D0}"/>
               </a:ext>
             </a:extLst>
           </p:cNvPr>
@@ -1846,7 +1846,7 @@
           <p:cNvPr id="9" name="슬라이드 번호 개체 틀 8">
             <a:extLst>
               <a:ext uri="{FF2B5EF4-FFF2-40B4-BE49-F238E27FC236}">
-                <a16:creationId xmlns:a16="http://schemas.microsoft.com/office/drawing/2014/main" id="{C87C3F4B-718C-8055-747A-45DAF9F716E0}"/>
+                <a16:creationId xmlns:a16="http://schemas.microsoft.com/office/drawing/2014/main" id="{F6820AB1-75E6-F8F6-7E68-DC1B47DEB68B}"/>
               </a:ext>
             </a:extLst>
           </p:cNvPr>
@@ -1862,7 +1862,7 @@
           <a:bodyPr/>
           <a:lstStyle/>
           <a:p>
-            <a:fld id="{68E19554-FD31-4E43-B9E4-FE8925EEE262}" type="slidenum">
+            <a:fld id="{C2F10704-BB78-4439-8903-72F1EA287DEC}" type="slidenum">
               <a:rPr lang="ko-KR" altLang="en-US" smtClean="0"/>
               <a:t>‹#›</a:t>
             </a:fld>
@@ -1873,7 +1873,7 @@
     </p:spTree>
     <p:extLst>
       <p:ext uri="{BB962C8B-B14F-4D97-AF65-F5344CB8AC3E}">
-        <p14:creationId xmlns:p14="http://schemas.microsoft.com/office/powerpoint/2010/main" val="560225199"/>
+        <p14:creationId xmlns:p14="http://schemas.microsoft.com/office/powerpoint/2010/main" val="3747228535"/>
       </p:ext>
     </p:extLst>
   </p:cSld>
@@ -1905,7 +1905,7 @@
           <p:cNvPr id="2" name="제목 1">
             <a:extLst>
               <a:ext uri="{FF2B5EF4-FFF2-40B4-BE49-F238E27FC236}">
-                <a16:creationId xmlns:a16="http://schemas.microsoft.com/office/drawing/2014/main" id="{FEC7921B-3D09-485D-487C-8ECBD2495346}"/>
+                <a16:creationId xmlns:a16="http://schemas.microsoft.com/office/drawing/2014/main" id="{6B7B7332-A780-DF51-CE70-35CCEB08C151}"/>
               </a:ext>
             </a:extLst>
           </p:cNvPr>
@@ -1933,7 +1933,7 @@
           <p:cNvPr id="3" name="날짜 개체 틀 2">
             <a:extLst>
               <a:ext uri="{FF2B5EF4-FFF2-40B4-BE49-F238E27FC236}">
-                <a16:creationId xmlns:a16="http://schemas.microsoft.com/office/drawing/2014/main" id="{102E0D6B-8619-ACF8-8284-64EC42B658DD}"/>
+                <a16:creationId xmlns:a16="http://schemas.microsoft.com/office/drawing/2014/main" id="{066818FC-82E9-AEB0-E61A-405781D64E4F}"/>
               </a:ext>
             </a:extLst>
           </p:cNvPr>
@@ -1949,7 +1949,7 @@
           <a:bodyPr/>
           <a:lstStyle/>
           <a:p>
-            <a:fld id="{3370C868-F4B3-48CD-90E2-B37D272DCE1D}" type="datetimeFigureOut">
+            <a:fld id="{C3BB9B9E-20BD-41C5-837D-C991663DAB9A}" type="datetimeFigureOut">
               <a:rPr lang="ko-KR" altLang="en-US" smtClean="0"/>
               <a:t>2026-06-21</a:t>
             </a:fld>
@@ -1962,7 +1962,7 @@
           <p:cNvPr id="4" name="바닥글 개체 틀 3">
             <a:extLst>
               <a:ext uri="{FF2B5EF4-FFF2-40B4-BE49-F238E27FC236}">
-                <a16:creationId xmlns:a16="http://schemas.microsoft.com/office/drawing/2014/main" id="{968AD4DC-5667-5893-5581-77C6ED5D7F9C}"/>
+                <a16:creationId xmlns:a16="http://schemas.microsoft.com/office/drawing/2014/main" id="{CE9F9BB5-530A-6EEB-9A3E-EA12C00C1994}"/>
               </a:ext>
             </a:extLst>
           </p:cNvPr>
@@ -1987,7 +1987,7 @@
           <p:cNvPr id="5" name="슬라이드 번호 개체 틀 4">
             <a:extLst>
               <a:ext uri="{FF2B5EF4-FFF2-40B4-BE49-F238E27FC236}">
-                <a16:creationId xmlns:a16="http://schemas.microsoft.com/office/drawing/2014/main" id="{3173DBA2-88E6-A693-4B94-763CD186109B}"/>
+                <a16:creationId xmlns:a16="http://schemas.microsoft.com/office/drawing/2014/main" id="{26575D0A-82CB-B347-2D6E-31346EF542C1}"/>
               </a:ext>
             </a:extLst>
           </p:cNvPr>
@@ -2003,7 +2003,7 @@
           <a:bodyPr/>
           <a:lstStyle/>
           <a:p>
-            <a:fld id="{68E19554-FD31-4E43-B9E4-FE8925EEE262}" type="slidenum">
+            <a:fld id="{C2F10704-BB78-4439-8903-72F1EA287DEC}" type="slidenum">
               <a:rPr lang="ko-KR" altLang="en-US" smtClean="0"/>
               <a:t>‹#›</a:t>
             </a:fld>
@@ -2014,7 +2014,7 @@
     </p:spTree>
     <p:extLst>
       <p:ext uri="{BB962C8B-B14F-4D97-AF65-F5344CB8AC3E}">
-        <p14:creationId xmlns:p14="http://schemas.microsoft.com/office/powerpoint/2010/main" val="2119295497"/>
+        <p14:creationId xmlns:p14="http://schemas.microsoft.com/office/powerpoint/2010/main" val="419732762"/>
       </p:ext>
     </p:extLst>
   </p:cSld>
@@ -2046,7 +2046,7 @@
           <p:cNvPr id="2" name="날짜 개체 틀 1">
             <a:extLst>
               <a:ext uri="{FF2B5EF4-FFF2-40B4-BE49-F238E27FC236}">
-                <a16:creationId xmlns:a16="http://schemas.microsoft.com/office/drawing/2014/main" id="{E383E16A-8A9A-2B3F-D97C-D2933BE06275}"/>
+                <a16:creationId xmlns:a16="http://schemas.microsoft.com/office/drawing/2014/main" id="{E6BFC7F4-C873-9521-6B45-AB0D9E7461C7}"/>
               </a:ext>
             </a:extLst>
           </p:cNvPr>
@@ -2062,7 +2062,7 @@
           <a:bodyPr/>
           <a:lstStyle/>
           <a:p>
-            <a:fld id="{3370C868-F4B3-48CD-90E2-B37D272DCE1D}" type="datetimeFigureOut">
+            <a:fld id="{C3BB9B9E-20BD-41C5-837D-C991663DAB9A}" type="datetimeFigureOut">
               <a:rPr lang="ko-KR" altLang="en-US" smtClean="0"/>
               <a:t>2026-06-21</a:t>
             </a:fld>
@@ -2075,7 +2075,7 @@
           <p:cNvPr id="3" name="바닥글 개체 틀 2">
             <a:extLst>
               <a:ext uri="{FF2B5EF4-FFF2-40B4-BE49-F238E27FC236}">
-                <a16:creationId xmlns:a16="http://schemas.microsoft.com/office/drawing/2014/main" id="{56BF4832-9ED0-BB3F-65D6-F17570CF1982}"/>
+                <a16:creationId xmlns:a16="http://schemas.microsoft.com/office/drawing/2014/main" id="{8D77B7B9-6AF8-EF9C-7734-DC699C05495E}"/>
               </a:ext>
             </a:extLst>
           </p:cNvPr>
@@ -2100,7 +2100,7 @@
           <p:cNvPr id="4" name="슬라이드 번호 개체 틀 3">
             <a:extLst>
               <a:ext uri="{FF2B5EF4-FFF2-40B4-BE49-F238E27FC236}">
-                <a16:creationId xmlns:a16="http://schemas.microsoft.com/office/drawing/2014/main" id="{E22A6F62-6ED1-1167-78C8-6014E5140CA2}"/>
+                <a16:creationId xmlns:a16="http://schemas.microsoft.com/office/drawing/2014/main" id="{6DBFBDB6-1BB4-5240-9E12-617DAD2839A0}"/>
               </a:ext>
             </a:extLst>
           </p:cNvPr>
@@ -2116,7 +2116,7 @@
           <a:bodyPr/>
           <a:lstStyle/>
           <a:p>
-            <a:fld id="{68E19554-FD31-4E43-B9E4-FE8925EEE262}" type="slidenum">
+            <a:fld id="{C2F10704-BB78-4439-8903-72F1EA287DEC}" type="slidenum">
               <a:rPr lang="ko-KR" altLang="en-US" smtClean="0"/>
               <a:t>‹#›</a:t>
             </a:fld>
@@ -2127,7 +2127,7 @@
     </p:spTree>
     <p:extLst>
       <p:ext uri="{BB962C8B-B14F-4D97-AF65-F5344CB8AC3E}">
-        <p14:creationId xmlns:p14="http://schemas.microsoft.com/office/powerpoint/2010/main" val="2395461681"/>
+        <p14:creationId xmlns:p14="http://schemas.microsoft.com/office/powerpoint/2010/main" val="1704033511"/>
       </p:ext>
     </p:extLst>
   </p:cSld>
@@ -2159,7 +2159,7 @@
           <p:cNvPr id="2" name="제목 1">
             <a:extLst>
               <a:ext uri="{FF2B5EF4-FFF2-40B4-BE49-F238E27FC236}">
-                <a16:creationId xmlns:a16="http://schemas.microsoft.com/office/drawing/2014/main" id="{11797F6C-2F10-B580-BB75-FE243016D6A1}"/>
+                <a16:creationId xmlns:a16="http://schemas.microsoft.com/office/drawing/2014/main" id="{DA69F8D7-C299-0D84-09E5-C5257408793A}"/>
               </a:ext>
             </a:extLst>
           </p:cNvPr>
@@ -2196,7 +2196,7 @@
           <p:cNvPr id="3" name="내용 개체 틀 2">
             <a:extLst>
               <a:ext uri="{FF2B5EF4-FFF2-40B4-BE49-F238E27FC236}">
-                <a16:creationId xmlns:a16="http://schemas.microsoft.com/office/drawing/2014/main" id="{949BB257-1E0E-18C4-E513-0259408B8333}"/>
+                <a16:creationId xmlns:a16="http://schemas.microsoft.com/office/drawing/2014/main" id="{C5FFB732-377F-15A0-72F2-02765EB75D8D}"/>
               </a:ext>
             </a:extLst>
           </p:cNvPr>
@@ -2286,7 +2286,7 @@
           <p:cNvPr id="4" name="텍스트 개체 틀 3">
             <a:extLst>
               <a:ext uri="{FF2B5EF4-FFF2-40B4-BE49-F238E27FC236}">
-                <a16:creationId xmlns:a16="http://schemas.microsoft.com/office/drawing/2014/main" id="{A8C22E71-B684-7413-5898-E1A48EF657DF}"/>
+                <a16:creationId xmlns:a16="http://schemas.microsoft.com/office/drawing/2014/main" id="{7AB1464D-DDCD-C587-76FD-2AA4AEF44915}"/>
               </a:ext>
             </a:extLst>
           </p:cNvPr>
@@ -2357,7 +2357,7 @@
           <p:cNvPr id="5" name="날짜 개체 틀 4">
             <a:extLst>
               <a:ext uri="{FF2B5EF4-FFF2-40B4-BE49-F238E27FC236}">
-                <a16:creationId xmlns:a16="http://schemas.microsoft.com/office/drawing/2014/main" id="{F0FE7621-6009-30FC-B93F-1224A0DB3B4B}"/>
+                <a16:creationId xmlns:a16="http://schemas.microsoft.com/office/drawing/2014/main" id="{AE6BC4EB-ABC1-CD7E-3AC5-654391C06CF5}"/>
               </a:ext>
             </a:extLst>
           </p:cNvPr>
@@ -2373,7 +2373,7 @@
           <a:bodyPr/>
           <a:lstStyle/>
           <a:p>
-            <a:fld id="{3370C868-F4B3-48CD-90E2-B37D272DCE1D}" type="datetimeFigureOut">
+            <a:fld id="{C3BB9B9E-20BD-41C5-837D-C991663DAB9A}" type="datetimeFigureOut">
               <a:rPr lang="ko-KR" altLang="en-US" smtClean="0"/>
               <a:t>2026-06-21</a:t>
             </a:fld>
@@ -2386,7 +2386,7 @@
           <p:cNvPr id="6" name="바닥글 개체 틀 5">
             <a:extLst>
               <a:ext uri="{FF2B5EF4-FFF2-40B4-BE49-F238E27FC236}">
-                <a16:creationId xmlns:a16="http://schemas.microsoft.com/office/drawing/2014/main" id="{2ADDE8F3-5786-5AD8-2186-8212BD02D9CA}"/>
+                <a16:creationId xmlns:a16="http://schemas.microsoft.com/office/drawing/2014/main" id="{7CC3FB32-7DE6-3E82-4D14-E23EB752798E}"/>
               </a:ext>
             </a:extLst>
           </p:cNvPr>
@@ -2411,7 +2411,7 @@
           <p:cNvPr id="7" name="슬라이드 번호 개체 틀 6">
             <a:extLst>
               <a:ext uri="{FF2B5EF4-FFF2-40B4-BE49-F238E27FC236}">
-                <a16:creationId xmlns:a16="http://schemas.microsoft.com/office/drawing/2014/main" id="{8DE6D685-5514-4E1C-6E72-C24BC8B738B7}"/>
+                <a16:creationId xmlns:a16="http://schemas.microsoft.com/office/drawing/2014/main" id="{A06EDD4A-ACA0-68B7-FD2A-B70A5AF41A6A}"/>
               </a:ext>
             </a:extLst>
           </p:cNvPr>
@@ -2427,7 +2427,7 @@
           <a:bodyPr/>
           <a:lstStyle/>
           <a:p>
-            <a:fld id="{68E19554-FD31-4E43-B9E4-FE8925EEE262}" type="slidenum">
+            <a:fld id="{C2F10704-BB78-4439-8903-72F1EA287DEC}" type="slidenum">
               <a:rPr lang="ko-KR" altLang="en-US" smtClean="0"/>
               <a:t>‹#›</a:t>
             </a:fld>
@@ -2438,7 +2438,7 @@
     </p:spTree>
     <p:extLst>
       <p:ext uri="{BB962C8B-B14F-4D97-AF65-F5344CB8AC3E}">
-        <p14:creationId xmlns:p14="http://schemas.microsoft.com/office/powerpoint/2010/main" val="707643586"/>
+        <p14:creationId xmlns:p14="http://schemas.microsoft.com/office/powerpoint/2010/main" val="802620943"/>
       </p:ext>
     </p:extLst>
   </p:cSld>
@@ -2470,7 +2470,7 @@
           <p:cNvPr id="2" name="제목 1">
             <a:extLst>
               <a:ext uri="{FF2B5EF4-FFF2-40B4-BE49-F238E27FC236}">
-                <a16:creationId xmlns:a16="http://schemas.microsoft.com/office/drawing/2014/main" id="{EA634ACC-B4A9-DA77-70C6-123C73731191}"/>
+                <a16:creationId xmlns:a16="http://schemas.microsoft.com/office/drawing/2014/main" id="{CC4E72B4-D678-BEEE-5E18-445EBF9D9672}"/>
               </a:ext>
             </a:extLst>
           </p:cNvPr>
@@ -2507,7 +2507,7 @@
           <p:cNvPr id="3" name="그림 개체 틀 2">
             <a:extLst>
               <a:ext uri="{FF2B5EF4-FFF2-40B4-BE49-F238E27FC236}">
-                <a16:creationId xmlns:a16="http://schemas.microsoft.com/office/drawing/2014/main" id="{A64872B3-74F3-0ECC-35EA-900A64EB193F}"/>
+                <a16:creationId xmlns:a16="http://schemas.microsoft.com/office/drawing/2014/main" id="{5DF1CD17-FA0A-8CBF-8CA5-EEF65545A101}"/>
               </a:ext>
             </a:extLst>
           </p:cNvPr>
@@ -2574,7 +2574,7 @@
           <p:cNvPr id="4" name="텍스트 개체 틀 3">
             <a:extLst>
               <a:ext uri="{FF2B5EF4-FFF2-40B4-BE49-F238E27FC236}">
-                <a16:creationId xmlns:a16="http://schemas.microsoft.com/office/drawing/2014/main" id="{7526363E-F695-EAEC-1CEE-BF5CA48B8339}"/>
+                <a16:creationId xmlns:a16="http://schemas.microsoft.com/office/drawing/2014/main" id="{F763A6A1-B1F7-DA79-DF50-46987E8C4539}"/>
               </a:ext>
             </a:extLst>
           </p:cNvPr>
@@ -2645,7 +2645,7 @@
           <p:cNvPr id="5" name="날짜 개체 틀 4">
             <a:extLst>
               <a:ext uri="{FF2B5EF4-FFF2-40B4-BE49-F238E27FC236}">
-                <a16:creationId xmlns:a16="http://schemas.microsoft.com/office/drawing/2014/main" id="{A9FE07A0-476B-46F5-E9E0-9BCDA48E2935}"/>
+                <a16:creationId xmlns:a16="http://schemas.microsoft.com/office/drawing/2014/main" id="{EDED8714-CBE1-C22F-F901-AC924BF10B0E}"/>
               </a:ext>
             </a:extLst>
           </p:cNvPr>
@@ -2661,7 +2661,7 @@
           <a:bodyPr/>
           <a:lstStyle/>
           <a:p>
-            <a:fld id="{3370C868-F4B3-48CD-90E2-B37D272DCE1D}" type="datetimeFigureOut">
+            <a:fld id="{C3BB9B9E-20BD-41C5-837D-C991663DAB9A}" type="datetimeFigureOut">
               <a:rPr lang="ko-KR" altLang="en-US" smtClean="0"/>
               <a:t>2026-06-21</a:t>
             </a:fld>
@@ -2674,7 +2674,7 @@
           <p:cNvPr id="6" name="바닥글 개체 틀 5">
             <a:extLst>
               <a:ext uri="{FF2B5EF4-FFF2-40B4-BE49-F238E27FC236}">
-                <a16:creationId xmlns:a16="http://schemas.microsoft.com/office/drawing/2014/main" id="{DD59FC95-CE8C-D369-BFD3-6B0A3577810A}"/>
+                <a16:creationId xmlns:a16="http://schemas.microsoft.com/office/drawing/2014/main" id="{51F5EB82-1004-2A90-ADC7-690375BD57A4}"/>
               </a:ext>
             </a:extLst>
           </p:cNvPr>
@@ -2699,7 +2699,7 @@
           <p:cNvPr id="7" name="슬라이드 번호 개체 틀 6">
             <a:extLst>
               <a:ext uri="{FF2B5EF4-FFF2-40B4-BE49-F238E27FC236}">
-                <a16:creationId xmlns:a16="http://schemas.microsoft.com/office/drawing/2014/main" id="{E71E5E9D-DB06-E83B-16D5-86B22D0FAB48}"/>
+                <a16:creationId xmlns:a16="http://schemas.microsoft.com/office/drawing/2014/main" id="{C338450C-8A32-A869-78AF-ACB50A3BF4EA}"/>
               </a:ext>
             </a:extLst>
           </p:cNvPr>
@@ -2715,7 +2715,7 @@
           <a:bodyPr/>
           <a:lstStyle/>
           <a:p>
-            <a:fld id="{68E19554-FD31-4E43-B9E4-FE8925EEE262}" type="slidenum">
+            <a:fld id="{C2F10704-BB78-4439-8903-72F1EA287DEC}" type="slidenum">
               <a:rPr lang="ko-KR" altLang="en-US" smtClean="0"/>
               <a:t>‹#›</a:t>
             </a:fld>
@@ -2726,7 +2726,7 @@
     </p:spTree>
     <p:extLst>
       <p:ext uri="{BB962C8B-B14F-4D97-AF65-F5344CB8AC3E}">
-        <p14:creationId xmlns:p14="http://schemas.microsoft.com/office/powerpoint/2010/main" val="3016347252"/>
+        <p14:creationId xmlns:p14="http://schemas.microsoft.com/office/powerpoint/2010/main" val="2203631794"/>
       </p:ext>
     </p:extLst>
   </p:cSld>
@@ -2763,7 +2763,7 @@
           <p:cNvPr id="2" name="제목 개체 틀 1">
             <a:extLst>
               <a:ext uri="{FF2B5EF4-FFF2-40B4-BE49-F238E27FC236}">
-                <a16:creationId xmlns:a16="http://schemas.microsoft.com/office/drawing/2014/main" id="{EF028D27-80DF-F1AA-BB7A-5B2F4CD024E8}"/>
+                <a16:creationId xmlns:a16="http://schemas.microsoft.com/office/drawing/2014/main" id="{007247D5-C4FE-ACD5-BAFC-6A19B23BF38B}"/>
               </a:ext>
             </a:extLst>
           </p:cNvPr>
@@ -2801,7 +2801,7 @@
           <p:cNvPr id="3" name="텍스트 개체 틀 2">
             <a:extLst>
               <a:ext uri="{FF2B5EF4-FFF2-40B4-BE49-F238E27FC236}">
-                <a16:creationId xmlns:a16="http://schemas.microsoft.com/office/drawing/2014/main" id="{F312E66C-F776-750D-C400-B7ED482F6C5E}"/>
+                <a16:creationId xmlns:a16="http://schemas.microsoft.com/office/drawing/2014/main" id="{F2F78BB6-F000-ACE1-1E9D-501D0A8BA222}"/>
               </a:ext>
             </a:extLst>
           </p:cNvPr>
@@ -2868,7 +2868,7 @@
           <p:cNvPr id="4" name="날짜 개체 틀 3">
             <a:extLst>
               <a:ext uri="{FF2B5EF4-FFF2-40B4-BE49-F238E27FC236}">
-                <a16:creationId xmlns:a16="http://schemas.microsoft.com/office/drawing/2014/main" id="{1C906D6F-8B1F-22AF-A777-F3B05229E5FB}"/>
+                <a16:creationId xmlns:a16="http://schemas.microsoft.com/office/drawing/2014/main" id="{23828755-0BFD-F216-4CFD-36B9819BC422}"/>
               </a:ext>
             </a:extLst>
           </p:cNvPr>
@@ -2902,7 +2902,7 @@
             </a:lvl1pPr>
           </a:lstStyle>
           <a:p>
-            <a:fld id="{3370C868-F4B3-48CD-90E2-B37D272DCE1D}" type="datetimeFigureOut">
+            <a:fld id="{C3BB9B9E-20BD-41C5-837D-C991663DAB9A}" type="datetimeFigureOut">
               <a:rPr lang="ko-KR" altLang="en-US" smtClean="0"/>
               <a:t>2026-06-21</a:t>
             </a:fld>
@@ -2915,7 +2915,7 @@
           <p:cNvPr id="5" name="바닥글 개체 틀 4">
             <a:extLst>
               <a:ext uri="{FF2B5EF4-FFF2-40B4-BE49-F238E27FC236}">
-                <a16:creationId xmlns:a16="http://schemas.microsoft.com/office/drawing/2014/main" id="{BE9F7CDE-84A8-0C5D-E32B-642C1C19DDC6}"/>
+                <a16:creationId xmlns:a16="http://schemas.microsoft.com/office/drawing/2014/main" id="{C65047F1-5373-0A0A-9425-398259B3420A}"/>
               </a:ext>
             </a:extLst>
           </p:cNvPr>
@@ -2958,7 +2958,7 @@
           <p:cNvPr id="6" name="슬라이드 번호 개체 틀 5">
             <a:extLst>
               <a:ext uri="{FF2B5EF4-FFF2-40B4-BE49-F238E27FC236}">
-                <a16:creationId xmlns:a16="http://schemas.microsoft.com/office/drawing/2014/main" id="{A3FE377F-A0EB-1613-FEF7-173188A085DD}"/>
+                <a16:creationId xmlns:a16="http://schemas.microsoft.com/office/drawing/2014/main" id="{3C222483-30DB-E7A7-BD71-4E88511D94C3}"/>
               </a:ext>
             </a:extLst>
           </p:cNvPr>
@@ -2992,7 +2992,7 @@
             </a:lvl1pPr>
           </a:lstStyle>
           <a:p>
-            <a:fld id="{68E19554-FD31-4E43-B9E4-FE8925EEE262}" type="slidenum">
+            <a:fld id="{C2F10704-BB78-4439-8903-72F1EA287DEC}" type="slidenum">
               <a:rPr lang="ko-KR" altLang="en-US" smtClean="0"/>
               <a:t>‹#›</a:t>
             </a:fld>
@@ -3003,7 +3003,7 @@
     </p:spTree>
     <p:extLst>
       <p:ext uri="{BB962C8B-B14F-4D97-AF65-F5344CB8AC3E}">
-        <p14:creationId xmlns:p14="http://schemas.microsoft.com/office/powerpoint/2010/main" val="1904865545"/>
+        <p14:creationId xmlns:p14="http://schemas.microsoft.com/office/powerpoint/2010/main" val="468937670"/>
       </p:ext>
     </p:extLst>
   </p:cSld>
@@ -3326,7 +3326,7 @@
           <p:cNvPr id="3" name="그래픽 2">
             <a:extLst>
               <a:ext uri="{FF2B5EF4-FFF2-40B4-BE49-F238E27FC236}">
-                <a16:creationId xmlns:a16="http://schemas.microsoft.com/office/drawing/2014/main" id="{2F9A19B0-CF1A-B691-51FF-7BA6C1BD9DB2}"/>
+                <a16:creationId xmlns:a16="http://schemas.microsoft.com/office/drawing/2014/main" id="{2D06FF39-644D-506D-4E5C-4E54078CDB5E}"/>
               </a:ext>
             </a:extLst>
           </p:cNvPr>
@@ -3360,7 +3360,7 @@
     </p:spTree>
     <p:extLst>
       <p:ext uri="{BB962C8B-B14F-4D97-AF65-F5344CB8AC3E}">
-        <p14:creationId xmlns:p14="http://schemas.microsoft.com/office/powerpoint/2010/main" val="3399286896"/>
+        <p14:creationId xmlns:p14="http://schemas.microsoft.com/office/powerpoint/2010/main" val="1544202134"/>
       </p:ext>
     </p:extLst>
   </p:cSld>

--- a/docs/assets/infographic-seed-gallery.pptx
+++ b/docs/assets/infographic-seed-gallery.pptx
@@ -129,7 +129,7 @@
           <p:cNvPr id="2" name="제목 1">
             <a:extLst>
               <a:ext uri="{FF2B5EF4-FFF2-40B4-BE49-F238E27FC236}">
-                <a16:creationId xmlns:a16="http://schemas.microsoft.com/office/drawing/2014/main" id="{618316DE-CF5A-0E4F-AC54-486F383EDA0F}"/>
+                <a16:creationId xmlns:a16="http://schemas.microsoft.com/office/drawing/2014/main" id="{EF4F71CE-F639-DBEE-5496-7FD95CD70A08}"/>
               </a:ext>
             </a:extLst>
           </p:cNvPr>
@@ -166,7 +166,7 @@
           <p:cNvPr id="3" name="부제목 2">
             <a:extLst>
               <a:ext uri="{FF2B5EF4-FFF2-40B4-BE49-F238E27FC236}">
-                <a16:creationId xmlns:a16="http://schemas.microsoft.com/office/drawing/2014/main" id="{4FB1E2B3-71CF-159F-AAE5-A6513F82B36E}"/>
+                <a16:creationId xmlns:a16="http://schemas.microsoft.com/office/drawing/2014/main" id="{726166D4-436E-52FB-213B-6FC34B6577B4}"/>
               </a:ext>
             </a:extLst>
           </p:cNvPr>
@@ -236,7 +236,7 @@
           <p:cNvPr id="4" name="날짜 개체 틀 3">
             <a:extLst>
               <a:ext uri="{FF2B5EF4-FFF2-40B4-BE49-F238E27FC236}">
-                <a16:creationId xmlns:a16="http://schemas.microsoft.com/office/drawing/2014/main" id="{889A5B35-8F13-4BFE-6BAC-834E45D5DB73}"/>
+                <a16:creationId xmlns:a16="http://schemas.microsoft.com/office/drawing/2014/main" id="{57712DEA-3EA1-B64B-F338-A646B7937D79}"/>
               </a:ext>
             </a:extLst>
           </p:cNvPr>
@@ -252,9 +252,9 @@
           <a:bodyPr/>
           <a:lstStyle/>
           <a:p>
-            <a:fld id="{C3BB9B9E-20BD-41C5-837D-C991663DAB9A}" type="datetimeFigureOut">
+            <a:fld id="{DF25C7C5-662F-443D-B932-219A5FD090E8}" type="datetimeFigureOut">
               <a:rPr lang="ko-KR" altLang="en-US" smtClean="0"/>
-              <a:t>2026-06-21</a:t>
+              <a:t>2026-06-22</a:t>
             </a:fld>
             <a:endParaRPr lang="ko-KR" altLang="en-US"/>
           </a:p>
@@ -265,7 +265,7 @@
           <p:cNvPr id="5" name="바닥글 개체 틀 4">
             <a:extLst>
               <a:ext uri="{FF2B5EF4-FFF2-40B4-BE49-F238E27FC236}">
-                <a16:creationId xmlns:a16="http://schemas.microsoft.com/office/drawing/2014/main" id="{E0A2762B-B067-1E95-8409-AFC1B6408D70}"/>
+                <a16:creationId xmlns:a16="http://schemas.microsoft.com/office/drawing/2014/main" id="{08081EEF-5C71-668E-246B-A184DE0CBECF}"/>
               </a:ext>
             </a:extLst>
           </p:cNvPr>
@@ -290,7 +290,7 @@
           <p:cNvPr id="6" name="슬라이드 번호 개체 틀 5">
             <a:extLst>
               <a:ext uri="{FF2B5EF4-FFF2-40B4-BE49-F238E27FC236}">
-                <a16:creationId xmlns:a16="http://schemas.microsoft.com/office/drawing/2014/main" id="{73856D4B-C40D-E877-505D-0BD2EC8A0A4F}"/>
+                <a16:creationId xmlns:a16="http://schemas.microsoft.com/office/drawing/2014/main" id="{9F522056-736F-980C-2449-28252C80DCD3}"/>
               </a:ext>
             </a:extLst>
           </p:cNvPr>
@@ -306,7 +306,7 @@
           <a:bodyPr/>
           <a:lstStyle/>
           <a:p>
-            <a:fld id="{C2F10704-BB78-4439-8903-72F1EA287DEC}" type="slidenum">
+            <a:fld id="{C386F094-EA07-4928-8C98-3D149CEB2EED}" type="slidenum">
               <a:rPr lang="ko-KR" altLang="en-US" smtClean="0"/>
               <a:t>‹#›</a:t>
             </a:fld>
@@ -317,7 +317,7 @@
     </p:spTree>
     <p:extLst>
       <p:ext uri="{BB962C8B-B14F-4D97-AF65-F5344CB8AC3E}">
-        <p14:creationId xmlns:p14="http://schemas.microsoft.com/office/powerpoint/2010/main" val="2562357112"/>
+        <p14:creationId xmlns:p14="http://schemas.microsoft.com/office/powerpoint/2010/main" val="733327690"/>
       </p:ext>
     </p:extLst>
   </p:cSld>
@@ -349,7 +349,7 @@
           <p:cNvPr id="2" name="제목 1">
             <a:extLst>
               <a:ext uri="{FF2B5EF4-FFF2-40B4-BE49-F238E27FC236}">
-                <a16:creationId xmlns:a16="http://schemas.microsoft.com/office/drawing/2014/main" id="{4776791A-663D-9C03-0A62-9AA1291134F3}"/>
+                <a16:creationId xmlns:a16="http://schemas.microsoft.com/office/drawing/2014/main" id="{9117C828-77FE-50EB-BD85-B106C6901CDB}"/>
               </a:ext>
             </a:extLst>
           </p:cNvPr>
@@ -377,7 +377,7 @@
           <p:cNvPr id="3" name="세로 텍스트 개체 틀 2">
             <a:extLst>
               <a:ext uri="{FF2B5EF4-FFF2-40B4-BE49-F238E27FC236}">
-                <a16:creationId xmlns:a16="http://schemas.microsoft.com/office/drawing/2014/main" id="{ABF09AF9-F7BB-4427-B652-89650BE88926}"/>
+                <a16:creationId xmlns:a16="http://schemas.microsoft.com/office/drawing/2014/main" id="{42770791-5DDC-E8D6-2776-A3525D71BB3F}"/>
               </a:ext>
             </a:extLst>
           </p:cNvPr>
@@ -434,7 +434,7 @@
           <p:cNvPr id="4" name="날짜 개체 틀 3">
             <a:extLst>
               <a:ext uri="{FF2B5EF4-FFF2-40B4-BE49-F238E27FC236}">
-                <a16:creationId xmlns:a16="http://schemas.microsoft.com/office/drawing/2014/main" id="{4729288F-69C5-F80F-A676-0241EE06A198}"/>
+                <a16:creationId xmlns:a16="http://schemas.microsoft.com/office/drawing/2014/main" id="{12EACF59-18AD-9B92-02E3-FB05BD63D0FC}"/>
               </a:ext>
             </a:extLst>
           </p:cNvPr>
@@ -450,9 +450,9 @@
           <a:bodyPr/>
           <a:lstStyle/>
           <a:p>
-            <a:fld id="{C3BB9B9E-20BD-41C5-837D-C991663DAB9A}" type="datetimeFigureOut">
+            <a:fld id="{DF25C7C5-662F-443D-B932-219A5FD090E8}" type="datetimeFigureOut">
               <a:rPr lang="ko-KR" altLang="en-US" smtClean="0"/>
-              <a:t>2026-06-21</a:t>
+              <a:t>2026-06-22</a:t>
             </a:fld>
             <a:endParaRPr lang="ko-KR" altLang="en-US"/>
           </a:p>
@@ -463,7 +463,7 @@
           <p:cNvPr id="5" name="바닥글 개체 틀 4">
             <a:extLst>
               <a:ext uri="{FF2B5EF4-FFF2-40B4-BE49-F238E27FC236}">
-                <a16:creationId xmlns:a16="http://schemas.microsoft.com/office/drawing/2014/main" id="{F55396D0-4D21-19DC-1EF1-07E35D51CF00}"/>
+                <a16:creationId xmlns:a16="http://schemas.microsoft.com/office/drawing/2014/main" id="{03C7E362-A450-7027-C1B3-908ACC832DA3}"/>
               </a:ext>
             </a:extLst>
           </p:cNvPr>
@@ -488,7 +488,7 @@
           <p:cNvPr id="6" name="슬라이드 번호 개체 틀 5">
             <a:extLst>
               <a:ext uri="{FF2B5EF4-FFF2-40B4-BE49-F238E27FC236}">
-                <a16:creationId xmlns:a16="http://schemas.microsoft.com/office/drawing/2014/main" id="{953CE329-6BF8-A36E-B792-BF9E585AF004}"/>
+                <a16:creationId xmlns:a16="http://schemas.microsoft.com/office/drawing/2014/main" id="{F963828E-ADD6-5B02-6D00-4DACF24925F8}"/>
               </a:ext>
             </a:extLst>
           </p:cNvPr>
@@ -504,7 +504,7 @@
           <a:bodyPr/>
           <a:lstStyle/>
           <a:p>
-            <a:fld id="{C2F10704-BB78-4439-8903-72F1EA287DEC}" type="slidenum">
+            <a:fld id="{C386F094-EA07-4928-8C98-3D149CEB2EED}" type="slidenum">
               <a:rPr lang="ko-KR" altLang="en-US" smtClean="0"/>
               <a:t>‹#›</a:t>
             </a:fld>
@@ -515,7 +515,7 @@
     </p:spTree>
     <p:extLst>
       <p:ext uri="{BB962C8B-B14F-4D97-AF65-F5344CB8AC3E}">
-        <p14:creationId xmlns:p14="http://schemas.microsoft.com/office/powerpoint/2010/main" val="4272877961"/>
+        <p14:creationId xmlns:p14="http://schemas.microsoft.com/office/powerpoint/2010/main" val="3354307608"/>
       </p:ext>
     </p:extLst>
   </p:cSld>
@@ -547,7 +547,7 @@
           <p:cNvPr id="2" name="세로 제목 1">
             <a:extLst>
               <a:ext uri="{FF2B5EF4-FFF2-40B4-BE49-F238E27FC236}">
-                <a16:creationId xmlns:a16="http://schemas.microsoft.com/office/drawing/2014/main" id="{EA5F2948-65C9-86B6-7FEE-4134914836AB}"/>
+                <a16:creationId xmlns:a16="http://schemas.microsoft.com/office/drawing/2014/main" id="{84888CEB-2876-F69C-ABBE-F1895B0CD000}"/>
               </a:ext>
             </a:extLst>
           </p:cNvPr>
@@ -580,7 +580,7 @@
           <p:cNvPr id="3" name="세로 텍스트 개체 틀 2">
             <a:extLst>
               <a:ext uri="{FF2B5EF4-FFF2-40B4-BE49-F238E27FC236}">
-                <a16:creationId xmlns:a16="http://schemas.microsoft.com/office/drawing/2014/main" id="{287F97AB-163A-317B-1458-24A499AF6E5B}"/>
+                <a16:creationId xmlns:a16="http://schemas.microsoft.com/office/drawing/2014/main" id="{4B005178-7D19-755A-7D6F-4D47F875BABD}"/>
               </a:ext>
             </a:extLst>
           </p:cNvPr>
@@ -642,7 +642,7 @@
           <p:cNvPr id="4" name="날짜 개체 틀 3">
             <a:extLst>
               <a:ext uri="{FF2B5EF4-FFF2-40B4-BE49-F238E27FC236}">
-                <a16:creationId xmlns:a16="http://schemas.microsoft.com/office/drawing/2014/main" id="{30FA3CDC-BE68-DECD-751B-94F91C8A6A45}"/>
+                <a16:creationId xmlns:a16="http://schemas.microsoft.com/office/drawing/2014/main" id="{90407100-59FC-92F0-6D87-BB1160369523}"/>
               </a:ext>
             </a:extLst>
           </p:cNvPr>
@@ -658,9 +658,9 @@
           <a:bodyPr/>
           <a:lstStyle/>
           <a:p>
-            <a:fld id="{C3BB9B9E-20BD-41C5-837D-C991663DAB9A}" type="datetimeFigureOut">
+            <a:fld id="{DF25C7C5-662F-443D-B932-219A5FD090E8}" type="datetimeFigureOut">
               <a:rPr lang="ko-KR" altLang="en-US" smtClean="0"/>
-              <a:t>2026-06-21</a:t>
+              <a:t>2026-06-22</a:t>
             </a:fld>
             <a:endParaRPr lang="ko-KR" altLang="en-US"/>
           </a:p>
@@ -671,7 +671,7 @@
           <p:cNvPr id="5" name="바닥글 개체 틀 4">
             <a:extLst>
               <a:ext uri="{FF2B5EF4-FFF2-40B4-BE49-F238E27FC236}">
-                <a16:creationId xmlns:a16="http://schemas.microsoft.com/office/drawing/2014/main" id="{668C986C-45A7-E0A0-6BF2-85DFE0083A49}"/>
+                <a16:creationId xmlns:a16="http://schemas.microsoft.com/office/drawing/2014/main" id="{8C6B467F-22BC-E4EC-1950-392E091FD8BF}"/>
               </a:ext>
             </a:extLst>
           </p:cNvPr>
@@ -696,7 +696,7 @@
           <p:cNvPr id="6" name="슬라이드 번호 개체 틀 5">
             <a:extLst>
               <a:ext uri="{FF2B5EF4-FFF2-40B4-BE49-F238E27FC236}">
-                <a16:creationId xmlns:a16="http://schemas.microsoft.com/office/drawing/2014/main" id="{FC0B2D51-CDF8-122B-332C-7EEEDD86215B}"/>
+                <a16:creationId xmlns:a16="http://schemas.microsoft.com/office/drawing/2014/main" id="{80A34A33-09F7-4B03-A30B-21DEA67B18FD}"/>
               </a:ext>
             </a:extLst>
           </p:cNvPr>
@@ -712,7 +712,7 @@
           <a:bodyPr/>
           <a:lstStyle/>
           <a:p>
-            <a:fld id="{C2F10704-BB78-4439-8903-72F1EA287DEC}" type="slidenum">
+            <a:fld id="{C386F094-EA07-4928-8C98-3D149CEB2EED}" type="slidenum">
               <a:rPr lang="ko-KR" altLang="en-US" smtClean="0"/>
               <a:t>‹#›</a:t>
             </a:fld>
@@ -723,7 +723,7 @@
     </p:spTree>
     <p:extLst>
       <p:ext uri="{BB962C8B-B14F-4D97-AF65-F5344CB8AC3E}">
-        <p14:creationId xmlns:p14="http://schemas.microsoft.com/office/powerpoint/2010/main" val="3000015542"/>
+        <p14:creationId xmlns:p14="http://schemas.microsoft.com/office/powerpoint/2010/main" val="1927594729"/>
       </p:ext>
     </p:extLst>
   </p:cSld>
@@ -755,7 +755,7 @@
           <p:cNvPr id="2" name="제목 1">
             <a:extLst>
               <a:ext uri="{FF2B5EF4-FFF2-40B4-BE49-F238E27FC236}">
-                <a16:creationId xmlns:a16="http://schemas.microsoft.com/office/drawing/2014/main" id="{1D9AD601-D99B-D4DD-780B-6C6B9C2FD075}"/>
+                <a16:creationId xmlns:a16="http://schemas.microsoft.com/office/drawing/2014/main" id="{AE385857-637F-68F6-C19E-3C8F2A9E22D6}"/>
               </a:ext>
             </a:extLst>
           </p:cNvPr>
@@ -783,7 +783,7 @@
           <p:cNvPr id="3" name="내용 개체 틀 2">
             <a:extLst>
               <a:ext uri="{FF2B5EF4-FFF2-40B4-BE49-F238E27FC236}">
-                <a16:creationId xmlns:a16="http://schemas.microsoft.com/office/drawing/2014/main" id="{8832D405-4D43-E918-8DC6-4A28D68ED544}"/>
+                <a16:creationId xmlns:a16="http://schemas.microsoft.com/office/drawing/2014/main" id="{47AF6C86-07B3-F519-7E6F-555AD7780238}"/>
               </a:ext>
             </a:extLst>
           </p:cNvPr>
@@ -840,7 +840,7 @@
           <p:cNvPr id="4" name="날짜 개체 틀 3">
             <a:extLst>
               <a:ext uri="{FF2B5EF4-FFF2-40B4-BE49-F238E27FC236}">
-                <a16:creationId xmlns:a16="http://schemas.microsoft.com/office/drawing/2014/main" id="{1A969854-D385-28A0-7620-164A18031839}"/>
+                <a16:creationId xmlns:a16="http://schemas.microsoft.com/office/drawing/2014/main" id="{6EFDB4DA-AC20-D39B-04EF-46BD2F05E90A}"/>
               </a:ext>
             </a:extLst>
           </p:cNvPr>
@@ -856,9 +856,9 @@
           <a:bodyPr/>
           <a:lstStyle/>
           <a:p>
-            <a:fld id="{C3BB9B9E-20BD-41C5-837D-C991663DAB9A}" type="datetimeFigureOut">
+            <a:fld id="{DF25C7C5-662F-443D-B932-219A5FD090E8}" type="datetimeFigureOut">
               <a:rPr lang="ko-KR" altLang="en-US" smtClean="0"/>
-              <a:t>2026-06-21</a:t>
+              <a:t>2026-06-22</a:t>
             </a:fld>
             <a:endParaRPr lang="ko-KR" altLang="en-US"/>
           </a:p>
@@ -869,7 +869,7 @@
           <p:cNvPr id="5" name="바닥글 개체 틀 4">
             <a:extLst>
               <a:ext uri="{FF2B5EF4-FFF2-40B4-BE49-F238E27FC236}">
-                <a16:creationId xmlns:a16="http://schemas.microsoft.com/office/drawing/2014/main" id="{297C673B-CDA9-FB1A-2102-6CCB20355F53}"/>
+                <a16:creationId xmlns:a16="http://schemas.microsoft.com/office/drawing/2014/main" id="{B4E9D650-0147-A1E0-FDF9-A2BCE4838421}"/>
               </a:ext>
             </a:extLst>
           </p:cNvPr>
@@ -894,7 +894,7 @@
           <p:cNvPr id="6" name="슬라이드 번호 개체 틀 5">
             <a:extLst>
               <a:ext uri="{FF2B5EF4-FFF2-40B4-BE49-F238E27FC236}">
-                <a16:creationId xmlns:a16="http://schemas.microsoft.com/office/drawing/2014/main" id="{BA4913F9-82D2-68D8-33CC-47841D0C1EEC}"/>
+                <a16:creationId xmlns:a16="http://schemas.microsoft.com/office/drawing/2014/main" id="{5A297029-F0F7-4E5F-666E-E83ABB18C4BA}"/>
               </a:ext>
             </a:extLst>
           </p:cNvPr>
@@ -910,7 +910,7 @@
           <a:bodyPr/>
           <a:lstStyle/>
           <a:p>
-            <a:fld id="{C2F10704-BB78-4439-8903-72F1EA287DEC}" type="slidenum">
+            <a:fld id="{C386F094-EA07-4928-8C98-3D149CEB2EED}" type="slidenum">
               <a:rPr lang="ko-KR" altLang="en-US" smtClean="0"/>
               <a:t>‹#›</a:t>
             </a:fld>
@@ -921,7 +921,7 @@
     </p:spTree>
     <p:extLst>
       <p:ext uri="{BB962C8B-B14F-4D97-AF65-F5344CB8AC3E}">
-        <p14:creationId xmlns:p14="http://schemas.microsoft.com/office/powerpoint/2010/main" val="3938135763"/>
+        <p14:creationId xmlns:p14="http://schemas.microsoft.com/office/powerpoint/2010/main" val="3211647699"/>
       </p:ext>
     </p:extLst>
   </p:cSld>
@@ -953,7 +953,7 @@
           <p:cNvPr id="2" name="제목 1">
             <a:extLst>
               <a:ext uri="{FF2B5EF4-FFF2-40B4-BE49-F238E27FC236}">
-                <a16:creationId xmlns:a16="http://schemas.microsoft.com/office/drawing/2014/main" id="{8E315BD7-8728-6696-7F9F-6B5369E6793E}"/>
+                <a16:creationId xmlns:a16="http://schemas.microsoft.com/office/drawing/2014/main" id="{7E480BCF-D8F1-DF8B-9D1A-B9334E693F70}"/>
               </a:ext>
             </a:extLst>
           </p:cNvPr>
@@ -990,7 +990,7 @@
           <p:cNvPr id="3" name="텍스트 개체 틀 2">
             <a:extLst>
               <a:ext uri="{FF2B5EF4-FFF2-40B4-BE49-F238E27FC236}">
-                <a16:creationId xmlns:a16="http://schemas.microsoft.com/office/drawing/2014/main" id="{4354F503-EB91-DDD1-AE58-E4BFBC78FB24}"/>
+                <a16:creationId xmlns:a16="http://schemas.microsoft.com/office/drawing/2014/main" id="{1D0CB149-F4AB-734D-64F4-EBCCDB137E5F}"/>
               </a:ext>
             </a:extLst>
           </p:cNvPr>
@@ -1115,7 +1115,7 @@
           <p:cNvPr id="4" name="날짜 개체 틀 3">
             <a:extLst>
               <a:ext uri="{FF2B5EF4-FFF2-40B4-BE49-F238E27FC236}">
-                <a16:creationId xmlns:a16="http://schemas.microsoft.com/office/drawing/2014/main" id="{5B3601B6-3C50-966C-38F2-79175E41CD2A}"/>
+                <a16:creationId xmlns:a16="http://schemas.microsoft.com/office/drawing/2014/main" id="{11A8DC33-5861-851C-8963-4354CC564C93}"/>
               </a:ext>
             </a:extLst>
           </p:cNvPr>
@@ -1131,9 +1131,9 @@
           <a:bodyPr/>
           <a:lstStyle/>
           <a:p>
-            <a:fld id="{C3BB9B9E-20BD-41C5-837D-C991663DAB9A}" type="datetimeFigureOut">
+            <a:fld id="{DF25C7C5-662F-443D-B932-219A5FD090E8}" type="datetimeFigureOut">
               <a:rPr lang="ko-KR" altLang="en-US" smtClean="0"/>
-              <a:t>2026-06-21</a:t>
+              <a:t>2026-06-22</a:t>
             </a:fld>
             <a:endParaRPr lang="ko-KR" altLang="en-US"/>
           </a:p>
@@ -1144,7 +1144,7 @@
           <p:cNvPr id="5" name="바닥글 개체 틀 4">
             <a:extLst>
               <a:ext uri="{FF2B5EF4-FFF2-40B4-BE49-F238E27FC236}">
-                <a16:creationId xmlns:a16="http://schemas.microsoft.com/office/drawing/2014/main" id="{C1C46542-0581-3265-9390-5FBF65136265}"/>
+                <a16:creationId xmlns:a16="http://schemas.microsoft.com/office/drawing/2014/main" id="{9344C8AE-208D-1E64-9538-AC6B9ADCFC6E}"/>
               </a:ext>
             </a:extLst>
           </p:cNvPr>
@@ -1169,7 +1169,7 @@
           <p:cNvPr id="6" name="슬라이드 번호 개체 틀 5">
             <a:extLst>
               <a:ext uri="{FF2B5EF4-FFF2-40B4-BE49-F238E27FC236}">
-                <a16:creationId xmlns:a16="http://schemas.microsoft.com/office/drawing/2014/main" id="{F111F1AD-BF5A-9C98-62DB-3913E3F26E80}"/>
+                <a16:creationId xmlns:a16="http://schemas.microsoft.com/office/drawing/2014/main" id="{3B72D935-04BA-6A3F-6989-3B86F7AE029F}"/>
               </a:ext>
             </a:extLst>
           </p:cNvPr>
@@ -1185,7 +1185,7 @@
           <a:bodyPr/>
           <a:lstStyle/>
           <a:p>
-            <a:fld id="{C2F10704-BB78-4439-8903-72F1EA287DEC}" type="slidenum">
+            <a:fld id="{C386F094-EA07-4928-8C98-3D149CEB2EED}" type="slidenum">
               <a:rPr lang="ko-KR" altLang="en-US" smtClean="0"/>
               <a:t>‹#›</a:t>
             </a:fld>
@@ -1196,7 +1196,7 @@
     </p:spTree>
     <p:extLst>
       <p:ext uri="{BB962C8B-B14F-4D97-AF65-F5344CB8AC3E}">
-        <p14:creationId xmlns:p14="http://schemas.microsoft.com/office/powerpoint/2010/main" val="1183288725"/>
+        <p14:creationId xmlns:p14="http://schemas.microsoft.com/office/powerpoint/2010/main" val="2269818731"/>
       </p:ext>
     </p:extLst>
   </p:cSld>
@@ -1228,7 +1228,7 @@
           <p:cNvPr id="2" name="제목 1">
             <a:extLst>
               <a:ext uri="{FF2B5EF4-FFF2-40B4-BE49-F238E27FC236}">
-                <a16:creationId xmlns:a16="http://schemas.microsoft.com/office/drawing/2014/main" id="{15A6CB95-9D18-7880-BB59-17480CFC6A33}"/>
+                <a16:creationId xmlns:a16="http://schemas.microsoft.com/office/drawing/2014/main" id="{A0EC37DA-F2BC-CE7F-F977-F4ADE7D9A3CC}"/>
               </a:ext>
             </a:extLst>
           </p:cNvPr>
@@ -1256,7 +1256,7 @@
           <p:cNvPr id="3" name="내용 개체 틀 2">
             <a:extLst>
               <a:ext uri="{FF2B5EF4-FFF2-40B4-BE49-F238E27FC236}">
-                <a16:creationId xmlns:a16="http://schemas.microsoft.com/office/drawing/2014/main" id="{93F742EC-CCB9-AED4-181F-3F8AE99752ED}"/>
+                <a16:creationId xmlns:a16="http://schemas.microsoft.com/office/drawing/2014/main" id="{29896060-BF42-9497-7666-6FA8B6799033}"/>
               </a:ext>
             </a:extLst>
           </p:cNvPr>
@@ -1318,7 +1318,7 @@
           <p:cNvPr id="4" name="내용 개체 틀 3">
             <a:extLst>
               <a:ext uri="{FF2B5EF4-FFF2-40B4-BE49-F238E27FC236}">
-                <a16:creationId xmlns:a16="http://schemas.microsoft.com/office/drawing/2014/main" id="{D6167C3C-FE92-81C4-0792-870AA1040B8F}"/>
+                <a16:creationId xmlns:a16="http://schemas.microsoft.com/office/drawing/2014/main" id="{ECB6BD0A-83CB-15A3-5952-58AF0A2F7DFE}"/>
               </a:ext>
             </a:extLst>
           </p:cNvPr>
@@ -1380,7 +1380,7 @@
           <p:cNvPr id="5" name="날짜 개체 틀 4">
             <a:extLst>
               <a:ext uri="{FF2B5EF4-FFF2-40B4-BE49-F238E27FC236}">
-                <a16:creationId xmlns:a16="http://schemas.microsoft.com/office/drawing/2014/main" id="{2EFFF703-B510-980D-9F71-48A59F16BD69}"/>
+                <a16:creationId xmlns:a16="http://schemas.microsoft.com/office/drawing/2014/main" id="{2E0026C8-F2A0-9906-270C-AE815B4BC41B}"/>
               </a:ext>
             </a:extLst>
           </p:cNvPr>
@@ -1396,9 +1396,9 @@
           <a:bodyPr/>
           <a:lstStyle/>
           <a:p>
-            <a:fld id="{C3BB9B9E-20BD-41C5-837D-C991663DAB9A}" type="datetimeFigureOut">
+            <a:fld id="{DF25C7C5-662F-443D-B932-219A5FD090E8}" type="datetimeFigureOut">
               <a:rPr lang="ko-KR" altLang="en-US" smtClean="0"/>
-              <a:t>2026-06-21</a:t>
+              <a:t>2026-06-22</a:t>
             </a:fld>
             <a:endParaRPr lang="ko-KR" altLang="en-US"/>
           </a:p>
@@ -1409,7 +1409,7 @@
           <p:cNvPr id="6" name="바닥글 개체 틀 5">
             <a:extLst>
               <a:ext uri="{FF2B5EF4-FFF2-40B4-BE49-F238E27FC236}">
-                <a16:creationId xmlns:a16="http://schemas.microsoft.com/office/drawing/2014/main" id="{EF37FDF6-7A4A-3472-0BAA-098B12C376C7}"/>
+                <a16:creationId xmlns:a16="http://schemas.microsoft.com/office/drawing/2014/main" id="{48697819-CB78-BA42-2F90-01A22B8A4810}"/>
               </a:ext>
             </a:extLst>
           </p:cNvPr>
@@ -1434,7 +1434,7 @@
           <p:cNvPr id="7" name="슬라이드 번호 개체 틀 6">
             <a:extLst>
               <a:ext uri="{FF2B5EF4-FFF2-40B4-BE49-F238E27FC236}">
-                <a16:creationId xmlns:a16="http://schemas.microsoft.com/office/drawing/2014/main" id="{43AEB3B0-B4C3-CB2A-0D6E-57781F722003}"/>
+                <a16:creationId xmlns:a16="http://schemas.microsoft.com/office/drawing/2014/main" id="{69E06635-2BC6-2D2F-61AA-FF5716E51C54}"/>
               </a:ext>
             </a:extLst>
           </p:cNvPr>
@@ -1450,7 +1450,7 @@
           <a:bodyPr/>
           <a:lstStyle/>
           <a:p>
-            <a:fld id="{C2F10704-BB78-4439-8903-72F1EA287DEC}" type="slidenum">
+            <a:fld id="{C386F094-EA07-4928-8C98-3D149CEB2EED}" type="slidenum">
               <a:rPr lang="ko-KR" altLang="en-US" smtClean="0"/>
               <a:t>‹#›</a:t>
             </a:fld>
@@ -1461,7 +1461,7 @@
     </p:spTree>
     <p:extLst>
       <p:ext uri="{BB962C8B-B14F-4D97-AF65-F5344CB8AC3E}">
-        <p14:creationId xmlns:p14="http://schemas.microsoft.com/office/powerpoint/2010/main" val="3384516755"/>
+        <p14:creationId xmlns:p14="http://schemas.microsoft.com/office/powerpoint/2010/main" val="984766337"/>
       </p:ext>
     </p:extLst>
   </p:cSld>
@@ -1493,7 +1493,7 @@
           <p:cNvPr id="2" name="제목 1">
             <a:extLst>
               <a:ext uri="{FF2B5EF4-FFF2-40B4-BE49-F238E27FC236}">
-                <a16:creationId xmlns:a16="http://schemas.microsoft.com/office/drawing/2014/main" id="{28972963-587D-4B65-A8D7-724449F50F46}"/>
+                <a16:creationId xmlns:a16="http://schemas.microsoft.com/office/drawing/2014/main" id="{5DA048F4-81D3-FD92-1DC8-B98EE55DF838}"/>
               </a:ext>
             </a:extLst>
           </p:cNvPr>
@@ -1526,7 +1526,7 @@
           <p:cNvPr id="3" name="텍스트 개체 틀 2">
             <a:extLst>
               <a:ext uri="{FF2B5EF4-FFF2-40B4-BE49-F238E27FC236}">
-                <a16:creationId xmlns:a16="http://schemas.microsoft.com/office/drawing/2014/main" id="{C792FABA-B703-5AD3-DF02-EDFED8AFD672}"/>
+                <a16:creationId xmlns:a16="http://schemas.microsoft.com/office/drawing/2014/main" id="{AC1AD2BE-C622-08C3-A9DA-250CC786284C}"/>
               </a:ext>
             </a:extLst>
           </p:cNvPr>
@@ -1597,7 +1597,7 @@
           <p:cNvPr id="4" name="내용 개체 틀 3">
             <a:extLst>
               <a:ext uri="{FF2B5EF4-FFF2-40B4-BE49-F238E27FC236}">
-                <a16:creationId xmlns:a16="http://schemas.microsoft.com/office/drawing/2014/main" id="{89A695E7-5AFA-F3AE-5BF7-052540D25BA6}"/>
+                <a16:creationId xmlns:a16="http://schemas.microsoft.com/office/drawing/2014/main" id="{8B4A0516-45EB-08B8-1261-B714A80B4749}"/>
               </a:ext>
             </a:extLst>
           </p:cNvPr>
@@ -1659,7 +1659,7 @@
           <p:cNvPr id="5" name="텍스트 개체 틀 4">
             <a:extLst>
               <a:ext uri="{FF2B5EF4-FFF2-40B4-BE49-F238E27FC236}">
-                <a16:creationId xmlns:a16="http://schemas.microsoft.com/office/drawing/2014/main" id="{F6198D8E-36A3-53D8-1540-B3234D878B7E}"/>
+                <a16:creationId xmlns:a16="http://schemas.microsoft.com/office/drawing/2014/main" id="{66AE57E2-9036-B1DE-D7D1-BEA6EB0C39B1}"/>
               </a:ext>
             </a:extLst>
           </p:cNvPr>
@@ -1730,7 +1730,7 @@
           <p:cNvPr id="6" name="내용 개체 틀 5">
             <a:extLst>
               <a:ext uri="{FF2B5EF4-FFF2-40B4-BE49-F238E27FC236}">
-                <a16:creationId xmlns:a16="http://schemas.microsoft.com/office/drawing/2014/main" id="{160EBAAB-8430-E63A-ACD0-E713591CFB73}"/>
+                <a16:creationId xmlns:a16="http://schemas.microsoft.com/office/drawing/2014/main" id="{E1A5AC03-7808-2339-C0E7-A32F2F00AAD7}"/>
               </a:ext>
             </a:extLst>
           </p:cNvPr>
@@ -1792,7 +1792,7 @@
           <p:cNvPr id="7" name="날짜 개체 틀 6">
             <a:extLst>
               <a:ext uri="{FF2B5EF4-FFF2-40B4-BE49-F238E27FC236}">
-                <a16:creationId xmlns:a16="http://schemas.microsoft.com/office/drawing/2014/main" id="{A86D37DA-5983-949E-8CE4-2CBFBB3E24E7}"/>
+                <a16:creationId xmlns:a16="http://schemas.microsoft.com/office/drawing/2014/main" id="{C40807E6-2945-CBAC-75E2-9E907CD40CB8}"/>
               </a:ext>
             </a:extLst>
           </p:cNvPr>
@@ -1808,9 +1808,9 @@
           <a:bodyPr/>
           <a:lstStyle/>
           <a:p>
-            <a:fld id="{C3BB9B9E-20BD-41C5-837D-C991663DAB9A}" type="datetimeFigureOut">
+            <a:fld id="{DF25C7C5-662F-443D-B932-219A5FD090E8}" type="datetimeFigureOut">
               <a:rPr lang="ko-KR" altLang="en-US" smtClean="0"/>
-              <a:t>2026-06-21</a:t>
+              <a:t>2026-06-22</a:t>
             </a:fld>
             <a:endParaRPr lang="ko-KR" altLang="en-US"/>
           </a:p>
@@ -1821,7 +1821,7 @@
           <p:cNvPr id="8" name="바닥글 개체 틀 7">
             <a:extLst>
               <a:ext uri="{FF2B5EF4-FFF2-40B4-BE49-F238E27FC236}">
-                <a16:creationId xmlns:a16="http://schemas.microsoft.com/office/drawing/2014/main" id="{AA60B9B7-D330-7FC1-460A-727565D8F6D0}"/>
+                <a16:creationId xmlns:a16="http://schemas.microsoft.com/office/drawing/2014/main" id="{33AE7B08-316F-55CA-C091-89CEB80495FC}"/>
               </a:ext>
             </a:extLst>
           </p:cNvPr>
@@ -1846,7 +1846,7 @@
           <p:cNvPr id="9" name="슬라이드 번호 개체 틀 8">
             <a:extLst>
               <a:ext uri="{FF2B5EF4-FFF2-40B4-BE49-F238E27FC236}">
-                <a16:creationId xmlns:a16="http://schemas.microsoft.com/office/drawing/2014/main" id="{F6820AB1-75E6-F8F6-7E68-DC1B47DEB68B}"/>
+                <a16:creationId xmlns:a16="http://schemas.microsoft.com/office/drawing/2014/main" id="{4129C86F-9AEB-BD91-8130-CEB77D872931}"/>
               </a:ext>
             </a:extLst>
           </p:cNvPr>
@@ -1862,7 +1862,7 @@
           <a:bodyPr/>
           <a:lstStyle/>
           <a:p>
-            <a:fld id="{C2F10704-BB78-4439-8903-72F1EA287DEC}" type="slidenum">
+            <a:fld id="{C386F094-EA07-4928-8C98-3D149CEB2EED}" type="slidenum">
               <a:rPr lang="ko-KR" altLang="en-US" smtClean="0"/>
               <a:t>‹#›</a:t>
             </a:fld>
@@ -1873,7 +1873,7 @@
     </p:spTree>
     <p:extLst>
       <p:ext uri="{BB962C8B-B14F-4D97-AF65-F5344CB8AC3E}">
-        <p14:creationId xmlns:p14="http://schemas.microsoft.com/office/powerpoint/2010/main" val="3747228535"/>
+        <p14:creationId xmlns:p14="http://schemas.microsoft.com/office/powerpoint/2010/main" val="3005285713"/>
       </p:ext>
     </p:extLst>
   </p:cSld>
@@ -1905,7 +1905,7 @@
           <p:cNvPr id="2" name="제목 1">
             <a:extLst>
               <a:ext uri="{FF2B5EF4-FFF2-40B4-BE49-F238E27FC236}">
-                <a16:creationId xmlns:a16="http://schemas.microsoft.com/office/drawing/2014/main" id="{6B7B7332-A780-DF51-CE70-35CCEB08C151}"/>
+                <a16:creationId xmlns:a16="http://schemas.microsoft.com/office/drawing/2014/main" id="{9DBC8E68-7F5F-A08F-6D52-DBFCB40F0475}"/>
               </a:ext>
             </a:extLst>
           </p:cNvPr>
@@ -1933,7 +1933,7 @@
           <p:cNvPr id="3" name="날짜 개체 틀 2">
             <a:extLst>
               <a:ext uri="{FF2B5EF4-FFF2-40B4-BE49-F238E27FC236}">
-                <a16:creationId xmlns:a16="http://schemas.microsoft.com/office/drawing/2014/main" id="{066818FC-82E9-AEB0-E61A-405781D64E4F}"/>
+                <a16:creationId xmlns:a16="http://schemas.microsoft.com/office/drawing/2014/main" id="{6B17C9C9-76A4-4460-8ADA-50EA1FDD905D}"/>
               </a:ext>
             </a:extLst>
           </p:cNvPr>
@@ -1949,9 +1949,9 @@
           <a:bodyPr/>
           <a:lstStyle/>
           <a:p>
-            <a:fld id="{C3BB9B9E-20BD-41C5-837D-C991663DAB9A}" type="datetimeFigureOut">
+            <a:fld id="{DF25C7C5-662F-443D-B932-219A5FD090E8}" type="datetimeFigureOut">
               <a:rPr lang="ko-KR" altLang="en-US" smtClean="0"/>
-              <a:t>2026-06-21</a:t>
+              <a:t>2026-06-22</a:t>
             </a:fld>
             <a:endParaRPr lang="ko-KR" altLang="en-US"/>
           </a:p>
@@ -1962,7 +1962,7 @@
           <p:cNvPr id="4" name="바닥글 개체 틀 3">
             <a:extLst>
               <a:ext uri="{FF2B5EF4-FFF2-40B4-BE49-F238E27FC236}">
-                <a16:creationId xmlns:a16="http://schemas.microsoft.com/office/drawing/2014/main" id="{CE9F9BB5-530A-6EEB-9A3E-EA12C00C1994}"/>
+                <a16:creationId xmlns:a16="http://schemas.microsoft.com/office/drawing/2014/main" id="{3742F546-B978-7BB0-1D75-52C8300F808A}"/>
               </a:ext>
             </a:extLst>
           </p:cNvPr>
@@ -1987,7 +1987,7 @@
           <p:cNvPr id="5" name="슬라이드 번호 개체 틀 4">
             <a:extLst>
               <a:ext uri="{FF2B5EF4-FFF2-40B4-BE49-F238E27FC236}">
-                <a16:creationId xmlns:a16="http://schemas.microsoft.com/office/drawing/2014/main" id="{26575D0A-82CB-B347-2D6E-31346EF542C1}"/>
+                <a16:creationId xmlns:a16="http://schemas.microsoft.com/office/drawing/2014/main" id="{1F302BB1-2936-83F1-E73E-715D9B732BC6}"/>
               </a:ext>
             </a:extLst>
           </p:cNvPr>
@@ -2003,7 +2003,7 @@
           <a:bodyPr/>
           <a:lstStyle/>
           <a:p>
-            <a:fld id="{C2F10704-BB78-4439-8903-72F1EA287DEC}" type="slidenum">
+            <a:fld id="{C386F094-EA07-4928-8C98-3D149CEB2EED}" type="slidenum">
               <a:rPr lang="ko-KR" altLang="en-US" smtClean="0"/>
               <a:t>‹#›</a:t>
             </a:fld>
@@ -2014,7 +2014,7 @@
     </p:spTree>
     <p:extLst>
       <p:ext uri="{BB962C8B-B14F-4D97-AF65-F5344CB8AC3E}">
-        <p14:creationId xmlns:p14="http://schemas.microsoft.com/office/powerpoint/2010/main" val="419732762"/>
+        <p14:creationId xmlns:p14="http://schemas.microsoft.com/office/powerpoint/2010/main" val="2550892603"/>
       </p:ext>
     </p:extLst>
   </p:cSld>
@@ -2046,7 +2046,7 @@
           <p:cNvPr id="2" name="날짜 개체 틀 1">
             <a:extLst>
               <a:ext uri="{FF2B5EF4-FFF2-40B4-BE49-F238E27FC236}">
-                <a16:creationId xmlns:a16="http://schemas.microsoft.com/office/drawing/2014/main" id="{E6BFC7F4-C873-9521-6B45-AB0D9E7461C7}"/>
+                <a16:creationId xmlns:a16="http://schemas.microsoft.com/office/drawing/2014/main" id="{69A0BE4B-6A8E-18D5-EE38-65276B4194D2}"/>
               </a:ext>
             </a:extLst>
           </p:cNvPr>
@@ -2062,9 +2062,9 @@
           <a:bodyPr/>
           <a:lstStyle/>
           <a:p>
-            <a:fld id="{C3BB9B9E-20BD-41C5-837D-C991663DAB9A}" type="datetimeFigureOut">
+            <a:fld id="{DF25C7C5-662F-443D-B932-219A5FD090E8}" type="datetimeFigureOut">
               <a:rPr lang="ko-KR" altLang="en-US" smtClean="0"/>
-              <a:t>2026-06-21</a:t>
+              <a:t>2026-06-22</a:t>
             </a:fld>
             <a:endParaRPr lang="ko-KR" altLang="en-US"/>
           </a:p>
@@ -2075,7 +2075,7 @@
           <p:cNvPr id="3" name="바닥글 개체 틀 2">
             <a:extLst>
               <a:ext uri="{FF2B5EF4-FFF2-40B4-BE49-F238E27FC236}">
-                <a16:creationId xmlns:a16="http://schemas.microsoft.com/office/drawing/2014/main" id="{8D77B7B9-6AF8-EF9C-7734-DC699C05495E}"/>
+                <a16:creationId xmlns:a16="http://schemas.microsoft.com/office/drawing/2014/main" id="{672A76C7-6AEE-D4DD-F232-DC63C5AFC95C}"/>
               </a:ext>
             </a:extLst>
           </p:cNvPr>
@@ -2100,7 +2100,7 @@
           <p:cNvPr id="4" name="슬라이드 번호 개체 틀 3">
             <a:extLst>
               <a:ext uri="{FF2B5EF4-FFF2-40B4-BE49-F238E27FC236}">
-                <a16:creationId xmlns:a16="http://schemas.microsoft.com/office/drawing/2014/main" id="{6DBFBDB6-1BB4-5240-9E12-617DAD2839A0}"/>
+                <a16:creationId xmlns:a16="http://schemas.microsoft.com/office/drawing/2014/main" id="{CB489224-2162-1348-712A-0C1BA012318F}"/>
               </a:ext>
             </a:extLst>
           </p:cNvPr>
@@ -2116,7 +2116,7 @@
           <a:bodyPr/>
           <a:lstStyle/>
           <a:p>
-            <a:fld id="{C2F10704-BB78-4439-8903-72F1EA287DEC}" type="slidenum">
+            <a:fld id="{C386F094-EA07-4928-8C98-3D149CEB2EED}" type="slidenum">
               <a:rPr lang="ko-KR" altLang="en-US" smtClean="0"/>
               <a:t>‹#›</a:t>
             </a:fld>
@@ -2127,7 +2127,7 @@
     </p:spTree>
     <p:extLst>
       <p:ext uri="{BB962C8B-B14F-4D97-AF65-F5344CB8AC3E}">
-        <p14:creationId xmlns:p14="http://schemas.microsoft.com/office/powerpoint/2010/main" val="1704033511"/>
+        <p14:creationId xmlns:p14="http://schemas.microsoft.com/office/powerpoint/2010/main" val="386867717"/>
       </p:ext>
     </p:extLst>
   </p:cSld>
@@ -2159,7 +2159,7 @@
           <p:cNvPr id="2" name="제목 1">
             <a:extLst>
               <a:ext uri="{FF2B5EF4-FFF2-40B4-BE49-F238E27FC236}">
-                <a16:creationId xmlns:a16="http://schemas.microsoft.com/office/drawing/2014/main" id="{DA69F8D7-C299-0D84-09E5-C5257408793A}"/>
+                <a16:creationId xmlns:a16="http://schemas.microsoft.com/office/drawing/2014/main" id="{5DACAA8D-4F45-BE6A-93C3-CF180ADD847A}"/>
               </a:ext>
             </a:extLst>
           </p:cNvPr>
@@ -2196,7 +2196,7 @@
           <p:cNvPr id="3" name="내용 개체 틀 2">
             <a:extLst>
               <a:ext uri="{FF2B5EF4-FFF2-40B4-BE49-F238E27FC236}">
-                <a16:creationId xmlns:a16="http://schemas.microsoft.com/office/drawing/2014/main" id="{C5FFB732-377F-15A0-72F2-02765EB75D8D}"/>
+                <a16:creationId xmlns:a16="http://schemas.microsoft.com/office/drawing/2014/main" id="{A1A5F1C6-DA5F-394E-1468-95E130B3164F}"/>
               </a:ext>
             </a:extLst>
           </p:cNvPr>
@@ -2286,7 +2286,7 @@
           <p:cNvPr id="4" name="텍스트 개체 틀 3">
             <a:extLst>
               <a:ext uri="{FF2B5EF4-FFF2-40B4-BE49-F238E27FC236}">
-                <a16:creationId xmlns:a16="http://schemas.microsoft.com/office/drawing/2014/main" id="{7AB1464D-DDCD-C587-76FD-2AA4AEF44915}"/>
+                <a16:creationId xmlns:a16="http://schemas.microsoft.com/office/drawing/2014/main" id="{0771621F-8613-355F-90E4-1F956918D1ED}"/>
               </a:ext>
             </a:extLst>
           </p:cNvPr>
@@ -2357,7 +2357,7 @@
           <p:cNvPr id="5" name="날짜 개체 틀 4">
             <a:extLst>
               <a:ext uri="{FF2B5EF4-FFF2-40B4-BE49-F238E27FC236}">
-                <a16:creationId xmlns:a16="http://schemas.microsoft.com/office/drawing/2014/main" id="{AE6BC4EB-ABC1-CD7E-3AC5-654391C06CF5}"/>
+                <a16:creationId xmlns:a16="http://schemas.microsoft.com/office/drawing/2014/main" id="{ABD14042-5583-6E06-69FC-900998D8908D}"/>
               </a:ext>
             </a:extLst>
           </p:cNvPr>
@@ -2373,9 +2373,9 @@
           <a:bodyPr/>
           <a:lstStyle/>
           <a:p>
-            <a:fld id="{C3BB9B9E-20BD-41C5-837D-C991663DAB9A}" type="datetimeFigureOut">
+            <a:fld id="{DF25C7C5-662F-443D-B932-219A5FD090E8}" type="datetimeFigureOut">
               <a:rPr lang="ko-KR" altLang="en-US" smtClean="0"/>
-              <a:t>2026-06-21</a:t>
+              <a:t>2026-06-22</a:t>
             </a:fld>
             <a:endParaRPr lang="ko-KR" altLang="en-US"/>
           </a:p>
@@ -2386,7 +2386,7 @@
           <p:cNvPr id="6" name="바닥글 개체 틀 5">
             <a:extLst>
               <a:ext uri="{FF2B5EF4-FFF2-40B4-BE49-F238E27FC236}">
-                <a16:creationId xmlns:a16="http://schemas.microsoft.com/office/drawing/2014/main" id="{7CC3FB32-7DE6-3E82-4D14-E23EB752798E}"/>
+                <a16:creationId xmlns:a16="http://schemas.microsoft.com/office/drawing/2014/main" id="{B06132C4-20A6-5193-B135-8DB426C0D350}"/>
               </a:ext>
             </a:extLst>
           </p:cNvPr>
@@ -2411,7 +2411,7 @@
           <p:cNvPr id="7" name="슬라이드 번호 개체 틀 6">
             <a:extLst>
               <a:ext uri="{FF2B5EF4-FFF2-40B4-BE49-F238E27FC236}">
-                <a16:creationId xmlns:a16="http://schemas.microsoft.com/office/drawing/2014/main" id="{A06EDD4A-ACA0-68B7-FD2A-B70A5AF41A6A}"/>
+                <a16:creationId xmlns:a16="http://schemas.microsoft.com/office/drawing/2014/main" id="{7E9F43D7-E186-8079-8C35-28280206DB65}"/>
               </a:ext>
             </a:extLst>
           </p:cNvPr>
@@ -2427,7 +2427,7 @@
           <a:bodyPr/>
           <a:lstStyle/>
           <a:p>
-            <a:fld id="{C2F10704-BB78-4439-8903-72F1EA287DEC}" type="slidenum">
+            <a:fld id="{C386F094-EA07-4928-8C98-3D149CEB2EED}" type="slidenum">
               <a:rPr lang="ko-KR" altLang="en-US" smtClean="0"/>
               <a:t>‹#›</a:t>
             </a:fld>
@@ -2438,7 +2438,7 @@
     </p:spTree>
     <p:extLst>
       <p:ext uri="{BB962C8B-B14F-4D97-AF65-F5344CB8AC3E}">
-        <p14:creationId xmlns:p14="http://schemas.microsoft.com/office/powerpoint/2010/main" val="802620943"/>
+        <p14:creationId xmlns:p14="http://schemas.microsoft.com/office/powerpoint/2010/main" val="786253903"/>
       </p:ext>
     </p:extLst>
   </p:cSld>
@@ -2470,7 +2470,7 @@
           <p:cNvPr id="2" name="제목 1">
             <a:extLst>
               <a:ext uri="{FF2B5EF4-FFF2-40B4-BE49-F238E27FC236}">
-                <a16:creationId xmlns:a16="http://schemas.microsoft.com/office/drawing/2014/main" id="{CC4E72B4-D678-BEEE-5E18-445EBF9D9672}"/>
+                <a16:creationId xmlns:a16="http://schemas.microsoft.com/office/drawing/2014/main" id="{B214BC4C-697E-B7AB-F169-8E6414B02A62}"/>
               </a:ext>
             </a:extLst>
           </p:cNvPr>
@@ -2507,7 +2507,7 @@
           <p:cNvPr id="3" name="그림 개체 틀 2">
             <a:extLst>
               <a:ext uri="{FF2B5EF4-FFF2-40B4-BE49-F238E27FC236}">
-                <a16:creationId xmlns:a16="http://schemas.microsoft.com/office/drawing/2014/main" id="{5DF1CD17-FA0A-8CBF-8CA5-EEF65545A101}"/>
+                <a16:creationId xmlns:a16="http://schemas.microsoft.com/office/drawing/2014/main" id="{1DC7E03F-202C-352B-869F-0C6623756CA2}"/>
               </a:ext>
             </a:extLst>
           </p:cNvPr>
@@ -2574,7 +2574,7 @@
           <p:cNvPr id="4" name="텍스트 개체 틀 3">
             <a:extLst>
               <a:ext uri="{FF2B5EF4-FFF2-40B4-BE49-F238E27FC236}">
-                <a16:creationId xmlns:a16="http://schemas.microsoft.com/office/drawing/2014/main" id="{F763A6A1-B1F7-DA79-DF50-46987E8C4539}"/>
+                <a16:creationId xmlns:a16="http://schemas.microsoft.com/office/drawing/2014/main" id="{B0714415-04F1-9CA4-0E94-A2FCA9BBFA12}"/>
               </a:ext>
             </a:extLst>
           </p:cNvPr>
@@ -2645,7 +2645,7 @@
           <p:cNvPr id="5" name="날짜 개체 틀 4">
             <a:extLst>
               <a:ext uri="{FF2B5EF4-FFF2-40B4-BE49-F238E27FC236}">
-                <a16:creationId xmlns:a16="http://schemas.microsoft.com/office/drawing/2014/main" id="{EDED8714-CBE1-C22F-F901-AC924BF10B0E}"/>
+                <a16:creationId xmlns:a16="http://schemas.microsoft.com/office/drawing/2014/main" id="{161DF45E-BC61-D46D-EC9C-609443DCAA5A}"/>
               </a:ext>
             </a:extLst>
           </p:cNvPr>
@@ -2661,9 +2661,9 @@
           <a:bodyPr/>
           <a:lstStyle/>
           <a:p>
-            <a:fld id="{C3BB9B9E-20BD-41C5-837D-C991663DAB9A}" type="datetimeFigureOut">
+            <a:fld id="{DF25C7C5-662F-443D-B932-219A5FD090E8}" type="datetimeFigureOut">
               <a:rPr lang="ko-KR" altLang="en-US" smtClean="0"/>
-              <a:t>2026-06-21</a:t>
+              <a:t>2026-06-22</a:t>
             </a:fld>
             <a:endParaRPr lang="ko-KR" altLang="en-US"/>
           </a:p>
@@ -2674,7 +2674,7 @@
           <p:cNvPr id="6" name="바닥글 개체 틀 5">
             <a:extLst>
               <a:ext uri="{FF2B5EF4-FFF2-40B4-BE49-F238E27FC236}">
-                <a16:creationId xmlns:a16="http://schemas.microsoft.com/office/drawing/2014/main" id="{51F5EB82-1004-2A90-ADC7-690375BD57A4}"/>
+                <a16:creationId xmlns:a16="http://schemas.microsoft.com/office/drawing/2014/main" id="{7496F519-12DB-D350-36D6-E169C1E50B18}"/>
               </a:ext>
             </a:extLst>
           </p:cNvPr>
@@ -2699,7 +2699,7 @@
           <p:cNvPr id="7" name="슬라이드 번호 개체 틀 6">
             <a:extLst>
               <a:ext uri="{FF2B5EF4-FFF2-40B4-BE49-F238E27FC236}">
-                <a16:creationId xmlns:a16="http://schemas.microsoft.com/office/drawing/2014/main" id="{C338450C-8A32-A869-78AF-ACB50A3BF4EA}"/>
+                <a16:creationId xmlns:a16="http://schemas.microsoft.com/office/drawing/2014/main" id="{D3606746-B8C5-4E6D-3A92-1EE10D7208C2}"/>
               </a:ext>
             </a:extLst>
           </p:cNvPr>
@@ -2715,7 +2715,7 @@
           <a:bodyPr/>
           <a:lstStyle/>
           <a:p>
-            <a:fld id="{C2F10704-BB78-4439-8903-72F1EA287DEC}" type="slidenum">
+            <a:fld id="{C386F094-EA07-4928-8C98-3D149CEB2EED}" type="slidenum">
               <a:rPr lang="ko-KR" altLang="en-US" smtClean="0"/>
               <a:t>‹#›</a:t>
             </a:fld>
@@ -2726,7 +2726,7 @@
     </p:spTree>
     <p:extLst>
       <p:ext uri="{BB962C8B-B14F-4D97-AF65-F5344CB8AC3E}">
-        <p14:creationId xmlns:p14="http://schemas.microsoft.com/office/powerpoint/2010/main" val="2203631794"/>
+        <p14:creationId xmlns:p14="http://schemas.microsoft.com/office/powerpoint/2010/main" val="2727071061"/>
       </p:ext>
     </p:extLst>
   </p:cSld>
@@ -2763,7 +2763,7 @@
           <p:cNvPr id="2" name="제목 개체 틀 1">
             <a:extLst>
               <a:ext uri="{FF2B5EF4-FFF2-40B4-BE49-F238E27FC236}">
-                <a16:creationId xmlns:a16="http://schemas.microsoft.com/office/drawing/2014/main" id="{007247D5-C4FE-ACD5-BAFC-6A19B23BF38B}"/>
+                <a16:creationId xmlns:a16="http://schemas.microsoft.com/office/drawing/2014/main" id="{64502D1C-D4AE-F73E-9970-DD8FDCE0B5A6}"/>
               </a:ext>
             </a:extLst>
           </p:cNvPr>
@@ -2801,7 +2801,7 @@
           <p:cNvPr id="3" name="텍스트 개체 틀 2">
             <a:extLst>
               <a:ext uri="{FF2B5EF4-FFF2-40B4-BE49-F238E27FC236}">
-                <a16:creationId xmlns:a16="http://schemas.microsoft.com/office/drawing/2014/main" id="{F2F78BB6-F000-ACE1-1E9D-501D0A8BA222}"/>
+                <a16:creationId xmlns:a16="http://schemas.microsoft.com/office/drawing/2014/main" id="{32E4194E-BDAC-AF0E-F3C1-6E168966CE88}"/>
               </a:ext>
             </a:extLst>
           </p:cNvPr>
@@ -2868,7 +2868,7 @@
           <p:cNvPr id="4" name="날짜 개체 틀 3">
             <a:extLst>
               <a:ext uri="{FF2B5EF4-FFF2-40B4-BE49-F238E27FC236}">
-                <a16:creationId xmlns:a16="http://schemas.microsoft.com/office/drawing/2014/main" id="{23828755-0BFD-F216-4CFD-36B9819BC422}"/>
+                <a16:creationId xmlns:a16="http://schemas.microsoft.com/office/drawing/2014/main" id="{E2333130-008A-19A0-74F1-8702C4311C1F}"/>
               </a:ext>
             </a:extLst>
           </p:cNvPr>
@@ -2902,9 +2902,9 @@
             </a:lvl1pPr>
           </a:lstStyle>
           <a:p>
-            <a:fld id="{C3BB9B9E-20BD-41C5-837D-C991663DAB9A}" type="datetimeFigureOut">
+            <a:fld id="{DF25C7C5-662F-443D-B932-219A5FD090E8}" type="datetimeFigureOut">
               <a:rPr lang="ko-KR" altLang="en-US" smtClean="0"/>
-              <a:t>2026-06-21</a:t>
+              <a:t>2026-06-22</a:t>
             </a:fld>
             <a:endParaRPr lang="ko-KR" altLang="en-US"/>
           </a:p>
@@ -2915,7 +2915,7 @@
           <p:cNvPr id="5" name="바닥글 개체 틀 4">
             <a:extLst>
               <a:ext uri="{FF2B5EF4-FFF2-40B4-BE49-F238E27FC236}">
-                <a16:creationId xmlns:a16="http://schemas.microsoft.com/office/drawing/2014/main" id="{C65047F1-5373-0A0A-9425-398259B3420A}"/>
+                <a16:creationId xmlns:a16="http://schemas.microsoft.com/office/drawing/2014/main" id="{D9CE97A0-3C47-4EB6-D59B-1D8B53CA3028}"/>
               </a:ext>
             </a:extLst>
           </p:cNvPr>
@@ -2958,7 +2958,7 @@
           <p:cNvPr id="6" name="슬라이드 번호 개체 틀 5">
             <a:extLst>
               <a:ext uri="{FF2B5EF4-FFF2-40B4-BE49-F238E27FC236}">
-                <a16:creationId xmlns:a16="http://schemas.microsoft.com/office/drawing/2014/main" id="{3C222483-30DB-E7A7-BD71-4E88511D94C3}"/>
+                <a16:creationId xmlns:a16="http://schemas.microsoft.com/office/drawing/2014/main" id="{8EB91032-7C6F-4BFF-6E47-9E7AF9DA933E}"/>
               </a:ext>
             </a:extLst>
           </p:cNvPr>
@@ -2992,7 +2992,7 @@
             </a:lvl1pPr>
           </a:lstStyle>
           <a:p>
-            <a:fld id="{C2F10704-BB78-4439-8903-72F1EA287DEC}" type="slidenum">
+            <a:fld id="{C386F094-EA07-4928-8C98-3D149CEB2EED}" type="slidenum">
               <a:rPr lang="ko-KR" altLang="en-US" smtClean="0"/>
               <a:t>‹#›</a:t>
             </a:fld>
@@ -3003,7 +3003,7 @@
     </p:spTree>
     <p:extLst>
       <p:ext uri="{BB962C8B-B14F-4D97-AF65-F5344CB8AC3E}">
-        <p14:creationId xmlns:p14="http://schemas.microsoft.com/office/powerpoint/2010/main" val="468937670"/>
+        <p14:creationId xmlns:p14="http://schemas.microsoft.com/office/powerpoint/2010/main" val="2512514884"/>
       </p:ext>
     </p:extLst>
   </p:cSld>
@@ -3326,7 +3326,7 @@
           <p:cNvPr id="3" name="그래픽 2">
             <a:extLst>
               <a:ext uri="{FF2B5EF4-FFF2-40B4-BE49-F238E27FC236}">
-                <a16:creationId xmlns:a16="http://schemas.microsoft.com/office/drawing/2014/main" id="{2D06FF39-644D-506D-4E5C-4E54078CDB5E}"/>
+                <a16:creationId xmlns:a16="http://schemas.microsoft.com/office/drawing/2014/main" id="{BB6AB1DC-980F-ED5B-A1BC-CB6ABE8BC230}"/>
               </a:ext>
             </a:extLst>
           </p:cNvPr>
@@ -3360,7 +3360,7 @@
     </p:spTree>
     <p:extLst>
       <p:ext uri="{BB962C8B-B14F-4D97-AF65-F5344CB8AC3E}">
-        <p14:creationId xmlns:p14="http://schemas.microsoft.com/office/powerpoint/2010/main" val="1544202134"/>
+        <p14:creationId xmlns:p14="http://schemas.microsoft.com/office/powerpoint/2010/main" val="2571150867"/>
       </p:ext>
     </p:extLst>
   </p:cSld>

--- a/docs/assets/infographic-seed-gallery.pptx
+++ b/docs/assets/infographic-seed-gallery.pptx
@@ -129,7 +129,7 @@
           <p:cNvPr id="2" name="제목 1">
             <a:extLst>
               <a:ext uri="{FF2B5EF4-FFF2-40B4-BE49-F238E27FC236}">
-                <a16:creationId xmlns:a16="http://schemas.microsoft.com/office/drawing/2014/main" id="{EF4F71CE-F639-DBEE-5496-7FD95CD70A08}"/>
+                <a16:creationId xmlns:a16="http://schemas.microsoft.com/office/drawing/2014/main" id="{525D0CB1-034E-14CE-91BE-B619367B1F34}"/>
               </a:ext>
             </a:extLst>
           </p:cNvPr>
@@ -166,7 +166,7 @@
           <p:cNvPr id="3" name="부제목 2">
             <a:extLst>
               <a:ext uri="{FF2B5EF4-FFF2-40B4-BE49-F238E27FC236}">
-                <a16:creationId xmlns:a16="http://schemas.microsoft.com/office/drawing/2014/main" id="{726166D4-436E-52FB-213B-6FC34B6577B4}"/>
+                <a16:creationId xmlns:a16="http://schemas.microsoft.com/office/drawing/2014/main" id="{EB8A8202-8181-7DEA-DB51-157A0C83A957}"/>
               </a:ext>
             </a:extLst>
           </p:cNvPr>
@@ -236,7 +236,7 @@
           <p:cNvPr id="4" name="날짜 개체 틀 3">
             <a:extLst>
               <a:ext uri="{FF2B5EF4-FFF2-40B4-BE49-F238E27FC236}">
-                <a16:creationId xmlns:a16="http://schemas.microsoft.com/office/drawing/2014/main" id="{57712DEA-3EA1-B64B-F338-A646B7937D79}"/>
+                <a16:creationId xmlns:a16="http://schemas.microsoft.com/office/drawing/2014/main" id="{3DE1FAF4-8B34-9AF0-235D-9A15115C7351}"/>
               </a:ext>
             </a:extLst>
           </p:cNvPr>
@@ -252,7 +252,7 @@
           <a:bodyPr/>
           <a:lstStyle/>
           <a:p>
-            <a:fld id="{DF25C7C5-662F-443D-B932-219A5FD090E8}" type="datetimeFigureOut">
+            <a:fld id="{45758416-7A6C-4B2A-B976-C57B5B58CF95}" type="datetimeFigureOut">
               <a:rPr lang="ko-KR" altLang="en-US" smtClean="0"/>
               <a:t>2026-06-22</a:t>
             </a:fld>
@@ -265,7 +265,7 @@
           <p:cNvPr id="5" name="바닥글 개체 틀 4">
             <a:extLst>
               <a:ext uri="{FF2B5EF4-FFF2-40B4-BE49-F238E27FC236}">
-                <a16:creationId xmlns:a16="http://schemas.microsoft.com/office/drawing/2014/main" id="{08081EEF-5C71-668E-246B-A184DE0CBECF}"/>
+                <a16:creationId xmlns:a16="http://schemas.microsoft.com/office/drawing/2014/main" id="{177EAE7F-F547-6A6F-2EF4-3F6FB3550CBA}"/>
               </a:ext>
             </a:extLst>
           </p:cNvPr>
@@ -290,7 +290,7 @@
           <p:cNvPr id="6" name="슬라이드 번호 개체 틀 5">
             <a:extLst>
               <a:ext uri="{FF2B5EF4-FFF2-40B4-BE49-F238E27FC236}">
-                <a16:creationId xmlns:a16="http://schemas.microsoft.com/office/drawing/2014/main" id="{9F522056-736F-980C-2449-28252C80DCD3}"/>
+                <a16:creationId xmlns:a16="http://schemas.microsoft.com/office/drawing/2014/main" id="{4F296636-3906-CA41-04A1-DC3B138EC25A}"/>
               </a:ext>
             </a:extLst>
           </p:cNvPr>
@@ -306,7 +306,7 @@
           <a:bodyPr/>
           <a:lstStyle/>
           <a:p>
-            <a:fld id="{C386F094-EA07-4928-8C98-3D149CEB2EED}" type="slidenum">
+            <a:fld id="{56132E85-F82A-4B85-ACE0-657FE931569E}" type="slidenum">
               <a:rPr lang="ko-KR" altLang="en-US" smtClean="0"/>
               <a:t>‹#›</a:t>
             </a:fld>
@@ -317,7 +317,7 @@
     </p:spTree>
     <p:extLst>
       <p:ext uri="{BB962C8B-B14F-4D97-AF65-F5344CB8AC3E}">
-        <p14:creationId xmlns:p14="http://schemas.microsoft.com/office/powerpoint/2010/main" val="733327690"/>
+        <p14:creationId xmlns:p14="http://schemas.microsoft.com/office/powerpoint/2010/main" val="600177661"/>
       </p:ext>
     </p:extLst>
   </p:cSld>
@@ -349,7 +349,7 @@
           <p:cNvPr id="2" name="제목 1">
             <a:extLst>
               <a:ext uri="{FF2B5EF4-FFF2-40B4-BE49-F238E27FC236}">
-                <a16:creationId xmlns:a16="http://schemas.microsoft.com/office/drawing/2014/main" id="{9117C828-77FE-50EB-BD85-B106C6901CDB}"/>
+                <a16:creationId xmlns:a16="http://schemas.microsoft.com/office/drawing/2014/main" id="{9F372A06-C85D-44FA-5D65-164AB55AA92E}"/>
               </a:ext>
             </a:extLst>
           </p:cNvPr>
@@ -377,7 +377,7 @@
           <p:cNvPr id="3" name="세로 텍스트 개체 틀 2">
             <a:extLst>
               <a:ext uri="{FF2B5EF4-FFF2-40B4-BE49-F238E27FC236}">
-                <a16:creationId xmlns:a16="http://schemas.microsoft.com/office/drawing/2014/main" id="{42770791-5DDC-E8D6-2776-A3525D71BB3F}"/>
+                <a16:creationId xmlns:a16="http://schemas.microsoft.com/office/drawing/2014/main" id="{F042CD96-A478-DE82-0A9E-6D81BFE2CDD1}"/>
               </a:ext>
             </a:extLst>
           </p:cNvPr>
@@ -434,7 +434,7 @@
           <p:cNvPr id="4" name="날짜 개체 틀 3">
             <a:extLst>
               <a:ext uri="{FF2B5EF4-FFF2-40B4-BE49-F238E27FC236}">
-                <a16:creationId xmlns:a16="http://schemas.microsoft.com/office/drawing/2014/main" id="{12EACF59-18AD-9B92-02E3-FB05BD63D0FC}"/>
+                <a16:creationId xmlns:a16="http://schemas.microsoft.com/office/drawing/2014/main" id="{DE3FBEC6-EE3F-CB55-E180-5F4366573284}"/>
               </a:ext>
             </a:extLst>
           </p:cNvPr>
@@ -450,7 +450,7 @@
           <a:bodyPr/>
           <a:lstStyle/>
           <a:p>
-            <a:fld id="{DF25C7C5-662F-443D-B932-219A5FD090E8}" type="datetimeFigureOut">
+            <a:fld id="{45758416-7A6C-4B2A-B976-C57B5B58CF95}" type="datetimeFigureOut">
               <a:rPr lang="ko-KR" altLang="en-US" smtClean="0"/>
               <a:t>2026-06-22</a:t>
             </a:fld>
@@ -463,7 +463,7 @@
           <p:cNvPr id="5" name="바닥글 개체 틀 4">
             <a:extLst>
               <a:ext uri="{FF2B5EF4-FFF2-40B4-BE49-F238E27FC236}">
-                <a16:creationId xmlns:a16="http://schemas.microsoft.com/office/drawing/2014/main" id="{03C7E362-A450-7027-C1B3-908ACC832DA3}"/>
+                <a16:creationId xmlns:a16="http://schemas.microsoft.com/office/drawing/2014/main" id="{DE2100D3-114F-3DFD-618A-76808B224EAA}"/>
               </a:ext>
             </a:extLst>
           </p:cNvPr>
@@ -488,7 +488,7 @@
           <p:cNvPr id="6" name="슬라이드 번호 개체 틀 5">
             <a:extLst>
               <a:ext uri="{FF2B5EF4-FFF2-40B4-BE49-F238E27FC236}">
-                <a16:creationId xmlns:a16="http://schemas.microsoft.com/office/drawing/2014/main" id="{F963828E-ADD6-5B02-6D00-4DACF24925F8}"/>
+                <a16:creationId xmlns:a16="http://schemas.microsoft.com/office/drawing/2014/main" id="{614EDACD-3C34-A67B-E7F2-F4414DF949D5}"/>
               </a:ext>
             </a:extLst>
           </p:cNvPr>
@@ -504,7 +504,7 @@
           <a:bodyPr/>
           <a:lstStyle/>
           <a:p>
-            <a:fld id="{C386F094-EA07-4928-8C98-3D149CEB2EED}" type="slidenum">
+            <a:fld id="{56132E85-F82A-4B85-ACE0-657FE931569E}" type="slidenum">
               <a:rPr lang="ko-KR" altLang="en-US" smtClean="0"/>
               <a:t>‹#›</a:t>
             </a:fld>
@@ -515,7 +515,7 @@
     </p:spTree>
     <p:extLst>
       <p:ext uri="{BB962C8B-B14F-4D97-AF65-F5344CB8AC3E}">
-        <p14:creationId xmlns:p14="http://schemas.microsoft.com/office/powerpoint/2010/main" val="3354307608"/>
+        <p14:creationId xmlns:p14="http://schemas.microsoft.com/office/powerpoint/2010/main" val="2380477494"/>
       </p:ext>
     </p:extLst>
   </p:cSld>
@@ -547,7 +547,7 @@
           <p:cNvPr id="2" name="세로 제목 1">
             <a:extLst>
               <a:ext uri="{FF2B5EF4-FFF2-40B4-BE49-F238E27FC236}">
-                <a16:creationId xmlns:a16="http://schemas.microsoft.com/office/drawing/2014/main" id="{84888CEB-2876-F69C-ABBE-F1895B0CD000}"/>
+                <a16:creationId xmlns:a16="http://schemas.microsoft.com/office/drawing/2014/main" id="{93B54251-7257-EF0B-95D6-BABCD8BE9F4E}"/>
               </a:ext>
             </a:extLst>
           </p:cNvPr>
@@ -580,7 +580,7 @@
           <p:cNvPr id="3" name="세로 텍스트 개체 틀 2">
             <a:extLst>
               <a:ext uri="{FF2B5EF4-FFF2-40B4-BE49-F238E27FC236}">
-                <a16:creationId xmlns:a16="http://schemas.microsoft.com/office/drawing/2014/main" id="{4B005178-7D19-755A-7D6F-4D47F875BABD}"/>
+                <a16:creationId xmlns:a16="http://schemas.microsoft.com/office/drawing/2014/main" id="{EB717C1E-7B0F-7714-0545-15C2112219E4}"/>
               </a:ext>
             </a:extLst>
           </p:cNvPr>
@@ -642,7 +642,7 @@
           <p:cNvPr id="4" name="날짜 개체 틀 3">
             <a:extLst>
               <a:ext uri="{FF2B5EF4-FFF2-40B4-BE49-F238E27FC236}">
-                <a16:creationId xmlns:a16="http://schemas.microsoft.com/office/drawing/2014/main" id="{90407100-59FC-92F0-6D87-BB1160369523}"/>
+                <a16:creationId xmlns:a16="http://schemas.microsoft.com/office/drawing/2014/main" id="{D99DAAF2-7CD9-724A-0D96-FA9CC23EDBA2}"/>
               </a:ext>
             </a:extLst>
           </p:cNvPr>
@@ -658,7 +658,7 @@
           <a:bodyPr/>
           <a:lstStyle/>
           <a:p>
-            <a:fld id="{DF25C7C5-662F-443D-B932-219A5FD090E8}" type="datetimeFigureOut">
+            <a:fld id="{45758416-7A6C-4B2A-B976-C57B5B58CF95}" type="datetimeFigureOut">
               <a:rPr lang="ko-KR" altLang="en-US" smtClean="0"/>
               <a:t>2026-06-22</a:t>
             </a:fld>
@@ -671,7 +671,7 @@
           <p:cNvPr id="5" name="바닥글 개체 틀 4">
             <a:extLst>
               <a:ext uri="{FF2B5EF4-FFF2-40B4-BE49-F238E27FC236}">
-                <a16:creationId xmlns:a16="http://schemas.microsoft.com/office/drawing/2014/main" id="{8C6B467F-22BC-E4EC-1950-392E091FD8BF}"/>
+                <a16:creationId xmlns:a16="http://schemas.microsoft.com/office/drawing/2014/main" id="{93D5EB92-380A-323F-27B8-9C5061F735D6}"/>
               </a:ext>
             </a:extLst>
           </p:cNvPr>
@@ -696,7 +696,7 @@
           <p:cNvPr id="6" name="슬라이드 번호 개체 틀 5">
             <a:extLst>
               <a:ext uri="{FF2B5EF4-FFF2-40B4-BE49-F238E27FC236}">
-                <a16:creationId xmlns:a16="http://schemas.microsoft.com/office/drawing/2014/main" id="{80A34A33-09F7-4B03-A30B-21DEA67B18FD}"/>
+                <a16:creationId xmlns:a16="http://schemas.microsoft.com/office/drawing/2014/main" id="{B4B5C33A-A221-20EA-3681-246D3D98A834}"/>
               </a:ext>
             </a:extLst>
           </p:cNvPr>
@@ -712,7 +712,7 @@
           <a:bodyPr/>
           <a:lstStyle/>
           <a:p>
-            <a:fld id="{C386F094-EA07-4928-8C98-3D149CEB2EED}" type="slidenum">
+            <a:fld id="{56132E85-F82A-4B85-ACE0-657FE931569E}" type="slidenum">
               <a:rPr lang="ko-KR" altLang="en-US" smtClean="0"/>
               <a:t>‹#›</a:t>
             </a:fld>
@@ -723,7 +723,7 @@
     </p:spTree>
     <p:extLst>
       <p:ext uri="{BB962C8B-B14F-4D97-AF65-F5344CB8AC3E}">
-        <p14:creationId xmlns:p14="http://schemas.microsoft.com/office/powerpoint/2010/main" val="1927594729"/>
+        <p14:creationId xmlns:p14="http://schemas.microsoft.com/office/powerpoint/2010/main" val="79670422"/>
       </p:ext>
     </p:extLst>
   </p:cSld>
@@ -755,7 +755,7 @@
           <p:cNvPr id="2" name="제목 1">
             <a:extLst>
               <a:ext uri="{FF2B5EF4-FFF2-40B4-BE49-F238E27FC236}">
-                <a16:creationId xmlns:a16="http://schemas.microsoft.com/office/drawing/2014/main" id="{AE385857-637F-68F6-C19E-3C8F2A9E22D6}"/>
+                <a16:creationId xmlns:a16="http://schemas.microsoft.com/office/drawing/2014/main" id="{BD9D7E49-2F6C-DAE6-D66E-99F067C51AB3}"/>
               </a:ext>
             </a:extLst>
           </p:cNvPr>
@@ -783,7 +783,7 @@
           <p:cNvPr id="3" name="내용 개체 틀 2">
             <a:extLst>
               <a:ext uri="{FF2B5EF4-FFF2-40B4-BE49-F238E27FC236}">
-                <a16:creationId xmlns:a16="http://schemas.microsoft.com/office/drawing/2014/main" id="{47AF6C86-07B3-F519-7E6F-555AD7780238}"/>
+                <a16:creationId xmlns:a16="http://schemas.microsoft.com/office/drawing/2014/main" id="{ABEA2A00-96AF-3007-1D0A-8993FFAEEC9F}"/>
               </a:ext>
             </a:extLst>
           </p:cNvPr>
@@ -840,7 +840,7 @@
           <p:cNvPr id="4" name="날짜 개체 틀 3">
             <a:extLst>
               <a:ext uri="{FF2B5EF4-FFF2-40B4-BE49-F238E27FC236}">
-                <a16:creationId xmlns:a16="http://schemas.microsoft.com/office/drawing/2014/main" id="{6EFDB4DA-AC20-D39B-04EF-46BD2F05E90A}"/>
+                <a16:creationId xmlns:a16="http://schemas.microsoft.com/office/drawing/2014/main" id="{649F8DF7-90CF-B077-848D-9F9C7004D039}"/>
               </a:ext>
             </a:extLst>
           </p:cNvPr>
@@ -856,7 +856,7 @@
           <a:bodyPr/>
           <a:lstStyle/>
           <a:p>
-            <a:fld id="{DF25C7C5-662F-443D-B932-219A5FD090E8}" type="datetimeFigureOut">
+            <a:fld id="{45758416-7A6C-4B2A-B976-C57B5B58CF95}" type="datetimeFigureOut">
               <a:rPr lang="ko-KR" altLang="en-US" smtClean="0"/>
               <a:t>2026-06-22</a:t>
             </a:fld>
@@ -869,7 +869,7 @@
           <p:cNvPr id="5" name="바닥글 개체 틀 4">
             <a:extLst>
               <a:ext uri="{FF2B5EF4-FFF2-40B4-BE49-F238E27FC236}">
-                <a16:creationId xmlns:a16="http://schemas.microsoft.com/office/drawing/2014/main" id="{B4E9D650-0147-A1E0-FDF9-A2BCE4838421}"/>
+                <a16:creationId xmlns:a16="http://schemas.microsoft.com/office/drawing/2014/main" id="{468FDCA6-4128-1773-7E10-BD0DE45703D5}"/>
               </a:ext>
             </a:extLst>
           </p:cNvPr>
@@ -894,7 +894,7 @@
           <p:cNvPr id="6" name="슬라이드 번호 개체 틀 5">
             <a:extLst>
               <a:ext uri="{FF2B5EF4-FFF2-40B4-BE49-F238E27FC236}">
-                <a16:creationId xmlns:a16="http://schemas.microsoft.com/office/drawing/2014/main" id="{5A297029-F0F7-4E5F-666E-E83ABB18C4BA}"/>
+                <a16:creationId xmlns:a16="http://schemas.microsoft.com/office/drawing/2014/main" id="{55E539D0-7260-434A-9568-2248A5EE1398}"/>
               </a:ext>
             </a:extLst>
           </p:cNvPr>
@@ -910,7 +910,7 @@
           <a:bodyPr/>
           <a:lstStyle/>
           <a:p>
-            <a:fld id="{C386F094-EA07-4928-8C98-3D149CEB2EED}" type="slidenum">
+            <a:fld id="{56132E85-F82A-4B85-ACE0-657FE931569E}" type="slidenum">
               <a:rPr lang="ko-KR" altLang="en-US" smtClean="0"/>
               <a:t>‹#›</a:t>
             </a:fld>
@@ -921,7 +921,7 @@
     </p:spTree>
     <p:extLst>
       <p:ext uri="{BB962C8B-B14F-4D97-AF65-F5344CB8AC3E}">
-        <p14:creationId xmlns:p14="http://schemas.microsoft.com/office/powerpoint/2010/main" val="3211647699"/>
+        <p14:creationId xmlns:p14="http://schemas.microsoft.com/office/powerpoint/2010/main" val="2692641134"/>
       </p:ext>
     </p:extLst>
   </p:cSld>
@@ -953,7 +953,7 @@
           <p:cNvPr id="2" name="제목 1">
             <a:extLst>
               <a:ext uri="{FF2B5EF4-FFF2-40B4-BE49-F238E27FC236}">
-                <a16:creationId xmlns:a16="http://schemas.microsoft.com/office/drawing/2014/main" id="{7E480BCF-D8F1-DF8B-9D1A-B9334E693F70}"/>
+                <a16:creationId xmlns:a16="http://schemas.microsoft.com/office/drawing/2014/main" id="{30835D6E-EEAF-BBAB-DB12-8BD11EC006D7}"/>
               </a:ext>
             </a:extLst>
           </p:cNvPr>
@@ -990,7 +990,7 @@
           <p:cNvPr id="3" name="텍스트 개체 틀 2">
             <a:extLst>
               <a:ext uri="{FF2B5EF4-FFF2-40B4-BE49-F238E27FC236}">
-                <a16:creationId xmlns:a16="http://schemas.microsoft.com/office/drawing/2014/main" id="{1D0CB149-F4AB-734D-64F4-EBCCDB137E5F}"/>
+                <a16:creationId xmlns:a16="http://schemas.microsoft.com/office/drawing/2014/main" id="{B5765A79-89B5-854D-4026-537597DCE4B9}"/>
               </a:ext>
             </a:extLst>
           </p:cNvPr>
@@ -1115,7 +1115,7 @@
           <p:cNvPr id="4" name="날짜 개체 틀 3">
             <a:extLst>
               <a:ext uri="{FF2B5EF4-FFF2-40B4-BE49-F238E27FC236}">
-                <a16:creationId xmlns:a16="http://schemas.microsoft.com/office/drawing/2014/main" id="{11A8DC33-5861-851C-8963-4354CC564C93}"/>
+                <a16:creationId xmlns:a16="http://schemas.microsoft.com/office/drawing/2014/main" id="{87E8940D-5673-A2D2-B3C1-DEEA21C4CDE1}"/>
               </a:ext>
             </a:extLst>
           </p:cNvPr>
@@ -1131,7 +1131,7 @@
           <a:bodyPr/>
           <a:lstStyle/>
           <a:p>
-            <a:fld id="{DF25C7C5-662F-443D-B932-219A5FD090E8}" type="datetimeFigureOut">
+            <a:fld id="{45758416-7A6C-4B2A-B976-C57B5B58CF95}" type="datetimeFigureOut">
               <a:rPr lang="ko-KR" altLang="en-US" smtClean="0"/>
               <a:t>2026-06-22</a:t>
             </a:fld>
@@ -1144,7 +1144,7 @@
           <p:cNvPr id="5" name="바닥글 개체 틀 4">
             <a:extLst>
               <a:ext uri="{FF2B5EF4-FFF2-40B4-BE49-F238E27FC236}">
-                <a16:creationId xmlns:a16="http://schemas.microsoft.com/office/drawing/2014/main" id="{9344C8AE-208D-1E64-9538-AC6B9ADCFC6E}"/>
+                <a16:creationId xmlns:a16="http://schemas.microsoft.com/office/drawing/2014/main" id="{4A9E648B-AF12-8BFB-3D25-701BE219F801}"/>
               </a:ext>
             </a:extLst>
           </p:cNvPr>
@@ -1169,7 +1169,7 @@
           <p:cNvPr id="6" name="슬라이드 번호 개체 틀 5">
             <a:extLst>
               <a:ext uri="{FF2B5EF4-FFF2-40B4-BE49-F238E27FC236}">
-                <a16:creationId xmlns:a16="http://schemas.microsoft.com/office/drawing/2014/main" id="{3B72D935-04BA-6A3F-6989-3B86F7AE029F}"/>
+                <a16:creationId xmlns:a16="http://schemas.microsoft.com/office/drawing/2014/main" id="{E8773235-08B6-6B9B-F0BE-C6A2EA31A74C}"/>
               </a:ext>
             </a:extLst>
           </p:cNvPr>
@@ -1185,7 +1185,7 @@
           <a:bodyPr/>
           <a:lstStyle/>
           <a:p>
-            <a:fld id="{C386F094-EA07-4928-8C98-3D149CEB2EED}" type="slidenum">
+            <a:fld id="{56132E85-F82A-4B85-ACE0-657FE931569E}" type="slidenum">
               <a:rPr lang="ko-KR" altLang="en-US" smtClean="0"/>
               <a:t>‹#›</a:t>
             </a:fld>
@@ -1196,7 +1196,7 @@
     </p:spTree>
     <p:extLst>
       <p:ext uri="{BB962C8B-B14F-4D97-AF65-F5344CB8AC3E}">
-        <p14:creationId xmlns:p14="http://schemas.microsoft.com/office/powerpoint/2010/main" val="2269818731"/>
+        <p14:creationId xmlns:p14="http://schemas.microsoft.com/office/powerpoint/2010/main" val="549395898"/>
       </p:ext>
     </p:extLst>
   </p:cSld>
@@ -1228,7 +1228,7 @@
           <p:cNvPr id="2" name="제목 1">
             <a:extLst>
               <a:ext uri="{FF2B5EF4-FFF2-40B4-BE49-F238E27FC236}">
-                <a16:creationId xmlns:a16="http://schemas.microsoft.com/office/drawing/2014/main" id="{A0EC37DA-F2BC-CE7F-F977-F4ADE7D9A3CC}"/>
+                <a16:creationId xmlns:a16="http://schemas.microsoft.com/office/drawing/2014/main" id="{37D154C2-98D8-1851-0955-425F05E1FA01}"/>
               </a:ext>
             </a:extLst>
           </p:cNvPr>
@@ -1256,7 +1256,7 @@
           <p:cNvPr id="3" name="내용 개체 틀 2">
             <a:extLst>
               <a:ext uri="{FF2B5EF4-FFF2-40B4-BE49-F238E27FC236}">
-                <a16:creationId xmlns:a16="http://schemas.microsoft.com/office/drawing/2014/main" id="{29896060-BF42-9497-7666-6FA8B6799033}"/>
+                <a16:creationId xmlns:a16="http://schemas.microsoft.com/office/drawing/2014/main" id="{5B91B561-55E2-5829-B03A-3F8FD5B12483}"/>
               </a:ext>
             </a:extLst>
           </p:cNvPr>
@@ -1318,7 +1318,7 @@
           <p:cNvPr id="4" name="내용 개체 틀 3">
             <a:extLst>
               <a:ext uri="{FF2B5EF4-FFF2-40B4-BE49-F238E27FC236}">
-                <a16:creationId xmlns:a16="http://schemas.microsoft.com/office/drawing/2014/main" id="{ECB6BD0A-83CB-15A3-5952-58AF0A2F7DFE}"/>
+                <a16:creationId xmlns:a16="http://schemas.microsoft.com/office/drawing/2014/main" id="{AAF56B46-97F8-6E45-51F8-B7D3F429683A}"/>
               </a:ext>
             </a:extLst>
           </p:cNvPr>
@@ -1380,7 +1380,7 @@
           <p:cNvPr id="5" name="날짜 개체 틀 4">
             <a:extLst>
               <a:ext uri="{FF2B5EF4-FFF2-40B4-BE49-F238E27FC236}">
-                <a16:creationId xmlns:a16="http://schemas.microsoft.com/office/drawing/2014/main" id="{2E0026C8-F2A0-9906-270C-AE815B4BC41B}"/>
+                <a16:creationId xmlns:a16="http://schemas.microsoft.com/office/drawing/2014/main" id="{99E4FB6C-DDE8-31D6-98F2-EE1F87887D29}"/>
               </a:ext>
             </a:extLst>
           </p:cNvPr>
@@ -1396,7 +1396,7 @@
           <a:bodyPr/>
           <a:lstStyle/>
           <a:p>
-            <a:fld id="{DF25C7C5-662F-443D-B932-219A5FD090E8}" type="datetimeFigureOut">
+            <a:fld id="{45758416-7A6C-4B2A-B976-C57B5B58CF95}" type="datetimeFigureOut">
               <a:rPr lang="ko-KR" altLang="en-US" smtClean="0"/>
               <a:t>2026-06-22</a:t>
             </a:fld>
@@ -1409,7 +1409,7 @@
           <p:cNvPr id="6" name="바닥글 개체 틀 5">
             <a:extLst>
               <a:ext uri="{FF2B5EF4-FFF2-40B4-BE49-F238E27FC236}">
-                <a16:creationId xmlns:a16="http://schemas.microsoft.com/office/drawing/2014/main" id="{48697819-CB78-BA42-2F90-01A22B8A4810}"/>
+                <a16:creationId xmlns:a16="http://schemas.microsoft.com/office/drawing/2014/main" id="{A018DDA0-16CE-4C95-429F-3600906782A6}"/>
               </a:ext>
             </a:extLst>
           </p:cNvPr>
@@ -1434,7 +1434,7 @@
           <p:cNvPr id="7" name="슬라이드 번호 개체 틀 6">
             <a:extLst>
               <a:ext uri="{FF2B5EF4-FFF2-40B4-BE49-F238E27FC236}">
-                <a16:creationId xmlns:a16="http://schemas.microsoft.com/office/drawing/2014/main" id="{69E06635-2BC6-2D2F-61AA-FF5716E51C54}"/>
+                <a16:creationId xmlns:a16="http://schemas.microsoft.com/office/drawing/2014/main" id="{2A1C56FA-FB75-A8CB-AF0B-249F1B35CFA2}"/>
               </a:ext>
             </a:extLst>
           </p:cNvPr>
@@ -1450,7 +1450,7 @@
           <a:bodyPr/>
           <a:lstStyle/>
           <a:p>
-            <a:fld id="{C386F094-EA07-4928-8C98-3D149CEB2EED}" type="slidenum">
+            <a:fld id="{56132E85-F82A-4B85-ACE0-657FE931569E}" type="slidenum">
               <a:rPr lang="ko-KR" altLang="en-US" smtClean="0"/>
               <a:t>‹#›</a:t>
             </a:fld>
@@ -1461,7 +1461,7 @@
     </p:spTree>
     <p:extLst>
       <p:ext uri="{BB962C8B-B14F-4D97-AF65-F5344CB8AC3E}">
-        <p14:creationId xmlns:p14="http://schemas.microsoft.com/office/powerpoint/2010/main" val="984766337"/>
+        <p14:creationId xmlns:p14="http://schemas.microsoft.com/office/powerpoint/2010/main" val="1755351884"/>
       </p:ext>
     </p:extLst>
   </p:cSld>
@@ -1493,7 +1493,7 @@
           <p:cNvPr id="2" name="제목 1">
             <a:extLst>
               <a:ext uri="{FF2B5EF4-FFF2-40B4-BE49-F238E27FC236}">
-                <a16:creationId xmlns:a16="http://schemas.microsoft.com/office/drawing/2014/main" id="{5DA048F4-81D3-FD92-1DC8-B98EE55DF838}"/>
+                <a16:creationId xmlns:a16="http://schemas.microsoft.com/office/drawing/2014/main" id="{5B9E435F-1CF7-2839-E1E6-8D4AA2F58D3E}"/>
               </a:ext>
             </a:extLst>
           </p:cNvPr>
@@ -1526,7 +1526,7 @@
           <p:cNvPr id="3" name="텍스트 개체 틀 2">
             <a:extLst>
               <a:ext uri="{FF2B5EF4-FFF2-40B4-BE49-F238E27FC236}">
-                <a16:creationId xmlns:a16="http://schemas.microsoft.com/office/drawing/2014/main" id="{AC1AD2BE-C622-08C3-A9DA-250CC786284C}"/>
+                <a16:creationId xmlns:a16="http://schemas.microsoft.com/office/drawing/2014/main" id="{9421C76A-7F89-0CEB-702B-2AD12DE96FD9}"/>
               </a:ext>
             </a:extLst>
           </p:cNvPr>
@@ -1597,7 +1597,7 @@
           <p:cNvPr id="4" name="내용 개체 틀 3">
             <a:extLst>
               <a:ext uri="{FF2B5EF4-FFF2-40B4-BE49-F238E27FC236}">
-                <a16:creationId xmlns:a16="http://schemas.microsoft.com/office/drawing/2014/main" id="{8B4A0516-45EB-08B8-1261-B714A80B4749}"/>
+                <a16:creationId xmlns:a16="http://schemas.microsoft.com/office/drawing/2014/main" id="{DD890FF1-AD98-6FA3-00DB-F33579B17F9F}"/>
               </a:ext>
             </a:extLst>
           </p:cNvPr>
@@ -1659,7 +1659,7 @@
           <p:cNvPr id="5" name="텍스트 개체 틀 4">
             <a:extLst>
               <a:ext uri="{FF2B5EF4-FFF2-40B4-BE49-F238E27FC236}">
-                <a16:creationId xmlns:a16="http://schemas.microsoft.com/office/drawing/2014/main" id="{66AE57E2-9036-B1DE-D7D1-BEA6EB0C39B1}"/>
+                <a16:creationId xmlns:a16="http://schemas.microsoft.com/office/drawing/2014/main" id="{1A4C1E5E-5F46-A53A-83C4-1BE4D165ED34}"/>
               </a:ext>
             </a:extLst>
           </p:cNvPr>
@@ -1730,7 +1730,7 @@
           <p:cNvPr id="6" name="내용 개체 틀 5">
             <a:extLst>
               <a:ext uri="{FF2B5EF4-FFF2-40B4-BE49-F238E27FC236}">
-                <a16:creationId xmlns:a16="http://schemas.microsoft.com/office/drawing/2014/main" id="{E1A5AC03-7808-2339-C0E7-A32F2F00AAD7}"/>
+                <a16:creationId xmlns:a16="http://schemas.microsoft.com/office/drawing/2014/main" id="{9C87DBC2-48A0-513E-CC0E-BB00389799F0}"/>
               </a:ext>
             </a:extLst>
           </p:cNvPr>
@@ -1792,7 +1792,7 @@
           <p:cNvPr id="7" name="날짜 개체 틀 6">
             <a:extLst>
               <a:ext uri="{FF2B5EF4-FFF2-40B4-BE49-F238E27FC236}">
-                <a16:creationId xmlns:a16="http://schemas.microsoft.com/office/drawing/2014/main" id="{C40807E6-2945-CBAC-75E2-9E907CD40CB8}"/>
+                <a16:creationId xmlns:a16="http://schemas.microsoft.com/office/drawing/2014/main" id="{C2B7DD5F-AFA8-214D-45F6-3385A54B6F70}"/>
               </a:ext>
             </a:extLst>
           </p:cNvPr>
@@ -1808,7 +1808,7 @@
           <a:bodyPr/>
           <a:lstStyle/>
           <a:p>
-            <a:fld id="{DF25C7C5-662F-443D-B932-219A5FD090E8}" type="datetimeFigureOut">
+            <a:fld id="{45758416-7A6C-4B2A-B976-C57B5B58CF95}" type="datetimeFigureOut">
               <a:rPr lang="ko-KR" altLang="en-US" smtClean="0"/>
               <a:t>2026-06-22</a:t>
             </a:fld>
@@ -1821,7 +1821,7 @@
           <p:cNvPr id="8" name="바닥글 개체 틀 7">
             <a:extLst>
               <a:ext uri="{FF2B5EF4-FFF2-40B4-BE49-F238E27FC236}">
-                <a16:creationId xmlns:a16="http://schemas.microsoft.com/office/drawing/2014/main" id="{33AE7B08-316F-55CA-C091-89CEB80495FC}"/>
+                <a16:creationId xmlns:a16="http://schemas.microsoft.com/office/drawing/2014/main" id="{E5677A19-2654-BEAA-7504-CC3964D7899B}"/>
               </a:ext>
             </a:extLst>
           </p:cNvPr>
@@ -1846,7 +1846,7 @@
           <p:cNvPr id="9" name="슬라이드 번호 개체 틀 8">
             <a:extLst>
               <a:ext uri="{FF2B5EF4-FFF2-40B4-BE49-F238E27FC236}">
-                <a16:creationId xmlns:a16="http://schemas.microsoft.com/office/drawing/2014/main" id="{4129C86F-9AEB-BD91-8130-CEB77D872931}"/>
+                <a16:creationId xmlns:a16="http://schemas.microsoft.com/office/drawing/2014/main" id="{B554DB79-E79E-B857-9BB6-E9026E01906F}"/>
               </a:ext>
             </a:extLst>
           </p:cNvPr>
@@ -1862,7 +1862,7 @@
           <a:bodyPr/>
           <a:lstStyle/>
           <a:p>
-            <a:fld id="{C386F094-EA07-4928-8C98-3D149CEB2EED}" type="slidenum">
+            <a:fld id="{56132E85-F82A-4B85-ACE0-657FE931569E}" type="slidenum">
               <a:rPr lang="ko-KR" altLang="en-US" smtClean="0"/>
               <a:t>‹#›</a:t>
             </a:fld>
@@ -1873,7 +1873,7 @@
     </p:spTree>
     <p:extLst>
       <p:ext uri="{BB962C8B-B14F-4D97-AF65-F5344CB8AC3E}">
-        <p14:creationId xmlns:p14="http://schemas.microsoft.com/office/powerpoint/2010/main" val="3005285713"/>
+        <p14:creationId xmlns:p14="http://schemas.microsoft.com/office/powerpoint/2010/main" val="3213248232"/>
       </p:ext>
     </p:extLst>
   </p:cSld>
@@ -1905,7 +1905,7 @@
           <p:cNvPr id="2" name="제목 1">
             <a:extLst>
               <a:ext uri="{FF2B5EF4-FFF2-40B4-BE49-F238E27FC236}">
-                <a16:creationId xmlns:a16="http://schemas.microsoft.com/office/drawing/2014/main" id="{9DBC8E68-7F5F-A08F-6D52-DBFCB40F0475}"/>
+                <a16:creationId xmlns:a16="http://schemas.microsoft.com/office/drawing/2014/main" id="{BD3843BB-1591-17AF-043E-A4221C0F36E1}"/>
               </a:ext>
             </a:extLst>
           </p:cNvPr>
@@ -1933,7 +1933,7 @@
           <p:cNvPr id="3" name="날짜 개체 틀 2">
             <a:extLst>
               <a:ext uri="{FF2B5EF4-FFF2-40B4-BE49-F238E27FC236}">
-                <a16:creationId xmlns:a16="http://schemas.microsoft.com/office/drawing/2014/main" id="{6B17C9C9-76A4-4460-8ADA-50EA1FDD905D}"/>
+                <a16:creationId xmlns:a16="http://schemas.microsoft.com/office/drawing/2014/main" id="{9DCC57A9-B604-BC75-A488-23553DCB3033}"/>
               </a:ext>
             </a:extLst>
           </p:cNvPr>
@@ -1949,7 +1949,7 @@
           <a:bodyPr/>
           <a:lstStyle/>
           <a:p>
-            <a:fld id="{DF25C7C5-662F-443D-B932-219A5FD090E8}" type="datetimeFigureOut">
+            <a:fld id="{45758416-7A6C-4B2A-B976-C57B5B58CF95}" type="datetimeFigureOut">
               <a:rPr lang="ko-KR" altLang="en-US" smtClean="0"/>
               <a:t>2026-06-22</a:t>
             </a:fld>
@@ -1962,7 +1962,7 @@
           <p:cNvPr id="4" name="바닥글 개체 틀 3">
             <a:extLst>
               <a:ext uri="{FF2B5EF4-FFF2-40B4-BE49-F238E27FC236}">
-                <a16:creationId xmlns:a16="http://schemas.microsoft.com/office/drawing/2014/main" id="{3742F546-B978-7BB0-1D75-52C8300F808A}"/>
+                <a16:creationId xmlns:a16="http://schemas.microsoft.com/office/drawing/2014/main" id="{4159CC6C-0F6D-3F2E-E227-9FD9446217C5}"/>
               </a:ext>
             </a:extLst>
           </p:cNvPr>
@@ -1987,7 +1987,7 @@
           <p:cNvPr id="5" name="슬라이드 번호 개체 틀 4">
             <a:extLst>
               <a:ext uri="{FF2B5EF4-FFF2-40B4-BE49-F238E27FC236}">
-                <a16:creationId xmlns:a16="http://schemas.microsoft.com/office/drawing/2014/main" id="{1F302BB1-2936-83F1-E73E-715D9B732BC6}"/>
+                <a16:creationId xmlns:a16="http://schemas.microsoft.com/office/drawing/2014/main" id="{4FD87DC4-11A2-9022-DA20-C32BCC0E15D4}"/>
               </a:ext>
             </a:extLst>
           </p:cNvPr>
@@ -2003,7 +2003,7 @@
           <a:bodyPr/>
           <a:lstStyle/>
           <a:p>
-            <a:fld id="{C386F094-EA07-4928-8C98-3D149CEB2EED}" type="slidenum">
+            <a:fld id="{56132E85-F82A-4B85-ACE0-657FE931569E}" type="slidenum">
               <a:rPr lang="ko-KR" altLang="en-US" smtClean="0"/>
               <a:t>‹#›</a:t>
             </a:fld>
@@ -2014,7 +2014,7 @@
     </p:spTree>
     <p:extLst>
       <p:ext uri="{BB962C8B-B14F-4D97-AF65-F5344CB8AC3E}">
-        <p14:creationId xmlns:p14="http://schemas.microsoft.com/office/powerpoint/2010/main" val="2550892603"/>
+        <p14:creationId xmlns:p14="http://schemas.microsoft.com/office/powerpoint/2010/main" val="303278676"/>
       </p:ext>
     </p:extLst>
   </p:cSld>
@@ -2046,7 +2046,7 @@
           <p:cNvPr id="2" name="날짜 개체 틀 1">
             <a:extLst>
               <a:ext uri="{FF2B5EF4-FFF2-40B4-BE49-F238E27FC236}">
-                <a16:creationId xmlns:a16="http://schemas.microsoft.com/office/drawing/2014/main" id="{69A0BE4B-6A8E-18D5-EE38-65276B4194D2}"/>
+                <a16:creationId xmlns:a16="http://schemas.microsoft.com/office/drawing/2014/main" id="{0B485E4C-1B5A-092C-4042-098F006408DF}"/>
               </a:ext>
             </a:extLst>
           </p:cNvPr>
@@ -2062,7 +2062,7 @@
           <a:bodyPr/>
           <a:lstStyle/>
           <a:p>
-            <a:fld id="{DF25C7C5-662F-443D-B932-219A5FD090E8}" type="datetimeFigureOut">
+            <a:fld id="{45758416-7A6C-4B2A-B976-C57B5B58CF95}" type="datetimeFigureOut">
               <a:rPr lang="ko-KR" altLang="en-US" smtClean="0"/>
               <a:t>2026-06-22</a:t>
             </a:fld>
@@ -2075,7 +2075,7 @@
           <p:cNvPr id="3" name="바닥글 개체 틀 2">
             <a:extLst>
               <a:ext uri="{FF2B5EF4-FFF2-40B4-BE49-F238E27FC236}">
-                <a16:creationId xmlns:a16="http://schemas.microsoft.com/office/drawing/2014/main" id="{672A76C7-6AEE-D4DD-F232-DC63C5AFC95C}"/>
+                <a16:creationId xmlns:a16="http://schemas.microsoft.com/office/drawing/2014/main" id="{4314A51E-CF86-2D94-707C-394D4B998E68}"/>
               </a:ext>
             </a:extLst>
           </p:cNvPr>
@@ -2100,7 +2100,7 @@
           <p:cNvPr id="4" name="슬라이드 번호 개체 틀 3">
             <a:extLst>
               <a:ext uri="{FF2B5EF4-FFF2-40B4-BE49-F238E27FC236}">
-                <a16:creationId xmlns:a16="http://schemas.microsoft.com/office/drawing/2014/main" id="{CB489224-2162-1348-712A-0C1BA012318F}"/>
+                <a16:creationId xmlns:a16="http://schemas.microsoft.com/office/drawing/2014/main" id="{194377E0-214B-6921-28A2-3D6D0C20B0EE}"/>
               </a:ext>
             </a:extLst>
           </p:cNvPr>
@@ -2116,7 +2116,7 @@
           <a:bodyPr/>
           <a:lstStyle/>
           <a:p>
-            <a:fld id="{C386F094-EA07-4928-8C98-3D149CEB2EED}" type="slidenum">
+            <a:fld id="{56132E85-F82A-4B85-ACE0-657FE931569E}" type="slidenum">
               <a:rPr lang="ko-KR" altLang="en-US" smtClean="0"/>
               <a:t>‹#›</a:t>
             </a:fld>
@@ -2127,7 +2127,7 @@
     </p:spTree>
     <p:extLst>
       <p:ext uri="{BB962C8B-B14F-4D97-AF65-F5344CB8AC3E}">
-        <p14:creationId xmlns:p14="http://schemas.microsoft.com/office/powerpoint/2010/main" val="386867717"/>
+        <p14:creationId xmlns:p14="http://schemas.microsoft.com/office/powerpoint/2010/main" val="2773366037"/>
       </p:ext>
     </p:extLst>
   </p:cSld>
@@ -2159,7 +2159,7 @@
           <p:cNvPr id="2" name="제목 1">
             <a:extLst>
               <a:ext uri="{FF2B5EF4-FFF2-40B4-BE49-F238E27FC236}">
-                <a16:creationId xmlns:a16="http://schemas.microsoft.com/office/drawing/2014/main" id="{5DACAA8D-4F45-BE6A-93C3-CF180ADD847A}"/>
+                <a16:creationId xmlns:a16="http://schemas.microsoft.com/office/drawing/2014/main" id="{22EF83DA-92FF-B8BA-CECD-857A412C14E6}"/>
               </a:ext>
             </a:extLst>
           </p:cNvPr>
@@ -2196,7 +2196,7 @@
           <p:cNvPr id="3" name="내용 개체 틀 2">
             <a:extLst>
               <a:ext uri="{FF2B5EF4-FFF2-40B4-BE49-F238E27FC236}">
-                <a16:creationId xmlns:a16="http://schemas.microsoft.com/office/drawing/2014/main" id="{A1A5F1C6-DA5F-394E-1468-95E130B3164F}"/>
+                <a16:creationId xmlns:a16="http://schemas.microsoft.com/office/drawing/2014/main" id="{C58D47B9-7D07-C7DE-967B-F8CE59671146}"/>
               </a:ext>
             </a:extLst>
           </p:cNvPr>
@@ -2286,7 +2286,7 @@
           <p:cNvPr id="4" name="텍스트 개체 틀 3">
             <a:extLst>
               <a:ext uri="{FF2B5EF4-FFF2-40B4-BE49-F238E27FC236}">
-                <a16:creationId xmlns:a16="http://schemas.microsoft.com/office/drawing/2014/main" id="{0771621F-8613-355F-90E4-1F956918D1ED}"/>
+                <a16:creationId xmlns:a16="http://schemas.microsoft.com/office/drawing/2014/main" id="{AB3B9A62-229A-C39D-D3F1-65D7D62F3EF6}"/>
               </a:ext>
             </a:extLst>
           </p:cNvPr>
@@ -2357,7 +2357,7 @@
           <p:cNvPr id="5" name="날짜 개체 틀 4">
             <a:extLst>
               <a:ext uri="{FF2B5EF4-FFF2-40B4-BE49-F238E27FC236}">
-                <a16:creationId xmlns:a16="http://schemas.microsoft.com/office/drawing/2014/main" id="{ABD14042-5583-6E06-69FC-900998D8908D}"/>
+                <a16:creationId xmlns:a16="http://schemas.microsoft.com/office/drawing/2014/main" id="{CEC0736A-0908-9624-E3BA-CF4468E43E8C}"/>
               </a:ext>
             </a:extLst>
           </p:cNvPr>
@@ -2373,7 +2373,7 @@
           <a:bodyPr/>
           <a:lstStyle/>
           <a:p>
-            <a:fld id="{DF25C7C5-662F-443D-B932-219A5FD090E8}" type="datetimeFigureOut">
+            <a:fld id="{45758416-7A6C-4B2A-B976-C57B5B58CF95}" type="datetimeFigureOut">
               <a:rPr lang="ko-KR" altLang="en-US" smtClean="0"/>
               <a:t>2026-06-22</a:t>
             </a:fld>
@@ -2386,7 +2386,7 @@
           <p:cNvPr id="6" name="바닥글 개체 틀 5">
             <a:extLst>
               <a:ext uri="{FF2B5EF4-FFF2-40B4-BE49-F238E27FC236}">
-                <a16:creationId xmlns:a16="http://schemas.microsoft.com/office/drawing/2014/main" id="{B06132C4-20A6-5193-B135-8DB426C0D350}"/>
+                <a16:creationId xmlns:a16="http://schemas.microsoft.com/office/drawing/2014/main" id="{BA20A02E-493C-6287-EE25-395FA9A01720}"/>
               </a:ext>
             </a:extLst>
           </p:cNvPr>
@@ -2411,7 +2411,7 @@
           <p:cNvPr id="7" name="슬라이드 번호 개체 틀 6">
             <a:extLst>
               <a:ext uri="{FF2B5EF4-FFF2-40B4-BE49-F238E27FC236}">
-                <a16:creationId xmlns:a16="http://schemas.microsoft.com/office/drawing/2014/main" id="{7E9F43D7-E186-8079-8C35-28280206DB65}"/>
+                <a16:creationId xmlns:a16="http://schemas.microsoft.com/office/drawing/2014/main" id="{9E1064B6-D63D-148E-6A31-7E930F5AA897}"/>
               </a:ext>
             </a:extLst>
           </p:cNvPr>
@@ -2427,7 +2427,7 @@
           <a:bodyPr/>
           <a:lstStyle/>
           <a:p>
-            <a:fld id="{C386F094-EA07-4928-8C98-3D149CEB2EED}" type="slidenum">
+            <a:fld id="{56132E85-F82A-4B85-ACE0-657FE931569E}" type="slidenum">
               <a:rPr lang="ko-KR" altLang="en-US" smtClean="0"/>
               <a:t>‹#›</a:t>
             </a:fld>
@@ -2438,7 +2438,7 @@
     </p:spTree>
     <p:extLst>
       <p:ext uri="{BB962C8B-B14F-4D97-AF65-F5344CB8AC3E}">
-        <p14:creationId xmlns:p14="http://schemas.microsoft.com/office/powerpoint/2010/main" val="786253903"/>
+        <p14:creationId xmlns:p14="http://schemas.microsoft.com/office/powerpoint/2010/main" val="1241382805"/>
       </p:ext>
     </p:extLst>
   </p:cSld>
@@ -2470,7 +2470,7 @@
           <p:cNvPr id="2" name="제목 1">
             <a:extLst>
               <a:ext uri="{FF2B5EF4-FFF2-40B4-BE49-F238E27FC236}">
-                <a16:creationId xmlns:a16="http://schemas.microsoft.com/office/drawing/2014/main" id="{B214BC4C-697E-B7AB-F169-8E6414B02A62}"/>
+                <a16:creationId xmlns:a16="http://schemas.microsoft.com/office/drawing/2014/main" id="{B23615DF-761A-9EBE-4E54-74ECC7F296B6}"/>
               </a:ext>
             </a:extLst>
           </p:cNvPr>
@@ -2507,7 +2507,7 @@
           <p:cNvPr id="3" name="그림 개체 틀 2">
             <a:extLst>
               <a:ext uri="{FF2B5EF4-FFF2-40B4-BE49-F238E27FC236}">
-                <a16:creationId xmlns:a16="http://schemas.microsoft.com/office/drawing/2014/main" id="{1DC7E03F-202C-352B-869F-0C6623756CA2}"/>
+                <a16:creationId xmlns:a16="http://schemas.microsoft.com/office/drawing/2014/main" id="{69C15D06-4985-1B54-9F96-549B304F3AC1}"/>
               </a:ext>
             </a:extLst>
           </p:cNvPr>
@@ -2574,7 +2574,7 @@
           <p:cNvPr id="4" name="텍스트 개체 틀 3">
             <a:extLst>
               <a:ext uri="{FF2B5EF4-FFF2-40B4-BE49-F238E27FC236}">
-                <a16:creationId xmlns:a16="http://schemas.microsoft.com/office/drawing/2014/main" id="{B0714415-04F1-9CA4-0E94-A2FCA9BBFA12}"/>
+                <a16:creationId xmlns:a16="http://schemas.microsoft.com/office/drawing/2014/main" id="{51AA0969-ACFB-76E8-2E36-78FC29E33B0C}"/>
               </a:ext>
             </a:extLst>
           </p:cNvPr>
@@ -2645,7 +2645,7 @@
           <p:cNvPr id="5" name="날짜 개체 틀 4">
             <a:extLst>
               <a:ext uri="{FF2B5EF4-FFF2-40B4-BE49-F238E27FC236}">
-                <a16:creationId xmlns:a16="http://schemas.microsoft.com/office/drawing/2014/main" id="{161DF45E-BC61-D46D-EC9C-609443DCAA5A}"/>
+                <a16:creationId xmlns:a16="http://schemas.microsoft.com/office/drawing/2014/main" id="{65DB6608-DD37-460F-E569-662EA3E59F92}"/>
               </a:ext>
             </a:extLst>
           </p:cNvPr>
@@ -2661,7 +2661,7 @@
           <a:bodyPr/>
           <a:lstStyle/>
           <a:p>
-            <a:fld id="{DF25C7C5-662F-443D-B932-219A5FD090E8}" type="datetimeFigureOut">
+            <a:fld id="{45758416-7A6C-4B2A-B976-C57B5B58CF95}" type="datetimeFigureOut">
               <a:rPr lang="ko-KR" altLang="en-US" smtClean="0"/>
               <a:t>2026-06-22</a:t>
             </a:fld>
@@ -2674,7 +2674,7 @@
           <p:cNvPr id="6" name="바닥글 개체 틀 5">
             <a:extLst>
               <a:ext uri="{FF2B5EF4-FFF2-40B4-BE49-F238E27FC236}">
-                <a16:creationId xmlns:a16="http://schemas.microsoft.com/office/drawing/2014/main" id="{7496F519-12DB-D350-36D6-E169C1E50B18}"/>
+                <a16:creationId xmlns:a16="http://schemas.microsoft.com/office/drawing/2014/main" id="{92B9EF90-7C4B-49B7-A580-4656B80ECA6D}"/>
               </a:ext>
             </a:extLst>
           </p:cNvPr>
@@ -2699,7 +2699,7 @@
           <p:cNvPr id="7" name="슬라이드 번호 개체 틀 6">
             <a:extLst>
               <a:ext uri="{FF2B5EF4-FFF2-40B4-BE49-F238E27FC236}">
-                <a16:creationId xmlns:a16="http://schemas.microsoft.com/office/drawing/2014/main" id="{D3606746-B8C5-4E6D-3A92-1EE10D7208C2}"/>
+                <a16:creationId xmlns:a16="http://schemas.microsoft.com/office/drawing/2014/main" id="{1FCC5662-55AE-ED80-9006-3ACCCB85FB91}"/>
               </a:ext>
             </a:extLst>
           </p:cNvPr>
@@ -2715,7 +2715,7 @@
           <a:bodyPr/>
           <a:lstStyle/>
           <a:p>
-            <a:fld id="{C386F094-EA07-4928-8C98-3D149CEB2EED}" type="slidenum">
+            <a:fld id="{56132E85-F82A-4B85-ACE0-657FE931569E}" type="slidenum">
               <a:rPr lang="ko-KR" altLang="en-US" smtClean="0"/>
               <a:t>‹#›</a:t>
             </a:fld>
@@ -2726,7 +2726,7 @@
     </p:spTree>
     <p:extLst>
       <p:ext uri="{BB962C8B-B14F-4D97-AF65-F5344CB8AC3E}">
-        <p14:creationId xmlns:p14="http://schemas.microsoft.com/office/powerpoint/2010/main" val="2727071061"/>
+        <p14:creationId xmlns:p14="http://schemas.microsoft.com/office/powerpoint/2010/main" val="3760452224"/>
       </p:ext>
     </p:extLst>
   </p:cSld>
@@ -2763,7 +2763,7 @@
           <p:cNvPr id="2" name="제목 개체 틀 1">
             <a:extLst>
               <a:ext uri="{FF2B5EF4-FFF2-40B4-BE49-F238E27FC236}">
-                <a16:creationId xmlns:a16="http://schemas.microsoft.com/office/drawing/2014/main" id="{64502D1C-D4AE-F73E-9970-DD8FDCE0B5A6}"/>
+                <a16:creationId xmlns:a16="http://schemas.microsoft.com/office/drawing/2014/main" id="{CCBC5EC9-FFC1-8139-005B-29F5C719AF4D}"/>
               </a:ext>
             </a:extLst>
           </p:cNvPr>
@@ -2801,7 +2801,7 @@
           <p:cNvPr id="3" name="텍스트 개체 틀 2">
             <a:extLst>
               <a:ext uri="{FF2B5EF4-FFF2-40B4-BE49-F238E27FC236}">
-                <a16:creationId xmlns:a16="http://schemas.microsoft.com/office/drawing/2014/main" id="{32E4194E-BDAC-AF0E-F3C1-6E168966CE88}"/>
+                <a16:creationId xmlns:a16="http://schemas.microsoft.com/office/drawing/2014/main" id="{D39BD938-2FF3-6FFF-B32F-762E1A43ADB2}"/>
               </a:ext>
             </a:extLst>
           </p:cNvPr>
@@ -2868,7 +2868,7 @@
           <p:cNvPr id="4" name="날짜 개체 틀 3">
             <a:extLst>
               <a:ext uri="{FF2B5EF4-FFF2-40B4-BE49-F238E27FC236}">
-                <a16:creationId xmlns:a16="http://schemas.microsoft.com/office/drawing/2014/main" id="{E2333130-008A-19A0-74F1-8702C4311C1F}"/>
+                <a16:creationId xmlns:a16="http://schemas.microsoft.com/office/drawing/2014/main" id="{AC18707C-245E-81DB-4357-7A6B8FAD0997}"/>
               </a:ext>
             </a:extLst>
           </p:cNvPr>
@@ -2902,7 +2902,7 @@
             </a:lvl1pPr>
           </a:lstStyle>
           <a:p>
-            <a:fld id="{DF25C7C5-662F-443D-B932-219A5FD090E8}" type="datetimeFigureOut">
+            <a:fld id="{45758416-7A6C-4B2A-B976-C57B5B58CF95}" type="datetimeFigureOut">
               <a:rPr lang="ko-KR" altLang="en-US" smtClean="0"/>
               <a:t>2026-06-22</a:t>
             </a:fld>
@@ -2915,7 +2915,7 @@
           <p:cNvPr id="5" name="바닥글 개체 틀 4">
             <a:extLst>
               <a:ext uri="{FF2B5EF4-FFF2-40B4-BE49-F238E27FC236}">
-                <a16:creationId xmlns:a16="http://schemas.microsoft.com/office/drawing/2014/main" id="{D9CE97A0-3C47-4EB6-D59B-1D8B53CA3028}"/>
+                <a16:creationId xmlns:a16="http://schemas.microsoft.com/office/drawing/2014/main" id="{C0688211-05FA-0D29-2B79-0B435304D917}"/>
               </a:ext>
             </a:extLst>
           </p:cNvPr>
@@ -2958,7 +2958,7 @@
           <p:cNvPr id="6" name="슬라이드 번호 개체 틀 5">
             <a:extLst>
               <a:ext uri="{FF2B5EF4-FFF2-40B4-BE49-F238E27FC236}">
-                <a16:creationId xmlns:a16="http://schemas.microsoft.com/office/drawing/2014/main" id="{8EB91032-7C6F-4BFF-6E47-9E7AF9DA933E}"/>
+                <a16:creationId xmlns:a16="http://schemas.microsoft.com/office/drawing/2014/main" id="{BE747DA4-47C4-D5FA-3135-9A35D4B73C93}"/>
               </a:ext>
             </a:extLst>
           </p:cNvPr>
@@ -2992,7 +2992,7 @@
             </a:lvl1pPr>
           </a:lstStyle>
           <a:p>
-            <a:fld id="{C386F094-EA07-4928-8C98-3D149CEB2EED}" type="slidenum">
+            <a:fld id="{56132E85-F82A-4B85-ACE0-657FE931569E}" type="slidenum">
               <a:rPr lang="ko-KR" altLang="en-US" smtClean="0"/>
               <a:t>‹#›</a:t>
             </a:fld>
@@ -3003,7 +3003,7 @@
     </p:spTree>
     <p:extLst>
       <p:ext uri="{BB962C8B-B14F-4D97-AF65-F5344CB8AC3E}">
-        <p14:creationId xmlns:p14="http://schemas.microsoft.com/office/powerpoint/2010/main" val="2512514884"/>
+        <p14:creationId xmlns:p14="http://schemas.microsoft.com/office/powerpoint/2010/main" val="2352066177"/>
       </p:ext>
     </p:extLst>
   </p:cSld>
@@ -3326,7 +3326,7 @@
           <p:cNvPr id="3" name="그래픽 2">
             <a:extLst>
               <a:ext uri="{FF2B5EF4-FFF2-40B4-BE49-F238E27FC236}">
-                <a16:creationId xmlns:a16="http://schemas.microsoft.com/office/drawing/2014/main" id="{BB6AB1DC-980F-ED5B-A1BC-CB6ABE8BC230}"/>
+                <a16:creationId xmlns:a16="http://schemas.microsoft.com/office/drawing/2014/main" id="{EBD23A41-663E-B31D-9990-459493232C19}"/>
               </a:ext>
             </a:extLst>
           </p:cNvPr>
@@ -3360,7 +3360,7 @@
     </p:spTree>
     <p:extLst>
       <p:ext uri="{BB962C8B-B14F-4D97-AF65-F5344CB8AC3E}">
-        <p14:creationId xmlns:p14="http://schemas.microsoft.com/office/powerpoint/2010/main" val="2571150867"/>
+        <p14:creationId xmlns:p14="http://schemas.microsoft.com/office/powerpoint/2010/main" val="2186546847"/>
       </p:ext>
     </p:extLst>
   </p:cSld>

--- a/docs/assets/infographic-seed-gallery.pptx
+++ b/docs/assets/infographic-seed-gallery.pptx
@@ -129,7 +129,7 @@
           <p:cNvPr id="2" name="제목 1">
             <a:extLst>
               <a:ext uri="{FF2B5EF4-FFF2-40B4-BE49-F238E27FC236}">
-                <a16:creationId xmlns:a16="http://schemas.microsoft.com/office/drawing/2014/main" id="{525D0CB1-034E-14CE-91BE-B619367B1F34}"/>
+                <a16:creationId xmlns:a16="http://schemas.microsoft.com/office/drawing/2014/main" id="{2E075EA2-EC89-E5BF-2A7D-B26A3A2222AA}"/>
               </a:ext>
             </a:extLst>
           </p:cNvPr>
@@ -166,7 +166,7 @@
           <p:cNvPr id="3" name="부제목 2">
             <a:extLst>
               <a:ext uri="{FF2B5EF4-FFF2-40B4-BE49-F238E27FC236}">
-                <a16:creationId xmlns:a16="http://schemas.microsoft.com/office/drawing/2014/main" id="{EB8A8202-8181-7DEA-DB51-157A0C83A957}"/>
+                <a16:creationId xmlns:a16="http://schemas.microsoft.com/office/drawing/2014/main" id="{B40162A1-1CEE-E97E-314B-6EEDED64C61D}"/>
               </a:ext>
             </a:extLst>
           </p:cNvPr>
@@ -236,7 +236,7 @@
           <p:cNvPr id="4" name="날짜 개체 틀 3">
             <a:extLst>
               <a:ext uri="{FF2B5EF4-FFF2-40B4-BE49-F238E27FC236}">
-                <a16:creationId xmlns:a16="http://schemas.microsoft.com/office/drawing/2014/main" id="{3DE1FAF4-8B34-9AF0-235D-9A15115C7351}"/>
+                <a16:creationId xmlns:a16="http://schemas.microsoft.com/office/drawing/2014/main" id="{0A8B682A-0463-BDF0-ACDF-0F12EA77A6EF}"/>
               </a:ext>
             </a:extLst>
           </p:cNvPr>
@@ -252,9 +252,9 @@
           <a:bodyPr/>
           <a:lstStyle/>
           <a:p>
-            <a:fld id="{45758416-7A6C-4B2A-B976-C57B5B58CF95}" type="datetimeFigureOut">
+            <a:fld id="{1C554CDD-2511-4C84-938F-E8C857FD2168}" type="datetimeFigureOut">
               <a:rPr lang="ko-KR" altLang="en-US" smtClean="0"/>
-              <a:t>2026-06-22</a:t>
+              <a:t>2026-06-24</a:t>
             </a:fld>
             <a:endParaRPr lang="ko-KR" altLang="en-US"/>
           </a:p>
@@ -265,7 +265,7 @@
           <p:cNvPr id="5" name="바닥글 개체 틀 4">
             <a:extLst>
               <a:ext uri="{FF2B5EF4-FFF2-40B4-BE49-F238E27FC236}">
-                <a16:creationId xmlns:a16="http://schemas.microsoft.com/office/drawing/2014/main" id="{177EAE7F-F547-6A6F-2EF4-3F6FB3550CBA}"/>
+                <a16:creationId xmlns:a16="http://schemas.microsoft.com/office/drawing/2014/main" id="{A5CA0BAD-851E-8800-B16C-089459D7DA7E}"/>
               </a:ext>
             </a:extLst>
           </p:cNvPr>
@@ -290,7 +290,7 @@
           <p:cNvPr id="6" name="슬라이드 번호 개체 틀 5">
             <a:extLst>
               <a:ext uri="{FF2B5EF4-FFF2-40B4-BE49-F238E27FC236}">
-                <a16:creationId xmlns:a16="http://schemas.microsoft.com/office/drawing/2014/main" id="{4F296636-3906-CA41-04A1-DC3B138EC25A}"/>
+                <a16:creationId xmlns:a16="http://schemas.microsoft.com/office/drawing/2014/main" id="{79421C1E-CD4E-858E-B31A-522CEE72A3B5}"/>
               </a:ext>
             </a:extLst>
           </p:cNvPr>
@@ -306,7 +306,7 @@
           <a:bodyPr/>
           <a:lstStyle/>
           <a:p>
-            <a:fld id="{56132E85-F82A-4B85-ACE0-657FE931569E}" type="slidenum">
+            <a:fld id="{F6AA6F9A-BD14-43E8-81A1-DCF1143462DC}" type="slidenum">
               <a:rPr lang="ko-KR" altLang="en-US" smtClean="0"/>
               <a:t>‹#›</a:t>
             </a:fld>
@@ -317,7 +317,7 @@
     </p:spTree>
     <p:extLst>
       <p:ext uri="{BB962C8B-B14F-4D97-AF65-F5344CB8AC3E}">
-        <p14:creationId xmlns:p14="http://schemas.microsoft.com/office/powerpoint/2010/main" val="600177661"/>
+        <p14:creationId xmlns:p14="http://schemas.microsoft.com/office/powerpoint/2010/main" val="3156159558"/>
       </p:ext>
     </p:extLst>
   </p:cSld>
@@ -349,7 +349,7 @@
           <p:cNvPr id="2" name="제목 1">
             <a:extLst>
               <a:ext uri="{FF2B5EF4-FFF2-40B4-BE49-F238E27FC236}">
-                <a16:creationId xmlns:a16="http://schemas.microsoft.com/office/drawing/2014/main" id="{9F372A06-C85D-44FA-5D65-164AB55AA92E}"/>
+                <a16:creationId xmlns:a16="http://schemas.microsoft.com/office/drawing/2014/main" id="{CCEA0189-C702-905A-7F02-2F4F3B8DC1F6}"/>
               </a:ext>
             </a:extLst>
           </p:cNvPr>
@@ -377,7 +377,7 @@
           <p:cNvPr id="3" name="세로 텍스트 개체 틀 2">
             <a:extLst>
               <a:ext uri="{FF2B5EF4-FFF2-40B4-BE49-F238E27FC236}">
-                <a16:creationId xmlns:a16="http://schemas.microsoft.com/office/drawing/2014/main" id="{F042CD96-A478-DE82-0A9E-6D81BFE2CDD1}"/>
+                <a16:creationId xmlns:a16="http://schemas.microsoft.com/office/drawing/2014/main" id="{42AD8902-8075-C0C7-07D8-5E6857FBB128}"/>
               </a:ext>
             </a:extLst>
           </p:cNvPr>
@@ -434,7 +434,7 @@
           <p:cNvPr id="4" name="날짜 개체 틀 3">
             <a:extLst>
               <a:ext uri="{FF2B5EF4-FFF2-40B4-BE49-F238E27FC236}">
-                <a16:creationId xmlns:a16="http://schemas.microsoft.com/office/drawing/2014/main" id="{DE3FBEC6-EE3F-CB55-E180-5F4366573284}"/>
+                <a16:creationId xmlns:a16="http://schemas.microsoft.com/office/drawing/2014/main" id="{12C78626-0F0D-7552-5600-6C0E69BAD617}"/>
               </a:ext>
             </a:extLst>
           </p:cNvPr>
@@ -450,9 +450,9 @@
           <a:bodyPr/>
           <a:lstStyle/>
           <a:p>
-            <a:fld id="{45758416-7A6C-4B2A-B976-C57B5B58CF95}" type="datetimeFigureOut">
+            <a:fld id="{1C554CDD-2511-4C84-938F-E8C857FD2168}" type="datetimeFigureOut">
               <a:rPr lang="ko-KR" altLang="en-US" smtClean="0"/>
-              <a:t>2026-06-22</a:t>
+              <a:t>2026-06-24</a:t>
             </a:fld>
             <a:endParaRPr lang="ko-KR" altLang="en-US"/>
           </a:p>
@@ -463,7 +463,7 @@
           <p:cNvPr id="5" name="바닥글 개체 틀 4">
             <a:extLst>
               <a:ext uri="{FF2B5EF4-FFF2-40B4-BE49-F238E27FC236}">
-                <a16:creationId xmlns:a16="http://schemas.microsoft.com/office/drawing/2014/main" id="{DE2100D3-114F-3DFD-618A-76808B224EAA}"/>
+                <a16:creationId xmlns:a16="http://schemas.microsoft.com/office/drawing/2014/main" id="{9D73A5C3-D42B-9AA5-5594-8406AC57D381}"/>
               </a:ext>
             </a:extLst>
           </p:cNvPr>
@@ -488,7 +488,7 @@
           <p:cNvPr id="6" name="슬라이드 번호 개체 틀 5">
             <a:extLst>
               <a:ext uri="{FF2B5EF4-FFF2-40B4-BE49-F238E27FC236}">
-                <a16:creationId xmlns:a16="http://schemas.microsoft.com/office/drawing/2014/main" id="{614EDACD-3C34-A67B-E7F2-F4414DF949D5}"/>
+                <a16:creationId xmlns:a16="http://schemas.microsoft.com/office/drawing/2014/main" id="{50512034-3AF3-A1DF-DE7F-91286D34646A}"/>
               </a:ext>
             </a:extLst>
           </p:cNvPr>
@@ -504,7 +504,7 @@
           <a:bodyPr/>
           <a:lstStyle/>
           <a:p>
-            <a:fld id="{56132E85-F82A-4B85-ACE0-657FE931569E}" type="slidenum">
+            <a:fld id="{F6AA6F9A-BD14-43E8-81A1-DCF1143462DC}" type="slidenum">
               <a:rPr lang="ko-KR" altLang="en-US" smtClean="0"/>
               <a:t>‹#›</a:t>
             </a:fld>
@@ -515,7 +515,7 @@
     </p:spTree>
     <p:extLst>
       <p:ext uri="{BB962C8B-B14F-4D97-AF65-F5344CB8AC3E}">
-        <p14:creationId xmlns:p14="http://schemas.microsoft.com/office/powerpoint/2010/main" val="2380477494"/>
+        <p14:creationId xmlns:p14="http://schemas.microsoft.com/office/powerpoint/2010/main" val="2735371045"/>
       </p:ext>
     </p:extLst>
   </p:cSld>
@@ -547,7 +547,7 @@
           <p:cNvPr id="2" name="세로 제목 1">
             <a:extLst>
               <a:ext uri="{FF2B5EF4-FFF2-40B4-BE49-F238E27FC236}">
-                <a16:creationId xmlns:a16="http://schemas.microsoft.com/office/drawing/2014/main" id="{93B54251-7257-EF0B-95D6-BABCD8BE9F4E}"/>
+                <a16:creationId xmlns:a16="http://schemas.microsoft.com/office/drawing/2014/main" id="{60EAEE2E-5B56-2B9D-3418-18AFD5C982FF}"/>
               </a:ext>
             </a:extLst>
           </p:cNvPr>
@@ -580,7 +580,7 @@
           <p:cNvPr id="3" name="세로 텍스트 개체 틀 2">
             <a:extLst>
               <a:ext uri="{FF2B5EF4-FFF2-40B4-BE49-F238E27FC236}">
-                <a16:creationId xmlns:a16="http://schemas.microsoft.com/office/drawing/2014/main" id="{EB717C1E-7B0F-7714-0545-15C2112219E4}"/>
+                <a16:creationId xmlns:a16="http://schemas.microsoft.com/office/drawing/2014/main" id="{13287091-EC84-0FE5-8BA2-140B9D342AA6}"/>
               </a:ext>
             </a:extLst>
           </p:cNvPr>
@@ -642,7 +642,7 @@
           <p:cNvPr id="4" name="날짜 개체 틀 3">
             <a:extLst>
               <a:ext uri="{FF2B5EF4-FFF2-40B4-BE49-F238E27FC236}">
-                <a16:creationId xmlns:a16="http://schemas.microsoft.com/office/drawing/2014/main" id="{D99DAAF2-7CD9-724A-0D96-FA9CC23EDBA2}"/>
+                <a16:creationId xmlns:a16="http://schemas.microsoft.com/office/drawing/2014/main" id="{CC401FB3-6761-3EED-FF2E-03D2AD3C027E}"/>
               </a:ext>
             </a:extLst>
           </p:cNvPr>
@@ -658,9 +658,9 @@
           <a:bodyPr/>
           <a:lstStyle/>
           <a:p>
-            <a:fld id="{45758416-7A6C-4B2A-B976-C57B5B58CF95}" type="datetimeFigureOut">
+            <a:fld id="{1C554CDD-2511-4C84-938F-E8C857FD2168}" type="datetimeFigureOut">
               <a:rPr lang="ko-KR" altLang="en-US" smtClean="0"/>
-              <a:t>2026-06-22</a:t>
+              <a:t>2026-06-24</a:t>
             </a:fld>
             <a:endParaRPr lang="ko-KR" altLang="en-US"/>
           </a:p>
@@ -671,7 +671,7 @@
           <p:cNvPr id="5" name="바닥글 개체 틀 4">
             <a:extLst>
               <a:ext uri="{FF2B5EF4-FFF2-40B4-BE49-F238E27FC236}">
-                <a16:creationId xmlns:a16="http://schemas.microsoft.com/office/drawing/2014/main" id="{93D5EB92-380A-323F-27B8-9C5061F735D6}"/>
+                <a16:creationId xmlns:a16="http://schemas.microsoft.com/office/drawing/2014/main" id="{6D574D69-FF8C-CBF7-BC9D-CD410F6FEA3E}"/>
               </a:ext>
             </a:extLst>
           </p:cNvPr>
@@ -696,7 +696,7 @@
           <p:cNvPr id="6" name="슬라이드 번호 개체 틀 5">
             <a:extLst>
               <a:ext uri="{FF2B5EF4-FFF2-40B4-BE49-F238E27FC236}">
-                <a16:creationId xmlns:a16="http://schemas.microsoft.com/office/drawing/2014/main" id="{B4B5C33A-A221-20EA-3681-246D3D98A834}"/>
+                <a16:creationId xmlns:a16="http://schemas.microsoft.com/office/drawing/2014/main" id="{9F516008-A244-0851-2341-A0C1CE68F93A}"/>
               </a:ext>
             </a:extLst>
           </p:cNvPr>
@@ -712,7 +712,7 @@
           <a:bodyPr/>
           <a:lstStyle/>
           <a:p>
-            <a:fld id="{56132E85-F82A-4B85-ACE0-657FE931569E}" type="slidenum">
+            <a:fld id="{F6AA6F9A-BD14-43E8-81A1-DCF1143462DC}" type="slidenum">
               <a:rPr lang="ko-KR" altLang="en-US" smtClean="0"/>
               <a:t>‹#›</a:t>
             </a:fld>
@@ -723,7 +723,7 @@
     </p:spTree>
     <p:extLst>
       <p:ext uri="{BB962C8B-B14F-4D97-AF65-F5344CB8AC3E}">
-        <p14:creationId xmlns:p14="http://schemas.microsoft.com/office/powerpoint/2010/main" val="79670422"/>
+        <p14:creationId xmlns:p14="http://schemas.microsoft.com/office/powerpoint/2010/main" val="3989657622"/>
       </p:ext>
     </p:extLst>
   </p:cSld>
@@ -755,7 +755,7 @@
           <p:cNvPr id="2" name="제목 1">
             <a:extLst>
               <a:ext uri="{FF2B5EF4-FFF2-40B4-BE49-F238E27FC236}">
-                <a16:creationId xmlns:a16="http://schemas.microsoft.com/office/drawing/2014/main" id="{BD9D7E49-2F6C-DAE6-D66E-99F067C51AB3}"/>
+                <a16:creationId xmlns:a16="http://schemas.microsoft.com/office/drawing/2014/main" id="{F3E31650-3503-C46F-2CB8-E47100ED905A}"/>
               </a:ext>
             </a:extLst>
           </p:cNvPr>
@@ -783,7 +783,7 @@
           <p:cNvPr id="3" name="내용 개체 틀 2">
             <a:extLst>
               <a:ext uri="{FF2B5EF4-FFF2-40B4-BE49-F238E27FC236}">
-                <a16:creationId xmlns:a16="http://schemas.microsoft.com/office/drawing/2014/main" id="{ABEA2A00-96AF-3007-1D0A-8993FFAEEC9F}"/>
+                <a16:creationId xmlns:a16="http://schemas.microsoft.com/office/drawing/2014/main" id="{8A351942-B275-DE6E-7FA4-EFAB994F0D2E}"/>
               </a:ext>
             </a:extLst>
           </p:cNvPr>
@@ -840,7 +840,7 @@
           <p:cNvPr id="4" name="날짜 개체 틀 3">
             <a:extLst>
               <a:ext uri="{FF2B5EF4-FFF2-40B4-BE49-F238E27FC236}">
-                <a16:creationId xmlns:a16="http://schemas.microsoft.com/office/drawing/2014/main" id="{649F8DF7-90CF-B077-848D-9F9C7004D039}"/>
+                <a16:creationId xmlns:a16="http://schemas.microsoft.com/office/drawing/2014/main" id="{B6F0DEC2-6D9F-FD20-7AF9-2B2B15285670}"/>
               </a:ext>
             </a:extLst>
           </p:cNvPr>
@@ -856,9 +856,9 @@
           <a:bodyPr/>
           <a:lstStyle/>
           <a:p>
-            <a:fld id="{45758416-7A6C-4B2A-B976-C57B5B58CF95}" type="datetimeFigureOut">
+            <a:fld id="{1C554CDD-2511-4C84-938F-E8C857FD2168}" type="datetimeFigureOut">
               <a:rPr lang="ko-KR" altLang="en-US" smtClean="0"/>
-              <a:t>2026-06-22</a:t>
+              <a:t>2026-06-24</a:t>
             </a:fld>
             <a:endParaRPr lang="ko-KR" altLang="en-US"/>
           </a:p>
@@ -869,7 +869,7 @@
           <p:cNvPr id="5" name="바닥글 개체 틀 4">
             <a:extLst>
               <a:ext uri="{FF2B5EF4-FFF2-40B4-BE49-F238E27FC236}">
-                <a16:creationId xmlns:a16="http://schemas.microsoft.com/office/drawing/2014/main" id="{468FDCA6-4128-1773-7E10-BD0DE45703D5}"/>
+                <a16:creationId xmlns:a16="http://schemas.microsoft.com/office/drawing/2014/main" id="{B0363BC9-B646-FF14-8345-8F5D75AC43DF}"/>
               </a:ext>
             </a:extLst>
           </p:cNvPr>
@@ -894,7 +894,7 @@
           <p:cNvPr id="6" name="슬라이드 번호 개체 틀 5">
             <a:extLst>
               <a:ext uri="{FF2B5EF4-FFF2-40B4-BE49-F238E27FC236}">
-                <a16:creationId xmlns:a16="http://schemas.microsoft.com/office/drawing/2014/main" id="{55E539D0-7260-434A-9568-2248A5EE1398}"/>
+                <a16:creationId xmlns:a16="http://schemas.microsoft.com/office/drawing/2014/main" id="{23A4C717-B01F-EE3E-C5AF-4492644E2C8A}"/>
               </a:ext>
             </a:extLst>
           </p:cNvPr>
@@ -910,7 +910,7 @@
           <a:bodyPr/>
           <a:lstStyle/>
           <a:p>
-            <a:fld id="{56132E85-F82A-4B85-ACE0-657FE931569E}" type="slidenum">
+            <a:fld id="{F6AA6F9A-BD14-43E8-81A1-DCF1143462DC}" type="slidenum">
               <a:rPr lang="ko-KR" altLang="en-US" smtClean="0"/>
               <a:t>‹#›</a:t>
             </a:fld>
@@ -921,7 +921,7 @@
     </p:spTree>
     <p:extLst>
       <p:ext uri="{BB962C8B-B14F-4D97-AF65-F5344CB8AC3E}">
-        <p14:creationId xmlns:p14="http://schemas.microsoft.com/office/powerpoint/2010/main" val="2692641134"/>
+        <p14:creationId xmlns:p14="http://schemas.microsoft.com/office/powerpoint/2010/main" val="782891400"/>
       </p:ext>
     </p:extLst>
   </p:cSld>
@@ -953,7 +953,7 @@
           <p:cNvPr id="2" name="제목 1">
             <a:extLst>
               <a:ext uri="{FF2B5EF4-FFF2-40B4-BE49-F238E27FC236}">
-                <a16:creationId xmlns:a16="http://schemas.microsoft.com/office/drawing/2014/main" id="{30835D6E-EEAF-BBAB-DB12-8BD11EC006D7}"/>
+                <a16:creationId xmlns:a16="http://schemas.microsoft.com/office/drawing/2014/main" id="{8F1D3C10-B8D6-F3D4-136E-9A1A897183F8}"/>
               </a:ext>
             </a:extLst>
           </p:cNvPr>
@@ -990,7 +990,7 @@
           <p:cNvPr id="3" name="텍스트 개체 틀 2">
             <a:extLst>
               <a:ext uri="{FF2B5EF4-FFF2-40B4-BE49-F238E27FC236}">
-                <a16:creationId xmlns:a16="http://schemas.microsoft.com/office/drawing/2014/main" id="{B5765A79-89B5-854D-4026-537597DCE4B9}"/>
+                <a16:creationId xmlns:a16="http://schemas.microsoft.com/office/drawing/2014/main" id="{C8E1CEB6-BE5F-39F7-C48C-105B5C8F279C}"/>
               </a:ext>
             </a:extLst>
           </p:cNvPr>
@@ -1115,7 +1115,7 @@
           <p:cNvPr id="4" name="날짜 개체 틀 3">
             <a:extLst>
               <a:ext uri="{FF2B5EF4-FFF2-40B4-BE49-F238E27FC236}">
-                <a16:creationId xmlns:a16="http://schemas.microsoft.com/office/drawing/2014/main" id="{87E8940D-5673-A2D2-B3C1-DEEA21C4CDE1}"/>
+                <a16:creationId xmlns:a16="http://schemas.microsoft.com/office/drawing/2014/main" id="{53CF2C27-5ADD-CB36-19C7-D5BB81A06F43}"/>
               </a:ext>
             </a:extLst>
           </p:cNvPr>
@@ -1131,9 +1131,9 @@
           <a:bodyPr/>
           <a:lstStyle/>
           <a:p>
-            <a:fld id="{45758416-7A6C-4B2A-B976-C57B5B58CF95}" type="datetimeFigureOut">
+            <a:fld id="{1C554CDD-2511-4C84-938F-E8C857FD2168}" type="datetimeFigureOut">
               <a:rPr lang="ko-KR" altLang="en-US" smtClean="0"/>
-              <a:t>2026-06-22</a:t>
+              <a:t>2026-06-24</a:t>
             </a:fld>
             <a:endParaRPr lang="ko-KR" altLang="en-US"/>
           </a:p>
@@ -1144,7 +1144,7 @@
           <p:cNvPr id="5" name="바닥글 개체 틀 4">
             <a:extLst>
               <a:ext uri="{FF2B5EF4-FFF2-40B4-BE49-F238E27FC236}">
-                <a16:creationId xmlns:a16="http://schemas.microsoft.com/office/drawing/2014/main" id="{4A9E648B-AF12-8BFB-3D25-701BE219F801}"/>
+                <a16:creationId xmlns:a16="http://schemas.microsoft.com/office/drawing/2014/main" id="{1D0FFF65-FEF9-F859-12EC-2ACCD4DBB335}"/>
               </a:ext>
             </a:extLst>
           </p:cNvPr>
@@ -1169,7 +1169,7 @@
           <p:cNvPr id="6" name="슬라이드 번호 개체 틀 5">
             <a:extLst>
               <a:ext uri="{FF2B5EF4-FFF2-40B4-BE49-F238E27FC236}">
-                <a16:creationId xmlns:a16="http://schemas.microsoft.com/office/drawing/2014/main" id="{E8773235-08B6-6B9B-F0BE-C6A2EA31A74C}"/>
+                <a16:creationId xmlns:a16="http://schemas.microsoft.com/office/drawing/2014/main" id="{BF60C091-8F7B-7FD5-58AE-EFB62FC31372}"/>
               </a:ext>
             </a:extLst>
           </p:cNvPr>
@@ -1185,7 +1185,7 @@
           <a:bodyPr/>
           <a:lstStyle/>
           <a:p>
-            <a:fld id="{56132E85-F82A-4B85-ACE0-657FE931569E}" type="slidenum">
+            <a:fld id="{F6AA6F9A-BD14-43E8-81A1-DCF1143462DC}" type="slidenum">
               <a:rPr lang="ko-KR" altLang="en-US" smtClean="0"/>
               <a:t>‹#›</a:t>
             </a:fld>
@@ -1196,7 +1196,7 @@
     </p:spTree>
     <p:extLst>
       <p:ext uri="{BB962C8B-B14F-4D97-AF65-F5344CB8AC3E}">
-        <p14:creationId xmlns:p14="http://schemas.microsoft.com/office/powerpoint/2010/main" val="549395898"/>
+        <p14:creationId xmlns:p14="http://schemas.microsoft.com/office/powerpoint/2010/main" val="2690760853"/>
       </p:ext>
     </p:extLst>
   </p:cSld>
@@ -1228,7 +1228,7 @@
           <p:cNvPr id="2" name="제목 1">
             <a:extLst>
               <a:ext uri="{FF2B5EF4-FFF2-40B4-BE49-F238E27FC236}">
-                <a16:creationId xmlns:a16="http://schemas.microsoft.com/office/drawing/2014/main" id="{37D154C2-98D8-1851-0955-425F05E1FA01}"/>
+                <a16:creationId xmlns:a16="http://schemas.microsoft.com/office/drawing/2014/main" id="{1CDD7F1D-672D-626E-E506-9AC6AE6F5193}"/>
               </a:ext>
             </a:extLst>
           </p:cNvPr>
@@ -1256,7 +1256,7 @@
           <p:cNvPr id="3" name="내용 개체 틀 2">
             <a:extLst>
               <a:ext uri="{FF2B5EF4-FFF2-40B4-BE49-F238E27FC236}">
-                <a16:creationId xmlns:a16="http://schemas.microsoft.com/office/drawing/2014/main" id="{5B91B561-55E2-5829-B03A-3F8FD5B12483}"/>
+                <a16:creationId xmlns:a16="http://schemas.microsoft.com/office/drawing/2014/main" id="{A20BD8D4-0BFF-6481-E476-8150D5ABEECB}"/>
               </a:ext>
             </a:extLst>
           </p:cNvPr>
@@ -1318,7 +1318,7 @@
           <p:cNvPr id="4" name="내용 개체 틀 3">
             <a:extLst>
               <a:ext uri="{FF2B5EF4-FFF2-40B4-BE49-F238E27FC236}">
-                <a16:creationId xmlns:a16="http://schemas.microsoft.com/office/drawing/2014/main" id="{AAF56B46-97F8-6E45-51F8-B7D3F429683A}"/>
+                <a16:creationId xmlns:a16="http://schemas.microsoft.com/office/drawing/2014/main" id="{6C69F7C8-5492-B4D6-3ADE-0DF5E6F400F6}"/>
               </a:ext>
             </a:extLst>
           </p:cNvPr>
@@ -1380,7 +1380,7 @@
           <p:cNvPr id="5" name="날짜 개체 틀 4">
             <a:extLst>
               <a:ext uri="{FF2B5EF4-FFF2-40B4-BE49-F238E27FC236}">
-                <a16:creationId xmlns:a16="http://schemas.microsoft.com/office/drawing/2014/main" id="{99E4FB6C-DDE8-31D6-98F2-EE1F87887D29}"/>
+                <a16:creationId xmlns:a16="http://schemas.microsoft.com/office/drawing/2014/main" id="{06B38AE6-6B4E-A2A6-674D-FDD419BB6B40}"/>
               </a:ext>
             </a:extLst>
           </p:cNvPr>
@@ -1396,9 +1396,9 @@
           <a:bodyPr/>
           <a:lstStyle/>
           <a:p>
-            <a:fld id="{45758416-7A6C-4B2A-B976-C57B5B58CF95}" type="datetimeFigureOut">
+            <a:fld id="{1C554CDD-2511-4C84-938F-E8C857FD2168}" type="datetimeFigureOut">
               <a:rPr lang="ko-KR" altLang="en-US" smtClean="0"/>
-              <a:t>2026-06-22</a:t>
+              <a:t>2026-06-24</a:t>
             </a:fld>
             <a:endParaRPr lang="ko-KR" altLang="en-US"/>
           </a:p>
@@ -1409,7 +1409,7 @@
           <p:cNvPr id="6" name="바닥글 개체 틀 5">
             <a:extLst>
               <a:ext uri="{FF2B5EF4-FFF2-40B4-BE49-F238E27FC236}">
-                <a16:creationId xmlns:a16="http://schemas.microsoft.com/office/drawing/2014/main" id="{A018DDA0-16CE-4C95-429F-3600906782A6}"/>
+                <a16:creationId xmlns:a16="http://schemas.microsoft.com/office/drawing/2014/main" id="{29082CB9-AFF4-D593-46D0-823DE207F07D}"/>
               </a:ext>
             </a:extLst>
           </p:cNvPr>
@@ -1434,7 +1434,7 @@
           <p:cNvPr id="7" name="슬라이드 번호 개체 틀 6">
             <a:extLst>
               <a:ext uri="{FF2B5EF4-FFF2-40B4-BE49-F238E27FC236}">
-                <a16:creationId xmlns:a16="http://schemas.microsoft.com/office/drawing/2014/main" id="{2A1C56FA-FB75-A8CB-AF0B-249F1B35CFA2}"/>
+                <a16:creationId xmlns:a16="http://schemas.microsoft.com/office/drawing/2014/main" id="{5BC84236-4E8B-09DD-E77C-4C73B11C327B}"/>
               </a:ext>
             </a:extLst>
           </p:cNvPr>
@@ -1450,7 +1450,7 @@
           <a:bodyPr/>
           <a:lstStyle/>
           <a:p>
-            <a:fld id="{56132E85-F82A-4B85-ACE0-657FE931569E}" type="slidenum">
+            <a:fld id="{F6AA6F9A-BD14-43E8-81A1-DCF1143462DC}" type="slidenum">
               <a:rPr lang="ko-KR" altLang="en-US" smtClean="0"/>
               <a:t>‹#›</a:t>
             </a:fld>
@@ -1461,7 +1461,7 @@
     </p:spTree>
     <p:extLst>
       <p:ext uri="{BB962C8B-B14F-4D97-AF65-F5344CB8AC3E}">
-        <p14:creationId xmlns:p14="http://schemas.microsoft.com/office/powerpoint/2010/main" val="1755351884"/>
+        <p14:creationId xmlns:p14="http://schemas.microsoft.com/office/powerpoint/2010/main" val="2135384337"/>
       </p:ext>
     </p:extLst>
   </p:cSld>
@@ -1493,7 +1493,7 @@
           <p:cNvPr id="2" name="제목 1">
             <a:extLst>
               <a:ext uri="{FF2B5EF4-FFF2-40B4-BE49-F238E27FC236}">
-                <a16:creationId xmlns:a16="http://schemas.microsoft.com/office/drawing/2014/main" id="{5B9E435F-1CF7-2839-E1E6-8D4AA2F58D3E}"/>
+                <a16:creationId xmlns:a16="http://schemas.microsoft.com/office/drawing/2014/main" id="{82887BA4-E64C-1E5C-1496-412A872CEFA2}"/>
               </a:ext>
             </a:extLst>
           </p:cNvPr>
@@ -1526,7 +1526,7 @@
           <p:cNvPr id="3" name="텍스트 개체 틀 2">
             <a:extLst>
               <a:ext uri="{FF2B5EF4-FFF2-40B4-BE49-F238E27FC236}">
-                <a16:creationId xmlns:a16="http://schemas.microsoft.com/office/drawing/2014/main" id="{9421C76A-7F89-0CEB-702B-2AD12DE96FD9}"/>
+                <a16:creationId xmlns:a16="http://schemas.microsoft.com/office/drawing/2014/main" id="{B8FB4D42-28BA-0619-3B53-8AF2EA35D510}"/>
               </a:ext>
             </a:extLst>
           </p:cNvPr>
@@ -1597,7 +1597,7 @@
           <p:cNvPr id="4" name="내용 개체 틀 3">
             <a:extLst>
               <a:ext uri="{FF2B5EF4-FFF2-40B4-BE49-F238E27FC236}">
-                <a16:creationId xmlns:a16="http://schemas.microsoft.com/office/drawing/2014/main" id="{DD890FF1-AD98-6FA3-00DB-F33579B17F9F}"/>
+                <a16:creationId xmlns:a16="http://schemas.microsoft.com/office/drawing/2014/main" id="{9974B58D-5D3F-B73A-416E-DCDDF0205BF8}"/>
               </a:ext>
             </a:extLst>
           </p:cNvPr>
@@ -1659,7 +1659,7 @@
           <p:cNvPr id="5" name="텍스트 개체 틀 4">
             <a:extLst>
               <a:ext uri="{FF2B5EF4-FFF2-40B4-BE49-F238E27FC236}">
-                <a16:creationId xmlns:a16="http://schemas.microsoft.com/office/drawing/2014/main" id="{1A4C1E5E-5F46-A53A-83C4-1BE4D165ED34}"/>
+                <a16:creationId xmlns:a16="http://schemas.microsoft.com/office/drawing/2014/main" id="{988F059A-358A-CE61-17C0-30BC4EFC8460}"/>
               </a:ext>
             </a:extLst>
           </p:cNvPr>
@@ -1730,7 +1730,7 @@
           <p:cNvPr id="6" name="내용 개체 틀 5">
             <a:extLst>
               <a:ext uri="{FF2B5EF4-FFF2-40B4-BE49-F238E27FC236}">
-                <a16:creationId xmlns:a16="http://schemas.microsoft.com/office/drawing/2014/main" id="{9C87DBC2-48A0-513E-CC0E-BB00389799F0}"/>
+                <a16:creationId xmlns:a16="http://schemas.microsoft.com/office/drawing/2014/main" id="{A6E55FDB-4E24-0AB5-9839-6276D03CDE4D}"/>
               </a:ext>
             </a:extLst>
           </p:cNvPr>
@@ -1792,7 +1792,7 @@
           <p:cNvPr id="7" name="날짜 개체 틀 6">
             <a:extLst>
               <a:ext uri="{FF2B5EF4-FFF2-40B4-BE49-F238E27FC236}">
-                <a16:creationId xmlns:a16="http://schemas.microsoft.com/office/drawing/2014/main" id="{C2B7DD5F-AFA8-214D-45F6-3385A54B6F70}"/>
+                <a16:creationId xmlns:a16="http://schemas.microsoft.com/office/drawing/2014/main" id="{55B64094-62DD-6C9A-B5CE-1E037AE215E4}"/>
               </a:ext>
             </a:extLst>
           </p:cNvPr>
@@ -1808,9 +1808,9 @@
           <a:bodyPr/>
           <a:lstStyle/>
           <a:p>
-            <a:fld id="{45758416-7A6C-4B2A-B976-C57B5B58CF95}" type="datetimeFigureOut">
+            <a:fld id="{1C554CDD-2511-4C84-938F-E8C857FD2168}" type="datetimeFigureOut">
               <a:rPr lang="ko-KR" altLang="en-US" smtClean="0"/>
-              <a:t>2026-06-22</a:t>
+              <a:t>2026-06-24</a:t>
             </a:fld>
             <a:endParaRPr lang="ko-KR" altLang="en-US"/>
           </a:p>
@@ -1821,7 +1821,7 @@
           <p:cNvPr id="8" name="바닥글 개체 틀 7">
             <a:extLst>
               <a:ext uri="{FF2B5EF4-FFF2-40B4-BE49-F238E27FC236}">
-                <a16:creationId xmlns:a16="http://schemas.microsoft.com/office/drawing/2014/main" id="{E5677A19-2654-BEAA-7504-CC3964D7899B}"/>
+                <a16:creationId xmlns:a16="http://schemas.microsoft.com/office/drawing/2014/main" id="{A2DB02CB-B475-D37E-8923-0F4C89864BD1}"/>
               </a:ext>
             </a:extLst>
           </p:cNvPr>
@@ -1846,7 +1846,7 @@
           <p:cNvPr id="9" name="슬라이드 번호 개체 틀 8">
             <a:extLst>
               <a:ext uri="{FF2B5EF4-FFF2-40B4-BE49-F238E27FC236}">
-                <a16:creationId xmlns:a16="http://schemas.microsoft.com/office/drawing/2014/main" id="{B554DB79-E79E-B857-9BB6-E9026E01906F}"/>
+                <a16:creationId xmlns:a16="http://schemas.microsoft.com/office/drawing/2014/main" id="{810D1F6F-7861-9ADE-EA76-B73E6A33D720}"/>
               </a:ext>
             </a:extLst>
           </p:cNvPr>
@@ -1862,7 +1862,7 @@
           <a:bodyPr/>
           <a:lstStyle/>
           <a:p>
-            <a:fld id="{56132E85-F82A-4B85-ACE0-657FE931569E}" type="slidenum">
+            <a:fld id="{F6AA6F9A-BD14-43E8-81A1-DCF1143462DC}" type="slidenum">
               <a:rPr lang="ko-KR" altLang="en-US" smtClean="0"/>
               <a:t>‹#›</a:t>
             </a:fld>
@@ -1873,7 +1873,7 @@
     </p:spTree>
     <p:extLst>
       <p:ext uri="{BB962C8B-B14F-4D97-AF65-F5344CB8AC3E}">
-        <p14:creationId xmlns:p14="http://schemas.microsoft.com/office/powerpoint/2010/main" val="3213248232"/>
+        <p14:creationId xmlns:p14="http://schemas.microsoft.com/office/powerpoint/2010/main" val="1152879265"/>
       </p:ext>
     </p:extLst>
   </p:cSld>
@@ -1905,7 +1905,7 @@
           <p:cNvPr id="2" name="제목 1">
             <a:extLst>
               <a:ext uri="{FF2B5EF4-FFF2-40B4-BE49-F238E27FC236}">
-                <a16:creationId xmlns:a16="http://schemas.microsoft.com/office/drawing/2014/main" id="{BD3843BB-1591-17AF-043E-A4221C0F36E1}"/>
+                <a16:creationId xmlns:a16="http://schemas.microsoft.com/office/drawing/2014/main" id="{013C6A84-6103-B628-F1CE-9D6314B5C457}"/>
               </a:ext>
             </a:extLst>
           </p:cNvPr>
@@ -1933,7 +1933,7 @@
           <p:cNvPr id="3" name="날짜 개체 틀 2">
             <a:extLst>
               <a:ext uri="{FF2B5EF4-FFF2-40B4-BE49-F238E27FC236}">
-                <a16:creationId xmlns:a16="http://schemas.microsoft.com/office/drawing/2014/main" id="{9DCC57A9-B604-BC75-A488-23553DCB3033}"/>
+                <a16:creationId xmlns:a16="http://schemas.microsoft.com/office/drawing/2014/main" id="{92BF475D-9968-AE0B-21D1-CC7E5AC3CC6F}"/>
               </a:ext>
             </a:extLst>
           </p:cNvPr>
@@ -1949,9 +1949,9 @@
           <a:bodyPr/>
           <a:lstStyle/>
           <a:p>
-            <a:fld id="{45758416-7A6C-4B2A-B976-C57B5B58CF95}" type="datetimeFigureOut">
+            <a:fld id="{1C554CDD-2511-4C84-938F-E8C857FD2168}" type="datetimeFigureOut">
               <a:rPr lang="ko-KR" altLang="en-US" smtClean="0"/>
-              <a:t>2026-06-22</a:t>
+              <a:t>2026-06-24</a:t>
             </a:fld>
             <a:endParaRPr lang="ko-KR" altLang="en-US"/>
           </a:p>
@@ -1962,7 +1962,7 @@
           <p:cNvPr id="4" name="바닥글 개체 틀 3">
             <a:extLst>
               <a:ext uri="{FF2B5EF4-FFF2-40B4-BE49-F238E27FC236}">
-                <a16:creationId xmlns:a16="http://schemas.microsoft.com/office/drawing/2014/main" id="{4159CC6C-0F6D-3F2E-E227-9FD9446217C5}"/>
+                <a16:creationId xmlns:a16="http://schemas.microsoft.com/office/drawing/2014/main" id="{C5111727-50DC-C1F7-8B7F-A320E5190B83}"/>
               </a:ext>
             </a:extLst>
           </p:cNvPr>
@@ -1987,7 +1987,7 @@
           <p:cNvPr id="5" name="슬라이드 번호 개체 틀 4">
             <a:extLst>
               <a:ext uri="{FF2B5EF4-FFF2-40B4-BE49-F238E27FC236}">
-                <a16:creationId xmlns:a16="http://schemas.microsoft.com/office/drawing/2014/main" id="{4FD87DC4-11A2-9022-DA20-C32BCC0E15D4}"/>
+                <a16:creationId xmlns:a16="http://schemas.microsoft.com/office/drawing/2014/main" id="{0EC0E580-C055-0E7E-B848-F3318A263499}"/>
               </a:ext>
             </a:extLst>
           </p:cNvPr>
@@ -2003,7 +2003,7 @@
           <a:bodyPr/>
           <a:lstStyle/>
           <a:p>
-            <a:fld id="{56132E85-F82A-4B85-ACE0-657FE931569E}" type="slidenum">
+            <a:fld id="{F6AA6F9A-BD14-43E8-81A1-DCF1143462DC}" type="slidenum">
               <a:rPr lang="ko-KR" altLang="en-US" smtClean="0"/>
               <a:t>‹#›</a:t>
             </a:fld>
@@ -2014,7 +2014,7 @@
     </p:spTree>
     <p:extLst>
       <p:ext uri="{BB962C8B-B14F-4D97-AF65-F5344CB8AC3E}">
-        <p14:creationId xmlns:p14="http://schemas.microsoft.com/office/powerpoint/2010/main" val="303278676"/>
+        <p14:creationId xmlns:p14="http://schemas.microsoft.com/office/powerpoint/2010/main" val="2417131329"/>
       </p:ext>
     </p:extLst>
   </p:cSld>
@@ -2046,7 +2046,7 @@
           <p:cNvPr id="2" name="날짜 개체 틀 1">
             <a:extLst>
               <a:ext uri="{FF2B5EF4-FFF2-40B4-BE49-F238E27FC236}">
-                <a16:creationId xmlns:a16="http://schemas.microsoft.com/office/drawing/2014/main" id="{0B485E4C-1B5A-092C-4042-098F006408DF}"/>
+                <a16:creationId xmlns:a16="http://schemas.microsoft.com/office/drawing/2014/main" id="{9944C1C1-D45D-52AA-D9D0-33CE6F2384AA}"/>
               </a:ext>
             </a:extLst>
           </p:cNvPr>
@@ -2062,9 +2062,9 @@
           <a:bodyPr/>
           <a:lstStyle/>
           <a:p>
-            <a:fld id="{45758416-7A6C-4B2A-B976-C57B5B58CF95}" type="datetimeFigureOut">
+            <a:fld id="{1C554CDD-2511-4C84-938F-E8C857FD2168}" type="datetimeFigureOut">
               <a:rPr lang="ko-KR" altLang="en-US" smtClean="0"/>
-              <a:t>2026-06-22</a:t>
+              <a:t>2026-06-24</a:t>
             </a:fld>
             <a:endParaRPr lang="ko-KR" altLang="en-US"/>
           </a:p>
@@ -2075,7 +2075,7 @@
           <p:cNvPr id="3" name="바닥글 개체 틀 2">
             <a:extLst>
               <a:ext uri="{FF2B5EF4-FFF2-40B4-BE49-F238E27FC236}">
-                <a16:creationId xmlns:a16="http://schemas.microsoft.com/office/drawing/2014/main" id="{4314A51E-CF86-2D94-707C-394D4B998E68}"/>
+                <a16:creationId xmlns:a16="http://schemas.microsoft.com/office/drawing/2014/main" id="{D9D9624E-7FA2-32FE-DBFF-991078ECF210}"/>
               </a:ext>
             </a:extLst>
           </p:cNvPr>
@@ -2100,7 +2100,7 @@
           <p:cNvPr id="4" name="슬라이드 번호 개체 틀 3">
             <a:extLst>
               <a:ext uri="{FF2B5EF4-FFF2-40B4-BE49-F238E27FC236}">
-                <a16:creationId xmlns:a16="http://schemas.microsoft.com/office/drawing/2014/main" id="{194377E0-214B-6921-28A2-3D6D0C20B0EE}"/>
+                <a16:creationId xmlns:a16="http://schemas.microsoft.com/office/drawing/2014/main" id="{3A3A1E20-24C6-E907-1DDD-2DD24C2C123E}"/>
               </a:ext>
             </a:extLst>
           </p:cNvPr>
@@ -2116,7 +2116,7 @@
           <a:bodyPr/>
           <a:lstStyle/>
           <a:p>
-            <a:fld id="{56132E85-F82A-4B85-ACE0-657FE931569E}" type="slidenum">
+            <a:fld id="{F6AA6F9A-BD14-43E8-81A1-DCF1143462DC}" type="slidenum">
               <a:rPr lang="ko-KR" altLang="en-US" smtClean="0"/>
               <a:t>‹#›</a:t>
             </a:fld>
@@ -2127,7 +2127,7 @@
     </p:spTree>
     <p:extLst>
       <p:ext uri="{BB962C8B-B14F-4D97-AF65-F5344CB8AC3E}">
-        <p14:creationId xmlns:p14="http://schemas.microsoft.com/office/powerpoint/2010/main" val="2773366037"/>
+        <p14:creationId xmlns:p14="http://schemas.microsoft.com/office/powerpoint/2010/main" val="3883286588"/>
       </p:ext>
     </p:extLst>
   </p:cSld>
@@ -2159,7 +2159,7 @@
           <p:cNvPr id="2" name="제목 1">
             <a:extLst>
               <a:ext uri="{FF2B5EF4-FFF2-40B4-BE49-F238E27FC236}">
-                <a16:creationId xmlns:a16="http://schemas.microsoft.com/office/drawing/2014/main" id="{22EF83DA-92FF-B8BA-CECD-857A412C14E6}"/>
+                <a16:creationId xmlns:a16="http://schemas.microsoft.com/office/drawing/2014/main" id="{38D08758-AA65-7ADE-F64E-E21DF756B696}"/>
               </a:ext>
             </a:extLst>
           </p:cNvPr>
@@ -2196,7 +2196,7 @@
           <p:cNvPr id="3" name="내용 개체 틀 2">
             <a:extLst>
               <a:ext uri="{FF2B5EF4-FFF2-40B4-BE49-F238E27FC236}">
-                <a16:creationId xmlns:a16="http://schemas.microsoft.com/office/drawing/2014/main" id="{C58D47B9-7D07-C7DE-967B-F8CE59671146}"/>
+                <a16:creationId xmlns:a16="http://schemas.microsoft.com/office/drawing/2014/main" id="{70678E70-B422-55FD-B9B4-85A80B2B4206}"/>
               </a:ext>
             </a:extLst>
           </p:cNvPr>
@@ -2286,7 +2286,7 @@
           <p:cNvPr id="4" name="텍스트 개체 틀 3">
             <a:extLst>
               <a:ext uri="{FF2B5EF4-FFF2-40B4-BE49-F238E27FC236}">
-                <a16:creationId xmlns:a16="http://schemas.microsoft.com/office/drawing/2014/main" id="{AB3B9A62-229A-C39D-D3F1-65D7D62F3EF6}"/>
+                <a16:creationId xmlns:a16="http://schemas.microsoft.com/office/drawing/2014/main" id="{594A1DF3-4466-753E-83C7-566F81BBAE65}"/>
               </a:ext>
             </a:extLst>
           </p:cNvPr>
@@ -2357,7 +2357,7 @@
           <p:cNvPr id="5" name="날짜 개체 틀 4">
             <a:extLst>
               <a:ext uri="{FF2B5EF4-FFF2-40B4-BE49-F238E27FC236}">
-                <a16:creationId xmlns:a16="http://schemas.microsoft.com/office/drawing/2014/main" id="{CEC0736A-0908-9624-E3BA-CF4468E43E8C}"/>
+                <a16:creationId xmlns:a16="http://schemas.microsoft.com/office/drawing/2014/main" id="{35D95D50-4CBA-11FF-D57C-71554B1711D0}"/>
               </a:ext>
             </a:extLst>
           </p:cNvPr>
@@ -2373,9 +2373,9 @@
           <a:bodyPr/>
           <a:lstStyle/>
           <a:p>
-            <a:fld id="{45758416-7A6C-4B2A-B976-C57B5B58CF95}" type="datetimeFigureOut">
+            <a:fld id="{1C554CDD-2511-4C84-938F-E8C857FD2168}" type="datetimeFigureOut">
               <a:rPr lang="ko-KR" altLang="en-US" smtClean="0"/>
-              <a:t>2026-06-22</a:t>
+              <a:t>2026-06-24</a:t>
             </a:fld>
             <a:endParaRPr lang="ko-KR" altLang="en-US"/>
           </a:p>
@@ -2386,7 +2386,7 @@
           <p:cNvPr id="6" name="바닥글 개체 틀 5">
             <a:extLst>
               <a:ext uri="{FF2B5EF4-FFF2-40B4-BE49-F238E27FC236}">
-                <a16:creationId xmlns:a16="http://schemas.microsoft.com/office/drawing/2014/main" id="{BA20A02E-493C-6287-EE25-395FA9A01720}"/>
+                <a16:creationId xmlns:a16="http://schemas.microsoft.com/office/drawing/2014/main" id="{62AB5E5A-9B49-9D4B-E9E1-A3A8022EE552}"/>
               </a:ext>
             </a:extLst>
           </p:cNvPr>
@@ -2411,7 +2411,7 @@
           <p:cNvPr id="7" name="슬라이드 번호 개체 틀 6">
             <a:extLst>
               <a:ext uri="{FF2B5EF4-FFF2-40B4-BE49-F238E27FC236}">
-                <a16:creationId xmlns:a16="http://schemas.microsoft.com/office/drawing/2014/main" id="{9E1064B6-D63D-148E-6A31-7E930F5AA897}"/>
+                <a16:creationId xmlns:a16="http://schemas.microsoft.com/office/drawing/2014/main" id="{AE823482-AA09-C356-6371-5F4E0BE88F1E}"/>
               </a:ext>
             </a:extLst>
           </p:cNvPr>
@@ -2427,7 +2427,7 @@
           <a:bodyPr/>
           <a:lstStyle/>
           <a:p>
-            <a:fld id="{56132E85-F82A-4B85-ACE0-657FE931569E}" type="slidenum">
+            <a:fld id="{F6AA6F9A-BD14-43E8-81A1-DCF1143462DC}" type="slidenum">
               <a:rPr lang="ko-KR" altLang="en-US" smtClean="0"/>
               <a:t>‹#›</a:t>
             </a:fld>
@@ -2438,7 +2438,7 @@
     </p:spTree>
     <p:extLst>
       <p:ext uri="{BB962C8B-B14F-4D97-AF65-F5344CB8AC3E}">
-        <p14:creationId xmlns:p14="http://schemas.microsoft.com/office/powerpoint/2010/main" val="1241382805"/>
+        <p14:creationId xmlns:p14="http://schemas.microsoft.com/office/powerpoint/2010/main" val="453071563"/>
       </p:ext>
     </p:extLst>
   </p:cSld>
@@ -2470,7 +2470,7 @@
           <p:cNvPr id="2" name="제목 1">
             <a:extLst>
               <a:ext uri="{FF2B5EF4-FFF2-40B4-BE49-F238E27FC236}">
-                <a16:creationId xmlns:a16="http://schemas.microsoft.com/office/drawing/2014/main" id="{B23615DF-761A-9EBE-4E54-74ECC7F296B6}"/>
+                <a16:creationId xmlns:a16="http://schemas.microsoft.com/office/drawing/2014/main" id="{2B8B3F3E-8E18-3B5E-537D-9B4E62D44204}"/>
               </a:ext>
             </a:extLst>
           </p:cNvPr>
@@ -2507,7 +2507,7 @@
           <p:cNvPr id="3" name="그림 개체 틀 2">
             <a:extLst>
               <a:ext uri="{FF2B5EF4-FFF2-40B4-BE49-F238E27FC236}">
-                <a16:creationId xmlns:a16="http://schemas.microsoft.com/office/drawing/2014/main" id="{69C15D06-4985-1B54-9F96-549B304F3AC1}"/>
+                <a16:creationId xmlns:a16="http://schemas.microsoft.com/office/drawing/2014/main" id="{DCDCC459-14A6-344C-DA60-58BDDF206CAA}"/>
               </a:ext>
             </a:extLst>
           </p:cNvPr>
@@ -2574,7 +2574,7 @@
           <p:cNvPr id="4" name="텍스트 개체 틀 3">
             <a:extLst>
               <a:ext uri="{FF2B5EF4-FFF2-40B4-BE49-F238E27FC236}">
-                <a16:creationId xmlns:a16="http://schemas.microsoft.com/office/drawing/2014/main" id="{51AA0969-ACFB-76E8-2E36-78FC29E33B0C}"/>
+                <a16:creationId xmlns:a16="http://schemas.microsoft.com/office/drawing/2014/main" id="{0865A49C-D7EC-3FFC-3FB1-96417A2DA4D6}"/>
               </a:ext>
             </a:extLst>
           </p:cNvPr>
@@ -2645,7 +2645,7 @@
           <p:cNvPr id="5" name="날짜 개체 틀 4">
             <a:extLst>
               <a:ext uri="{FF2B5EF4-FFF2-40B4-BE49-F238E27FC236}">
-                <a16:creationId xmlns:a16="http://schemas.microsoft.com/office/drawing/2014/main" id="{65DB6608-DD37-460F-E569-662EA3E59F92}"/>
+                <a16:creationId xmlns:a16="http://schemas.microsoft.com/office/drawing/2014/main" id="{9A6D87E3-AE9D-2BE7-D4E3-D0BE4B24BF15}"/>
               </a:ext>
             </a:extLst>
           </p:cNvPr>
@@ -2661,9 +2661,9 @@
           <a:bodyPr/>
           <a:lstStyle/>
           <a:p>
-            <a:fld id="{45758416-7A6C-4B2A-B976-C57B5B58CF95}" type="datetimeFigureOut">
+            <a:fld id="{1C554CDD-2511-4C84-938F-E8C857FD2168}" type="datetimeFigureOut">
               <a:rPr lang="ko-KR" altLang="en-US" smtClean="0"/>
-              <a:t>2026-06-22</a:t>
+              <a:t>2026-06-24</a:t>
             </a:fld>
             <a:endParaRPr lang="ko-KR" altLang="en-US"/>
           </a:p>
@@ -2674,7 +2674,7 @@
           <p:cNvPr id="6" name="바닥글 개체 틀 5">
             <a:extLst>
               <a:ext uri="{FF2B5EF4-FFF2-40B4-BE49-F238E27FC236}">
-                <a16:creationId xmlns:a16="http://schemas.microsoft.com/office/drawing/2014/main" id="{92B9EF90-7C4B-49B7-A580-4656B80ECA6D}"/>
+                <a16:creationId xmlns:a16="http://schemas.microsoft.com/office/drawing/2014/main" id="{D4A626E5-CD22-C252-FB36-A9365BC3C7FD}"/>
               </a:ext>
             </a:extLst>
           </p:cNvPr>
@@ -2699,7 +2699,7 @@
           <p:cNvPr id="7" name="슬라이드 번호 개체 틀 6">
             <a:extLst>
               <a:ext uri="{FF2B5EF4-FFF2-40B4-BE49-F238E27FC236}">
-                <a16:creationId xmlns:a16="http://schemas.microsoft.com/office/drawing/2014/main" id="{1FCC5662-55AE-ED80-9006-3ACCCB85FB91}"/>
+                <a16:creationId xmlns:a16="http://schemas.microsoft.com/office/drawing/2014/main" id="{4BF70B85-4ACF-37DF-B108-2B88742F7B8F}"/>
               </a:ext>
             </a:extLst>
           </p:cNvPr>
@@ -2715,7 +2715,7 @@
           <a:bodyPr/>
           <a:lstStyle/>
           <a:p>
-            <a:fld id="{56132E85-F82A-4B85-ACE0-657FE931569E}" type="slidenum">
+            <a:fld id="{F6AA6F9A-BD14-43E8-81A1-DCF1143462DC}" type="slidenum">
               <a:rPr lang="ko-KR" altLang="en-US" smtClean="0"/>
               <a:t>‹#›</a:t>
             </a:fld>
@@ -2726,7 +2726,7 @@
     </p:spTree>
     <p:extLst>
       <p:ext uri="{BB962C8B-B14F-4D97-AF65-F5344CB8AC3E}">
-        <p14:creationId xmlns:p14="http://schemas.microsoft.com/office/powerpoint/2010/main" val="3760452224"/>
+        <p14:creationId xmlns:p14="http://schemas.microsoft.com/office/powerpoint/2010/main" val="1828858235"/>
       </p:ext>
     </p:extLst>
   </p:cSld>
@@ -2763,7 +2763,7 @@
           <p:cNvPr id="2" name="제목 개체 틀 1">
             <a:extLst>
               <a:ext uri="{FF2B5EF4-FFF2-40B4-BE49-F238E27FC236}">
-                <a16:creationId xmlns:a16="http://schemas.microsoft.com/office/drawing/2014/main" id="{CCBC5EC9-FFC1-8139-005B-29F5C719AF4D}"/>
+                <a16:creationId xmlns:a16="http://schemas.microsoft.com/office/drawing/2014/main" id="{C25DCED9-0C47-E5E1-CDF0-CA7318AD5D89}"/>
               </a:ext>
             </a:extLst>
           </p:cNvPr>
@@ -2801,7 +2801,7 @@
           <p:cNvPr id="3" name="텍스트 개체 틀 2">
             <a:extLst>
               <a:ext uri="{FF2B5EF4-FFF2-40B4-BE49-F238E27FC236}">
-                <a16:creationId xmlns:a16="http://schemas.microsoft.com/office/drawing/2014/main" id="{D39BD938-2FF3-6FFF-B32F-762E1A43ADB2}"/>
+                <a16:creationId xmlns:a16="http://schemas.microsoft.com/office/drawing/2014/main" id="{C5593AD9-C64F-AE3C-5D10-B247C3FCC5F7}"/>
               </a:ext>
             </a:extLst>
           </p:cNvPr>
@@ -2868,7 +2868,7 @@
           <p:cNvPr id="4" name="날짜 개체 틀 3">
             <a:extLst>
               <a:ext uri="{FF2B5EF4-FFF2-40B4-BE49-F238E27FC236}">
-                <a16:creationId xmlns:a16="http://schemas.microsoft.com/office/drawing/2014/main" id="{AC18707C-245E-81DB-4357-7A6B8FAD0997}"/>
+                <a16:creationId xmlns:a16="http://schemas.microsoft.com/office/drawing/2014/main" id="{D7152DCA-0CDB-9BFB-2C9A-559A12A0DC49}"/>
               </a:ext>
             </a:extLst>
           </p:cNvPr>
@@ -2902,9 +2902,9 @@
             </a:lvl1pPr>
           </a:lstStyle>
           <a:p>
-            <a:fld id="{45758416-7A6C-4B2A-B976-C57B5B58CF95}" type="datetimeFigureOut">
+            <a:fld id="{1C554CDD-2511-4C84-938F-E8C857FD2168}" type="datetimeFigureOut">
               <a:rPr lang="ko-KR" altLang="en-US" smtClean="0"/>
-              <a:t>2026-06-22</a:t>
+              <a:t>2026-06-24</a:t>
             </a:fld>
             <a:endParaRPr lang="ko-KR" altLang="en-US"/>
           </a:p>
@@ -2915,7 +2915,7 @@
           <p:cNvPr id="5" name="바닥글 개체 틀 4">
             <a:extLst>
               <a:ext uri="{FF2B5EF4-FFF2-40B4-BE49-F238E27FC236}">
-                <a16:creationId xmlns:a16="http://schemas.microsoft.com/office/drawing/2014/main" id="{C0688211-05FA-0D29-2B79-0B435304D917}"/>
+                <a16:creationId xmlns:a16="http://schemas.microsoft.com/office/drawing/2014/main" id="{70385857-926B-5046-D93D-2D46BCB947BD}"/>
               </a:ext>
             </a:extLst>
           </p:cNvPr>
@@ -2958,7 +2958,7 @@
           <p:cNvPr id="6" name="슬라이드 번호 개체 틀 5">
             <a:extLst>
               <a:ext uri="{FF2B5EF4-FFF2-40B4-BE49-F238E27FC236}">
-                <a16:creationId xmlns:a16="http://schemas.microsoft.com/office/drawing/2014/main" id="{BE747DA4-47C4-D5FA-3135-9A35D4B73C93}"/>
+                <a16:creationId xmlns:a16="http://schemas.microsoft.com/office/drawing/2014/main" id="{0B55873B-97BE-1F92-F1D3-47EB1DD76C93}"/>
               </a:ext>
             </a:extLst>
           </p:cNvPr>
@@ -2992,7 +2992,7 @@
             </a:lvl1pPr>
           </a:lstStyle>
           <a:p>
-            <a:fld id="{56132E85-F82A-4B85-ACE0-657FE931569E}" type="slidenum">
+            <a:fld id="{F6AA6F9A-BD14-43E8-81A1-DCF1143462DC}" type="slidenum">
               <a:rPr lang="ko-KR" altLang="en-US" smtClean="0"/>
               <a:t>‹#›</a:t>
             </a:fld>
@@ -3003,7 +3003,7 @@
     </p:spTree>
     <p:extLst>
       <p:ext uri="{BB962C8B-B14F-4D97-AF65-F5344CB8AC3E}">
-        <p14:creationId xmlns:p14="http://schemas.microsoft.com/office/powerpoint/2010/main" val="2352066177"/>
+        <p14:creationId xmlns:p14="http://schemas.microsoft.com/office/powerpoint/2010/main" val="2730023898"/>
       </p:ext>
     </p:extLst>
   </p:cSld>
@@ -3326,7 +3326,7 @@
           <p:cNvPr id="3" name="그래픽 2">
             <a:extLst>
               <a:ext uri="{FF2B5EF4-FFF2-40B4-BE49-F238E27FC236}">
-                <a16:creationId xmlns:a16="http://schemas.microsoft.com/office/drawing/2014/main" id="{EBD23A41-663E-B31D-9990-459493232C19}"/>
+                <a16:creationId xmlns:a16="http://schemas.microsoft.com/office/drawing/2014/main" id="{2CFB4E2E-B893-3546-29CB-CA61CB90F809}"/>
               </a:ext>
             </a:extLst>
           </p:cNvPr>
@@ -3360,7 +3360,7 @@
     </p:spTree>
     <p:extLst>
       <p:ext uri="{BB962C8B-B14F-4D97-AF65-F5344CB8AC3E}">
-        <p14:creationId xmlns:p14="http://schemas.microsoft.com/office/powerpoint/2010/main" val="2186546847"/>
+        <p14:creationId xmlns:p14="http://schemas.microsoft.com/office/powerpoint/2010/main" val="2929025773"/>
       </p:ext>
     </p:extLst>
   </p:cSld>

--- a/docs/assets/infographic-seed-gallery.pptx
+++ b/docs/assets/infographic-seed-gallery.pptx
@@ -129,7 +129,7 @@
           <p:cNvPr id="2" name="제목 1">
             <a:extLst>
               <a:ext uri="{FF2B5EF4-FFF2-40B4-BE49-F238E27FC236}">
-                <a16:creationId xmlns:a16="http://schemas.microsoft.com/office/drawing/2014/main" id="{2E075EA2-EC89-E5BF-2A7D-B26A3A2222AA}"/>
+                <a16:creationId xmlns:a16="http://schemas.microsoft.com/office/drawing/2014/main" id="{2D8F1F6A-EBD0-44B1-DB3E-C9FBCA5F2F46}"/>
               </a:ext>
             </a:extLst>
           </p:cNvPr>
@@ -166,7 +166,7 @@
           <p:cNvPr id="3" name="부제목 2">
             <a:extLst>
               <a:ext uri="{FF2B5EF4-FFF2-40B4-BE49-F238E27FC236}">
-                <a16:creationId xmlns:a16="http://schemas.microsoft.com/office/drawing/2014/main" id="{B40162A1-1CEE-E97E-314B-6EEDED64C61D}"/>
+                <a16:creationId xmlns:a16="http://schemas.microsoft.com/office/drawing/2014/main" id="{2DE75338-DB0B-C5E1-7957-1E98508DD8B2}"/>
               </a:ext>
             </a:extLst>
           </p:cNvPr>
@@ -236,7 +236,7 @@
           <p:cNvPr id="4" name="날짜 개체 틀 3">
             <a:extLst>
               <a:ext uri="{FF2B5EF4-FFF2-40B4-BE49-F238E27FC236}">
-                <a16:creationId xmlns:a16="http://schemas.microsoft.com/office/drawing/2014/main" id="{0A8B682A-0463-BDF0-ACDF-0F12EA77A6EF}"/>
+                <a16:creationId xmlns:a16="http://schemas.microsoft.com/office/drawing/2014/main" id="{4BC5D106-6D14-93E7-5534-F7ED85EA47B8}"/>
               </a:ext>
             </a:extLst>
           </p:cNvPr>
@@ -252,9 +252,9 @@
           <a:bodyPr/>
           <a:lstStyle/>
           <a:p>
-            <a:fld id="{1C554CDD-2511-4C84-938F-E8C857FD2168}" type="datetimeFigureOut">
+            <a:fld id="{49C3E51C-15A2-46D9-AFCB-7CCC968858FD}" type="datetimeFigureOut">
               <a:rPr lang="ko-KR" altLang="en-US" smtClean="0"/>
-              <a:t>2026-06-24</a:t>
+              <a:t>2026-06-25</a:t>
             </a:fld>
             <a:endParaRPr lang="ko-KR" altLang="en-US"/>
           </a:p>
@@ -265,7 +265,7 @@
           <p:cNvPr id="5" name="바닥글 개체 틀 4">
             <a:extLst>
               <a:ext uri="{FF2B5EF4-FFF2-40B4-BE49-F238E27FC236}">
-                <a16:creationId xmlns:a16="http://schemas.microsoft.com/office/drawing/2014/main" id="{A5CA0BAD-851E-8800-B16C-089459D7DA7E}"/>
+                <a16:creationId xmlns:a16="http://schemas.microsoft.com/office/drawing/2014/main" id="{7BA33F20-1C21-7F0B-77FD-BFB6ABE69E11}"/>
               </a:ext>
             </a:extLst>
           </p:cNvPr>
@@ -290,7 +290,7 @@
           <p:cNvPr id="6" name="슬라이드 번호 개체 틀 5">
             <a:extLst>
               <a:ext uri="{FF2B5EF4-FFF2-40B4-BE49-F238E27FC236}">
-                <a16:creationId xmlns:a16="http://schemas.microsoft.com/office/drawing/2014/main" id="{79421C1E-CD4E-858E-B31A-522CEE72A3B5}"/>
+                <a16:creationId xmlns:a16="http://schemas.microsoft.com/office/drawing/2014/main" id="{D618EF45-554E-26C6-3C87-B6E7562B9DE5}"/>
               </a:ext>
             </a:extLst>
           </p:cNvPr>
@@ -306,7 +306,7 @@
           <a:bodyPr/>
           <a:lstStyle/>
           <a:p>
-            <a:fld id="{F6AA6F9A-BD14-43E8-81A1-DCF1143462DC}" type="slidenum">
+            <a:fld id="{7094CA29-903E-416B-B4F8-08BD32F466F4}" type="slidenum">
               <a:rPr lang="ko-KR" altLang="en-US" smtClean="0"/>
               <a:t>‹#›</a:t>
             </a:fld>
@@ -317,7 +317,7 @@
     </p:spTree>
     <p:extLst>
       <p:ext uri="{BB962C8B-B14F-4D97-AF65-F5344CB8AC3E}">
-        <p14:creationId xmlns:p14="http://schemas.microsoft.com/office/powerpoint/2010/main" val="3156159558"/>
+        <p14:creationId xmlns:p14="http://schemas.microsoft.com/office/powerpoint/2010/main" val="182196830"/>
       </p:ext>
     </p:extLst>
   </p:cSld>
@@ -349,7 +349,7 @@
           <p:cNvPr id="2" name="제목 1">
             <a:extLst>
               <a:ext uri="{FF2B5EF4-FFF2-40B4-BE49-F238E27FC236}">
-                <a16:creationId xmlns:a16="http://schemas.microsoft.com/office/drawing/2014/main" id="{CCEA0189-C702-905A-7F02-2F4F3B8DC1F6}"/>
+                <a16:creationId xmlns:a16="http://schemas.microsoft.com/office/drawing/2014/main" id="{EA093887-D580-6229-902B-140C1207E05F}"/>
               </a:ext>
             </a:extLst>
           </p:cNvPr>
@@ -377,7 +377,7 @@
           <p:cNvPr id="3" name="세로 텍스트 개체 틀 2">
             <a:extLst>
               <a:ext uri="{FF2B5EF4-FFF2-40B4-BE49-F238E27FC236}">
-                <a16:creationId xmlns:a16="http://schemas.microsoft.com/office/drawing/2014/main" id="{42AD8902-8075-C0C7-07D8-5E6857FBB128}"/>
+                <a16:creationId xmlns:a16="http://schemas.microsoft.com/office/drawing/2014/main" id="{78739333-BEC0-0F8E-4106-B0677DBF217B}"/>
               </a:ext>
             </a:extLst>
           </p:cNvPr>
@@ -434,7 +434,7 @@
           <p:cNvPr id="4" name="날짜 개체 틀 3">
             <a:extLst>
               <a:ext uri="{FF2B5EF4-FFF2-40B4-BE49-F238E27FC236}">
-                <a16:creationId xmlns:a16="http://schemas.microsoft.com/office/drawing/2014/main" id="{12C78626-0F0D-7552-5600-6C0E69BAD617}"/>
+                <a16:creationId xmlns:a16="http://schemas.microsoft.com/office/drawing/2014/main" id="{C416678F-C841-6D00-8FCC-D533D8F49AE0}"/>
               </a:ext>
             </a:extLst>
           </p:cNvPr>
@@ -450,9 +450,9 @@
           <a:bodyPr/>
           <a:lstStyle/>
           <a:p>
-            <a:fld id="{1C554CDD-2511-4C84-938F-E8C857FD2168}" type="datetimeFigureOut">
+            <a:fld id="{49C3E51C-15A2-46D9-AFCB-7CCC968858FD}" type="datetimeFigureOut">
               <a:rPr lang="ko-KR" altLang="en-US" smtClean="0"/>
-              <a:t>2026-06-24</a:t>
+              <a:t>2026-06-25</a:t>
             </a:fld>
             <a:endParaRPr lang="ko-KR" altLang="en-US"/>
           </a:p>
@@ -463,7 +463,7 @@
           <p:cNvPr id="5" name="바닥글 개체 틀 4">
             <a:extLst>
               <a:ext uri="{FF2B5EF4-FFF2-40B4-BE49-F238E27FC236}">
-                <a16:creationId xmlns:a16="http://schemas.microsoft.com/office/drawing/2014/main" id="{9D73A5C3-D42B-9AA5-5594-8406AC57D381}"/>
+                <a16:creationId xmlns:a16="http://schemas.microsoft.com/office/drawing/2014/main" id="{8278E0F4-11A9-F837-FD8E-46A90E5C6AE5}"/>
               </a:ext>
             </a:extLst>
           </p:cNvPr>
@@ -488,7 +488,7 @@
           <p:cNvPr id="6" name="슬라이드 번호 개체 틀 5">
             <a:extLst>
               <a:ext uri="{FF2B5EF4-FFF2-40B4-BE49-F238E27FC236}">
-                <a16:creationId xmlns:a16="http://schemas.microsoft.com/office/drawing/2014/main" id="{50512034-3AF3-A1DF-DE7F-91286D34646A}"/>
+                <a16:creationId xmlns:a16="http://schemas.microsoft.com/office/drawing/2014/main" id="{7DF6B0DB-365C-0F19-DD9E-7A22858D975D}"/>
               </a:ext>
             </a:extLst>
           </p:cNvPr>
@@ -504,7 +504,7 @@
           <a:bodyPr/>
           <a:lstStyle/>
           <a:p>
-            <a:fld id="{F6AA6F9A-BD14-43E8-81A1-DCF1143462DC}" type="slidenum">
+            <a:fld id="{7094CA29-903E-416B-B4F8-08BD32F466F4}" type="slidenum">
               <a:rPr lang="ko-KR" altLang="en-US" smtClean="0"/>
               <a:t>‹#›</a:t>
             </a:fld>
@@ -515,7 +515,7 @@
     </p:spTree>
     <p:extLst>
       <p:ext uri="{BB962C8B-B14F-4D97-AF65-F5344CB8AC3E}">
-        <p14:creationId xmlns:p14="http://schemas.microsoft.com/office/powerpoint/2010/main" val="2735371045"/>
+        <p14:creationId xmlns:p14="http://schemas.microsoft.com/office/powerpoint/2010/main" val="4259989168"/>
       </p:ext>
     </p:extLst>
   </p:cSld>
@@ -547,7 +547,7 @@
           <p:cNvPr id="2" name="세로 제목 1">
             <a:extLst>
               <a:ext uri="{FF2B5EF4-FFF2-40B4-BE49-F238E27FC236}">
-                <a16:creationId xmlns:a16="http://schemas.microsoft.com/office/drawing/2014/main" id="{60EAEE2E-5B56-2B9D-3418-18AFD5C982FF}"/>
+                <a16:creationId xmlns:a16="http://schemas.microsoft.com/office/drawing/2014/main" id="{0FA62E68-AB9B-121D-31D0-55464FFA2A55}"/>
               </a:ext>
             </a:extLst>
           </p:cNvPr>
@@ -580,7 +580,7 @@
           <p:cNvPr id="3" name="세로 텍스트 개체 틀 2">
             <a:extLst>
               <a:ext uri="{FF2B5EF4-FFF2-40B4-BE49-F238E27FC236}">
-                <a16:creationId xmlns:a16="http://schemas.microsoft.com/office/drawing/2014/main" id="{13287091-EC84-0FE5-8BA2-140B9D342AA6}"/>
+                <a16:creationId xmlns:a16="http://schemas.microsoft.com/office/drawing/2014/main" id="{CFCFEEFE-88FC-CB5A-4283-876FADDD9CF6}"/>
               </a:ext>
             </a:extLst>
           </p:cNvPr>
@@ -642,7 +642,7 @@
           <p:cNvPr id="4" name="날짜 개체 틀 3">
             <a:extLst>
               <a:ext uri="{FF2B5EF4-FFF2-40B4-BE49-F238E27FC236}">
-                <a16:creationId xmlns:a16="http://schemas.microsoft.com/office/drawing/2014/main" id="{CC401FB3-6761-3EED-FF2E-03D2AD3C027E}"/>
+                <a16:creationId xmlns:a16="http://schemas.microsoft.com/office/drawing/2014/main" id="{1791D6D8-265F-EFC8-6C25-A93E8763C81C}"/>
               </a:ext>
             </a:extLst>
           </p:cNvPr>
@@ -658,9 +658,9 @@
           <a:bodyPr/>
           <a:lstStyle/>
           <a:p>
-            <a:fld id="{1C554CDD-2511-4C84-938F-E8C857FD2168}" type="datetimeFigureOut">
+            <a:fld id="{49C3E51C-15A2-46D9-AFCB-7CCC968858FD}" type="datetimeFigureOut">
               <a:rPr lang="ko-KR" altLang="en-US" smtClean="0"/>
-              <a:t>2026-06-24</a:t>
+              <a:t>2026-06-25</a:t>
             </a:fld>
             <a:endParaRPr lang="ko-KR" altLang="en-US"/>
           </a:p>
@@ -671,7 +671,7 @@
           <p:cNvPr id="5" name="바닥글 개체 틀 4">
             <a:extLst>
               <a:ext uri="{FF2B5EF4-FFF2-40B4-BE49-F238E27FC236}">
-                <a16:creationId xmlns:a16="http://schemas.microsoft.com/office/drawing/2014/main" id="{6D574D69-FF8C-CBF7-BC9D-CD410F6FEA3E}"/>
+                <a16:creationId xmlns:a16="http://schemas.microsoft.com/office/drawing/2014/main" id="{E42A4459-9CF8-9ECC-782C-3BEEB7CAB0D7}"/>
               </a:ext>
             </a:extLst>
           </p:cNvPr>
@@ -696,7 +696,7 @@
           <p:cNvPr id="6" name="슬라이드 번호 개체 틀 5">
             <a:extLst>
               <a:ext uri="{FF2B5EF4-FFF2-40B4-BE49-F238E27FC236}">
-                <a16:creationId xmlns:a16="http://schemas.microsoft.com/office/drawing/2014/main" id="{9F516008-A244-0851-2341-A0C1CE68F93A}"/>
+                <a16:creationId xmlns:a16="http://schemas.microsoft.com/office/drawing/2014/main" id="{0317517B-ECB9-D602-5032-3B7000EB14C0}"/>
               </a:ext>
             </a:extLst>
           </p:cNvPr>
@@ -712,7 +712,7 @@
           <a:bodyPr/>
           <a:lstStyle/>
           <a:p>
-            <a:fld id="{F6AA6F9A-BD14-43E8-81A1-DCF1143462DC}" type="slidenum">
+            <a:fld id="{7094CA29-903E-416B-B4F8-08BD32F466F4}" type="slidenum">
               <a:rPr lang="ko-KR" altLang="en-US" smtClean="0"/>
               <a:t>‹#›</a:t>
             </a:fld>
@@ -723,7 +723,7 @@
     </p:spTree>
     <p:extLst>
       <p:ext uri="{BB962C8B-B14F-4D97-AF65-F5344CB8AC3E}">
-        <p14:creationId xmlns:p14="http://schemas.microsoft.com/office/powerpoint/2010/main" val="3989657622"/>
+        <p14:creationId xmlns:p14="http://schemas.microsoft.com/office/powerpoint/2010/main" val="1715846452"/>
       </p:ext>
     </p:extLst>
   </p:cSld>
@@ -755,7 +755,7 @@
           <p:cNvPr id="2" name="제목 1">
             <a:extLst>
               <a:ext uri="{FF2B5EF4-FFF2-40B4-BE49-F238E27FC236}">
-                <a16:creationId xmlns:a16="http://schemas.microsoft.com/office/drawing/2014/main" id="{F3E31650-3503-C46F-2CB8-E47100ED905A}"/>
+                <a16:creationId xmlns:a16="http://schemas.microsoft.com/office/drawing/2014/main" id="{18E421D7-35B1-78EE-A814-078F019B672B}"/>
               </a:ext>
             </a:extLst>
           </p:cNvPr>
@@ -783,7 +783,7 @@
           <p:cNvPr id="3" name="내용 개체 틀 2">
             <a:extLst>
               <a:ext uri="{FF2B5EF4-FFF2-40B4-BE49-F238E27FC236}">
-                <a16:creationId xmlns:a16="http://schemas.microsoft.com/office/drawing/2014/main" id="{8A351942-B275-DE6E-7FA4-EFAB994F0D2E}"/>
+                <a16:creationId xmlns:a16="http://schemas.microsoft.com/office/drawing/2014/main" id="{D0DE7F7F-3CE7-1E60-6C6C-567EC8B37F5D}"/>
               </a:ext>
             </a:extLst>
           </p:cNvPr>
@@ -840,7 +840,7 @@
           <p:cNvPr id="4" name="날짜 개체 틀 3">
             <a:extLst>
               <a:ext uri="{FF2B5EF4-FFF2-40B4-BE49-F238E27FC236}">
-                <a16:creationId xmlns:a16="http://schemas.microsoft.com/office/drawing/2014/main" id="{B6F0DEC2-6D9F-FD20-7AF9-2B2B15285670}"/>
+                <a16:creationId xmlns:a16="http://schemas.microsoft.com/office/drawing/2014/main" id="{54E0A4FA-6005-A9ED-2127-264D44AD515F}"/>
               </a:ext>
             </a:extLst>
           </p:cNvPr>
@@ -856,9 +856,9 @@
           <a:bodyPr/>
           <a:lstStyle/>
           <a:p>
-            <a:fld id="{1C554CDD-2511-4C84-938F-E8C857FD2168}" type="datetimeFigureOut">
+            <a:fld id="{49C3E51C-15A2-46D9-AFCB-7CCC968858FD}" type="datetimeFigureOut">
               <a:rPr lang="ko-KR" altLang="en-US" smtClean="0"/>
-              <a:t>2026-06-24</a:t>
+              <a:t>2026-06-25</a:t>
             </a:fld>
             <a:endParaRPr lang="ko-KR" altLang="en-US"/>
           </a:p>
@@ -869,7 +869,7 @@
           <p:cNvPr id="5" name="바닥글 개체 틀 4">
             <a:extLst>
               <a:ext uri="{FF2B5EF4-FFF2-40B4-BE49-F238E27FC236}">
-                <a16:creationId xmlns:a16="http://schemas.microsoft.com/office/drawing/2014/main" id="{B0363BC9-B646-FF14-8345-8F5D75AC43DF}"/>
+                <a16:creationId xmlns:a16="http://schemas.microsoft.com/office/drawing/2014/main" id="{521D2894-E4EC-3734-7703-8CFF842A36ED}"/>
               </a:ext>
             </a:extLst>
           </p:cNvPr>
@@ -894,7 +894,7 @@
           <p:cNvPr id="6" name="슬라이드 번호 개체 틀 5">
             <a:extLst>
               <a:ext uri="{FF2B5EF4-FFF2-40B4-BE49-F238E27FC236}">
-                <a16:creationId xmlns:a16="http://schemas.microsoft.com/office/drawing/2014/main" id="{23A4C717-B01F-EE3E-C5AF-4492644E2C8A}"/>
+                <a16:creationId xmlns:a16="http://schemas.microsoft.com/office/drawing/2014/main" id="{E7061F9E-8263-7D30-751E-4A6D330DA92D}"/>
               </a:ext>
             </a:extLst>
           </p:cNvPr>
@@ -910,7 +910,7 @@
           <a:bodyPr/>
           <a:lstStyle/>
           <a:p>
-            <a:fld id="{F6AA6F9A-BD14-43E8-81A1-DCF1143462DC}" type="slidenum">
+            <a:fld id="{7094CA29-903E-416B-B4F8-08BD32F466F4}" type="slidenum">
               <a:rPr lang="ko-KR" altLang="en-US" smtClean="0"/>
               <a:t>‹#›</a:t>
             </a:fld>
@@ -921,7 +921,7 @@
     </p:spTree>
     <p:extLst>
       <p:ext uri="{BB962C8B-B14F-4D97-AF65-F5344CB8AC3E}">
-        <p14:creationId xmlns:p14="http://schemas.microsoft.com/office/powerpoint/2010/main" val="782891400"/>
+        <p14:creationId xmlns:p14="http://schemas.microsoft.com/office/powerpoint/2010/main" val="3166367197"/>
       </p:ext>
     </p:extLst>
   </p:cSld>
@@ -953,7 +953,7 @@
           <p:cNvPr id="2" name="제목 1">
             <a:extLst>
               <a:ext uri="{FF2B5EF4-FFF2-40B4-BE49-F238E27FC236}">
-                <a16:creationId xmlns:a16="http://schemas.microsoft.com/office/drawing/2014/main" id="{8F1D3C10-B8D6-F3D4-136E-9A1A897183F8}"/>
+                <a16:creationId xmlns:a16="http://schemas.microsoft.com/office/drawing/2014/main" id="{C1C3A4D6-ECB3-9010-B150-ADEC394F0A0F}"/>
               </a:ext>
             </a:extLst>
           </p:cNvPr>
@@ -990,7 +990,7 @@
           <p:cNvPr id="3" name="텍스트 개체 틀 2">
             <a:extLst>
               <a:ext uri="{FF2B5EF4-FFF2-40B4-BE49-F238E27FC236}">
-                <a16:creationId xmlns:a16="http://schemas.microsoft.com/office/drawing/2014/main" id="{C8E1CEB6-BE5F-39F7-C48C-105B5C8F279C}"/>
+                <a16:creationId xmlns:a16="http://schemas.microsoft.com/office/drawing/2014/main" id="{1E70F710-5B72-A1D2-9508-BA40275AD20B}"/>
               </a:ext>
             </a:extLst>
           </p:cNvPr>
@@ -1115,7 +1115,7 @@
           <p:cNvPr id="4" name="날짜 개체 틀 3">
             <a:extLst>
               <a:ext uri="{FF2B5EF4-FFF2-40B4-BE49-F238E27FC236}">
-                <a16:creationId xmlns:a16="http://schemas.microsoft.com/office/drawing/2014/main" id="{53CF2C27-5ADD-CB36-19C7-D5BB81A06F43}"/>
+                <a16:creationId xmlns:a16="http://schemas.microsoft.com/office/drawing/2014/main" id="{B673F21C-9D0D-F6AE-5DDA-EF41F5D92ED6}"/>
               </a:ext>
             </a:extLst>
           </p:cNvPr>
@@ -1131,9 +1131,9 @@
           <a:bodyPr/>
           <a:lstStyle/>
           <a:p>
-            <a:fld id="{1C554CDD-2511-4C84-938F-E8C857FD2168}" type="datetimeFigureOut">
+            <a:fld id="{49C3E51C-15A2-46D9-AFCB-7CCC968858FD}" type="datetimeFigureOut">
               <a:rPr lang="ko-KR" altLang="en-US" smtClean="0"/>
-              <a:t>2026-06-24</a:t>
+              <a:t>2026-06-25</a:t>
             </a:fld>
             <a:endParaRPr lang="ko-KR" altLang="en-US"/>
           </a:p>
@@ -1144,7 +1144,7 @@
           <p:cNvPr id="5" name="바닥글 개체 틀 4">
             <a:extLst>
               <a:ext uri="{FF2B5EF4-FFF2-40B4-BE49-F238E27FC236}">
-                <a16:creationId xmlns:a16="http://schemas.microsoft.com/office/drawing/2014/main" id="{1D0FFF65-FEF9-F859-12EC-2ACCD4DBB335}"/>
+                <a16:creationId xmlns:a16="http://schemas.microsoft.com/office/drawing/2014/main" id="{01E64C03-198B-512D-0415-4F24158FC972}"/>
               </a:ext>
             </a:extLst>
           </p:cNvPr>
@@ -1169,7 +1169,7 @@
           <p:cNvPr id="6" name="슬라이드 번호 개체 틀 5">
             <a:extLst>
               <a:ext uri="{FF2B5EF4-FFF2-40B4-BE49-F238E27FC236}">
-                <a16:creationId xmlns:a16="http://schemas.microsoft.com/office/drawing/2014/main" id="{BF60C091-8F7B-7FD5-58AE-EFB62FC31372}"/>
+                <a16:creationId xmlns:a16="http://schemas.microsoft.com/office/drawing/2014/main" id="{C6CAF0B7-3C31-78DD-668B-EF4CFDBECF95}"/>
               </a:ext>
             </a:extLst>
           </p:cNvPr>
@@ -1185,7 +1185,7 @@
           <a:bodyPr/>
           <a:lstStyle/>
           <a:p>
-            <a:fld id="{F6AA6F9A-BD14-43E8-81A1-DCF1143462DC}" type="slidenum">
+            <a:fld id="{7094CA29-903E-416B-B4F8-08BD32F466F4}" type="slidenum">
               <a:rPr lang="ko-KR" altLang="en-US" smtClean="0"/>
               <a:t>‹#›</a:t>
             </a:fld>
@@ -1196,7 +1196,7 @@
     </p:spTree>
     <p:extLst>
       <p:ext uri="{BB962C8B-B14F-4D97-AF65-F5344CB8AC3E}">
-        <p14:creationId xmlns:p14="http://schemas.microsoft.com/office/powerpoint/2010/main" val="2690760853"/>
+        <p14:creationId xmlns:p14="http://schemas.microsoft.com/office/powerpoint/2010/main" val="935411767"/>
       </p:ext>
     </p:extLst>
   </p:cSld>
@@ -1228,7 +1228,7 @@
           <p:cNvPr id="2" name="제목 1">
             <a:extLst>
               <a:ext uri="{FF2B5EF4-FFF2-40B4-BE49-F238E27FC236}">
-                <a16:creationId xmlns:a16="http://schemas.microsoft.com/office/drawing/2014/main" id="{1CDD7F1D-672D-626E-E506-9AC6AE6F5193}"/>
+                <a16:creationId xmlns:a16="http://schemas.microsoft.com/office/drawing/2014/main" id="{75D42DC9-FE6C-CACC-CA7D-7A743E9ACC74}"/>
               </a:ext>
             </a:extLst>
           </p:cNvPr>
@@ -1256,7 +1256,7 @@
           <p:cNvPr id="3" name="내용 개체 틀 2">
             <a:extLst>
               <a:ext uri="{FF2B5EF4-FFF2-40B4-BE49-F238E27FC236}">
-                <a16:creationId xmlns:a16="http://schemas.microsoft.com/office/drawing/2014/main" id="{A20BD8D4-0BFF-6481-E476-8150D5ABEECB}"/>
+                <a16:creationId xmlns:a16="http://schemas.microsoft.com/office/drawing/2014/main" id="{396C3FF6-11C6-45A1-BE90-C1F15DF2BFD5}"/>
               </a:ext>
             </a:extLst>
           </p:cNvPr>
@@ -1318,7 +1318,7 @@
           <p:cNvPr id="4" name="내용 개체 틀 3">
             <a:extLst>
               <a:ext uri="{FF2B5EF4-FFF2-40B4-BE49-F238E27FC236}">
-                <a16:creationId xmlns:a16="http://schemas.microsoft.com/office/drawing/2014/main" id="{6C69F7C8-5492-B4D6-3ADE-0DF5E6F400F6}"/>
+                <a16:creationId xmlns:a16="http://schemas.microsoft.com/office/drawing/2014/main" id="{FA6FD32F-FB91-A496-1330-F36D9E5A1F66}"/>
               </a:ext>
             </a:extLst>
           </p:cNvPr>
@@ -1380,7 +1380,7 @@
           <p:cNvPr id="5" name="날짜 개체 틀 4">
             <a:extLst>
               <a:ext uri="{FF2B5EF4-FFF2-40B4-BE49-F238E27FC236}">
-                <a16:creationId xmlns:a16="http://schemas.microsoft.com/office/drawing/2014/main" id="{06B38AE6-6B4E-A2A6-674D-FDD419BB6B40}"/>
+                <a16:creationId xmlns:a16="http://schemas.microsoft.com/office/drawing/2014/main" id="{F8EFBE88-B6ED-8794-FD6C-608D3114A553}"/>
               </a:ext>
             </a:extLst>
           </p:cNvPr>
@@ -1396,9 +1396,9 @@
           <a:bodyPr/>
           <a:lstStyle/>
           <a:p>
-            <a:fld id="{1C554CDD-2511-4C84-938F-E8C857FD2168}" type="datetimeFigureOut">
+            <a:fld id="{49C3E51C-15A2-46D9-AFCB-7CCC968858FD}" type="datetimeFigureOut">
               <a:rPr lang="ko-KR" altLang="en-US" smtClean="0"/>
-              <a:t>2026-06-24</a:t>
+              <a:t>2026-06-25</a:t>
             </a:fld>
             <a:endParaRPr lang="ko-KR" altLang="en-US"/>
           </a:p>
@@ -1409,7 +1409,7 @@
           <p:cNvPr id="6" name="바닥글 개체 틀 5">
             <a:extLst>
               <a:ext uri="{FF2B5EF4-FFF2-40B4-BE49-F238E27FC236}">
-                <a16:creationId xmlns:a16="http://schemas.microsoft.com/office/drawing/2014/main" id="{29082CB9-AFF4-D593-46D0-823DE207F07D}"/>
+                <a16:creationId xmlns:a16="http://schemas.microsoft.com/office/drawing/2014/main" id="{ABB96DD3-A9A7-6C26-015E-F3BF4E8A36A5}"/>
               </a:ext>
             </a:extLst>
           </p:cNvPr>
@@ -1434,7 +1434,7 @@
           <p:cNvPr id="7" name="슬라이드 번호 개체 틀 6">
             <a:extLst>
               <a:ext uri="{FF2B5EF4-FFF2-40B4-BE49-F238E27FC236}">
-                <a16:creationId xmlns:a16="http://schemas.microsoft.com/office/drawing/2014/main" id="{5BC84236-4E8B-09DD-E77C-4C73B11C327B}"/>
+                <a16:creationId xmlns:a16="http://schemas.microsoft.com/office/drawing/2014/main" id="{9349D048-AFCA-0B2F-E218-9790CFEEB208}"/>
               </a:ext>
             </a:extLst>
           </p:cNvPr>
@@ -1450,7 +1450,7 @@
           <a:bodyPr/>
           <a:lstStyle/>
           <a:p>
-            <a:fld id="{F6AA6F9A-BD14-43E8-81A1-DCF1143462DC}" type="slidenum">
+            <a:fld id="{7094CA29-903E-416B-B4F8-08BD32F466F4}" type="slidenum">
               <a:rPr lang="ko-KR" altLang="en-US" smtClean="0"/>
               <a:t>‹#›</a:t>
             </a:fld>
@@ -1461,7 +1461,7 @@
     </p:spTree>
     <p:extLst>
       <p:ext uri="{BB962C8B-B14F-4D97-AF65-F5344CB8AC3E}">
-        <p14:creationId xmlns:p14="http://schemas.microsoft.com/office/powerpoint/2010/main" val="2135384337"/>
+        <p14:creationId xmlns:p14="http://schemas.microsoft.com/office/powerpoint/2010/main" val="2076642603"/>
       </p:ext>
     </p:extLst>
   </p:cSld>
@@ -1493,7 +1493,7 @@
           <p:cNvPr id="2" name="제목 1">
             <a:extLst>
               <a:ext uri="{FF2B5EF4-FFF2-40B4-BE49-F238E27FC236}">
-                <a16:creationId xmlns:a16="http://schemas.microsoft.com/office/drawing/2014/main" id="{82887BA4-E64C-1E5C-1496-412A872CEFA2}"/>
+                <a16:creationId xmlns:a16="http://schemas.microsoft.com/office/drawing/2014/main" id="{4888639B-A5D9-D59D-1E9C-28A98E02A1D5}"/>
               </a:ext>
             </a:extLst>
           </p:cNvPr>
@@ -1526,7 +1526,7 @@
           <p:cNvPr id="3" name="텍스트 개체 틀 2">
             <a:extLst>
               <a:ext uri="{FF2B5EF4-FFF2-40B4-BE49-F238E27FC236}">
-                <a16:creationId xmlns:a16="http://schemas.microsoft.com/office/drawing/2014/main" id="{B8FB4D42-28BA-0619-3B53-8AF2EA35D510}"/>
+                <a16:creationId xmlns:a16="http://schemas.microsoft.com/office/drawing/2014/main" id="{E1AA1F47-EFA9-A52A-C8F5-7720F8D6BC4F}"/>
               </a:ext>
             </a:extLst>
           </p:cNvPr>
@@ -1597,7 +1597,7 @@
           <p:cNvPr id="4" name="내용 개체 틀 3">
             <a:extLst>
               <a:ext uri="{FF2B5EF4-FFF2-40B4-BE49-F238E27FC236}">
-                <a16:creationId xmlns:a16="http://schemas.microsoft.com/office/drawing/2014/main" id="{9974B58D-5D3F-B73A-416E-DCDDF0205BF8}"/>
+                <a16:creationId xmlns:a16="http://schemas.microsoft.com/office/drawing/2014/main" id="{60643836-6F2B-D1D0-C743-1C7A9A6AD4BA}"/>
               </a:ext>
             </a:extLst>
           </p:cNvPr>
@@ -1659,7 +1659,7 @@
           <p:cNvPr id="5" name="텍스트 개체 틀 4">
             <a:extLst>
               <a:ext uri="{FF2B5EF4-FFF2-40B4-BE49-F238E27FC236}">
-                <a16:creationId xmlns:a16="http://schemas.microsoft.com/office/drawing/2014/main" id="{988F059A-358A-CE61-17C0-30BC4EFC8460}"/>
+                <a16:creationId xmlns:a16="http://schemas.microsoft.com/office/drawing/2014/main" id="{BBAF013D-EC54-95D7-D375-C0E944E1BDB4}"/>
               </a:ext>
             </a:extLst>
           </p:cNvPr>
@@ -1730,7 +1730,7 @@
           <p:cNvPr id="6" name="내용 개체 틀 5">
             <a:extLst>
               <a:ext uri="{FF2B5EF4-FFF2-40B4-BE49-F238E27FC236}">
-                <a16:creationId xmlns:a16="http://schemas.microsoft.com/office/drawing/2014/main" id="{A6E55FDB-4E24-0AB5-9839-6276D03CDE4D}"/>
+                <a16:creationId xmlns:a16="http://schemas.microsoft.com/office/drawing/2014/main" id="{296BC156-D1AA-47B5-E724-FF2BB289B048}"/>
               </a:ext>
             </a:extLst>
           </p:cNvPr>
@@ -1792,7 +1792,7 @@
           <p:cNvPr id="7" name="날짜 개체 틀 6">
             <a:extLst>
               <a:ext uri="{FF2B5EF4-FFF2-40B4-BE49-F238E27FC236}">
-                <a16:creationId xmlns:a16="http://schemas.microsoft.com/office/drawing/2014/main" id="{55B64094-62DD-6C9A-B5CE-1E037AE215E4}"/>
+                <a16:creationId xmlns:a16="http://schemas.microsoft.com/office/drawing/2014/main" id="{973311B4-F702-A0DB-DDA8-71A06F8E3890}"/>
               </a:ext>
             </a:extLst>
           </p:cNvPr>
@@ -1808,9 +1808,9 @@
           <a:bodyPr/>
           <a:lstStyle/>
           <a:p>
-            <a:fld id="{1C554CDD-2511-4C84-938F-E8C857FD2168}" type="datetimeFigureOut">
+            <a:fld id="{49C3E51C-15A2-46D9-AFCB-7CCC968858FD}" type="datetimeFigureOut">
               <a:rPr lang="ko-KR" altLang="en-US" smtClean="0"/>
-              <a:t>2026-06-24</a:t>
+              <a:t>2026-06-25</a:t>
             </a:fld>
             <a:endParaRPr lang="ko-KR" altLang="en-US"/>
           </a:p>
@@ -1821,7 +1821,7 @@
           <p:cNvPr id="8" name="바닥글 개체 틀 7">
             <a:extLst>
               <a:ext uri="{FF2B5EF4-FFF2-40B4-BE49-F238E27FC236}">
-                <a16:creationId xmlns:a16="http://schemas.microsoft.com/office/drawing/2014/main" id="{A2DB02CB-B475-D37E-8923-0F4C89864BD1}"/>
+                <a16:creationId xmlns:a16="http://schemas.microsoft.com/office/drawing/2014/main" id="{1A23887E-3FBE-0D0F-E8BD-D28665E535B8}"/>
               </a:ext>
             </a:extLst>
           </p:cNvPr>
@@ -1846,7 +1846,7 @@
           <p:cNvPr id="9" name="슬라이드 번호 개체 틀 8">
             <a:extLst>
               <a:ext uri="{FF2B5EF4-FFF2-40B4-BE49-F238E27FC236}">
-                <a16:creationId xmlns:a16="http://schemas.microsoft.com/office/drawing/2014/main" id="{810D1F6F-7861-9ADE-EA76-B73E6A33D720}"/>
+                <a16:creationId xmlns:a16="http://schemas.microsoft.com/office/drawing/2014/main" id="{DDE940C4-EB75-FEA7-E92C-72EADA56649F}"/>
               </a:ext>
             </a:extLst>
           </p:cNvPr>
@@ -1862,7 +1862,7 @@
           <a:bodyPr/>
           <a:lstStyle/>
           <a:p>
-            <a:fld id="{F6AA6F9A-BD14-43E8-81A1-DCF1143462DC}" type="slidenum">
+            <a:fld id="{7094CA29-903E-416B-B4F8-08BD32F466F4}" type="slidenum">
               <a:rPr lang="ko-KR" altLang="en-US" smtClean="0"/>
               <a:t>‹#›</a:t>
             </a:fld>
@@ -1873,7 +1873,7 @@
     </p:spTree>
     <p:extLst>
       <p:ext uri="{BB962C8B-B14F-4D97-AF65-F5344CB8AC3E}">
-        <p14:creationId xmlns:p14="http://schemas.microsoft.com/office/powerpoint/2010/main" val="1152879265"/>
+        <p14:creationId xmlns:p14="http://schemas.microsoft.com/office/powerpoint/2010/main" val="4277789122"/>
       </p:ext>
     </p:extLst>
   </p:cSld>
@@ -1905,7 +1905,7 @@
           <p:cNvPr id="2" name="제목 1">
             <a:extLst>
               <a:ext uri="{FF2B5EF4-FFF2-40B4-BE49-F238E27FC236}">
-                <a16:creationId xmlns:a16="http://schemas.microsoft.com/office/drawing/2014/main" id="{013C6A84-6103-B628-F1CE-9D6314B5C457}"/>
+                <a16:creationId xmlns:a16="http://schemas.microsoft.com/office/drawing/2014/main" id="{7FB8D6A4-62F3-92BC-F2DD-D081DBA7BC8E}"/>
               </a:ext>
             </a:extLst>
           </p:cNvPr>
@@ -1933,7 +1933,7 @@
           <p:cNvPr id="3" name="날짜 개체 틀 2">
             <a:extLst>
               <a:ext uri="{FF2B5EF4-FFF2-40B4-BE49-F238E27FC236}">
-                <a16:creationId xmlns:a16="http://schemas.microsoft.com/office/drawing/2014/main" id="{92BF475D-9968-AE0B-21D1-CC7E5AC3CC6F}"/>
+                <a16:creationId xmlns:a16="http://schemas.microsoft.com/office/drawing/2014/main" id="{C346839C-8DD7-0D6D-BA87-CDE6AC7E7CF5}"/>
               </a:ext>
             </a:extLst>
           </p:cNvPr>
@@ -1949,9 +1949,9 @@
           <a:bodyPr/>
           <a:lstStyle/>
           <a:p>
-            <a:fld id="{1C554CDD-2511-4C84-938F-E8C857FD2168}" type="datetimeFigureOut">
+            <a:fld id="{49C3E51C-15A2-46D9-AFCB-7CCC968858FD}" type="datetimeFigureOut">
               <a:rPr lang="ko-KR" altLang="en-US" smtClean="0"/>
-              <a:t>2026-06-24</a:t>
+              <a:t>2026-06-25</a:t>
             </a:fld>
             <a:endParaRPr lang="ko-KR" altLang="en-US"/>
           </a:p>
@@ -1962,7 +1962,7 @@
           <p:cNvPr id="4" name="바닥글 개체 틀 3">
             <a:extLst>
               <a:ext uri="{FF2B5EF4-FFF2-40B4-BE49-F238E27FC236}">
-                <a16:creationId xmlns:a16="http://schemas.microsoft.com/office/drawing/2014/main" id="{C5111727-50DC-C1F7-8B7F-A320E5190B83}"/>
+                <a16:creationId xmlns:a16="http://schemas.microsoft.com/office/drawing/2014/main" id="{0CCEBD9F-2BF5-7960-CD4C-FB0EC4B95F00}"/>
               </a:ext>
             </a:extLst>
           </p:cNvPr>
@@ -1987,7 +1987,7 @@
           <p:cNvPr id="5" name="슬라이드 번호 개체 틀 4">
             <a:extLst>
               <a:ext uri="{FF2B5EF4-FFF2-40B4-BE49-F238E27FC236}">
-                <a16:creationId xmlns:a16="http://schemas.microsoft.com/office/drawing/2014/main" id="{0EC0E580-C055-0E7E-B848-F3318A263499}"/>
+                <a16:creationId xmlns:a16="http://schemas.microsoft.com/office/drawing/2014/main" id="{8AA99425-A5C6-D185-2BB7-A0CFA193D27F}"/>
               </a:ext>
             </a:extLst>
           </p:cNvPr>
@@ -2003,7 +2003,7 @@
           <a:bodyPr/>
           <a:lstStyle/>
           <a:p>
-            <a:fld id="{F6AA6F9A-BD14-43E8-81A1-DCF1143462DC}" type="slidenum">
+            <a:fld id="{7094CA29-903E-416B-B4F8-08BD32F466F4}" type="slidenum">
               <a:rPr lang="ko-KR" altLang="en-US" smtClean="0"/>
               <a:t>‹#›</a:t>
             </a:fld>
@@ -2014,7 +2014,7 @@
     </p:spTree>
     <p:extLst>
       <p:ext uri="{BB962C8B-B14F-4D97-AF65-F5344CB8AC3E}">
-        <p14:creationId xmlns:p14="http://schemas.microsoft.com/office/powerpoint/2010/main" val="2417131329"/>
+        <p14:creationId xmlns:p14="http://schemas.microsoft.com/office/powerpoint/2010/main" val="1975102571"/>
       </p:ext>
     </p:extLst>
   </p:cSld>
@@ -2046,7 +2046,7 @@
           <p:cNvPr id="2" name="날짜 개체 틀 1">
             <a:extLst>
               <a:ext uri="{FF2B5EF4-FFF2-40B4-BE49-F238E27FC236}">
-                <a16:creationId xmlns:a16="http://schemas.microsoft.com/office/drawing/2014/main" id="{9944C1C1-D45D-52AA-D9D0-33CE6F2384AA}"/>
+                <a16:creationId xmlns:a16="http://schemas.microsoft.com/office/drawing/2014/main" id="{870A9E26-0D31-5E8C-EC0F-62186E7D9A5E}"/>
               </a:ext>
             </a:extLst>
           </p:cNvPr>
@@ -2062,9 +2062,9 @@
           <a:bodyPr/>
           <a:lstStyle/>
           <a:p>
-            <a:fld id="{1C554CDD-2511-4C84-938F-E8C857FD2168}" type="datetimeFigureOut">
+            <a:fld id="{49C3E51C-15A2-46D9-AFCB-7CCC968858FD}" type="datetimeFigureOut">
               <a:rPr lang="ko-KR" altLang="en-US" smtClean="0"/>
-              <a:t>2026-06-24</a:t>
+              <a:t>2026-06-25</a:t>
             </a:fld>
             <a:endParaRPr lang="ko-KR" altLang="en-US"/>
           </a:p>
@@ -2075,7 +2075,7 @@
           <p:cNvPr id="3" name="바닥글 개체 틀 2">
             <a:extLst>
               <a:ext uri="{FF2B5EF4-FFF2-40B4-BE49-F238E27FC236}">
-                <a16:creationId xmlns:a16="http://schemas.microsoft.com/office/drawing/2014/main" id="{D9D9624E-7FA2-32FE-DBFF-991078ECF210}"/>
+                <a16:creationId xmlns:a16="http://schemas.microsoft.com/office/drawing/2014/main" id="{481285F8-2BD7-4D95-47F9-E04F7A4BCD24}"/>
               </a:ext>
             </a:extLst>
           </p:cNvPr>
@@ -2100,7 +2100,7 @@
           <p:cNvPr id="4" name="슬라이드 번호 개체 틀 3">
             <a:extLst>
               <a:ext uri="{FF2B5EF4-FFF2-40B4-BE49-F238E27FC236}">
-                <a16:creationId xmlns:a16="http://schemas.microsoft.com/office/drawing/2014/main" id="{3A3A1E20-24C6-E907-1DDD-2DD24C2C123E}"/>
+                <a16:creationId xmlns:a16="http://schemas.microsoft.com/office/drawing/2014/main" id="{5F78C6C7-ADB2-E9E6-9CE5-EB90DC9D8072}"/>
               </a:ext>
             </a:extLst>
           </p:cNvPr>
@@ -2116,7 +2116,7 @@
           <a:bodyPr/>
           <a:lstStyle/>
           <a:p>
-            <a:fld id="{F6AA6F9A-BD14-43E8-81A1-DCF1143462DC}" type="slidenum">
+            <a:fld id="{7094CA29-903E-416B-B4F8-08BD32F466F4}" type="slidenum">
               <a:rPr lang="ko-KR" altLang="en-US" smtClean="0"/>
               <a:t>‹#›</a:t>
             </a:fld>
@@ -2127,7 +2127,7 @@
     </p:spTree>
     <p:extLst>
       <p:ext uri="{BB962C8B-B14F-4D97-AF65-F5344CB8AC3E}">
-        <p14:creationId xmlns:p14="http://schemas.microsoft.com/office/powerpoint/2010/main" val="3883286588"/>
+        <p14:creationId xmlns:p14="http://schemas.microsoft.com/office/powerpoint/2010/main" val="1555379540"/>
       </p:ext>
     </p:extLst>
   </p:cSld>
@@ -2159,7 +2159,7 @@
           <p:cNvPr id="2" name="제목 1">
             <a:extLst>
               <a:ext uri="{FF2B5EF4-FFF2-40B4-BE49-F238E27FC236}">
-                <a16:creationId xmlns:a16="http://schemas.microsoft.com/office/drawing/2014/main" id="{38D08758-AA65-7ADE-F64E-E21DF756B696}"/>
+                <a16:creationId xmlns:a16="http://schemas.microsoft.com/office/drawing/2014/main" id="{38128F82-C072-A88A-6534-99695690D09D}"/>
               </a:ext>
             </a:extLst>
           </p:cNvPr>
@@ -2196,7 +2196,7 @@
           <p:cNvPr id="3" name="내용 개체 틀 2">
             <a:extLst>
               <a:ext uri="{FF2B5EF4-FFF2-40B4-BE49-F238E27FC236}">
-                <a16:creationId xmlns:a16="http://schemas.microsoft.com/office/drawing/2014/main" id="{70678E70-B422-55FD-B9B4-85A80B2B4206}"/>
+                <a16:creationId xmlns:a16="http://schemas.microsoft.com/office/drawing/2014/main" id="{6AC184E8-E2F4-9F8F-D7DA-2B9DE29BE9DE}"/>
               </a:ext>
             </a:extLst>
           </p:cNvPr>
@@ -2286,7 +2286,7 @@
           <p:cNvPr id="4" name="텍스트 개체 틀 3">
             <a:extLst>
               <a:ext uri="{FF2B5EF4-FFF2-40B4-BE49-F238E27FC236}">
-                <a16:creationId xmlns:a16="http://schemas.microsoft.com/office/drawing/2014/main" id="{594A1DF3-4466-753E-83C7-566F81BBAE65}"/>
+                <a16:creationId xmlns:a16="http://schemas.microsoft.com/office/drawing/2014/main" id="{82B2A271-8E45-4A84-5553-6674F75A5A89}"/>
               </a:ext>
             </a:extLst>
           </p:cNvPr>
@@ -2357,7 +2357,7 @@
           <p:cNvPr id="5" name="날짜 개체 틀 4">
             <a:extLst>
               <a:ext uri="{FF2B5EF4-FFF2-40B4-BE49-F238E27FC236}">
-                <a16:creationId xmlns:a16="http://schemas.microsoft.com/office/drawing/2014/main" id="{35D95D50-4CBA-11FF-D57C-71554B1711D0}"/>
+                <a16:creationId xmlns:a16="http://schemas.microsoft.com/office/drawing/2014/main" id="{7B1E9240-8989-9BBC-4EB3-EB6582C2D759}"/>
               </a:ext>
             </a:extLst>
           </p:cNvPr>
@@ -2373,9 +2373,9 @@
           <a:bodyPr/>
           <a:lstStyle/>
           <a:p>
-            <a:fld id="{1C554CDD-2511-4C84-938F-E8C857FD2168}" type="datetimeFigureOut">
+            <a:fld id="{49C3E51C-15A2-46D9-AFCB-7CCC968858FD}" type="datetimeFigureOut">
               <a:rPr lang="ko-KR" altLang="en-US" smtClean="0"/>
-              <a:t>2026-06-24</a:t>
+              <a:t>2026-06-25</a:t>
             </a:fld>
             <a:endParaRPr lang="ko-KR" altLang="en-US"/>
           </a:p>
@@ -2386,7 +2386,7 @@
           <p:cNvPr id="6" name="바닥글 개체 틀 5">
             <a:extLst>
               <a:ext uri="{FF2B5EF4-FFF2-40B4-BE49-F238E27FC236}">
-                <a16:creationId xmlns:a16="http://schemas.microsoft.com/office/drawing/2014/main" id="{62AB5E5A-9B49-9D4B-E9E1-A3A8022EE552}"/>
+                <a16:creationId xmlns:a16="http://schemas.microsoft.com/office/drawing/2014/main" id="{81467B9F-6C7B-FEBE-7D24-F17C498D46E4}"/>
               </a:ext>
             </a:extLst>
           </p:cNvPr>
@@ -2411,7 +2411,7 @@
           <p:cNvPr id="7" name="슬라이드 번호 개체 틀 6">
             <a:extLst>
               <a:ext uri="{FF2B5EF4-FFF2-40B4-BE49-F238E27FC236}">
-                <a16:creationId xmlns:a16="http://schemas.microsoft.com/office/drawing/2014/main" id="{AE823482-AA09-C356-6371-5F4E0BE88F1E}"/>
+                <a16:creationId xmlns:a16="http://schemas.microsoft.com/office/drawing/2014/main" id="{736AF75B-D3F7-84BD-F325-6BC338A137FA}"/>
               </a:ext>
             </a:extLst>
           </p:cNvPr>
@@ -2427,7 +2427,7 @@
           <a:bodyPr/>
           <a:lstStyle/>
           <a:p>
-            <a:fld id="{F6AA6F9A-BD14-43E8-81A1-DCF1143462DC}" type="slidenum">
+            <a:fld id="{7094CA29-903E-416B-B4F8-08BD32F466F4}" type="slidenum">
               <a:rPr lang="ko-KR" altLang="en-US" smtClean="0"/>
               <a:t>‹#›</a:t>
             </a:fld>
@@ -2438,7 +2438,7 @@
     </p:spTree>
     <p:extLst>
       <p:ext uri="{BB962C8B-B14F-4D97-AF65-F5344CB8AC3E}">
-        <p14:creationId xmlns:p14="http://schemas.microsoft.com/office/powerpoint/2010/main" val="453071563"/>
+        <p14:creationId xmlns:p14="http://schemas.microsoft.com/office/powerpoint/2010/main" val="1319946233"/>
       </p:ext>
     </p:extLst>
   </p:cSld>
@@ -2470,7 +2470,7 @@
           <p:cNvPr id="2" name="제목 1">
             <a:extLst>
               <a:ext uri="{FF2B5EF4-FFF2-40B4-BE49-F238E27FC236}">
-                <a16:creationId xmlns:a16="http://schemas.microsoft.com/office/drawing/2014/main" id="{2B8B3F3E-8E18-3B5E-537D-9B4E62D44204}"/>
+                <a16:creationId xmlns:a16="http://schemas.microsoft.com/office/drawing/2014/main" id="{BDD887D1-45D0-9D96-0400-42A1C9EE57D6}"/>
               </a:ext>
             </a:extLst>
           </p:cNvPr>
@@ -2507,7 +2507,7 @@
           <p:cNvPr id="3" name="그림 개체 틀 2">
             <a:extLst>
               <a:ext uri="{FF2B5EF4-FFF2-40B4-BE49-F238E27FC236}">
-                <a16:creationId xmlns:a16="http://schemas.microsoft.com/office/drawing/2014/main" id="{DCDCC459-14A6-344C-DA60-58BDDF206CAA}"/>
+                <a16:creationId xmlns:a16="http://schemas.microsoft.com/office/drawing/2014/main" id="{F49A134A-107D-8331-3BA6-CF5CAE980A50}"/>
               </a:ext>
             </a:extLst>
           </p:cNvPr>
@@ -2574,7 +2574,7 @@
           <p:cNvPr id="4" name="텍스트 개체 틀 3">
             <a:extLst>
               <a:ext uri="{FF2B5EF4-FFF2-40B4-BE49-F238E27FC236}">
-                <a16:creationId xmlns:a16="http://schemas.microsoft.com/office/drawing/2014/main" id="{0865A49C-D7EC-3FFC-3FB1-96417A2DA4D6}"/>
+                <a16:creationId xmlns:a16="http://schemas.microsoft.com/office/drawing/2014/main" id="{DD0F53F6-8421-9A16-E747-C358D858F518}"/>
               </a:ext>
             </a:extLst>
           </p:cNvPr>
@@ -2645,7 +2645,7 @@
           <p:cNvPr id="5" name="날짜 개체 틀 4">
             <a:extLst>
               <a:ext uri="{FF2B5EF4-FFF2-40B4-BE49-F238E27FC236}">
-                <a16:creationId xmlns:a16="http://schemas.microsoft.com/office/drawing/2014/main" id="{9A6D87E3-AE9D-2BE7-D4E3-D0BE4B24BF15}"/>
+                <a16:creationId xmlns:a16="http://schemas.microsoft.com/office/drawing/2014/main" id="{818AF3FF-0D1B-EF54-A81E-1B224D2A4748}"/>
               </a:ext>
             </a:extLst>
           </p:cNvPr>
@@ -2661,9 +2661,9 @@
           <a:bodyPr/>
           <a:lstStyle/>
           <a:p>
-            <a:fld id="{1C554CDD-2511-4C84-938F-E8C857FD2168}" type="datetimeFigureOut">
+            <a:fld id="{49C3E51C-15A2-46D9-AFCB-7CCC968858FD}" type="datetimeFigureOut">
               <a:rPr lang="ko-KR" altLang="en-US" smtClean="0"/>
-              <a:t>2026-06-24</a:t>
+              <a:t>2026-06-25</a:t>
             </a:fld>
             <a:endParaRPr lang="ko-KR" altLang="en-US"/>
           </a:p>
@@ -2674,7 +2674,7 @@
           <p:cNvPr id="6" name="바닥글 개체 틀 5">
             <a:extLst>
               <a:ext uri="{FF2B5EF4-FFF2-40B4-BE49-F238E27FC236}">
-                <a16:creationId xmlns:a16="http://schemas.microsoft.com/office/drawing/2014/main" id="{D4A626E5-CD22-C252-FB36-A9365BC3C7FD}"/>
+                <a16:creationId xmlns:a16="http://schemas.microsoft.com/office/drawing/2014/main" id="{107AA806-6266-5903-D961-0B4CA3D4F5A4}"/>
               </a:ext>
             </a:extLst>
           </p:cNvPr>
@@ -2699,7 +2699,7 @@
           <p:cNvPr id="7" name="슬라이드 번호 개체 틀 6">
             <a:extLst>
               <a:ext uri="{FF2B5EF4-FFF2-40B4-BE49-F238E27FC236}">
-                <a16:creationId xmlns:a16="http://schemas.microsoft.com/office/drawing/2014/main" id="{4BF70B85-4ACF-37DF-B108-2B88742F7B8F}"/>
+                <a16:creationId xmlns:a16="http://schemas.microsoft.com/office/drawing/2014/main" id="{87C0D7B0-D0BE-3B8B-D490-7D09E48A10F0}"/>
               </a:ext>
             </a:extLst>
           </p:cNvPr>
@@ -2715,7 +2715,7 @@
           <a:bodyPr/>
           <a:lstStyle/>
           <a:p>
-            <a:fld id="{F6AA6F9A-BD14-43E8-81A1-DCF1143462DC}" type="slidenum">
+            <a:fld id="{7094CA29-903E-416B-B4F8-08BD32F466F4}" type="slidenum">
               <a:rPr lang="ko-KR" altLang="en-US" smtClean="0"/>
               <a:t>‹#›</a:t>
             </a:fld>
@@ -2726,7 +2726,7 @@
     </p:spTree>
     <p:extLst>
       <p:ext uri="{BB962C8B-B14F-4D97-AF65-F5344CB8AC3E}">
-        <p14:creationId xmlns:p14="http://schemas.microsoft.com/office/powerpoint/2010/main" val="1828858235"/>
+        <p14:creationId xmlns:p14="http://schemas.microsoft.com/office/powerpoint/2010/main" val="4191599011"/>
       </p:ext>
     </p:extLst>
   </p:cSld>
@@ -2763,7 +2763,7 @@
           <p:cNvPr id="2" name="제목 개체 틀 1">
             <a:extLst>
               <a:ext uri="{FF2B5EF4-FFF2-40B4-BE49-F238E27FC236}">
-                <a16:creationId xmlns:a16="http://schemas.microsoft.com/office/drawing/2014/main" id="{C25DCED9-0C47-E5E1-CDF0-CA7318AD5D89}"/>
+                <a16:creationId xmlns:a16="http://schemas.microsoft.com/office/drawing/2014/main" id="{DD634A5C-8207-B4B7-FB30-F05CD53C4384}"/>
               </a:ext>
             </a:extLst>
           </p:cNvPr>
@@ -2801,7 +2801,7 @@
           <p:cNvPr id="3" name="텍스트 개체 틀 2">
             <a:extLst>
               <a:ext uri="{FF2B5EF4-FFF2-40B4-BE49-F238E27FC236}">
-                <a16:creationId xmlns:a16="http://schemas.microsoft.com/office/drawing/2014/main" id="{C5593AD9-C64F-AE3C-5D10-B247C3FCC5F7}"/>
+                <a16:creationId xmlns:a16="http://schemas.microsoft.com/office/drawing/2014/main" id="{F42C8923-4B78-94CB-9C90-44B76859E05D}"/>
               </a:ext>
             </a:extLst>
           </p:cNvPr>
@@ -2868,7 +2868,7 @@
           <p:cNvPr id="4" name="날짜 개체 틀 3">
             <a:extLst>
               <a:ext uri="{FF2B5EF4-FFF2-40B4-BE49-F238E27FC236}">
-                <a16:creationId xmlns:a16="http://schemas.microsoft.com/office/drawing/2014/main" id="{D7152DCA-0CDB-9BFB-2C9A-559A12A0DC49}"/>
+                <a16:creationId xmlns:a16="http://schemas.microsoft.com/office/drawing/2014/main" id="{165A624D-AB15-D6B9-FEC2-7AF91C4ED02D}"/>
               </a:ext>
             </a:extLst>
           </p:cNvPr>
@@ -2902,9 +2902,9 @@
             </a:lvl1pPr>
           </a:lstStyle>
           <a:p>
-            <a:fld id="{1C554CDD-2511-4C84-938F-E8C857FD2168}" type="datetimeFigureOut">
+            <a:fld id="{49C3E51C-15A2-46D9-AFCB-7CCC968858FD}" type="datetimeFigureOut">
               <a:rPr lang="ko-KR" altLang="en-US" smtClean="0"/>
-              <a:t>2026-06-24</a:t>
+              <a:t>2026-06-25</a:t>
             </a:fld>
             <a:endParaRPr lang="ko-KR" altLang="en-US"/>
           </a:p>
@@ -2915,7 +2915,7 @@
           <p:cNvPr id="5" name="바닥글 개체 틀 4">
             <a:extLst>
               <a:ext uri="{FF2B5EF4-FFF2-40B4-BE49-F238E27FC236}">
-                <a16:creationId xmlns:a16="http://schemas.microsoft.com/office/drawing/2014/main" id="{70385857-926B-5046-D93D-2D46BCB947BD}"/>
+                <a16:creationId xmlns:a16="http://schemas.microsoft.com/office/drawing/2014/main" id="{716F8357-C609-2CB1-1C44-F0EB98887FE3}"/>
               </a:ext>
             </a:extLst>
           </p:cNvPr>
@@ -2958,7 +2958,7 @@
           <p:cNvPr id="6" name="슬라이드 번호 개체 틀 5">
             <a:extLst>
               <a:ext uri="{FF2B5EF4-FFF2-40B4-BE49-F238E27FC236}">
-                <a16:creationId xmlns:a16="http://schemas.microsoft.com/office/drawing/2014/main" id="{0B55873B-97BE-1F92-F1D3-47EB1DD76C93}"/>
+                <a16:creationId xmlns:a16="http://schemas.microsoft.com/office/drawing/2014/main" id="{61F4647B-344A-5110-8623-CACCF423B3D1}"/>
               </a:ext>
             </a:extLst>
           </p:cNvPr>
@@ -2992,7 +2992,7 @@
             </a:lvl1pPr>
           </a:lstStyle>
           <a:p>
-            <a:fld id="{F6AA6F9A-BD14-43E8-81A1-DCF1143462DC}" type="slidenum">
+            <a:fld id="{7094CA29-903E-416B-B4F8-08BD32F466F4}" type="slidenum">
               <a:rPr lang="ko-KR" altLang="en-US" smtClean="0"/>
               <a:t>‹#›</a:t>
             </a:fld>
@@ -3003,7 +3003,7 @@
     </p:spTree>
     <p:extLst>
       <p:ext uri="{BB962C8B-B14F-4D97-AF65-F5344CB8AC3E}">
-        <p14:creationId xmlns:p14="http://schemas.microsoft.com/office/powerpoint/2010/main" val="2730023898"/>
+        <p14:creationId xmlns:p14="http://schemas.microsoft.com/office/powerpoint/2010/main" val="463513639"/>
       </p:ext>
     </p:extLst>
   </p:cSld>
@@ -3326,7 +3326,7 @@
           <p:cNvPr id="3" name="그래픽 2">
             <a:extLst>
               <a:ext uri="{FF2B5EF4-FFF2-40B4-BE49-F238E27FC236}">
-                <a16:creationId xmlns:a16="http://schemas.microsoft.com/office/drawing/2014/main" id="{2CFB4E2E-B893-3546-29CB-CA61CB90F809}"/>
+                <a16:creationId xmlns:a16="http://schemas.microsoft.com/office/drawing/2014/main" id="{092EACE3-BA2E-3732-602F-DD70C12C3135}"/>
               </a:ext>
             </a:extLst>
           </p:cNvPr>
@@ -3360,7 +3360,7 @@
     </p:spTree>
     <p:extLst>
       <p:ext uri="{BB962C8B-B14F-4D97-AF65-F5344CB8AC3E}">
-        <p14:creationId xmlns:p14="http://schemas.microsoft.com/office/powerpoint/2010/main" val="2929025773"/>
+        <p14:creationId xmlns:p14="http://schemas.microsoft.com/office/powerpoint/2010/main" val="2810120878"/>
       </p:ext>
     </p:extLst>
   </p:cSld>

--- a/docs/assets/infographic-seed-gallery.pptx
+++ b/docs/assets/infographic-seed-gallery.pptx
@@ -129,7 +129,7 @@
           <p:cNvPr id="2" name="제목 1">
             <a:extLst>
               <a:ext uri="{FF2B5EF4-FFF2-40B4-BE49-F238E27FC236}">
-                <a16:creationId xmlns:a16="http://schemas.microsoft.com/office/drawing/2014/main" id="{2D8F1F6A-EBD0-44B1-DB3E-C9FBCA5F2F46}"/>
+                <a16:creationId xmlns:a16="http://schemas.microsoft.com/office/drawing/2014/main" id="{E2914201-EE04-4A40-0078-7FDE35E08084}"/>
               </a:ext>
             </a:extLst>
           </p:cNvPr>
@@ -166,7 +166,7 @@
           <p:cNvPr id="3" name="부제목 2">
             <a:extLst>
               <a:ext uri="{FF2B5EF4-FFF2-40B4-BE49-F238E27FC236}">
-                <a16:creationId xmlns:a16="http://schemas.microsoft.com/office/drawing/2014/main" id="{2DE75338-DB0B-C5E1-7957-1E98508DD8B2}"/>
+                <a16:creationId xmlns:a16="http://schemas.microsoft.com/office/drawing/2014/main" id="{C8C4A234-0C02-244A-3B80-47593E1D899A}"/>
               </a:ext>
             </a:extLst>
           </p:cNvPr>
@@ -236,7 +236,7 @@
           <p:cNvPr id="4" name="날짜 개체 틀 3">
             <a:extLst>
               <a:ext uri="{FF2B5EF4-FFF2-40B4-BE49-F238E27FC236}">
-                <a16:creationId xmlns:a16="http://schemas.microsoft.com/office/drawing/2014/main" id="{4BC5D106-6D14-93E7-5534-F7ED85EA47B8}"/>
+                <a16:creationId xmlns:a16="http://schemas.microsoft.com/office/drawing/2014/main" id="{C955B8DB-9D41-287C-1B9E-1650CF1739B8}"/>
               </a:ext>
             </a:extLst>
           </p:cNvPr>
@@ -252,9 +252,9 @@
           <a:bodyPr/>
           <a:lstStyle/>
           <a:p>
-            <a:fld id="{49C3E51C-15A2-46D9-AFCB-7CCC968858FD}" type="datetimeFigureOut">
+            <a:fld id="{EF81D23E-FA8B-4A2A-A9C1-6AC8F5F16A51}" type="datetimeFigureOut">
               <a:rPr lang="ko-KR" altLang="en-US" smtClean="0"/>
-              <a:t>2026-06-25</a:t>
+              <a:t>2026-06-27</a:t>
             </a:fld>
             <a:endParaRPr lang="ko-KR" altLang="en-US"/>
           </a:p>
@@ -265,7 +265,7 @@
           <p:cNvPr id="5" name="바닥글 개체 틀 4">
             <a:extLst>
               <a:ext uri="{FF2B5EF4-FFF2-40B4-BE49-F238E27FC236}">
-                <a16:creationId xmlns:a16="http://schemas.microsoft.com/office/drawing/2014/main" id="{7BA33F20-1C21-7F0B-77FD-BFB6ABE69E11}"/>
+                <a16:creationId xmlns:a16="http://schemas.microsoft.com/office/drawing/2014/main" id="{E5811450-0C61-7EC9-6E35-D11C760631D2}"/>
               </a:ext>
             </a:extLst>
           </p:cNvPr>
@@ -290,7 +290,7 @@
           <p:cNvPr id="6" name="슬라이드 번호 개체 틀 5">
             <a:extLst>
               <a:ext uri="{FF2B5EF4-FFF2-40B4-BE49-F238E27FC236}">
-                <a16:creationId xmlns:a16="http://schemas.microsoft.com/office/drawing/2014/main" id="{D618EF45-554E-26C6-3C87-B6E7562B9DE5}"/>
+                <a16:creationId xmlns:a16="http://schemas.microsoft.com/office/drawing/2014/main" id="{251B8A3A-1A5D-4033-3878-028E2831A838}"/>
               </a:ext>
             </a:extLst>
           </p:cNvPr>
@@ -306,7 +306,7 @@
           <a:bodyPr/>
           <a:lstStyle/>
           <a:p>
-            <a:fld id="{7094CA29-903E-416B-B4F8-08BD32F466F4}" type="slidenum">
+            <a:fld id="{3E112018-4EAF-4625-828D-E07EF995F25C}" type="slidenum">
               <a:rPr lang="ko-KR" altLang="en-US" smtClean="0"/>
               <a:t>‹#›</a:t>
             </a:fld>
@@ -317,7 +317,7 @@
     </p:spTree>
     <p:extLst>
       <p:ext uri="{BB962C8B-B14F-4D97-AF65-F5344CB8AC3E}">
-        <p14:creationId xmlns:p14="http://schemas.microsoft.com/office/powerpoint/2010/main" val="182196830"/>
+        <p14:creationId xmlns:p14="http://schemas.microsoft.com/office/powerpoint/2010/main" val="278845079"/>
       </p:ext>
     </p:extLst>
   </p:cSld>
@@ -349,7 +349,7 @@
           <p:cNvPr id="2" name="제목 1">
             <a:extLst>
               <a:ext uri="{FF2B5EF4-FFF2-40B4-BE49-F238E27FC236}">
-                <a16:creationId xmlns:a16="http://schemas.microsoft.com/office/drawing/2014/main" id="{EA093887-D580-6229-902B-140C1207E05F}"/>
+                <a16:creationId xmlns:a16="http://schemas.microsoft.com/office/drawing/2014/main" id="{2DED9B44-EE3F-34FB-D296-89A599C607EB}"/>
               </a:ext>
             </a:extLst>
           </p:cNvPr>
@@ -377,7 +377,7 @@
           <p:cNvPr id="3" name="세로 텍스트 개체 틀 2">
             <a:extLst>
               <a:ext uri="{FF2B5EF4-FFF2-40B4-BE49-F238E27FC236}">
-                <a16:creationId xmlns:a16="http://schemas.microsoft.com/office/drawing/2014/main" id="{78739333-BEC0-0F8E-4106-B0677DBF217B}"/>
+                <a16:creationId xmlns:a16="http://schemas.microsoft.com/office/drawing/2014/main" id="{0F5A65D5-1D9D-A41B-5F4D-F4ED9BE9ECD3}"/>
               </a:ext>
             </a:extLst>
           </p:cNvPr>
@@ -434,7 +434,7 @@
           <p:cNvPr id="4" name="날짜 개체 틀 3">
             <a:extLst>
               <a:ext uri="{FF2B5EF4-FFF2-40B4-BE49-F238E27FC236}">
-                <a16:creationId xmlns:a16="http://schemas.microsoft.com/office/drawing/2014/main" id="{C416678F-C841-6D00-8FCC-D533D8F49AE0}"/>
+                <a16:creationId xmlns:a16="http://schemas.microsoft.com/office/drawing/2014/main" id="{136295F7-0E16-4F05-003E-8BFAC5A83FF0}"/>
               </a:ext>
             </a:extLst>
           </p:cNvPr>
@@ -450,9 +450,9 @@
           <a:bodyPr/>
           <a:lstStyle/>
           <a:p>
-            <a:fld id="{49C3E51C-15A2-46D9-AFCB-7CCC968858FD}" type="datetimeFigureOut">
+            <a:fld id="{EF81D23E-FA8B-4A2A-A9C1-6AC8F5F16A51}" type="datetimeFigureOut">
               <a:rPr lang="ko-KR" altLang="en-US" smtClean="0"/>
-              <a:t>2026-06-25</a:t>
+              <a:t>2026-06-27</a:t>
             </a:fld>
             <a:endParaRPr lang="ko-KR" altLang="en-US"/>
           </a:p>
@@ -463,7 +463,7 @@
           <p:cNvPr id="5" name="바닥글 개체 틀 4">
             <a:extLst>
               <a:ext uri="{FF2B5EF4-FFF2-40B4-BE49-F238E27FC236}">
-                <a16:creationId xmlns:a16="http://schemas.microsoft.com/office/drawing/2014/main" id="{8278E0F4-11A9-F837-FD8E-46A90E5C6AE5}"/>
+                <a16:creationId xmlns:a16="http://schemas.microsoft.com/office/drawing/2014/main" id="{E0CC3EA7-5FA7-44BD-F21C-B66426CC94D9}"/>
               </a:ext>
             </a:extLst>
           </p:cNvPr>
@@ -488,7 +488,7 @@
           <p:cNvPr id="6" name="슬라이드 번호 개체 틀 5">
             <a:extLst>
               <a:ext uri="{FF2B5EF4-FFF2-40B4-BE49-F238E27FC236}">
-                <a16:creationId xmlns:a16="http://schemas.microsoft.com/office/drawing/2014/main" id="{7DF6B0DB-365C-0F19-DD9E-7A22858D975D}"/>
+                <a16:creationId xmlns:a16="http://schemas.microsoft.com/office/drawing/2014/main" id="{D4538DE6-92F0-68DC-C7B1-086F98873BFF}"/>
               </a:ext>
             </a:extLst>
           </p:cNvPr>
@@ -504,7 +504,7 @@
           <a:bodyPr/>
           <a:lstStyle/>
           <a:p>
-            <a:fld id="{7094CA29-903E-416B-B4F8-08BD32F466F4}" type="slidenum">
+            <a:fld id="{3E112018-4EAF-4625-828D-E07EF995F25C}" type="slidenum">
               <a:rPr lang="ko-KR" altLang="en-US" smtClean="0"/>
               <a:t>‹#›</a:t>
             </a:fld>
@@ -515,7 +515,7 @@
     </p:spTree>
     <p:extLst>
       <p:ext uri="{BB962C8B-B14F-4D97-AF65-F5344CB8AC3E}">
-        <p14:creationId xmlns:p14="http://schemas.microsoft.com/office/powerpoint/2010/main" val="4259989168"/>
+        <p14:creationId xmlns:p14="http://schemas.microsoft.com/office/powerpoint/2010/main" val="3113310413"/>
       </p:ext>
     </p:extLst>
   </p:cSld>
@@ -547,7 +547,7 @@
           <p:cNvPr id="2" name="세로 제목 1">
             <a:extLst>
               <a:ext uri="{FF2B5EF4-FFF2-40B4-BE49-F238E27FC236}">
-                <a16:creationId xmlns:a16="http://schemas.microsoft.com/office/drawing/2014/main" id="{0FA62E68-AB9B-121D-31D0-55464FFA2A55}"/>
+                <a16:creationId xmlns:a16="http://schemas.microsoft.com/office/drawing/2014/main" id="{DB0CBDEF-9A3E-4048-1A24-DB1AD83E90E8}"/>
               </a:ext>
             </a:extLst>
           </p:cNvPr>
@@ -580,7 +580,7 @@
           <p:cNvPr id="3" name="세로 텍스트 개체 틀 2">
             <a:extLst>
               <a:ext uri="{FF2B5EF4-FFF2-40B4-BE49-F238E27FC236}">
-                <a16:creationId xmlns:a16="http://schemas.microsoft.com/office/drawing/2014/main" id="{CFCFEEFE-88FC-CB5A-4283-876FADDD9CF6}"/>
+                <a16:creationId xmlns:a16="http://schemas.microsoft.com/office/drawing/2014/main" id="{E07047E1-25B4-806C-4457-9E2B131B51FE}"/>
               </a:ext>
             </a:extLst>
           </p:cNvPr>
@@ -642,7 +642,7 @@
           <p:cNvPr id="4" name="날짜 개체 틀 3">
             <a:extLst>
               <a:ext uri="{FF2B5EF4-FFF2-40B4-BE49-F238E27FC236}">
-                <a16:creationId xmlns:a16="http://schemas.microsoft.com/office/drawing/2014/main" id="{1791D6D8-265F-EFC8-6C25-A93E8763C81C}"/>
+                <a16:creationId xmlns:a16="http://schemas.microsoft.com/office/drawing/2014/main" id="{35F83B5C-BFD5-7BD8-9DB4-99FACC524FC7}"/>
               </a:ext>
             </a:extLst>
           </p:cNvPr>
@@ -658,9 +658,9 @@
           <a:bodyPr/>
           <a:lstStyle/>
           <a:p>
-            <a:fld id="{49C3E51C-15A2-46D9-AFCB-7CCC968858FD}" type="datetimeFigureOut">
+            <a:fld id="{EF81D23E-FA8B-4A2A-A9C1-6AC8F5F16A51}" type="datetimeFigureOut">
               <a:rPr lang="ko-KR" altLang="en-US" smtClean="0"/>
-              <a:t>2026-06-25</a:t>
+              <a:t>2026-06-27</a:t>
             </a:fld>
             <a:endParaRPr lang="ko-KR" altLang="en-US"/>
           </a:p>
@@ -671,7 +671,7 @@
           <p:cNvPr id="5" name="바닥글 개체 틀 4">
             <a:extLst>
               <a:ext uri="{FF2B5EF4-FFF2-40B4-BE49-F238E27FC236}">
-                <a16:creationId xmlns:a16="http://schemas.microsoft.com/office/drawing/2014/main" id="{E42A4459-9CF8-9ECC-782C-3BEEB7CAB0D7}"/>
+                <a16:creationId xmlns:a16="http://schemas.microsoft.com/office/drawing/2014/main" id="{AD62D660-B0B7-A819-C09A-E845FA292E2D}"/>
               </a:ext>
             </a:extLst>
           </p:cNvPr>
@@ -696,7 +696,7 @@
           <p:cNvPr id="6" name="슬라이드 번호 개체 틀 5">
             <a:extLst>
               <a:ext uri="{FF2B5EF4-FFF2-40B4-BE49-F238E27FC236}">
-                <a16:creationId xmlns:a16="http://schemas.microsoft.com/office/drawing/2014/main" id="{0317517B-ECB9-D602-5032-3B7000EB14C0}"/>
+                <a16:creationId xmlns:a16="http://schemas.microsoft.com/office/drawing/2014/main" id="{6BE8D288-2C6B-8421-E4C4-CA0D47FEE19A}"/>
               </a:ext>
             </a:extLst>
           </p:cNvPr>
@@ -712,7 +712,7 @@
           <a:bodyPr/>
           <a:lstStyle/>
           <a:p>
-            <a:fld id="{7094CA29-903E-416B-B4F8-08BD32F466F4}" type="slidenum">
+            <a:fld id="{3E112018-4EAF-4625-828D-E07EF995F25C}" type="slidenum">
               <a:rPr lang="ko-KR" altLang="en-US" smtClean="0"/>
               <a:t>‹#›</a:t>
             </a:fld>
@@ -723,7 +723,7 @@
     </p:spTree>
     <p:extLst>
       <p:ext uri="{BB962C8B-B14F-4D97-AF65-F5344CB8AC3E}">
-        <p14:creationId xmlns:p14="http://schemas.microsoft.com/office/powerpoint/2010/main" val="1715846452"/>
+        <p14:creationId xmlns:p14="http://schemas.microsoft.com/office/powerpoint/2010/main" val="2231457748"/>
       </p:ext>
     </p:extLst>
   </p:cSld>
@@ -755,7 +755,7 @@
           <p:cNvPr id="2" name="제목 1">
             <a:extLst>
               <a:ext uri="{FF2B5EF4-FFF2-40B4-BE49-F238E27FC236}">
-                <a16:creationId xmlns:a16="http://schemas.microsoft.com/office/drawing/2014/main" id="{18E421D7-35B1-78EE-A814-078F019B672B}"/>
+                <a16:creationId xmlns:a16="http://schemas.microsoft.com/office/drawing/2014/main" id="{80DAC762-48D7-146E-9649-83CFE6ED6F7F}"/>
               </a:ext>
             </a:extLst>
           </p:cNvPr>
@@ -783,7 +783,7 @@
           <p:cNvPr id="3" name="내용 개체 틀 2">
             <a:extLst>
               <a:ext uri="{FF2B5EF4-FFF2-40B4-BE49-F238E27FC236}">
-                <a16:creationId xmlns:a16="http://schemas.microsoft.com/office/drawing/2014/main" id="{D0DE7F7F-3CE7-1E60-6C6C-567EC8B37F5D}"/>
+                <a16:creationId xmlns:a16="http://schemas.microsoft.com/office/drawing/2014/main" id="{B308D41A-BA9E-9388-0DED-4B8540BCF501}"/>
               </a:ext>
             </a:extLst>
           </p:cNvPr>
@@ -840,7 +840,7 @@
           <p:cNvPr id="4" name="날짜 개체 틀 3">
             <a:extLst>
               <a:ext uri="{FF2B5EF4-FFF2-40B4-BE49-F238E27FC236}">
-                <a16:creationId xmlns:a16="http://schemas.microsoft.com/office/drawing/2014/main" id="{54E0A4FA-6005-A9ED-2127-264D44AD515F}"/>
+                <a16:creationId xmlns:a16="http://schemas.microsoft.com/office/drawing/2014/main" id="{88145191-17E3-A169-0F48-601890B52D62}"/>
               </a:ext>
             </a:extLst>
           </p:cNvPr>
@@ -856,9 +856,9 @@
           <a:bodyPr/>
           <a:lstStyle/>
           <a:p>
-            <a:fld id="{49C3E51C-15A2-46D9-AFCB-7CCC968858FD}" type="datetimeFigureOut">
+            <a:fld id="{EF81D23E-FA8B-4A2A-A9C1-6AC8F5F16A51}" type="datetimeFigureOut">
               <a:rPr lang="ko-KR" altLang="en-US" smtClean="0"/>
-              <a:t>2026-06-25</a:t>
+              <a:t>2026-06-27</a:t>
             </a:fld>
             <a:endParaRPr lang="ko-KR" altLang="en-US"/>
           </a:p>
@@ -869,7 +869,7 @@
           <p:cNvPr id="5" name="바닥글 개체 틀 4">
             <a:extLst>
               <a:ext uri="{FF2B5EF4-FFF2-40B4-BE49-F238E27FC236}">
-                <a16:creationId xmlns:a16="http://schemas.microsoft.com/office/drawing/2014/main" id="{521D2894-E4EC-3734-7703-8CFF842A36ED}"/>
+                <a16:creationId xmlns:a16="http://schemas.microsoft.com/office/drawing/2014/main" id="{DF440372-B513-21CD-1BF5-6D28C4B634B9}"/>
               </a:ext>
             </a:extLst>
           </p:cNvPr>
@@ -894,7 +894,7 @@
           <p:cNvPr id="6" name="슬라이드 번호 개체 틀 5">
             <a:extLst>
               <a:ext uri="{FF2B5EF4-FFF2-40B4-BE49-F238E27FC236}">
-                <a16:creationId xmlns:a16="http://schemas.microsoft.com/office/drawing/2014/main" id="{E7061F9E-8263-7D30-751E-4A6D330DA92D}"/>
+                <a16:creationId xmlns:a16="http://schemas.microsoft.com/office/drawing/2014/main" id="{87B74A87-8885-D489-D3CE-A9F19B266406}"/>
               </a:ext>
             </a:extLst>
           </p:cNvPr>
@@ -910,7 +910,7 @@
           <a:bodyPr/>
           <a:lstStyle/>
           <a:p>
-            <a:fld id="{7094CA29-903E-416B-B4F8-08BD32F466F4}" type="slidenum">
+            <a:fld id="{3E112018-4EAF-4625-828D-E07EF995F25C}" type="slidenum">
               <a:rPr lang="ko-KR" altLang="en-US" smtClean="0"/>
               <a:t>‹#›</a:t>
             </a:fld>
@@ -921,7 +921,7 @@
     </p:spTree>
     <p:extLst>
       <p:ext uri="{BB962C8B-B14F-4D97-AF65-F5344CB8AC3E}">
-        <p14:creationId xmlns:p14="http://schemas.microsoft.com/office/powerpoint/2010/main" val="3166367197"/>
+        <p14:creationId xmlns:p14="http://schemas.microsoft.com/office/powerpoint/2010/main" val="108839951"/>
       </p:ext>
     </p:extLst>
   </p:cSld>
@@ -953,7 +953,7 @@
           <p:cNvPr id="2" name="제목 1">
             <a:extLst>
               <a:ext uri="{FF2B5EF4-FFF2-40B4-BE49-F238E27FC236}">
-                <a16:creationId xmlns:a16="http://schemas.microsoft.com/office/drawing/2014/main" id="{C1C3A4D6-ECB3-9010-B150-ADEC394F0A0F}"/>
+                <a16:creationId xmlns:a16="http://schemas.microsoft.com/office/drawing/2014/main" id="{24AC093F-AE49-8C81-2A54-D07FEFB29B74}"/>
               </a:ext>
             </a:extLst>
           </p:cNvPr>
@@ -990,7 +990,7 @@
           <p:cNvPr id="3" name="텍스트 개체 틀 2">
             <a:extLst>
               <a:ext uri="{FF2B5EF4-FFF2-40B4-BE49-F238E27FC236}">
-                <a16:creationId xmlns:a16="http://schemas.microsoft.com/office/drawing/2014/main" id="{1E70F710-5B72-A1D2-9508-BA40275AD20B}"/>
+                <a16:creationId xmlns:a16="http://schemas.microsoft.com/office/drawing/2014/main" id="{7CF0B58C-B7E0-E266-88B2-B6A982AC525E}"/>
               </a:ext>
             </a:extLst>
           </p:cNvPr>
@@ -1115,7 +1115,7 @@
           <p:cNvPr id="4" name="날짜 개체 틀 3">
             <a:extLst>
               <a:ext uri="{FF2B5EF4-FFF2-40B4-BE49-F238E27FC236}">
-                <a16:creationId xmlns:a16="http://schemas.microsoft.com/office/drawing/2014/main" id="{B673F21C-9D0D-F6AE-5DDA-EF41F5D92ED6}"/>
+                <a16:creationId xmlns:a16="http://schemas.microsoft.com/office/drawing/2014/main" id="{7C62713D-2DE3-CB35-1ADE-17BE6E07010E}"/>
               </a:ext>
             </a:extLst>
           </p:cNvPr>
@@ -1131,9 +1131,9 @@
           <a:bodyPr/>
           <a:lstStyle/>
           <a:p>
-            <a:fld id="{49C3E51C-15A2-46D9-AFCB-7CCC968858FD}" type="datetimeFigureOut">
+            <a:fld id="{EF81D23E-FA8B-4A2A-A9C1-6AC8F5F16A51}" type="datetimeFigureOut">
               <a:rPr lang="ko-KR" altLang="en-US" smtClean="0"/>
-              <a:t>2026-06-25</a:t>
+              <a:t>2026-06-27</a:t>
             </a:fld>
             <a:endParaRPr lang="ko-KR" altLang="en-US"/>
           </a:p>
@@ -1144,7 +1144,7 @@
           <p:cNvPr id="5" name="바닥글 개체 틀 4">
             <a:extLst>
               <a:ext uri="{FF2B5EF4-FFF2-40B4-BE49-F238E27FC236}">
-                <a16:creationId xmlns:a16="http://schemas.microsoft.com/office/drawing/2014/main" id="{01E64C03-198B-512D-0415-4F24158FC972}"/>
+                <a16:creationId xmlns:a16="http://schemas.microsoft.com/office/drawing/2014/main" id="{CB100544-4D17-8082-DEA7-7BEAF2BFDA47}"/>
               </a:ext>
             </a:extLst>
           </p:cNvPr>
@@ -1169,7 +1169,7 @@
           <p:cNvPr id="6" name="슬라이드 번호 개체 틀 5">
             <a:extLst>
               <a:ext uri="{FF2B5EF4-FFF2-40B4-BE49-F238E27FC236}">
-                <a16:creationId xmlns:a16="http://schemas.microsoft.com/office/drawing/2014/main" id="{C6CAF0B7-3C31-78DD-668B-EF4CFDBECF95}"/>
+                <a16:creationId xmlns:a16="http://schemas.microsoft.com/office/drawing/2014/main" id="{1D9CC440-94FF-AB3A-B635-3F103640C0F8}"/>
               </a:ext>
             </a:extLst>
           </p:cNvPr>
@@ -1185,7 +1185,7 @@
           <a:bodyPr/>
           <a:lstStyle/>
           <a:p>
-            <a:fld id="{7094CA29-903E-416B-B4F8-08BD32F466F4}" type="slidenum">
+            <a:fld id="{3E112018-4EAF-4625-828D-E07EF995F25C}" type="slidenum">
               <a:rPr lang="ko-KR" altLang="en-US" smtClean="0"/>
               <a:t>‹#›</a:t>
             </a:fld>
@@ -1196,7 +1196,7 @@
     </p:spTree>
     <p:extLst>
       <p:ext uri="{BB962C8B-B14F-4D97-AF65-F5344CB8AC3E}">
-        <p14:creationId xmlns:p14="http://schemas.microsoft.com/office/powerpoint/2010/main" val="935411767"/>
+        <p14:creationId xmlns:p14="http://schemas.microsoft.com/office/powerpoint/2010/main" val="3670834170"/>
       </p:ext>
     </p:extLst>
   </p:cSld>
@@ -1228,7 +1228,7 @@
           <p:cNvPr id="2" name="제목 1">
             <a:extLst>
               <a:ext uri="{FF2B5EF4-FFF2-40B4-BE49-F238E27FC236}">
-                <a16:creationId xmlns:a16="http://schemas.microsoft.com/office/drawing/2014/main" id="{75D42DC9-FE6C-CACC-CA7D-7A743E9ACC74}"/>
+                <a16:creationId xmlns:a16="http://schemas.microsoft.com/office/drawing/2014/main" id="{5A3AABC3-EABC-F351-59C4-0AD6701BDAC9}"/>
               </a:ext>
             </a:extLst>
           </p:cNvPr>
@@ -1256,7 +1256,7 @@
           <p:cNvPr id="3" name="내용 개체 틀 2">
             <a:extLst>
               <a:ext uri="{FF2B5EF4-FFF2-40B4-BE49-F238E27FC236}">
-                <a16:creationId xmlns:a16="http://schemas.microsoft.com/office/drawing/2014/main" id="{396C3FF6-11C6-45A1-BE90-C1F15DF2BFD5}"/>
+                <a16:creationId xmlns:a16="http://schemas.microsoft.com/office/drawing/2014/main" id="{AC5FF24B-02EC-EBCC-0115-D2062CEA6A6C}"/>
               </a:ext>
             </a:extLst>
           </p:cNvPr>
@@ -1318,7 +1318,7 @@
           <p:cNvPr id="4" name="내용 개체 틀 3">
             <a:extLst>
               <a:ext uri="{FF2B5EF4-FFF2-40B4-BE49-F238E27FC236}">
-                <a16:creationId xmlns:a16="http://schemas.microsoft.com/office/drawing/2014/main" id="{FA6FD32F-FB91-A496-1330-F36D9E5A1F66}"/>
+                <a16:creationId xmlns:a16="http://schemas.microsoft.com/office/drawing/2014/main" id="{BB387FE4-2A5F-0ADA-058C-8F917E003513}"/>
               </a:ext>
             </a:extLst>
           </p:cNvPr>
@@ -1380,7 +1380,7 @@
           <p:cNvPr id="5" name="날짜 개체 틀 4">
             <a:extLst>
               <a:ext uri="{FF2B5EF4-FFF2-40B4-BE49-F238E27FC236}">
-                <a16:creationId xmlns:a16="http://schemas.microsoft.com/office/drawing/2014/main" id="{F8EFBE88-B6ED-8794-FD6C-608D3114A553}"/>
+                <a16:creationId xmlns:a16="http://schemas.microsoft.com/office/drawing/2014/main" id="{8A3D78AA-3207-1E90-B9F4-CA24CEADAE4F}"/>
               </a:ext>
             </a:extLst>
           </p:cNvPr>
@@ -1396,9 +1396,9 @@
           <a:bodyPr/>
           <a:lstStyle/>
           <a:p>
-            <a:fld id="{49C3E51C-15A2-46D9-AFCB-7CCC968858FD}" type="datetimeFigureOut">
+            <a:fld id="{EF81D23E-FA8B-4A2A-A9C1-6AC8F5F16A51}" type="datetimeFigureOut">
               <a:rPr lang="ko-KR" altLang="en-US" smtClean="0"/>
-              <a:t>2026-06-25</a:t>
+              <a:t>2026-06-27</a:t>
             </a:fld>
             <a:endParaRPr lang="ko-KR" altLang="en-US"/>
           </a:p>
@@ -1409,7 +1409,7 @@
           <p:cNvPr id="6" name="바닥글 개체 틀 5">
             <a:extLst>
               <a:ext uri="{FF2B5EF4-FFF2-40B4-BE49-F238E27FC236}">
-                <a16:creationId xmlns:a16="http://schemas.microsoft.com/office/drawing/2014/main" id="{ABB96DD3-A9A7-6C26-015E-F3BF4E8A36A5}"/>
+                <a16:creationId xmlns:a16="http://schemas.microsoft.com/office/drawing/2014/main" id="{F3D970B4-46B1-33CB-1930-1F2F345C7871}"/>
               </a:ext>
             </a:extLst>
           </p:cNvPr>
@@ -1434,7 +1434,7 @@
           <p:cNvPr id="7" name="슬라이드 번호 개체 틀 6">
             <a:extLst>
               <a:ext uri="{FF2B5EF4-FFF2-40B4-BE49-F238E27FC236}">
-                <a16:creationId xmlns:a16="http://schemas.microsoft.com/office/drawing/2014/main" id="{9349D048-AFCA-0B2F-E218-9790CFEEB208}"/>
+                <a16:creationId xmlns:a16="http://schemas.microsoft.com/office/drawing/2014/main" id="{8534EDA0-269C-259D-562B-AF98AA3FA445}"/>
               </a:ext>
             </a:extLst>
           </p:cNvPr>
@@ -1450,7 +1450,7 @@
           <a:bodyPr/>
           <a:lstStyle/>
           <a:p>
-            <a:fld id="{7094CA29-903E-416B-B4F8-08BD32F466F4}" type="slidenum">
+            <a:fld id="{3E112018-4EAF-4625-828D-E07EF995F25C}" type="slidenum">
               <a:rPr lang="ko-KR" altLang="en-US" smtClean="0"/>
               <a:t>‹#›</a:t>
             </a:fld>
@@ -1461,7 +1461,7 @@
     </p:spTree>
     <p:extLst>
       <p:ext uri="{BB962C8B-B14F-4D97-AF65-F5344CB8AC3E}">
-        <p14:creationId xmlns:p14="http://schemas.microsoft.com/office/powerpoint/2010/main" val="2076642603"/>
+        <p14:creationId xmlns:p14="http://schemas.microsoft.com/office/powerpoint/2010/main" val="3198960545"/>
       </p:ext>
     </p:extLst>
   </p:cSld>
@@ -1493,7 +1493,7 @@
           <p:cNvPr id="2" name="제목 1">
             <a:extLst>
               <a:ext uri="{FF2B5EF4-FFF2-40B4-BE49-F238E27FC236}">
-                <a16:creationId xmlns:a16="http://schemas.microsoft.com/office/drawing/2014/main" id="{4888639B-A5D9-D59D-1E9C-28A98E02A1D5}"/>
+                <a16:creationId xmlns:a16="http://schemas.microsoft.com/office/drawing/2014/main" id="{15E91BBF-BFEE-A027-C6B6-A8F609AD2B0B}"/>
               </a:ext>
             </a:extLst>
           </p:cNvPr>
@@ -1526,7 +1526,7 @@
           <p:cNvPr id="3" name="텍스트 개체 틀 2">
             <a:extLst>
               <a:ext uri="{FF2B5EF4-FFF2-40B4-BE49-F238E27FC236}">
-                <a16:creationId xmlns:a16="http://schemas.microsoft.com/office/drawing/2014/main" id="{E1AA1F47-EFA9-A52A-C8F5-7720F8D6BC4F}"/>
+                <a16:creationId xmlns:a16="http://schemas.microsoft.com/office/drawing/2014/main" id="{817928EE-8D96-71F4-C138-7D4CF0D2EAC1}"/>
               </a:ext>
             </a:extLst>
           </p:cNvPr>
@@ -1597,7 +1597,7 @@
           <p:cNvPr id="4" name="내용 개체 틀 3">
             <a:extLst>
               <a:ext uri="{FF2B5EF4-FFF2-40B4-BE49-F238E27FC236}">
-                <a16:creationId xmlns:a16="http://schemas.microsoft.com/office/drawing/2014/main" id="{60643836-6F2B-D1D0-C743-1C7A9A6AD4BA}"/>
+                <a16:creationId xmlns:a16="http://schemas.microsoft.com/office/drawing/2014/main" id="{0B4606CB-429C-F9ED-A764-DF29E8CEDB0E}"/>
               </a:ext>
             </a:extLst>
           </p:cNvPr>
@@ -1659,7 +1659,7 @@
           <p:cNvPr id="5" name="텍스트 개체 틀 4">
             <a:extLst>
               <a:ext uri="{FF2B5EF4-FFF2-40B4-BE49-F238E27FC236}">
-                <a16:creationId xmlns:a16="http://schemas.microsoft.com/office/drawing/2014/main" id="{BBAF013D-EC54-95D7-D375-C0E944E1BDB4}"/>
+                <a16:creationId xmlns:a16="http://schemas.microsoft.com/office/drawing/2014/main" id="{09043297-191B-3B38-B225-240457F31603}"/>
               </a:ext>
             </a:extLst>
           </p:cNvPr>
@@ -1730,7 +1730,7 @@
           <p:cNvPr id="6" name="내용 개체 틀 5">
             <a:extLst>
               <a:ext uri="{FF2B5EF4-FFF2-40B4-BE49-F238E27FC236}">
-                <a16:creationId xmlns:a16="http://schemas.microsoft.com/office/drawing/2014/main" id="{296BC156-D1AA-47B5-E724-FF2BB289B048}"/>
+                <a16:creationId xmlns:a16="http://schemas.microsoft.com/office/drawing/2014/main" id="{C438673F-53FE-7029-BB3D-B9CBAE65439B}"/>
               </a:ext>
             </a:extLst>
           </p:cNvPr>
@@ -1792,7 +1792,7 @@
           <p:cNvPr id="7" name="날짜 개체 틀 6">
             <a:extLst>
               <a:ext uri="{FF2B5EF4-FFF2-40B4-BE49-F238E27FC236}">
-                <a16:creationId xmlns:a16="http://schemas.microsoft.com/office/drawing/2014/main" id="{973311B4-F702-A0DB-DDA8-71A06F8E3890}"/>
+                <a16:creationId xmlns:a16="http://schemas.microsoft.com/office/drawing/2014/main" id="{EFE167A9-AF0C-0D3B-A4CA-F601ABACAFED}"/>
               </a:ext>
             </a:extLst>
           </p:cNvPr>
@@ -1808,9 +1808,9 @@
           <a:bodyPr/>
           <a:lstStyle/>
           <a:p>
-            <a:fld id="{49C3E51C-15A2-46D9-AFCB-7CCC968858FD}" type="datetimeFigureOut">
+            <a:fld id="{EF81D23E-FA8B-4A2A-A9C1-6AC8F5F16A51}" type="datetimeFigureOut">
               <a:rPr lang="ko-KR" altLang="en-US" smtClean="0"/>
-              <a:t>2026-06-25</a:t>
+              <a:t>2026-06-27</a:t>
             </a:fld>
             <a:endParaRPr lang="ko-KR" altLang="en-US"/>
           </a:p>
@@ -1821,7 +1821,7 @@
           <p:cNvPr id="8" name="바닥글 개체 틀 7">
             <a:extLst>
               <a:ext uri="{FF2B5EF4-FFF2-40B4-BE49-F238E27FC236}">
-                <a16:creationId xmlns:a16="http://schemas.microsoft.com/office/drawing/2014/main" id="{1A23887E-3FBE-0D0F-E8BD-D28665E535B8}"/>
+                <a16:creationId xmlns:a16="http://schemas.microsoft.com/office/drawing/2014/main" id="{86865432-F94B-9CB4-B078-B518C0FC9A8B}"/>
               </a:ext>
             </a:extLst>
           </p:cNvPr>
@@ -1846,7 +1846,7 @@
           <p:cNvPr id="9" name="슬라이드 번호 개체 틀 8">
             <a:extLst>
               <a:ext uri="{FF2B5EF4-FFF2-40B4-BE49-F238E27FC236}">
-                <a16:creationId xmlns:a16="http://schemas.microsoft.com/office/drawing/2014/main" id="{DDE940C4-EB75-FEA7-E92C-72EADA56649F}"/>
+                <a16:creationId xmlns:a16="http://schemas.microsoft.com/office/drawing/2014/main" id="{AA28CF3A-5DB6-B55B-D787-C34BC1C6579C}"/>
               </a:ext>
             </a:extLst>
           </p:cNvPr>
@@ -1862,7 +1862,7 @@
           <a:bodyPr/>
           <a:lstStyle/>
           <a:p>
-            <a:fld id="{7094CA29-903E-416B-B4F8-08BD32F466F4}" type="slidenum">
+            <a:fld id="{3E112018-4EAF-4625-828D-E07EF995F25C}" type="slidenum">
               <a:rPr lang="ko-KR" altLang="en-US" smtClean="0"/>
               <a:t>‹#›</a:t>
             </a:fld>
@@ -1873,7 +1873,7 @@
     </p:spTree>
     <p:extLst>
       <p:ext uri="{BB962C8B-B14F-4D97-AF65-F5344CB8AC3E}">
-        <p14:creationId xmlns:p14="http://schemas.microsoft.com/office/powerpoint/2010/main" val="4277789122"/>
+        <p14:creationId xmlns:p14="http://schemas.microsoft.com/office/powerpoint/2010/main" val="967796706"/>
       </p:ext>
     </p:extLst>
   </p:cSld>
@@ -1905,7 +1905,7 @@
           <p:cNvPr id="2" name="제목 1">
             <a:extLst>
               <a:ext uri="{FF2B5EF4-FFF2-40B4-BE49-F238E27FC236}">
-                <a16:creationId xmlns:a16="http://schemas.microsoft.com/office/drawing/2014/main" id="{7FB8D6A4-62F3-92BC-F2DD-D081DBA7BC8E}"/>
+                <a16:creationId xmlns:a16="http://schemas.microsoft.com/office/drawing/2014/main" id="{E43F3860-E040-ECE4-C327-0B54BAE96C62}"/>
               </a:ext>
             </a:extLst>
           </p:cNvPr>
@@ -1933,7 +1933,7 @@
           <p:cNvPr id="3" name="날짜 개체 틀 2">
             <a:extLst>
               <a:ext uri="{FF2B5EF4-FFF2-40B4-BE49-F238E27FC236}">
-                <a16:creationId xmlns:a16="http://schemas.microsoft.com/office/drawing/2014/main" id="{C346839C-8DD7-0D6D-BA87-CDE6AC7E7CF5}"/>
+                <a16:creationId xmlns:a16="http://schemas.microsoft.com/office/drawing/2014/main" id="{B04B5BF5-246A-23B6-674F-D08166BD2FB4}"/>
               </a:ext>
             </a:extLst>
           </p:cNvPr>
@@ -1949,9 +1949,9 @@
           <a:bodyPr/>
           <a:lstStyle/>
           <a:p>
-            <a:fld id="{49C3E51C-15A2-46D9-AFCB-7CCC968858FD}" type="datetimeFigureOut">
+            <a:fld id="{EF81D23E-FA8B-4A2A-A9C1-6AC8F5F16A51}" type="datetimeFigureOut">
               <a:rPr lang="ko-KR" altLang="en-US" smtClean="0"/>
-              <a:t>2026-06-25</a:t>
+              <a:t>2026-06-27</a:t>
             </a:fld>
             <a:endParaRPr lang="ko-KR" altLang="en-US"/>
           </a:p>
@@ -1962,7 +1962,7 @@
           <p:cNvPr id="4" name="바닥글 개체 틀 3">
             <a:extLst>
               <a:ext uri="{FF2B5EF4-FFF2-40B4-BE49-F238E27FC236}">
-                <a16:creationId xmlns:a16="http://schemas.microsoft.com/office/drawing/2014/main" id="{0CCEBD9F-2BF5-7960-CD4C-FB0EC4B95F00}"/>
+                <a16:creationId xmlns:a16="http://schemas.microsoft.com/office/drawing/2014/main" id="{FDE70AED-7F2A-635E-87B7-36441CE2B95B}"/>
               </a:ext>
             </a:extLst>
           </p:cNvPr>
@@ -1987,7 +1987,7 @@
           <p:cNvPr id="5" name="슬라이드 번호 개체 틀 4">
             <a:extLst>
               <a:ext uri="{FF2B5EF4-FFF2-40B4-BE49-F238E27FC236}">
-                <a16:creationId xmlns:a16="http://schemas.microsoft.com/office/drawing/2014/main" id="{8AA99425-A5C6-D185-2BB7-A0CFA193D27F}"/>
+                <a16:creationId xmlns:a16="http://schemas.microsoft.com/office/drawing/2014/main" id="{887F6B69-D4CB-8719-CF0E-81350232EAF3}"/>
               </a:ext>
             </a:extLst>
           </p:cNvPr>
@@ -2003,7 +2003,7 @@
           <a:bodyPr/>
           <a:lstStyle/>
           <a:p>
-            <a:fld id="{7094CA29-903E-416B-B4F8-08BD32F466F4}" type="slidenum">
+            <a:fld id="{3E112018-4EAF-4625-828D-E07EF995F25C}" type="slidenum">
               <a:rPr lang="ko-KR" altLang="en-US" smtClean="0"/>
               <a:t>‹#›</a:t>
             </a:fld>
@@ -2014,7 +2014,7 @@
     </p:spTree>
     <p:extLst>
       <p:ext uri="{BB962C8B-B14F-4D97-AF65-F5344CB8AC3E}">
-        <p14:creationId xmlns:p14="http://schemas.microsoft.com/office/powerpoint/2010/main" val="1975102571"/>
+        <p14:creationId xmlns:p14="http://schemas.microsoft.com/office/powerpoint/2010/main" val="1936788213"/>
       </p:ext>
     </p:extLst>
   </p:cSld>
@@ -2046,7 +2046,7 @@
           <p:cNvPr id="2" name="날짜 개체 틀 1">
             <a:extLst>
               <a:ext uri="{FF2B5EF4-FFF2-40B4-BE49-F238E27FC236}">
-                <a16:creationId xmlns:a16="http://schemas.microsoft.com/office/drawing/2014/main" id="{870A9E26-0D31-5E8C-EC0F-62186E7D9A5E}"/>
+                <a16:creationId xmlns:a16="http://schemas.microsoft.com/office/drawing/2014/main" id="{6FEDD598-309B-3623-A2E0-08E4E2E5BFE5}"/>
               </a:ext>
             </a:extLst>
           </p:cNvPr>
@@ -2062,9 +2062,9 @@
           <a:bodyPr/>
           <a:lstStyle/>
           <a:p>
-            <a:fld id="{49C3E51C-15A2-46D9-AFCB-7CCC968858FD}" type="datetimeFigureOut">
+            <a:fld id="{EF81D23E-FA8B-4A2A-A9C1-6AC8F5F16A51}" type="datetimeFigureOut">
               <a:rPr lang="ko-KR" altLang="en-US" smtClean="0"/>
-              <a:t>2026-06-25</a:t>
+              <a:t>2026-06-27</a:t>
             </a:fld>
             <a:endParaRPr lang="ko-KR" altLang="en-US"/>
           </a:p>
@@ -2075,7 +2075,7 @@
           <p:cNvPr id="3" name="바닥글 개체 틀 2">
             <a:extLst>
               <a:ext uri="{FF2B5EF4-FFF2-40B4-BE49-F238E27FC236}">
-                <a16:creationId xmlns:a16="http://schemas.microsoft.com/office/drawing/2014/main" id="{481285F8-2BD7-4D95-47F9-E04F7A4BCD24}"/>
+                <a16:creationId xmlns:a16="http://schemas.microsoft.com/office/drawing/2014/main" id="{2D91E8E3-5366-1F06-2609-5C6F1915ACA1}"/>
               </a:ext>
             </a:extLst>
           </p:cNvPr>
@@ -2100,7 +2100,7 @@
           <p:cNvPr id="4" name="슬라이드 번호 개체 틀 3">
             <a:extLst>
               <a:ext uri="{FF2B5EF4-FFF2-40B4-BE49-F238E27FC236}">
-                <a16:creationId xmlns:a16="http://schemas.microsoft.com/office/drawing/2014/main" id="{5F78C6C7-ADB2-E9E6-9CE5-EB90DC9D8072}"/>
+                <a16:creationId xmlns:a16="http://schemas.microsoft.com/office/drawing/2014/main" id="{4645DC34-7F2D-86CB-A243-2BBEC41DA4BD}"/>
               </a:ext>
             </a:extLst>
           </p:cNvPr>
@@ -2116,7 +2116,7 @@
           <a:bodyPr/>
           <a:lstStyle/>
           <a:p>
-            <a:fld id="{7094CA29-903E-416B-B4F8-08BD32F466F4}" type="slidenum">
+            <a:fld id="{3E112018-4EAF-4625-828D-E07EF995F25C}" type="slidenum">
               <a:rPr lang="ko-KR" altLang="en-US" smtClean="0"/>
               <a:t>‹#›</a:t>
             </a:fld>
@@ -2127,7 +2127,7 @@
     </p:spTree>
     <p:extLst>
       <p:ext uri="{BB962C8B-B14F-4D97-AF65-F5344CB8AC3E}">
-        <p14:creationId xmlns:p14="http://schemas.microsoft.com/office/powerpoint/2010/main" val="1555379540"/>
+        <p14:creationId xmlns:p14="http://schemas.microsoft.com/office/powerpoint/2010/main" val="997942906"/>
       </p:ext>
     </p:extLst>
   </p:cSld>
@@ -2159,7 +2159,7 @@
           <p:cNvPr id="2" name="제목 1">
             <a:extLst>
               <a:ext uri="{FF2B5EF4-FFF2-40B4-BE49-F238E27FC236}">
-                <a16:creationId xmlns:a16="http://schemas.microsoft.com/office/drawing/2014/main" id="{38128F82-C072-A88A-6534-99695690D09D}"/>
+                <a16:creationId xmlns:a16="http://schemas.microsoft.com/office/drawing/2014/main" id="{0546B13C-D2C2-B187-5682-604B721E44B1}"/>
               </a:ext>
             </a:extLst>
           </p:cNvPr>
@@ -2196,7 +2196,7 @@
           <p:cNvPr id="3" name="내용 개체 틀 2">
             <a:extLst>
               <a:ext uri="{FF2B5EF4-FFF2-40B4-BE49-F238E27FC236}">
-                <a16:creationId xmlns:a16="http://schemas.microsoft.com/office/drawing/2014/main" id="{6AC184E8-E2F4-9F8F-D7DA-2B9DE29BE9DE}"/>
+                <a16:creationId xmlns:a16="http://schemas.microsoft.com/office/drawing/2014/main" id="{1463DB05-0D46-C00F-91EC-E6A6C3069C85}"/>
               </a:ext>
             </a:extLst>
           </p:cNvPr>
@@ -2286,7 +2286,7 @@
           <p:cNvPr id="4" name="텍스트 개체 틀 3">
             <a:extLst>
               <a:ext uri="{FF2B5EF4-FFF2-40B4-BE49-F238E27FC236}">
-                <a16:creationId xmlns:a16="http://schemas.microsoft.com/office/drawing/2014/main" id="{82B2A271-8E45-4A84-5553-6674F75A5A89}"/>
+                <a16:creationId xmlns:a16="http://schemas.microsoft.com/office/drawing/2014/main" id="{E7C8E67C-BB8D-67F8-CDCE-C118BA03136B}"/>
               </a:ext>
             </a:extLst>
           </p:cNvPr>
@@ -2357,7 +2357,7 @@
           <p:cNvPr id="5" name="날짜 개체 틀 4">
             <a:extLst>
               <a:ext uri="{FF2B5EF4-FFF2-40B4-BE49-F238E27FC236}">
-                <a16:creationId xmlns:a16="http://schemas.microsoft.com/office/drawing/2014/main" id="{7B1E9240-8989-9BBC-4EB3-EB6582C2D759}"/>
+                <a16:creationId xmlns:a16="http://schemas.microsoft.com/office/drawing/2014/main" id="{CAF0124E-1268-E2B8-F5AD-5E12C96D3148}"/>
               </a:ext>
             </a:extLst>
           </p:cNvPr>
@@ -2373,9 +2373,9 @@
           <a:bodyPr/>
           <a:lstStyle/>
           <a:p>
-            <a:fld id="{49C3E51C-15A2-46D9-AFCB-7CCC968858FD}" type="datetimeFigureOut">
+            <a:fld id="{EF81D23E-FA8B-4A2A-A9C1-6AC8F5F16A51}" type="datetimeFigureOut">
               <a:rPr lang="ko-KR" altLang="en-US" smtClean="0"/>
-              <a:t>2026-06-25</a:t>
+              <a:t>2026-06-27</a:t>
             </a:fld>
             <a:endParaRPr lang="ko-KR" altLang="en-US"/>
           </a:p>
@@ -2386,7 +2386,7 @@
           <p:cNvPr id="6" name="바닥글 개체 틀 5">
             <a:extLst>
               <a:ext uri="{FF2B5EF4-FFF2-40B4-BE49-F238E27FC236}">
-                <a16:creationId xmlns:a16="http://schemas.microsoft.com/office/drawing/2014/main" id="{81467B9F-6C7B-FEBE-7D24-F17C498D46E4}"/>
+                <a16:creationId xmlns:a16="http://schemas.microsoft.com/office/drawing/2014/main" id="{E527A363-AD12-2DE5-0C06-A339DCF7B670}"/>
               </a:ext>
             </a:extLst>
           </p:cNvPr>
@@ -2411,7 +2411,7 @@
           <p:cNvPr id="7" name="슬라이드 번호 개체 틀 6">
             <a:extLst>
               <a:ext uri="{FF2B5EF4-FFF2-40B4-BE49-F238E27FC236}">
-                <a16:creationId xmlns:a16="http://schemas.microsoft.com/office/drawing/2014/main" id="{736AF75B-D3F7-84BD-F325-6BC338A137FA}"/>
+                <a16:creationId xmlns:a16="http://schemas.microsoft.com/office/drawing/2014/main" id="{E469BF96-0D10-7877-F693-90CB5AE80354}"/>
               </a:ext>
             </a:extLst>
           </p:cNvPr>
@@ -2427,7 +2427,7 @@
           <a:bodyPr/>
           <a:lstStyle/>
           <a:p>
-            <a:fld id="{7094CA29-903E-416B-B4F8-08BD32F466F4}" type="slidenum">
+            <a:fld id="{3E112018-4EAF-4625-828D-E07EF995F25C}" type="slidenum">
               <a:rPr lang="ko-KR" altLang="en-US" smtClean="0"/>
               <a:t>‹#›</a:t>
             </a:fld>
@@ -2438,7 +2438,7 @@
     </p:spTree>
     <p:extLst>
       <p:ext uri="{BB962C8B-B14F-4D97-AF65-F5344CB8AC3E}">
-        <p14:creationId xmlns:p14="http://schemas.microsoft.com/office/powerpoint/2010/main" val="1319946233"/>
+        <p14:creationId xmlns:p14="http://schemas.microsoft.com/office/powerpoint/2010/main" val="2117940219"/>
       </p:ext>
     </p:extLst>
   </p:cSld>
@@ -2470,7 +2470,7 @@
           <p:cNvPr id="2" name="제목 1">
             <a:extLst>
               <a:ext uri="{FF2B5EF4-FFF2-40B4-BE49-F238E27FC236}">
-                <a16:creationId xmlns:a16="http://schemas.microsoft.com/office/drawing/2014/main" id="{BDD887D1-45D0-9D96-0400-42A1C9EE57D6}"/>
+                <a16:creationId xmlns:a16="http://schemas.microsoft.com/office/drawing/2014/main" id="{86C7B8FF-EA3F-A8E8-48C5-3C0E4DD375E0}"/>
               </a:ext>
             </a:extLst>
           </p:cNvPr>
@@ -2507,7 +2507,7 @@
           <p:cNvPr id="3" name="그림 개체 틀 2">
             <a:extLst>
               <a:ext uri="{FF2B5EF4-FFF2-40B4-BE49-F238E27FC236}">
-                <a16:creationId xmlns:a16="http://schemas.microsoft.com/office/drawing/2014/main" id="{F49A134A-107D-8331-3BA6-CF5CAE980A50}"/>
+                <a16:creationId xmlns:a16="http://schemas.microsoft.com/office/drawing/2014/main" id="{51E41B57-6D3A-A550-56F6-5F1170353E30}"/>
               </a:ext>
             </a:extLst>
           </p:cNvPr>
@@ -2574,7 +2574,7 @@
           <p:cNvPr id="4" name="텍스트 개체 틀 3">
             <a:extLst>
               <a:ext uri="{FF2B5EF4-FFF2-40B4-BE49-F238E27FC236}">
-                <a16:creationId xmlns:a16="http://schemas.microsoft.com/office/drawing/2014/main" id="{DD0F53F6-8421-9A16-E747-C358D858F518}"/>
+                <a16:creationId xmlns:a16="http://schemas.microsoft.com/office/drawing/2014/main" id="{8AEA1615-36C6-7D8D-9588-31459DD78992}"/>
               </a:ext>
             </a:extLst>
           </p:cNvPr>
@@ -2645,7 +2645,7 @@
           <p:cNvPr id="5" name="날짜 개체 틀 4">
             <a:extLst>
               <a:ext uri="{FF2B5EF4-FFF2-40B4-BE49-F238E27FC236}">
-                <a16:creationId xmlns:a16="http://schemas.microsoft.com/office/drawing/2014/main" id="{818AF3FF-0D1B-EF54-A81E-1B224D2A4748}"/>
+                <a16:creationId xmlns:a16="http://schemas.microsoft.com/office/drawing/2014/main" id="{AFCA2991-D36D-A01E-6155-3D6B0CA4D67E}"/>
               </a:ext>
             </a:extLst>
           </p:cNvPr>
@@ -2661,9 +2661,9 @@
           <a:bodyPr/>
           <a:lstStyle/>
           <a:p>
-            <a:fld id="{49C3E51C-15A2-46D9-AFCB-7CCC968858FD}" type="datetimeFigureOut">
+            <a:fld id="{EF81D23E-FA8B-4A2A-A9C1-6AC8F5F16A51}" type="datetimeFigureOut">
               <a:rPr lang="ko-KR" altLang="en-US" smtClean="0"/>
-              <a:t>2026-06-25</a:t>
+              <a:t>2026-06-27</a:t>
             </a:fld>
             <a:endParaRPr lang="ko-KR" altLang="en-US"/>
           </a:p>
@@ -2674,7 +2674,7 @@
           <p:cNvPr id="6" name="바닥글 개체 틀 5">
             <a:extLst>
               <a:ext uri="{FF2B5EF4-FFF2-40B4-BE49-F238E27FC236}">
-                <a16:creationId xmlns:a16="http://schemas.microsoft.com/office/drawing/2014/main" id="{107AA806-6266-5903-D961-0B4CA3D4F5A4}"/>
+                <a16:creationId xmlns:a16="http://schemas.microsoft.com/office/drawing/2014/main" id="{1CE320C2-93D4-E3BF-B1D3-76293628A1A0}"/>
               </a:ext>
             </a:extLst>
           </p:cNvPr>
@@ -2699,7 +2699,7 @@
           <p:cNvPr id="7" name="슬라이드 번호 개체 틀 6">
             <a:extLst>
               <a:ext uri="{FF2B5EF4-FFF2-40B4-BE49-F238E27FC236}">
-                <a16:creationId xmlns:a16="http://schemas.microsoft.com/office/drawing/2014/main" id="{87C0D7B0-D0BE-3B8B-D490-7D09E48A10F0}"/>
+                <a16:creationId xmlns:a16="http://schemas.microsoft.com/office/drawing/2014/main" id="{DC223B85-3E5F-FC1D-A6A5-6EAB008C0251}"/>
               </a:ext>
             </a:extLst>
           </p:cNvPr>
@@ -2715,7 +2715,7 @@
           <a:bodyPr/>
           <a:lstStyle/>
           <a:p>
-            <a:fld id="{7094CA29-903E-416B-B4F8-08BD32F466F4}" type="slidenum">
+            <a:fld id="{3E112018-4EAF-4625-828D-E07EF995F25C}" type="slidenum">
               <a:rPr lang="ko-KR" altLang="en-US" smtClean="0"/>
               <a:t>‹#›</a:t>
             </a:fld>
@@ -2726,7 +2726,7 @@
     </p:spTree>
     <p:extLst>
       <p:ext uri="{BB962C8B-B14F-4D97-AF65-F5344CB8AC3E}">
-        <p14:creationId xmlns:p14="http://schemas.microsoft.com/office/powerpoint/2010/main" val="4191599011"/>
+        <p14:creationId xmlns:p14="http://schemas.microsoft.com/office/powerpoint/2010/main" val="3149372579"/>
       </p:ext>
     </p:extLst>
   </p:cSld>
@@ -2763,7 +2763,7 @@
           <p:cNvPr id="2" name="제목 개체 틀 1">
             <a:extLst>
               <a:ext uri="{FF2B5EF4-FFF2-40B4-BE49-F238E27FC236}">
-                <a16:creationId xmlns:a16="http://schemas.microsoft.com/office/drawing/2014/main" id="{DD634A5C-8207-B4B7-FB30-F05CD53C4384}"/>
+                <a16:creationId xmlns:a16="http://schemas.microsoft.com/office/drawing/2014/main" id="{E90006CC-A9C3-B765-078B-9D63690E8277}"/>
               </a:ext>
             </a:extLst>
           </p:cNvPr>
@@ -2801,7 +2801,7 @@
           <p:cNvPr id="3" name="텍스트 개체 틀 2">
             <a:extLst>
               <a:ext uri="{FF2B5EF4-FFF2-40B4-BE49-F238E27FC236}">
-                <a16:creationId xmlns:a16="http://schemas.microsoft.com/office/drawing/2014/main" id="{F42C8923-4B78-94CB-9C90-44B76859E05D}"/>
+                <a16:creationId xmlns:a16="http://schemas.microsoft.com/office/drawing/2014/main" id="{9C4BD4D0-611F-70A2-5696-9059EED647C9}"/>
               </a:ext>
             </a:extLst>
           </p:cNvPr>
@@ -2868,7 +2868,7 @@
           <p:cNvPr id="4" name="날짜 개체 틀 3">
             <a:extLst>
               <a:ext uri="{FF2B5EF4-FFF2-40B4-BE49-F238E27FC236}">
-                <a16:creationId xmlns:a16="http://schemas.microsoft.com/office/drawing/2014/main" id="{165A624D-AB15-D6B9-FEC2-7AF91C4ED02D}"/>
+                <a16:creationId xmlns:a16="http://schemas.microsoft.com/office/drawing/2014/main" id="{3D1B1C8C-1D53-D68D-2524-8646301E09F4}"/>
               </a:ext>
             </a:extLst>
           </p:cNvPr>
@@ -2902,9 +2902,9 @@
             </a:lvl1pPr>
           </a:lstStyle>
           <a:p>
-            <a:fld id="{49C3E51C-15A2-46D9-AFCB-7CCC968858FD}" type="datetimeFigureOut">
+            <a:fld id="{EF81D23E-FA8B-4A2A-A9C1-6AC8F5F16A51}" type="datetimeFigureOut">
               <a:rPr lang="ko-KR" altLang="en-US" smtClean="0"/>
-              <a:t>2026-06-25</a:t>
+              <a:t>2026-06-27</a:t>
             </a:fld>
             <a:endParaRPr lang="ko-KR" altLang="en-US"/>
           </a:p>
@@ -2915,7 +2915,7 @@
           <p:cNvPr id="5" name="바닥글 개체 틀 4">
             <a:extLst>
               <a:ext uri="{FF2B5EF4-FFF2-40B4-BE49-F238E27FC236}">
-                <a16:creationId xmlns:a16="http://schemas.microsoft.com/office/drawing/2014/main" id="{716F8357-C609-2CB1-1C44-F0EB98887FE3}"/>
+                <a16:creationId xmlns:a16="http://schemas.microsoft.com/office/drawing/2014/main" id="{BB90E443-7125-3FC2-07B9-DD07C1CDAC26}"/>
               </a:ext>
             </a:extLst>
           </p:cNvPr>
@@ -2958,7 +2958,7 @@
           <p:cNvPr id="6" name="슬라이드 번호 개체 틀 5">
             <a:extLst>
               <a:ext uri="{FF2B5EF4-FFF2-40B4-BE49-F238E27FC236}">
-                <a16:creationId xmlns:a16="http://schemas.microsoft.com/office/drawing/2014/main" id="{61F4647B-344A-5110-8623-CACCF423B3D1}"/>
+                <a16:creationId xmlns:a16="http://schemas.microsoft.com/office/drawing/2014/main" id="{52E46644-92D6-21A9-5CF6-972B844227C0}"/>
               </a:ext>
             </a:extLst>
           </p:cNvPr>
@@ -2992,7 +2992,7 @@
             </a:lvl1pPr>
           </a:lstStyle>
           <a:p>
-            <a:fld id="{7094CA29-903E-416B-B4F8-08BD32F466F4}" type="slidenum">
+            <a:fld id="{3E112018-4EAF-4625-828D-E07EF995F25C}" type="slidenum">
               <a:rPr lang="ko-KR" altLang="en-US" smtClean="0"/>
               <a:t>‹#›</a:t>
             </a:fld>
@@ -3003,7 +3003,7 @@
     </p:spTree>
     <p:extLst>
       <p:ext uri="{BB962C8B-B14F-4D97-AF65-F5344CB8AC3E}">
-        <p14:creationId xmlns:p14="http://schemas.microsoft.com/office/powerpoint/2010/main" val="463513639"/>
+        <p14:creationId xmlns:p14="http://schemas.microsoft.com/office/powerpoint/2010/main" val="4269070726"/>
       </p:ext>
     </p:extLst>
   </p:cSld>
@@ -3326,7 +3326,7 @@
           <p:cNvPr id="3" name="그래픽 2">
             <a:extLst>
               <a:ext uri="{FF2B5EF4-FFF2-40B4-BE49-F238E27FC236}">
-                <a16:creationId xmlns:a16="http://schemas.microsoft.com/office/drawing/2014/main" id="{092EACE3-BA2E-3732-602F-DD70C12C3135}"/>
+                <a16:creationId xmlns:a16="http://schemas.microsoft.com/office/drawing/2014/main" id="{CA5B8855-530C-03E5-5F64-3E52E4FC1CC1}"/>
               </a:ext>
             </a:extLst>
           </p:cNvPr>
@@ -3360,7 +3360,7 @@
     </p:spTree>
     <p:extLst>
       <p:ext uri="{BB962C8B-B14F-4D97-AF65-F5344CB8AC3E}">
-        <p14:creationId xmlns:p14="http://schemas.microsoft.com/office/powerpoint/2010/main" val="2810120878"/>
+        <p14:creationId xmlns:p14="http://schemas.microsoft.com/office/powerpoint/2010/main" val="4065316703"/>
       </p:ext>
     </p:extLst>
   </p:cSld>
